--- a/docs/slides/def1.pptx
+++ b/docs/slides/def1.pptx
@@ -14,6 +14,7 @@
     <p:sldId id="260" r:id="rId8"/>
     <p:sldId id="261" r:id="rId9"/>
     <p:sldId id="262" r:id="rId10"/>
+    <p:sldId id="265" r:id="rId11"/>
   </p:sldIdLst>
   <p:sldSz cx="12192000" cy="6858000"/>
   <p:notesSz cx="6858000" cy="9144000"/>
@@ -9173,7 +9174,7 @@
           <a:p>
             <a:fld id="{3E30469F-474B-44E0-9013-119402DD7996}" type="datetimeFigureOut">
               <a:rPr lang="en-NL" smtClean="0"/>
-              <a:t>21/02/2026</a:t>
+              <a:t>23/02/2026</a:t>
             </a:fld>
             <a:endParaRPr lang="en-NL"/>
           </a:p>
@@ -10268,7 +10269,7 @@
           <a:p>
             <a:fld id="{3E30469F-474B-44E0-9013-119402DD7996}" type="datetimeFigureOut">
               <a:rPr lang="en-NL" smtClean="0"/>
-              <a:t>21/02/2026</a:t>
+              <a:t>23/02/2026</a:t>
             </a:fld>
             <a:endParaRPr lang="en-NL"/>
           </a:p>
@@ -11248,7 +11249,7 @@
           <a:p>
             <a:fld id="{3E30469F-474B-44E0-9013-119402DD7996}" type="datetimeFigureOut">
               <a:rPr lang="en-NL" smtClean="0"/>
-              <a:t>21/02/2026</a:t>
+              <a:t>23/02/2026</a:t>
             </a:fld>
             <a:endParaRPr lang="en-NL"/>
           </a:p>
@@ -12382,7 +12383,7 @@
           <a:p>
             <a:fld id="{3E30469F-474B-44E0-9013-119402DD7996}" type="datetimeFigureOut">
               <a:rPr lang="en-NL" smtClean="0"/>
-              <a:t>21/02/2026</a:t>
+              <a:t>23/02/2026</a:t>
             </a:fld>
             <a:endParaRPr lang="en-NL"/>
           </a:p>
@@ -13415,7 +13416,7 @@
           <a:p>
             <a:fld id="{3E30469F-474B-44E0-9013-119402DD7996}" type="datetimeFigureOut">
               <a:rPr lang="en-NL" smtClean="0"/>
-              <a:t>21/02/2026</a:t>
+              <a:t>23/02/2026</a:t>
             </a:fld>
             <a:endParaRPr lang="en-NL"/>
           </a:p>
@@ -14075,7 +14076,7 @@
           <a:p>
             <a:fld id="{3E30469F-474B-44E0-9013-119402DD7996}" type="datetimeFigureOut">
               <a:rPr lang="en-NL" smtClean="0"/>
-              <a:t>21/02/2026</a:t>
+              <a:t>23/02/2026</a:t>
             </a:fld>
             <a:endParaRPr lang="en-NL"/>
           </a:p>
@@ -14936,7 +14937,7 @@
           <a:p>
             <a:fld id="{3E30469F-474B-44E0-9013-119402DD7996}" type="datetimeFigureOut">
               <a:rPr lang="en-NL" smtClean="0"/>
-              <a:t>21/02/2026</a:t>
+              <a:t>23/02/2026</a:t>
             </a:fld>
             <a:endParaRPr lang="en-NL"/>
           </a:p>
@@ -15126,7 +15127,7 @@
           <a:p>
             <a:fld id="{3E30469F-474B-44E0-9013-119402DD7996}" type="datetimeFigureOut">
               <a:rPr lang="en-NL" smtClean="0"/>
-              <a:t>21/02/2026</a:t>
+              <a:t>23/02/2026</a:t>
             </a:fld>
             <a:endParaRPr lang="en-NL"/>
           </a:p>
@@ -16098,7 +16099,7 @@
           <a:p>
             <a:fld id="{3E30469F-474B-44E0-9013-119402DD7996}" type="datetimeFigureOut">
               <a:rPr lang="en-NL" smtClean="0"/>
-              <a:t>21/02/2026</a:t>
+              <a:t>23/02/2026</a:t>
             </a:fld>
             <a:endParaRPr lang="en-NL"/>
           </a:p>
@@ -16309,7 +16310,7 @@
           <a:p>
             <a:fld id="{3E30469F-474B-44E0-9013-119402DD7996}" type="datetimeFigureOut">
               <a:rPr lang="en-NL" smtClean="0"/>
-              <a:t>21/02/2026</a:t>
+              <a:t>23/02/2026</a:t>
             </a:fld>
             <a:endParaRPr lang="en-NL"/>
           </a:p>
@@ -17343,7 +17344,7 @@
           <a:p>
             <a:fld id="{3E30469F-474B-44E0-9013-119402DD7996}" type="datetimeFigureOut">
               <a:rPr lang="en-NL" smtClean="0"/>
-              <a:t>21/02/2026</a:t>
+              <a:t>23/02/2026</a:t>
             </a:fld>
             <a:endParaRPr lang="en-NL"/>
           </a:p>
@@ -17615,7 +17616,7 @@
           <a:p>
             <a:fld id="{3E30469F-474B-44E0-9013-119402DD7996}" type="datetimeFigureOut">
               <a:rPr lang="en-NL" smtClean="0"/>
-              <a:t>21/02/2026</a:t>
+              <a:t>23/02/2026</a:t>
             </a:fld>
             <a:endParaRPr lang="en-NL"/>
           </a:p>
@@ -18025,7 +18026,7 @@
           <a:p>
             <a:fld id="{3E30469F-474B-44E0-9013-119402DD7996}" type="datetimeFigureOut">
               <a:rPr lang="en-NL" smtClean="0"/>
-              <a:t>21/02/2026</a:t>
+              <a:t>23/02/2026</a:t>
             </a:fld>
             <a:endParaRPr lang="en-NL"/>
           </a:p>
@@ -18152,7 +18153,7 @@
           <a:p>
             <a:fld id="{3E30469F-474B-44E0-9013-119402DD7996}" type="datetimeFigureOut">
               <a:rPr lang="en-NL" smtClean="0"/>
-              <a:t>21/02/2026</a:t>
+              <a:t>23/02/2026</a:t>
             </a:fld>
             <a:endParaRPr lang="en-NL"/>
           </a:p>
@@ -18247,7 +18248,7 @@
           <a:p>
             <a:fld id="{3E30469F-474B-44E0-9013-119402DD7996}" type="datetimeFigureOut">
               <a:rPr lang="en-NL" smtClean="0"/>
-              <a:t>21/02/2026</a:t>
+              <a:t>23/02/2026</a:t>
             </a:fld>
             <a:endParaRPr lang="en-NL"/>
           </a:p>
@@ -19328,7 +19329,7 @@
           <a:p>
             <a:fld id="{3E30469F-474B-44E0-9013-119402DD7996}" type="datetimeFigureOut">
               <a:rPr lang="en-NL" smtClean="0"/>
-              <a:t>21/02/2026</a:t>
+              <a:t>23/02/2026</a:t>
             </a:fld>
             <a:endParaRPr lang="en-NL"/>
           </a:p>
@@ -20436,7 +20437,7 @@
           <a:p>
             <a:fld id="{3E30469F-474B-44E0-9013-119402DD7996}" type="datetimeFigureOut">
               <a:rPr lang="en-NL" smtClean="0"/>
-              <a:t>21/02/2026</a:t>
+              <a:t>23/02/2026</a:t>
             </a:fld>
             <a:endParaRPr lang="en-NL"/>
           </a:p>
@@ -21496,7 +21497,7 @@
           <a:p>
             <a:fld id="{3E30469F-474B-44E0-9013-119402DD7996}" type="datetimeFigureOut">
               <a:rPr lang="en-NL" smtClean="0"/>
-              <a:t>21/02/2026</a:t>
+              <a:t>23/02/2026</a:t>
             </a:fld>
             <a:endParaRPr lang="en-NL"/>
           </a:p>
@@ -22164,6 +22165,90 @@
     <p:extLst>
       <p:ext uri="{BB962C8B-B14F-4D97-AF65-F5344CB8AC3E}">
         <p14:creationId xmlns:p14="http://schemas.microsoft.com/office/powerpoint/2010/main" val="3455864067"/>
+      </p:ext>
+    </p:extLst>
+  </p:cSld>
+  <p:clrMapOvr>
+    <a:masterClrMapping/>
+  </p:clrMapOvr>
+</p:sld>
+</file>
+
+<file path=ppt/slides/slide10.xml><?xml version="1.0" encoding="utf-8"?>
+<p:sld xmlns:a="http://schemas.openxmlformats.org/drawingml/2006/main" xmlns:r="http://schemas.openxmlformats.org/officeDocument/2006/relationships" xmlns:p="http://schemas.openxmlformats.org/presentationml/2006/main">
+  <p:cSld>
+    <p:spTree>
+      <p:nvGrpSpPr>
+        <p:cNvPr id="1" name=""/>
+        <p:cNvGrpSpPr/>
+        <p:nvPr/>
+      </p:nvGrpSpPr>
+      <p:grpSpPr>
+        <a:xfrm>
+          <a:off x="0" y="0"/>
+          <a:ext cx="0" cy="0"/>
+          <a:chOff x="0" y="0"/>
+          <a:chExt cx="0" cy="0"/>
+        </a:xfrm>
+      </p:grpSpPr>
+      <p:sp>
+        <p:nvSpPr>
+          <p:cNvPr id="2" name="Title 1">
+            <a:extLst>
+              <a:ext uri="{FF2B5EF4-FFF2-40B4-BE49-F238E27FC236}">
+                <a16:creationId xmlns:a16="http://schemas.microsoft.com/office/drawing/2014/main" id="{71A0E760-2C4C-850E-B41F-5ABE7C392222}"/>
+              </a:ext>
+            </a:extLst>
+          </p:cNvPr>
+          <p:cNvSpPr>
+            <a:spLocks noGrp="1"/>
+          </p:cNvSpPr>
+          <p:nvPr>
+            <p:ph type="title"/>
+          </p:nvPr>
+        </p:nvSpPr>
+        <p:spPr/>
+        <p:txBody>
+          <a:bodyPr/>
+          <a:lstStyle/>
+          <a:p>
+            <a:r>
+              <a:rPr lang="en-US" dirty="0"/>
+              <a:t>Future</a:t>
+            </a:r>
+            <a:endParaRPr lang="en-NL" dirty="0"/>
+          </a:p>
+        </p:txBody>
+      </p:sp>
+      <p:sp>
+        <p:nvSpPr>
+          <p:cNvPr id="3" name="Content Placeholder 2">
+            <a:extLst>
+              <a:ext uri="{FF2B5EF4-FFF2-40B4-BE49-F238E27FC236}">
+                <a16:creationId xmlns:a16="http://schemas.microsoft.com/office/drawing/2014/main" id="{557E02B4-15A9-AA4C-6998-FB05601E23DF}"/>
+              </a:ext>
+            </a:extLst>
+          </p:cNvPr>
+          <p:cNvSpPr>
+            <a:spLocks noGrp="1"/>
+          </p:cNvSpPr>
+          <p:nvPr>
+            <p:ph idx="1"/>
+          </p:nvPr>
+        </p:nvSpPr>
+        <p:spPr/>
+        <p:txBody>
+          <a:bodyPr/>
+          <a:lstStyle/>
+          <a:p>
+            <a:endParaRPr lang="en-NL"/>
+          </a:p>
+        </p:txBody>
+      </p:sp>
+    </p:spTree>
+    <p:extLst>
+      <p:ext uri="{BB962C8B-B14F-4D97-AF65-F5344CB8AC3E}">
+        <p14:creationId xmlns:p14="http://schemas.microsoft.com/office/powerpoint/2010/main" val="4078133730"/>
       </p:ext>
     </p:extLst>
   </p:cSld>

--- a/docs/slides/def1.pptx
+++ b/docs/slides/def1.pptx
@@ -10,11 +10,14 @@
     <p:sldId id="264" r:id="rId4"/>
     <p:sldId id="259" r:id="rId5"/>
     <p:sldId id="257" r:id="rId6"/>
-    <p:sldId id="263" r:id="rId7"/>
-    <p:sldId id="260" r:id="rId8"/>
-    <p:sldId id="261" r:id="rId9"/>
-    <p:sldId id="262" r:id="rId10"/>
-    <p:sldId id="265" r:id="rId11"/>
+    <p:sldId id="267" r:id="rId7"/>
+    <p:sldId id="266" r:id="rId8"/>
+    <p:sldId id="263" r:id="rId9"/>
+    <p:sldId id="260" r:id="rId10"/>
+    <p:sldId id="268" r:id="rId11"/>
+    <p:sldId id="261" r:id="rId12"/>
+    <p:sldId id="262" r:id="rId13"/>
+    <p:sldId id="265" r:id="rId14"/>
   </p:sldIdLst>
   <p:sldSz cx="12192000" cy="6858000"/>
   <p:notesSz cx="6858000" cy="9144000"/>
@@ -1616,6 +1619,753 @@
 </file>
 
 <file path=ppt/diagrams/colors3.xml><?xml version="1.0" encoding="utf-8"?>
+<dgm:colorsDef xmlns:dgm="http://schemas.openxmlformats.org/drawingml/2006/diagram" xmlns:a="http://schemas.openxmlformats.org/drawingml/2006/main" uniqueId="urn:microsoft.com/office/officeart/2005/8/colors/accent1_2">
+  <dgm:title val=""/>
+  <dgm:desc val=""/>
+  <dgm:catLst>
+    <dgm:cat type="accent1" pri="11200"/>
+  </dgm:catLst>
+  <dgm:styleLbl name="node0">
+    <dgm:fillClrLst meth="repeat">
+      <a:schemeClr val="accent1"/>
+    </dgm:fillClrLst>
+    <dgm:linClrLst meth="repeat">
+      <a:schemeClr val="lt1"/>
+    </dgm:linClrLst>
+    <dgm:effectClrLst/>
+    <dgm:txLinClrLst/>
+    <dgm:txFillClrLst/>
+    <dgm:txEffectClrLst/>
+  </dgm:styleLbl>
+  <dgm:styleLbl name="alignNode1">
+    <dgm:fillClrLst meth="repeat">
+      <a:schemeClr val="accent1"/>
+    </dgm:fillClrLst>
+    <dgm:linClrLst meth="repeat">
+      <a:schemeClr val="accent1"/>
+    </dgm:linClrLst>
+    <dgm:effectClrLst/>
+    <dgm:txLinClrLst/>
+    <dgm:txFillClrLst/>
+    <dgm:txEffectClrLst/>
+  </dgm:styleLbl>
+  <dgm:styleLbl name="node1">
+    <dgm:fillClrLst meth="repeat">
+      <a:schemeClr val="accent1"/>
+    </dgm:fillClrLst>
+    <dgm:linClrLst meth="repeat">
+      <a:schemeClr val="lt1"/>
+    </dgm:linClrLst>
+    <dgm:effectClrLst/>
+    <dgm:txLinClrLst/>
+    <dgm:txFillClrLst/>
+    <dgm:txEffectClrLst/>
+  </dgm:styleLbl>
+  <dgm:styleLbl name="lnNode1">
+    <dgm:fillClrLst meth="repeat">
+      <a:schemeClr val="accent1"/>
+    </dgm:fillClrLst>
+    <dgm:linClrLst meth="repeat">
+      <a:schemeClr val="lt1"/>
+    </dgm:linClrLst>
+    <dgm:effectClrLst/>
+    <dgm:txLinClrLst/>
+    <dgm:txFillClrLst/>
+    <dgm:txEffectClrLst/>
+  </dgm:styleLbl>
+  <dgm:styleLbl name="vennNode1">
+    <dgm:fillClrLst meth="repeat">
+      <a:schemeClr val="accent1">
+        <a:alpha val="50000"/>
+      </a:schemeClr>
+    </dgm:fillClrLst>
+    <dgm:linClrLst meth="repeat">
+      <a:schemeClr val="lt1"/>
+    </dgm:linClrLst>
+    <dgm:effectClrLst/>
+    <dgm:txLinClrLst/>
+    <dgm:txFillClrLst/>
+    <dgm:txEffectClrLst/>
+  </dgm:styleLbl>
+  <dgm:styleLbl name="node2">
+    <dgm:fillClrLst meth="repeat">
+      <a:schemeClr val="accent1"/>
+    </dgm:fillClrLst>
+    <dgm:linClrLst meth="repeat">
+      <a:schemeClr val="lt1"/>
+    </dgm:linClrLst>
+    <dgm:effectClrLst/>
+    <dgm:txLinClrLst/>
+    <dgm:txFillClrLst/>
+    <dgm:txEffectClrLst/>
+  </dgm:styleLbl>
+  <dgm:styleLbl name="node3">
+    <dgm:fillClrLst meth="repeat">
+      <a:schemeClr val="accent1"/>
+    </dgm:fillClrLst>
+    <dgm:linClrLst meth="repeat">
+      <a:schemeClr val="lt1"/>
+    </dgm:linClrLst>
+    <dgm:effectClrLst/>
+    <dgm:txLinClrLst/>
+    <dgm:txFillClrLst/>
+    <dgm:txEffectClrLst/>
+  </dgm:styleLbl>
+  <dgm:styleLbl name="node4">
+    <dgm:fillClrLst meth="repeat">
+      <a:schemeClr val="accent1"/>
+    </dgm:fillClrLst>
+    <dgm:linClrLst meth="repeat">
+      <a:schemeClr val="lt1"/>
+    </dgm:linClrLst>
+    <dgm:effectClrLst/>
+    <dgm:txLinClrLst/>
+    <dgm:txFillClrLst/>
+    <dgm:txEffectClrLst/>
+  </dgm:styleLbl>
+  <dgm:styleLbl name="fgImgPlace1">
+    <dgm:fillClrLst meth="repeat">
+      <a:schemeClr val="accent1">
+        <a:tint val="50000"/>
+      </a:schemeClr>
+    </dgm:fillClrLst>
+    <dgm:linClrLst meth="repeat">
+      <a:schemeClr val="lt1"/>
+    </dgm:linClrLst>
+    <dgm:effectClrLst/>
+    <dgm:txLinClrLst/>
+    <dgm:txFillClrLst meth="repeat">
+      <a:schemeClr val="lt1"/>
+    </dgm:txFillClrLst>
+    <dgm:txEffectClrLst/>
+  </dgm:styleLbl>
+  <dgm:styleLbl name="alignImgPlace1">
+    <dgm:fillClrLst meth="repeat">
+      <a:schemeClr val="accent1">
+        <a:tint val="50000"/>
+      </a:schemeClr>
+    </dgm:fillClrLst>
+    <dgm:linClrLst meth="repeat">
+      <a:schemeClr val="lt1"/>
+    </dgm:linClrLst>
+    <dgm:effectClrLst/>
+    <dgm:txLinClrLst/>
+    <dgm:txFillClrLst meth="repeat">
+      <a:schemeClr val="lt1"/>
+    </dgm:txFillClrLst>
+    <dgm:txEffectClrLst/>
+  </dgm:styleLbl>
+  <dgm:styleLbl name="bgImgPlace1">
+    <dgm:fillClrLst meth="repeat">
+      <a:schemeClr val="accent1">
+        <a:tint val="50000"/>
+      </a:schemeClr>
+    </dgm:fillClrLst>
+    <dgm:linClrLst meth="repeat">
+      <a:schemeClr val="lt1"/>
+    </dgm:linClrLst>
+    <dgm:effectClrLst/>
+    <dgm:txLinClrLst/>
+    <dgm:txFillClrLst meth="repeat">
+      <a:schemeClr val="lt1"/>
+    </dgm:txFillClrLst>
+    <dgm:txEffectClrLst/>
+  </dgm:styleLbl>
+  <dgm:styleLbl name="sibTrans2D1">
+    <dgm:fillClrLst meth="repeat">
+      <a:schemeClr val="accent1">
+        <a:tint val="60000"/>
+      </a:schemeClr>
+    </dgm:fillClrLst>
+    <dgm:linClrLst meth="repeat">
+      <a:schemeClr val="accent1">
+        <a:tint val="60000"/>
+      </a:schemeClr>
+    </dgm:linClrLst>
+    <dgm:effectClrLst/>
+    <dgm:txLinClrLst/>
+    <dgm:txFillClrLst/>
+    <dgm:txEffectClrLst/>
+  </dgm:styleLbl>
+  <dgm:styleLbl name="fgSibTrans2D1">
+    <dgm:fillClrLst meth="repeat">
+      <a:schemeClr val="accent1">
+        <a:tint val="60000"/>
+      </a:schemeClr>
+    </dgm:fillClrLst>
+    <dgm:linClrLst meth="repeat">
+      <a:schemeClr val="accent1">
+        <a:tint val="60000"/>
+      </a:schemeClr>
+    </dgm:linClrLst>
+    <dgm:effectClrLst/>
+    <dgm:txLinClrLst/>
+    <dgm:txFillClrLst/>
+    <dgm:txEffectClrLst/>
+  </dgm:styleLbl>
+  <dgm:styleLbl name="bgSibTrans2D1">
+    <dgm:fillClrLst meth="repeat">
+      <a:schemeClr val="accent1">
+        <a:tint val="60000"/>
+      </a:schemeClr>
+    </dgm:fillClrLst>
+    <dgm:linClrLst meth="repeat">
+      <a:schemeClr val="accent1">
+        <a:tint val="60000"/>
+      </a:schemeClr>
+    </dgm:linClrLst>
+    <dgm:effectClrLst/>
+    <dgm:txLinClrLst/>
+    <dgm:txFillClrLst/>
+    <dgm:txEffectClrLst/>
+  </dgm:styleLbl>
+  <dgm:styleLbl name="sibTrans1D1">
+    <dgm:fillClrLst meth="repeat">
+      <a:schemeClr val="accent1"/>
+    </dgm:fillClrLst>
+    <dgm:linClrLst meth="repeat">
+      <a:schemeClr val="accent1"/>
+    </dgm:linClrLst>
+    <dgm:effectClrLst/>
+    <dgm:txLinClrLst/>
+    <dgm:txFillClrLst meth="repeat">
+      <a:schemeClr val="tx1"/>
+    </dgm:txFillClrLst>
+    <dgm:txEffectClrLst/>
+  </dgm:styleLbl>
+  <dgm:styleLbl name="callout">
+    <dgm:fillClrLst meth="repeat">
+      <a:schemeClr val="accent1"/>
+    </dgm:fillClrLst>
+    <dgm:linClrLst meth="repeat">
+      <a:schemeClr val="accent1">
+        <a:tint val="50000"/>
+      </a:schemeClr>
+    </dgm:linClrLst>
+    <dgm:effectClrLst/>
+    <dgm:txLinClrLst/>
+    <dgm:txFillClrLst meth="repeat">
+      <a:schemeClr val="tx1"/>
+    </dgm:txFillClrLst>
+    <dgm:txEffectClrLst/>
+  </dgm:styleLbl>
+  <dgm:styleLbl name="asst0">
+    <dgm:fillClrLst meth="repeat">
+      <a:schemeClr val="accent1"/>
+    </dgm:fillClrLst>
+    <dgm:linClrLst meth="repeat">
+      <a:schemeClr val="lt1"/>
+    </dgm:linClrLst>
+    <dgm:effectClrLst/>
+    <dgm:txLinClrLst/>
+    <dgm:txFillClrLst/>
+    <dgm:txEffectClrLst/>
+  </dgm:styleLbl>
+  <dgm:styleLbl name="asst1">
+    <dgm:fillClrLst meth="repeat">
+      <a:schemeClr val="accent1"/>
+    </dgm:fillClrLst>
+    <dgm:linClrLst meth="repeat">
+      <a:schemeClr val="lt1"/>
+    </dgm:linClrLst>
+    <dgm:effectClrLst/>
+    <dgm:txLinClrLst/>
+    <dgm:txFillClrLst/>
+    <dgm:txEffectClrLst/>
+  </dgm:styleLbl>
+  <dgm:styleLbl name="asst2">
+    <dgm:fillClrLst meth="repeat">
+      <a:schemeClr val="accent1"/>
+    </dgm:fillClrLst>
+    <dgm:linClrLst meth="repeat">
+      <a:schemeClr val="lt1"/>
+    </dgm:linClrLst>
+    <dgm:effectClrLst/>
+    <dgm:txLinClrLst/>
+    <dgm:txFillClrLst/>
+    <dgm:txEffectClrLst/>
+  </dgm:styleLbl>
+  <dgm:styleLbl name="asst3">
+    <dgm:fillClrLst meth="repeat">
+      <a:schemeClr val="accent1"/>
+    </dgm:fillClrLst>
+    <dgm:linClrLst meth="repeat">
+      <a:schemeClr val="lt1"/>
+    </dgm:linClrLst>
+    <dgm:effectClrLst/>
+    <dgm:txLinClrLst/>
+    <dgm:txFillClrLst/>
+    <dgm:txEffectClrLst/>
+  </dgm:styleLbl>
+  <dgm:styleLbl name="asst4">
+    <dgm:fillClrLst meth="repeat">
+      <a:schemeClr val="accent1"/>
+    </dgm:fillClrLst>
+    <dgm:linClrLst meth="repeat">
+      <a:schemeClr val="lt1"/>
+    </dgm:linClrLst>
+    <dgm:effectClrLst/>
+    <dgm:txLinClrLst/>
+    <dgm:txFillClrLst/>
+    <dgm:txEffectClrLst/>
+  </dgm:styleLbl>
+  <dgm:styleLbl name="parChTrans2D1">
+    <dgm:fillClrLst meth="repeat">
+      <a:schemeClr val="accent1">
+        <a:tint val="60000"/>
+      </a:schemeClr>
+    </dgm:fillClrLst>
+    <dgm:linClrLst meth="repeat">
+      <a:schemeClr val="accent1">
+        <a:tint val="60000"/>
+      </a:schemeClr>
+    </dgm:linClrLst>
+    <dgm:effectClrLst/>
+    <dgm:txLinClrLst/>
+    <dgm:txFillClrLst meth="repeat">
+      <a:schemeClr val="lt1"/>
+    </dgm:txFillClrLst>
+    <dgm:txEffectClrLst/>
+  </dgm:styleLbl>
+  <dgm:styleLbl name="parChTrans2D2">
+    <dgm:fillClrLst meth="repeat">
+      <a:schemeClr val="accent1"/>
+    </dgm:fillClrLst>
+    <dgm:linClrLst meth="repeat">
+      <a:schemeClr val="accent1"/>
+    </dgm:linClrLst>
+    <dgm:effectClrLst/>
+    <dgm:txLinClrLst/>
+    <dgm:txFillClrLst meth="repeat">
+      <a:schemeClr val="lt1"/>
+    </dgm:txFillClrLst>
+    <dgm:txEffectClrLst/>
+  </dgm:styleLbl>
+  <dgm:styleLbl name="parChTrans2D3">
+    <dgm:fillClrLst meth="repeat">
+      <a:schemeClr val="accent1"/>
+    </dgm:fillClrLst>
+    <dgm:linClrLst meth="repeat">
+      <a:schemeClr val="accent1"/>
+    </dgm:linClrLst>
+    <dgm:effectClrLst/>
+    <dgm:txLinClrLst/>
+    <dgm:txFillClrLst meth="repeat">
+      <a:schemeClr val="lt1"/>
+    </dgm:txFillClrLst>
+    <dgm:txEffectClrLst/>
+  </dgm:styleLbl>
+  <dgm:styleLbl name="parChTrans2D4">
+    <dgm:fillClrLst meth="repeat">
+      <a:schemeClr val="accent1"/>
+    </dgm:fillClrLst>
+    <dgm:linClrLst meth="repeat">
+      <a:schemeClr val="accent1"/>
+    </dgm:linClrLst>
+    <dgm:effectClrLst/>
+    <dgm:txLinClrLst/>
+    <dgm:txFillClrLst meth="repeat">
+      <a:schemeClr val="lt1"/>
+    </dgm:txFillClrLst>
+    <dgm:txEffectClrLst/>
+  </dgm:styleLbl>
+  <dgm:styleLbl name="parChTrans1D1">
+    <dgm:fillClrLst meth="repeat">
+      <a:schemeClr val="accent1"/>
+    </dgm:fillClrLst>
+    <dgm:linClrLst meth="repeat">
+      <a:schemeClr val="accent1">
+        <a:shade val="60000"/>
+      </a:schemeClr>
+    </dgm:linClrLst>
+    <dgm:effectClrLst/>
+    <dgm:txLinClrLst/>
+    <dgm:txFillClrLst meth="repeat">
+      <a:schemeClr val="tx1"/>
+    </dgm:txFillClrLst>
+    <dgm:txEffectClrLst/>
+  </dgm:styleLbl>
+  <dgm:styleLbl name="parChTrans1D2">
+    <dgm:fillClrLst meth="repeat">
+      <a:schemeClr val="accent1"/>
+    </dgm:fillClrLst>
+    <dgm:linClrLst meth="repeat">
+      <a:schemeClr val="accent1">
+        <a:shade val="60000"/>
+      </a:schemeClr>
+    </dgm:linClrLst>
+    <dgm:effectClrLst/>
+    <dgm:txLinClrLst/>
+    <dgm:txFillClrLst meth="repeat">
+      <a:schemeClr val="tx1"/>
+    </dgm:txFillClrLst>
+    <dgm:txEffectClrLst/>
+  </dgm:styleLbl>
+  <dgm:styleLbl name="parChTrans1D3">
+    <dgm:fillClrLst meth="repeat">
+      <a:schemeClr val="accent1"/>
+    </dgm:fillClrLst>
+    <dgm:linClrLst meth="repeat">
+      <a:schemeClr val="accent1">
+        <a:shade val="80000"/>
+      </a:schemeClr>
+    </dgm:linClrLst>
+    <dgm:effectClrLst/>
+    <dgm:txLinClrLst/>
+    <dgm:txFillClrLst meth="repeat">
+      <a:schemeClr val="tx1"/>
+    </dgm:txFillClrLst>
+    <dgm:txEffectClrLst/>
+  </dgm:styleLbl>
+  <dgm:styleLbl name="parChTrans1D4">
+    <dgm:fillClrLst meth="repeat">
+      <a:schemeClr val="accent1"/>
+    </dgm:fillClrLst>
+    <dgm:linClrLst meth="repeat">
+      <a:schemeClr val="accent1">
+        <a:shade val="80000"/>
+      </a:schemeClr>
+    </dgm:linClrLst>
+    <dgm:effectClrLst/>
+    <dgm:txLinClrLst/>
+    <dgm:txFillClrLst meth="repeat">
+      <a:schemeClr val="tx1"/>
+    </dgm:txFillClrLst>
+    <dgm:txEffectClrLst/>
+  </dgm:styleLbl>
+  <dgm:styleLbl name="fgAcc1">
+    <dgm:fillClrLst meth="repeat">
+      <a:schemeClr val="lt1">
+        <a:alpha val="90000"/>
+      </a:schemeClr>
+    </dgm:fillClrLst>
+    <dgm:linClrLst meth="repeat">
+      <a:schemeClr val="accent1"/>
+    </dgm:linClrLst>
+    <dgm:effectClrLst/>
+    <dgm:txLinClrLst/>
+    <dgm:txFillClrLst meth="repeat">
+      <a:schemeClr val="dk1"/>
+    </dgm:txFillClrLst>
+    <dgm:txEffectClrLst/>
+  </dgm:styleLbl>
+  <dgm:styleLbl name="conFgAcc1">
+    <dgm:fillClrLst meth="repeat">
+      <a:schemeClr val="lt1">
+        <a:alpha val="90000"/>
+      </a:schemeClr>
+    </dgm:fillClrLst>
+    <dgm:linClrLst meth="repeat">
+      <a:schemeClr val="accent1"/>
+    </dgm:linClrLst>
+    <dgm:effectClrLst/>
+    <dgm:txLinClrLst/>
+    <dgm:txFillClrLst meth="repeat">
+      <a:schemeClr val="dk1"/>
+    </dgm:txFillClrLst>
+    <dgm:txEffectClrLst/>
+  </dgm:styleLbl>
+  <dgm:styleLbl name="alignAcc1">
+    <dgm:fillClrLst meth="repeat">
+      <a:schemeClr val="lt1">
+        <a:alpha val="90000"/>
+      </a:schemeClr>
+    </dgm:fillClrLst>
+    <dgm:linClrLst meth="repeat">
+      <a:schemeClr val="accent1"/>
+    </dgm:linClrLst>
+    <dgm:effectClrLst/>
+    <dgm:txLinClrLst/>
+    <dgm:txFillClrLst meth="repeat">
+      <a:schemeClr val="dk1"/>
+    </dgm:txFillClrLst>
+    <dgm:txEffectClrLst/>
+  </dgm:styleLbl>
+  <dgm:styleLbl name="trAlignAcc1">
+    <dgm:fillClrLst meth="repeat">
+      <a:schemeClr val="lt1">
+        <a:alpha val="40000"/>
+      </a:schemeClr>
+    </dgm:fillClrLst>
+    <dgm:linClrLst meth="repeat">
+      <a:schemeClr val="accent1"/>
+    </dgm:linClrLst>
+    <dgm:effectClrLst/>
+    <dgm:txLinClrLst/>
+    <dgm:txFillClrLst meth="repeat">
+      <a:schemeClr val="dk1"/>
+    </dgm:txFillClrLst>
+    <dgm:txEffectClrLst/>
+  </dgm:styleLbl>
+  <dgm:styleLbl name="bgAcc1">
+    <dgm:fillClrLst meth="repeat">
+      <a:schemeClr val="lt1">
+        <a:alpha val="90000"/>
+      </a:schemeClr>
+    </dgm:fillClrLst>
+    <dgm:linClrLst meth="repeat">
+      <a:schemeClr val="accent1"/>
+    </dgm:linClrLst>
+    <dgm:effectClrLst/>
+    <dgm:txLinClrLst/>
+    <dgm:txFillClrLst meth="repeat">
+      <a:schemeClr val="dk1"/>
+    </dgm:txFillClrLst>
+    <dgm:txEffectClrLst/>
+  </dgm:styleLbl>
+  <dgm:styleLbl name="solidFgAcc1">
+    <dgm:fillClrLst meth="repeat">
+      <a:schemeClr val="lt1"/>
+    </dgm:fillClrLst>
+    <dgm:linClrLst meth="repeat">
+      <a:schemeClr val="accent1"/>
+    </dgm:linClrLst>
+    <dgm:effectClrLst/>
+    <dgm:txLinClrLst/>
+    <dgm:txFillClrLst meth="repeat">
+      <a:schemeClr val="dk1"/>
+    </dgm:txFillClrLst>
+    <dgm:txEffectClrLst/>
+  </dgm:styleLbl>
+  <dgm:styleLbl name="solidAlignAcc1">
+    <dgm:fillClrLst meth="repeat">
+      <a:schemeClr val="lt1"/>
+    </dgm:fillClrLst>
+    <dgm:linClrLst meth="repeat">
+      <a:schemeClr val="accent1"/>
+    </dgm:linClrLst>
+    <dgm:effectClrLst/>
+    <dgm:txLinClrLst/>
+    <dgm:txFillClrLst meth="repeat">
+      <a:schemeClr val="dk1"/>
+    </dgm:txFillClrLst>
+    <dgm:txEffectClrLst/>
+  </dgm:styleLbl>
+  <dgm:styleLbl name="solidBgAcc1">
+    <dgm:fillClrLst meth="repeat">
+      <a:schemeClr val="lt1"/>
+    </dgm:fillClrLst>
+    <dgm:linClrLst meth="repeat">
+      <a:schemeClr val="accent1"/>
+    </dgm:linClrLst>
+    <dgm:effectClrLst/>
+    <dgm:txLinClrLst/>
+    <dgm:txFillClrLst meth="repeat">
+      <a:schemeClr val="dk1"/>
+    </dgm:txFillClrLst>
+    <dgm:txEffectClrLst/>
+  </dgm:styleLbl>
+  <dgm:styleLbl name="fgAccFollowNode1">
+    <dgm:fillClrLst meth="repeat">
+      <a:schemeClr val="accent1">
+        <a:alpha val="90000"/>
+        <a:tint val="40000"/>
+      </a:schemeClr>
+    </dgm:fillClrLst>
+    <dgm:linClrLst meth="repeat">
+      <a:schemeClr val="accent1">
+        <a:alpha val="90000"/>
+        <a:tint val="40000"/>
+      </a:schemeClr>
+    </dgm:linClrLst>
+    <dgm:effectClrLst/>
+    <dgm:txLinClrLst/>
+    <dgm:txFillClrLst meth="repeat">
+      <a:schemeClr val="dk1"/>
+    </dgm:txFillClrLst>
+    <dgm:txEffectClrLst/>
+  </dgm:styleLbl>
+  <dgm:styleLbl name="alignAccFollowNode1">
+    <dgm:fillClrLst meth="repeat">
+      <a:schemeClr val="accent1">
+        <a:alpha val="90000"/>
+        <a:tint val="40000"/>
+      </a:schemeClr>
+    </dgm:fillClrLst>
+    <dgm:linClrLst meth="repeat">
+      <a:schemeClr val="accent1">
+        <a:alpha val="90000"/>
+        <a:tint val="40000"/>
+      </a:schemeClr>
+    </dgm:linClrLst>
+    <dgm:effectClrLst/>
+    <dgm:txLinClrLst/>
+    <dgm:txFillClrLst meth="repeat">
+      <a:schemeClr val="dk1"/>
+    </dgm:txFillClrLst>
+    <dgm:txEffectClrLst/>
+  </dgm:styleLbl>
+  <dgm:styleLbl name="bgAccFollowNode1">
+    <dgm:fillClrLst meth="repeat">
+      <a:schemeClr val="accent1">
+        <a:alpha val="90000"/>
+        <a:tint val="40000"/>
+      </a:schemeClr>
+    </dgm:fillClrLst>
+    <dgm:linClrLst meth="repeat">
+      <a:schemeClr val="accent1">
+        <a:alpha val="90000"/>
+        <a:tint val="40000"/>
+      </a:schemeClr>
+    </dgm:linClrLst>
+    <dgm:effectClrLst/>
+    <dgm:txLinClrLst/>
+    <dgm:txFillClrLst meth="repeat">
+      <a:schemeClr val="dk1"/>
+    </dgm:txFillClrLst>
+    <dgm:txEffectClrLst/>
+  </dgm:styleLbl>
+  <dgm:styleLbl name="fgAcc0">
+    <dgm:fillClrLst meth="repeat">
+      <a:schemeClr val="lt1">
+        <a:alpha val="90000"/>
+      </a:schemeClr>
+    </dgm:fillClrLst>
+    <dgm:linClrLst meth="repeat">
+      <a:schemeClr val="accent1"/>
+    </dgm:linClrLst>
+    <dgm:effectClrLst/>
+    <dgm:txLinClrLst/>
+    <dgm:txFillClrLst meth="repeat">
+      <a:schemeClr val="dk1"/>
+    </dgm:txFillClrLst>
+    <dgm:txEffectClrLst/>
+  </dgm:styleLbl>
+  <dgm:styleLbl name="fgAcc2">
+    <dgm:fillClrLst meth="repeat">
+      <a:schemeClr val="lt1">
+        <a:alpha val="90000"/>
+      </a:schemeClr>
+    </dgm:fillClrLst>
+    <dgm:linClrLst meth="repeat">
+      <a:schemeClr val="accent1"/>
+    </dgm:linClrLst>
+    <dgm:effectClrLst/>
+    <dgm:txLinClrLst/>
+    <dgm:txFillClrLst meth="repeat">
+      <a:schemeClr val="dk1"/>
+    </dgm:txFillClrLst>
+    <dgm:txEffectClrLst/>
+  </dgm:styleLbl>
+  <dgm:styleLbl name="fgAcc3">
+    <dgm:fillClrLst meth="repeat">
+      <a:schemeClr val="lt1">
+        <a:alpha val="90000"/>
+      </a:schemeClr>
+    </dgm:fillClrLst>
+    <dgm:linClrLst meth="repeat">
+      <a:schemeClr val="accent1"/>
+    </dgm:linClrLst>
+    <dgm:effectClrLst/>
+    <dgm:txLinClrLst/>
+    <dgm:txFillClrLst meth="repeat">
+      <a:schemeClr val="dk1"/>
+    </dgm:txFillClrLst>
+    <dgm:txEffectClrLst/>
+  </dgm:styleLbl>
+  <dgm:styleLbl name="fgAcc4">
+    <dgm:fillClrLst meth="repeat">
+      <a:schemeClr val="lt1">
+        <a:alpha val="90000"/>
+      </a:schemeClr>
+    </dgm:fillClrLst>
+    <dgm:linClrLst meth="repeat">
+      <a:schemeClr val="accent1"/>
+    </dgm:linClrLst>
+    <dgm:effectClrLst/>
+    <dgm:txLinClrLst/>
+    <dgm:txFillClrLst meth="repeat">
+      <a:schemeClr val="dk1"/>
+    </dgm:txFillClrLst>
+    <dgm:txEffectClrLst/>
+  </dgm:styleLbl>
+  <dgm:styleLbl name="bgShp">
+    <dgm:fillClrLst meth="repeat">
+      <a:schemeClr val="accent1">
+        <a:tint val="40000"/>
+      </a:schemeClr>
+    </dgm:fillClrLst>
+    <dgm:linClrLst meth="repeat">
+      <a:schemeClr val="accent1"/>
+    </dgm:linClrLst>
+    <dgm:effectClrLst/>
+    <dgm:txLinClrLst/>
+    <dgm:txFillClrLst meth="repeat">
+      <a:schemeClr val="dk1"/>
+    </dgm:txFillClrLst>
+    <dgm:txEffectClrLst/>
+  </dgm:styleLbl>
+  <dgm:styleLbl name="dkBgShp">
+    <dgm:fillClrLst meth="repeat">
+      <a:schemeClr val="accent1">
+        <a:shade val="80000"/>
+      </a:schemeClr>
+    </dgm:fillClrLst>
+    <dgm:linClrLst meth="repeat">
+      <a:schemeClr val="accent1"/>
+    </dgm:linClrLst>
+    <dgm:effectClrLst/>
+    <dgm:txLinClrLst/>
+    <dgm:txFillClrLst meth="repeat">
+      <a:schemeClr val="lt1"/>
+    </dgm:txFillClrLst>
+    <dgm:txEffectClrLst/>
+  </dgm:styleLbl>
+  <dgm:styleLbl name="trBgShp">
+    <dgm:fillClrLst meth="repeat">
+      <a:schemeClr val="accent1">
+        <a:tint val="50000"/>
+        <a:alpha val="40000"/>
+      </a:schemeClr>
+    </dgm:fillClrLst>
+    <dgm:linClrLst meth="repeat">
+      <a:schemeClr val="accent1"/>
+    </dgm:linClrLst>
+    <dgm:effectClrLst/>
+    <dgm:txLinClrLst/>
+    <dgm:txFillClrLst meth="repeat">
+      <a:schemeClr val="lt1"/>
+    </dgm:txFillClrLst>
+    <dgm:txEffectClrLst/>
+  </dgm:styleLbl>
+  <dgm:styleLbl name="fgShp">
+    <dgm:fillClrLst meth="repeat">
+      <a:schemeClr val="accent1">
+        <a:tint val="60000"/>
+      </a:schemeClr>
+    </dgm:fillClrLst>
+    <dgm:linClrLst meth="repeat">
+      <a:schemeClr val="lt1"/>
+    </dgm:linClrLst>
+    <dgm:effectClrLst/>
+    <dgm:txLinClrLst/>
+    <dgm:txFillClrLst meth="repeat">
+      <a:schemeClr val="dk1"/>
+    </dgm:txFillClrLst>
+    <dgm:txEffectClrLst/>
+  </dgm:styleLbl>
+  <dgm:styleLbl name="revTx">
+    <dgm:fillClrLst meth="repeat">
+      <a:schemeClr val="lt1">
+        <a:alpha val="0"/>
+      </a:schemeClr>
+    </dgm:fillClrLst>
+    <dgm:linClrLst meth="repeat">
+      <a:schemeClr val="dk1">
+        <a:alpha val="0"/>
+      </a:schemeClr>
+    </dgm:linClrLst>
+    <dgm:effectClrLst/>
+    <dgm:txLinClrLst/>
+    <dgm:txFillClrLst meth="repeat">
+      <a:schemeClr val="tx1"/>
+    </dgm:txFillClrLst>
+    <dgm:txEffectClrLst/>
+  </dgm:styleLbl>
+</dgm:colorsDef>
+</file>
+
+<file path=ppt/diagrams/colors4.xml><?xml version="1.0" encoding="utf-8"?>
 <dgm:colorsDef xmlns:dgm="http://schemas.openxmlformats.org/drawingml/2006/diagram" xmlns:a="http://schemas.openxmlformats.org/drawingml/2006/main" uniqueId="urn:microsoft.com/office/officeart/2005/8/colors/accent1_2">
   <dgm:title val=""/>
   <dgm:desc val=""/>
@@ -2596,7 +3346,7 @@
           </a:pPr>
           <a:r>
             <a:rPr lang="en-US" dirty="0"/>
-            <a:t>Execute your MUMPS code remotely using multiple languages</a:t>
+            <a:t>Execute your MUMPS code remotely from multiple languages</a:t>
           </a:r>
         </a:p>
       </dgm:t>
@@ -2667,7 +3417,7 @@
           </a:pPr>
           <a:r>
             <a:rPr lang="en-US" dirty="0"/>
-            <a:t>Soon Java, Go and .NET drivers</a:t>
+            <a:t>Soon Java, Go and .NET drivers will be available</a:t>
           </a:r>
         </a:p>
       </dgm:t>
@@ -3253,6 +4003,353 @@
 </file>
 
 <file path=ppt/diagrams/data3.xml><?xml version="1.0" encoding="utf-8"?>
+<dgm:dataModel xmlns:dgm="http://schemas.openxmlformats.org/drawingml/2006/diagram" xmlns:a="http://schemas.openxmlformats.org/drawingml/2006/main">
+  <dgm:ptLst>
+    <dgm:pt modelId="{06F0D2AA-5727-47E4-885B-0AD7C69408FC}" type="doc">
+      <dgm:prSet loTypeId="urn:microsoft.com/office/officeart/2009/3/layout/IncreasingArrowsProcess" loCatId="process" qsTypeId="urn:microsoft.com/office/officeart/2005/8/quickstyle/simple1" qsCatId="simple" csTypeId="urn:microsoft.com/office/officeart/2005/8/colors/accent1_2" csCatId="accent1" phldr="1"/>
+      <dgm:spPr/>
+      <dgm:t>
+        <a:bodyPr/>
+        <a:lstStyle/>
+        <a:p>
+          <a:endParaRPr lang="en-NL"/>
+        </a:p>
+      </dgm:t>
+    </dgm:pt>
+    <dgm:pt modelId="{9CB5A71A-0CED-471E-A2E8-29F4D481FAEA}">
+      <dgm:prSet phldrT="[Text]"/>
+      <dgm:spPr/>
+      <dgm:t>
+        <a:bodyPr/>
+        <a:lstStyle/>
+        <a:p>
+          <a:r>
+            <a:rPr lang="en-US" dirty="0"/>
+            <a:t>DESCRIBE</a:t>
+          </a:r>
+          <a:endParaRPr lang="en-NL" dirty="0"/>
+        </a:p>
+      </dgm:t>
+    </dgm:pt>
+    <dgm:pt modelId="{FBACFB23-C58D-4779-B739-6842A01D4026}" type="parTrans" cxnId="{047E2F73-5612-4C2A-8B14-DCF661A7E1D3}">
+      <dgm:prSet/>
+      <dgm:spPr/>
+      <dgm:t>
+        <a:bodyPr/>
+        <a:lstStyle/>
+        <a:p>
+          <a:endParaRPr lang="en-NL"/>
+        </a:p>
+      </dgm:t>
+    </dgm:pt>
+    <dgm:pt modelId="{14C68E61-B304-4EB7-A8E3-AD04A07138C0}" type="sibTrans" cxnId="{047E2F73-5612-4C2A-8B14-DCF661A7E1D3}">
+      <dgm:prSet/>
+      <dgm:spPr/>
+      <dgm:t>
+        <a:bodyPr/>
+        <a:lstStyle/>
+        <a:p>
+          <a:endParaRPr lang="en-NL"/>
+        </a:p>
+      </dgm:t>
+    </dgm:pt>
+    <dgm:pt modelId="{4344EF75-7F9E-4CEC-88BE-5267E73F6C26}">
+      <dgm:prSet phldrT="[Text]" phldr="0"/>
+      <dgm:spPr/>
+      <dgm:t>
+        <a:bodyPr/>
+        <a:lstStyle/>
+        <a:p>
+          <a:r>
+            <a:rPr lang="en-US" dirty="0"/>
+            <a:t>Describe your method in a JSON file and restart the Mind server</a:t>
+          </a:r>
+          <a:endParaRPr lang="en-NL" dirty="0"/>
+        </a:p>
+      </dgm:t>
+    </dgm:pt>
+    <dgm:pt modelId="{4761A776-83AC-45F9-B980-CCF47FB439A6}" type="parTrans" cxnId="{21736EC6-DF9E-4812-8885-8F99A279210D}">
+      <dgm:prSet/>
+      <dgm:spPr/>
+      <dgm:t>
+        <a:bodyPr/>
+        <a:lstStyle/>
+        <a:p>
+          <a:endParaRPr lang="en-NL"/>
+        </a:p>
+      </dgm:t>
+    </dgm:pt>
+    <dgm:pt modelId="{2A1533C5-0809-4C32-A6A6-C3A810138ECE}" type="sibTrans" cxnId="{21736EC6-DF9E-4812-8885-8F99A279210D}">
+      <dgm:prSet/>
+      <dgm:spPr/>
+      <dgm:t>
+        <a:bodyPr/>
+        <a:lstStyle/>
+        <a:p>
+          <a:endParaRPr lang="en-NL"/>
+        </a:p>
+      </dgm:t>
+    </dgm:pt>
+    <dgm:pt modelId="{928B3A8B-099C-4245-81CD-ABCA14C50A5E}">
+      <dgm:prSet phldrT="[Text]" phldr="0"/>
+      <dgm:spPr/>
+      <dgm:t>
+        <a:bodyPr/>
+        <a:lstStyle/>
+        <a:p>
+          <a:r>
+            <a:rPr lang="en-US" dirty="0"/>
+            <a:t>CODE</a:t>
+          </a:r>
+          <a:endParaRPr lang="en-NL" dirty="0"/>
+        </a:p>
+      </dgm:t>
+    </dgm:pt>
+    <dgm:pt modelId="{B1AE77A9-9E35-43DD-8B99-95F9034E28E2}" type="parTrans" cxnId="{63928ABD-C46A-4BFE-9D2D-329F914A7672}">
+      <dgm:prSet/>
+      <dgm:spPr/>
+      <dgm:t>
+        <a:bodyPr/>
+        <a:lstStyle/>
+        <a:p>
+          <a:endParaRPr lang="en-NL"/>
+        </a:p>
+      </dgm:t>
+    </dgm:pt>
+    <dgm:pt modelId="{D46E7F58-DAE3-46EA-A7A3-D1FC271B400C}" type="sibTrans" cxnId="{63928ABD-C46A-4BFE-9D2D-329F914A7672}">
+      <dgm:prSet/>
+      <dgm:spPr/>
+      <dgm:t>
+        <a:bodyPr/>
+        <a:lstStyle/>
+        <a:p>
+          <a:endParaRPr lang="en-NL"/>
+        </a:p>
+      </dgm:t>
+    </dgm:pt>
+    <dgm:pt modelId="{DA319F0F-473C-4E9A-8E38-C39EA20CA45C}">
+      <dgm:prSet phldrT="[Text]" phldr="0"/>
+      <dgm:spPr/>
+      <dgm:t>
+        <a:bodyPr/>
+        <a:lstStyle/>
+        <a:p>
+          <a:r>
+            <a:rPr lang="en-US" dirty="0"/>
+            <a:t>Write M code, using our framework to read arguments and return formatted data</a:t>
+          </a:r>
+          <a:endParaRPr lang="en-NL" dirty="0"/>
+        </a:p>
+      </dgm:t>
+    </dgm:pt>
+    <dgm:pt modelId="{B6681FC6-732F-4940-AB00-A705160479F5}" type="parTrans" cxnId="{186410B0-56AA-485D-8661-966F58E6C0D9}">
+      <dgm:prSet/>
+      <dgm:spPr/>
+      <dgm:t>
+        <a:bodyPr/>
+        <a:lstStyle/>
+        <a:p>
+          <a:endParaRPr lang="en-NL"/>
+        </a:p>
+      </dgm:t>
+    </dgm:pt>
+    <dgm:pt modelId="{3288B630-77A4-4303-B46A-8295D57981F0}" type="sibTrans" cxnId="{186410B0-56AA-485D-8661-966F58E6C0D9}">
+      <dgm:prSet/>
+      <dgm:spPr/>
+      <dgm:t>
+        <a:bodyPr/>
+        <a:lstStyle/>
+        <a:p>
+          <a:endParaRPr lang="en-NL"/>
+        </a:p>
+      </dgm:t>
+    </dgm:pt>
+    <dgm:pt modelId="{028DA142-C92D-45B3-9714-986F7A2F73F8}">
+      <dgm:prSet phldrT="[Text]" phldr="0"/>
+      <dgm:spPr/>
+      <dgm:t>
+        <a:bodyPr/>
+        <a:lstStyle/>
+        <a:p>
+          <a:r>
+            <a:rPr lang="en-US" dirty="0"/>
+            <a:t>EXECUTE</a:t>
+          </a:r>
+          <a:endParaRPr lang="en-NL" dirty="0"/>
+        </a:p>
+      </dgm:t>
+    </dgm:pt>
+    <dgm:pt modelId="{0DE8F76B-0C5C-4DB5-94C2-BC83DB023453}" type="parTrans" cxnId="{0A6B94BF-4993-46D3-9476-5ABA78086C1D}">
+      <dgm:prSet/>
+      <dgm:spPr/>
+      <dgm:t>
+        <a:bodyPr/>
+        <a:lstStyle/>
+        <a:p>
+          <a:endParaRPr lang="en-NL"/>
+        </a:p>
+      </dgm:t>
+    </dgm:pt>
+    <dgm:pt modelId="{08E2E17B-C633-40F7-BF3F-903076414FB4}" type="sibTrans" cxnId="{0A6B94BF-4993-46D3-9476-5ABA78086C1D}">
+      <dgm:prSet/>
+      <dgm:spPr/>
+      <dgm:t>
+        <a:bodyPr/>
+        <a:lstStyle/>
+        <a:p>
+          <a:endParaRPr lang="en-NL"/>
+        </a:p>
+      </dgm:t>
+    </dgm:pt>
+    <dgm:pt modelId="{918F5F83-4066-4A9A-86C5-4CC17D51FEFC}">
+      <dgm:prSet phldrT="[Text]" phldr="0"/>
+      <dgm:spPr/>
+      <dgm:t>
+        <a:bodyPr/>
+        <a:lstStyle/>
+        <a:p>
+          <a:r>
+            <a:rPr lang="en-US" dirty="0"/>
+            <a:t>You can call the </a:t>
+          </a:r>
+          <a:r>
+            <a:rPr lang="en-US" dirty="0" err="1"/>
+            <a:t>mthod</a:t>
+          </a:r>
+          <a:r>
+            <a:rPr lang="en-US" dirty="0"/>
+            <a:t> right away, which will execute the M code and return data</a:t>
+          </a:r>
+          <a:endParaRPr lang="en-NL" dirty="0"/>
+        </a:p>
+      </dgm:t>
+    </dgm:pt>
+    <dgm:pt modelId="{436780E1-0300-4F9C-ABD2-5DD30867CFE3}" type="parTrans" cxnId="{06BA9528-8E45-45AE-BBD7-641E50D4EDC4}">
+      <dgm:prSet/>
+      <dgm:spPr/>
+      <dgm:t>
+        <a:bodyPr/>
+        <a:lstStyle/>
+        <a:p>
+          <a:endParaRPr lang="en-NL"/>
+        </a:p>
+      </dgm:t>
+    </dgm:pt>
+    <dgm:pt modelId="{7735AB31-62AB-4221-A127-FDD327E5F167}" type="sibTrans" cxnId="{06BA9528-8E45-45AE-BBD7-641E50D4EDC4}">
+      <dgm:prSet/>
+      <dgm:spPr/>
+      <dgm:t>
+        <a:bodyPr/>
+        <a:lstStyle/>
+        <a:p>
+          <a:endParaRPr lang="en-NL"/>
+        </a:p>
+      </dgm:t>
+    </dgm:pt>
+    <dgm:pt modelId="{42508249-CB23-4C29-BA91-0FBF4F3FC221}" type="pres">
+      <dgm:prSet presAssocID="{06F0D2AA-5727-47E4-885B-0AD7C69408FC}" presName="Name0" presStyleCnt="0">
+        <dgm:presLayoutVars>
+          <dgm:chMax val="5"/>
+          <dgm:chPref val="5"/>
+          <dgm:dir/>
+          <dgm:animLvl val="lvl"/>
+        </dgm:presLayoutVars>
+      </dgm:prSet>
+      <dgm:spPr/>
+    </dgm:pt>
+    <dgm:pt modelId="{24485D02-5A56-49DF-B637-A9A8AC67D4E6}" type="pres">
+      <dgm:prSet presAssocID="{9CB5A71A-0CED-471E-A2E8-29F4D481FAEA}" presName="parentText1" presStyleLbl="node1" presStyleIdx="0" presStyleCnt="3">
+        <dgm:presLayoutVars>
+          <dgm:chMax/>
+          <dgm:chPref val="3"/>
+          <dgm:bulletEnabled val="1"/>
+        </dgm:presLayoutVars>
+      </dgm:prSet>
+      <dgm:spPr/>
+    </dgm:pt>
+    <dgm:pt modelId="{973DC0CC-8304-4E03-87B5-BD1B67011B8C}" type="pres">
+      <dgm:prSet presAssocID="{9CB5A71A-0CED-471E-A2E8-29F4D481FAEA}" presName="childText1" presStyleLbl="solidAlignAcc1" presStyleIdx="0" presStyleCnt="3">
+        <dgm:presLayoutVars>
+          <dgm:chMax val="0"/>
+          <dgm:chPref val="0"/>
+          <dgm:bulletEnabled val="1"/>
+        </dgm:presLayoutVars>
+      </dgm:prSet>
+      <dgm:spPr/>
+    </dgm:pt>
+    <dgm:pt modelId="{88F0906B-9D1E-488A-B4C5-08CAAB191724}" type="pres">
+      <dgm:prSet presAssocID="{928B3A8B-099C-4245-81CD-ABCA14C50A5E}" presName="parentText2" presStyleLbl="node1" presStyleIdx="1" presStyleCnt="3">
+        <dgm:presLayoutVars>
+          <dgm:chMax/>
+          <dgm:chPref val="3"/>
+          <dgm:bulletEnabled val="1"/>
+        </dgm:presLayoutVars>
+      </dgm:prSet>
+      <dgm:spPr/>
+    </dgm:pt>
+    <dgm:pt modelId="{CF98FD1A-AABC-4833-9CC8-F5ECB925415E}" type="pres">
+      <dgm:prSet presAssocID="{928B3A8B-099C-4245-81CD-ABCA14C50A5E}" presName="childText2" presStyleLbl="solidAlignAcc1" presStyleIdx="1" presStyleCnt="3">
+        <dgm:presLayoutVars>
+          <dgm:chMax val="0"/>
+          <dgm:chPref val="0"/>
+          <dgm:bulletEnabled val="1"/>
+        </dgm:presLayoutVars>
+      </dgm:prSet>
+      <dgm:spPr/>
+    </dgm:pt>
+    <dgm:pt modelId="{F9AE15FA-8263-4E7F-B6DC-79DA0B2F7B75}" type="pres">
+      <dgm:prSet presAssocID="{028DA142-C92D-45B3-9714-986F7A2F73F8}" presName="parentText3" presStyleLbl="node1" presStyleIdx="2" presStyleCnt="3">
+        <dgm:presLayoutVars>
+          <dgm:chMax/>
+          <dgm:chPref val="3"/>
+          <dgm:bulletEnabled val="1"/>
+        </dgm:presLayoutVars>
+      </dgm:prSet>
+      <dgm:spPr/>
+    </dgm:pt>
+    <dgm:pt modelId="{A1C7FE50-A7A9-4DCF-9D2D-0D9BE2138934}" type="pres">
+      <dgm:prSet presAssocID="{028DA142-C92D-45B3-9714-986F7A2F73F8}" presName="childText3" presStyleLbl="solidAlignAcc1" presStyleIdx="2" presStyleCnt="3">
+        <dgm:presLayoutVars>
+          <dgm:chMax val="0"/>
+          <dgm:chPref val="0"/>
+          <dgm:bulletEnabled val="1"/>
+        </dgm:presLayoutVars>
+      </dgm:prSet>
+      <dgm:spPr/>
+    </dgm:pt>
+  </dgm:ptLst>
+  <dgm:cxnLst>
+    <dgm:cxn modelId="{06BA9528-8E45-45AE-BBD7-641E50D4EDC4}" srcId="{028DA142-C92D-45B3-9714-986F7A2F73F8}" destId="{918F5F83-4066-4A9A-86C5-4CC17D51FEFC}" srcOrd="0" destOrd="0" parTransId="{436780E1-0300-4F9C-ABD2-5DD30867CFE3}" sibTransId="{7735AB31-62AB-4221-A127-FDD327E5F167}"/>
+    <dgm:cxn modelId="{B43C454E-3E7D-418C-B0B3-46BB9188DC69}" type="presOf" srcId="{928B3A8B-099C-4245-81CD-ABCA14C50A5E}" destId="{88F0906B-9D1E-488A-B4C5-08CAAB191724}" srcOrd="0" destOrd="0" presId="urn:microsoft.com/office/officeart/2009/3/layout/IncreasingArrowsProcess"/>
+    <dgm:cxn modelId="{047E2F73-5612-4C2A-8B14-DCF661A7E1D3}" srcId="{06F0D2AA-5727-47E4-885B-0AD7C69408FC}" destId="{9CB5A71A-0CED-471E-A2E8-29F4D481FAEA}" srcOrd="0" destOrd="0" parTransId="{FBACFB23-C58D-4779-B739-6842A01D4026}" sibTransId="{14C68E61-B304-4EB7-A8E3-AD04A07138C0}"/>
+    <dgm:cxn modelId="{62229B98-8AE5-44B5-AEBD-C20099DE724D}" type="presOf" srcId="{9CB5A71A-0CED-471E-A2E8-29F4D481FAEA}" destId="{24485D02-5A56-49DF-B637-A9A8AC67D4E6}" srcOrd="0" destOrd="0" presId="urn:microsoft.com/office/officeart/2009/3/layout/IncreasingArrowsProcess"/>
+    <dgm:cxn modelId="{F747FAA5-AFF3-44E6-9D75-D457C0CFBAE4}" type="presOf" srcId="{028DA142-C92D-45B3-9714-986F7A2F73F8}" destId="{F9AE15FA-8263-4E7F-B6DC-79DA0B2F7B75}" srcOrd="0" destOrd="0" presId="urn:microsoft.com/office/officeart/2009/3/layout/IncreasingArrowsProcess"/>
+    <dgm:cxn modelId="{186410B0-56AA-485D-8661-966F58E6C0D9}" srcId="{928B3A8B-099C-4245-81CD-ABCA14C50A5E}" destId="{DA319F0F-473C-4E9A-8E38-C39EA20CA45C}" srcOrd="0" destOrd="0" parTransId="{B6681FC6-732F-4940-AB00-A705160479F5}" sibTransId="{3288B630-77A4-4303-B46A-8295D57981F0}"/>
+    <dgm:cxn modelId="{63928ABD-C46A-4BFE-9D2D-329F914A7672}" srcId="{06F0D2AA-5727-47E4-885B-0AD7C69408FC}" destId="{928B3A8B-099C-4245-81CD-ABCA14C50A5E}" srcOrd="1" destOrd="0" parTransId="{B1AE77A9-9E35-43DD-8B99-95F9034E28E2}" sibTransId="{D46E7F58-DAE3-46EA-A7A3-D1FC271B400C}"/>
+    <dgm:cxn modelId="{0A6B94BF-4993-46D3-9476-5ABA78086C1D}" srcId="{06F0D2AA-5727-47E4-885B-0AD7C69408FC}" destId="{028DA142-C92D-45B3-9714-986F7A2F73F8}" srcOrd="2" destOrd="0" parTransId="{0DE8F76B-0C5C-4DB5-94C2-BC83DB023453}" sibTransId="{08E2E17B-C633-40F7-BF3F-903076414FB4}"/>
+    <dgm:cxn modelId="{C4E538C3-BC2D-48D5-B1FC-EF63A807B039}" type="presOf" srcId="{918F5F83-4066-4A9A-86C5-4CC17D51FEFC}" destId="{A1C7FE50-A7A9-4DCF-9D2D-0D9BE2138934}" srcOrd="0" destOrd="0" presId="urn:microsoft.com/office/officeart/2009/3/layout/IncreasingArrowsProcess"/>
+    <dgm:cxn modelId="{21736EC6-DF9E-4812-8885-8F99A279210D}" srcId="{9CB5A71A-0CED-471E-A2E8-29F4D481FAEA}" destId="{4344EF75-7F9E-4CEC-88BE-5267E73F6C26}" srcOrd="0" destOrd="0" parTransId="{4761A776-83AC-45F9-B980-CCF47FB439A6}" sibTransId="{2A1533C5-0809-4C32-A6A6-C3A810138ECE}"/>
+    <dgm:cxn modelId="{7D0CCCCA-6063-4A99-BAE0-9C13FA6CE920}" type="presOf" srcId="{06F0D2AA-5727-47E4-885B-0AD7C69408FC}" destId="{42508249-CB23-4C29-BA91-0FBF4F3FC221}" srcOrd="0" destOrd="0" presId="urn:microsoft.com/office/officeart/2009/3/layout/IncreasingArrowsProcess"/>
+    <dgm:cxn modelId="{BD6A3ECB-5B1F-4E3D-9ACB-C3849EFBD1BD}" type="presOf" srcId="{DA319F0F-473C-4E9A-8E38-C39EA20CA45C}" destId="{CF98FD1A-AABC-4833-9CC8-F5ECB925415E}" srcOrd="0" destOrd="0" presId="urn:microsoft.com/office/officeart/2009/3/layout/IncreasingArrowsProcess"/>
+    <dgm:cxn modelId="{9D82A7E0-697A-492A-84CF-5FCD3D95668B}" type="presOf" srcId="{4344EF75-7F9E-4CEC-88BE-5267E73F6C26}" destId="{973DC0CC-8304-4E03-87B5-BD1B67011B8C}" srcOrd="0" destOrd="0" presId="urn:microsoft.com/office/officeart/2009/3/layout/IncreasingArrowsProcess"/>
+    <dgm:cxn modelId="{A2C66D86-7A02-46D8-BE80-55FED7C877FD}" type="presParOf" srcId="{42508249-CB23-4C29-BA91-0FBF4F3FC221}" destId="{24485D02-5A56-49DF-B637-A9A8AC67D4E6}" srcOrd="0" destOrd="0" presId="urn:microsoft.com/office/officeart/2009/3/layout/IncreasingArrowsProcess"/>
+    <dgm:cxn modelId="{697CC9F4-507C-4E3A-8FA6-5B31130609FD}" type="presParOf" srcId="{42508249-CB23-4C29-BA91-0FBF4F3FC221}" destId="{973DC0CC-8304-4E03-87B5-BD1B67011B8C}" srcOrd="1" destOrd="0" presId="urn:microsoft.com/office/officeart/2009/3/layout/IncreasingArrowsProcess"/>
+    <dgm:cxn modelId="{9D506BAC-8566-441F-A638-9325952BDAFC}" type="presParOf" srcId="{42508249-CB23-4C29-BA91-0FBF4F3FC221}" destId="{88F0906B-9D1E-488A-B4C5-08CAAB191724}" srcOrd="2" destOrd="0" presId="urn:microsoft.com/office/officeart/2009/3/layout/IncreasingArrowsProcess"/>
+    <dgm:cxn modelId="{E08349A5-0353-4C9E-91A6-357A61A8D518}" type="presParOf" srcId="{42508249-CB23-4C29-BA91-0FBF4F3FC221}" destId="{CF98FD1A-AABC-4833-9CC8-F5ECB925415E}" srcOrd="3" destOrd="0" presId="urn:microsoft.com/office/officeart/2009/3/layout/IncreasingArrowsProcess"/>
+    <dgm:cxn modelId="{A7BB57EB-A38D-4276-BCED-684F1223C668}" type="presParOf" srcId="{42508249-CB23-4C29-BA91-0FBF4F3FC221}" destId="{F9AE15FA-8263-4E7F-B6DC-79DA0B2F7B75}" srcOrd="4" destOrd="0" presId="urn:microsoft.com/office/officeart/2009/3/layout/IncreasingArrowsProcess"/>
+    <dgm:cxn modelId="{479950C8-AF5C-4106-992A-1C66634BB90B}" type="presParOf" srcId="{42508249-CB23-4C29-BA91-0FBF4F3FC221}" destId="{A1C7FE50-A7A9-4DCF-9D2D-0D9BE2138934}" srcOrd="5" destOrd="0" presId="urn:microsoft.com/office/officeart/2009/3/layout/IncreasingArrowsProcess"/>
+  </dgm:cxnLst>
+  <dgm:bg/>
+  <dgm:whole/>
+  <dgm:extLst>
+    <a:ext uri="http://schemas.microsoft.com/office/drawing/2008/diagram">
+      <dsp:dataModelExt xmlns:dsp="http://schemas.microsoft.com/office/drawing/2008/diagram" relId="rId6" minVer="http://schemas.openxmlformats.org/drawingml/2006/diagram"/>
+    </a:ext>
+  </dgm:extLst>
+</dgm:dataModel>
+</file>
+
+<file path=ppt/diagrams/data4.xml><?xml version="1.0" encoding="utf-8"?>
 <dgm:dataModel xmlns:dgm="http://schemas.openxmlformats.org/drawingml/2006/diagram" xmlns:a="http://schemas.openxmlformats.org/drawingml/2006/main">
   <dgm:ptLst>
     <dgm:pt modelId="{996C4E6A-2C60-4428-8C91-27910EF058EC}" type="doc">
@@ -4034,7 +5131,7 @@
           </a:pPr>
           <a:r>
             <a:rPr lang="en-US" sz="1800" kern="1200" dirty="0"/>
-            <a:t>Execute your MUMPS code remotely using multiple languages</a:t>
+            <a:t>Execute your MUMPS code remotely from multiple languages</a:t>
           </a:r>
         </a:p>
       </dsp:txBody>
@@ -4145,7 +5242,7 @@
           </a:pPr>
           <a:r>
             <a:rPr lang="en-US" sz="1400" kern="1200" dirty="0"/>
-            <a:t>Soon Java, Go and .NET drivers</a:t>
+            <a:t>Soon Java, Go and .NET drivers will be available</a:t>
           </a:r>
         </a:p>
       </dsp:txBody>
@@ -4607,6 +5704,497 @@
 </file>
 
 <file path=ppt/diagrams/drawing3.xml><?xml version="1.0" encoding="utf-8"?>
+<dsp:drawing xmlns:dgm="http://schemas.openxmlformats.org/drawingml/2006/diagram" xmlns:dsp="http://schemas.microsoft.com/office/drawing/2008/diagram" xmlns:a="http://schemas.openxmlformats.org/drawingml/2006/main">
+  <dsp:spTree>
+    <dsp:nvGrpSpPr>
+      <dsp:cNvPr id="0" name=""/>
+      <dsp:cNvGrpSpPr/>
+    </dsp:nvGrpSpPr>
+    <dsp:grpSpPr/>
+    <dsp:sp modelId="{24485D02-5A56-49DF-B637-A9A8AC67D4E6}">
+      <dsp:nvSpPr>
+        <dsp:cNvPr id="0" name=""/>
+        <dsp:cNvSpPr/>
+      </dsp:nvSpPr>
+      <dsp:spPr>
+        <a:xfrm>
+          <a:off x="460192" y="10229"/>
+          <a:ext cx="9095498" cy="1324651"/>
+        </a:xfrm>
+        <a:prstGeom prst="rightArrow">
+          <a:avLst>
+            <a:gd name="adj1" fmla="val 50000"/>
+            <a:gd name="adj2" fmla="val 50000"/>
+          </a:avLst>
+        </a:prstGeom>
+        <a:solidFill>
+          <a:schemeClr val="accent1">
+            <a:hueOff val="0"/>
+            <a:satOff val="0"/>
+            <a:lumOff val="0"/>
+            <a:alphaOff val="0"/>
+          </a:schemeClr>
+        </a:solidFill>
+        <a:ln w="19050" cap="rnd" cmpd="sng" algn="ctr">
+          <a:solidFill>
+            <a:schemeClr val="lt1">
+              <a:hueOff val="0"/>
+              <a:satOff val="0"/>
+              <a:lumOff val="0"/>
+              <a:alphaOff val="0"/>
+            </a:schemeClr>
+          </a:solidFill>
+          <a:prstDash val="solid"/>
+        </a:ln>
+        <a:effectLst/>
+      </dsp:spPr>
+      <dsp:style>
+        <a:lnRef idx="2">
+          <a:scrgbClr r="0" g="0" b="0"/>
+        </a:lnRef>
+        <a:fillRef idx="1">
+          <a:scrgbClr r="0" g="0" b="0"/>
+        </a:fillRef>
+        <a:effectRef idx="0">
+          <a:scrgbClr r="0" g="0" b="0"/>
+        </a:effectRef>
+        <a:fontRef idx="minor">
+          <a:schemeClr val="lt1"/>
+        </a:fontRef>
+      </dsp:style>
+      <dsp:txBody>
+        <a:bodyPr spcFirstLastPara="0" vert="horz" wrap="square" lIns="95250" tIns="95250" rIns="254000" bIns="210288" numCol="1" spcCol="1270" anchor="ctr" anchorCtr="0">
+          <a:noAutofit/>
+        </a:bodyPr>
+        <a:lstStyle/>
+        <a:p>
+          <a:pPr marL="0" lvl="0" indent="0" algn="l" defTabSz="1111250">
+            <a:lnSpc>
+              <a:spcPct val="90000"/>
+            </a:lnSpc>
+            <a:spcBef>
+              <a:spcPct val="0"/>
+            </a:spcBef>
+            <a:spcAft>
+              <a:spcPct val="35000"/>
+            </a:spcAft>
+            <a:buNone/>
+          </a:pPr>
+          <a:r>
+            <a:rPr lang="en-US" sz="2500" kern="1200" dirty="0"/>
+            <a:t>DESCRIBE</a:t>
+          </a:r>
+          <a:endParaRPr lang="en-NL" sz="2500" kern="1200" dirty="0"/>
+        </a:p>
+      </dsp:txBody>
+      <dsp:txXfrm>
+        <a:off x="460192" y="341392"/>
+        <a:ext cx="8764335" cy="662325"/>
+      </dsp:txXfrm>
+    </dsp:sp>
+    <dsp:sp modelId="{973DC0CC-8304-4E03-87B5-BD1B67011B8C}">
+      <dsp:nvSpPr>
+        <dsp:cNvPr id="0" name=""/>
+        <dsp:cNvSpPr/>
+      </dsp:nvSpPr>
+      <dsp:spPr>
+        <a:xfrm>
+          <a:off x="460192" y="1031726"/>
+          <a:ext cx="2801413" cy="2551765"/>
+        </a:xfrm>
+        <a:prstGeom prst="rect">
+          <a:avLst/>
+        </a:prstGeom>
+        <a:solidFill>
+          <a:schemeClr val="lt1">
+            <a:hueOff val="0"/>
+            <a:satOff val="0"/>
+            <a:lumOff val="0"/>
+            <a:alphaOff val="0"/>
+          </a:schemeClr>
+        </a:solidFill>
+        <a:ln w="19050" cap="rnd" cmpd="sng" algn="ctr">
+          <a:solidFill>
+            <a:schemeClr val="accent1">
+              <a:hueOff val="0"/>
+              <a:satOff val="0"/>
+              <a:lumOff val="0"/>
+              <a:alphaOff val="0"/>
+            </a:schemeClr>
+          </a:solidFill>
+          <a:prstDash val="solid"/>
+        </a:ln>
+        <a:effectLst/>
+      </dsp:spPr>
+      <dsp:style>
+        <a:lnRef idx="2">
+          <a:scrgbClr r="0" g="0" b="0"/>
+        </a:lnRef>
+        <a:fillRef idx="1">
+          <a:scrgbClr r="0" g="0" b="0"/>
+        </a:fillRef>
+        <a:effectRef idx="0">
+          <a:scrgbClr r="0" g="0" b="0"/>
+        </a:effectRef>
+        <a:fontRef idx="minor"/>
+      </dsp:style>
+      <dsp:txBody>
+        <a:bodyPr spcFirstLastPara="0" vert="horz" wrap="square" lIns="95250" tIns="95250" rIns="95250" bIns="95250" numCol="1" spcCol="1270" anchor="t" anchorCtr="0">
+          <a:noAutofit/>
+        </a:bodyPr>
+        <a:lstStyle/>
+        <a:p>
+          <a:pPr marL="0" lvl="0" indent="0" algn="l" defTabSz="1111250">
+            <a:lnSpc>
+              <a:spcPct val="90000"/>
+            </a:lnSpc>
+            <a:spcBef>
+              <a:spcPct val="0"/>
+            </a:spcBef>
+            <a:spcAft>
+              <a:spcPct val="35000"/>
+            </a:spcAft>
+            <a:buNone/>
+          </a:pPr>
+          <a:r>
+            <a:rPr lang="en-US" sz="2500" kern="1200" dirty="0"/>
+            <a:t>Describe your method in a JSON file and restart the Mind server</a:t>
+          </a:r>
+          <a:endParaRPr lang="en-NL" sz="2500" kern="1200" dirty="0"/>
+        </a:p>
+      </dsp:txBody>
+      <dsp:txXfrm>
+        <a:off x="460192" y="1031726"/>
+        <a:ext cx="2801413" cy="2551765"/>
+      </dsp:txXfrm>
+    </dsp:sp>
+    <dsp:sp modelId="{88F0906B-9D1E-488A-B4C5-08CAAB191724}">
+      <dsp:nvSpPr>
+        <dsp:cNvPr id="0" name=""/>
+        <dsp:cNvSpPr/>
+      </dsp:nvSpPr>
+      <dsp:spPr>
+        <a:xfrm>
+          <a:off x="3261605" y="451780"/>
+          <a:ext cx="6294084" cy="1324651"/>
+        </a:xfrm>
+        <a:prstGeom prst="rightArrow">
+          <a:avLst>
+            <a:gd name="adj1" fmla="val 50000"/>
+            <a:gd name="adj2" fmla="val 50000"/>
+          </a:avLst>
+        </a:prstGeom>
+        <a:solidFill>
+          <a:schemeClr val="accent1">
+            <a:hueOff val="0"/>
+            <a:satOff val="0"/>
+            <a:lumOff val="0"/>
+            <a:alphaOff val="0"/>
+          </a:schemeClr>
+        </a:solidFill>
+        <a:ln w="19050" cap="rnd" cmpd="sng" algn="ctr">
+          <a:solidFill>
+            <a:schemeClr val="lt1">
+              <a:hueOff val="0"/>
+              <a:satOff val="0"/>
+              <a:lumOff val="0"/>
+              <a:alphaOff val="0"/>
+            </a:schemeClr>
+          </a:solidFill>
+          <a:prstDash val="solid"/>
+        </a:ln>
+        <a:effectLst/>
+      </dsp:spPr>
+      <dsp:style>
+        <a:lnRef idx="2">
+          <a:scrgbClr r="0" g="0" b="0"/>
+        </a:lnRef>
+        <a:fillRef idx="1">
+          <a:scrgbClr r="0" g="0" b="0"/>
+        </a:fillRef>
+        <a:effectRef idx="0">
+          <a:scrgbClr r="0" g="0" b="0"/>
+        </a:effectRef>
+        <a:fontRef idx="minor">
+          <a:schemeClr val="lt1"/>
+        </a:fontRef>
+      </dsp:style>
+      <dsp:txBody>
+        <a:bodyPr spcFirstLastPara="0" vert="horz" wrap="square" lIns="95250" tIns="95250" rIns="254000" bIns="210288" numCol="1" spcCol="1270" anchor="ctr" anchorCtr="0">
+          <a:noAutofit/>
+        </a:bodyPr>
+        <a:lstStyle/>
+        <a:p>
+          <a:pPr marL="0" lvl="0" indent="0" algn="l" defTabSz="1111250">
+            <a:lnSpc>
+              <a:spcPct val="90000"/>
+            </a:lnSpc>
+            <a:spcBef>
+              <a:spcPct val="0"/>
+            </a:spcBef>
+            <a:spcAft>
+              <a:spcPct val="35000"/>
+            </a:spcAft>
+            <a:buNone/>
+          </a:pPr>
+          <a:r>
+            <a:rPr lang="en-US" sz="2500" kern="1200" dirty="0"/>
+            <a:t>CODE</a:t>
+          </a:r>
+          <a:endParaRPr lang="en-NL" sz="2500" kern="1200" dirty="0"/>
+        </a:p>
+      </dsp:txBody>
+      <dsp:txXfrm>
+        <a:off x="3261605" y="782943"/>
+        <a:ext cx="5962921" cy="662325"/>
+      </dsp:txXfrm>
+    </dsp:sp>
+    <dsp:sp modelId="{CF98FD1A-AABC-4833-9CC8-F5ECB925415E}">
+      <dsp:nvSpPr>
+        <dsp:cNvPr id="0" name=""/>
+        <dsp:cNvSpPr/>
+      </dsp:nvSpPr>
+      <dsp:spPr>
+        <a:xfrm>
+          <a:off x="3261605" y="1473277"/>
+          <a:ext cx="2801413" cy="2551765"/>
+        </a:xfrm>
+        <a:prstGeom prst="rect">
+          <a:avLst/>
+        </a:prstGeom>
+        <a:solidFill>
+          <a:schemeClr val="lt1">
+            <a:hueOff val="0"/>
+            <a:satOff val="0"/>
+            <a:lumOff val="0"/>
+            <a:alphaOff val="0"/>
+          </a:schemeClr>
+        </a:solidFill>
+        <a:ln w="19050" cap="rnd" cmpd="sng" algn="ctr">
+          <a:solidFill>
+            <a:schemeClr val="accent1">
+              <a:hueOff val="0"/>
+              <a:satOff val="0"/>
+              <a:lumOff val="0"/>
+              <a:alphaOff val="0"/>
+            </a:schemeClr>
+          </a:solidFill>
+          <a:prstDash val="solid"/>
+        </a:ln>
+        <a:effectLst/>
+      </dsp:spPr>
+      <dsp:style>
+        <a:lnRef idx="2">
+          <a:scrgbClr r="0" g="0" b="0"/>
+        </a:lnRef>
+        <a:fillRef idx="1">
+          <a:scrgbClr r="0" g="0" b="0"/>
+        </a:fillRef>
+        <a:effectRef idx="0">
+          <a:scrgbClr r="0" g="0" b="0"/>
+        </a:effectRef>
+        <a:fontRef idx="minor"/>
+      </dsp:style>
+      <dsp:txBody>
+        <a:bodyPr spcFirstLastPara="0" vert="horz" wrap="square" lIns="95250" tIns="95250" rIns="95250" bIns="95250" numCol="1" spcCol="1270" anchor="t" anchorCtr="0">
+          <a:noAutofit/>
+        </a:bodyPr>
+        <a:lstStyle/>
+        <a:p>
+          <a:pPr marL="0" lvl="0" indent="0" algn="l" defTabSz="1111250">
+            <a:lnSpc>
+              <a:spcPct val="90000"/>
+            </a:lnSpc>
+            <a:spcBef>
+              <a:spcPct val="0"/>
+            </a:spcBef>
+            <a:spcAft>
+              <a:spcPct val="35000"/>
+            </a:spcAft>
+            <a:buNone/>
+          </a:pPr>
+          <a:r>
+            <a:rPr lang="en-US" sz="2500" kern="1200" dirty="0"/>
+            <a:t>Write M code, using our framework to read arguments and return formatted data</a:t>
+          </a:r>
+          <a:endParaRPr lang="en-NL" sz="2500" kern="1200" dirty="0"/>
+        </a:p>
+      </dsp:txBody>
+      <dsp:txXfrm>
+        <a:off x="3261605" y="1473277"/>
+        <a:ext cx="2801413" cy="2551765"/>
+      </dsp:txXfrm>
+    </dsp:sp>
+    <dsp:sp modelId="{F9AE15FA-8263-4E7F-B6DC-79DA0B2F7B75}">
+      <dsp:nvSpPr>
+        <dsp:cNvPr id="0" name=""/>
+        <dsp:cNvSpPr/>
+      </dsp:nvSpPr>
+      <dsp:spPr>
+        <a:xfrm>
+          <a:off x="6063019" y="893330"/>
+          <a:ext cx="3492671" cy="1324651"/>
+        </a:xfrm>
+        <a:prstGeom prst="rightArrow">
+          <a:avLst>
+            <a:gd name="adj1" fmla="val 50000"/>
+            <a:gd name="adj2" fmla="val 50000"/>
+          </a:avLst>
+        </a:prstGeom>
+        <a:solidFill>
+          <a:schemeClr val="accent1">
+            <a:hueOff val="0"/>
+            <a:satOff val="0"/>
+            <a:lumOff val="0"/>
+            <a:alphaOff val="0"/>
+          </a:schemeClr>
+        </a:solidFill>
+        <a:ln w="19050" cap="rnd" cmpd="sng" algn="ctr">
+          <a:solidFill>
+            <a:schemeClr val="lt1">
+              <a:hueOff val="0"/>
+              <a:satOff val="0"/>
+              <a:lumOff val="0"/>
+              <a:alphaOff val="0"/>
+            </a:schemeClr>
+          </a:solidFill>
+          <a:prstDash val="solid"/>
+        </a:ln>
+        <a:effectLst/>
+      </dsp:spPr>
+      <dsp:style>
+        <a:lnRef idx="2">
+          <a:scrgbClr r="0" g="0" b="0"/>
+        </a:lnRef>
+        <a:fillRef idx="1">
+          <a:scrgbClr r="0" g="0" b="0"/>
+        </a:fillRef>
+        <a:effectRef idx="0">
+          <a:scrgbClr r="0" g="0" b="0"/>
+        </a:effectRef>
+        <a:fontRef idx="minor">
+          <a:schemeClr val="lt1"/>
+        </a:fontRef>
+      </dsp:style>
+      <dsp:txBody>
+        <a:bodyPr spcFirstLastPara="0" vert="horz" wrap="square" lIns="95250" tIns="95250" rIns="254000" bIns="210288" numCol="1" spcCol="1270" anchor="ctr" anchorCtr="0">
+          <a:noAutofit/>
+        </a:bodyPr>
+        <a:lstStyle/>
+        <a:p>
+          <a:pPr marL="0" lvl="0" indent="0" algn="l" defTabSz="1111250">
+            <a:lnSpc>
+              <a:spcPct val="90000"/>
+            </a:lnSpc>
+            <a:spcBef>
+              <a:spcPct val="0"/>
+            </a:spcBef>
+            <a:spcAft>
+              <a:spcPct val="35000"/>
+            </a:spcAft>
+            <a:buNone/>
+          </a:pPr>
+          <a:r>
+            <a:rPr lang="en-US" sz="2500" kern="1200" dirty="0"/>
+            <a:t>EXECUTE</a:t>
+          </a:r>
+          <a:endParaRPr lang="en-NL" sz="2500" kern="1200" dirty="0"/>
+        </a:p>
+      </dsp:txBody>
+      <dsp:txXfrm>
+        <a:off x="6063019" y="1224493"/>
+        <a:ext cx="3161508" cy="662325"/>
+      </dsp:txXfrm>
+    </dsp:sp>
+    <dsp:sp modelId="{A1C7FE50-A7A9-4DCF-9D2D-0D9BE2138934}">
+      <dsp:nvSpPr>
+        <dsp:cNvPr id="0" name=""/>
+        <dsp:cNvSpPr/>
+      </dsp:nvSpPr>
+      <dsp:spPr>
+        <a:xfrm>
+          <a:off x="6063019" y="1914827"/>
+          <a:ext cx="2801413" cy="2514420"/>
+        </a:xfrm>
+        <a:prstGeom prst="rect">
+          <a:avLst/>
+        </a:prstGeom>
+        <a:solidFill>
+          <a:schemeClr val="lt1">
+            <a:hueOff val="0"/>
+            <a:satOff val="0"/>
+            <a:lumOff val="0"/>
+            <a:alphaOff val="0"/>
+          </a:schemeClr>
+        </a:solidFill>
+        <a:ln w="19050" cap="rnd" cmpd="sng" algn="ctr">
+          <a:solidFill>
+            <a:schemeClr val="accent1">
+              <a:hueOff val="0"/>
+              <a:satOff val="0"/>
+              <a:lumOff val="0"/>
+              <a:alphaOff val="0"/>
+            </a:schemeClr>
+          </a:solidFill>
+          <a:prstDash val="solid"/>
+        </a:ln>
+        <a:effectLst/>
+      </dsp:spPr>
+      <dsp:style>
+        <a:lnRef idx="2">
+          <a:scrgbClr r="0" g="0" b="0"/>
+        </a:lnRef>
+        <a:fillRef idx="1">
+          <a:scrgbClr r="0" g="0" b="0"/>
+        </a:fillRef>
+        <a:effectRef idx="0">
+          <a:scrgbClr r="0" g="0" b="0"/>
+        </a:effectRef>
+        <a:fontRef idx="minor"/>
+      </dsp:style>
+      <dsp:txBody>
+        <a:bodyPr spcFirstLastPara="0" vert="horz" wrap="square" lIns="95250" tIns="95250" rIns="95250" bIns="95250" numCol="1" spcCol="1270" anchor="t" anchorCtr="0">
+          <a:noAutofit/>
+        </a:bodyPr>
+        <a:lstStyle/>
+        <a:p>
+          <a:pPr marL="0" lvl="0" indent="0" algn="l" defTabSz="1111250">
+            <a:lnSpc>
+              <a:spcPct val="90000"/>
+            </a:lnSpc>
+            <a:spcBef>
+              <a:spcPct val="0"/>
+            </a:spcBef>
+            <a:spcAft>
+              <a:spcPct val="35000"/>
+            </a:spcAft>
+            <a:buNone/>
+          </a:pPr>
+          <a:r>
+            <a:rPr lang="en-US" sz="2500" kern="1200" dirty="0"/>
+            <a:t>You can call the </a:t>
+          </a:r>
+          <a:r>
+            <a:rPr lang="en-US" sz="2500" kern="1200" dirty="0" err="1"/>
+            <a:t>mthod</a:t>
+          </a:r>
+          <a:r>
+            <a:rPr lang="en-US" sz="2500" kern="1200" dirty="0"/>
+            <a:t> right away, which will execute the M code and return data</a:t>
+          </a:r>
+          <a:endParaRPr lang="en-NL" sz="2500" kern="1200" dirty="0"/>
+        </a:p>
+      </dsp:txBody>
+      <dsp:txXfrm>
+        <a:off x="6063019" y="1914827"/>
+        <a:ext cx="2801413" cy="2514420"/>
+      </dsp:txXfrm>
+    </dsp:sp>
+  </dsp:spTree>
+</dsp:drawing>
+</file>
+
+<file path=ppt/diagrams/drawing4.xml><?xml version="1.0" encoding="utf-8"?>
 <dsp:drawing xmlns:dgm="http://schemas.openxmlformats.org/drawingml/2006/diagram" xmlns:dsp="http://schemas.microsoft.com/office/drawing/2008/diagram" xmlns:a="http://schemas.openxmlformats.org/drawingml/2006/main">
   <dsp:spTree>
     <dsp:nvGrpSpPr>
@@ -5501,6 +7089,1246 @@
 </file>
 
 <file path=ppt/diagrams/layout3.xml><?xml version="1.0" encoding="utf-8"?>
+<dgm:layoutDef xmlns:dgm="http://schemas.openxmlformats.org/drawingml/2006/diagram" xmlns:a="http://schemas.openxmlformats.org/drawingml/2006/main" uniqueId="urn:microsoft.com/office/officeart/2009/3/layout/IncreasingArrowsProcess">
+  <dgm:title val=""/>
+  <dgm:desc val=""/>
+  <dgm:catLst>
+    <dgm:cat type="process" pri="5500"/>
+  </dgm:catLst>
+  <dgm:sampData>
+    <dgm:dataModel>
+      <dgm:ptLst>
+        <dgm:pt modelId="0" type="doc"/>
+        <dgm:pt modelId="10">
+          <dgm:prSet phldr="1"/>
+        </dgm:pt>
+        <dgm:pt modelId="11">
+          <dgm:prSet phldr="1"/>
+        </dgm:pt>
+        <dgm:pt modelId="20">
+          <dgm:prSet phldr="1"/>
+        </dgm:pt>
+        <dgm:pt modelId="21">
+          <dgm:prSet phldr="1"/>
+        </dgm:pt>
+        <dgm:pt modelId="30">
+          <dgm:prSet phldr="1"/>
+        </dgm:pt>
+        <dgm:pt modelId="31">
+          <dgm:prSet phldr="1"/>
+        </dgm:pt>
+      </dgm:ptLst>
+      <dgm:cxnLst>
+        <dgm:cxn modelId="40" srcId="0" destId="10" srcOrd="0" destOrd="0"/>
+        <dgm:cxn modelId="12" srcId="10" destId="11" srcOrd="0" destOrd="0"/>
+        <dgm:cxn modelId="50" srcId="0" destId="20" srcOrd="1" destOrd="0"/>
+        <dgm:cxn modelId="22" srcId="20" destId="21" srcOrd="0" destOrd="0"/>
+        <dgm:cxn modelId="60" srcId="0" destId="30" srcOrd="2" destOrd="0"/>
+        <dgm:cxn modelId="32" srcId="30" destId="31" srcOrd="0" destOrd="0"/>
+      </dgm:cxnLst>
+      <dgm:bg/>
+      <dgm:whole/>
+    </dgm:dataModel>
+  </dgm:sampData>
+  <dgm:styleData>
+    <dgm:dataModel>
+      <dgm:ptLst>
+        <dgm:pt modelId="0" type="doc"/>
+        <dgm:pt modelId="10">
+          <dgm:prSet phldr="1"/>
+        </dgm:pt>
+        <dgm:pt modelId="11">
+          <dgm:prSet phldr="1"/>
+        </dgm:pt>
+        <dgm:pt modelId="20">
+          <dgm:prSet phldr="1"/>
+        </dgm:pt>
+        <dgm:pt modelId="21">
+          <dgm:prSet phldr="1"/>
+        </dgm:pt>
+      </dgm:ptLst>
+      <dgm:cxnLst>
+        <dgm:cxn modelId="40" srcId="0" destId="10" srcOrd="0" destOrd="0"/>
+        <dgm:cxn modelId="12" srcId="10" destId="11" srcOrd="0" destOrd="0"/>
+        <dgm:cxn modelId="50" srcId="0" destId="20" srcOrd="1" destOrd="0"/>
+        <dgm:cxn modelId="22" srcId="20" destId="21" srcOrd="0" destOrd="0"/>
+      </dgm:cxnLst>
+      <dgm:bg/>
+      <dgm:whole/>
+    </dgm:dataModel>
+  </dgm:styleData>
+  <dgm:clrData>
+    <dgm:dataModel>
+      <dgm:ptLst>
+        <dgm:pt modelId="0" type="doc"/>
+        <dgm:pt modelId="10">
+          <dgm:prSet phldr="1"/>
+        </dgm:pt>
+        <dgm:pt modelId="11">
+          <dgm:prSet phldr="1"/>
+        </dgm:pt>
+        <dgm:pt modelId="20">
+          <dgm:prSet phldr="1"/>
+        </dgm:pt>
+        <dgm:pt modelId="21">
+          <dgm:prSet phldr="1"/>
+        </dgm:pt>
+        <dgm:pt modelId="30">
+          <dgm:prSet phldr="1"/>
+        </dgm:pt>
+        <dgm:pt modelId="31">
+          <dgm:prSet phldr="1"/>
+        </dgm:pt>
+      </dgm:ptLst>
+      <dgm:cxnLst>
+        <dgm:cxn modelId="40" srcId="0" destId="10" srcOrd="0" destOrd="0"/>
+        <dgm:cxn modelId="12" srcId="10" destId="11" srcOrd="0" destOrd="0"/>
+        <dgm:cxn modelId="50" srcId="0" destId="20" srcOrd="1" destOrd="0"/>
+        <dgm:cxn modelId="22" srcId="20" destId="21" srcOrd="0" destOrd="0"/>
+        <dgm:cxn modelId="60" srcId="0" destId="30" srcOrd="2" destOrd="0"/>
+        <dgm:cxn modelId="32" srcId="30" destId="31" srcOrd="0" destOrd="0"/>
+      </dgm:cxnLst>
+      <dgm:bg/>
+      <dgm:whole/>
+    </dgm:dataModel>
+  </dgm:clrData>
+  <dgm:layoutNode name="Name0">
+    <dgm:varLst>
+      <dgm:chMax val="5"/>
+      <dgm:chPref val="5"/>
+      <dgm:dir/>
+      <dgm:animLvl val="lvl"/>
+    </dgm:varLst>
+    <dgm:shape xmlns:r="http://schemas.openxmlformats.org/officeDocument/2006/relationships" r:blip="">
+      <dgm:adjLst/>
+    </dgm:shape>
+    <dgm:choose name="Name1">
+      <dgm:if name="Name2" axis="ch" ptType="node" func="cnt" op="equ" val="1">
+        <dgm:choose name="Name3">
+          <dgm:if name="Name4" axis="ch ch" ptType="node node" func="cnt" op="equ" val="0">
+            <dgm:alg type="composite">
+              <dgm:param type="ar" val="6.8662"/>
+            </dgm:alg>
+            <dgm:choose name="Name5">
+              <dgm:if name="Name6" func="var" arg="dir" op="equ" val="norm">
+                <dgm:constrLst>
+                  <dgm:constr type="primFontSz" for="des" forName="parentText1" val="65"/>
+                  <dgm:constr type="l" for="ch" forName="parentText1" refType="w" fact="0"/>
+                  <dgm:constr type="t" for="ch" forName="parentText1" refType="h" fact="0"/>
+                  <dgm:constr type="w" for="ch" forName="parentText1" refType="w"/>
+                  <dgm:constr type="h" for="ch" forName="parentText1" refType="h"/>
+                </dgm:constrLst>
+              </dgm:if>
+              <dgm:else name="Name7">
+                <dgm:constrLst>
+                  <dgm:constr type="primFontSz" for="des" forName="parentText1" val="65"/>
+                  <dgm:constr type="l" for="ch" forName="parentText1" refType="w" fact="0"/>
+                  <dgm:constr type="t" for="ch" forName="parentText1" refType="h" fact="0"/>
+                  <dgm:constr type="w" for="ch" forName="parentText1" refType="w"/>
+                  <dgm:constr type="h" for="ch" forName="parentText1" refType="h"/>
+                </dgm:constrLst>
+              </dgm:else>
+            </dgm:choose>
+          </dgm:if>
+          <dgm:else name="Name8">
+            <dgm:alg type="composite">
+              <dgm:param type="ar" val="1.9864"/>
+            </dgm:alg>
+            <dgm:choose name="Name9">
+              <dgm:if name="Name10" func="var" arg="dir" op="equ" val="norm">
+                <dgm:constrLst>
+                  <dgm:constr type="primFontSz" for="des" forName="childText1" val="65"/>
+                  <dgm:constr type="primFontSz" for="des" forName="parentText1" val="65"/>
+                  <dgm:constr type="primFontSz" for="des" forName="childText1" refType="primFontSz" refFor="des" refForName="parentText1" op="lte"/>
+                  <dgm:constr type="l" for="ch" forName="parentText1" refType="w" fact="0"/>
+                  <dgm:constr type="t" for="ch" forName="parentText1" refType="h" fact="0"/>
+                  <dgm:constr type="w" for="ch" forName="parentText1" refType="w"/>
+                  <dgm:constr type="h" for="ch" forName="parentText1" refType="h" fact="0.2893"/>
+                  <dgm:constr type="l" for="ch" forName="childText1" refType="w" fact="0"/>
+                  <dgm:constr type="t" for="ch" forName="childText1" refType="h" fact="0.224"/>
+                  <dgm:constr type="w" for="ch" forName="childText1" refType="w" fact="0.9241"/>
+                  <dgm:constr type="h" for="ch" forName="childText1" refType="h" fact="0.776"/>
+                </dgm:constrLst>
+              </dgm:if>
+              <dgm:else name="Name11">
+                <dgm:constrLst>
+                  <dgm:constr type="primFontSz" for="des" forName="childText1" val="65"/>
+                  <dgm:constr type="primFontSz" for="des" forName="parentText1" val="65"/>
+                  <dgm:constr type="primFontSz" for="des" forName="childText1" refType="primFontSz" refFor="des" refForName="parentText1" op="lte"/>
+                  <dgm:constr type="l" for="ch" forName="parentText1" refType="w" fact="0"/>
+                  <dgm:constr type="t" for="ch" forName="parentText1" refType="h" fact="0"/>
+                  <dgm:constr type="w" for="ch" forName="parentText1" refType="w"/>
+                  <dgm:constr type="h" for="ch" forName="parentText1" refType="h" fact="0.2893"/>
+                  <dgm:constr type="l" for="ch" forName="childText1" refType="w" fact="0.076"/>
+                  <dgm:constr type="t" for="ch" forName="childText1" refType="h" fact="0.224"/>
+                  <dgm:constr type="w" for="ch" forName="childText1" refType="w" fact="0.9241"/>
+                  <dgm:constr type="h" for="ch" forName="childText1" refType="h" fact="0.776"/>
+                </dgm:constrLst>
+              </dgm:else>
+            </dgm:choose>
+          </dgm:else>
+        </dgm:choose>
+      </dgm:if>
+      <dgm:if name="Name12" axis="ch" ptType="node" func="cnt" op="equ" val="2">
+        <dgm:choose name="Name13">
+          <dgm:if name="Name14" axis="ch ch" ptType="node node" func="cnt" op="equ" val="0">
+            <dgm:alg type="composite">
+              <dgm:param type="ar" val="5.1498"/>
+            </dgm:alg>
+            <dgm:choose name="Name15">
+              <dgm:if name="Name16" func="var" arg="dir" op="equ" val="norm">
+                <dgm:constrLst>
+                  <dgm:constr type="primFontSz" for="des" forName="parentText1" val="65"/>
+                  <dgm:constr type="primFontSz" for="des" forName="parentText2" refType="primFontSz" refFor="des" refForName="parentText1" op="equ"/>
+                  <dgm:constr type="l" for="ch" forName="parentText1" refType="w" fact="0"/>
+                  <dgm:constr type="t" for="ch" forName="parentText1" refType="h" fact="0"/>
+                  <dgm:constr type="w" for="ch" forName="parentText1" refType="w"/>
+                  <dgm:constr type="h" for="ch" forName="parentText1" refType="h" fact="0.7501"/>
+                  <dgm:constr type="l" for="ch" forName="parentText2" refType="w" fact="0.462"/>
+                  <dgm:constr type="t" for="ch" forName="parentText2" refType="h" fact="0.2499"/>
+                  <dgm:constr type="w" for="ch" forName="parentText2" refType="w" fact="0.538"/>
+                  <dgm:constr type="h" for="ch" forName="parentText2" refType="h" fact="0.7501"/>
+                </dgm:constrLst>
+              </dgm:if>
+              <dgm:else name="Name17">
+                <dgm:constrLst>
+                  <dgm:constr type="primFontSz" for="des" forName="parentText1" val="65"/>
+                  <dgm:constr type="primFontSz" for="des" forName="parentText2" refType="primFontSz" refFor="des" refForName="parentText1" op="equ"/>
+                  <dgm:constr type="l" for="ch" forName="parentText1" refType="w" fact="0"/>
+                  <dgm:constr type="t" for="ch" forName="parentText1" refType="h" fact="0"/>
+                  <dgm:constr type="w" for="ch" forName="parentText1" refType="w"/>
+                  <dgm:constr type="h" for="ch" forName="parentText1" refType="h" fact="0.7501"/>
+                  <dgm:constr type="l" for="ch" forName="parentText2" refType="w" fact="0"/>
+                  <dgm:constr type="t" for="ch" forName="parentText2" refType="h" fact="0.2499"/>
+                  <dgm:constr type="w" for="ch" forName="parentText2" refType="w" fact="0.538"/>
+                  <dgm:constr type="h" for="ch" forName="parentText2" refType="h" fact="0.7501"/>
+                </dgm:constrLst>
+              </dgm:else>
+            </dgm:choose>
+          </dgm:if>
+          <dgm:else name="Name18">
+            <dgm:alg type="composite">
+              <dgm:param type="ar" val="2.0563"/>
+            </dgm:alg>
+            <dgm:choose name="Name19">
+              <dgm:if name="Name20" func="var" arg="dir" op="equ" val="norm">
+                <dgm:constrLst>
+                  <dgm:constr type="primFontSz" for="des" forName="childText1" val="65"/>
+                  <dgm:constr type="primFontSz" for="des" forName="parentText1" val="65"/>
+                  <dgm:constr type="primFontSz" for="des" forName="childText1" refType="primFontSz" refFor="des" refForName="parentText1" op="lte"/>
+                  <dgm:constr type="primFontSz" for="des" forName="childText2" refType="primFontSz" refFor="des" refForName="parentText1" op="lte"/>
+                  <dgm:constr type="primFontSz" for="des" forName="childText1" refType="primFontSz" refFor="des" refForName="parentText2" op="lte"/>
+                  <dgm:constr type="primFontSz" for="des" forName="childText2" refType="primFontSz" refFor="des" refForName="parentText2" op="lte"/>
+                  <dgm:constr type="primFontSz" for="des" forName="parentText2" refType="primFontSz" refFor="des" refForName="parentText1" op="equ"/>
+                  <dgm:constr type="primFontSz" for="des" forName="childText2" refType="primFontSz" refFor="des" refForName="childText1" op="equ"/>
+                  <dgm:constr type="l" for="ch" forName="parentText1" refType="w" fact="0"/>
+                  <dgm:constr type="t" for="ch" forName="parentText1" refType="h" fact="0"/>
+                  <dgm:constr type="w" for="ch" forName="parentText1" refType="w"/>
+                  <dgm:constr type="h" for="ch" forName="parentText1" refType="h" fact="0.2995"/>
+                  <dgm:constr type="l" for="ch" forName="parentText2" refType="w" fact="0.462"/>
+                  <dgm:constr type="t" for="ch" forName="parentText2" refType="h" fact="0.0998"/>
+                  <dgm:constr type="w" for="ch" forName="parentText2" refType="w" fact="0.538"/>
+                  <dgm:constr type="h" for="ch" forName="parentText2" refType="h" fact="0.2995"/>
+                  <dgm:constr type="l" for="ch" forName="childText1" refType="w" fact="0"/>
+                  <dgm:constr type="t" for="ch" forName="childText1" refType="h" fact="0.2317"/>
+                  <dgm:constr type="w" for="ch" forName="childText1" refType="w" fact="0.462"/>
+                  <dgm:constr type="h" for="ch" forName="childText1" refType="h" fact="0.6685"/>
+                  <dgm:constr type="l" for="ch" forName="childText2" refType="w" fact="0.462"/>
+                  <dgm:constr type="t" for="ch" forName="childText2" refType="h" fact="0.3315"/>
+                  <dgm:constr type="w" for="ch" forName="childText2" refType="w" fact="0.462"/>
+                  <dgm:constr type="h" for="ch" forName="childText2" refType="h" fact="0.6685"/>
+                </dgm:constrLst>
+              </dgm:if>
+              <dgm:else name="Name21">
+                <dgm:constrLst>
+                  <dgm:constr type="primFontSz" for="des" forName="childText1" val="65"/>
+                  <dgm:constr type="primFontSz" for="des" forName="parentText1" val="65"/>
+                  <dgm:constr type="primFontSz" for="des" forName="childText1" refType="primFontSz" refFor="des" refForName="parentText1" op="lte"/>
+                  <dgm:constr type="primFontSz" for="des" forName="childText2" refType="primFontSz" refFor="des" refForName="parentText1" op="lte"/>
+                  <dgm:constr type="primFontSz" for="des" forName="childText1" refType="primFontSz" refFor="des" refForName="parentText2" op="lte"/>
+                  <dgm:constr type="primFontSz" for="des" forName="childText2" refType="primFontSz" refFor="des" refForName="parentText2" op="lte"/>
+                  <dgm:constr type="primFontSz" for="des" forName="parentText2" refType="primFontSz" refFor="des" refForName="parentText1" op="equ"/>
+                  <dgm:constr type="primFontSz" for="des" forName="childText2" refType="primFontSz" refFor="des" refForName="childText1" op="equ"/>
+                  <dgm:constr type="l" for="ch" forName="parentText1" refType="w" fact="0"/>
+                  <dgm:constr type="t" for="ch" forName="parentText1" refType="h" fact="0"/>
+                  <dgm:constr type="w" for="ch" forName="parentText1" refType="w"/>
+                  <dgm:constr type="h" for="ch" forName="parentText1" refType="h" fact="0.2995"/>
+                  <dgm:constr type="l" for="ch" forName="parentText2" refType="w" fact="0"/>
+                  <dgm:constr type="t" for="ch" forName="parentText2" refType="h" fact="0.0998"/>
+                  <dgm:constr type="w" for="ch" forName="parentText2" refType="w" fact="0.538"/>
+                  <dgm:constr type="h" for="ch" forName="parentText2" refType="h" fact="0.2995"/>
+                  <dgm:constr type="l" for="ch" forName="childText1" refType="w" fact="0.538"/>
+                  <dgm:constr type="t" for="ch" forName="childText1" refType="h" fact="0.2317"/>
+                  <dgm:constr type="w" for="ch" forName="childText1" refType="w" fact="0.462"/>
+                  <dgm:constr type="h" for="ch" forName="childText1" refType="h" fact="0.6685"/>
+                  <dgm:constr type="l" for="ch" forName="childText2" refType="w" fact="0.076"/>
+                  <dgm:constr type="t" for="ch" forName="childText2" refType="h" fact="0.3315"/>
+                  <dgm:constr type="w" for="ch" forName="childText2" refType="w" fact="0.462"/>
+                  <dgm:constr type="h" for="ch" forName="childText2" refType="h" fact="0.6685"/>
+                </dgm:constrLst>
+              </dgm:else>
+            </dgm:choose>
+          </dgm:else>
+        </dgm:choose>
+      </dgm:if>
+      <dgm:if name="Name22" axis="ch" ptType="node" func="cnt" op="equ" val="3">
+        <dgm:choose name="Name23">
+          <dgm:if name="Name24" axis="ch ch" ptType="node node" func="cnt" op="equ" val="0">
+            <dgm:alg type="composite">
+              <dgm:param type="ar" val="4.1198"/>
+            </dgm:alg>
+            <dgm:choose name="Name25">
+              <dgm:if name="Name26" func="var" arg="dir" op="equ" val="norm">
+                <dgm:constrLst>
+                  <dgm:constr type="primFontSz" for="des" forName="parentText1" val="65"/>
+                  <dgm:constr type="primFontSz" for="des" forName="parentText2" refType="primFontSz" refFor="des" refForName="parentText1" op="equ"/>
+                  <dgm:constr type="primFontSz" for="des" forName="parentText3" refType="primFontSz" refFor="des" refForName="parentText1" op="equ"/>
+                  <dgm:constr type="l" for="ch" forName="parentText1" refType="w" fact="0"/>
+                  <dgm:constr type="t" for="ch" forName="parentText1" refType="h" fact="0"/>
+                  <dgm:constr type="w" for="ch" forName="parentText1" refType="w"/>
+                  <dgm:constr type="h" for="ch" forName="parentText1" refType="h" fact="0.6"/>
+                  <dgm:constr type="l" for="ch" forName="parentText2" refType="w" fact="0.308"/>
+                  <dgm:constr type="t" for="ch" forName="parentText2" refType="h" fact="0.2"/>
+                  <dgm:constr type="w" for="ch" forName="parentText2" refType="w" fact="0.692"/>
+                  <dgm:constr type="h" for="ch" forName="parentText2" refType="h" fact="0.6"/>
+                  <dgm:constr type="l" for="ch" forName="parentText3" refType="w" fact="0.616"/>
+                  <dgm:constr type="t" for="ch" forName="parentText3" refType="h" fact="0.4"/>
+                  <dgm:constr type="w" for="ch" forName="parentText3" refType="w" fact="0.384"/>
+                  <dgm:constr type="h" for="ch" forName="parentText3" refType="h" fact="0.6"/>
+                </dgm:constrLst>
+              </dgm:if>
+              <dgm:else name="Name27">
+                <dgm:constrLst>
+                  <dgm:constr type="primFontSz" for="des" forName="parentText1" val="65"/>
+                  <dgm:constr type="primFontSz" for="des" forName="parentText2" refType="primFontSz" refFor="des" refForName="parentText1" op="equ"/>
+                  <dgm:constr type="primFontSz" for="des" forName="parentText3" refType="primFontSz" refFor="des" refForName="parentText1" op="equ"/>
+                  <dgm:constr type="l" for="ch" forName="parentText1" refType="w" fact="0"/>
+                  <dgm:constr type="t" for="ch" forName="parentText1" refType="h" fact="0"/>
+                  <dgm:constr type="w" for="ch" forName="parentText1" refType="w"/>
+                  <dgm:constr type="h" for="ch" forName="parentText1" refType="h" fact="0.6"/>
+                  <dgm:constr type="l" for="ch" forName="parentText2" refType="w" fact="0"/>
+                  <dgm:constr type="t" for="ch" forName="parentText2" refType="h" fact="0.2"/>
+                  <dgm:constr type="w" for="ch" forName="parentText2" refType="w" fact="0.692"/>
+                  <dgm:constr type="h" for="ch" forName="parentText2" refType="h" fact="0.6"/>
+                  <dgm:constr type="l" for="ch" forName="parentText3" refType="w" fact="0"/>
+                  <dgm:constr type="t" for="ch" forName="parentText3" refType="h" fact="0.4"/>
+                  <dgm:constr type="w" for="ch" forName="parentText3" refType="w" fact="0.384"/>
+                  <dgm:constr type="h" for="ch" forName="parentText3" refType="h" fact="0.6"/>
+                </dgm:constrLst>
+              </dgm:else>
+            </dgm:choose>
+          </dgm:if>
+          <dgm:else name="Name28">
+            <dgm:alg type="composite">
+              <dgm:param type="ar" val="2.0702"/>
+            </dgm:alg>
+            <dgm:choose name="Name29">
+              <dgm:if name="Name30" func="var" arg="dir" op="equ" val="norm">
+                <dgm:constrLst>
+                  <dgm:constr type="primFontSz" for="des" forName="childText1" val="65"/>
+                  <dgm:constr type="primFontSz" for="des" forName="parentText1" val="65"/>
+                  <dgm:constr type="primFontSz" for="des" forName="childText1" refType="primFontSz" refFor="des" refForName="parentText1" op="lte"/>
+                  <dgm:constr type="primFontSz" for="des" forName="childText2" refType="primFontSz" refFor="des" refForName="parentText1" op="lte"/>
+                  <dgm:constr type="primFontSz" for="des" forName="childText3" refType="primFontSz" refFor="des" refForName="parentText1" op="lte"/>
+                  <dgm:constr type="primFontSz" for="des" forName="childText1" refType="primFontSz" refFor="des" refForName="parentText2" op="lte"/>
+                  <dgm:constr type="primFontSz" for="des" forName="childText2" refType="primFontSz" refFor="des" refForName="parentText2" op="lte"/>
+                  <dgm:constr type="primFontSz" for="des" forName="childText3" refType="primFontSz" refFor="des" refForName="parentText2" op="lte"/>
+                  <dgm:constr type="primFontSz" for="des" forName="childText1" refType="primFontSz" refFor="des" refForName="parentText3" op="lte"/>
+                  <dgm:constr type="primFontSz" for="des" forName="childText2" refType="primFontSz" refFor="des" refForName="parentText3" op="lte"/>
+                  <dgm:constr type="primFontSz" for="des" forName="childText3" refType="primFontSz" refFor="des" refForName="parentText3" op="lte"/>
+                  <dgm:constr type="primFontSz" for="des" forName="parentText2" refType="primFontSz" refFor="des" refForName="parentText1" op="equ"/>
+                  <dgm:constr type="primFontSz" for="des" forName="parentText3" refType="primFontSz" refFor="des" refForName="parentText1" op="equ"/>
+                  <dgm:constr type="primFontSz" for="des" forName="childText2" refType="primFontSz" refFor="des" refForName="childText1" op="equ"/>
+                  <dgm:constr type="primFontSz" for="des" forName="childText3" refType="primFontSz" refFor="des" refForName="childText1" op="equ"/>
+                  <dgm:constr type="l" for="ch" forName="childText1" refType="w" fact="0"/>
+                  <dgm:constr type="t" for="ch" forName="childText1" refType="h" fact="0.2325"/>
+                  <dgm:constr type="w" for="ch" forName="childText1" refType="w" fact="0.308"/>
+                  <dgm:constr type="h" for="ch" forName="childText1" refType="h" fact="0.5808"/>
+                  <dgm:constr type="l" for="ch" forName="childText2" refType="w" fact="0.308"/>
+                  <dgm:constr type="t" for="ch" forName="childText2" refType="h" fact="0.333"/>
+                  <dgm:constr type="w" for="ch" forName="childText2" refType="w" fact="0.308"/>
+                  <dgm:constr type="h" for="ch" forName="childText2" refType="h" fact="0.5808"/>
+                  <dgm:constr type="l" for="ch" forName="childText3" refType="w" fact="0.616"/>
+                  <dgm:constr type="t" for="ch" forName="childText3" refType="h" fact="0.4335"/>
+                  <dgm:constr type="w" for="ch" forName="childText3" refType="w" fact="0.308"/>
+                  <dgm:constr type="h" for="ch" forName="childText3" refType="h" fact="0.5723"/>
+                  <dgm:constr type="l" for="ch" forName="parentText1" refType="w" fact="0"/>
+                  <dgm:constr type="t" for="ch" forName="parentText1" refType="h" fact="0"/>
+                  <dgm:constr type="w" for="ch" forName="parentText1" refType="w"/>
+                  <dgm:constr type="h" for="ch" forName="parentText1" refType="h" fact="0.3015"/>
+                  <dgm:constr type="l" for="ch" forName="parentText2" refType="w" fact="0.308"/>
+                  <dgm:constr type="t" for="ch" forName="parentText2" refType="h" fact="0.1005"/>
+                  <dgm:constr type="w" for="ch" forName="parentText2" refType="w" fact="0.692"/>
+                  <dgm:constr type="h" for="ch" forName="parentText2" refType="h" fact="0.3015"/>
+                  <dgm:constr type="l" for="ch" forName="parentText3" refType="w" fact="0.616"/>
+                  <dgm:constr type="t" for="ch" forName="parentText3" refType="h" fact="0.201"/>
+                  <dgm:constr type="w" for="ch" forName="parentText3" refType="w" fact="0.384"/>
+                  <dgm:constr type="h" for="ch" forName="parentText3" refType="h" fact="0.3015"/>
+                </dgm:constrLst>
+              </dgm:if>
+              <dgm:else name="Name31">
+                <dgm:constrLst>
+                  <dgm:constr type="primFontSz" for="des" forName="childText1" val="65"/>
+                  <dgm:constr type="primFontSz" for="des" forName="parentText1" val="65"/>
+                  <dgm:constr type="primFontSz" for="des" forName="childText1" refType="primFontSz" refFor="des" refForName="parentText1" op="lte"/>
+                  <dgm:constr type="primFontSz" for="des" forName="childText2" refType="primFontSz" refFor="des" refForName="parentText1" op="lte"/>
+                  <dgm:constr type="primFontSz" for="des" forName="childText3" refType="primFontSz" refFor="des" refForName="parentText1" op="lte"/>
+                  <dgm:constr type="primFontSz" for="des" forName="childText1" refType="primFontSz" refFor="des" refForName="parentText2" op="lte"/>
+                  <dgm:constr type="primFontSz" for="des" forName="childText2" refType="primFontSz" refFor="des" refForName="parentText2" op="lte"/>
+                  <dgm:constr type="primFontSz" for="des" forName="childText3" refType="primFontSz" refFor="des" refForName="parentText2" op="lte"/>
+                  <dgm:constr type="primFontSz" for="des" forName="childText1" refType="primFontSz" refFor="des" refForName="parentText3" op="lte"/>
+                  <dgm:constr type="primFontSz" for="des" forName="childText2" refType="primFontSz" refFor="des" refForName="parentText3" op="lte"/>
+                  <dgm:constr type="primFontSz" for="des" forName="childText3" refType="primFontSz" refFor="des" refForName="parentText3" op="lte"/>
+                  <dgm:constr type="primFontSz" for="des" forName="parentText2" refType="primFontSz" refFor="des" refForName="parentText1" op="equ"/>
+                  <dgm:constr type="primFontSz" for="des" forName="parentText3" refType="primFontSz" refFor="des" refForName="parentText1" op="equ"/>
+                  <dgm:constr type="primFontSz" for="des" forName="childText2" refType="primFontSz" refFor="des" refForName="childText1" op="equ"/>
+                  <dgm:constr type="primFontSz" for="des" forName="childText3" refType="primFontSz" refFor="des" refForName="childText1" op="equ"/>
+                  <dgm:constr type="l" for="ch" forName="childText1" refType="w" fact="0.692"/>
+                  <dgm:constr type="t" for="ch" forName="childText1" refType="h" fact="0.2325"/>
+                  <dgm:constr type="w" for="ch" forName="childText1" refType="w" fact="0.308"/>
+                  <dgm:constr type="h" for="ch" forName="childText1" refType="h" fact="0.5808"/>
+                  <dgm:constr type="l" for="ch" forName="childText2" refType="w" fact="0.384"/>
+                  <dgm:constr type="t" for="ch" forName="childText2" refType="h" fact="0.333"/>
+                  <dgm:constr type="w" for="ch" forName="childText2" refType="w" fact="0.308"/>
+                  <dgm:constr type="h" for="ch" forName="childText2" refType="h" fact="0.5808"/>
+                  <dgm:constr type="l" for="ch" forName="childText3" refType="w" fact="0.076"/>
+                  <dgm:constr type="t" for="ch" forName="childText3" refType="h" fact="0.4335"/>
+                  <dgm:constr type="w" for="ch" forName="childText3" refType="w" fact="0.308"/>
+                  <dgm:constr type="h" for="ch" forName="childText3" refType="h" fact="0.5723"/>
+                  <dgm:constr type="l" for="ch" forName="parentText1" refType="w" fact="0"/>
+                  <dgm:constr type="t" for="ch" forName="parentText1" refType="h" fact="0"/>
+                  <dgm:constr type="w" for="ch" forName="parentText1" refType="w"/>
+                  <dgm:constr type="h" for="ch" forName="parentText1" refType="h" fact="0.3015"/>
+                  <dgm:constr type="l" for="ch" forName="parentText2" refType="w" fact="0"/>
+                  <dgm:constr type="t" for="ch" forName="parentText2" refType="h" fact="0.1005"/>
+                  <dgm:constr type="w" for="ch" forName="parentText2" refType="w" fact="0.692"/>
+                  <dgm:constr type="h" for="ch" forName="parentText2" refType="h" fact="0.3015"/>
+                  <dgm:constr type="l" for="ch" forName="parentText3" refType="w" fact="0"/>
+                  <dgm:constr type="t" for="ch" forName="parentText3" refType="h" fact="0.201"/>
+                  <dgm:constr type="w" for="ch" forName="parentText3" refType="w" fact="0.384"/>
+                  <dgm:constr type="h" for="ch" forName="parentText3" refType="h" fact="0.3015"/>
+                </dgm:constrLst>
+              </dgm:else>
+            </dgm:choose>
+          </dgm:else>
+        </dgm:choose>
+      </dgm:if>
+      <dgm:if name="Name32" axis="ch" ptType="node" func="cnt" op="equ" val="4">
+        <dgm:choose name="Name33">
+          <dgm:if name="Name34" axis="ch ch" ptType="node node" func="cnt" op="equ" val="0">
+            <dgm:alg type="composite">
+              <dgm:param type="ar" val="3.435"/>
+            </dgm:alg>
+            <dgm:choose name="Name35">
+              <dgm:if name="Name36" func="var" arg="dir" op="equ" val="norm">
+                <dgm:constrLst>
+                  <dgm:constr type="primFontSz" for="des" forName="parentText1" val="65"/>
+                  <dgm:constr type="primFontSz" for="des" forName="parentText2" refType="primFontSz" refFor="des" refForName="parentText1" op="equ"/>
+                  <dgm:constr type="primFontSz" for="des" forName="parentText3" refType="primFontSz" refFor="des" refForName="parentText1" op="equ"/>
+                  <dgm:constr type="primFontSz" for="des" forName="parentText4" refType="primFontSz" refFor="des" refForName="parentText1" op="equ"/>
+                  <dgm:constr type="l" for="ch" forName="parentText1" refType="w" fact="0"/>
+                  <dgm:constr type="t" for="ch" forName="parentText1" refType="h" fact="0"/>
+                  <dgm:constr type="w" for="ch" forName="parentText1" refType="w"/>
+                  <dgm:constr type="h" for="ch" forName="parentText1" refType="h" fact="0.5001"/>
+                  <dgm:constr type="l" for="ch" forName="parentText2" refType="w" fact="0.2305"/>
+                  <dgm:constr type="t" for="ch" forName="parentText2" refType="h" fact="0.1666"/>
+                  <dgm:constr type="w" for="ch" forName="parentText2" refType="w" fact="0.7695"/>
+                  <dgm:constr type="h" for="ch" forName="parentText2" refType="h" fact="0.5001"/>
+                  <dgm:constr type="l" for="ch" forName="parentText3" refType="w" fact="0.461"/>
+                  <dgm:constr type="t" for="ch" forName="parentText3" refType="h" fact="0.3333"/>
+                  <dgm:constr type="w" for="ch" forName="parentText3" refType="w" fact="0.539"/>
+                  <dgm:constr type="h" for="ch" forName="parentText3" refType="h" fact="0.5001"/>
+                  <dgm:constr type="l" for="ch" forName="parentText4" refType="w" fact="0.6915"/>
+                  <dgm:constr type="t" for="ch" forName="parentText4" refType="h" fact="0.4999"/>
+                  <dgm:constr type="w" for="ch" forName="parentText4" refType="w" fact="0.3085"/>
+                  <dgm:constr type="h" for="ch" forName="parentText4" refType="h" fact="0.5001"/>
+                </dgm:constrLst>
+              </dgm:if>
+              <dgm:else name="Name37">
+                <dgm:constrLst>
+                  <dgm:constr type="primFontSz" for="des" forName="parentText1" val="65"/>
+                  <dgm:constr type="primFontSz" for="des" forName="parentText2" refType="primFontSz" refFor="des" refForName="parentText1" op="equ"/>
+                  <dgm:constr type="primFontSz" for="des" forName="parentText3" refType="primFontSz" refFor="des" refForName="parentText1" op="equ"/>
+                  <dgm:constr type="primFontSz" for="des" forName="parentText4" refType="primFontSz" refFor="des" refForName="parentText1" op="equ"/>
+                  <dgm:constr type="l" for="ch" forName="parentText1" refType="w" fact="0"/>
+                  <dgm:constr type="t" for="ch" forName="parentText1" refType="h" fact="0"/>
+                  <dgm:constr type="w" for="ch" forName="parentText1" refType="w"/>
+                  <dgm:constr type="h" for="ch" forName="parentText1" refType="h" fact="0.5001"/>
+                  <dgm:constr type="l" for="ch" forName="parentText2" refType="w" fact="0"/>
+                  <dgm:constr type="t" for="ch" forName="parentText2" refType="h" fact="0.1666"/>
+                  <dgm:constr type="w" for="ch" forName="parentText2" refType="w" fact="0.7695"/>
+                  <dgm:constr type="h" for="ch" forName="parentText2" refType="h" fact="0.5001"/>
+                  <dgm:constr type="l" for="ch" forName="parentText3" refType="w" fact="0"/>
+                  <dgm:constr type="t" for="ch" forName="parentText3" refType="h" fact="0.3333"/>
+                  <dgm:constr type="w" for="ch" forName="parentText3" refType="w" fact="0.539"/>
+                  <dgm:constr type="h" for="ch" forName="parentText3" refType="h" fact="0.5001"/>
+                  <dgm:constr type="l" for="ch" forName="parentText4" refType="w" fact="0"/>
+                  <dgm:constr type="t" for="ch" forName="parentText4" refType="h" fact="0.4999"/>
+                  <dgm:constr type="w" for="ch" forName="parentText4" refType="w" fact="0.3085"/>
+                  <dgm:constr type="h" for="ch" forName="parentText4" refType="h" fact="0.5001"/>
+                </dgm:constrLst>
+              </dgm:else>
+            </dgm:choose>
+          </dgm:if>
+          <dgm:else name="Name38">
+            <dgm:alg type="composite">
+              <dgm:param type="ar" val="1.9377"/>
+            </dgm:alg>
+            <dgm:choose name="Name39">
+              <dgm:if name="Name40" func="var" arg="dir" op="equ" val="norm">
+                <dgm:constrLst>
+                  <dgm:constr type="primFontSz" for="des" forName="childText1" val="65"/>
+                  <dgm:constr type="primFontSz" for="des" forName="parentText1" val="65"/>
+                  <dgm:constr type="primFontSz" for="des" forName="childText1" refType="primFontSz" refFor="des" refForName="parentText1" op="lte"/>
+                  <dgm:constr type="primFontSz" for="des" forName="childText2" refType="primFontSz" refFor="des" refForName="parentText1" op="lte"/>
+                  <dgm:constr type="primFontSz" for="des" forName="childText3" refType="primFontSz" refFor="des" refForName="parentText1" op="lte"/>
+                  <dgm:constr type="primFontSz" for="des" forName="childText4" refType="primFontSz" refFor="des" refForName="parentText1" op="lte"/>
+                  <dgm:constr type="primFontSz" for="des" forName="childText1" refType="primFontSz" refFor="des" refForName="parentText2" op="lte"/>
+                  <dgm:constr type="primFontSz" for="des" forName="childText2" refType="primFontSz" refFor="des" refForName="parentText2" op="lte"/>
+                  <dgm:constr type="primFontSz" for="des" forName="childText3" refType="primFontSz" refFor="des" refForName="parentText2" op="lte"/>
+                  <dgm:constr type="primFontSz" for="des" forName="childText4" refType="primFontSz" refFor="des" refForName="parentText2" op="lte"/>
+                  <dgm:constr type="primFontSz" for="des" forName="childText1" refType="primFontSz" refFor="des" refForName="parentText3" op="lte"/>
+                  <dgm:constr type="primFontSz" for="des" forName="childText2" refType="primFontSz" refFor="des" refForName="parentText3" op="lte"/>
+                  <dgm:constr type="primFontSz" for="des" forName="childText3" refType="primFontSz" refFor="des" refForName="parentText3" op="lte"/>
+                  <dgm:constr type="primFontSz" for="des" forName="childText4" refType="primFontSz" refFor="des" refForName="parentText3" op="lte"/>
+                  <dgm:constr type="primFontSz" for="des" forName="childText1" refType="primFontSz" refFor="des" refForName="parentText4" op="lte"/>
+                  <dgm:constr type="primFontSz" for="des" forName="childText2" refType="primFontSz" refFor="des" refForName="parentText4" op="lte"/>
+                  <dgm:constr type="primFontSz" for="des" forName="childText3" refType="primFontSz" refFor="des" refForName="parentText4" op="lte"/>
+                  <dgm:constr type="primFontSz" for="des" forName="childText4" refType="primFontSz" refFor="des" refForName="parentText4" op="lte"/>
+                  <dgm:constr type="primFontSz" for="des" forName="parentText2" refType="primFontSz" refFor="des" refForName="parentText1" op="equ"/>
+                  <dgm:constr type="primFontSz" for="des" forName="parentText3" refType="primFontSz" refFor="des" refForName="parentText1" op="equ"/>
+                  <dgm:constr type="primFontSz" for="des" forName="parentText4" refType="primFontSz" refFor="des" refForName="parentText1" op="equ"/>
+                  <dgm:constr type="primFontSz" for="des" forName="childText2" refType="primFontSz" refFor="des" refForName="childText1" op="equ"/>
+                  <dgm:constr type="primFontSz" for="des" forName="childText3" refType="primFontSz" refFor="des" refForName="childText1" op="equ"/>
+                  <dgm:constr type="primFontSz" for="des" forName="childText4" refType="primFontSz" refFor="des" refForName="childText1" op="equ"/>
+                  <dgm:constr type="l" for="ch" forName="childText1" refType="w" fact="0"/>
+                  <dgm:constr type="t" for="ch" forName="childText1" refType="h" fact="0.218"/>
+                  <dgm:constr type="w" for="ch" forName="childText1" refType="w" fact="0.2305"/>
+                  <dgm:constr type="h" for="ch" forName="childText1" refType="h" fact="0.5218"/>
+                  <dgm:constr type="l" for="ch" forName="childText2" refType="w" fact="0.2305"/>
+                  <dgm:constr type="t" for="ch" forName="childText2" refType="h" fact="0.312"/>
+                  <dgm:constr type="w" for="ch" forName="childText2" refType="w" fact="0.2305"/>
+                  <dgm:constr type="h" for="ch" forName="childText2" refType="h" fact="0.5085"/>
+                  <dgm:constr type="l" for="ch" forName="childText3" refType="w" fact="0.461"/>
+                  <dgm:constr type="t" for="ch" forName="childText3" refType="h" fact="0.406"/>
+                  <dgm:constr type="w" for="ch" forName="childText3" refType="w" fact="0.2305"/>
+                  <dgm:constr type="h" for="ch" forName="childText3" refType="h" fact="0.5119"/>
+                  <dgm:constr type="l" for="ch" forName="childText4" refType="w" fact="0.6915"/>
+                  <dgm:constr type="t" for="ch" forName="childText4" refType="h" fact="0.5"/>
+                  <dgm:constr type="w" for="ch" forName="childText4" refType="w" fact="0.2326"/>
+                  <dgm:constr type="h" for="ch" forName="childText4" refType="h" fact="0.5179"/>
+                  <dgm:constr type="l" for="ch" forName="parentText1" refType="w" fact="0"/>
+                  <dgm:constr type="t" for="ch" forName="parentText1" refType="h" fact="0"/>
+                  <dgm:constr type="w" for="ch" forName="parentText1" refType="w"/>
+                  <dgm:constr type="h" for="ch" forName="parentText1" refType="h" fact="0.2821"/>
+                  <dgm:constr type="l" for="ch" forName="parentText2" refType="w" fact="0.2305"/>
+                  <dgm:constr type="t" for="ch" forName="parentText2" refType="h" fact="0.094"/>
+                  <dgm:constr type="w" for="ch" forName="parentText2" refType="w" fact="0.7695"/>
+                  <dgm:constr type="h" for="ch" forName="parentText2" refType="h" fact="0.2821"/>
+                  <dgm:constr type="l" for="ch" forName="parentText3" refType="w" fact="0.461"/>
+                  <dgm:constr type="t" for="ch" forName="parentText3" refType="h" fact="0.188"/>
+                  <dgm:constr type="w" for="ch" forName="parentText3" refType="w" fact="0.539"/>
+                  <dgm:constr type="h" for="ch" forName="parentText3" refType="h" fact="0.2821"/>
+                  <dgm:constr type="l" for="ch" forName="parentText4" refType="w" fact="0.6915"/>
+                  <dgm:constr type="t" for="ch" forName="parentText4" refType="h" fact="0.282"/>
+                  <dgm:constr type="w" for="ch" forName="parentText4" refType="w" fact="0.3085"/>
+                  <dgm:constr type="h" for="ch" forName="parentText4" refType="h" fact="0.2821"/>
+                </dgm:constrLst>
+              </dgm:if>
+              <dgm:else name="Name41">
+                <dgm:constrLst>
+                  <dgm:constr type="primFontSz" for="des" forName="childText1" val="65"/>
+                  <dgm:constr type="primFontSz" for="des" forName="parentText1" val="65"/>
+                  <dgm:constr type="primFontSz" for="des" forName="childText1" refType="primFontSz" refFor="des" refForName="parentText1" op="lte"/>
+                  <dgm:constr type="primFontSz" for="des" forName="childText2" refType="primFontSz" refFor="des" refForName="parentText1" op="lte"/>
+                  <dgm:constr type="primFontSz" for="des" forName="childText3" refType="primFontSz" refFor="des" refForName="parentText1" op="lte"/>
+                  <dgm:constr type="primFontSz" for="des" forName="childText4" refType="primFontSz" refFor="des" refForName="parentText1" op="lte"/>
+                  <dgm:constr type="primFontSz" for="des" forName="childText1" refType="primFontSz" refFor="des" refForName="parentText2" op="lte"/>
+                  <dgm:constr type="primFontSz" for="des" forName="childText2" refType="primFontSz" refFor="des" refForName="parentText2" op="lte"/>
+                  <dgm:constr type="primFontSz" for="des" forName="childText3" refType="primFontSz" refFor="des" refForName="parentText2" op="lte"/>
+                  <dgm:constr type="primFontSz" for="des" forName="childText4" refType="primFontSz" refFor="des" refForName="parentText2" op="lte"/>
+                  <dgm:constr type="primFontSz" for="des" forName="childText1" refType="primFontSz" refFor="des" refForName="parentText3" op="lte"/>
+                  <dgm:constr type="primFontSz" for="des" forName="childText2" refType="primFontSz" refFor="des" refForName="parentText3" op="lte"/>
+                  <dgm:constr type="primFontSz" for="des" forName="childText3" refType="primFontSz" refFor="des" refForName="parentText3" op="lte"/>
+                  <dgm:constr type="primFontSz" for="des" forName="childText4" refType="primFontSz" refFor="des" refForName="parentText3" op="lte"/>
+                  <dgm:constr type="primFontSz" for="des" forName="childText1" refType="primFontSz" refFor="des" refForName="parentText4" op="lte"/>
+                  <dgm:constr type="primFontSz" for="des" forName="childText2" refType="primFontSz" refFor="des" refForName="parentText4" op="lte"/>
+                  <dgm:constr type="primFontSz" for="des" forName="childText3" refType="primFontSz" refFor="des" refForName="parentText4" op="lte"/>
+                  <dgm:constr type="primFontSz" for="des" forName="childText4" refType="primFontSz" refFor="des" refForName="parentText4" op="lte"/>
+                  <dgm:constr type="primFontSz" for="des" forName="parentText2" refType="primFontSz" refFor="des" refForName="parentText1" op="equ"/>
+                  <dgm:constr type="primFontSz" for="des" forName="parentText3" refType="primFontSz" refFor="des" refForName="parentText1" op="equ"/>
+                  <dgm:constr type="primFontSz" for="des" forName="parentText4" refType="primFontSz" refFor="des" refForName="parentText1" op="equ"/>
+                  <dgm:constr type="primFontSz" for="des" forName="childText2" refType="primFontSz" refFor="des" refForName="childText1" op="equ"/>
+                  <dgm:constr type="primFontSz" for="des" forName="childText3" refType="primFontSz" refFor="des" refForName="childText1" op="equ"/>
+                  <dgm:constr type="primFontSz" for="des" forName="childText4" refType="primFontSz" refFor="des" refForName="childText1" op="equ"/>
+                  <dgm:constr type="l" for="ch" forName="childText1" refType="w" fact="0.7695"/>
+                  <dgm:constr type="t" for="ch" forName="childText1" refType="h" fact="0.218"/>
+                  <dgm:constr type="w" for="ch" forName="childText1" refType="w" fact="0.2305"/>
+                  <dgm:constr type="h" for="ch" forName="childText1" refType="h" fact="0.5218"/>
+                  <dgm:constr type="l" for="ch" forName="childText2" refType="w" fact="0.539"/>
+                  <dgm:constr type="t" for="ch" forName="childText2" refType="h" fact="0.312"/>
+                  <dgm:constr type="w" for="ch" forName="childText2" refType="w" fact="0.2305"/>
+                  <dgm:constr type="h" for="ch" forName="childText2" refType="h" fact="0.5085"/>
+                  <dgm:constr type="l" for="ch" forName="childText3" refType="w" fact="0.3085"/>
+                  <dgm:constr type="t" for="ch" forName="childText3" refType="h" fact="0.406"/>
+                  <dgm:constr type="w" for="ch" forName="childText3" refType="w" fact="0.2305"/>
+                  <dgm:constr type="h" for="ch" forName="childText3" refType="h" fact="0.5119"/>
+                  <dgm:constr type="l" for="ch" forName="childText4" refType="w" fact="0.076"/>
+                  <dgm:constr type="t" for="ch" forName="childText4" refType="h" fact="0.5"/>
+                  <dgm:constr type="w" for="ch" forName="childText4" refType="w" fact="0.2346"/>
+                  <dgm:constr type="h" for="ch" forName="childText4" refType="h" fact="0.5179"/>
+                  <dgm:constr type="l" for="ch" forName="parentText1" refType="w" fact="0"/>
+                  <dgm:constr type="t" for="ch" forName="parentText1" refType="h" fact="0"/>
+                  <dgm:constr type="w" for="ch" forName="parentText1" refType="w"/>
+                  <dgm:constr type="h" for="ch" forName="parentText1" refType="h" fact="0.2821"/>
+                  <dgm:constr type="l" for="ch" forName="parentText2" refType="w" fact="0"/>
+                  <dgm:constr type="t" for="ch" forName="parentText2" refType="h" fact="0.094"/>
+                  <dgm:constr type="w" for="ch" forName="parentText2" refType="w" fact="0.7695"/>
+                  <dgm:constr type="h" for="ch" forName="parentText2" refType="h" fact="0.2821"/>
+                  <dgm:constr type="l" for="ch" forName="parentText3" refType="w" fact="0"/>
+                  <dgm:constr type="t" for="ch" forName="parentText3" refType="h" fact="0.188"/>
+                  <dgm:constr type="w" for="ch" forName="parentText3" refType="w" fact="0.539"/>
+                  <dgm:constr type="h" for="ch" forName="parentText3" refType="h" fact="0.2821"/>
+                  <dgm:constr type="l" for="ch" forName="parentText4" refType="w" fact="0"/>
+                  <dgm:constr type="t" for="ch" forName="parentText4" refType="h" fact="0.282"/>
+                  <dgm:constr type="w" for="ch" forName="parentText4" refType="w" fact="0.3085"/>
+                  <dgm:constr type="h" for="ch" forName="parentText4" refType="h" fact="0.2821"/>
+                </dgm:constrLst>
+              </dgm:else>
+            </dgm:choose>
+          </dgm:else>
+        </dgm:choose>
+      </dgm:if>
+      <dgm:else name="Name42">
+        <dgm:choose name="Name43">
+          <dgm:if name="Name44" axis="ch ch" ptType="node node" func="cnt" op="equ" val="0">
+            <dgm:alg type="composite">
+              <dgm:param type="ar" val="2.9463"/>
+            </dgm:alg>
+            <dgm:choose name="Name45">
+              <dgm:if name="Name46" func="var" arg="dir" op="equ" val="norm">
+                <dgm:constrLst>
+                  <dgm:constr type="primFontSz" for="des" forName="parentText1" val="65"/>
+                  <dgm:constr type="primFontSz" for="des" forName="parentText2" refType="primFontSz" refFor="des" refForName="parentText1" op="equ"/>
+                  <dgm:constr type="primFontSz" for="des" forName="parentText3" refType="primFontSz" refFor="des" refForName="parentText1" op="equ"/>
+                  <dgm:constr type="primFontSz" for="des" forName="parentText4" refType="primFontSz" refFor="des" refForName="parentText1" op="equ"/>
+                  <dgm:constr type="primFontSz" for="des" forName="parentText5" refType="primFontSz" refFor="des" refForName="parentText1" op="equ"/>
+                  <dgm:constr type="l" for="ch" forName="parentText1" refType="w" fact="0"/>
+                  <dgm:constr type="t" for="ch" forName="parentText1" refType="h" fact="0"/>
+                  <dgm:constr type="w" for="ch" forName="parentText1" refType="w"/>
+                  <dgm:constr type="h" for="ch" forName="parentText1" refType="h" fact="0.4285"/>
+                  <dgm:constr type="l" for="ch" forName="parentText2" refType="w" fact="0.1848"/>
+                  <dgm:constr type="t" for="ch" forName="parentText2" refType="h" fact="0.1429"/>
+                  <dgm:constr type="w" for="ch" forName="parentText2" refType="w" fact="0.8152"/>
+                  <dgm:constr type="h" for="ch" forName="parentText2" refType="h" fact="0.4285"/>
+                  <dgm:constr type="l" for="ch" forName="parentText3" refType="w" fact="0.3696"/>
+                  <dgm:constr type="t" for="ch" forName="parentText3" refType="h" fact="0.2858"/>
+                  <dgm:constr type="w" for="ch" forName="parentText3" refType="w" fact="0.6304"/>
+                  <dgm:constr type="h" for="ch" forName="parentText3" refType="h" fact="0.4285"/>
+                  <dgm:constr type="l" for="ch" forName="parentText4" refType="w" fact="0.5545"/>
+                  <dgm:constr type="t" for="ch" forName="parentText4" refType="h" fact="0.4286"/>
+                  <dgm:constr type="w" for="ch" forName="parentText4" refType="w" fact="0.4455"/>
+                  <dgm:constr type="h" for="ch" forName="parentText4" refType="h" fact="0.4285"/>
+                  <dgm:constr type="l" for="ch" forName="parentText5" refType="w" fact="0.7393"/>
+                  <dgm:constr type="t" for="ch" forName="parentText5" refType="h" fact="0.5715"/>
+                  <dgm:constr type="w" for="ch" forName="parentText5" refType="w" fact="0.2607"/>
+                  <dgm:constr type="h" for="ch" forName="parentText5" refType="h" fact="0.4285"/>
+                </dgm:constrLst>
+              </dgm:if>
+              <dgm:else name="Name47">
+                <dgm:constrLst>
+                  <dgm:constr type="primFontSz" for="des" forName="parentText1" val="65"/>
+                  <dgm:constr type="primFontSz" for="des" forName="parentText2" refType="primFontSz" refFor="des" refForName="parentText1" op="equ"/>
+                  <dgm:constr type="primFontSz" for="des" forName="parentText3" refType="primFontSz" refFor="des" refForName="parentText1" op="equ"/>
+                  <dgm:constr type="primFontSz" for="des" forName="parentText4" refType="primFontSz" refFor="des" refForName="parentText1" op="equ"/>
+                  <dgm:constr type="primFontSz" for="des" forName="parentText5" refType="primFontSz" refFor="des" refForName="parentText1" op="equ"/>
+                  <dgm:constr type="l" for="ch" forName="parentText1" refType="w" fact="0"/>
+                  <dgm:constr type="t" for="ch" forName="parentText1" refType="h" fact="0"/>
+                  <dgm:constr type="w" for="ch" forName="parentText1" refType="w"/>
+                  <dgm:constr type="h" for="ch" forName="parentText1" refType="h" fact="0.4285"/>
+                  <dgm:constr type="l" for="ch" forName="parentText2" refType="w" fact="0"/>
+                  <dgm:constr type="t" for="ch" forName="parentText2" refType="h" fact="0.1429"/>
+                  <dgm:constr type="w" for="ch" forName="parentText2" refType="w" fact="0.8152"/>
+                  <dgm:constr type="h" for="ch" forName="parentText2" refType="h" fact="0.4285"/>
+                  <dgm:constr type="l" for="ch" forName="parentText3" refType="w" fact="0"/>
+                  <dgm:constr type="t" for="ch" forName="parentText3" refType="h" fact="0.2858"/>
+                  <dgm:constr type="w" for="ch" forName="parentText3" refType="w" fact="0.6304"/>
+                  <dgm:constr type="h" for="ch" forName="parentText3" refType="h" fact="0.4285"/>
+                  <dgm:constr type="l" for="ch" forName="parentText4" refType="w" fact="0"/>
+                  <dgm:constr type="t" for="ch" forName="parentText4" refType="h" fact="0.4286"/>
+                  <dgm:constr type="w" for="ch" forName="parentText4" refType="w" fact="0.4455"/>
+                  <dgm:constr type="h" for="ch" forName="parentText4" refType="h" fact="0.4285"/>
+                  <dgm:constr type="l" for="ch" forName="parentText5" refType="w" fact="0"/>
+                  <dgm:constr type="t" for="ch" forName="parentText5" refType="h" fact="0.5715"/>
+                  <dgm:constr type="w" for="ch" forName="parentText5" refType="w" fact="0.2607"/>
+                  <dgm:constr type="h" for="ch" forName="parentText5" refType="h" fact="0.4285"/>
+                </dgm:constrLst>
+              </dgm:else>
+            </dgm:choose>
+          </dgm:if>
+          <dgm:else name="Name48">
+            <dgm:alg type="composite">
+              <dgm:param type="ar" val="1.7837"/>
+            </dgm:alg>
+            <dgm:choose name="Name49">
+              <dgm:if name="Name50" func="var" arg="dir" op="equ" val="norm">
+                <dgm:constrLst>
+                  <dgm:constr type="primFontSz" for="des" forName="childText1" val="65"/>
+                  <dgm:constr type="primFontSz" for="des" forName="parentText1" val="65"/>
+                  <dgm:constr type="primFontSz" for="des" forName="childText1" refType="primFontSz" refFor="des" refForName="parentText1" op="lte"/>
+                  <dgm:constr type="primFontSz" for="des" forName="childText2" refType="primFontSz" refFor="des" refForName="parentText1" op="lte"/>
+                  <dgm:constr type="primFontSz" for="des" forName="childText3" refType="primFontSz" refFor="des" refForName="parentText1" op="lte"/>
+                  <dgm:constr type="primFontSz" for="des" forName="childText4" refType="primFontSz" refFor="des" refForName="parentText1" op="lte"/>
+                  <dgm:constr type="primFontSz" for="des" forName="childText5" refType="primFontSz" refFor="des" refForName="parentText1" op="lte"/>
+                  <dgm:constr type="primFontSz" for="des" forName="childText1" refType="primFontSz" refFor="des" refForName="parentText2" op="lte"/>
+                  <dgm:constr type="primFontSz" for="des" forName="childText2" refType="primFontSz" refFor="des" refForName="parentText2" op="lte"/>
+                  <dgm:constr type="primFontSz" for="des" forName="childText3" refType="primFontSz" refFor="des" refForName="parentText2" op="lte"/>
+                  <dgm:constr type="primFontSz" for="des" forName="childText4" refType="primFontSz" refFor="des" refForName="parentText2" op="lte"/>
+                  <dgm:constr type="primFontSz" for="des" forName="childText5" refType="primFontSz" refFor="des" refForName="parentText2" op="lte"/>
+                  <dgm:constr type="primFontSz" for="des" forName="childText1" refType="primFontSz" refFor="des" refForName="parentText3" op="lte"/>
+                  <dgm:constr type="primFontSz" for="des" forName="childText2" refType="primFontSz" refFor="des" refForName="parentText3" op="lte"/>
+                  <dgm:constr type="primFontSz" for="des" forName="childText3" refType="primFontSz" refFor="des" refForName="parentText3" op="lte"/>
+                  <dgm:constr type="primFontSz" for="des" forName="childText4" refType="primFontSz" refFor="des" refForName="parentText3" op="lte"/>
+                  <dgm:constr type="primFontSz" for="des" forName="childText5" refType="primFontSz" refFor="des" refForName="parentText3" op="lte"/>
+                  <dgm:constr type="primFontSz" for="des" forName="childText1" refType="primFontSz" refFor="des" refForName="parentText4" op="lte"/>
+                  <dgm:constr type="primFontSz" for="des" forName="childText2" refType="primFontSz" refFor="des" refForName="parentText4" op="lte"/>
+                  <dgm:constr type="primFontSz" for="des" forName="childText3" refType="primFontSz" refFor="des" refForName="parentText4" op="lte"/>
+                  <dgm:constr type="primFontSz" for="des" forName="childText4" refType="primFontSz" refFor="des" refForName="parentText4" op="lte"/>
+                  <dgm:constr type="primFontSz" for="des" forName="childText5" refType="primFontSz" refFor="des" refForName="parentText4" op="lte"/>
+                  <dgm:constr type="primFontSz" for="des" forName="childText1" refType="primFontSz" refFor="des" refForName="parentText5" op="lte"/>
+                  <dgm:constr type="primFontSz" for="des" forName="childText2" refType="primFontSz" refFor="des" refForName="parentText5" op="lte"/>
+                  <dgm:constr type="primFontSz" for="des" forName="childText3" refType="primFontSz" refFor="des" refForName="parentText5" op="lte"/>
+                  <dgm:constr type="primFontSz" for="des" forName="childText4" refType="primFontSz" refFor="des" refForName="parentText5" op="lte"/>
+                  <dgm:constr type="primFontSz" for="des" forName="childText5" refType="primFontSz" refFor="des" refForName="parentText5" op="lte"/>
+                  <dgm:constr type="primFontSz" for="des" forName="parentText2" refType="primFontSz" refFor="des" refForName="parentText1" op="equ"/>
+                  <dgm:constr type="primFontSz" for="des" forName="parentText3" refType="primFontSz" refFor="des" refForName="parentText1" op="equ"/>
+                  <dgm:constr type="primFontSz" for="des" forName="parentText4" refType="primFontSz" refFor="des" refForName="parentText1" op="equ"/>
+                  <dgm:constr type="primFontSz" for="des" forName="parentText5" refType="primFontSz" refFor="des" refForName="parentText1" op="equ"/>
+                  <dgm:constr type="primFontSz" for="des" forName="childText2" refType="primFontSz" refFor="des" refForName="childText1" op="equ"/>
+                  <dgm:constr type="primFontSz" for="des" forName="childText3" refType="primFontSz" refFor="des" refForName="childText1" op="equ"/>
+                  <dgm:constr type="primFontSz" for="des" forName="childText4" refType="primFontSz" refFor="des" refForName="childText1" op="equ"/>
+                  <dgm:constr type="primFontSz" for="des" forName="childText5" refType="primFontSz" refFor="des" refForName="childText1" op="equ"/>
+                  <dgm:constr type="l" for="ch" forName="childText1" refType="w" fact="0"/>
+                  <dgm:constr type="t" for="ch" forName="childText1" refType="h" fact="0.1997"/>
+                  <dgm:constr type="w" for="ch" forName="childText1" refType="w" fact="0.18482"/>
+                  <dgm:constr type="h" for="ch" forName="childText1" refType="h" fact="0.4763"/>
+                  <dgm:constr type="l" for="ch" forName="childText2" refType="w" fact="0.1848"/>
+                  <dgm:constr type="t" for="ch" forName="childText2" refType="h" fact="0.2862"/>
+                  <dgm:constr type="w" for="ch" forName="childText2" refType="w" fact="0.18482"/>
+                  <dgm:constr type="h" for="ch" forName="childText2" refType="h" fact="0.4763"/>
+                  <dgm:constr type="l" for="ch" forName="childText3" refType="w" fact="0.3696"/>
+                  <dgm:constr type="t" for="ch" forName="childText3" refType="h" fact="0.3727"/>
+                  <dgm:constr type="w" for="ch" forName="childText3" refType="w" fact="0.18482"/>
+                  <dgm:constr type="h" for="ch" forName="childText3" refType="h" fact="0.4763"/>
+                  <dgm:constr type="l" for="ch" forName="childText4" refType="w" fact="0.5545"/>
+                  <dgm:constr type="t" for="ch" forName="childText4" refType="h" fact="0.4592"/>
+                  <dgm:constr type="w" for="ch" forName="childText4" refType="w" fact="0.18482"/>
+                  <dgm:constr type="h" for="ch" forName="childText4" refType="h" fact="0.4763"/>
+                  <dgm:constr type="l" for="ch" forName="childText5" refType="w" fact="0.7393"/>
+                  <dgm:constr type="t" for="ch" forName="childText5" refType="h" fact="0.5457"/>
+                  <dgm:constr type="w" for="ch" forName="childText5" refType="w" fact="0.18482"/>
+                  <dgm:constr type="h" for="ch" forName="childText5" refType="h" fact="0.4763"/>
+                  <dgm:constr type="l" for="ch" forName="parentText1" refType="w" fact="0"/>
+                  <dgm:constr type="t" for="ch" forName="parentText1" refType="h" fact="0"/>
+                  <dgm:constr type="w" for="ch" forName="parentText1" refType="w"/>
+                  <dgm:constr type="h" for="ch" forName="parentText1" refType="h" fact="0.2594"/>
+                  <dgm:constr type="l" for="ch" forName="parentText2" refType="w" fact="0.1848"/>
+                  <dgm:constr type="t" for="ch" forName="parentText2" refType="h" fact="0.0865"/>
+                  <dgm:constr type="w" for="ch" forName="parentText2" refType="w" fact="0.8152"/>
+                  <dgm:constr type="h" for="ch" forName="parentText2" refType="h" fact="0.2594"/>
+                  <dgm:constr type="l" for="ch" forName="parentText3" refType="w" fact="0.3696"/>
+                  <dgm:constr type="t" for="ch" forName="parentText3" refType="h" fact="0.173"/>
+                  <dgm:constr type="w" for="ch" forName="parentText3" refType="w" fact="0.6304"/>
+                  <dgm:constr type="h" for="ch" forName="parentText3" refType="h" fact="0.2594"/>
+                  <dgm:constr type="l" for="ch" forName="parentText4" refType="w" fact="0.5545"/>
+                  <dgm:constr type="t" for="ch" forName="parentText4" refType="h" fact="0.2595"/>
+                  <dgm:constr type="w" for="ch" forName="parentText4" refType="w" fact="0.4455"/>
+                  <dgm:constr type="h" for="ch" forName="parentText4" refType="h" fact="0.2594"/>
+                  <dgm:constr type="l" for="ch" forName="parentText5" refType="w" fact="0.7393"/>
+                  <dgm:constr type="t" for="ch" forName="parentText5" refType="h" fact="0.346"/>
+                  <dgm:constr type="w" for="ch" forName="parentText5" refType="w" fact="0.2607"/>
+                  <dgm:constr type="h" for="ch" forName="parentText5" refType="h" fact="0.2594"/>
+                </dgm:constrLst>
+              </dgm:if>
+              <dgm:else name="Name51">
+                <dgm:constrLst>
+                  <dgm:constr type="primFontSz" for="des" forName="childText1" val="65"/>
+                  <dgm:constr type="primFontSz" for="des" forName="parentText1" val="65"/>
+                  <dgm:constr type="primFontSz" for="des" forName="childText1" refType="primFontSz" refFor="des" refForName="parentText1" op="lte"/>
+                  <dgm:constr type="primFontSz" for="des" forName="childText2" refType="primFontSz" refFor="des" refForName="parentText1" op="lte"/>
+                  <dgm:constr type="primFontSz" for="des" forName="childText3" refType="primFontSz" refFor="des" refForName="parentText1" op="lte"/>
+                  <dgm:constr type="primFontSz" for="des" forName="childText4" refType="primFontSz" refFor="des" refForName="parentText1" op="lte"/>
+                  <dgm:constr type="primFontSz" for="des" forName="childText5" refType="primFontSz" refFor="des" refForName="parentText1" op="lte"/>
+                  <dgm:constr type="primFontSz" for="des" forName="childText1" refType="primFontSz" refFor="des" refForName="parentText2" op="lte"/>
+                  <dgm:constr type="primFontSz" for="des" forName="childText2" refType="primFontSz" refFor="des" refForName="parentText2" op="lte"/>
+                  <dgm:constr type="primFontSz" for="des" forName="childText3" refType="primFontSz" refFor="des" refForName="parentText2" op="lte"/>
+                  <dgm:constr type="primFontSz" for="des" forName="childText4" refType="primFontSz" refFor="des" refForName="parentText2" op="lte"/>
+                  <dgm:constr type="primFontSz" for="des" forName="childText5" refType="primFontSz" refFor="des" refForName="parentText2" op="lte"/>
+                  <dgm:constr type="primFontSz" for="des" forName="childText1" refType="primFontSz" refFor="des" refForName="parentText3" op="lte"/>
+                  <dgm:constr type="primFontSz" for="des" forName="childText2" refType="primFontSz" refFor="des" refForName="parentText3" op="lte"/>
+                  <dgm:constr type="primFontSz" for="des" forName="childText3" refType="primFontSz" refFor="des" refForName="parentText3" op="lte"/>
+                  <dgm:constr type="primFontSz" for="des" forName="childText4" refType="primFontSz" refFor="des" refForName="parentText3" op="lte"/>
+                  <dgm:constr type="primFontSz" for="des" forName="childText5" refType="primFontSz" refFor="des" refForName="parentText3" op="lte"/>
+                  <dgm:constr type="primFontSz" for="des" forName="childText1" refType="primFontSz" refFor="des" refForName="parentText4" op="lte"/>
+                  <dgm:constr type="primFontSz" for="des" forName="childText2" refType="primFontSz" refFor="des" refForName="parentText4" op="lte"/>
+                  <dgm:constr type="primFontSz" for="des" forName="childText3" refType="primFontSz" refFor="des" refForName="parentText4" op="lte"/>
+                  <dgm:constr type="primFontSz" for="des" forName="childText4" refType="primFontSz" refFor="des" refForName="parentText4" op="lte"/>
+                  <dgm:constr type="primFontSz" for="des" forName="childText5" refType="primFontSz" refFor="des" refForName="parentText4" op="lte"/>
+                  <dgm:constr type="primFontSz" for="des" forName="childText1" refType="primFontSz" refFor="des" refForName="parentText5" op="lte"/>
+                  <dgm:constr type="primFontSz" for="des" forName="childText2" refType="primFontSz" refFor="des" refForName="parentText5" op="lte"/>
+                  <dgm:constr type="primFontSz" for="des" forName="childText3" refType="primFontSz" refFor="des" refForName="parentText5" op="lte"/>
+                  <dgm:constr type="primFontSz" for="des" forName="childText4" refType="primFontSz" refFor="des" refForName="parentText5" op="lte"/>
+                  <dgm:constr type="primFontSz" for="des" forName="childText5" refType="primFontSz" refFor="des" refForName="parentText5" op="lte"/>
+                  <dgm:constr type="primFontSz" for="des" forName="parentText2" refType="primFontSz" refFor="des" refForName="parentText1" op="equ"/>
+                  <dgm:constr type="primFontSz" for="des" forName="parentText3" refType="primFontSz" refFor="des" refForName="parentText1" op="equ"/>
+                  <dgm:constr type="primFontSz" for="des" forName="parentText4" refType="primFontSz" refFor="des" refForName="parentText1" op="equ"/>
+                  <dgm:constr type="primFontSz" for="des" forName="parentText5" refType="primFontSz" refFor="des" refForName="parentText1" op="equ"/>
+                  <dgm:constr type="primFontSz" for="des" forName="childText2" refType="primFontSz" refFor="des" refForName="childText1" op="equ"/>
+                  <dgm:constr type="primFontSz" for="des" forName="childText3" refType="primFontSz" refFor="des" refForName="childText1" op="equ"/>
+                  <dgm:constr type="primFontSz" for="des" forName="childText4" refType="primFontSz" refFor="des" refForName="childText1" op="equ"/>
+                  <dgm:constr type="primFontSz" for="des" forName="childText5" refType="primFontSz" refFor="des" refForName="childText1" op="equ"/>
+                  <dgm:constr type="l" for="ch" forName="childText1" refType="w" fact="0.81518"/>
+                  <dgm:constr type="t" for="ch" forName="childText1" refType="h" fact="0.1997"/>
+                  <dgm:constr type="w" for="ch" forName="childText1" refType="w" fact="0.18482"/>
+                  <dgm:constr type="h" for="ch" forName="childText1" refType="h" fact="0.4763"/>
+                  <dgm:constr type="l" for="ch" forName="childText2" refType="w" fact="0.63036"/>
+                  <dgm:constr type="t" for="ch" forName="childText2" refType="h" fact="0.2862"/>
+                  <dgm:constr type="w" for="ch" forName="childText2" refType="w" fact="0.18482"/>
+                  <dgm:constr type="h" for="ch" forName="childText2" refType="h" fact="0.4763"/>
+                  <dgm:constr type="l" for="ch" forName="childText3" refType="w" fact="0.44554"/>
+                  <dgm:constr type="t" for="ch" forName="childText3" refType="h" fact="0.3727"/>
+                  <dgm:constr type="w" for="ch" forName="childText3" refType="w" fact="0.18482"/>
+                  <dgm:constr type="h" for="ch" forName="childText3" refType="h" fact="0.4763"/>
+                  <dgm:constr type="l" for="ch" forName="childText4" refType="w" fact="0.26072"/>
+                  <dgm:constr type="t" for="ch" forName="childText4" refType="h" fact="0.4592"/>
+                  <dgm:constr type="w" for="ch" forName="childText4" refType="w" fact="0.18482"/>
+                  <dgm:constr type="h" for="ch" forName="childText4" refType="h" fact="0.4763"/>
+                  <dgm:constr type="l" for="ch" forName="childText5" refType="w" fact="0.0759"/>
+                  <dgm:constr type="t" for="ch" forName="childText5" refType="h" fact="0.5457"/>
+                  <dgm:constr type="w" for="ch" forName="childText5" refType="w" fact="0.18482"/>
+                  <dgm:constr type="h" for="ch" forName="childText5" refType="h" fact="0.4763"/>
+                  <dgm:constr type="l" for="ch" forName="parentText1" refType="w" fact="0"/>
+                  <dgm:constr type="t" for="ch" forName="parentText1" refType="h" fact="0"/>
+                  <dgm:constr type="w" for="ch" forName="parentText1" refType="w"/>
+                  <dgm:constr type="h" for="ch" forName="parentText1" refType="h" fact="0.2594"/>
+                  <dgm:constr type="l" for="ch" forName="parentText2" refType="w" fact="0"/>
+                  <dgm:constr type="t" for="ch" forName="parentText2" refType="h" fact="0.0865"/>
+                  <dgm:constr type="w" for="ch" forName="parentText2" refType="w" fact="0.8152"/>
+                  <dgm:constr type="h" for="ch" forName="parentText2" refType="h" fact="0.2594"/>
+                  <dgm:constr type="l" for="ch" forName="parentText3" refType="w" fact="0"/>
+                  <dgm:constr type="t" for="ch" forName="parentText3" refType="h" fact="0.173"/>
+                  <dgm:constr type="w" for="ch" forName="parentText3" refType="w" fact="0.6304"/>
+                  <dgm:constr type="h" for="ch" forName="parentText3" refType="h" fact="0.2594"/>
+                  <dgm:constr type="l" for="ch" forName="parentText4" refType="w" fact="0"/>
+                  <dgm:constr type="t" for="ch" forName="parentText4" refType="h" fact="0.2595"/>
+                  <dgm:constr type="w" for="ch" forName="parentText4" refType="w" fact="0.4455"/>
+                  <dgm:constr type="h" for="ch" forName="parentText4" refType="h" fact="0.2594"/>
+                  <dgm:constr type="l" for="ch" forName="parentText5" refType="w" fact="0"/>
+                  <dgm:constr type="t" for="ch" forName="parentText5" refType="h" fact="0.346"/>
+                  <dgm:constr type="w" for="ch" forName="parentText5" refType="w" fact="0.2607"/>
+                  <dgm:constr type="h" for="ch" forName="parentText5" refType="h" fact="0.2594"/>
+                </dgm:constrLst>
+              </dgm:else>
+            </dgm:choose>
+          </dgm:else>
+        </dgm:choose>
+      </dgm:else>
+    </dgm:choose>
+    <dgm:forEach name="Name52" axis="ch" ptType="node" cnt="1">
+      <dgm:layoutNode name="parentText1" styleLbl="node1">
+        <dgm:varLst>
+          <dgm:chMax/>
+          <dgm:chPref val="3"/>
+          <dgm:bulletEnabled val="1"/>
+        </dgm:varLst>
+        <dgm:choose name="Name53">
+          <dgm:if name="Name54" func="var" arg="dir" op="equ" val="norm">
+            <dgm:alg type="tx">
+              <dgm:param type="parTxLTRAlign" val="l"/>
+            </dgm:alg>
+            <dgm:shape xmlns:r="http://schemas.openxmlformats.org/officeDocument/2006/relationships" type="rightArrow" r:blip="">
+              <dgm:adjLst>
+                <dgm:adj idx="1" val="0.5"/>
+                <dgm:adj idx="2" val="0.5"/>
+              </dgm:adjLst>
+            </dgm:shape>
+            <dgm:constrLst>
+              <dgm:constr type="lMarg" refType="primFontSz" fact="0.3"/>
+              <dgm:constr type="rMarg" val="20"/>
+              <dgm:constr type="tMarg" refType="primFontSz" fact="0.3"/>
+              <dgm:constr type="bMarg" refType="h" fact="0.45"/>
+            </dgm:constrLst>
+          </dgm:if>
+          <dgm:else name="Name55">
+            <dgm:alg type="tx">
+              <dgm:param type="parTxLTRAlign" val="r"/>
+            </dgm:alg>
+            <dgm:shape xmlns:r="http://schemas.openxmlformats.org/officeDocument/2006/relationships" type="leftArrow" r:blip="">
+              <dgm:adjLst>
+                <dgm:adj idx="1" val="0.5"/>
+                <dgm:adj idx="2" val="0.5"/>
+              </dgm:adjLst>
+            </dgm:shape>
+            <dgm:constrLst>
+              <dgm:constr type="lMarg" val="20"/>
+              <dgm:constr type="rMarg" refType="primFontSz" fact="0.3"/>
+              <dgm:constr type="tMarg" refType="primFontSz" fact="0.3"/>
+              <dgm:constr type="bMarg" refType="h" fact="0.45"/>
+            </dgm:constrLst>
+          </dgm:else>
+        </dgm:choose>
+        <dgm:presOf axis="self" ptType="node"/>
+        <dgm:ruleLst>
+          <dgm:rule type="primFontSz" val="5" fact="NaN" max="NaN"/>
+        </dgm:ruleLst>
+      </dgm:layoutNode>
+      <dgm:choose name="Name56">
+        <dgm:if name="Name57" axis="ch" ptType="node" func="cnt" op="gte" val="1">
+          <dgm:layoutNode name="childText1" styleLbl="solidAlignAcc1">
+            <dgm:varLst>
+              <dgm:chMax val="0"/>
+              <dgm:chPref val="0"/>
+              <dgm:bulletEnabled val="1"/>
+            </dgm:varLst>
+            <dgm:alg type="tx">
+              <dgm:param type="txAnchorVert" val="t"/>
+              <dgm:param type="parTxLTRAlign" val="l"/>
+            </dgm:alg>
+            <dgm:shape xmlns:r="http://schemas.openxmlformats.org/officeDocument/2006/relationships" type="rect" r:blip="">
+              <dgm:adjLst/>
+            </dgm:shape>
+            <dgm:presOf axis="des" ptType="node"/>
+            <dgm:constrLst>
+              <dgm:constr type="lMarg" refType="primFontSz" fact="0.3"/>
+              <dgm:constr type="rMarg" refType="primFontSz" fact="0.3"/>
+              <dgm:constr type="tMarg" refType="primFontSz" fact="0.3"/>
+              <dgm:constr type="bMarg" refType="primFontSz" fact="0.3"/>
+            </dgm:constrLst>
+            <dgm:ruleLst>
+              <dgm:rule type="primFontSz" val="5" fact="NaN" max="NaN"/>
+            </dgm:ruleLst>
+          </dgm:layoutNode>
+        </dgm:if>
+        <dgm:else name="Name58"/>
+      </dgm:choose>
+    </dgm:forEach>
+    <dgm:forEach name="Name59" axis="ch" ptType="node" st="2" cnt="1">
+      <dgm:layoutNode name="parentText2" styleLbl="node1">
+        <dgm:varLst>
+          <dgm:chMax/>
+          <dgm:chPref val="3"/>
+          <dgm:bulletEnabled val="1"/>
+        </dgm:varLst>
+        <dgm:choose name="Name60">
+          <dgm:if name="Name61" func="var" arg="dir" op="equ" val="norm">
+            <dgm:alg type="tx">
+              <dgm:param type="parTxLTRAlign" val="l"/>
+            </dgm:alg>
+            <dgm:shape xmlns:r="http://schemas.openxmlformats.org/officeDocument/2006/relationships" type="rightArrow" r:blip="">
+              <dgm:adjLst>
+                <dgm:adj idx="1" val="0.5"/>
+                <dgm:adj idx="2" val="0.5"/>
+              </dgm:adjLst>
+            </dgm:shape>
+            <dgm:constrLst>
+              <dgm:constr type="lMarg" refType="primFontSz" fact="0.3"/>
+              <dgm:constr type="rMarg" val="20"/>
+              <dgm:constr type="tMarg" refType="primFontSz" fact="0.3"/>
+              <dgm:constr type="bMarg" refType="h" fact="0.45"/>
+            </dgm:constrLst>
+          </dgm:if>
+          <dgm:else name="Name62">
+            <dgm:alg type="tx">
+              <dgm:param type="parTxLTRAlign" val="r"/>
+            </dgm:alg>
+            <dgm:shape xmlns:r="http://schemas.openxmlformats.org/officeDocument/2006/relationships" type="leftArrow" r:blip="">
+              <dgm:adjLst>
+                <dgm:adj idx="1" val="0.5"/>
+                <dgm:adj idx="2" val="0.5"/>
+              </dgm:adjLst>
+            </dgm:shape>
+            <dgm:constrLst>
+              <dgm:constr type="lMarg" val="20"/>
+              <dgm:constr type="rMarg" refType="primFontSz" fact="0.3"/>
+              <dgm:constr type="tMarg" refType="primFontSz" fact="0.3"/>
+              <dgm:constr type="bMarg" refType="h" fact="0.45"/>
+            </dgm:constrLst>
+          </dgm:else>
+        </dgm:choose>
+        <dgm:presOf axis="self" ptType="node"/>
+        <dgm:ruleLst>
+          <dgm:rule type="primFontSz" val="5" fact="NaN" max="NaN"/>
+        </dgm:ruleLst>
+      </dgm:layoutNode>
+      <dgm:choose name="Name63">
+        <dgm:if name="Name64" axis="ch" ptType="node" func="cnt" op="gte" val="1">
+          <dgm:layoutNode name="childText2" styleLbl="solidAlignAcc1">
+            <dgm:varLst>
+              <dgm:chMax val="0"/>
+              <dgm:chPref val="0"/>
+              <dgm:bulletEnabled val="1"/>
+            </dgm:varLst>
+            <dgm:alg type="tx">
+              <dgm:param type="txAnchorVert" val="t"/>
+              <dgm:param type="parTxLTRAlign" val="l"/>
+            </dgm:alg>
+            <dgm:shape xmlns:r="http://schemas.openxmlformats.org/officeDocument/2006/relationships" type="rect" r:blip="">
+              <dgm:adjLst/>
+            </dgm:shape>
+            <dgm:presOf axis="des" ptType="node"/>
+            <dgm:constrLst>
+              <dgm:constr type="lMarg" refType="primFontSz" fact="0.3"/>
+              <dgm:constr type="rMarg" refType="primFontSz" fact="0.3"/>
+              <dgm:constr type="tMarg" refType="primFontSz" fact="0.3"/>
+              <dgm:constr type="bMarg" refType="primFontSz" fact="0.3"/>
+            </dgm:constrLst>
+            <dgm:ruleLst>
+              <dgm:rule type="primFontSz" val="5" fact="NaN" max="NaN"/>
+            </dgm:ruleLst>
+          </dgm:layoutNode>
+        </dgm:if>
+        <dgm:else name="Name65"/>
+      </dgm:choose>
+    </dgm:forEach>
+    <dgm:forEach name="Name66" axis="ch" ptType="node" st="3" cnt="1">
+      <dgm:layoutNode name="parentText3" styleLbl="node1">
+        <dgm:varLst>
+          <dgm:chMax/>
+          <dgm:chPref val="3"/>
+          <dgm:bulletEnabled val="1"/>
+        </dgm:varLst>
+        <dgm:choose name="Name67">
+          <dgm:if name="Name68" func="var" arg="dir" op="equ" val="norm">
+            <dgm:alg type="tx">
+              <dgm:param type="parTxLTRAlign" val="l"/>
+            </dgm:alg>
+            <dgm:shape xmlns:r="http://schemas.openxmlformats.org/officeDocument/2006/relationships" type="rightArrow" r:blip="">
+              <dgm:adjLst>
+                <dgm:adj idx="1" val="0.5"/>
+                <dgm:adj idx="2" val="0.5"/>
+              </dgm:adjLst>
+            </dgm:shape>
+            <dgm:constrLst>
+              <dgm:constr type="lMarg" refType="primFontSz" fact="0.3"/>
+              <dgm:constr type="rMarg" val="20"/>
+              <dgm:constr type="tMarg" refType="primFontSz" fact="0.3"/>
+              <dgm:constr type="bMarg" refType="h" fact="0.45"/>
+            </dgm:constrLst>
+          </dgm:if>
+          <dgm:else name="Name69">
+            <dgm:alg type="tx">
+              <dgm:param type="parTxLTRAlign" val="r"/>
+            </dgm:alg>
+            <dgm:shape xmlns:r="http://schemas.openxmlformats.org/officeDocument/2006/relationships" type="leftArrow" r:blip="">
+              <dgm:adjLst>
+                <dgm:adj idx="1" val="0.5"/>
+                <dgm:adj idx="2" val="0.5"/>
+              </dgm:adjLst>
+            </dgm:shape>
+            <dgm:constrLst>
+              <dgm:constr type="lMarg" val="20"/>
+              <dgm:constr type="rMarg" refType="primFontSz" fact="0.3"/>
+              <dgm:constr type="tMarg" refType="primFontSz" fact="0.3"/>
+              <dgm:constr type="bMarg" refType="h" fact="0.45"/>
+            </dgm:constrLst>
+          </dgm:else>
+        </dgm:choose>
+        <dgm:presOf axis="self" ptType="node"/>
+        <dgm:ruleLst>
+          <dgm:rule type="primFontSz" val="5" fact="NaN" max="NaN"/>
+        </dgm:ruleLst>
+      </dgm:layoutNode>
+      <dgm:choose name="Name70">
+        <dgm:if name="Name71" axis="ch" ptType="node" func="cnt" op="gte" val="1">
+          <dgm:layoutNode name="childText3" styleLbl="solidAlignAcc1">
+            <dgm:varLst>
+              <dgm:chMax val="0"/>
+              <dgm:chPref val="0"/>
+              <dgm:bulletEnabled val="1"/>
+            </dgm:varLst>
+            <dgm:alg type="tx">
+              <dgm:param type="txAnchorVert" val="t"/>
+              <dgm:param type="parTxLTRAlign" val="l"/>
+            </dgm:alg>
+            <dgm:shape xmlns:r="http://schemas.openxmlformats.org/officeDocument/2006/relationships" type="rect" r:blip="">
+              <dgm:adjLst/>
+            </dgm:shape>
+            <dgm:presOf axis="des" ptType="node"/>
+            <dgm:constrLst>
+              <dgm:constr type="lMarg" refType="primFontSz" fact="0.3"/>
+              <dgm:constr type="rMarg" refType="primFontSz" fact="0.3"/>
+              <dgm:constr type="tMarg" refType="primFontSz" fact="0.3"/>
+              <dgm:constr type="bMarg" refType="primFontSz" fact="0.3"/>
+            </dgm:constrLst>
+            <dgm:ruleLst>
+              <dgm:rule type="primFontSz" val="5" fact="NaN" max="NaN"/>
+            </dgm:ruleLst>
+          </dgm:layoutNode>
+        </dgm:if>
+        <dgm:else name="Name72"/>
+      </dgm:choose>
+    </dgm:forEach>
+    <dgm:forEach name="Name73" axis="ch" ptType="node" st="4" cnt="1">
+      <dgm:layoutNode name="parentText4" styleLbl="node1">
+        <dgm:varLst>
+          <dgm:chMax/>
+          <dgm:chPref val="3"/>
+          <dgm:bulletEnabled val="1"/>
+        </dgm:varLst>
+        <dgm:choose name="Name74">
+          <dgm:if name="Name75" func="var" arg="dir" op="equ" val="norm">
+            <dgm:alg type="tx">
+              <dgm:param type="parTxLTRAlign" val="l"/>
+            </dgm:alg>
+            <dgm:shape xmlns:r="http://schemas.openxmlformats.org/officeDocument/2006/relationships" type="rightArrow" r:blip="">
+              <dgm:adjLst>
+                <dgm:adj idx="1" val="0.5"/>
+                <dgm:adj idx="2" val="0.5"/>
+              </dgm:adjLst>
+            </dgm:shape>
+            <dgm:constrLst>
+              <dgm:constr type="lMarg" refType="primFontSz" fact="0.3"/>
+              <dgm:constr type="rMarg" val="20"/>
+              <dgm:constr type="tMarg" refType="primFontSz" fact="0.3"/>
+              <dgm:constr type="bMarg" refType="h" fact="0.45"/>
+            </dgm:constrLst>
+          </dgm:if>
+          <dgm:else name="Name76">
+            <dgm:alg type="tx">
+              <dgm:param type="parTxLTRAlign" val="r"/>
+            </dgm:alg>
+            <dgm:shape xmlns:r="http://schemas.openxmlformats.org/officeDocument/2006/relationships" type="leftArrow" r:blip="">
+              <dgm:adjLst>
+                <dgm:adj idx="1" val="0.5"/>
+                <dgm:adj idx="2" val="0.5"/>
+              </dgm:adjLst>
+            </dgm:shape>
+            <dgm:constrLst>
+              <dgm:constr type="lMarg" val="20"/>
+              <dgm:constr type="rMarg" refType="primFontSz" fact="0.3"/>
+              <dgm:constr type="tMarg" refType="primFontSz" fact="0.3"/>
+              <dgm:constr type="bMarg" refType="h" fact="0.45"/>
+            </dgm:constrLst>
+          </dgm:else>
+        </dgm:choose>
+        <dgm:presOf axis="self" ptType="node"/>
+        <dgm:ruleLst>
+          <dgm:rule type="primFontSz" val="5" fact="NaN" max="NaN"/>
+        </dgm:ruleLst>
+      </dgm:layoutNode>
+      <dgm:choose name="Name77">
+        <dgm:if name="Name78" axis="ch" ptType="node" func="cnt" op="gte" val="1">
+          <dgm:layoutNode name="childText4" styleLbl="solidAlignAcc1">
+            <dgm:varLst>
+              <dgm:chMax val="0"/>
+              <dgm:chPref val="0"/>
+              <dgm:bulletEnabled val="1"/>
+            </dgm:varLst>
+            <dgm:alg type="tx">
+              <dgm:param type="txAnchorVert" val="t"/>
+              <dgm:param type="parTxLTRAlign" val="l"/>
+            </dgm:alg>
+            <dgm:shape xmlns:r="http://schemas.openxmlformats.org/officeDocument/2006/relationships" type="rect" r:blip="">
+              <dgm:adjLst/>
+            </dgm:shape>
+            <dgm:presOf axis="des" ptType="node"/>
+            <dgm:constrLst>
+              <dgm:constr type="lMarg" refType="primFontSz" fact="0.3"/>
+              <dgm:constr type="rMarg" refType="primFontSz" fact="0.3"/>
+              <dgm:constr type="tMarg" refType="primFontSz" fact="0.3"/>
+              <dgm:constr type="bMarg" refType="primFontSz" fact="0.3"/>
+            </dgm:constrLst>
+            <dgm:ruleLst>
+              <dgm:rule type="primFontSz" val="5" fact="NaN" max="NaN"/>
+            </dgm:ruleLst>
+          </dgm:layoutNode>
+        </dgm:if>
+        <dgm:else name="Name79"/>
+      </dgm:choose>
+    </dgm:forEach>
+    <dgm:forEach name="Name80" axis="ch" ptType="node" st="5" cnt="1">
+      <dgm:layoutNode name="parentText5" styleLbl="node1">
+        <dgm:varLst>
+          <dgm:chMax/>
+          <dgm:chPref val="3"/>
+          <dgm:bulletEnabled val="1"/>
+        </dgm:varLst>
+        <dgm:choose name="Name81">
+          <dgm:if name="Name82" func="var" arg="dir" op="equ" val="norm">
+            <dgm:alg type="tx">
+              <dgm:param type="parTxLTRAlign" val="l"/>
+            </dgm:alg>
+            <dgm:shape xmlns:r="http://schemas.openxmlformats.org/officeDocument/2006/relationships" type="rightArrow" r:blip="">
+              <dgm:adjLst>
+                <dgm:adj idx="1" val="0.5"/>
+                <dgm:adj idx="2" val="0.5"/>
+              </dgm:adjLst>
+            </dgm:shape>
+            <dgm:constrLst>
+              <dgm:constr type="lMarg" refType="primFontSz" fact="0.3"/>
+              <dgm:constr type="rMarg" val="20"/>
+              <dgm:constr type="tMarg" refType="primFontSz" fact="0.3"/>
+              <dgm:constr type="bMarg" refType="h" fact="0.45"/>
+            </dgm:constrLst>
+          </dgm:if>
+          <dgm:else name="Name83">
+            <dgm:alg type="tx">
+              <dgm:param type="parTxLTRAlign" val="r"/>
+            </dgm:alg>
+            <dgm:shape xmlns:r="http://schemas.openxmlformats.org/officeDocument/2006/relationships" type="leftArrow" r:blip="">
+              <dgm:adjLst>
+                <dgm:adj idx="1" val="0.5"/>
+                <dgm:adj idx="2" val="0.5"/>
+              </dgm:adjLst>
+            </dgm:shape>
+            <dgm:constrLst>
+              <dgm:constr type="lMarg" val="20"/>
+              <dgm:constr type="rMarg" refType="primFontSz" fact="0.3"/>
+              <dgm:constr type="tMarg" refType="primFontSz" fact="0.3"/>
+              <dgm:constr type="bMarg" refType="h" fact="0.45"/>
+            </dgm:constrLst>
+          </dgm:else>
+        </dgm:choose>
+        <dgm:presOf axis="self" ptType="node"/>
+        <dgm:ruleLst>
+          <dgm:rule type="primFontSz" val="5" fact="NaN" max="NaN"/>
+        </dgm:ruleLst>
+      </dgm:layoutNode>
+      <dgm:choose name="Name84">
+        <dgm:if name="Name85" axis="ch" ptType="node" func="cnt" op="gte" val="1">
+          <dgm:layoutNode name="childText5" styleLbl="solidAlignAcc1">
+            <dgm:varLst>
+              <dgm:chMax val="0"/>
+              <dgm:chPref val="0"/>
+              <dgm:bulletEnabled val="1"/>
+            </dgm:varLst>
+            <dgm:alg type="tx">
+              <dgm:param type="txAnchorVert" val="t"/>
+              <dgm:param type="parTxLTRAlign" val="l"/>
+            </dgm:alg>
+            <dgm:shape xmlns:r="http://schemas.openxmlformats.org/officeDocument/2006/relationships" type="rect" r:blip="">
+              <dgm:adjLst/>
+            </dgm:shape>
+            <dgm:presOf axis="des" ptType="node"/>
+            <dgm:constrLst>
+              <dgm:constr type="lMarg" refType="primFontSz" fact="0.3"/>
+              <dgm:constr type="rMarg" refType="primFontSz" fact="0.3"/>
+              <dgm:constr type="tMarg" refType="primFontSz" fact="0.3"/>
+              <dgm:constr type="bMarg" refType="primFontSz" fact="0.3"/>
+            </dgm:constrLst>
+            <dgm:ruleLst>
+              <dgm:rule type="primFontSz" val="5" fact="NaN" max="NaN"/>
+            </dgm:ruleLst>
+          </dgm:layoutNode>
+        </dgm:if>
+        <dgm:else name="Name86"/>
+      </dgm:choose>
+    </dgm:forEach>
+  </dgm:layoutNode>
+</dgm:layoutDef>
+</file>
+
+<file path=ppt/diagrams/layout4.xml><?xml version="1.0" encoding="utf-8"?>
 <dgm:layoutDef xmlns:dgm="http://schemas.openxmlformats.org/drawingml/2006/diagram" xmlns:a="http://schemas.openxmlformats.org/drawingml/2006/main" uniqueId="urn:microsoft.com/office/officeart/2024/3/layout/hArchList1">
   <dgm:title val="Horizontal Text Blocks"/>
   <dgm:desc val="Short bits of text with formatted headers. Use as an easier-to-read alternative to a bulleted list."/>
@@ -7792,6 +10620,1040 @@
 </file>
 
 <file path=ppt/diagrams/quickStyle3.xml><?xml version="1.0" encoding="utf-8"?>
+<dgm:styleDef xmlns:dgm="http://schemas.openxmlformats.org/drawingml/2006/diagram" xmlns:a="http://schemas.openxmlformats.org/drawingml/2006/main" uniqueId="urn:microsoft.com/office/officeart/2005/8/quickstyle/simple1">
+  <dgm:title val=""/>
+  <dgm:desc val=""/>
+  <dgm:catLst>
+    <dgm:cat type="simple" pri="10100"/>
+  </dgm:catLst>
+  <dgm:scene3d>
+    <a:camera prst="orthographicFront"/>
+    <a:lightRig rig="threePt" dir="t"/>
+  </dgm:scene3d>
+  <dgm:styleLbl name="node0">
+    <dgm:scene3d>
+      <a:camera prst="orthographicFront"/>
+      <a:lightRig rig="threePt" dir="t"/>
+    </dgm:scene3d>
+    <dgm:sp3d/>
+    <dgm:txPr/>
+    <dgm:style>
+      <a:lnRef idx="2">
+        <a:scrgbClr r="0" g="0" b="0"/>
+      </a:lnRef>
+      <a:fillRef idx="1">
+        <a:scrgbClr r="0" g="0" b="0"/>
+      </a:fillRef>
+      <a:effectRef idx="0">
+        <a:scrgbClr r="0" g="0" b="0"/>
+      </a:effectRef>
+      <a:fontRef idx="minor">
+        <a:schemeClr val="lt1"/>
+      </a:fontRef>
+    </dgm:style>
+  </dgm:styleLbl>
+  <dgm:styleLbl name="lnNode1">
+    <dgm:scene3d>
+      <a:camera prst="orthographicFront"/>
+      <a:lightRig rig="threePt" dir="t"/>
+    </dgm:scene3d>
+    <dgm:sp3d/>
+    <dgm:txPr/>
+    <dgm:style>
+      <a:lnRef idx="2">
+        <a:scrgbClr r="0" g="0" b="0"/>
+      </a:lnRef>
+      <a:fillRef idx="1">
+        <a:scrgbClr r="0" g="0" b="0"/>
+      </a:fillRef>
+      <a:effectRef idx="0">
+        <a:scrgbClr r="0" g="0" b="0"/>
+      </a:effectRef>
+      <a:fontRef idx="minor">
+        <a:schemeClr val="lt1"/>
+      </a:fontRef>
+    </dgm:style>
+  </dgm:styleLbl>
+  <dgm:styleLbl name="vennNode1">
+    <dgm:scene3d>
+      <a:camera prst="orthographicFront"/>
+      <a:lightRig rig="threePt" dir="t"/>
+    </dgm:scene3d>
+    <dgm:sp3d/>
+    <dgm:txPr/>
+    <dgm:style>
+      <a:lnRef idx="2">
+        <a:scrgbClr r="0" g="0" b="0"/>
+      </a:lnRef>
+      <a:fillRef idx="1">
+        <a:scrgbClr r="0" g="0" b="0"/>
+      </a:fillRef>
+      <a:effectRef idx="0">
+        <a:scrgbClr r="0" g="0" b="0"/>
+      </a:effectRef>
+      <a:fontRef idx="minor">
+        <a:schemeClr val="tx1"/>
+      </a:fontRef>
+    </dgm:style>
+  </dgm:styleLbl>
+  <dgm:styleLbl name="alignNode1">
+    <dgm:scene3d>
+      <a:camera prst="orthographicFront"/>
+      <a:lightRig rig="threePt" dir="t"/>
+    </dgm:scene3d>
+    <dgm:sp3d/>
+    <dgm:txPr/>
+    <dgm:style>
+      <a:lnRef idx="2">
+        <a:scrgbClr r="0" g="0" b="0"/>
+      </a:lnRef>
+      <a:fillRef idx="1">
+        <a:scrgbClr r="0" g="0" b="0"/>
+      </a:fillRef>
+      <a:effectRef idx="0">
+        <a:scrgbClr r="0" g="0" b="0"/>
+      </a:effectRef>
+      <a:fontRef idx="minor">
+        <a:schemeClr val="lt1"/>
+      </a:fontRef>
+    </dgm:style>
+  </dgm:styleLbl>
+  <dgm:styleLbl name="node1">
+    <dgm:scene3d>
+      <a:camera prst="orthographicFront"/>
+      <a:lightRig rig="threePt" dir="t"/>
+    </dgm:scene3d>
+    <dgm:sp3d/>
+    <dgm:txPr/>
+    <dgm:style>
+      <a:lnRef idx="2">
+        <a:scrgbClr r="0" g="0" b="0"/>
+      </a:lnRef>
+      <a:fillRef idx="1">
+        <a:scrgbClr r="0" g="0" b="0"/>
+      </a:fillRef>
+      <a:effectRef idx="0">
+        <a:scrgbClr r="0" g="0" b="0"/>
+      </a:effectRef>
+      <a:fontRef idx="minor">
+        <a:schemeClr val="lt1"/>
+      </a:fontRef>
+    </dgm:style>
+  </dgm:styleLbl>
+  <dgm:styleLbl name="node2">
+    <dgm:scene3d>
+      <a:camera prst="orthographicFront"/>
+      <a:lightRig rig="threePt" dir="t"/>
+    </dgm:scene3d>
+    <dgm:sp3d/>
+    <dgm:txPr/>
+    <dgm:style>
+      <a:lnRef idx="2">
+        <a:scrgbClr r="0" g="0" b="0"/>
+      </a:lnRef>
+      <a:fillRef idx="1">
+        <a:scrgbClr r="0" g="0" b="0"/>
+      </a:fillRef>
+      <a:effectRef idx="0">
+        <a:scrgbClr r="0" g="0" b="0"/>
+      </a:effectRef>
+      <a:fontRef idx="minor">
+        <a:schemeClr val="lt1"/>
+      </a:fontRef>
+    </dgm:style>
+  </dgm:styleLbl>
+  <dgm:styleLbl name="node3">
+    <dgm:scene3d>
+      <a:camera prst="orthographicFront"/>
+      <a:lightRig rig="threePt" dir="t"/>
+    </dgm:scene3d>
+    <dgm:sp3d/>
+    <dgm:txPr/>
+    <dgm:style>
+      <a:lnRef idx="2">
+        <a:scrgbClr r="0" g="0" b="0"/>
+      </a:lnRef>
+      <a:fillRef idx="1">
+        <a:scrgbClr r="0" g="0" b="0"/>
+      </a:fillRef>
+      <a:effectRef idx="0">
+        <a:scrgbClr r="0" g="0" b="0"/>
+      </a:effectRef>
+      <a:fontRef idx="minor">
+        <a:schemeClr val="lt1"/>
+      </a:fontRef>
+    </dgm:style>
+  </dgm:styleLbl>
+  <dgm:styleLbl name="node4">
+    <dgm:scene3d>
+      <a:camera prst="orthographicFront"/>
+      <a:lightRig rig="threePt" dir="t"/>
+    </dgm:scene3d>
+    <dgm:sp3d/>
+    <dgm:txPr/>
+    <dgm:style>
+      <a:lnRef idx="2">
+        <a:scrgbClr r="0" g="0" b="0"/>
+      </a:lnRef>
+      <a:fillRef idx="1">
+        <a:scrgbClr r="0" g="0" b="0"/>
+      </a:fillRef>
+      <a:effectRef idx="0">
+        <a:scrgbClr r="0" g="0" b="0"/>
+      </a:effectRef>
+      <a:fontRef idx="minor">
+        <a:schemeClr val="lt1"/>
+      </a:fontRef>
+    </dgm:style>
+  </dgm:styleLbl>
+  <dgm:styleLbl name="fgImgPlace1">
+    <dgm:scene3d>
+      <a:camera prst="orthographicFront"/>
+      <a:lightRig rig="threePt" dir="t"/>
+    </dgm:scene3d>
+    <dgm:sp3d/>
+    <dgm:txPr/>
+    <dgm:style>
+      <a:lnRef idx="2">
+        <a:scrgbClr r="0" g="0" b="0"/>
+      </a:lnRef>
+      <a:fillRef idx="1">
+        <a:scrgbClr r="0" g="0" b="0"/>
+      </a:fillRef>
+      <a:effectRef idx="0">
+        <a:scrgbClr r="0" g="0" b="0"/>
+      </a:effectRef>
+      <a:fontRef idx="minor"/>
+    </dgm:style>
+  </dgm:styleLbl>
+  <dgm:styleLbl name="alignImgPlace1">
+    <dgm:scene3d>
+      <a:camera prst="orthographicFront"/>
+      <a:lightRig rig="threePt" dir="t"/>
+    </dgm:scene3d>
+    <dgm:sp3d/>
+    <dgm:txPr/>
+    <dgm:style>
+      <a:lnRef idx="2">
+        <a:scrgbClr r="0" g="0" b="0"/>
+      </a:lnRef>
+      <a:fillRef idx="1">
+        <a:scrgbClr r="0" g="0" b="0"/>
+      </a:fillRef>
+      <a:effectRef idx="0">
+        <a:scrgbClr r="0" g="0" b="0"/>
+      </a:effectRef>
+      <a:fontRef idx="minor"/>
+    </dgm:style>
+  </dgm:styleLbl>
+  <dgm:styleLbl name="bgImgPlace1">
+    <dgm:scene3d>
+      <a:camera prst="orthographicFront"/>
+      <a:lightRig rig="threePt" dir="t"/>
+    </dgm:scene3d>
+    <dgm:sp3d/>
+    <dgm:txPr/>
+    <dgm:style>
+      <a:lnRef idx="2">
+        <a:scrgbClr r="0" g="0" b="0"/>
+      </a:lnRef>
+      <a:fillRef idx="1">
+        <a:scrgbClr r="0" g="0" b="0"/>
+      </a:fillRef>
+      <a:effectRef idx="0">
+        <a:scrgbClr r="0" g="0" b="0"/>
+      </a:effectRef>
+      <a:fontRef idx="minor"/>
+    </dgm:style>
+  </dgm:styleLbl>
+  <dgm:styleLbl name="sibTrans2D1">
+    <dgm:scene3d>
+      <a:camera prst="orthographicFront"/>
+      <a:lightRig rig="threePt" dir="t"/>
+    </dgm:scene3d>
+    <dgm:sp3d/>
+    <dgm:txPr/>
+    <dgm:style>
+      <a:lnRef idx="0">
+        <a:scrgbClr r="0" g="0" b="0"/>
+      </a:lnRef>
+      <a:fillRef idx="1">
+        <a:scrgbClr r="0" g="0" b="0"/>
+      </a:fillRef>
+      <a:effectRef idx="0">
+        <a:scrgbClr r="0" g="0" b="0"/>
+      </a:effectRef>
+      <a:fontRef idx="minor">
+        <a:schemeClr val="lt1"/>
+      </a:fontRef>
+    </dgm:style>
+  </dgm:styleLbl>
+  <dgm:styleLbl name="fgSibTrans2D1">
+    <dgm:scene3d>
+      <a:camera prst="orthographicFront"/>
+      <a:lightRig rig="threePt" dir="t"/>
+    </dgm:scene3d>
+    <dgm:sp3d/>
+    <dgm:txPr/>
+    <dgm:style>
+      <a:lnRef idx="0">
+        <a:scrgbClr r="0" g="0" b="0"/>
+      </a:lnRef>
+      <a:fillRef idx="1">
+        <a:scrgbClr r="0" g="0" b="0"/>
+      </a:fillRef>
+      <a:effectRef idx="0">
+        <a:scrgbClr r="0" g="0" b="0"/>
+      </a:effectRef>
+      <a:fontRef idx="minor">
+        <a:schemeClr val="lt1"/>
+      </a:fontRef>
+    </dgm:style>
+  </dgm:styleLbl>
+  <dgm:styleLbl name="bgSibTrans2D1">
+    <dgm:scene3d>
+      <a:camera prst="orthographicFront"/>
+      <a:lightRig rig="threePt" dir="t"/>
+    </dgm:scene3d>
+    <dgm:sp3d/>
+    <dgm:txPr/>
+    <dgm:style>
+      <a:lnRef idx="0">
+        <a:scrgbClr r="0" g="0" b="0"/>
+      </a:lnRef>
+      <a:fillRef idx="1">
+        <a:scrgbClr r="0" g="0" b="0"/>
+      </a:fillRef>
+      <a:effectRef idx="0">
+        <a:scrgbClr r="0" g="0" b="0"/>
+      </a:effectRef>
+      <a:fontRef idx="minor">
+        <a:schemeClr val="lt1"/>
+      </a:fontRef>
+    </dgm:style>
+  </dgm:styleLbl>
+  <dgm:styleLbl name="sibTrans1D1">
+    <dgm:scene3d>
+      <a:camera prst="orthographicFront"/>
+      <a:lightRig rig="threePt" dir="t"/>
+    </dgm:scene3d>
+    <dgm:sp3d/>
+    <dgm:txPr/>
+    <dgm:style>
+      <a:lnRef idx="1">
+        <a:scrgbClr r="0" g="0" b="0"/>
+      </a:lnRef>
+      <a:fillRef idx="0">
+        <a:scrgbClr r="0" g="0" b="0"/>
+      </a:fillRef>
+      <a:effectRef idx="0">
+        <a:scrgbClr r="0" g="0" b="0"/>
+      </a:effectRef>
+      <a:fontRef idx="minor"/>
+    </dgm:style>
+  </dgm:styleLbl>
+  <dgm:styleLbl name="callout">
+    <dgm:scene3d>
+      <a:camera prst="orthographicFront"/>
+      <a:lightRig rig="threePt" dir="t"/>
+    </dgm:scene3d>
+    <dgm:sp3d/>
+    <dgm:txPr/>
+    <dgm:style>
+      <a:lnRef idx="2">
+        <a:scrgbClr r="0" g="0" b="0"/>
+      </a:lnRef>
+      <a:fillRef idx="1">
+        <a:scrgbClr r="0" g="0" b="0"/>
+      </a:fillRef>
+      <a:effectRef idx="0">
+        <a:scrgbClr r="0" g="0" b="0"/>
+      </a:effectRef>
+      <a:fontRef idx="minor"/>
+    </dgm:style>
+  </dgm:styleLbl>
+  <dgm:styleLbl name="asst0">
+    <dgm:scene3d>
+      <a:camera prst="orthographicFront"/>
+      <a:lightRig rig="threePt" dir="t"/>
+    </dgm:scene3d>
+    <dgm:sp3d/>
+    <dgm:txPr/>
+    <dgm:style>
+      <a:lnRef idx="2">
+        <a:scrgbClr r="0" g="0" b="0"/>
+      </a:lnRef>
+      <a:fillRef idx="1">
+        <a:scrgbClr r="0" g="0" b="0"/>
+      </a:fillRef>
+      <a:effectRef idx="0">
+        <a:scrgbClr r="0" g="0" b="0"/>
+      </a:effectRef>
+      <a:fontRef idx="minor">
+        <a:schemeClr val="lt1"/>
+      </a:fontRef>
+    </dgm:style>
+  </dgm:styleLbl>
+  <dgm:styleLbl name="asst1">
+    <dgm:scene3d>
+      <a:camera prst="orthographicFront"/>
+      <a:lightRig rig="threePt" dir="t"/>
+    </dgm:scene3d>
+    <dgm:sp3d/>
+    <dgm:txPr/>
+    <dgm:style>
+      <a:lnRef idx="2">
+        <a:scrgbClr r="0" g="0" b="0"/>
+      </a:lnRef>
+      <a:fillRef idx="1">
+        <a:scrgbClr r="0" g="0" b="0"/>
+      </a:fillRef>
+      <a:effectRef idx="0">
+        <a:scrgbClr r="0" g="0" b="0"/>
+      </a:effectRef>
+      <a:fontRef idx="minor">
+        <a:schemeClr val="lt1"/>
+      </a:fontRef>
+    </dgm:style>
+  </dgm:styleLbl>
+  <dgm:styleLbl name="asst2">
+    <dgm:scene3d>
+      <a:camera prst="orthographicFront"/>
+      <a:lightRig rig="threePt" dir="t"/>
+    </dgm:scene3d>
+    <dgm:sp3d/>
+    <dgm:txPr/>
+    <dgm:style>
+      <a:lnRef idx="2">
+        <a:scrgbClr r="0" g="0" b="0"/>
+      </a:lnRef>
+      <a:fillRef idx="1">
+        <a:scrgbClr r="0" g="0" b="0"/>
+      </a:fillRef>
+      <a:effectRef idx="0">
+        <a:scrgbClr r="0" g="0" b="0"/>
+      </a:effectRef>
+      <a:fontRef idx="minor">
+        <a:schemeClr val="lt1"/>
+      </a:fontRef>
+    </dgm:style>
+  </dgm:styleLbl>
+  <dgm:styleLbl name="asst3">
+    <dgm:scene3d>
+      <a:camera prst="orthographicFront"/>
+      <a:lightRig rig="threePt" dir="t"/>
+    </dgm:scene3d>
+    <dgm:sp3d/>
+    <dgm:txPr/>
+    <dgm:style>
+      <a:lnRef idx="2">
+        <a:scrgbClr r="0" g="0" b="0"/>
+      </a:lnRef>
+      <a:fillRef idx="1">
+        <a:scrgbClr r="0" g="0" b="0"/>
+      </a:fillRef>
+      <a:effectRef idx="0">
+        <a:scrgbClr r="0" g="0" b="0"/>
+      </a:effectRef>
+      <a:fontRef idx="minor">
+        <a:schemeClr val="lt1"/>
+      </a:fontRef>
+    </dgm:style>
+  </dgm:styleLbl>
+  <dgm:styleLbl name="asst4">
+    <dgm:scene3d>
+      <a:camera prst="orthographicFront"/>
+      <a:lightRig rig="threePt" dir="t"/>
+    </dgm:scene3d>
+    <dgm:sp3d/>
+    <dgm:txPr/>
+    <dgm:style>
+      <a:lnRef idx="2">
+        <a:scrgbClr r="0" g="0" b="0"/>
+      </a:lnRef>
+      <a:fillRef idx="1">
+        <a:scrgbClr r="0" g="0" b="0"/>
+      </a:fillRef>
+      <a:effectRef idx="0">
+        <a:scrgbClr r="0" g="0" b="0"/>
+      </a:effectRef>
+      <a:fontRef idx="minor">
+        <a:schemeClr val="lt1"/>
+      </a:fontRef>
+    </dgm:style>
+  </dgm:styleLbl>
+  <dgm:styleLbl name="parChTrans2D1">
+    <dgm:scene3d>
+      <a:camera prst="orthographicFront"/>
+      <a:lightRig rig="threePt" dir="t"/>
+    </dgm:scene3d>
+    <dgm:sp3d/>
+    <dgm:txPr/>
+    <dgm:style>
+      <a:lnRef idx="2">
+        <a:scrgbClr r="0" g="0" b="0"/>
+      </a:lnRef>
+      <a:fillRef idx="1">
+        <a:scrgbClr r="0" g="0" b="0"/>
+      </a:fillRef>
+      <a:effectRef idx="0">
+        <a:scrgbClr r="0" g="0" b="0"/>
+      </a:effectRef>
+      <a:fontRef idx="minor">
+        <a:schemeClr val="lt1"/>
+      </a:fontRef>
+    </dgm:style>
+  </dgm:styleLbl>
+  <dgm:styleLbl name="parChTrans2D2">
+    <dgm:scene3d>
+      <a:camera prst="orthographicFront"/>
+      <a:lightRig rig="threePt" dir="t"/>
+    </dgm:scene3d>
+    <dgm:sp3d/>
+    <dgm:txPr/>
+    <dgm:style>
+      <a:lnRef idx="2">
+        <a:scrgbClr r="0" g="0" b="0"/>
+      </a:lnRef>
+      <a:fillRef idx="1">
+        <a:scrgbClr r="0" g="0" b="0"/>
+      </a:fillRef>
+      <a:effectRef idx="0">
+        <a:scrgbClr r="0" g="0" b="0"/>
+      </a:effectRef>
+      <a:fontRef idx="minor">
+        <a:schemeClr val="lt1"/>
+      </a:fontRef>
+    </dgm:style>
+  </dgm:styleLbl>
+  <dgm:styleLbl name="parChTrans2D3">
+    <dgm:scene3d>
+      <a:camera prst="orthographicFront"/>
+      <a:lightRig rig="threePt" dir="t"/>
+    </dgm:scene3d>
+    <dgm:sp3d/>
+    <dgm:txPr/>
+    <dgm:style>
+      <a:lnRef idx="2">
+        <a:scrgbClr r="0" g="0" b="0"/>
+      </a:lnRef>
+      <a:fillRef idx="1">
+        <a:scrgbClr r="0" g="0" b="0"/>
+      </a:fillRef>
+      <a:effectRef idx="0">
+        <a:scrgbClr r="0" g="0" b="0"/>
+      </a:effectRef>
+      <a:fontRef idx="minor">
+        <a:schemeClr val="lt1"/>
+      </a:fontRef>
+    </dgm:style>
+  </dgm:styleLbl>
+  <dgm:styleLbl name="parChTrans2D4">
+    <dgm:scene3d>
+      <a:camera prst="orthographicFront"/>
+      <a:lightRig rig="threePt" dir="t"/>
+    </dgm:scene3d>
+    <dgm:sp3d/>
+    <dgm:txPr/>
+    <dgm:style>
+      <a:lnRef idx="2">
+        <a:scrgbClr r="0" g="0" b="0"/>
+      </a:lnRef>
+      <a:fillRef idx="1">
+        <a:scrgbClr r="0" g="0" b="0"/>
+      </a:fillRef>
+      <a:effectRef idx="0">
+        <a:scrgbClr r="0" g="0" b="0"/>
+      </a:effectRef>
+      <a:fontRef idx="minor">
+        <a:schemeClr val="lt1"/>
+      </a:fontRef>
+    </dgm:style>
+  </dgm:styleLbl>
+  <dgm:styleLbl name="parChTrans1D1">
+    <dgm:scene3d>
+      <a:camera prst="orthographicFront"/>
+      <a:lightRig rig="threePt" dir="t"/>
+    </dgm:scene3d>
+    <dgm:sp3d/>
+    <dgm:txPr/>
+    <dgm:style>
+      <a:lnRef idx="2">
+        <a:scrgbClr r="0" g="0" b="0"/>
+      </a:lnRef>
+      <a:fillRef idx="0">
+        <a:scrgbClr r="0" g="0" b="0"/>
+      </a:fillRef>
+      <a:effectRef idx="0">
+        <a:scrgbClr r="0" g="0" b="0"/>
+      </a:effectRef>
+      <a:fontRef idx="minor"/>
+    </dgm:style>
+  </dgm:styleLbl>
+  <dgm:styleLbl name="parChTrans1D2">
+    <dgm:scene3d>
+      <a:camera prst="orthographicFront"/>
+      <a:lightRig rig="threePt" dir="t"/>
+    </dgm:scene3d>
+    <dgm:sp3d/>
+    <dgm:txPr/>
+    <dgm:style>
+      <a:lnRef idx="2">
+        <a:scrgbClr r="0" g="0" b="0"/>
+      </a:lnRef>
+      <a:fillRef idx="0">
+        <a:scrgbClr r="0" g="0" b="0"/>
+      </a:fillRef>
+      <a:effectRef idx="0">
+        <a:scrgbClr r="0" g="0" b="0"/>
+      </a:effectRef>
+      <a:fontRef idx="minor"/>
+    </dgm:style>
+  </dgm:styleLbl>
+  <dgm:styleLbl name="parChTrans1D3">
+    <dgm:scene3d>
+      <a:camera prst="orthographicFront"/>
+      <a:lightRig rig="threePt" dir="t"/>
+    </dgm:scene3d>
+    <dgm:sp3d/>
+    <dgm:txPr/>
+    <dgm:style>
+      <a:lnRef idx="2">
+        <a:scrgbClr r="0" g="0" b="0"/>
+      </a:lnRef>
+      <a:fillRef idx="0">
+        <a:scrgbClr r="0" g="0" b="0"/>
+      </a:fillRef>
+      <a:effectRef idx="0">
+        <a:scrgbClr r="0" g="0" b="0"/>
+      </a:effectRef>
+      <a:fontRef idx="minor"/>
+    </dgm:style>
+  </dgm:styleLbl>
+  <dgm:styleLbl name="parChTrans1D4">
+    <dgm:scene3d>
+      <a:camera prst="orthographicFront"/>
+      <a:lightRig rig="threePt" dir="t"/>
+    </dgm:scene3d>
+    <dgm:sp3d/>
+    <dgm:txPr/>
+    <dgm:style>
+      <a:lnRef idx="2">
+        <a:scrgbClr r="0" g="0" b="0"/>
+      </a:lnRef>
+      <a:fillRef idx="0">
+        <a:scrgbClr r="0" g="0" b="0"/>
+      </a:fillRef>
+      <a:effectRef idx="0">
+        <a:scrgbClr r="0" g="0" b="0"/>
+      </a:effectRef>
+      <a:fontRef idx="minor"/>
+    </dgm:style>
+  </dgm:styleLbl>
+  <dgm:styleLbl name="fgAcc1">
+    <dgm:scene3d>
+      <a:camera prst="orthographicFront"/>
+      <a:lightRig rig="threePt" dir="t"/>
+    </dgm:scene3d>
+    <dgm:sp3d/>
+    <dgm:txPr/>
+    <dgm:style>
+      <a:lnRef idx="2">
+        <a:scrgbClr r="0" g="0" b="0"/>
+      </a:lnRef>
+      <a:fillRef idx="1">
+        <a:scrgbClr r="0" g="0" b="0"/>
+      </a:fillRef>
+      <a:effectRef idx="0">
+        <a:scrgbClr r="0" g="0" b="0"/>
+      </a:effectRef>
+      <a:fontRef idx="minor"/>
+    </dgm:style>
+  </dgm:styleLbl>
+  <dgm:styleLbl name="conFgAcc1">
+    <dgm:scene3d>
+      <a:camera prst="orthographicFront"/>
+      <a:lightRig rig="threePt" dir="t"/>
+    </dgm:scene3d>
+    <dgm:sp3d/>
+    <dgm:txPr/>
+    <dgm:style>
+      <a:lnRef idx="2">
+        <a:scrgbClr r="0" g="0" b="0"/>
+      </a:lnRef>
+      <a:fillRef idx="1">
+        <a:scrgbClr r="0" g="0" b="0"/>
+      </a:fillRef>
+      <a:effectRef idx="0">
+        <a:scrgbClr r="0" g="0" b="0"/>
+      </a:effectRef>
+      <a:fontRef idx="minor"/>
+    </dgm:style>
+  </dgm:styleLbl>
+  <dgm:styleLbl name="alignAcc1">
+    <dgm:scene3d>
+      <a:camera prst="orthographicFront"/>
+      <a:lightRig rig="threePt" dir="t"/>
+    </dgm:scene3d>
+    <dgm:sp3d/>
+    <dgm:txPr/>
+    <dgm:style>
+      <a:lnRef idx="2">
+        <a:scrgbClr r="0" g="0" b="0"/>
+      </a:lnRef>
+      <a:fillRef idx="1">
+        <a:scrgbClr r="0" g="0" b="0"/>
+      </a:fillRef>
+      <a:effectRef idx="0">
+        <a:scrgbClr r="0" g="0" b="0"/>
+      </a:effectRef>
+      <a:fontRef idx="minor"/>
+    </dgm:style>
+  </dgm:styleLbl>
+  <dgm:styleLbl name="trAlignAcc1">
+    <dgm:scene3d>
+      <a:camera prst="orthographicFront"/>
+      <a:lightRig rig="threePt" dir="t"/>
+    </dgm:scene3d>
+    <dgm:sp3d/>
+    <dgm:txPr/>
+    <dgm:style>
+      <a:lnRef idx="1">
+        <a:scrgbClr r="0" g="0" b="0"/>
+      </a:lnRef>
+      <a:fillRef idx="1">
+        <a:scrgbClr r="0" g="0" b="0"/>
+      </a:fillRef>
+      <a:effectRef idx="0">
+        <a:scrgbClr r="0" g="0" b="0"/>
+      </a:effectRef>
+      <a:fontRef idx="minor"/>
+    </dgm:style>
+  </dgm:styleLbl>
+  <dgm:styleLbl name="bgAcc1">
+    <dgm:scene3d>
+      <a:camera prst="orthographicFront"/>
+      <a:lightRig rig="threePt" dir="t"/>
+    </dgm:scene3d>
+    <dgm:sp3d/>
+    <dgm:txPr/>
+    <dgm:style>
+      <a:lnRef idx="2">
+        <a:scrgbClr r="0" g="0" b="0"/>
+      </a:lnRef>
+      <a:fillRef idx="1">
+        <a:scrgbClr r="0" g="0" b="0"/>
+      </a:fillRef>
+      <a:effectRef idx="0">
+        <a:scrgbClr r="0" g="0" b="0"/>
+      </a:effectRef>
+      <a:fontRef idx="minor"/>
+    </dgm:style>
+  </dgm:styleLbl>
+  <dgm:styleLbl name="solidFgAcc1">
+    <dgm:scene3d>
+      <a:camera prst="orthographicFront"/>
+      <a:lightRig rig="threePt" dir="t"/>
+    </dgm:scene3d>
+    <dgm:sp3d/>
+    <dgm:txPr/>
+    <dgm:style>
+      <a:lnRef idx="2">
+        <a:scrgbClr r="0" g="0" b="0"/>
+      </a:lnRef>
+      <a:fillRef idx="1">
+        <a:scrgbClr r="0" g="0" b="0"/>
+      </a:fillRef>
+      <a:effectRef idx="0">
+        <a:scrgbClr r="0" g="0" b="0"/>
+      </a:effectRef>
+      <a:fontRef idx="minor"/>
+    </dgm:style>
+  </dgm:styleLbl>
+  <dgm:styleLbl name="solidAlignAcc1">
+    <dgm:scene3d>
+      <a:camera prst="orthographicFront"/>
+      <a:lightRig rig="threePt" dir="t"/>
+    </dgm:scene3d>
+    <dgm:sp3d/>
+    <dgm:txPr/>
+    <dgm:style>
+      <a:lnRef idx="2">
+        <a:scrgbClr r="0" g="0" b="0"/>
+      </a:lnRef>
+      <a:fillRef idx="1">
+        <a:scrgbClr r="0" g="0" b="0"/>
+      </a:fillRef>
+      <a:effectRef idx="0">
+        <a:scrgbClr r="0" g="0" b="0"/>
+      </a:effectRef>
+      <a:fontRef idx="minor"/>
+    </dgm:style>
+  </dgm:styleLbl>
+  <dgm:styleLbl name="solidBgAcc1">
+    <dgm:scene3d>
+      <a:camera prst="orthographicFront"/>
+      <a:lightRig rig="threePt" dir="t"/>
+    </dgm:scene3d>
+    <dgm:sp3d/>
+    <dgm:txPr/>
+    <dgm:style>
+      <a:lnRef idx="2">
+        <a:scrgbClr r="0" g="0" b="0"/>
+      </a:lnRef>
+      <a:fillRef idx="1">
+        <a:scrgbClr r="0" g="0" b="0"/>
+      </a:fillRef>
+      <a:effectRef idx="0">
+        <a:scrgbClr r="0" g="0" b="0"/>
+      </a:effectRef>
+      <a:fontRef idx="minor"/>
+    </dgm:style>
+  </dgm:styleLbl>
+  <dgm:styleLbl name="fgAccFollowNode1">
+    <dgm:scene3d>
+      <a:camera prst="orthographicFront"/>
+      <a:lightRig rig="threePt" dir="t"/>
+    </dgm:scene3d>
+    <dgm:sp3d/>
+    <dgm:txPr/>
+    <dgm:style>
+      <a:lnRef idx="2">
+        <a:scrgbClr r="0" g="0" b="0"/>
+      </a:lnRef>
+      <a:fillRef idx="1">
+        <a:scrgbClr r="0" g="0" b="0"/>
+      </a:fillRef>
+      <a:effectRef idx="0">
+        <a:scrgbClr r="0" g="0" b="0"/>
+      </a:effectRef>
+      <a:fontRef idx="minor"/>
+    </dgm:style>
+  </dgm:styleLbl>
+  <dgm:styleLbl name="alignAccFollowNode1">
+    <dgm:scene3d>
+      <a:camera prst="orthographicFront"/>
+      <a:lightRig rig="threePt" dir="t"/>
+    </dgm:scene3d>
+    <dgm:sp3d/>
+    <dgm:txPr/>
+    <dgm:style>
+      <a:lnRef idx="2">
+        <a:scrgbClr r="0" g="0" b="0"/>
+      </a:lnRef>
+      <a:fillRef idx="1">
+        <a:scrgbClr r="0" g="0" b="0"/>
+      </a:fillRef>
+      <a:effectRef idx="0">
+        <a:scrgbClr r="0" g="0" b="0"/>
+      </a:effectRef>
+      <a:fontRef idx="minor"/>
+    </dgm:style>
+  </dgm:styleLbl>
+  <dgm:styleLbl name="bgAccFollowNode1">
+    <dgm:scene3d>
+      <a:camera prst="orthographicFront"/>
+      <a:lightRig rig="threePt" dir="t"/>
+    </dgm:scene3d>
+    <dgm:sp3d/>
+    <dgm:txPr/>
+    <dgm:style>
+      <a:lnRef idx="2">
+        <a:scrgbClr r="0" g="0" b="0"/>
+      </a:lnRef>
+      <a:fillRef idx="1">
+        <a:scrgbClr r="0" g="0" b="0"/>
+      </a:fillRef>
+      <a:effectRef idx="0">
+        <a:scrgbClr r="0" g="0" b="0"/>
+      </a:effectRef>
+      <a:fontRef idx="minor"/>
+    </dgm:style>
+  </dgm:styleLbl>
+  <dgm:styleLbl name="fgAcc0">
+    <dgm:scene3d>
+      <a:camera prst="orthographicFront"/>
+      <a:lightRig rig="threePt" dir="t"/>
+    </dgm:scene3d>
+    <dgm:sp3d/>
+    <dgm:txPr/>
+    <dgm:style>
+      <a:lnRef idx="2">
+        <a:scrgbClr r="0" g="0" b="0"/>
+      </a:lnRef>
+      <a:fillRef idx="1">
+        <a:scrgbClr r="0" g="0" b="0"/>
+      </a:fillRef>
+      <a:effectRef idx="0">
+        <a:scrgbClr r="0" g="0" b="0"/>
+      </a:effectRef>
+      <a:fontRef idx="minor"/>
+    </dgm:style>
+  </dgm:styleLbl>
+  <dgm:styleLbl name="fgAcc2">
+    <dgm:scene3d>
+      <a:camera prst="orthographicFront"/>
+      <a:lightRig rig="threePt" dir="t"/>
+    </dgm:scene3d>
+    <dgm:sp3d/>
+    <dgm:txPr/>
+    <dgm:style>
+      <a:lnRef idx="2">
+        <a:scrgbClr r="0" g="0" b="0"/>
+      </a:lnRef>
+      <a:fillRef idx="1">
+        <a:scrgbClr r="0" g="0" b="0"/>
+      </a:fillRef>
+      <a:effectRef idx="0">
+        <a:scrgbClr r="0" g="0" b="0"/>
+      </a:effectRef>
+      <a:fontRef idx="minor"/>
+    </dgm:style>
+  </dgm:styleLbl>
+  <dgm:styleLbl name="fgAcc3">
+    <dgm:scene3d>
+      <a:camera prst="orthographicFront"/>
+      <a:lightRig rig="threePt" dir="t"/>
+    </dgm:scene3d>
+    <dgm:sp3d/>
+    <dgm:txPr/>
+    <dgm:style>
+      <a:lnRef idx="2">
+        <a:scrgbClr r="0" g="0" b="0"/>
+      </a:lnRef>
+      <a:fillRef idx="1">
+        <a:scrgbClr r="0" g="0" b="0"/>
+      </a:fillRef>
+      <a:effectRef idx="0">
+        <a:scrgbClr r="0" g="0" b="0"/>
+      </a:effectRef>
+      <a:fontRef idx="minor"/>
+    </dgm:style>
+  </dgm:styleLbl>
+  <dgm:styleLbl name="fgAcc4">
+    <dgm:scene3d>
+      <a:camera prst="orthographicFront"/>
+      <a:lightRig rig="threePt" dir="t"/>
+    </dgm:scene3d>
+    <dgm:sp3d/>
+    <dgm:txPr/>
+    <dgm:style>
+      <a:lnRef idx="2">
+        <a:scrgbClr r="0" g="0" b="0"/>
+      </a:lnRef>
+      <a:fillRef idx="1">
+        <a:scrgbClr r="0" g="0" b="0"/>
+      </a:fillRef>
+      <a:effectRef idx="0">
+        <a:scrgbClr r="0" g="0" b="0"/>
+      </a:effectRef>
+      <a:fontRef idx="minor"/>
+    </dgm:style>
+  </dgm:styleLbl>
+  <dgm:styleLbl name="bgShp">
+    <dgm:scene3d>
+      <a:camera prst="orthographicFront"/>
+      <a:lightRig rig="threePt" dir="t"/>
+    </dgm:scene3d>
+    <dgm:sp3d/>
+    <dgm:txPr/>
+    <dgm:style>
+      <a:lnRef idx="0">
+        <a:scrgbClr r="0" g="0" b="0"/>
+      </a:lnRef>
+      <a:fillRef idx="1">
+        <a:scrgbClr r="0" g="0" b="0"/>
+      </a:fillRef>
+      <a:effectRef idx="0">
+        <a:scrgbClr r="0" g="0" b="0"/>
+      </a:effectRef>
+      <a:fontRef idx="minor"/>
+    </dgm:style>
+  </dgm:styleLbl>
+  <dgm:styleLbl name="dkBgShp">
+    <dgm:scene3d>
+      <a:camera prst="orthographicFront"/>
+      <a:lightRig rig="threePt" dir="t"/>
+    </dgm:scene3d>
+    <dgm:sp3d/>
+    <dgm:txPr/>
+    <dgm:style>
+      <a:lnRef idx="0">
+        <a:scrgbClr r="0" g="0" b="0"/>
+      </a:lnRef>
+      <a:fillRef idx="1">
+        <a:scrgbClr r="0" g="0" b="0"/>
+      </a:fillRef>
+      <a:effectRef idx="0">
+        <a:scrgbClr r="0" g="0" b="0"/>
+      </a:effectRef>
+      <a:fontRef idx="minor"/>
+    </dgm:style>
+  </dgm:styleLbl>
+  <dgm:styleLbl name="trBgShp">
+    <dgm:scene3d>
+      <a:camera prst="orthographicFront"/>
+      <a:lightRig rig="threePt" dir="t"/>
+    </dgm:scene3d>
+    <dgm:sp3d/>
+    <dgm:txPr/>
+    <dgm:style>
+      <a:lnRef idx="0">
+        <a:scrgbClr r="0" g="0" b="0"/>
+      </a:lnRef>
+      <a:fillRef idx="1">
+        <a:scrgbClr r="0" g="0" b="0"/>
+      </a:fillRef>
+      <a:effectRef idx="0">
+        <a:scrgbClr r="0" g="0" b="0"/>
+      </a:effectRef>
+      <a:fontRef idx="minor"/>
+    </dgm:style>
+  </dgm:styleLbl>
+  <dgm:styleLbl name="fgShp">
+    <dgm:scene3d>
+      <a:camera prst="orthographicFront"/>
+      <a:lightRig rig="threePt" dir="t"/>
+    </dgm:scene3d>
+    <dgm:sp3d/>
+    <dgm:txPr/>
+    <dgm:style>
+      <a:lnRef idx="2">
+        <a:scrgbClr r="0" g="0" b="0"/>
+      </a:lnRef>
+      <a:fillRef idx="1">
+        <a:scrgbClr r="0" g="0" b="0"/>
+      </a:fillRef>
+      <a:effectRef idx="0">
+        <a:scrgbClr r="0" g="0" b="0"/>
+      </a:effectRef>
+      <a:fontRef idx="minor"/>
+    </dgm:style>
+  </dgm:styleLbl>
+  <dgm:styleLbl name="revTx">
+    <dgm:scene3d>
+      <a:camera prst="orthographicFront"/>
+      <a:lightRig rig="threePt" dir="t"/>
+    </dgm:scene3d>
+    <dgm:sp3d/>
+    <dgm:txPr/>
+    <dgm:style>
+      <a:lnRef idx="0">
+        <a:scrgbClr r="0" g="0" b="0"/>
+      </a:lnRef>
+      <a:fillRef idx="0">
+        <a:scrgbClr r="0" g="0" b="0"/>
+      </a:fillRef>
+      <a:effectRef idx="0">
+        <a:scrgbClr r="0" g="0" b="0"/>
+      </a:effectRef>
+      <a:fontRef idx="minor"/>
+    </dgm:style>
+  </dgm:styleLbl>
+</dgm:styleDef>
+</file>
+
+<file path=ppt/diagrams/quickStyle4.xml><?xml version="1.0" encoding="utf-8"?>
 <dgm:styleDef xmlns:dgm="http://schemas.openxmlformats.org/drawingml/2006/diagram" xmlns:a="http://schemas.openxmlformats.org/drawingml/2006/main" uniqueId="urn:microsoft.com/office/officeart/2005/8/quickstyle/simple1">
   <dgm:title val=""/>
   <dgm:desc val=""/>
@@ -22196,6 +26058,928 @@
           <p:cNvPr id="2" name="Title 1">
             <a:extLst>
               <a:ext uri="{FF2B5EF4-FFF2-40B4-BE49-F238E27FC236}">
+                <a16:creationId xmlns:a16="http://schemas.microsoft.com/office/drawing/2014/main" id="{BB4E38FE-D592-6E73-C864-BC346F3D9D8B}"/>
+              </a:ext>
+            </a:extLst>
+          </p:cNvPr>
+          <p:cNvSpPr>
+            <a:spLocks noGrp="1"/>
+          </p:cNvSpPr>
+          <p:nvPr>
+            <p:ph type="title"/>
+          </p:nvPr>
+        </p:nvSpPr>
+        <p:spPr/>
+        <p:txBody>
+          <a:bodyPr/>
+          <a:lstStyle/>
+          <a:p>
+            <a:r>
+              <a:rPr lang="en-US" dirty="0"/>
+              <a:t>Create and execute M code in 3 minutes</a:t>
+            </a:r>
+            <a:endParaRPr lang="en-NL" dirty="0"/>
+          </a:p>
+        </p:txBody>
+      </p:sp>
+      <p:graphicFrame>
+        <p:nvGraphicFramePr>
+          <p:cNvPr id="4" name="Content Placeholder 3">
+            <a:extLst>
+              <a:ext uri="{FF2B5EF4-FFF2-40B4-BE49-F238E27FC236}">
+                <a16:creationId xmlns:a16="http://schemas.microsoft.com/office/drawing/2014/main" id="{0C0FBF0F-89D4-2852-1FC1-C4E591267636}"/>
+              </a:ext>
+            </a:extLst>
+          </p:cNvPr>
+          <p:cNvGraphicFramePr>
+            <a:graphicFrameLocks noGrp="1"/>
+          </p:cNvGraphicFramePr>
+          <p:nvPr>
+            <p:ph idx="1"/>
+            <p:extLst>
+              <p:ext uri="{D42A27DB-BD31-4B8C-83A1-F6EECF244321}">
+                <p14:modId xmlns:p14="http://schemas.microsoft.com/office/powerpoint/2010/main" val="1384979283"/>
+              </p:ext>
+            </p:extLst>
+          </p:nvPr>
+        </p:nvGraphicFramePr>
+        <p:xfrm>
+          <a:off x="1155700" y="2173357"/>
+          <a:ext cx="10015883" cy="4439478"/>
+        </p:xfrm>
+        <a:graphic>
+          <a:graphicData uri="http://schemas.openxmlformats.org/drawingml/2006/diagram">
+            <dgm:relIds xmlns:dgm="http://schemas.openxmlformats.org/drawingml/2006/diagram" xmlns:r="http://schemas.openxmlformats.org/officeDocument/2006/relationships" r:dm="rId2" r:lo="rId3" r:qs="rId4" r:cs="rId5"/>
+          </a:graphicData>
+        </a:graphic>
+      </p:graphicFrame>
+    </p:spTree>
+    <p:extLst>
+      <p:ext uri="{BB962C8B-B14F-4D97-AF65-F5344CB8AC3E}">
+        <p14:creationId xmlns:p14="http://schemas.microsoft.com/office/powerpoint/2010/main" val="1001963546"/>
+      </p:ext>
+    </p:extLst>
+  </p:cSld>
+  <p:clrMapOvr>
+    <a:masterClrMapping/>
+  </p:clrMapOvr>
+</p:sld>
+</file>
+
+<file path=ppt/slides/slide11.xml><?xml version="1.0" encoding="utf-8"?>
+<p:sld xmlns:a="http://schemas.openxmlformats.org/drawingml/2006/main" xmlns:r="http://schemas.openxmlformats.org/officeDocument/2006/relationships" xmlns:p="http://schemas.openxmlformats.org/presentationml/2006/main">
+  <p:cSld>
+    <p:bg>
+      <p:bgPr>
+        <a:solidFill>
+          <a:schemeClr val="bg1"/>
+        </a:solidFill>
+        <a:effectLst/>
+      </p:bgPr>
+    </p:bg>
+    <p:spTree>
+      <p:nvGrpSpPr>
+        <p:cNvPr id="1" name="">
+          <a:extLst>
+            <a:ext uri="{FF2B5EF4-FFF2-40B4-BE49-F238E27FC236}">
+              <a16:creationId xmlns:a16="http://schemas.microsoft.com/office/drawing/2014/main" id="{4D6DC185-0273-5F80-868C-0BB3B7C23D97}"/>
+            </a:ext>
+          </a:extLst>
+        </p:cNvPr>
+        <p:cNvGrpSpPr/>
+        <p:nvPr/>
+      </p:nvGrpSpPr>
+      <p:grpSpPr>
+        <a:xfrm>
+          <a:off x="0" y="0"/>
+          <a:ext cx="0" cy="0"/>
+          <a:chOff x="0" y="0"/>
+          <a:chExt cx="0" cy="0"/>
+        </a:xfrm>
+      </p:grpSpPr>
+      <p:sp>
+        <p:nvSpPr>
+          <p:cNvPr id="2" name="Title 1">
+            <a:extLst>
+              <a:ext uri="{FF2B5EF4-FFF2-40B4-BE49-F238E27FC236}">
+                <a16:creationId xmlns:a16="http://schemas.microsoft.com/office/drawing/2014/main" id="{DE27AA2B-1A44-5B47-5FA9-76DF0396F137}"/>
+              </a:ext>
+            </a:extLst>
+          </p:cNvPr>
+          <p:cNvSpPr>
+            <a:spLocks noGrp="1"/>
+          </p:cNvSpPr>
+          <p:nvPr>
+            <p:ph type="title"/>
+          </p:nvPr>
+        </p:nvSpPr>
+        <p:spPr>
+          <a:xfrm>
+            <a:off x="1952481" y="800783"/>
+            <a:ext cx="8278891" cy="1323867"/>
+          </a:xfrm>
+        </p:spPr>
+        <p:txBody>
+          <a:bodyPr anchor="b">
+            <a:normAutofit/>
+          </a:bodyPr>
+          <a:lstStyle/>
+          <a:p>
+            <a:r>
+              <a:rPr lang="en-US" dirty="0" err="1"/>
+              <a:t>fdssdf</a:t>
+            </a:r>
+            <a:endParaRPr lang="en-NL" dirty="0"/>
+          </a:p>
+        </p:txBody>
+      </p:sp>
+      <p:graphicFrame>
+        <p:nvGraphicFramePr>
+          <p:cNvPr id="11" name="Content Placeholder 2">
+            <a:extLst>
+              <a:ext uri="{FF2B5EF4-FFF2-40B4-BE49-F238E27FC236}">
+                <a16:creationId xmlns:a16="http://schemas.microsoft.com/office/drawing/2014/main" id="{088B2664-C99A-188C-C5EF-0529B0374B0B}"/>
+              </a:ext>
+            </a:extLst>
+          </p:cNvPr>
+          <p:cNvGraphicFramePr>
+            <a:graphicFrameLocks noGrp="1"/>
+          </p:cNvGraphicFramePr>
+          <p:nvPr>
+            <p:ph idx="1"/>
+            <p:extLst>
+              <p:ext uri="{E7BDC344-281C-4309-B0C6-D0EE65EED2A8}">
+                <p202:designPr xmlns:p202="http://schemas.microsoft.com/office/powerpoint/2020/02/main">
+                  <p202:designTagLst>
+                    <p202:designTag name="ARCH:1:CLS" val="InformationBlock"/>
+                    <p202:designTag name="ARCH:1:VSVAR" val="TitledTextBox"/>
+                  </p202:designTagLst>
+                </p202:designPr>
+              </p:ext>
+            </p:extLst>
+          </p:nvPr>
+        </p:nvGraphicFramePr>
+        <p:xfrm>
+          <a:off x="1952481" y="2495774"/>
+          <a:ext cx="8278892" cy="3273426"/>
+        </p:xfrm>
+        <a:graphic>
+          <a:graphicData uri="http://schemas.openxmlformats.org/drawingml/2006/diagram">
+            <dgm:relIds xmlns:dgm="http://schemas.openxmlformats.org/drawingml/2006/diagram" xmlns:r="http://schemas.openxmlformats.org/officeDocument/2006/relationships" r:dm="rId2" r:lo="rId3" r:qs="rId4" r:cs="rId5"/>
+          </a:graphicData>
+        </a:graphic>
+      </p:graphicFrame>
+    </p:spTree>
+    <p:extLst>
+      <p:ext uri="{BB962C8B-B14F-4D97-AF65-F5344CB8AC3E}">
+        <p14:creationId xmlns:p14="http://schemas.microsoft.com/office/powerpoint/2010/main" val="2760101554"/>
+      </p:ext>
+    </p:extLst>
+  </p:cSld>
+  <p:clrMapOvr>
+    <a:masterClrMapping/>
+  </p:clrMapOvr>
+</p:sld>
+</file>
+
+<file path=ppt/slides/slide12.xml><?xml version="1.0" encoding="utf-8"?>
+<p:sld xmlns:a="http://schemas.openxmlformats.org/drawingml/2006/main" xmlns:r="http://schemas.openxmlformats.org/officeDocument/2006/relationships" xmlns:p="http://schemas.openxmlformats.org/presentationml/2006/main">
+  <p:cSld>
+    <p:spTree>
+      <p:nvGrpSpPr>
+        <p:cNvPr id="1" name=""/>
+        <p:cNvGrpSpPr/>
+        <p:nvPr/>
+      </p:nvGrpSpPr>
+      <p:grpSpPr>
+        <a:xfrm>
+          <a:off x="0" y="0"/>
+          <a:ext cx="0" cy="0"/>
+          <a:chOff x="0" y="0"/>
+          <a:chExt cx="0" cy="0"/>
+        </a:xfrm>
+      </p:grpSpPr>
+      <p:sp>
+        <p:nvSpPr>
+          <p:cNvPr id="2" name="Title 1">
+            <a:extLst>
+              <a:ext uri="{FF2B5EF4-FFF2-40B4-BE49-F238E27FC236}">
+                <a16:creationId xmlns:a16="http://schemas.microsoft.com/office/drawing/2014/main" id="{50DF909B-EE31-EFAE-7A0A-716460177410}"/>
+              </a:ext>
+            </a:extLst>
+          </p:cNvPr>
+          <p:cNvSpPr>
+            <a:spLocks noGrp="1"/>
+          </p:cNvSpPr>
+          <p:nvPr>
+            <p:ph type="title"/>
+          </p:nvPr>
+        </p:nvSpPr>
+        <p:spPr/>
+        <p:txBody>
+          <a:bodyPr/>
+          <a:lstStyle/>
+          <a:p>
+            <a:r>
+              <a:rPr lang="en-US" dirty="0"/>
+              <a:t>Multiple client topology</a:t>
+            </a:r>
+            <a:endParaRPr lang="en-NL" dirty="0"/>
+          </a:p>
+        </p:txBody>
+      </p:sp>
+      <p:sp>
+        <p:nvSpPr>
+          <p:cNvPr id="3" name="Content Placeholder 2">
+            <a:extLst>
+              <a:ext uri="{FF2B5EF4-FFF2-40B4-BE49-F238E27FC236}">
+                <a16:creationId xmlns:a16="http://schemas.microsoft.com/office/drawing/2014/main" id="{827D319E-4957-2EE4-4C13-0595662B4AAA}"/>
+              </a:ext>
+            </a:extLst>
+          </p:cNvPr>
+          <p:cNvSpPr>
+            <a:spLocks noGrp="1"/>
+          </p:cNvSpPr>
+          <p:nvPr>
+            <p:ph idx="1"/>
+          </p:nvPr>
+        </p:nvSpPr>
+        <p:spPr>
+          <a:xfrm>
+            <a:off x="1154954" y="3037840"/>
+            <a:ext cx="8825659" cy="3416300"/>
+          </a:xfrm>
+        </p:spPr>
+        <p:txBody>
+          <a:bodyPr/>
+          <a:lstStyle/>
+          <a:p>
+            <a:endParaRPr lang="en-NL" dirty="0"/>
+          </a:p>
+        </p:txBody>
+      </p:sp>
+      <p:sp>
+        <p:nvSpPr>
+          <p:cNvPr id="4" name="Rectangle: Rounded Corners 3">
+            <a:extLst>
+              <a:ext uri="{FF2B5EF4-FFF2-40B4-BE49-F238E27FC236}">
+                <a16:creationId xmlns:a16="http://schemas.microsoft.com/office/drawing/2014/main" id="{62F072E5-7887-F607-BF39-D96818D9FA72}"/>
+              </a:ext>
+            </a:extLst>
+          </p:cNvPr>
+          <p:cNvSpPr/>
+          <p:nvPr/>
+        </p:nvSpPr>
+        <p:spPr>
+          <a:xfrm>
+            <a:off x="7259541" y="2668657"/>
+            <a:ext cx="3633746" cy="3617843"/>
+          </a:xfrm>
+          <a:prstGeom prst="roundRect">
+            <a:avLst/>
+          </a:prstGeom>
+          <a:gradFill>
+            <a:gsLst>
+              <a:gs pos="0">
+                <a:schemeClr val="accent5">
+                  <a:lumMod val="60000"/>
+                  <a:lumOff val="40000"/>
+                </a:schemeClr>
+              </a:gs>
+              <a:gs pos="74000">
+                <a:schemeClr val="accent1">
+                  <a:lumMod val="45000"/>
+                  <a:lumOff val="55000"/>
+                </a:schemeClr>
+              </a:gs>
+              <a:gs pos="83000">
+                <a:schemeClr val="accent1">
+                  <a:lumMod val="45000"/>
+                  <a:lumOff val="55000"/>
+                </a:schemeClr>
+              </a:gs>
+              <a:gs pos="100000">
+                <a:schemeClr val="accent5">
+                  <a:lumMod val="60000"/>
+                  <a:lumOff val="40000"/>
+                </a:schemeClr>
+              </a:gs>
+            </a:gsLst>
+            <a:lin ang="5400000" scaled="1"/>
+          </a:gradFill>
+        </p:spPr>
+        <p:style>
+          <a:lnRef idx="2">
+            <a:schemeClr val="accent1">
+              <a:shade val="15000"/>
+            </a:schemeClr>
+          </a:lnRef>
+          <a:fillRef idx="1">
+            <a:schemeClr val="accent1"/>
+          </a:fillRef>
+          <a:effectRef idx="0">
+            <a:schemeClr val="accent1"/>
+          </a:effectRef>
+          <a:fontRef idx="minor">
+            <a:schemeClr val="lt1"/>
+          </a:fontRef>
+        </p:style>
+        <p:txBody>
+          <a:bodyPr rtlCol="0" anchor="ctr"/>
+          <a:lstStyle/>
+          <a:p>
+            <a:pPr algn="ctr"/>
+            <a:endParaRPr lang="en-NL"/>
+          </a:p>
+        </p:txBody>
+      </p:sp>
+      <p:sp>
+        <p:nvSpPr>
+          <p:cNvPr id="5" name="Rectangle: Rounded Corners 4">
+            <a:extLst>
+              <a:ext uri="{FF2B5EF4-FFF2-40B4-BE49-F238E27FC236}">
+                <a16:creationId xmlns:a16="http://schemas.microsoft.com/office/drawing/2014/main" id="{36498F2A-2B3E-EC6E-3370-BDA6ECEEBCD1}"/>
+              </a:ext>
+            </a:extLst>
+          </p:cNvPr>
+          <p:cNvSpPr/>
+          <p:nvPr/>
+        </p:nvSpPr>
+        <p:spPr>
+          <a:xfrm>
+            <a:off x="1338470" y="3051644"/>
+            <a:ext cx="1550504" cy="662609"/>
+          </a:xfrm>
+          <a:prstGeom prst="roundRect">
+            <a:avLst/>
+          </a:prstGeom>
+        </p:spPr>
+        <p:style>
+          <a:lnRef idx="2">
+            <a:schemeClr val="accent1">
+              <a:shade val="15000"/>
+            </a:schemeClr>
+          </a:lnRef>
+          <a:fillRef idx="1">
+            <a:schemeClr val="accent1"/>
+          </a:fillRef>
+          <a:effectRef idx="0">
+            <a:schemeClr val="accent1"/>
+          </a:effectRef>
+          <a:fontRef idx="minor">
+            <a:schemeClr val="lt1"/>
+          </a:fontRef>
+        </p:style>
+        <p:txBody>
+          <a:bodyPr rtlCol="0" anchor="ctr"/>
+          <a:lstStyle/>
+          <a:p>
+            <a:pPr algn="ctr"/>
+            <a:r>
+              <a:rPr lang="en-US" dirty="0"/>
+              <a:t>Client</a:t>
+            </a:r>
+          </a:p>
+          <a:p>
+            <a:pPr algn="ctr"/>
+            <a:r>
+              <a:rPr lang="en-US" dirty="0"/>
+              <a:t>(nodejs)</a:t>
+            </a:r>
+            <a:endParaRPr lang="en-NL" dirty="0"/>
+          </a:p>
+        </p:txBody>
+      </p:sp>
+      <p:sp>
+        <p:nvSpPr>
+          <p:cNvPr id="6" name="Rectangle: Rounded Corners 5">
+            <a:extLst>
+              <a:ext uri="{FF2B5EF4-FFF2-40B4-BE49-F238E27FC236}">
+                <a16:creationId xmlns:a16="http://schemas.microsoft.com/office/drawing/2014/main" id="{C617F3A1-D3FE-2883-548B-55FBC5FAB49B}"/>
+              </a:ext>
+            </a:extLst>
+          </p:cNvPr>
+          <p:cNvSpPr/>
+          <p:nvPr/>
+        </p:nvSpPr>
+        <p:spPr>
+          <a:xfrm>
+            <a:off x="1338470" y="4052184"/>
+            <a:ext cx="1550504" cy="662609"/>
+          </a:xfrm>
+          <a:prstGeom prst="roundRect">
+            <a:avLst/>
+          </a:prstGeom>
+        </p:spPr>
+        <p:style>
+          <a:lnRef idx="2">
+            <a:schemeClr val="accent1">
+              <a:shade val="15000"/>
+            </a:schemeClr>
+          </a:lnRef>
+          <a:fillRef idx="1">
+            <a:schemeClr val="accent1"/>
+          </a:fillRef>
+          <a:effectRef idx="0">
+            <a:schemeClr val="accent1"/>
+          </a:effectRef>
+          <a:fontRef idx="minor">
+            <a:schemeClr val="lt1"/>
+          </a:fontRef>
+        </p:style>
+        <p:txBody>
+          <a:bodyPr rtlCol="0" anchor="ctr"/>
+          <a:lstStyle/>
+          <a:p>
+            <a:pPr algn="ctr"/>
+            <a:r>
+              <a:rPr lang="en-US" dirty="0"/>
+              <a:t>Client</a:t>
+            </a:r>
+          </a:p>
+          <a:p>
+            <a:pPr algn="ctr"/>
+            <a:r>
+              <a:rPr lang="en-US" dirty="0"/>
+              <a:t>(Go)</a:t>
+            </a:r>
+            <a:endParaRPr lang="en-NL" dirty="0"/>
+          </a:p>
+        </p:txBody>
+      </p:sp>
+      <p:sp>
+        <p:nvSpPr>
+          <p:cNvPr id="7" name="Rectangle: Rounded Corners 6">
+            <a:extLst>
+              <a:ext uri="{FF2B5EF4-FFF2-40B4-BE49-F238E27FC236}">
+                <a16:creationId xmlns:a16="http://schemas.microsoft.com/office/drawing/2014/main" id="{17CB8825-4B0A-2B99-5CCA-B5B43ED68D5E}"/>
+              </a:ext>
+            </a:extLst>
+          </p:cNvPr>
+          <p:cNvSpPr/>
+          <p:nvPr/>
+        </p:nvSpPr>
+        <p:spPr>
+          <a:xfrm>
+            <a:off x="1338470" y="5138864"/>
+            <a:ext cx="1550504" cy="662609"/>
+          </a:xfrm>
+          <a:prstGeom prst="roundRect">
+            <a:avLst/>
+          </a:prstGeom>
+        </p:spPr>
+        <p:style>
+          <a:lnRef idx="2">
+            <a:schemeClr val="accent1">
+              <a:shade val="15000"/>
+            </a:schemeClr>
+          </a:lnRef>
+          <a:fillRef idx="1">
+            <a:schemeClr val="accent1"/>
+          </a:fillRef>
+          <a:effectRef idx="0">
+            <a:schemeClr val="accent1"/>
+          </a:effectRef>
+          <a:fontRef idx="minor">
+            <a:schemeClr val="lt1"/>
+          </a:fontRef>
+        </p:style>
+        <p:txBody>
+          <a:bodyPr rtlCol="0" anchor="ctr"/>
+          <a:lstStyle/>
+          <a:p>
+            <a:pPr algn="ctr"/>
+            <a:r>
+              <a:rPr lang="en-US" dirty="0"/>
+              <a:t>Client</a:t>
+            </a:r>
+          </a:p>
+          <a:p>
+            <a:pPr algn="ctr"/>
+            <a:r>
+              <a:rPr lang="en-US" dirty="0"/>
+              <a:t>(Python)</a:t>
+            </a:r>
+            <a:endParaRPr lang="en-NL" dirty="0"/>
+          </a:p>
+        </p:txBody>
+      </p:sp>
+      <p:sp>
+        <p:nvSpPr>
+          <p:cNvPr id="8" name="TextBox 7">
+            <a:extLst>
+              <a:ext uri="{FF2B5EF4-FFF2-40B4-BE49-F238E27FC236}">
+                <a16:creationId xmlns:a16="http://schemas.microsoft.com/office/drawing/2014/main" id="{B05DF86D-A187-60DE-9EAA-60488AC3907E}"/>
+              </a:ext>
+            </a:extLst>
+          </p:cNvPr>
+          <p:cNvSpPr txBox="1"/>
+          <p:nvPr/>
+        </p:nvSpPr>
+        <p:spPr>
+          <a:xfrm>
+            <a:off x="9558414" y="5156235"/>
+            <a:ext cx="1457740" cy="646331"/>
+          </a:xfrm>
+          <a:prstGeom prst="rect">
+            <a:avLst/>
+          </a:prstGeom>
+          <a:noFill/>
+        </p:spPr>
+        <p:txBody>
+          <a:bodyPr wrap="square" rtlCol="0">
+            <a:spAutoFit/>
+          </a:bodyPr>
+          <a:lstStyle/>
+          <a:p>
+            <a:r>
+              <a:rPr lang="en-US" b="1" dirty="0">
+                <a:solidFill>
+                  <a:srgbClr val="FFFF00"/>
+                </a:solidFill>
+              </a:rPr>
+              <a:t>YottaDB</a:t>
+            </a:r>
+          </a:p>
+          <a:p>
+            <a:r>
+              <a:rPr lang="en-US" b="1" dirty="0">
+                <a:solidFill>
+                  <a:srgbClr val="FFFF00"/>
+                </a:solidFill>
+              </a:rPr>
+              <a:t>database</a:t>
+            </a:r>
+            <a:endParaRPr lang="en-NL" b="1" dirty="0">
+              <a:solidFill>
+                <a:srgbClr val="FFFF00"/>
+              </a:solidFill>
+            </a:endParaRPr>
+          </a:p>
+        </p:txBody>
+      </p:sp>
+      <p:sp>
+        <p:nvSpPr>
+          <p:cNvPr id="9" name="Arrow: Left-Right 8">
+            <a:extLst>
+              <a:ext uri="{FF2B5EF4-FFF2-40B4-BE49-F238E27FC236}">
+                <a16:creationId xmlns:a16="http://schemas.microsoft.com/office/drawing/2014/main" id="{8B874837-BD2C-4052-D10C-2C6FD0E0B0CD}"/>
+              </a:ext>
+            </a:extLst>
+          </p:cNvPr>
+          <p:cNvSpPr/>
+          <p:nvPr/>
+        </p:nvSpPr>
+        <p:spPr>
+          <a:xfrm>
+            <a:off x="2888974" y="3098027"/>
+            <a:ext cx="4723406" cy="490330"/>
+          </a:xfrm>
+          <a:prstGeom prst="leftRightArrow">
+            <a:avLst/>
+          </a:prstGeom>
+          <a:gradFill>
+            <a:gsLst>
+              <a:gs pos="0">
+                <a:schemeClr val="accent1">
+                  <a:lumMod val="5000"/>
+                  <a:lumOff val="95000"/>
+                </a:schemeClr>
+              </a:gs>
+              <a:gs pos="74000">
+                <a:schemeClr val="accent1">
+                  <a:lumMod val="45000"/>
+                  <a:lumOff val="55000"/>
+                </a:schemeClr>
+              </a:gs>
+              <a:gs pos="83000">
+                <a:schemeClr val="accent1">
+                  <a:lumMod val="45000"/>
+                  <a:lumOff val="55000"/>
+                </a:schemeClr>
+              </a:gs>
+              <a:gs pos="100000">
+                <a:schemeClr val="accent1">
+                  <a:lumMod val="30000"/>
+                  <a:lumOff val="70000"/>
+                </a:schemeClr>
+              </a:gs>
+            </a:gsLst>
+            <a:lin ang="5400000" scaled="1"/>
+          </a:gradFill>
+        </p:spPr>
+        <p:style>
+          <a:lnRef idx="2">
+            <a:schemeClr val="accent1">
+              <a:shade val="15000"/>
+            </a:schemeClr>
+          </a:lnRef>
+          <a:fillRef idx="1">
+            <a:schemeClr val="accent1"/>
+          </a:fillRef>
+          <a:effectRef idx="0">
+            <a:schemeClr val="accent1"/>
+          </a:effectRef>
+          <a:fontRef idx="minor">
+            <a:schemeClr val="lt1"/>
+          </a:fontRef>
+        </p:style>
+        <p:txBody>
+          <a:bodyPr rtlCol="0" anchor="ctr"/>
+          <a:lstStyle/>
+          <a:p>
+            <a:pPr algn="ctr"/>
+            <a:r>
+              <a:rPr lang="en-US" dirty="0"/>
+              <a:t>RESP3</a:t>
+            </a:r>
+            <a:endParaRPr lang="en-NL" dirty="0"/>
+          </a:p>
+        </p:txBody>
+      </p:sp>
+      <p:sp>
+        <p:nvSpPr>
+          <p:cNvPr id="10" name="Arrow: Left-Right 9">
+            <a:extLst>
+              <a:ext uri="{FF2B5EF4-FFF2-40B4-BE49-F238E27FC236}">
+                <a16:creationId xmlns:a16="http://schemas.microsoft.com/office/drawing/2014/main" id="{361A8CD9-16B7-755F-4E8A-F0E7175BCAB8}"/>
+              </a:ext>
+            </a:extLst>
+          </p:cNvPr>
+          <p:cNvSpPr/>
+          <p:nvPr/>
+        </p:nvSpPr>
+        <p:spPr>
+          <a:xfrm>
+            <a:off x="2888972" y="4138324"/>
+            <a:ext cx="4723405" cy="490330"/>
+          </a:xfrm>
+          <a:prstGeom prst="leftRightArrow">
+            <a:avLst/>
+          </a:prstGeom>
+          <a:gradFill>
+            <a:gsLst>
+              <a:gs pos="0">
+                <a:schemeClr val="accent1">
+                  <a:lumMod val="5000"/>
+                  <a:lumOff val="95000"/>
+                </a:schemeClr>
+              </a:gs>
+              <a:gs pos="74000">
+                <a:schemeClr val="accent1">
+                  <a:lumMod val="45000"/>
+                  <a:lumOff val="55000"/>
+                </a:schemeClr>
+              </a:gs>
+              <a:gs pos="83000">
+                <a:schemeClr val="accent1">
+                  <a:lumMod val="45000"/>
+                  <a:lumOff val="55000"/>
+                </a:schemeClr>
+              </a:gs>
+              <a:gs pos="100000">
+                <a:schemeClr val="accent1">
+                  <a:lumMod val="30000"/>
+                  <a:lumOff val="70000"/>
+                </a:schemeClr>
+              </a:gs>
+            </a:gsLst>
+            <a:lin ang="5400000" scaled="1"/>
+          </a:gradFill>
+        </p:spPr>
+        <p:style>
+          <a:lnRef idx="2">
+            <a:schemeClr val="accent1">
+              <a:shade val="15000"/>
+            </a:schemeClr>
+          </a:lnRef>
+          <a:fillRef idx="1">
+            <a:schemeClr val="accent1"/>
+          </a:fillRef>
+          <a:effectRef idx="0">
+            <a:schemeClr val="accent1"/>
+          </a:effectRef>
+          <a:fontRef idx="minor">
+            <a:schemeClr val="lt1"/>
+          </a:fontRef>
+        </p:style>
+        <p:txBody>
+          <a:bodyPr rtlCol="0" anchor="ctr"/>
+          <a:lstStyle/>
+          <a:p>
+            <a:pPr algn="ctr"/>
+            <a:r>
+              <a:rPr lang="en-US" dirty="0"/>
+              <a:t>RESP3</a:t>
+            </a:r>
+            <a:endParaRPr lang="en-NL" dirty="0"/>
+          </a:p>
+        </p:txBody>
+      </p:sp>
+      <p:sp>
+        <p:nvSpPr>
+          <p:cNvPr id="11" name="Arrow: Left-Right 10">
+            <a:extLst>
+              <a:ext uri="{FF2B5EF4-FFF2-40B4-BE49-F238E27FC236}">
+                <a16:creationId xmlns:a16="http://schemas.microsoft.com/office/drawing/2014/main" id="{6DFC8CCF-17FF-8005-BDBE-EC14BF92D6E8}"/>
+              </a:ext>
+            </a:extLst>
+          </p:cNvPr>
+          <p:cNvSpPr/>
+          <p:nvPr/>
+        </p:nvSpPr>
+        <p:spPr>
+          <a:xfrm>
+            <a:off x="2888974" y="5198496"/>
+            <a:ext cx="4723403" cy="490330"/>
+          </a:xfrm>
+          <a:prstGeom prst="leftRightArrow">
+            <a:avLst/>
+          </a:prstGeom>
+          <a:gradFill>
+            <a:gsLst>
+              <a:gs pos="0">
+                <a:schemeClr val="accent1">
+                  <a:lumMod val="5000"/>
+                  <a:lumOff val="95000"/>
+                </a:schemeClr>
+              </a:gs>
+              <a:gs pos="74000">
+                <a:schemeClr val="accent1">
+                  <a:lumMod val="45000"/>
+                  <a:lumOff val="55000"/>
+                </a:schemeClr>
+              </a:gs>
+              <a:gs pos="83000">
+                <a:schemeClr val="accent1">
+                  <a:lumMod val="45000"/>
+                  <a:lumOff val="55000"/>
+                </a:schemeClr>
+              </a:gs>
+              <a:gs pos="100000">
+                <a:schemeClr val="accent1">
+                  <a:lumMod val="30000"/>
+                  <a:lumOff val="70000"/>
+                </a:schemeClr>
+              </a:gs>
+            </a:gsLst>
+            <a:lin ang="5400000" scaled="1"/>
+          </a:gradFill>
+        </p:spPr>
+        <p:style>
+          <a:lnRef idx="2">
+            <a:schemeClr val="accent1">
+              <a:shade val="15000"/>
+            </a:schemeClr>
+          </a:lnRef>
+          <a:fillRef idx="1">
+            <a:schemeClr val="accent1"/>
+          </a:fillRef>
+          <a:effectRef idx="0">
+            <a:schemeClr val="accent1"/>
+          </a:effectRef>
+          <a:fontRef idx="minor">
+            <a:schemeClr val="lt1"/>
+          </a:fontRef>
+        </p:style>
+        <p:txBody>
+          <a:bodyPr rtlCol="0" anchor="ctr"/>
+          <a:lstStyle/>
+          <a:p>
+            <a:pPr algn="ctr"/>
+            <a:r>
+              <a:rPr lang="en-US" dirty="0"/>
+              <a:t>RESP3</a:t>
+            </a:r>
+            <a:endParaRPr lang="en-NL" dirty="0"/>
+          </a:p>
+        </p:txBody>
+      </p:sp>
+      <p:sp>
+        <p:nvSpPr>
+          <p:cNvPr id="12" name="Rectangle: Rounded Corners 11">
+            <a:extLst>
+              <a:ext uri="{FF2B5EF4-FFF2-40B4-BE49-F238E27FC236}">
+                <a16:creationId xmlns:a16="http://schemas.microsoft.com/office/drawing/2014/main" id="{F2353F4B-EBEF-762E-C172-A1A47A2201EF}"/>
+              </a:ext>
+            </a:extLst>
+          </p:cNvPr>
+          <p:cNvSpPr/>
+          <p:nvPr/>
+        </p:nvSpPr>
+        <p:spPr>
+          <a:xfrm>
+            <a:off x="7612380" y="2900238"/>
+            <a:ext cx="1690646" cy="3154680"/>
+          </a:xfrm>
+          <a:prstGeom prst="roundRect">
+            <a:avLst/>
+          </a:prstGeom>
+        </p:spPr>
+        <p:style>
+          <a:lnRef idx="2">
+            <a:schemeClr val="accent1">
+              <a:shade val="15000"/>
+            </a:schemeClr>
+          </a:lnRef>
+          <a:fillRef idx="1">
+            <a:schemeClr val="accent1"/>
+          </a:fillRef>
+          <a:effectRef idx="0">
+            <a:schemeClr val="accent1"/>
+          </a:effectRef>
+          <a:fontRef idx="minor">
+            <a:schemeClr val="lt1"/>
+          </a:fontRef>
+        </p:style>
+        <p:txBody>
+          <a:bodyPr rtlCol="0" anchor="ctr"/>
+          <a:lstStyle/>
+          <a:p>
+            <a:pPr algn="ctr"/>
+            <a:endParaRPr lang="en-NL"/>
+          </a:p>
+        </p:txBody>
+      </p:sp>
+      <p:sp>
+        <p:nvSpPr>
+          <p:cNvPr id="17" name="TextBox 16">
+            <a:extLst>
+              <a:ext uri="{FF2B5EF4-FFF2-40B4-BE49-F238E27FC236}">
+                <a16:creationId xmlns:a16="http://schemas.microsoft.com/office/drawing/2014/main" id="{FEABB92C-848E-CB9F-39FD-089BE313EB37}"/>
+              </a:ext>
+            </a:extLst>
+          </p:cNvPr>
+          <p:cNvSpPr txBox="1"/>
+          <p:nvPr/>
+        </p:nvSpPr>
+        <p:spPr>
+          <a:xfrm>
+            <a:off x="8174125" y="4099659"/>
+            <a:ext cx="978463" cy="646331"/>
+          </a:xfrm>
+          <a:prstGeom prst="rect">
+            <a:avLst/>
+          </a:prstGeom>
+          <a:noFill/>
+        </p:spPr>
+        <p:txBody>
+          <a:bodyPr wrap="square" rtlCol="0">
+            <a:spAutoFit/>
+          </a:bodyPr>
+          <a:lstStyle/>
+          <a:p>
+            <a:r>
+              <a:rPr lang="en-US" b="1" dirty="0">
+                <a:solidFill>
+                  <a:srgbClr val="FFFF00"/>
+                </a:solidFill>
+              </a:rPr>
+              <a:t>MIND server</a:t>
+            </a:r>
+            <a:endParaRPr lang="en-NL" b="1" dirty="0">
+              <a:solidFill>
+                <a:srgbClr val="FFFF00"/>
+              </a:solidFill>
+            </a:endParaRPr>
+          </a:p>
+        </p:txBody>
+      </p:sp>
+    </p:spTree>
+    <p:extLst>
+      <p:ext uri="{BB962C8B-B14F-4D97-AF65-F5344CB8AC3E}">
+        <p14:creationId xmlns:p14="http://schemas.microsoft.com/office/powerpoint/2010/main" val="3503112432"/>
+      </p:ext>
+    </p:extLst>
+  </p:cSld>
+  <p:clrMapOvr>
+    <a:masterClrMapping/>
+  </p:clrMapOvr>
+</p:sld>
+</file>
+
+<file path=ppt/slides/slide13.xml><?xml version="1.0" encoding="utf-8"?>
+<p:sld xmlns:a="http://schemas.openxmlformats.org/drawingml/2006/main" xmlns:r="http://schemas.openxmlformats.org/officeDocument/2006/relationships" xmlns:p="http://schemas.openxmlformats.org/presentationml/2006/main">
+  <p:cSld>
+    <p:spTree>
+      <p:nvGrpSpPr>
+        <p:cNvPr id="1" name=""/>
+        <p:cNvGrpSpPr/>
+        <p:nvPr/>
+      </p:nvGrpSpPr>
+      <p:grpSpPr>
+        <a:xfrm>
+          <a:off x="0" y="0"/>
+          <a:ext cx="0" cy="0"/>
+          <a:chOff x="0" y="0"/>
+          <a:chExt cx="0" cy="0"/>
+        </a:xfrm>
+      </p:grpSpPr>
+      <p:sp>
+        <p:nvSpPr>
+          <p:cNvPr id="2" name="Title 1">
+            <a:extLst>
+              <a:ext uri="{FF2B5EF4-FFF2-40B4-BE49-F238E27FC236}">
                 <a16:creationId xmlns:a16="http://schemas.microsoft.com/office/drawing/2014/main" id="{71A0E760-2C4C-850E-B41F-5ABE7C392222}"/>
               </a:ext>
             </a:extLst>
@@ -22335,7 +27119,7 @@
             <p:ph idx="1"/>
             <p:extLst>
               <p:ext uri="{D42A27DB-BD31-4B8C-83A1-F6EECF244321}">
-                <p14:modId xmlns:p14="http://schemas.microsoft.com/office/powerpoint/2010/main" val="2386543872"/>
+                <p14:modId xmlns:p14="http://schemas.microsoft.com/office/powerpoint/2010/main" val="4146353107"/>
               </p:ext>
               <p:ext uri="{E7BDC344-281C-4309-B0C6-D0EE65EED2A8}">
                 <p202:designPr xmlns:p202="http://schemas.microsoft.com/office/powerpoint/2020/02/main">
@@ -22661,6 +27445,266 @@
           <a:p>
             <a:r>
               <a:rPr lang="en-US" dirty="0"/>
+              <a:t>Private comment</a:t>
+            </a:r>
+            <a:endParaRPr lang="en-NL" dirty="0"/>
+          </a:p>
+        </p:txBody>
+      </p:sp>
+      <p:sp>
+        <p:nvSpPr>
+          <p:cNvPr id="3" name="Content Placeholder 2">
+            <a:extLst>
+              <a:ext uri="{FF2B5EF4-FFF2-40B4-BE49-F238E27FC236}">
+                <a16:creationId xmlns:a16="http://schemas.microsoft.com/office/drawing/2014/main" id="{6ECD4B7A-F343-5BCB-94C9-E80EB92EE397}"/>
+              </a:ext>
+            </a:extLst>
+          </p:cNvPr>
+          <p:cNvSpPr>
+            <a:spLocks noGrp="1"/>
+          </p:cNvSpPr>
+          <p:nvPr>
+            <p:ph idx="1"/>
+          </p:nvPr>
+        </p:nvSpPr>
+        <p:spPr/>
+        <p:txBody>
+          <a:bodyPr>
+            <a:normAutofit lnSpcReduction="10000"/>
+          </a:bodyPr>
+          <a:lstStyle/>
+          <a:p>
+            <a:r>
+              <a:rPr lang="en-US" dirty="0"/>
+              <a:t>Practically every database in the market has a remote access through sockets</a:t>
+            </a:r>
+          </a:p>
+          <a:p>
+            <a:r>
+              <a:rPr lang="en-US" dirty="0"/>
+              <a:t>One of the main reasons is the growing amount of processed data, leaving horizontal back-end scalability (multiple servers behind a load balancer) accessing a monolithic database a good compromise.</a:t>
+            </a:r>
+          </a:p>
+          <a:p>
+            <a:r>
+              <a:rPr lang="en-US" dirty="0"/>
+              <a:t>At the same time, executing only pure data API running on the server and moving all the business-tiers to external machines increase the power of the database server allowing a monolithic system to handle more traffic.</a:t>
+            </a:r>
+          </a:p>
+          <a:p>
+            <a:r>
+              <a:rPr lang="en-US" dirty="0" err="1"/>
+              <a:t>GTm</a:t>
+            </a:r>
+            <a:r>
+              <a:rPr lang="en-US" dirty="0"/>
+              <a:t> and YottaDB don’t have remote access, but I can understand that it is not easy to find the right compromise talking to remote servers with foreign programming languages</a:t>
+            </a:r>
+          </a:p>
+          <a:p>
+            <a:pPr lvl="1"/>
+            <a:endParaRPr lang="en-NL" dirty="0"/>
+          </a:p>
+        </p:txBody>
+      </p:sp>
+    </p:spTree>
+    <p:extLst>
+      <p:ext uri="{BB962C8B-B14F-4D97-AF65-F5344CB8AC3E}">
+        <p14:creationId xmlns:p14="http://schemas.microsoft.com/office/powerpoint/2010/main" val="2240125713"/>
+      </p:ext>
+    </p:extLst>
+  </p:cSld>
+  <p:clrMapOvr>
+    <a:masterClrMapping/>
+  </p:clrMapOvr>
+</p:sld>
+</file>
+
+<file path=ppt/slides/slide6.xml><?xml version="1.0" encoding="utf-8"?>
+<p:sld xmlns:a="http://schemas.openxmlformats.org/drawingml/2006/main" xmlns:r="http://schemas.openxmlformats.org/officeDocument/2006/relationships" xmlns:p="http://schemas.openxmlformats.org/presentationml/2006/main">
+  <p:cSld>
+    <p:spTree>
+      <p:nvGrpSpPr>
+        <p:cNvPr id="1" name="">
+          <a:extLst>
+            <a:ext uri="{FF2B5EF4-FFF2-40B4-BE49-F238E27FC236}">
+              <a16:creationId xmlns:a16="http://schemas.microsoft.com/office/drawing/2014/main" id="{932B73CC-7ECC-7075-0FFC-14EB9A731C77}"/>
+            </a:ext>
+          </a:extLst>
+        </p:cNvPr>
+        <p:cNvGrpSpPr/>
+        <p:nvPr/>
+      </p:nvGrpSpPr>
+      <p:grpSpPr>
+        <a:xfrm>
+          <a:off x="0" y="0"/>
+          <a:ext cx="0" cy="0"/>
+          <a:chOff x="0" y="0"/>
+          <a:chExt cx="0" cy="0"/>
+        </a:xfrm>
+      </p:grpSpPr>
+      <p:sp>
+        <p:nvSpPr>
+          <p:cNvPr id="2" name="Title 1">
+            <a:extLst>
+              <a:ext uri="{FF2B5EF4-FFF2-40B4-BE49-F238E27FC236}">
+                <a16:creationId xmlns:a16="http://schemas.microsoft.com/office/drawing/2014/main" id="{E56B026E-8CEF-8EBE-7D93-0A0EE6BAB81F}"/>
+              </a:ext>
+            </a:extLst>
+          </p:cNvPr>
+          <p:cNvSpPr>
+            <a:spLocks noGrp="1"/>
+          </p:cNvSpPr>
+          <p:nvPr>
+            <p:ph type="title"/>
+          </p:nvPr>
+        </p:nvSpPr>
+        <p:spPr/>
+        <p:txBody>
+          <a:bodyPr/>
+          <a:lstStyle/>
+          <a:p>
+            <a:r>
+              <a:rPr lang="en-US" dirty="0"/>
+              <a:t>Private comment</a:t>
+            </a:r>
+            <a:endParaRPr lang="en-NL" dirty="0"/>
+          </a:p>
+        </p:txBody>
+      </p:sp>
+      <p:sp>
+        <p:nvSpPr>
+          <p:cNvPr id="3" name="Content Placeholder 2">
+            <a:extLst>
+              <a:ext uri="{FF2B5EF4-FFF2-40B4-BE49-F238E27FC236}">
+                <a16:creationId xmlns:a16="http://schemas.microsoft.com/office/drawing/2014/main" id="{D2EC6879-A4B1-89EF-4659-2698C7501C18}"/>
+              </a:ext>
+            </a:extLst>
+          </p:cNvPr>
+          <p:cNvSpPr>
+            <a:spLocks noGrp="1"/>
+          </p:cNvSpPr>
+          <p:nvPr>
+            <p:ph idx="1"/>
+          </p:nvPr>
+        </p:nvSpPr>
+        <p:spPr/>
+        <p:txBody>
+          <a:bodyPr>
+            <a:normAutofit/>
+          </a:bodyPr>
+          <a:lstStyle/>
+          <a:p>
+            <a:r>
+              <a:rPr lang="en-US" dirty="0"/>
+              <a:t>That’s why Mind fill all the gaps:</a:t>
+            </a:r>
+          </a:p>
+          <a:p>
+            <a:pPr lvl="1"/>
+            <a:r>
+              <a:rPr lang="en-US" dirty="0"/>
+              <a:t>Talks M to M programmers and </a:t>
+            </a:r>
+            <a:r>
+              <a:rPr lang="en-US" dirty="0" err="1"/>
+              <a:t>js</a:t>
+            </a:r>
+            <a:r>
+              <a:rPr lang="en-US" dirty="0"/>
+              <a:t> / java / Go to remote programmers</a:t>
+            </a:r>
+          </a:p>
+          <a:p>
+            <a:pPr lvl="1"/>
+            <a:r>
+              <a:rPr lang="en-US" dirty="0"/>
+              <a:t>Expose data in back-end “standard” formats (data-types, Objects) for smoother integration</a:t>
+            </a:r>
+          </a:p>
+          <a:p>
+            <a:r>
+              <a:rPr lang="en-US" dirty="0"/>
+              <a:t>It is the natural “remote extension” of the multi-language packages YottaDB already offers…</a:t>
+            </a:r>
+          </a:p>
+          <a:p>
+            <a:r>
+              <a:rPr lang="en-US" dirty="0"/>
+              <a:t>It removes the need to have ALL the client’s code running on the database server, which is now the case (and, in some situation, a limitation for potential customers)</a:t>
+            </a:r>
+          </a:p>
+          <a:p>
+            <a:r>
+              <a:rPr lang="en-US" dirty="0"/>
+              <a:t>Why not offer both?</a:t>
+            </a:r>
+          </a:p>
+          <a:p>
+            <a:pPr lvl="1"/>
+            <a:endParaRPr lang="en-NL" dirty="0"/>
+          </a:p>
+        </p:txBody>
+      </p:sp>
+    </p:spTree>
+    <p:extLst>
+      <p:ext uri="{BB962C8B-B14F-4D97-AF65-F5344CB8AC3E}">
+        <p14:creationId xmlns:p14="http://schemas.microsoft.com/office/powerpoint/2010/main" val="3005701212"/>
+      </p:ext>
+    </p:extLst>
+  </p:cSld>
+  <p:clrMapOvr>
+    <a:masterClrMapping/>
+  </p:clrMapOvr>
+</p:sld>
+</file>
+
+<file path=ppt/slides/slide7.xml><?xml version="1.0" encoding="utf-8"?>
+<p:sld xmlns:a="http://schemas.openxmlformats.org/drawingml/2006/main" xmlns:r="http://schemas.openxmlformats.org/officeDocument/2006/relationships" xmlns:p="http://schemas.openxmlformats.org/presentationml/2006/main">
+  <p:cSld>
+    <p:spTree>
+      <p:nvGrpSpPr>
+        <p:cNvPr id="1" name="">
+          <a:extLst>
+            <a:ext uri="{FF2B5EF4-FFF2-40B4-BE49-F238E27FC236}">
+              <a16:creationId xmlns:a16="http://schemas.microsoft.com/office/drawing/2014/main" id="{2EB3ABBE-7B4D-2698-854D-2D6495764E76}"/>
+            </a:ext>
+          </a:extLst>
+        </p:cNvPr>
+        <p:cNvGrpSpPr/>
+        <p:nvPr/>
+      </p:nvGrpSpPr>
+      <p:grpSpPr>
+        <a:xfrm>
+          <a:off x="0" y="0"/>
+          <a:ext cx="0" cy="0"/>
+          <a:chOff x="0" y="0"/>
+          <a:chExt cx="0" cy="0"/>
+        </a:xfrm>
+      </p:grpSpPr>
+      <p:sp>
+        <p:nvSpPr>
+          <p:cNvPr id="2" name="Title 1">
+            <a:extLst>
+              <a:ext uri="{FF2B5EF4-FFF2-40B4-BE49-F238E27FC236}">
+                <a16:creationId xmlns:a16="http://schemas.microsoft.com/office/drawing/2014/main" id="{09BDE851-7CFF-64B0-4456-D720CAFFC1B5}"/>
+              </a:ext>
+            </a:extLst>
+          </p:cNvPr>
+          <p:cNvSpPr>
+            <a:spLocks noGrp="1"/>
+          </p:cNvSpPr>
+          <p:nvPr>
+            <p:ph type="title"/>
+          </p:nvPr>
+        </p:nvSpPr>
+        <p:spPr/>
+        <p:txBody>
+          <a:bodyPr/>
+          <a:lstStyle/>
+          <a:p>
+            <a:r>
+              <a:rPr lang="en-US" dirty="0"/>
               <a:t>RESP3 as network protocol</a:t>
             </a:r>
             <a:endParaRPr lang="en-NL" dirty="0"/>
@@ -22672,7 +27716,7 @@
           <p:cNvPr id="3" name="Content Placeholder 2">
             <a:extLst>
               <a:ext uri="{FF2B5EF4-FFF2-40B4-BE49-F238E27FC236}">
-                <a16:creationId xmlns:a16="http://schemas.microsoft.com/office/drawing/2014/main" id="{6ECD4B7A-F343-5BCB-94C9-E80EB92EE397}"/>
+                <a16:creationId xmlns:a16="http://schemas.microsoft.com/office/drawing/2014/main" id="{1D99AAD8-E086-1897-DC4C-F15BFE58AE2C}"/>
               </a:ext>
             </a:extLst>
           </p:cNvPr>
@@ -22741,7 +27785,7 @@
     </p:spTree>
     <p:extLst>
       <p:ext uri="{BB962C8B-B14F-4D97-AF65-F5344CB8AC3E}">
-        <p14:creationId xmlns:p14="http://schemas.microsoft.com/office/powerpoint/2010/main" val="2240125713"/>
+        <p14:creationId xmlns:p14="http://schemas.microsoft.com/office/powerpoint/2010/main" val="3729544716"/>
       </p:ext>
     </p:extLst>
   </p:cSld>
@@ -22751,7 +27795,7 @@
 </p:sld>
 </file>
 
-<file path=ppt/slides/slide6.xml><?xml version="1.0" encoding="utf-8"?>
+<file path=ppt/slides/slide8.xml><?xml version="1.0" encoding="utf-8"?>
 <p:sld xmlns:a="http://schemas.openxmlformats.org/drawingml/2006/main" xmlns:r="http://schemas.openxmlformats.org/officeDocument/2006/relationships" xmlns:p="http://schemas.openxmlformats.org/presentationml/2006/main">
   <p:cSld>
     <p:spTree>
@@ -23571,7 +28615,7 @@
 </p:sld>
 </file>
 
-<file path=ppt/slides/slide7.xml><?xml version="1.0" encoding="utf-8"?>
+<file path=ppt/slides/slide9.xml><?xml version="1.0" encoding="utf-8"?>
 <p:sld xmlns:a="http://schemas.openxmlformats.org/drawingml/2006/main" xmlns:r="http://schemas.openxmlformats.org/officeDocument/2006/relationships" xmlns:p="http://schemas.openxmlformats.org/presentationml/2006/main">
   <p:cSld>
     <p:spTree>
@@ -23674,838 +28718,6 @@
     <p:extLst>
       <p:ext uri="{BB962C8B-B14F-4D97-AF65-F5344CB8AC3E}">
         <p14:creationId xmlns:p14="http://schemas.microsoft.com/office/powerpoint/2010/main" val="1958801676"/>
-      </p:ext>
-    </p:extLst>
-  </p:cSld>
-  <p:clrMapOvr>
-    <a:masterClrMapping/>
-  </p:clrMapOvr>
-</p:sld>
-</file>
-
-<file path=ppt/slides/slide8.xml><?xml version="1.0" encoding="utf-8"?>
-<p:sld xmlns:a="http://schemas.openxmlformats.org/drawingml/2006/main" xmlns:r="http://schemas.openxmlformats.org/officeDocument/2006/relationships" xmlns:p="http://schemas.openxmlformats.org/presentationml/2006/main">
-  <p:cSld>
-    <p:bg>
-      <p:bgPr>
-        <a:solidFill>
-          <a:schemeClr val="bg1"/>
-        </a:solidFill>
-        <a:effectLst/>
-      </p:bgPr>
-    </p:bg>
-    <p:spTree>
-      <p:nvGrpSpPr>
-        <p:cNvPr id="1" name="">
-          <a:extLst>
-            <a:ext uri="{FF2B5EF4-FFF2-40B4-BE49-F238E27FC236}">
-              <a16:creationId xmlns:a16="http://schemas.microsoft.com/office/drawing/2014/main" id="{4D6DC185-0273-5F80-868C-0BB3B7C23D97}"/>
-            </a:ext>
-          </a:extLst>
-        </p:cNvPr>
-        <p:cNvGrpSpPr/>
-        <p:nvPr/>
-      </p:nvGrpSpPr>
-      <p:grpSpPr>
-        <a:xfrm>
-          <a:off x="0" y="0"/>
-          <a:ext cx="0" cy="0"/>
-          <a:chOff x="0" y="0"/>
-          <a:chExt cx="0" cy="0"/>
-        </a:xfrm>
-      </p:grpSpPr>
-      <p:sp>
-        <p:nvSpPr>
-          <p:cNvPr id="2" name="Title 1">
-            <a:extLst>
-              <a:ext uri="{FF2B5EF4-FFF2-40B4-BE49-F238E27FC236}">
-                <a16:creationId xmlns:a16="http://schemas.microsoft.com/office/drawing/2014/main" id="{DE27AA2B-1A44-5B47-5FA9-76DF0396F137}"/>
-              </a:ext>
-            </a:extLst>
-          </p:cNvPr>
-          <p:cNvSpPr>
-            <a:spLocks noGrp="1"/>
-          </p:cNvSpPr>
-          <p:nvPr>
-            <p:ph type="title"/>
-          </p:nvPr>
-        </p:nvSpPr>
-        <p:spPr>
-          <a:xfrm>
-            <a:off x="1952481" y="800783"/>
-            <a:ext cx="8278891" cy="1323867"/>
-          </a:xfrm>
-        </p:spPr>
-        <p:txBody>
-          <a:bodyPr anchor="b">
-            <a:normAutofit/>
-          </a:bodyPr>
-          <a:lstStyle/>
-          <a:p>
-            <a:r>
-              <a:rPr lang="en-US" dirty="0" err="1"/>
-              <a:t>fdssdf</a:t>
-            </a:r>
-            <a:endParaRPr lang="en-NL" dirty="0"/>
-          </a:p>
-        </p:txBody>
-      </p:sp>
-      <p:graphicFrame>
-        <p:nvGraphicFramePr>
-          <p:cNvPr id="11" name="Content Placeholder 2">
-            <a:extLst>
-              <a:ext uri="{FF2B5EF4-FFF2-40B4-BE49-F238E27FC236}">
-                <a16:creationId xmlns:a16="http://schemas.microsoft.com/office/drawing/2014/main" id="{088B2664-C99A-188C-C5EF-0529B0374B0B}"/>
-              </a:ext>
-            </a:extLst>
-          </p:cNvPr>
-          <p:cNvGraphicFramePr>
-            <a:graphicFrameLocks noGrp="1"/>
-          </p:cNvGraphicFramePr>
-          <p:nvPr>
-            <p:ph idx="1"/>
-            <p:extLst>
-              <p:ext uri="{E7BDC344-281C-4309-B0C6-D0EE65EED2A8}">
-                <p202:designPr xmlns:p202="http://schemas.microsoft.com/office/powerpoint/2020/02/main">
-                  <p202:designTagLst>
-                    <p202:designTag name="ARCH:1:CLS" val="InformationBlock"/>
-                    <p202:designTag name="ARCH:1:VSVAR" val="TitledTextBox"/>
-                  </p202:designTagLst>
-                </p202:designPr>
-              </p:ext>
-            </p:extLst>
-          </p:nvPr>
-        </p:nvGraphicFramePr>
-        <p:xfrm>
-          <a:off x="1952481" y="2495774"/>
-          <a:ext cx="8278892" cy="3273426"/>
-        </p:xfrm>
-        <a:graphic>
-          <a:graphicData uri="http://schemas.openxmlformats.org/drawingml/2006/diagram">
-            <dgm:relIds xmlns:dgm="http://schemas.openxmlformats.org/drawingml/2006/diagram" xmlns:r="http://schemas.openxmlformats.org/officeDocument/2006/relationships" r:dm="rId2" r:lo="rId3" r:qs="rId4" r:cs="rId5"/>
-          </a:graphicData>
-        </a:graphic>
-      </p:graphicFrame>
-    </p:spTree>
-    <p:extLst>
-      <p:ext uri="{BB962C8B-B14F-4D97-AF65-F5344CB8AC3E}">
-        <p14:creationId xmlns:p14="http://schemas.microsoft.com/office/powerpoint/2010/main" val="2760101554"/>
-      </p:ext>
-    </p:extLst>
-  </p:cSld>
-  <p:clrMapOvr>
-    <a:masterClrMapping/>
-  </p:clrMapOvr>
-</p:sld>
-</file>
-
-<file path=ppt/slides/slide9.xml><?xml version="1.0" encoding="utf-8"?>
-<p:sld xmlns:a="http://schemas.openxmlformats.org/drawingml/2006/main" xmlns:r="http://schemas.openxmlformats.org/officeDocument/2006/relationships" xmlns:p="http://schemas.openxmlformats.org/presentationml/2006/main">
-  <p:cSld>
-    <p:spTree>
-      <p:nvGrpSpPr>
-        <p:cNvPr id="1" name=""/>
-        <p:cNvGrpSpPr/>
-        <p:nvPr/>
-      </p:nvGrpSpPr>
-      <p:grpSpPr>
-        <a:xfrm>
-          <a:off x="0" y="0"/>
-          <a:ext cx="0" cy="0"/>
-          <a:chOff x="0" y="0"/>
-          <a:chExt cx="0" cy="0"/>
-        </a:xfrm>
-      </p:grpSpPr>
-      <p:sp>
-        <p:nvSpPr>
-          <p:cNvPr id="2" name="Title 1">
-            <a:extLst>
-              <a:ext uri="{FF2B5EF4-FFF2-40B4-BE49-F238E27FC236}">
-                <a16:creationId xmlns:a16="http://schemas.microsoft.com/office/drawing/2014/main" id="{50DF909B-EE31-EFAE-7A0A-716460177410}"/>
-              </a:ext>
-            </a:extLst>
-          </p:cNvPr>
-          <p:cNvSpPr>
-            <a:spLocks noGrp="1"/>
-          </p:cNvSpPr>
-          <p:nvPr>
-            <p:ph type="title"/>
-          </p:nvPr>
-        </p:nvSpPr>
-        <p:spPr/>
-        <p:txBody>
-          <a:bodyPr/>
-          <a:lstStyle/>
-          <a:p>
-            <a:r>
-              <a:rPr lang="en-US" dirty="0"/>
-              <a:t>Multiple client topology</a:t>
-            </a:r>
-            <a:endParaRPr lang="en-NL" dirty="0"/>
-          </a:p>
-        </p:txBody>
-      </p:sp>
-      <p:sp>
-        <p:nvSpPr>
-          <p:cNvPr id="3" name="Content Placeholder 2">
-            <a:extLst>
-              <a:ext uri="{FF2B5EF4-FFF2-40B4-BE49-F238E27FC236}">
-                <a16:creationId xmlns:a16="http://schemas.microsoft.com/office/drawing/2014/main" id="{827D319E-4957-2EE4-4C13-0595662B4AAA}"/>
-              </a:ext>
-            </a:extLst>
-          </p:cNvPr>
-          <p:cNvSpPr>
-            <a:spLocks noGrp="1"/>
-          </p:cNvSpPr>
-          <p:nvPr>
-            <p:ph idx="1"/>
-          </p:nvPr>
-        </p:nvSpPr>
-        <p:spPr>
-          <a:xfrm>
-            <a:off x="1154954" y="3037840"/>
-            <a:ext cx="8825659" cy="3416300"/>
-          </a:xfrm>
-        </p:spPr>
-        <p:txBody>
-          <a:bodyPr/>
-          <a:lstStyle/>
-          <a:p>
-            <a:endParaRPr lang="en-NL" dirty="0"/>
-          </a:p>
-        </p:txBody>
-      </p:sp>
-      <p:sp>
-        <p:nvSpPr>
-          <p:cNvPr id="4" name="Rectangle: Rounded Corners 3">
-            <a:extLst>
-              <a:ext uri="{FF2B5EF4-FFF2-40B4-BE49-F238E27FC236}">
-                <a16:creationId xmlns:a16="http://schemas.microsoft.com/office/drawing/2014/main" id="{62F072E5-7887-F607-BF39-D96818D9FA72}"/>
-              </a:ext>
-            </a:extLst>
-          </p:cNvPr>
-          <p:cNvSpPr/>
-          <p:nvPr/>
-        </p:nvSpPr>
-        <p:spPr>
-          <a:xfrm>
-            <a:off x="7259541" y="2668657"/>
-            <a:ext cx="3633746" cy="3617843"/>
-          </a:xfrm>
-          <a:prstGeom prst="roundRect">
-            <a:avLst/>
-          </a:prstGeom>
-          <a:gradFill>
-            <a:gsLst>
-              <a:gs pos="0">
-                <a:schemeClr val="accent5">
-                  <a:lumMod val="60000"/>
-                  <a:lumOff val="40000"/>
-                </a:schemeClr>
-              </a:gs>
-              <a:gs pos="74000">
-                <a:schemeClr val="accent1">
-                  <a:lumMod val="45000"/>
-                  <a:lumOff val="55000"/>
-                </a:schemeClr>
-              </a:gs>
-              <a:gs pos="83000">
-                <a:schemeClr val="accent1">
-                  <a:lumMod val="45000"/>
-                  <a:lumOff val="55000"/>
-                </a:schemeClr>
-              </a:gs>
-              <a:gs pos="100000">
-                <a:schemeClr val="accent5">
-                  <a:lumMod val="60000"/>
-                  <a:lumOff val="40000"/>
-                </a:schemeClr>
-              </a:gs>
-            </a:gsLst>
-            <a:lin ang="5400000" scaled="1"/>
-          </a:gradFill>
-        </p:spPr>
-        <p:style>
-          <a:lnRef idx="2">
-            <a:schemeClr val="accent1">
-              <a:shade val="15000"/>
-            </a:schemeClr>
-          </a:lnRef>
-          <a:fillRef idx="1">
-            <a:schemeClr val="accent1"/>
-          </a:fillRef>
-          <a:effectRef idx="0">
-            <a:schemeClr val="accent1"/>
-          </a:effectRef>
-          <a:fontRef idx="minor">
-            <a:schemeClr val="lt1"/>
-          </a:fontRef>
-        </p:style>
-        <p:txBody>
-          <a:bodyPr rtlCol="0" anchor="ctr"/>
-          <a:lstStyle/>
-          <a:p>
-            <a:pPr algn="ctr"/>
-            <a:endParaRPr lang="en-NL"/>
-          </a:p>
-        </p:txBody>
-      </p:sp>
-      <p:sp>
-        <p:nvSpPr>
-          <p:cNvPr id="5" name="Rectangle: Rounded Corners 4">
-            <a:extLst>
-              <a:ext uri="{FF2B5EF4-FFF2-40B4-BE49-F238E27FC236}">
-                <a16:creationId xmlns:a16="http://schemas.microsoft.com/office/drawing/2014/main" id="{36498F2A-2B3E-EC6E-3370-BDA6ECEEBCD1}"/>
-              </a:ext>
-            </a:extLst>
-          </p:cNvPr>
-          <p:cNvSpPr/>
-          <p:nvPr/>
-        </p:nvSpPr>
-        <p:spPr>
-          <a:xfrm>
-            <a:off x="1338470" y="3051644"/>
-            <a:ext cx="1550504" cy="662609"/>
-          </a:xfrm>
-          <a:prstGeom prst="roundRect">
-            <a:avLst/>
-          </a:prstGeom>
-        </p:spPr>
-        <p:style>
-          <a:lnRef idx="2">
-            <a:schemeClr val="accent1">
-              <a:shade val="15000"/>
-            </a:schemeClr>
-          </a:lnRef>
-          <a:fillRef idx="1">
-            <a:schemeClr val="accent1"/>
-          </a:fillRef>
-          <a:effectRef idx="0">
-            <a:schemeClr val="accent1"/>
-          </a:effectRef>
-          <a:fontRef idx="minor">
-            <a:schemeClr val="lt1"/>
-          </a:fontRef>
-        </p:style>
-        <p:txBody>
-          <a:bodyPr rtlCol="0" anchor="ctr"/>
-          <a:lstStyle/>
-          <a:p>
-            <a:pPr algn="ctr"/>
-            <a:r>
-              <a:rPr lang="en-US" dirty="0"/>
-              <a:t>Client</a:t>
-            </a:r>
-          </a:p>
-          <a:p>
-            <a:pPr algn="ctr"/>
-            <a:r>
-              <a:rPr lang="en-US" dirty="0"/>
-              <a:t>(nodejs)</a:t>
-            </a:r>
-            <a:endParaRPr lang="en-NL" dirty="0"/>
-          </a:p>
-        </p:txBody>
-      </p:sp>
-      <p:sp>
-        <p:nvSpPr>
-          <p:cNvPr id="6" name="Rectangle: Rounded Corners 5">
-            <a:extLst>
-              <a:ext uri="{FF2B5EF4-FFF2-40B4-BE49-F238E27FC236}">
-                <a16:creationId xmlns:a16="http://schemas.microsoft.com/office/drawing/2014/main" id="{C617F3A1-D3FE-2883-548B-55FBC5FAB49B}"/>
-              </a:ext>
-            </a:extLst>
-          </p:cNvPr>
-          <p:cNvSpPr/>
-          <p:nvPr/>
-        </p:nvSpPr>
-        <p:spPr>
-          <a:xfrm>
-            <a:off x="1338470" y="4052184"/>
-            <a:ext cx="1550504" cy="662609"/>
-          </a:xfrm>
-          <a:prstGeom prst="roundRect">
-            <a:avLst/>
-          </a:prstGeom>
-        </p:spPr>
-        <p:style>
-          <a:lnRef idx="2">
-            <a:schemeClr val="accent1">
-              <a:shade val="15000"/>
-            </a:schemeClr>
-          </a:lnRef>
-          <a:fillRef idx="1">
-            <a:schemeClr val="accent1"/>
-          </a:fillRef>
-          <a:effectRef idx="0">
-            <a:schemeClr val="accent1"/>
-          </a:effectRef>
-          <a:fontRef idx="minor">
-            <a:schemeClr val="lt1"/>
-          </a:fontRef>
-        </p:style>
-        <p:txBody>
-          <a:bodyPr rtlCol="0" anchor="ctr"/>
-          <a:lstStyle/>
-          <a:p>
-            <a:pPr algn="ctr"/>
-            <a:r>
-              <a:rPr lang="en-US" dirty="0"/>
-              <a:t>Client</a:t>
-            </a:r>
-          </a:p>
-          <a:p>
-            <a:pPr algn="ctr"/>
-            <a:r>
-              <a:rPr lang="en-US" dirty="0"/>
-              <a:t>(Go)</a:t>
-            </a:r>
-            <a:endParaRPr lang="en-NL" dirty="0"/>
-          </a:p>
-        </p:txBody>
-      </p:sp>
-      <p:sp>
-        <p:nvSpPr>
-          <p:cNvPr id="7" name="Rectangle: Rounded Corners 6">
-            <a:extLst>
-              <a:ext uri="{FF2B5EF4-FFF2-40B4-BE49-F238E27FC236}">
-                <a16:creationId xmlns:a16="http://schemas.microsoft.com/office/drawing/2014/main" id="{17CB8825-4B0A-2B99-5CCA-B5B43ED68D5E}"/>
-              </a:ext>
-            </a:extLst>
-          </p:cNvPr>
-          <p:cNvSpPr/>
-          <p:nvPr/>
-        </p:nvSpPr>
-        <p:spPr>
-          <a:xfrm>
-            <a:off x="1338470" y="5138864"/>
-            <a:ext cx="1550504" cy="662609"/>
-          </a:xfrm>
-          <a:prstGeom prst="roundRect">
-            <a:avLst/>
-          </a:prstGeom>
-        </p:spPr>
-        <p:style>
-          <a:lnRef idx="2">
-            <a:schemeClr val="accent1">
-              <a:shade val="15000"/>
-            </a:schemeClr>
-          </a:lnRef>
-          <a:fillRef idx="1">
-            <a:schemeClr val="accent1"/>
-          </a:fillRef>
-          <a:effectRef idx="0">
-            <a:schemeClr val="accent1"/>
-          </a:effectRef>
-          <a:fontRef idx="minor">
-            <a:schemeClr val="lt1"/>
-          </a:fontRef>
-        </p:style>
-        <p:txBody>
-          <a:bodyPr rtlCol="0" anchor="ctr"/>
-          <a:lstStyle/>
-          <a:p>
-            <a:pPr algn="ctr"/>
-            <a:r>
-              <a:rPr lang="en-US" dirty="0"/>
-              <a:t>Client</a:t>
-            </a:r>
-          </a:p>
-          <a:p>
-            <a:pPr algn="ctr"/>
-            <a:r>
-              <a:rPr lang="en-US" dirty="0"/>
-              <a:t>(Python)</a:t>
-            </a:r>
-            <a:endParaRPr lang="en-NL" dirty="0"/>
-          </a:p>
-        </p:txBody>
-      </p:sp>
-      <p:sp>
-        <p:nvSpPr>
-          <p:cNvPr id="8" name="TextBox 7">
-            <a:extLst>
-              <a:ext uri="{FF2B5EF4-FFF2-40B4-BE49-F238E27FC236}">
-                <a16:creationId xmlns:a16="http://schemas.microsoft.com/office/drawing/2014/main" id="{B05DF86D-A187-60DE-9EAA-60488AC3907E}"/>
-              </a:ext>
-            </a:extLst>
-          </p:cNvPr>
-          <p:cNvSpPr txBox="1"/>
-          <p:nvPr/>
-        </p:nvSpPr>
-        <p:spPr>
-          <a:xfrm>
-            <a:off x="9558414" y="5156235"/>
-            <a:ext cx="1457740" cy="646331"/>
-          </a:xfrm>
-          <a:prstGeom prst="rect">
-            <a:avLst/>
-          </a:prstGeom>
-          <a:noFill/>
-        </p:spPr>
-        <p:txBody>
-          <a:bodyPr wrap="square" rtlCol="0">
-            <a:spAutoFit/>
-          </a:bodyPr>
-          <a:lstStyle/>
-          <a:p>
-            <a:r>
-              <a:rPr lang="en-US" b="1" dirty="0">
-                <a:solidFill>
-                  <a:srgbClr val="FFFF00"/>
-                </a:solidFill>
-              </a:rPr>
-              <a:t>YottaDB</a:t>
-            </a:r>
-          </a:p>
-          <a:p>
-            <a:r>
-              <a:rPr lang="en-US" b="1" dirty="0">
-                <a:solidFill>
-                  <a:srgbClr val="FFFF00"/>
-                </a:solidFill>
-              </a:rPr>
-              <a:t>database</a:t>
-            </a:r>
-            <a:endParaRPr lang="en-NL" b="1" dirty="0">
-              <a:solidFill>
-                <a:srgbClr val="FFFF00"/>
-              </a:solidFill>
-            </a:endParaRPr>
-          </a:p>
-        </p:txBody>
-      </p:sp>
-      <p:sp>
-        <p:nvSpPr>
-          <p:cNvPr id="9" name="Arrow: Left-Right 8">
-            <a:extLst>
-              <a:ext uri="{FF2B5EF4-FFF2-40B4-BE49-F238E27FC236}">
-                <a16:creationId xmlns:a16="http://schemas.microsoft.com/office/drawing/2014/main" id="{8B874837-BD2C-4052-D10C-2C6FD0E0B0CD}"/>
-              </a:ext>
-            </a:extLst>
-          </p:cNvPr>
-          <p:cNvSpPr/>
-          <p:nvPr/>
-        </p:nvSpPr>
-        <p:spPr>
-          <a:xfrm>
-            <a:off x="2888974" y="3098027"/>
-            <a:ext cx="4723406" cy="490330"/>
-          </a:xfrm>
-          <a:prstGeom prst="leftRightArrow">
-            <a:avLst/>
-          </a:prstGeom>
-          <a:gradFill>
-            <a:gsLst>
-              <a:gs pos="0">
-                <a:schemeClr val="accent1">
-                  <a:lumMod val="5000"/>
-                  <a:lumOff val="95000"/>
-                </a:schemeClr>
-              </a:gs>
-              <a:gs pos="74000">
-                <a:schemeClr val="accent1">
-                  <a:lumMod val="45000"/>
-                  <a:lumOff val="55000"/>
-                </a:schemeClr>
-              </a:gs>
-              <a:gs pos="83000">
-                <a:schemeClr val="accent1">
-                  <a:lumMod val="45000"/>
-                  <a:lumOff val="55000"/>
-                </a:schemeClr>
-              </a:gs>
-              <a:gs pos="100000">
-                <a:schemeClr val="accent1">
-                  <a:lumMod val="30000"/>
-                  <a:lumOff val="70000"/>
-                </a:schemeClr>
-              </a:gs>
-            </a:gsLst>
-            <a:lin ang="5400000" scaled="1"/>
-          </a:gradFill>
-        </p:spPr>
-        <p:style>
-          <a:lnRef idx="2">
-            <a:schemeClr val="accent1">
-              <a:shade val="15000"/>
-            </a:schemeClr>
-          </a:lnRef>
-          <a:fillRef idx="1">
-            <a:schemeClr val="accent1"/>
-          </a:fillRef>
-          <a:effectRef idx="0">
-            <a:schemeClr val="accent1"/>
-          </a:effectRef>
-          <a:fontRef idx="minor">
-            <a:schemeClr val="lt1"/>
-          </a:fontRef>
-        </p:style>
-        <p:txBody>
-          <a:bodyPr rtlCol="0" anchor="ctr"/>
-          <a:lstStyle/>
-          <a:p>
-            <a:pPr algn="ctr"/>
-            <a:r>
-              <a:rPr lang="en-US" dirty="0"/>
-              <a:t>RESP3</a:t>
-            </a:r>
-            <a:endParaRPr lang="en-NL" dirty="0"/>
-          </a:p>
-        </p:txBody>
-      </p:sp>
-      <p:sp>
-        <p:nvSpPr>
-          <p:cNvPr id="10" name="Arrow: Left-Right 9">
-            <a:extLst>
-              <a:ext uri="{FF2B5EF4-FFF2-40B4-BE49-F238E27FC236}">
-                <a16:creationId xmlns:a16="http://schemas.microsoft.com/office/drawing/2014/main" id="{361A8CD9-16B7-755F-4E8A-F0E7175BCAB8}"/>
-              </a:ext>
-            </a:extLst>
-          </p:cNvPr>
-          <p:cNvSpPr/>
-          <p:nvPr/>
-        </p:nvSpPr>
-        <p:spPr>
-          <a:xfrm>
-            <a:off x="2888972" y="4138324"/>
-            <a:ext cx="4723405" cy="490330"/>
-          </a:xfrm>
-          <a:prstGeom prst="leftRightArrow">
-            <a:avLst/>
-          </a:prstGeom>
-          <a:gradFill>
-            <a:gsLst>
-              <a:gs pos="0">
-                <a:schemeClr val="accent1">
-                  <a:lumMod val="5000"/>
-                  <a:lumOff val="95000"/>
-                </a:schemeClr>
-              </a:gs>
-              <a:gs pos="74000">
-                <a:schemeClr val="accent1">
-                  <a:lumMod val="45000"/>
-                  <a:lumOff val="55000"/>
-                </a:schemeClr>
-              </a:gs>
-              <a:gs pos="83000">
-                <a:schemeClr val="accent1">
-                  <a:lumMod val="45000"/>
-                  <a:lumOff val="55000"/>
-                </a:schemeClr>
-              </a:gs>
-              <a:gs pos="100000">
-                <a:schemeClr val="accent1">
-                  <a:lumMod val="30000"/>
-                  <a:lumOff val="70000"/>
-                </a:schemeClr>
-              </a:gs>
-            </a:gsLst>
-            <a:lin ang="5400000" scaled="1"/>
-          </a:gradFill>
-        </p:spPr>
-        <p:style>
-          <a:lnRef idx="2">
-            <a:schemeClr val="accent1">
-              <a:shade val="15000"/>
-            </a:schemeClr>
-          </a:lnRef>
-          <a:fillRef idx="1">
-            <a:schemeClr val="accent1"/>
-          </a:fillRef>
-          <a:effectRef idx="0">
-            <a:schemeClr val="accent1"/>
-          </a:effectRef>
-          <a:fontRef idx="minor">
-            <a:schemeClr val="lt1"/>
-          </a:fontRef>
-        </p:style>
-        <p:txBody>
-          <a:bodyPr rtlCol="0" anchor="ctr"/>
-          <a:lstStyle/>
-          <a:p>
-            <a:pPr algn="ctr"/>
-            <a:r>
-              <a:rPr lang="en-US" dirty="0"/>
-              <a:t>RESP3</a:t>
-            </a:r>
-            <a:endParaRPr lang="en-NL" dirty="0"/>
-          </a:p>
-        </p:txBody>
-      </p:sp>
-      <p:sp>
-        <p:nvSpPr>
-          <p:cNvPr id="11" name="Arrow: Left-Right 10">
-            <a:extLst>
-              <a:ext uri="{FF2B5EF4-FFF2-40B4-BE49-F238E27FC236}">
-                <a16:creationId xmlns:a16="http://schemas.microsoft.com/office/drawing/2014/main" id="{6DFC8CCF-17FF-8005-BDBE-EC14BF92D6E8}"/>
-              </a:ext>
-            </a:extLst>
-          </p:cNvPr>
-          <p:cNvSpPr/>
-          <p:nvPr/>
-        </p:nvSpPr>
-        <p:spPr>
-          <a:xfrm>
-            <a:off x="2888974" y="5198496"/>
-            <a:ext cx="4723403" cy="490330"/>
-          </a:xfrm>
-          <a:prstGeom prst="leftRightArrow">
-            <a:avLst/>
-          </a:prstGeom>
-          <a:gradFill>
-            <a:gsLst>
-              <a:gs pos="0">
-                <a:schemeClr val="accent1">
-                  <a:lumMod val="5000"/>
-                  <a:lumOff val="95000"/>
-                </a:schemeClr>
-              </a:gs>
-              <a:gs pos="74000">
-                <a:schemeClr val="accent1">
-                  <a:lumMod val="45000"/>
-                  <a:lumOff val="55000"/>
-                </a:schemeClr>
-              </a:gs>
-              <a:gs pos="83000">
-                <a:schemeClr val="accent1">
-                  <a:lumMod val="45000"/>
-                  <a:lumOff val="55000"/>
-                </a:schemeClr>
-              </a:gs>
-              <a:gs pos="100000">
-                <a:schemeClr val="accent1">
-                  <a:lumMod val="30000"/>
-                  <a:lumOff val="70000"/>
-                </a:schemeClr>
-              </a:gs>
-            </a:gsLst>
-            <a:lin ang="5400000" scaled="1"/>
-          </a:gradFill>
-        </p:spPr>
-        <p:style>
-          <a:lnRef idx="2">
-            <a:schemeClr val="accent1">
-              <a:shade val="15000"/>
-            </a:schemeClr>
-          </a:lnRef>
-          <a:fillRef idx="1">
-            <a:schemeClr val="accent1"/>
-          </a:fillRef>
-          <a:effectRef idx="0">
-            <a:schemeClr val="accent1"/>
-          </a:effectRef>
-          <a:fontRef idx="minor">
-            <a:schemeClr val="lt1"/>
-          </a:fontRef>
-        </p:style>
-        <p:txBody>
-          <a:bodyPr rtlCol="0" anchor="ctr"/>
-          <a:lstStyle/>
-          <a:p>
-            <a:pPr algn="ctr"/>
-            <a:r>
-              <a:rPr lang="en-US" dirty="0"/>
-              <a:t>RESP3</a:t>
-            </a:r>
-            <a:endParaRPr lang="en-NL" dirty="0"/>
-          </a:p>
-        </p:txBody>
-      </p:sp>
-      <p:sp>
-        <p:nvSpPr>
-          <p:cNvPr id="12" name="Rectangle: Rounded Corners 11">
-            <a:extLst>
-              <a:ext uri="{FF2B5EF4-FFF2-40B4-BE49-F238E27FC236}">
-                <a16:creationId xmlns:a16="http://schemas.microsoft.com/office/drawing/2014/main" id="{F2353F4B-EBEF-762E-C172-A1A47A2201EF}"/>
-              </a:ext>
-            </a:extLst>
-          </p:cNvPr>
-          <p:cNvSpPr/>
-          <p:nvPr/>
-        </p:nvSpPr>
-        <p:spPr>
-          <a:xfrm>
-            <a:off x="7612380" y="2900238"/>
-            <a:ext cx="1690646" cy="3154680"/>
-          </a:xfrm>
-          <a:prstGeom prst="roundRect">
-            <a:avLst/>
-          </a:prstGeom>
-        </p:spPr>
-        <p:style>
-          <a:lnRef idx="2">
-            <a:schemeClr val="accent1">
-              <a:shade val="15000"/>
-            </a:schemeClr>
-          </a:lnRef>
-          <a:fillRef idx="1">
-            <a:schemeClr val="accent1"/>
-          </a:fillRef>
-          <a:effectRef idx="0">
-            <a:schemeClr val="accent1"/>
-          </a:effectRef>
-          <a:fontRef idx="minor">
-            <a:schemeClr val="lt1"/>
-          </a:fontRef>
-        </p:style>
-        <p:txBody>
-          <a:bodyPr rtlCol="0" anchor="ctr"/>
-          <a:lstStyle/>
-          <a:p>
-            <a:pPr algn="ctr"/>
-            <a:endParaRPr lang="en-NL"/>
-          </a:p>
-        </p:txBody>
-      </p:sp>
-      <p:sp>
-        <p:nvSpPr>
-          <p:cNvPr id="17" name="TextBox 16">
-            <a:extLst>
-              <a:ext uri="{FF2B5EF4-FFF2-40B4-BE49-F238E27FC236}">
-                <a16:creationId xmlns:a16="http://schemas.microsoft.com/office/drawing/2014/main" id="{FEABB92C-848E-CB9F-39FD-089BE313EB37}"/>
-              </a:ext>
-            </a:extLst>
-          </p:cNvPr>
-          <p:cNvSpPr txBox="1"/>
-          <p:nvPr/>
-        </p:nvSpPr>
-        <p:spPr>
-          <a:xfrm>
-            <a:off x="8174125" y="4099659"/>
-            <a:ext cx="978463" cy="646331"/>
-          </a:xfrm>
-          <a:prstGeom prst="rect">
-            <a:avLst/>
-          </a:prstGeom>
-          <a:noFill/>
-        </p:spPr>
-        <p:txBody>
-          <a:bodyPr wrap="square" rtlCol="0">
-            <a:spAutoFit/>
-          </a:bodyPr>
-          <a:lstStyle/>
-          <a:p>
-            <a:r>
-              <a:rPr lang="en-US" b="1" dirty="0">
-                <a:solidFill>
-                  <a:srgbClr val="FFFF00"/>
-                </a:solidFill>
-              </a:rPr>
-              <a:t>MIND server</a:t>
-            </a:r>
-            <a:endParaRPr lang="en-NL" b="1" dirty="0">
-              <a:solidFill>
-                <a:srgbClr val="FFFF00"/>
-              </a:solidFill>
-            </a:endParaRPr>
-          </a:p>
-        </p:txBody>
-      </p:sp>
-    </p:spTree>
-    <p:extLst>
-      <p:ext uri="{BB962C8B-B14F-4D97-AF65-F5344CB8AC3E}">
-        <p14:creationId xmlns:p14="http://schemas.microsoft.com/office/powerpoint/2010/main" val="3503112432"/>
       </p:ext>
     </p:extLst>
   </p:cSld>

--- a/docs/slides/def1.pptx
+++ b/docs/slides/def1.pptx
@@ -10,11 +10,12 @@
     <p:sldId id="264" r:id="rId4"/>
     <p:sldId id="259" r:id="rId5"/>
     <p:sldId id="257" r:id="rId6"/>
-    <p:sldId id="263" r:id="rId7"/>
-    <p:sldId id="260" r:id="rId8"/>
-    <p:sldId id="261" r:id="rId9"/>
-    <p:sldId id="262" r:id="rId10"/>
-    <p:sldId id="265" r:id="rId11"/>
+    <p:sldId id="266" r:id="rId7"/>
+    <p:sldId id="263" r:id="rId8"/>
+    <p:sldId id="260" r:id="rId9"/>
+    <p:sldId id="261" r:id="rId10"/>
+    <p:sldId id="262" r:id="rId11"/>
+    <p:sldId id="265" r:id="rId12"/>
   </p:sldIdLst>
   <p:sldSz cx="12192000" cy="6858000"/>
   <p:notesSz cx="6858000" cy="9144000"/>
@@ -22196,6 +22197,722 @@
           <p:cNvPr id="2" name="Title 1">
             <a:extLst>
               <a:ext uri="{FF2B5EF4-FFF2-40B4-BE49-F238E27FC236}">
+                <a16:creationId xmlns:a16="http://schemas.microsoft.com/office/drawing/2014/main" id="{50DF909B-EE31-EFAE-7A0A-716460177410}"/>
+              </a:ext>
+            </a:extLst>
+          </p:cNvPr>
+          <p:cNvSpPr>
+            <a:spLocks noGrp="1"/>
+          </p:cNvSpPr>
+          <p:nvPr>
+            <p:ph type="title"/>
+          </p:nvPr>
+        </p:nvSpPr>
+        <p:spPr/>
+        <p:txBody>
+          <a:bodyPr/>
+          <a:lstStyle/>
+          <a:p>
+            <a:r>
+              <a:rPr lang="en-US" dirty="0"/>
+              <a:t>Multiple client topology</a:t>
+            </a:r>
+            <a:endParaRPr lang="en-NL" dirty="0"/>
+          </a:p>
+        </p:txBody>
+      </p:sp>
+      <p:sp>
+        <p:nvSpPr>
+          <p:cNvPr id="3" name="Content Placeholder 2">
+            <a:extLst>
+              <a:ext uri="{FF2B5EF4-FFF2-40B4-BE49-F238E27FC236}">
+                <a16:creationId xmlns:a16="http://schemas.microsoft.com/office/drawing/2014/main" id="{827D319E-4957-2EE4-4C13-0595662B4AAA}"/>
+              </a:ext>
+            </a:extLst>
+          </p:cNvPr>
+          <p:cNvSpPr>
+            <a:spLocks noGrp="1"/>
+          </p:cNvSpPr>
+          <p:nvPr>
+            <p:ph idx="1"/>
+          </p:nvPr>
+        </p:nvSpPr>
+        <p:spPr>
+          <a:xfrm>
+            <a:off x="1154954" y="3037840"/>
+            <a:ext cx="8825659" cy="3416300"/>
+          </a:xfrm>
+        </p:spPr>
+        <p:txBody>
+          <a:bodyPr/>
+          <a:lstStyle/>
+          <a:p>
+            <a:endParaRPr lang="en-NL" dirty="0"/>
+          </a:p>
+        </p:txBody>
+      </p:sp>
+      <p:sp>
+        <p:nvSpPr>
+          <p:cNvPr id="4" name="Rectangle: Rounded Corners 3">
+            <a:extLst>
+              <a:ext uri="{FF2B5EF4-FFF2-40B4-BE49-F238E27FC236}">
+                <a16:creationId xmlns:a16="http://schemas.microsoft.com/office/drawing/2014/main" id="{62F072E5-7887-F607-BF39-D96818D9FA72}"/>
+              </a:ext>
+            </a:extLst>
+          </p:cNvPr>
+          <p:cNvSpPr/>
+          <p:nvPr/>
+        </p:nvSpPr>
+        <p:spPr>
+          <a:xfrm>
+            <a:off x="7259541" y="2668657"/>
+            <a:ext cx="3633746" cy="3617843"/>
+          </a:xfrm>
+          <a:prstGeom prst="roundRect">
+            <a:avLst/>
+          </a:prstGeom>
+          <a:gradFill>
+            <a:gsLst>
+              <a:gs pos="0">
+                <a:schemeClr val="accent5">
+                  <a:lumMod val="60000"/>
+                  <a:lumOff val="40000"/>
+                </a:schemeClr>
+              </a:gs>
+              <a:gs pos="74000">
+                <a:schemeClr val="accent1">
+                  <a:lumMod val="45000"/>
+                  <a:lumOff val="55000"/>
+                </a:schemeClr>
+              </a:gs>
+              <a:gs pos="83000">
+                <a:schemeClr val="accent1">
+                  <a:lumMod val="45000"/>
+                  <a:lumOff val="55000"/>
+                </a:schemeClr>
+              </a:gs>
+              <a:gs pos="100000">
+                <a:schemeClr val="accent5">
+                  <a:lumMod val="60000"/>
+                  <a:lumOff val="40000"/>
+                </a:schemeClr>
+              </a:gs>
+            </a:gsLst>
+            <a:lin ang="5400000" scaled="1"/>
+          </a:gradFill>
+        </p:spPr>
+        <p:style>
+          <a:lnRef idx="2">
+            <a:schemeClr val="accent1">
+              <a:shade val="15000"/>
+            </a:schemeClr>
+          </a:lnRef>
+          <a:fillRef idx="1">
+            <a:schemeClr val="accent1"/>
+          </a:fillRef>
+          <a:effectRef idx="0">
+            <a:schemeClr val="accent1"/>
+          </a:effectRef>
+          <a:fontRef idx="minor">
+            <a:schemeClr val="lt1"/>
+          </a:fontRef>
+        </p:style>
+        <p:txBody>
+          <a:bodyPr rtlCol="0" anchor="ctr"/>
+          <a:lstStyle/>
+          <a:p>
+            <a:pPr algn="ctr"/>
+            <a:endParaRPr lang="en-NL"/>
+          </a:p>
+        </p:txBody>
+      </p:sp>
+      <p:sp>
+        <p:nvSpPr>
+          <p:cNvPr id="5" name="Rectangle: Rounded Corners 4">
+            <a:extLst>
+              <a:ext uri="{FF2B5EF4-FFF2-40B4-BE49-F238E27FC236}">
+                <a16:creationId xmlns:a16="http://schemas.microsoft.com/office/drawing/2014/main" id="{36498F2A-2B3E-EC6E-3370-BDA6ECEEBCD1}"/>
+              </a:ext>
+            </a:extLst>
+          </p:cNvPr>
+          <p:cNvSpPr/>
+          <p:nvPr/>
+        </p:nvSpPr>
+        <p:spPr>
+          <a:xfrm>
+            <a:off x="1338470" y="3051644"/>
+            <a:ext cx="1550504" cy="662609"/>
+          </a:xfrm>
+          <a:prstGeom prst="roundRect">
+            <a:avLst/>
+          </a:prstGeom>
+        </p:spPr>
+        <p:style>
+          <a:lnRef idx="2">
+            <a:schemeClr val="accent1">
+              <a:shade val="15000"/>
+            </a:schemeClr>
+          </a:lnRef>
+          <a:fillRef idx="1">
+            <a:schemeClr val="accent1"/>
+          </a:fillRef>
+          <a:effectRef idx="0">
+            <a:schemeClr val="accent1"/>
+          </a:effectRef>
+          <a:fontRef idx="minor">
+            <a:schemeClr val="lt1"/>
+          </a:fontRef>
+        </p:style>
+        <p:txBody>
+          <a:bodyPr rtlCol="0" anchor="ctr"/>
+          <a:lstStyle/>
+          <a:p>
+            <a:pPr algn="ctr"/>
+            <a:r>
+              <a:rPr lang="en-US" dirty="0"/>
+              <a:t>Client</a:t>
+            </a:r>
+          </a:p>
+          <a:p>
+            <a:pPr algn="ctr"/>
+            <a:r>
+              <a:rPr lang="en-US" dirty="0"/>
+              <a:t>(nodejs)</a:t>
+            </a:r>
+            <a:endParaRPr lang="en-NL" dirty="0"/>
+          </a:p>
+        </p:txBody>
+      </p:sp>
+      <p:sp>
+        <p:nvSpPr>
+          <p:cNvPr id="6" name="Rectangle: Rounded Corners 5">
+            <a:extLst>
+              <a:ext uri="{FF2B5EF4-FFF2-40B4-BE49-F238E27FC236}">
+                <a16:creationId xmlns:a16="http://schemas.microsoft.com/office/drawing/2014/main" id="{C617F3A1-D3FE-2883-548B-55FBC5FAB49B}"/>
+              </a:ext>
+            </a:extLst>
+          </p:cNvPr>
+          <p:cNvSpPr/>
+          <p:nvPr/>
+        </p:nvSpPr>
+        <p:spPr>
+          <a:xfrm>
+            <a:off x="1338470" y="4052184"/>
+            <a:ext cx="1550504" cy="662609"/>
+          </a:xfrm>
+          <a:prstGeom prst="roundRect">
+            <a:avLst/>
+          </a:prstGeom>
+        </p:spPr>
+        <p:style>
+          <a:lnRef idx="2">
+            <a:schemeClr val="accent1">
+              <a:shade val="15000"/>
+            </a:schemeClr>
+          </a:lnRef>
+          <a:fillRef idx="1">
+            <a:schemeClr val="accent1"/>
+          </a:fillRef>
+          <a:effectRef idx="0">
+            <a:schemeClr val="accent1"/>
+          </a:effectRef>
+          <a:fontRef idx="minor">
+            <a:schemeClr val="lt1"/>
+          </a:fontRef>
+        </p:style>
+        <p:txBody>
+          <a:bodyPr rtlCol="0" anchor="ctr"/>
+          <a:lstStyle/>
+          <a:p>
+            <a:pPr algn="ctr"/>
+            <a:r>
+              <a:rPr lang="en-US" dirty="0"/>
+              <a:t>Client</a:t>
+            </a:r>
+          </a:p>
+          <a:p>
+            <a:pPr algn="ctr"/>
+            <a:r>
+              <a:rPr lang="en-US" dirty="0"/>
+              <a:t>(Go)</a:t>
+            </a:r>
+            <a:endParaRPr lang="en-NL" dirty="0"/>
+          </a:p>
+        </p:txBody>
+      </p:sp>
+      <p:sp>
+        <p:nvSpPr>
+          <p:cNvPr id="7" name="Rectangle: Rounded Corners 6">
+            <a:extLst>
+              <a:ext uri="{FF2B5EF4-FFF2-40B4-BE49-F238E27FC236}">
+                <a16:creationId xmlns:a16="http://schemas.microsoft.com/office/drawing/2014/main" id="{17CB8825-4B0A-2B99-5CCA-B5B43ED68D5E}"/>
+              </a:ext>
+            </a:extLst>
+          </p:cNvPr>
+          <p:cNvSpPr/>
+          <p:nvPr/>
+        </p:nvSpPr>
+        <p:spPr>
+          <a:xfrm>
+            <a:off x="1338470" y="5138864"/>
+            <a:ext cx="1550504" cy="662609"/>
+          </a:xfrm>
+          <a:prstGeom prst="roundRect">
+            <a:avLst/>
+          </a:prstGeom>
+        </p:spPr>
+        <p:style>
+          <a:lnRef idx="2">
+            <a:schemeClr val="accent1">
+              <a:shade val="15000"/>
+            </a:schemeClr>
+          </a:lnRef>
+          <a:fillRef idx="1">
+            <a:schemeClr val="accent1"/>
+          </a:fillRef>
+          <a:effectRef idx="0">
+            <a:schemeClr val="accent1"/>
+          </a:effectRef>
+          <a:fontRef idx="minor">
+            <a:schemeClr val="lt1"/>
+          </a:fontRef>
+        </p:style>
+        <p:txBody>
+          <a:bodyPr rtlCol="0" anchor="ctr"/>
+          <a:lstStyle/>
+          <a:p>
+            <a:pPr algn="ctr"/>
+            <a:r>
+              <a:rPr lang="en-US" dirty="0"/>
+              <a:t>Client</a:t>
+            </a:r>
+          </a:p>
+          <a:p>
+            <a:pPr algn="ctr"/>
+            <a:r>
+              <a:rPr lang="en-US" dirty="0"/>
+              <a:t>(Python)</a:t>
+            </a:r>
+            <a:endParaRPr lang="en-NL" dirty="0"/>
+          </a:p>
+        </p:txBody>
+      </p:sp>
+      <p:sp>
+        <p:nvSpPr>
+          <p:cNvPr id="8" name="TextBox 7">
+            <a:extLst>
+              <a:ext uri="{FF2B5EF4-FFF2-40B4-BE49-F238E27FC236}">
+                <a16:creationId xmlns:a16="http://schemas.microsoft.com/office/drawing/2014/main" id="{B05DF86D-A187-60DE-9EAA-60488AC3907E}"/>
+              </a:ext>
+            </a:extLst>
+          </p:cNvPr>
+          <p:cNvSpPr txBox="1"/>
+          <p:nvPr/>
+        </p:nvSpPr>
+        <p:spPr>
+          <a:xfrm>
+            <a:off x="9558414" y="5156235"/>
+            <a:ext cx="1457740" cy="646331"/>
+          </a:xfrm>
+          <a:prstGeom prst="rect">
+            <a:avLst/>
+          </a:prstGeom>
+          <a:noFill/>
+        </p:spPr>
+        <p:txBody>
+          <a:bodyPr wrap="square" rtlCol="0">
+            <a:spAutoFit/>
+          </a:bodyPr>
+          <a:lstStyle/>
+          <a:p>
+            <a:r>
+              <a:rPr lang="en-US" b="1" dirty="0">
+                <a:solidFill>
+                  <a:srgbClr val="FFFF00"/>
+                </a:solidFill>
+              </a:rPr>
+              <a:t>YottaDB</a:t>
+            </a:r>
+          </a:p>
+          <a:p>
+            <a:r>
+              <a:rPr lang="en-US" b="1" dirty="0">
+                <a:solidFill>
+                  <a:srgbClr val="FFFF00"/>
+                </a:solidFill>
+              </a:rPr>
+              <a:t>database</a:t>
+            </a:r>
+            <a:endParaRPr lang="en-NL" b="1" dirty="0">
+              <a:solidFill>
+                <a:srgbClr val="FFFF00"/>
+              </a:solidFill>
+            </a:endParaRPr>
+          </a:p>
+        </p:txBody>
+      </p:sp>
+      <p:sp>
+        <p:nvSpPr>
+          <p:cNvPr id="9" name="Arrow: Left-Right 8">
+            <a:extLst>
+              <a:ext uri="{FF2B5EF4-FFF2-40B4-BE49-F238E27FC236}">
+                <a16:creationId xmlns:a16="http://schemas.microsoft.com/office/drawing/2014/main" id="{8B874837-BD2C-4052-D10C-2C6FD0E0B0CD}"/>
+              </a:ext>
+            </a:extLst>
+          </p:cNvPr>
+          <p:cNvSpPr/>
+          <p:nvPr/>
+        </p:nvSpPr>
+        <p:spPr>
+          <a:xfrm>
+            <a:off x="2888974" y="3098027"/>
+            <a:ext cx="4723406" cy="490330"/>
+          </a:xfrm>
+          <a:prstGeom prst="leftRightArrow">
+            <a:avLst/>
+          </a:prstGeom>
+          <a:gradFill>
+            <a:gsLst>
+              <a:gs pos="0">
+                <a:schemeClr val="accent1">
+                  <a:lumMod val="5000"/>
+                  <a:lumOff val="95000"/>
+                </a:schemeClr>
+              </a:gs>
+              <a:gs pos="74000">
+                <a:schemeClr val="accent1">
+                  <a:lumMod val="45000"/>
+                  <a:lumOff val="55000"/>
+                </a:schemeClr>
+              </a:gs>
+              <a:gs pos="83000">
+                <a:schemeClr val="accent1">
+                  <a:lumMod val="45000"/>
+                  <a:lumOff val="55000"/>
+                </a:schemeClr>
+              </a:gs>
+              <a:gs pos="100000">
+                <a:schemeClr val="accent1">
+                  <a:lumMod val="30000"/>
+                  <a:lumOff val="70000"/>
+                </a:schemeClr>
+              </a:gs>
+            </a:gsLst>
+            <a:lin ang="5400000" scaled="1"/>
+          </a:gradFill>
+        </p:spPr>
+        <p:style>
+          <a:lnRef idx="2">
+            <a:schemeClr val="accent1">
+              <a:shade val="15000"/>
+            </a:schemeClr>
+          </a:lnRef>
+          <a:fillRef idx="1">
+            <a:schemeClr val="accent1"/>
+          </a:fillRef>
+          <a:effectRef idx="0">
+            <a:schemeClr val="accent1"/>
+          </a:effectRef>
+          <a:fontRef idx="minor">
+            <a:schemeClr val="lt1"/>
+          </a:fontRef>
+        </p:style>
+        <p:txBody>
+          <a:bodyPr rtlCol="0" anchor="ctr"/>
+          <a:lstStyle/>
+          <a:p>
+            <a:pPr algn="ctr"/>
+            <a:r>
+              <a:rPr lang="en-US" dirty="0"/>
+              <a:t>RESP3</a:t>
+            </a:r>
+            <a:endParaRPr lang="en-NL" dirty="0"/>
+          </a:p>
+        </p:txBody>
+      </p:sp>
+      <p:sp>
+        <p:nvSpPr>
+          <p:cNvPr id="10" name="Arrow: Left-Right 9">
+            <a:extLst>
+              <a:ext uri="{FF2B5EF4-FFF2-40B4-BE49-F238E27FC236}">
+                <a16:creationId xmlns:a16="http://schemas.microsoft.com/office/drawing/2014/main" id="{361A8CD9-16B7-755F-4E8A-F0E7175BCAB8}"/>
+              </a:ext>
+            </a:extLst>
+          </p:cNvPr>
+          <p:cNvSpPr/>
+          <p:nvPr/>
+        </p:nvSpPr>
+        <p:spPr>
+          <a:xfrm>
+            <a:off x="2888972" y="4138324"/>
+            <a:ext cx="4723405" cy="490330"/>
+          </a:xfrm>
+          <a:prstGeom prst="leftRightArrow">
+            <a:avLst/>
+          </a:prstGeom>
+          <a:gradFill>
+            <a:gsLst>
+              <a:gs pos="0">
+                <a:schemeClr val="accent1">
+                  <a:lumMod val="5000"/>
+                  <a:lumOff val="95000"/>
+                </a:schemeClr>
+              </a:gs>
+              <a:gs pos="74000">
+                <a:schemeClr val="accent1">
+                  <a:lumMod val="45000"/>
+                  <a:lumOff val="55000"/>
+                </a:schemeClr>
+              </a:gs>
+              <a:gs pos="83000">
+                <a:schemeClr val="accent1">
+                  <a:lumMod val="45000"/>
+                  <a:lumOff val="55000"/>
+                </a:schemeClr>
+              </a:gs>
+              <a:gs pos="100000">
+                <a:schemeClr val="accent1">
+                  <a:lumMod val="30000"/>
+                  <a:lumOff val="70000"/>
+                </a:schemeClr>
+              </a:gs>
+            </a:gsLst>
+            <a:lin ang="5400000" scaled="1"/>
+          </a:gradFill>
+        </p:spPr>
+        <p:style>
+          <a:lnRef idx="2">
+            <a:schemeClr val="accent1">
+              <a:shade val="15000"/>
+            </a:schemeClr>
+          </a:lnRef>
+          <a:fillRef idx="1">
+            <a:schemeClr val="accent1"/>
+          </a:fillRef>
+          <a:effectRef idx="0">
+            <a:schemeClr val="accent1"/>
+          </a:effectRef>
+          <a:fontRef idx="minor">
+            <a:schemeClr val="lt1"/>
+          </a:fontRef>
+        </p:style>
+        <p:txBody>
+          <a:bodyPr rtlCol="0" anchor="ctr"/>
+          <a:lstStyle/>
+          <a:p>
+            <a:pPr algn="ctr"/>
+            <a:r>
+              <a:rPr lang="en-US" dirty="0"/>
+              <a:t>RESP3</a:t>
+            </a:r>
+            <a:endParaRPr lang="en-NL" dirty="0"/>
+          </a:p>
+        </p:txBody>
+      </p:sp>
+      <p:sp>
+        <p:nvSpPr>
+          <p:cNvPr id="11" name="Arrow: Left-Right 10">
+            <a:extLst>
+              <a:ext uri="{FF2B5EF4-FFF2-40B4-BE49-F238E27FC236}">
+                <a16:creationId xmlns:a16="http://schemas.microsoft.com/office/drawing/2014/main" id="{6DFC8CCF-17FF-8005-BDBE-EC14BF92D6E8}"/>
+              </a:ext>
+            </a:extLst>
+          </p:cNvPr>
+          <p:cNvSpPr/>
+          <p:nvPr/>
+        </p:nvSpPr>
+        <p:spPr>
+          <a:xfrm>
+            <a:off x="2888974" y="5198496"/>
+            <a:ext cx="4723403" cy="490330"/>
+          </a:xfrm>
+          <a:prstGeom prst="leftRightArrow">
+            <a:avLst/>
+          </a:prstGeom>
+          <a:gradFill>
+            <a:gsLst>
+              <a:gs pos="0">
+                <a:schemeClr val="accent1">
+                  <a:lumMod val="5000"/>
+                  <a:lumOff val="95000"/>
+                </a:schemeClr>
+              </a:gs>
+              <a:gs pos="74000">
+                <a:schemeClr val="accent1">
+                  <a:lumMod val="45000"/>
+                  <a:lumOff val="55000"/>
+                </a:schemeClr>
+              </a:gs>
+              <a:gs pos="83000">
+                <a:schemeClr val="accent1">
+                  <a:lumMod val="45000"/>
+                  <a:lumOff val="55000"/>
+                </a:schemeClr>
+              </a:gs>
+              <a:gs pos="100000">
+                <a:schemeClr val="accent1">
+                  <a:lumMod val="30000"/>
+                  <a:lumOff val="70000"/>
+                </a:schemeClr>
+              </a:gs>
+            </a:gsLst>
+            <a:lin ang="5400000" scaled="1"/>
+          </a:gradFill>
+        </p:spPr>
+        <p:style>
+          <a:lnRef idx="2">
+            <a:schemeClr val="accent1">
+              <a:shade val="15000"/>
+            </a:schemeClr>
+          </a:lnRef>
+          <a:fillRef idx="1">
+            <a:schemeClr val="accent1"/>
+          </a:fillRef>
+          <a:effectRef idx="0">
+            <a:schemeClr val="accent1"/>
+          </a:effectRef>
+          <a:fontRef idx="minor">
+            <a:schemeClr val="lt1"/>
+          </a:fontRef>
+        </p:style>
+        <p:txBody>
+          <a:bodyPr rtlCol="0" anchor="ctr"/>
+          <a:lstStyle/>
+          <a:p>
+            <a:pPr algn="ctr"/>
+            <a:r>
+              <a:rPr lang="en-US" dirty="0"/>
+              <a:t>RESP3</a:t>
+            </a:r>
+            <a:endParaRPr lang="en-NL" dirty="0"/>
+          </a:p>
+        </p:txBody>
+      </p:sp>
+      <p:sp>
+        <p:nvSpPr>
+          <p:cNvPr id="12" name="Rectangle: Rounded Corners 11">
+            <a:extLst>
+              <a:ext uri="{FF2B5EF4-FFF2-40B4-BE49-F238E27FC236}">
+                <a16:creationId xmlns:a16="http://schemas.microsoft.com/office/drawing/2014/main" id="{F2353F4B-EBEF-762E-C172-A1A47A2201EF}"/>
+              </a:ext>
+            </a:extLst>
+          </p:cNvPr>
+          <p:cNvSpPr/>
+          <p:nvPr/>
+        </p:nvSpPr>
+        <p:spPr>
+          <a:xfrm>
+            <a:off x="7612380" y="2900238"/>
+            <a:ext cx="1690646" cy="3154680"/>
+          </a:xfrm>
+          <a:prstGeom prst="roundRect">
+            <a:avLst/>
+          </a:prstGeom>
+        </p:spPr>
+        <p:style>
+          <a:lnRef idx="2">
+            <a:schemeClr val="accent1">
+              <a:shade val="15000"/>
+            </a:schemeClr>
+          </a:lnRef>
+          <a:fillRef idx="1">
+            <a:schemeClr val="accent1"/>
+          </a:fillRef>
+          <a:effectRef idx="0">
+            <a:schemeClr val="accent1"/>
+          </a:effectRef>
+          <a:fontRef idx="minor">
+            <a:schemeClr val="lt1"/>
+          </a:fontRef>
+        </p:style>
+        <p:txBody>
+          <a:bodyPr rtlCol="0" anchor="ctr"/>
+          <a:lstStyle/>
+          <a:p>
+            <a:pPr algn="ctr"/>
+            <a:endParaRPr lang="en-NL"/>
+          </a:p>
+        </p:txBody>
+      </p:sp>
+      <p:sp>
+        <p:nvSpPr>
+          <p:cNvPr id="17" name="TextBox 16">
+            <a:extLst>
+              <a:ext uri="{FF2B5EF4-FFF2-40B4-BE49-F238E27FC236}">
+                <a16:creationId xmlns:a16="http://schemas.microsoft.com/office/drawing/2014/main" id="{FEABB92C-848E-CB9F-39FD-089BE313EB37}"/>
+              </a:ext>
+            </a:extLst>
+          </p:cNvPr>
+          <p:cNvSpPr txBox="1"/>
+          <p:nvPr/>
+        </p:nvSpPr>
+        <p:spPr>
+          <a:xfrm>
+            <a:off x="8174125" y="4099659"/>
+            <a:ext cx="978463" cy="646331"/>
+          </a:xfrm>
+          <a:prstGeom prst="rect">
+            <a:avLst/>
+          </a:prstGeom>
+          <a:noFill/>
+        </p:spPr>
+        <p:txBody>
+          <a:bodyPr wrap="square" rtlCol="0">
+            <a:spAutoFit/>
+          </a:bodyPr>
+          <a:lstStyle/>
+          <a:p>
+            <a:r>
+              <a:rPr lang="en-US" b="1" dirty="0">
+                <a:solidFill>
+                  <a:srgbClr val="FFFF00"/>
+                </a:solidFill>
+              </a:rPr>
+              <a:t>MIND server</a:t>
+            </a:r>
+            <a:endParaRPr lang="en-NL" b="1" dirty="0">
+              <a:solidFill>
+                <a:srgbClr val="FFFF00"/>
+              </a:solidFill>
+            </a:endParaRPr>
+          </a:p>
+        </p:txBody>
+      </p:sp>
+    </p:spTree>
+    <p:extLst>
+      <p:ext uri="{BB962C8B-B14F-4D97-AF65-F5344CB8AC3E}">
+        <p14:creationId xmlns:p14="http://schemas.microsoft.com/office/powerpoint/2010/main" val="3503112432"/>
+      </p:ext>
+    </p:extLst>
+  </p:cSld>
+  <p:clrMapOvr>
+    <a:masterClrMapping/>
+  </p:clrMapOvr>
+</p:sld>
+</file>
+
+<file path=ppt/slides/slide11.xml><?xml version="1.0" encoding="utf-8"?>
+<p:sld xmlns:a="http://schemas.openxmlformats.org/drawingml/2006/main" xmlns:r="http://schemas.openxmlformats.org/officeDocument/2006/relationships" xmlns:p="http://schemas.openxmlformats.org/presentationml/2006/main">
+  <p:cSld>
+    <p:spTree>
+      <p:nvGrpSpPr>
+        <p:cNvPr id="1" name=""/>
+        <p:cNvGrpSpPr/>
+        <p:nvPr/>
+      </p:nvGrpSpPr>
+      <p:grpSpPr>
+        <a:xfrm>
+          <a:off x="0" y="0"/>
+          <a:ext cx="0" cy="0"/>
+          <a:chOff x="0" y="0"/>
+          <a:chExt cx="0" cy="0"/>
+        </a:xfrm>
+      </p:grpSpPr>
+      <p:sp>
+        <p:nvSpPr>
+          <p:cNvPr id="2" name="Title 1">
+            <a:extLst>
+              <a:ext uri="{FF2B5EF4-FFF2-40B4-BE49-F238E27FC236}">
                 <a16:creationId xmlns:a16="http://schemas.microsoft.com/office/drawing/2014/main" id="{71A0E760-2C4C-850E-B41F-5ABE7C392222}"/>
               </a:ext>
             </a:extLst>
@@ -22661,6 +23378,155 @@
           <a:p>
             <a:r>
               <a:rPr lang="en-US" dirty="0"/>
+              <a:t>Private comment</a:t>
+            </a:r>
+            <a:endParaRPr lang="en-NL" dirty="0"/>
+          </a:p>
+        </p:txBody>
+      </p:sp>
+      <p:sp>
+        <p:nvSpPr>
+          <p:cNvPr id="3" name="Content Placeholder 2">
+            <a:extLst>
+              <a:ext uri="{FF2B5EF4-FFF2-40B4-BE49-F238E27FC236}">
+                <a16:creationId xmlns:a16="http://schemas.microsoft.com/office/drawing/2014/main" id="{6ECD4B7A-F343-5BCB-94C9-E80EB92EE397}"/>
+              </a:ext>
+            </a:extLst>
+          </p:cNvPr>
+          <p:cNvSpPr>
+            <a:spLocks noGrp="1"/>
+          </p:cNvSpPr>
+          <p:nvPr>
+            <p:ph idx="1"/>
+          </p:nvPr>
+        </p:nvSpPr>
+        <p:spPr/>
+        <p:txBody>
+          <a:bodyPr>
+            <a:normAutofit fontScale="85000" lnSpcReduction="10000"/>
+          </a:bodyPr>
+          <a:lstStyle/>
+          <a:p>
+            <a:r>
+              <a:rPr lang="en-US" dirty="0"/>
+              <a:t>Practically every database in the market has a remote access through sockets</a:t>
+            </a:r>
+          </a:p>
+          <a:p>
+            <a:r>
+              <a:rPr lang="en-US" dirty="0"/>
+              <a:t>One of the main reasons is the growing amount of processed data, leaving horizontal back-end scalability (multiple servers behind a load balancer) accessing a common database a good compromise.</a:t>
+            </a:r>
+          </a:p>
+          <a:p>
+            <a:r>
+              <a:rPr lang="en-US" dirty="0"/>
+              <a:t>At the same time, executing only pure data API running on the server and moving all the business-tiers to external machines increase the power of the database server allowing a monolithic system to handle more traffic.</a:t>
+            </a:r>
+          </a:p>
+          <a:p>
+            <a:r>
+              <a:rPr lang="en-US" dirty="0" err="1"/>
+              <a:t>GTm</a:t>
+            </a:r>
+            <a:r>
+              <a:rPr lang="en-US" dirty="0"/>
+              <a:t> and YottaDB don’t have it, but I can understand that it is not easy to find the right compromise talking to remote servers with foreign programming languages</a:t>
+            </a:r>
+          </a:p>
+          <a:p>
+            <a:r>
+              <a:rPr lang="en-US" dirty="0"/>
+              <a:t>That’s why Mind fill all the gaps:</a:t>
+            </a:r>
+          </a:p>
+          <a:p>
+            <a:pPr lvl="1"/>
+            <a:r>
+              <a:rPr lang="en-US" dirty="0"/>
+              <a:t>talking M to M programmers and talking </a:t>
+            </a:r>
+            <a:r>
+              <a:rPr lang="en-US" dirty="0" err="1"/>
+              <a:t>js</a:t>
+            </a:r>
+            <a:r>
+              <a:rPr lang="en-US" dirty="0"/>
+              <a:t> / java / Go to remote programmers</a:t>
+            </a:r>
+          </a:p>
+          <a:p>
+            <a:pPr lvl="1"/>
+            <a:r>
+              <a:rPr lang="en-US" dirty="0"/>
+              <a:t>Expose data in back-end formats (data-types, Objects) for faster integration</a:t>
+            </a:r>
+          </a:p>
+          <a:p>
+            <a:pPr lvl="1"/>
+            <a:endParaRPr lang="en-NL" dirty="0"/>
+          </a:p>
+        </p:txBody>
+      </p:sp>
+    </p:spTree>
+    <p:extLst>
+      <p:ext uri="{BB962C8B-B14F-4D97-AF65-F5344CB8AC3E}">
+        <p14:creationId xmlns:p14="http://schemas.microsoft.com/office/powerpoint/2010/main" val="2240125713"/>
+      </p:ext>
+    </p:extLst>
+  </p:cSld>
+  <p:clrMapOvr>
+    <a:masterClrMapping/>
+  </p:clrMapOvr>
+</p:sld>
+</file>
+
+<file path=ppt/slides/slide6.xml><?xml version="1.0" encoding="utf-8"?>
+<p:sld xmlns:a="http://schemas.openxmlformats.org/drawingml/2006/main" xmlns:r="http://schemas.openxmlformats.org/officeDocument/2006/relationships" xmlns:p="http://schemas.openxmlformats.org/presentationml/2006/main">
+  <p:cSld>
+    <p:spTree>
+      <p:nvGrpSpPr>
+        <p:cNvPr id="1" name="">
+          <a:extLst>
+            <a:ext uri="{FF2B5EF4-FFF2-40B4-BE49-F238E27FC236}">
+              <a16:creationId xmlns:a16="http://schemas.microsoft.com/office/drawing/2014/main" id="{2EB3ABBE-7B4D-2698-854D-2D6495764E76}"/>
+            </a:ext>
+          </a:extLst>
+        </p:cNvPr>
+        <p:cNvGrpSpPr/>
+        <p:nvPr/>
+      </p:nvGrpSpPr>
+      <p:grpSpPr>
+        <a:xfrm>
+          <a:off x="0" y="0"/>
+          <a:ext cx="0" cy="0"/>
+          <a:chOff x="0" y="0"/>
+          <a:chExt cx="0" cy="0"/>
+        </a:xfrm>
+      </p:grpSpPr>
+      <p:sp>
+        <p:nvSpPr>
+          <p:cNvPr id="2" name="Title 1">
+            <a:extLst>
+              <a:ext uri="{FF2B5EF4-FFF2-40B4-BE49-F238E27FC236}">
+                <a16:creationId xmlns:a16="http://schemas.microsoft.com/office/drawing/2014/main" id="{09BDE851-7CFF-64B0-4456-D720CAFFC1B5}"/>
+              </a:ext>
+            </a:extLst>
+          </p:cNvPr>
+          <p:cNvSpPr>
+            <a:spLocks noGrp="1"/>
+          </p:cNvSpPr>
+          <p:nvPr>
+            <p:ph type="title"/>
+          </p:nvPr>
+        </p:nvSpPr>
+        <p:spPr/>
+        <p:txBody>
+          <a:bodyPr/>
+          <a:lstStyle/>
+          <a:p>
+            <a:r>
+              <a:rPr lang="en-US" dirty="0"/>
               <a:t>RESP3 as network protocol</a:t>
             </a:r>
             <a:endParaRPr lang="en-NL" dirty="0"/>
@@ -22672,7 +23538,7 @@
           <p:cNvPr id="3" name="Content Placeholder 2">
             <a:extLst>
               <a:ext uri="{FF2B5EF4-FFF2-40B4-BE49-F238E27FC236}">
-                <a16:creationId xmlns:a16="http://schemas.microsoft.com/office/drawing/2014/main" id="{6ECD4B7A-F343-5BCB-94C9-E80EB92EE397}"/>
+                <a16:creationId xmlns:a16="http://schemas.microsoft.com/office/drawing/2014/main" id="{1D99AAD8-E086-1897-DC4C-F15BFE58AE2C}"/>
               </a:ext>
             </a:extLst>
           </p:cNvPr>
@@ -22741,7 +23607,7 @@
     </p:spTree>
     <p:extLst>
       <p:ext uri="{BB962C8B-B14F-4D97-AF65-F5344CB8AC3E}">
-        <p14:creationId xmlns:p14="http://schemas.microsoft.com/office/powerpoint/2010/main" val="2240125713"/>
+        <p14:creationId xmlns:p14="http://schemas.microsoft.com/office/powerpoint/2010/main" val="3729544716"/>
       </p:ext>
     </p:extLst>
   </p:cSld>
@@ -22751,7 +23617,7 @@
 </p:sld>
 </file>
 
-<file path=ppt/slides/slide6.xml><?xml version="1.0" encoding="utf-8"?>
+<file path=ppt/slides/slide7.xml><?xml version="1.0" encoding="utf-8"?>
 <p:sld xmlns:a="http://schemas.openxmlformats.org/drawingml/2006/main" xmlns:r="http://schemas.openxmlformats.org/officeDocument/2006/relationships" xmlns:p="http://schemas.openxmlformats.org/presentationml/2006/main">
   <p:cSld>
     <p:spTree>
@@ -23571,7 +24437,7 @@
 </p:sld>
 </file>
 
-<file path=ppt/slides/slide7.xml><?xml version="1.0" encoding="utf-8"?>
+<file path=ppt/slides/slide8.xml><?xml version="1.0" encoding="utf-8"?>
 <p:sld xmlns:a="http://schemas.openxmlformats.org/drawingml/2006/main" xmlns:r="http://schemas.openxmlformats.org/officeDocument/2006/relationships" xmlns:p="http://schemas.openxmlformats.org/presentationml/2006/main">
   <p:cSld>
     <p:spTree>
@@ -23683,7 +24549,7 @@
 </p:sld>
 </file>
 
-<file path=ppt/slides/slide8.xml><?xml version="1.0" encoding="utf-8"?>
+<file path=ppt/slides/slide9.xml><?xml version="1.0" encoding="utf-8"?>
 <p:sld xmlns:a="http://schemas.openxmlformats.org/drawingml/2006/main" xmlns:r="http://schemas.openxmlformats.org/officeDocument/2006/relationships" xmlns:p="http://schemas.openxmlformats.org/presentationml/2006/main">
   <p:cSld>
     <p:bg>
@@ -23790,722 +24656,6 @@
     <p:extLst>
       <p:ext uri="{BB962C8B-B14F-4D97-AF65-F5344CB8AC3E}">
         <p14:creationId xmlns:p14="http://schemas.microsoft.com/office/powerpoint/2010/main" val="2760101554"/>
-      </p:ext>
-    </p:extLst>
-  </p:cSld>
-  <p:clrMapOvr>
-    <a:masterClrMapping/>
-  </p:clrMapOvr>
-</p:sld>
-</file>
-
-<file path=ppt/slides/slide9.xml><?xml version="1.0" encoding="utf-8"?>
-<p:sld xmlns:a="http://schemas.openxmlformats.org/drawingml/2006/main" xmlns:r="http://schemas.openxmlformats.org/officeDocument/2006/relationships" xmlns:p="http://schemas.openxmlformats.org/presentationml/2006/main">
-  <p:cSld>
-    <p:spTree>
-      <p:nvGrpSpPr>
-        <p:cNvPr id="1" name=""/>
-        <p:cNvGrpSpPr/>
-        <p:nvPr/>
-      </p:nvGrpSpPr>
-      <p:grpSpPr>
-        <a:xfrm>
-          <a:off x="0" y="0"/>
-          <a:ext cx="0" cy="0"/>
-          <a:chOff x="0" y="0"/>
-          <a:chExt cx="0" cy="0"/>
-        </a:xfrm>
-      </p:grpSpPr>
-      <p:sp>
-        <p:nvSpPr>
-          <p:cNvPr id="2" name="Title 1">
-            <a:extLst>
-              <a:ext uri="{FF2B5EF4-FFF2-40B4-BE49-F238E27FC236}">
-                <a16:creationId xmlns:a16="http://schemas.microsoft.com/office/drawing/2014/main" id="{50DF909B-EE31-EFAE-7A0A-716460177410}"/>
-              </a:ext>
-            </a:extLst>
-          </p:cNvPr>
-          <p:cNvSpPr>
-            <a:spLocks noGrp="1"/>
-          </p:cNvSpPr>
-          <p:nvPr>
-            <p:ph type="title"/>
-          </p:nvPr>
-        </p:nvSpPr>
-        <p:spPr/>
-        <p:txBody>
-          <a:bodyPr/>
-          <a:lstStyle/>
-          <a:p>
-            <a:r>
-              <a:rPr lang="en-US" dirty="0"/>
-              <a:t>Multiple client topology</a:t>
-            </a:r>
-            <a:endParaRPr lang="en-NL" dirty="0"/>
-          </a:p>
-        </p:txBody>
-      </p:sp>
-      <p:sp>
-        <p:nvSpPr>
-          <p:cNvPr id="3" name="Content Placeholder 2">
-            <a:extLst>
-              <a:ext uri="{FF2B5EF4-FFF2-40B4-BE49-F238E27FC236}">
-                <a16:creationId xmlns:a16="http://schemas.microsoft.com/office/drawing/2014/main" id="{827D319E-4957-2EE4-4C13-0595662B4AAA}"/>
-              </a:ext>
-            </a:extLst>
-          </p:cNvPr>
-          <p:cNvSpPr>
-            <a:spLocks noGrp="1"/>
-          </p:cNvSpPr>
-          <p:nvPr>
-            <p:ph idx="1"/>
-          </p:nvPr>
-        </p:nvSpPr>
-        <p:spPr>
-          <a:xfrm>
-            <a:off x="1154954" y="3037840"/>
-            <a:ext cx="8825659" cy="3416300"/>
-          </a:xfrm>
-        </p:spPr>
-        <p:txBody>
-          <a:bodyPr/>
-          <a:lstStyle/>
-          <a:p>
-            <a:endParaRPr lang="en-NL" dirty="0"/>
-          </a:p>
-        </p:txBody>
-      </p:sp>
-      <p:sp>
-        <p:nvSpPr>
-          <p:cNvPr id="4" name="Rectangle: Rounded Corners 3">
-            <a:extLst>
-              <a:ext uri="{FF2B5EF4-FFF2-40B4-BE49-F238E27FC236}">
-                <a16:creationId xmlns:a16="http://schemas.microsoft.com/office/drawing/2014/main" id="{62F072E5-7887-F607-BF39-D96818D9FA72}"/>
-              </a:ext>
-            </a:extLst>
-          </p:cNvPr>
-          <p:cNvSpPr/>
-          <p:nvPr/>
-        </p:nvSpPr>
-        <p:spPr>
-          <a:xfrm>
-            <a:off x="7259541" y="2668657"/>
-            <a:ext cx="3633746" cy="3617843"/>
-          </a:xfrm>
-          <a:prstGeom prst="roundRect">
-            <a:avLst/>
-          </a:prstGeom>
-          <a:gradFill>
-            <a:gsLst>
-              <a:gs pos="0">
-                <a:schemeClr val="accent5">
-                  <a:lumMod val="60000"/>
-                  <a:lumOff val="40000"/>
-                </a:schemeClr>
-              </a:gs>
-              <a:gs pos="74000">
-                <a:schemeClr val="accent1">
-                  <a:lumMod val="45000"/>
-                  <a:lumOff val="55000"/>
-                </a:schemeClr>
-              </a:gs>
-              <a:gs pos="83000">
-                <a:schemeClr val="accent1">
-                  <a:lumMod val="45000"/>
-                  <a:lumOff val="55000"/>
-                </a:schemeClr>
-              </a:gs>
-              <a:gs pos="100000">
-                <a:schemeClr val="accent5">
-                  <a:lumMod val="60000"/>
-                  <a:lumOff val="40000"/>
-                </a:schemeClr>
-              </a:gs>
-            </a:gsLst>
-            <a:lin ang="5400000" scaled="1"/>
-          </a:gradFill>
-        </p:spPr>
-        <p:style>
-          <a:lnRef idx="2">
-            <a:schemeClr val="accent1">
-              <a:shade val="15000"/>
-            </a:schemeClr>
-          </a:lnRef>
-          <a:fillRef idx="1">
-            <a:schemeClr val="accent1"/>
-          </a:fillRef>
-          <a:effectRef idx="0">
-            <a:schemeClr val="accent1"/>
-          </a:effectRef>
-          <a:fontRef idx="minor">
-            <a:schemeClr val="lt1"/>
-          </a:fontRef>
-        </p:style>
-        <p:txBody>
-          <a:bodyPr rtlCol="0" anchor="ctr"/>
-          <a:lstStyle/>
-          <a:p>
-            <a:pPr algn="ctr"/>
-            <a:endParaRPr lang="en-NL"/>
-          </a:p>
-        </p:txBody>
-      </p:sp>
-      <p:sp>
-        <p:nvSpPr>
-          <p:cNvPr id="5" name="Rectangle: Rounded Corners 4">
-            <a:extLst>
-              <a:ext uri="{FF2B5EF4-FFF2-40B4-BE49-F238E27FC236}">
-                <a16:creationId xmlns:a16="http://schemas.microsoft.com/office/drawing/2014/main" id="{36498F2A-2B3E-EC6E-3370-BDA6ECEEBCD1}"/>
-              </a:ext>
-            </a:extLst>
-          </p:cNvPr>
-          <p:cNvSpPr/>
-          <p:nvPr/>
-        </p:nvSpPr>
-        <p:spPr>
-          <a:xfrm>
-            <a:off x="1338470" y="3051644"/>
-            <a:ext cx="1550504" cy="662609"/>
-          </a:xfrm>
-          <a:prstGeom prst="roundRect">
-            <a:avLst/>
-          </a:prstGeom>
-        </p:spPr>
-        <p:style>
-          <a:lnRef idx="2">
-            <a:schemeClr val="accent1">
-              <a:shade val="15000"/>
-            </a:schemeClr>
-          </a:lnRef>
-          <a:fillRef idx="1">
-            <a:schemeClr val="accent1"/>
-          </a:fillRef>
-          <a:effectRef idx="0">
-            <a:schemeClr val="accent1"/>
-          </a:effectRef>
-          <a:fontRef idx="minor">
-            <a:schemeClr val="lt1"/>
-          </a:fontRef>
-        </p:style>
-        <p:txBody>
-          <a:bodyPr rtlCol="0" anchor="ctr"/>
-          <a:lstStyle/>
-          <a:p>
-            <a:pPr algn="ctr"/>
-            <a:r>
-              <a:rPr lang="en-US" dirty="0"/>
-              <a:t>Client</a:t>
-            </a:r>
-          </a:p>
-          <a:p>
-            <a:pPr algn="ctr"/>
-            <a:r>
-              <a:rPr lang="en-US" dirty="0"/>
-              <a:t>(nodejs)</a:t>
-            </a:r>
-            <a:endParaRPr lang="en-NL" dirty="0"/>
-          </a:p>
-        </p:txBody>
-      </p:sp>
-      <p:sp>
-        <p:nvSpPr>
-          <p:cNvPr id="6" name="Rectangle: Rounded Corners 5">
-            <a:extLst>
-              <a:ext uri="{FF2B5EF4-FFF2-40B4-BE49-F238E27FC236}">
-                <a16:creationId xmlns:a16="http://schemas.microsoft.com/office/drawing/2014/main" id="{C617F3A1-D3FE-2883-548B-55FBC5FAB49B}"/>
-              </a:ext>
-            </a:extLst>
-          </p:cNvPr>
-          <p:cNvSpPr/>
-          <p:nvPr/>
-        </p:nvSpPr>
-        <p:spPr>
-          <a:xfrm>
-            <a:off x="1338470" y="4052184"/>
-            <a:ext cx="1550504" cy="662609"/>
-          </a:xfrm>
-          <a:prstGeom prst="roundRect">
-            <a:avLst/>
-          </a:prstGeom>
-        </p:spPr>
-        <p:style>
-          <a:lnRef idx="2">
-            <a:schemeClr val="accent1">
-              <a:shade val="15000"/>
-            </a:schemeClr>
-          </a:lnRef>
-          <a:fillRef idx="1">
-            <a:schemeClr val="accent1"/>
-          </a:fillRef>
-          <a:effectRef idx="0">
-            <a:schemeClr val="accent1"/>
-          </a:effectRef>
-          <a:fontRef idx="minor">
-            <a:schemeClr val="lt1"/>
-          </a:fontRef>
-        </p:style>
-        <p:txBody>
-          <a:bodyPr rtlCol="0" anchor="ctr"/>
-          <a:lstStyle/>
-          <a:p>
-            <a:pPr algn="ctr"/>
-            <a:r>
-              <a:rPr lang="en-US" dirty="0"/>
-              <a:t>Client</a:t>
-            </a:r>
-          </a:p>
-          <a:p>
-            <a:pPr algn="ctr"/>
-            <a:r>
-              <a:rPr lang="en-US" dirty="0"/>
-              <a:t>(Go)</a:t>
-            </a:r>
-            <a:endParaRPr lang="en-NL" dirty="0"/>
-          </a:p>
-        </p:txBody>
-      </p:sp>
-      <p:sp>
-        <p:nvSpPr>
-          <p:cNvPr id="7" name="Rectangle: Rounded Corners 6">
-            <a:extLst>
-              <a:ext uri="{FF2B5EF4-FFF2-40B4-BE49-F238E27FC236}">
-                <a16:creationId xmlns:a16="http://schemas.microsoft.com/office/drawing/2014/main" id="{17CB8825-4B0A-2B99-5CCA-B5B43ED68D5E}"/>
-              </a:ext>
-            </a:extLst>
-          </p:cNvPr>
-          <p:cNvSpPr/>
-          <p:nvPr/>
-        </p:nvSpPr>
-        <p:spPr>
-          <a:xfrm>
-            <a:off x="1338470" y="5138864"/>
-            <a:ext cx="1550504" cy="662609"/>
-          </a:xfrm>
-          <a:prstGeom prst="roundRect">
-            <a:avLst/>
-          </a:prstGeom>
-        </p:spPr>
-        <p:style>
-          <a:lnRef idx="2">
-            <a:schemeClr val="accent1">
-              <a:shade val="15000"/>
-            </a:schemeClr>
-          </a:lnRef>
-          <a:fillRef idx="1">
-            <a:schemeClr val="accent1"/>
-          </a:fillRef>
-          <a:effectRef idx="0">
-            <a:schemeClr val="accent1"/>
-          </a:effectRef>
-          <a:fontRef idx="minor">
-            <a:schemeClr val="lt1"/>
-          </a:fontRef>
-        </p:style>
-        <p:txBody>
-          <a:bodyPr rtlCol="0" anchor="ctr"/>
-          <a:lstStyle/>
-          <a:p>
-            <a:pPr algn="ctr"/>
-            <a:r>
-              <a:rPr lang="en-US" dirty="0"/>
-              <a:t>Client</a:t>
-            </a:r>
-          </a:p>
-          <a:p>
-            <a:pPr algn="ctr"/>
-            <a:r>
-              <a:rPr lang="en-US" dirty="0"/>
-              <a:t>(Python)</a:t>
-            </a:r>
-            <a:endParaRPr lang="en-NL" dirty="0"/>
-          </a:p>
-        </p:txBody>
-      </p:sp>
-      <p:sp>
-        <p:nvSpPr>
-          <p:cNvPr id="8" name="TextBox 7">
-            <a:extLst>
-              <a:ext uri="{FF2B5EF4-FFF2-40B4-BE49-F238E27FC236}">
-                <a16:creationId xmlns:a16="http://schemas.microsoft.com/office/drawing/2014/main" id="{B05DF86D-A187-60DE-9EAA-60488AC3907E}"/>
-              </a:ext>
-            </a:extLst>
-          </p:cNvPr>
-          <p:cNvSpPr txBox="1"/>
-          <p:nvPr/>
-        </p:nvSpPr>
-        <p:spPr>
-          <a:xfrm>
-            <a:off x="9558414" y="5156235"/>
-            <a:ext cx="1457740" cy="646331"/>
-          </a:xfrm>
-          <a:prstGeom prst="rect">
-            <a:avLst/>
-          </a:prstGeom>
-          <a:noFill/>
-        </p:spPr>
-        <p:txBody>
-          <a:bodyPr wrap="square" rtlCol="0">
-            <a:spAutoFit/>
-          </a:bodyPr>
-          <a:lstStyle/>
-          <a:p>
-            <a:r>
-              <a:rPr lang="en-US" b="1" dirty="0">
-                <a:solidFill>
-                  <a:srgbClr val="FFFF00"/>
-                </a:solidFill>
-              </a:rPr>
-              <a:t>YottaDB</a:t>
-            </a:r>
-          </a:p>
-          <a:p>
-            <a:r>
-              <a:rPr lang="en-US" b="1" dirty="0">
-                <a:solidFill>
-                  <a:srgbClr val="FFFF00"/>
-                </a:solidFill>
-              </a:rPr>
-              <a:t>database</a:t>
-            </a:r>
-            <a:endParaRPr lang="en-NL" b="1" dirty="0">
-              <a:solidFill>
-                <a:srgbClr val="FFFF00"/>
-              </a:solidFill>
-            </a:endParaRPr>
-          </a:p>
-        </p:txBody>
-      </p:sp>
-      <p:sp>
-        <p:nvSpPr>
-          <p:cNvPr id="9" name="Arrow: Left-Right 8">
-            <a:extLst>
-              <a:ext uri="{FF2B5EF4-FFF2-40B4-BE49-F238E27FC236}">
-                <a16:creationId xmlns:a16="http://schemas.microsoft.com/office/drawing/2014/main" id="{8B874837-BD2C-4052-D10C-2C6FD0E0B0CD}"/>
-              </a:ext>
-            </a:extLst>
-          </p:cNvPr>
-          <p:cNvSpPr/>
-          <p:nvPr/>
-        </p:nvSpPr>
-        <p:spPr>
-          <a:xfrm>
-            <a:off x="2888974" y="3098027"/>
-            <a:ext cx="4723406" cy="490330"/>
-          </a:xfrm>
-          <a:prstGeom prst="leftRightArrow">
-            <a:avLst/>
-          </a:prstGeom>
-          <a:gradFill>
-            <a:gsLst>
-              <a:gs pos="0">
-                <a:schemeClr val="accent1">
-                  <a:lumMod val="5000"/>
-                  <a:lumOff val="95000"/>
-                </a:schemeClr>
-              </a:gs>
-              <a:gs pos="74000">
-                <a:schemeClr val="accent1">
-                  <a:lumMod val="45000"/>
-                  <a:lumOff val="55000"/>
-                </a:schemeClr>
-              </a:gs>
-              <a:gs pos="83000">
-                <a:schemeClr val="accent1">
-                  <a:lumMod val="45000"/>
-                  <a:lumOff val="55000"/>
-                </a:schemeClr>
-              </a:gs>
-              <a:gs pos="100000">
-                <a:schemeClr val="accent1">
-                  <a:lumMod val="30000"/>
-                  <a:lumOff val="70000"/>
-                </a:schemeClr>
-              </a:gs>
-            </a:gsLst>
-            <a:lin ang="5400000" scaled="1"/>
-          </a:gradFill>
-        </p:spPr>
-        <p:style>
-          <a:lnRef idx="2">
-            <a:schemeClr val="accent1">
-              <a:shade val="15000"/>
-            </a:schemeClr>
-          </a:lnRef>
-          <a:fillRef idx="1">
-            <a:schemeClr val="accent1"/>
-          </a:fillRef>
-          <a:effectRef idx="0">
-            <a:schemeClr val="accent1"/>
-          </a:effectRef>
-          <a:fontRef idx="minor">
-            <a:schemeClr val="lt1"/>
-          </a:fontRef>
-        </p:style>
-        <p:txBody>
-          <a:bodyPr rtlCol="0" anchor="ctr"/>
-          <a:lstStyle/>
-          <a:p>
-            <a:pPr algn="ctr"/>
-            <a:r>
-              <a:rPr lang="en-US" dirty="0"/>
-              <a:t>RESP3</a:t>
-            </a:r>
-            <a:endParaRPr lang="en-NL" dirty="0"/>
-          </a:p>
-        </p:txBody>
-      </p:sp>
-      <p:sp>
-        <p:nvSpPr>
-          <p:cNvPr id="10" name="Arrow: Left-Right 9">
-            <a:extLst>
-              <a:ext uri="{FF2B5EF4-FFF2-40B4-BE49-F238E27FC236}">
-                <a16:creationId xmlns:a16="http://schemas.microsoft.com/office/drawing/2014/main" id="{361A8CD9-16B7-755F-4E8A-F0E7175BCAB8}"/>
-              </a:ext>
-            </a:extLst>
-          </p:cNvPr>
-          <p:cNvSpPr/>
-          <p:nvPr/>
-        </p:nvSpPr>
-        <p:spPr>
-          <a:xfrm>
-            <a:off x="2888972" y="4138324"/>
-            <a:ext cx="4723405" cy="490330"/>
-          </a:xfrm>
-          <a:prstGeom prst="leftRightArrow">
-            <a:avLst/>
-          </a:prstGeom>
-          <a:gradFill>
-            <a:gsLst>
-              <a:gs pos="0">
-                <a:schemeClr val="accent1">
-                  <a:lumMod val="5000"/>
-                  <a:lumOff val="95000"/>
-                </a:schemeClr>
-              </a:gs>
-              <a:gs pos="74000">
-                <a:schemeClr val="accent1">
-                  <a:lumMod val="45000"/>
-                  <a:lumOff val="55000"/>
-                </a:schemeClr>
-              </a:gs>
-              <a:gs pos="83000">
-                <a:schemeClr val="accent1">
-                  <a:lumMod val="45000"/>
-                  <a:lumOff val="55000"/>
-                </a:schemeClr>
-              </a:gs>
-              <a:gs pos="100000">
-                <a:schemeClr val="accent1">
-                  <a:lumMod val="30000"/>
-                  <a:lumOff val="70000"/>
-                </a:schemeClr>
-              </a:gs>
-            </a:gsLst>
-            <a:lin ang="5400000" scaled="1"/>
-          </a:gradFill>
-        </p:spPr>
-        <p:style>
-          <a:lnRef idx="2">
-            <a:schemeClr val="accent1">
-              <a:shade val="15000"/>
-            </a:schemeClr>
-          </a:lnRef>
-          <a:fillRef idx="1">
-            <a:schemeClr val="accent1"/>
-          </a:fillRef>
-          <a:effectRef idx="0">
-            <a:schemeClr val="accent1"/>
-          </a:effectRef>
-          <a:fontRef idx="minor">
-            <a:schemeClr val="lt1"/>
-          </a:fontRef>
-        </p:style>
-        <p:txBody>
-          <a:bodyPr rtlCol="0" anchor="ctr"/>
-          <a:lstStyle/>
-          <a:p>
-            <a:pPr algn="ctr"/>
-            <a:r>
-              <a:rPr lang="en-US" dirty="0"/>
-              <a:t>RESP3</a:t>
-            </a:r>
-            <a:endParaRPr lang="en-NL" dirty="0"/>
-          </a:p>
-        </p:txBody>
-      </p:sp>
-      <p:sp>
-        <p:nvSpPr>
-          <p:cNvPr id="11" name="Arrow: Left-Right 10">
-            <a:extLst>
-              <a:ext uri="{FF2B5EF4-FFF2-40B4-BE49-F238E27FC236}">
-                <a16:creationId xmlns:a16="http://schemas.microsoft.com/office/drawing/2014/main" id="{6DFC8CCF-17FF-8005-BDBE-EC14BF92D6E8}"/>
-              </a:ext>
-            </a:extLst>
-          </p:cNvPr>
-          <p:cNvSpPr/>
-          <p:nvPr/>
-        </p:nvSpPr>
-        <p:spPr>
-          <a:xfrm>
-            <a:off x="2888974" y="5198496"/>
-            <a:ext cx="4723403" cy="490330"/>
-          </a:xfrm>
-          <a:prstGeom prst="leftRightArrow">
-            <a:avLst/>
-          </a:prstGeom>
-          <a:gradFill>
-            <a:gsLst>
-              <a:gs pos="0">
-                <a:schemeClr val="accent1">
-                  <a:lumMod val="5000"/>
-                  <a:lumOff val="95000"/>
-                </a:schemeClr>
-              </a:gs>
-              <a:gs pos="74000">
-                <a:schemeClr val="accent1">
-                  <a:lumMod val="45000"/>
-                  <a:lumOff val="55000"/>
-                </a:schemeClr>
-              </a:gs>
-              <a:gs pos="83000">
-                <a:schemeClr val="accent1">
-                  <a:lumMod val="45000"/>
-                  <a:lumOff val="55000"/>
-                </a:schemeClr>
-              </a:gs>
-              <a:gs pos="100000">
-                <a:schemeClr val="accent1">
-                  <a:lumMod val="30000"/>
-                  <a:lumOff val="70000"/>
-                </a:schemeClr>
-              </a:gs>
-            </a:gsLst>
-            <a:lin ang="5400000" scaled="1"/>
-          </a:gradFill>
-        </p:spPr>
-        <p:style>
-          <a:lnRef idx="2">
-            <a:schemeClr val="accent1">
-              <a:shade val="15000"/>
-            </a:schemeClr>
-          </a:lnRef>
-          <a:fillRef idx="1">
-            <a:schemeClr val="accent1"/>
-          </a:fillRef>
-          <a:effectRef idx="0">
-            <a:schemeClr val="accent1"/>
-          </a:effectRef>
-          <a:fontRef idx="minor">
-            <a:schemeClr val="lt1"/>
-          </a:fontRef>
-        </p:style>
-        <p:txBody>
-          <a:bodyPr rtlCol="0" anchor="ctr"/>
-          <a:lstStyle/>
-          <a:p>
-            <a:pPr algn="ctr"/>
-            <a:r>
-              <a:rPr lang="en-US" dirty="0"/>
-              <a:t>RESP3</a:t>
-            </a:r>
-            <a:endParaRPr lang="en-NL" dirty="0"/>
-          </a:p>
-        </p:txBody>
-      </p:sp>
-      <p:sp>
-        <p:nvSpPr>
-          <p:cNvPr id="12" name="Rectangle: Rounded Corners 11">
-            <a:extLst>
-              <a:ext uri="{FF2B5EF4-FFF2-40B4-BE49-F238E27FC236}">
-                <a16:creationId xmlns:a16="http://schemas.microsoft.com/office/drawing/2014/main" id="{F2353F4B-EBEF-762E-C172-A1A47A2201EF}"/>
-              </a:ext>
-            </a:extLst>
-          </p:cNvPr>
-          <p:cNvSpPr/>
-          <p:nvPr/>
-        </p:nvSpPr>
-        <p:spPr>
-          <a:xfrm>
-            <a:off x="7612380" y="2900238"/>
-            <a:ext cx="1690646" cy="3154680"/>
-          </a:xfrm>
-          <a:prstGeom prst="roundRect">
-            <a:avLst/>
-          </a:prstGeom>
-        </p:spPr>
-        <p:style>
-          <a:lnRef idx="2">
-            <a:schemeClr val="accent1">
-              <a:shade val="15000"/>
-            </a:schemeClr>
-          </a:lnRef>
-          <a:fillRef idx="1">
-            <a:schemeClr val="accent1"/>
-          </a:fillRef>
-          <a:effectRef idx="0">
-            <a:schemeClr val="accent1"/>
-          </a:effectRef>
-          <a:fontRef idx="minor">
-            <a:schemeClr val="lt1"/>
-          </a:fontRef>
-        </p:style>
-        <p:txBody>
-          <a:bodyPr rtlCol="0" anchor="ctr"/>
-          <a:lstStyle/>
-          <a:p>
-            <a:pPr algn="ctr"/>
-            <a:endParaRPr lang="en-NL"/>
-          </a:p>
-        </p:txBody>
-      </p:sp>
-      <p:sp>
-        <p:nvSpPr>
-          <p:cNvPr id="17" name="TextBox 16">
-            <a:extLst>
-              <a:ext uri="{FF2B5EF4-FFF2-40B4-BE49-F238E27FC236}">
-                <a16:creationId xmlns:a16="http://schemas.microsoft.com/office/drawing/2014/main" id="{FEABB92C-848E-CB9F-39FD-089BE313EB37}"/>
-              </a:ext>
-            </a:extLst>
-          </p:cNvPr>
-          <p:cNvSpPr txBox="1"/>
-          <p:nvPr/>
-        </p:nvSpPr>
-        <p:spPr>
-          <a:xfrm>
-            <a:off x="8174125" y="4099659"/>
-            <a:ext cx="978463" cy="646331"/>
-          </a:xfrm>
-          <a:prstGeom prst="rect">
-            <a:avLst/>
-          </a:prstGeom>
-          <a:noFill/>
-        </p:spPr>
-        <p:txBody>
-          <a:bodyPr wrap="square" rtlCol="0">
-            <a:spAutoFit/>
-          </a:bodyPr>
-          <a:lstStyle/>
-          <a:p>
-            <a:r>
-              <a:rPr lang="en-US" b="1" dirty="0">
-                <a:solidFill>
-                  <a:srgbClr val="FFFF00"/>
-                </a:solidFill>
-              </a:rPr>
-              <a:t>MIND server</a:t>
-            </a:r>
-            <a:endParaRPr lang="en-NL" b="1" dirty="0">
-              <a:solidFill>
-                <a:srgbClr val="FFFF00"/>
-              </a:solidFill>
-            </a:endParaRPr>
-          </a:p>
-        </p:txBody>
-      </p:sp>
-    </p:spTree>
-    <p:extLst>
-      <p:ext uri="{BB962C8B-B14F-4D97-AF65-F5344CB8AC3E}">
-        <p14:creationId xmlns:p14="http://schemas.microsoft.com/office/powerpoint/2010/main" val="3503112432"/>
       </p:ext>
     </p:extLst>
   </p:cSld>

--- a/docs/slides/def1.pptx
+++ b/docs/slides/def1.pptx
@@ -15,9 +15,8 @@
     <p:sldId id="263" r:id="rId9"/>
     <p:sldId id="260" r:id="rId10"/>
     <p:sldId id="268" r:id="rId11"/>
-    <p:sldId id="261" r:id="rId12"/>
-    <p:sldId id="262" r:id="rId13"/>
-    <p:sldId id="265" r:id="rId14"/>
+    <p:sldId id="270" r:id="rId12"/>
+    <p:sldId id="269" r:id="rId13"/>
   </p:sldIdLst>
   <p:sldSz cx="12192000" cy="6858000"/>
   <p:notesSz cx="6858000" cy="9144000"/>
@@ -1619,753 +1618,6 @@
 </file>
 
 <file path=ppt/diagrams/colors3.xml><?xml version="1.0" encoding="utf-8"?>
-<dgm:colorsDef xmlns:dgm="http://schemas.openxmlformats.org/drawingml/2006/diagram" xmlns:a="http://schemas.openxmlformats.org/drawingml/2006/main" uniqueId="urn:microsoft.com/office/officeart/2005/8/colors/accent1_2">
-  <dgm:title val=""/>
-  <dgm:desc val=""/>
-  <dgm:catLst>
-    <dgm:cat type="accent1" pri="11200"/>
-  </dgm:catLst>
-  <dgm:styleLbl name="node0">
-    <dgm:fillClrLst meth="repeat">
-      <a:schemeClr val="accent1"/>
-    </dgm:fillClrLst>
-    <dgm:linClrLst meth="repeat">
-      <a:schemeClr val="lt1"/>
-    </dgm:linClrLst>
-    <dgm:effectClrLst/>
-    <dgm:txLinClrLst/>
-    <dgm:txFillClrLst/>
-    <dgm:txEffectClrLst/>
-  </dgm:styleLbl>
-  <dgm:styleLbl name="alignNode1">
-    <dgm:fillClrLst meth="repeat">
-      <a:schemeClr val="accent1"/>
-    </dgm:fillClrLst>
-    <dgm:linClrLst meth="repeat">
-      <a:schemeClr val="accent1"/>
-    </dgm:linClrLst>
-    <dgm:effectClrLst/>
-    <dgm:txLinClrLst/>
-    <dgm:txFillClrLst/>
-    <dgm:txEffectClrLst/>
-  </dgm:styleLbl>
-  <dgm:styleLbl name="node1">
-    <dgm:fillClrLst meth="repeat">
-      <a:schemeClr val="accent1"/>
-    </dgm:fillClrLst>
-    <dgm:linClrLst meth="repeat">
-      <a:schemeClr val="lt1"/>
-    </dgm:linClrLst>
-    <dgm:effectClrLst/>
-    <dgm:txLinClrLst/>
-    <dgm:txFillClrLst/>
-    <dgm:txEffectClrLst/>
-  </dgm:styleLbl>
-  <dgm:styleLbl name="lnNode1">
-    <dgm:fillClrLst meth="repeat">
-      <a:schemeClr val="accent1"/>
-    </dgm:fillClrLst>
-    <dgm:linClrLst meth="repeat">
-      <a:schemeClr val="lt1"/>
-    </dgm:linClrLst>
-    <dgm:effectClrLst/>
-    <dgm:txLinClrLst/>
-    <dgm:txFillClrLst/>
-    <dgm:txEffectClrLst/>
-  </dgm:styleLbl>
-  <dgm:styleLbl name="vennNode1">
-    <dgm:fillClrLst meth="repeat">
-      <a:schemeClr val="accent1">
-        <a:alpha val="50000"/>
-      </a:schemeClr>
-    </dgm:fillClrLst>
-    <dgm:linClrLst meth="repeat">
-      <a:schemeClr val="lt1"/>
-    </dgm:linClrLst>
-    <dgm:effectClrLst/>
-    <dgm:txLinClrLst/>
-    <dgm:txFillClrLst/>
-    <dgm:txEffectClrLst/>
-  </dgm:styleLbl>
-  <dgm:styleLbl name="node2">
-    <dgm:fillClrLst meth="repeat">
-      <a:schemeClr val="accent1"/>
-    </dgm:fillClrLst>
-    <dgm:linClrLst meth="repeat">
-      <a:schemeClr val="lt1"/>
-    </dgm:linClrLst>
-    <dgm:effectClrLst/>
-    <dgm:txLinClrLst/>
-    <dgm:txFillClrLst/>
-    <dgm:txEffectClrLst/>
-  </dgm:styleLbl>
-  <dgm:styleLbl name="node3">
-    <dgm:fillClrLst meth="repeat">
-      <a:schemeClr val="accent1"/>
-    </dgm:fillClrLst>
-    <dgm:linClrLst meth="repeat">
-      <a:schemeClr val="lt1"/>
-    </dgm:linClrLst>
-    <dgm:effectClrLst/>
-    <dgm:txLinClrLst/>
-    <dgm:txFillClrLst/>
-    <dgm:txEffectClrLst/>
-  </dgm:styleLbl>
-  <dgm:styleLbl name="node4">
-    <dgm:fillClrLst meth="repeat">
-      <a:schemeClr val="accent1"/>
-    </dgm:fillClrLst>
-    <dgm:linClrLst meth="repeat">
-      <a:schemeClr val="lt1"/>
-    </dgm:linClrLst>
-    <dgm:effectClrLst/>
-    <dgm:txLinClrLst/>
-    <dgm:txFillClrLst/>
-    <dgm:txEffectClrLst/>
-  </dgm:styleLbl>
-  <dgm:styleLbl name="fgImgPlace1">
-    <dgm:fillClrLst meth="repeat">
-      <a:schemeClr val="accent1">
-        <a:tint val="50000"/>
-      </a:schemeClr>
-    </dgm:fillClrLst>
-    <dgm:linClrLst meth="repeat">
-      <a:schemeClr val="lt1"/>
-    </dgm:linClrLst>
-    <dgm:effectClrLst/>
-    <dgm:txLinClrLst/>
-    <dgm:txFillClrLst meth="repeat">
-      <a:schemeClr val="lt1"/>
-    </dgm:txFillClrLst>
-    <dgm:txEffectClrLst/>
-  </dgm:styleLbl>
-  <dgm:styleLbl name="alignImgPlace1">
-    <dgm:fillClrLst meth="repeat">
-      <a:schemeClr val="accent1">
-        <a:tint val="50000"/>
-      </a:schemeClr>
-    </dgm:fillClrLst>
-    <dgm:linClrLst meth="repeat">
-      <a:schemeClr val="lt1"/>
-    </dgm:linClrLst>
-    <dgm:effectClrLst/>
-    <dgm:txLinClrLst/>
-    <dgm:txFillClrLst meth="repeat">
-      <a:schemeClr val="lt1"/>
-    </dgm:txFillClrLst>
-    <dgm:txEffectClrLst/>
-  </dgm:styleLbl>
-  <dgm:styleLbl name="bgImgPlace1">
-    <dgm:fillClrLst meth="repeat">
-      <a:schemeClr val="accent1">
-        <a:tint val="50000"/>
-      </a:schemeClr>
-    </dgm:fillClrLst>
-    <dgm:linClrLst meth="repeat">
-      <a:schemeClr val="lt1"/>
-    </dgm:linClrLst>
-    <dgm:effectClrLst/>
-    <dgm:txLinClrLst/>
-    <dgm:txFillClrLst meth="repeat">
-      <a:schemeClr val="lt1"/>
-    </dgm:txFillClrLst>
-    <dgm:txEffectClrLst/>
-  </dgm:styleLbl>
-  <dgm:styleLbl name="sibTrans2D1">
-    <dgm:fillClrLst meth="repeat">
-      <a:schemeClr val="accent1">
-        <a:tint val="60000"/>
-      </a:schemeClr>
-    </dgm:fillClrLst>
-    <dgm:linClrLst meth="repeat">
-      <a:schemeClr val="accent1">
-        <a:tint val="60000"/>
-      </a:schemeClr>
-    </dgm:linClrLst>
-    <dgm:effectClrLst/>
-    <dgm:txLinClrLst/>
-    <dgm:txFillClrLst/>
-    <dgm:txEffectClrLst/>
-  </dgm:styleLbl>
-  <dgm:styleLbl name="fgSibTrans2D1">
-    <dgm:fillClrLst meth="repeat">
-      <a:schemeClr val="accent1">
-        <a:tint val="60000"/>
-      </a:schemeClr>
-    </dgm:fillClrLst>
-    <dgm:linClrLst meth="repeat">
-      <a:schemeClr val="accent1">
-        <a:tint val="60000"/>
-      </a:schemeClr>
-    </dgm:linClrLst>
-    <dgm:effectClrLst/>
-    <dgm:txLinClrLst/>
-    <dgm:txFillClrLst/>
-    <dgm:txEffectClrLst/>
-  </dgm:styleLbl>
-  <dgm:styleLbl name="bgSibTrans2D1">
-    <dgm:fillClrLst meth="repeat">
-      <a:schemeClr val="accent1">
-        <a:tint val="60000"/>
-      </a:schemeClr>
-    </dgm:fillClrLst>
-    <dgm:linClrLst meth="repeat">
-      <a:schemeClr val="accent1">
-        <a:tint val="60000"/>
-      </a:schemeClr>
-    </dgm:linClrLst>
-    <dgm:effectClrLst/>
-    <dgm:txLinClrLst/>
-    <dgm:txFillClrLst/>
-    <dgm:txEffectClrLst/>
-  </dgm:styleLbl>
-  <dgm:styleLbl name="sibTrans1D1">
-    <dgm:fillClrLst meth="repeat">
-      <a:schemeClr val="accent1"/>
-    </dgm:fillClrLst>
-    <dgm:linClrLst meth="repeat">
-      <a:schemeClr val="accent1"/>
-    </dgm:linClrLst>
-    <dgm:effectClrLst/>
-    <dgm:txLinClrLst/>
-    <dgm:txFillClrLst meth="repeat">
-      <a:schemeClr val="tx1"/>
-    </dgm:txFillClrLst>
-    <dgm:txEffectClrLst/>
-  </dgm:styleLbl>
-  <dgm:styleLbl name="callout">
-    <dgm:fillClrLst meth="repeat">
-      <a:schemeClr val="accent1"/>
-    </dgm:fillClrLst>
-    <dgm:linClrLst meth="repeat">
-      <a:schemeClr val="accent1">
-        <a:tint val="50000"/>
-      </a:schemeClr>
-    </dgm:linClrLst>
-    <dgm:effectClrLst/>
-    <dgm:txLinClrLst/>
-    <dgm:txFillClrLst meth="repeat">
-      <a:schemeClr val="tx1"/>
-    </dgm:txFillClrLst>
-    <dgm:txEffectClrLst/>
-  </dgm:styleLbl>
-  <dgm:styleLbl name="asst0">
-    <dgm:fillClrLst meth="repeat">
-      <a:schemeClr val="accent1"/>
-    </dgm:fillClrLst>
-    <dgm:linClrLst meth="repeat">
-      <a:schemeClr val="lt1"/>
-    </dgm:linClrLst>
-    <dgm:effectClrLst/>
-    <dgm:txLinClrLst/>
-    <dgm:txFillClrLst/>
-    <dgm:txEffectClrLst/>
-  </dgm:styleLbl>
-  <dgm:styleLbl name="asst1">
-    <dgm:fillClrLst meth="repeat">
-      <a:schemeClr val="accent1"/>
-    </dgm:fillClrLst>
-    <dgm:linClrLst meth="repeat">
-      <a:schemeClr val="lt1"/>
-    </dgm:linClrLst>
-    <dgm:effectClrLst/>
-    <dgm:txLinClrLst/>
-    <dgm:txFillClrLst/>
-    <dgm:txEffectClrLst/>
-  </dgm:styleLbl>
-  <dgm:styleLbl name="asst2">
-    <dgm:fillClrLst meth="repeat">
-      <a:schemeClr val="accent1"/>
-    </dgm:fillClrLst>
-    <dgm:linClrLst meth="repeat">
-      <a:schemeClr val="lt1"/>
-    </dgm:linClrLst>
-    <dgm:effectClrLst/>
-    <dgm:txLinClrLst/>
-    <dgm:txFillClrLst/>
-    <dgm:txEffectClrLst/>
-  </dgm:styleLbl>
-  <dgm:styleLbl name="asst3">
-    <dgm:fillClrLst meth="repeat">
-      <a:schemeClr val="accent1"/>
-    </dgm:fillClrLst>
-    <dgm:linClrLst meth="repeat">
-      <a:schemeClr val="lt1"/>
-    </dgm:linClrLst>
-    <dgm:effectClrLst/>
-    <dgm:txLinClrLst/>
-    <dgm:txFillClrLst/>
-    <dgm:txEffectClrLst/>
-  </dgm:styleLbl>
-  <dgm:styleLbl name="asst4">
-    <dgm:fillClrLst meth="repeat">
-      <a:schemeClr val="accent1"/>
-    </dgm:fillClrLst>
-    <dgm:linClrLst meth="repeat">
-      <a:schemeClr val="lt1"/>
-    </dgm:linClrLst>
-    <dgm:effectClrLst/>
-    <dgm:txLinClrLst/>
-    <dgm:txFillClrLst/>
-    <dgm:txEffectClrLst/>
-  </dgm:styleLbl>
-  <dgm:styleLbl name="parChTrans2D1">
-    <dgm:fillClrLst meth="repeat">
-      <a:schemeClr val="accent1">
-        <a:tint val="60000"/>
-      </a:schemeClr>
-    </dgm:fillClrLst>
-    <dgm:linClrLst meth="repeat">
-      <a:schemeClr val="accent1">
-        <a:tint val="60000"/>
-      </a:schemeClr>
-    </dgm:linClrLst>
-    <dgm:effectClrLst/>
-    <dgm:txLinClrLst/>
-    <dgm:txFillClrLst meth="repeat">
-      <a:schemeClr val="lt1"/>
-    </dgm:txFillClrLst>
-    <dgm:txEffectClrLst/>
-  </dgm:styleLbl>
-  <dgm:styleLbl name="parChTrans2D2">
-    <dgm:fillClrLst meth="repeat">
-      <a:schemeClr val="accent1"/>
-    </dgm:fillClrLst>
-    <dgm:linClrLst meth="repeat">
-      <a:schemeClr val="accent1"/>
-    </dgm:linClrLst>
-    <dgm:effectClrLst/>
-    <dgm:txLinClrLst/>
-    <dgm:txFillClrLst meth="repeat">
-      <a:schemeClr val="lt1"/>
-    </dgm:txFillClrLst>
-    <dgm:txEffectClrLst/>
-  </dgm:styleLbl>
-  <dgm:styleLbl name="parChTrans2D3">
-    <dgm:fillClrLst meth="repeat">
-      <a:schemeClr val="accent1"/>
-    </dgm:fillClrLst>
-    <dgm:linClrLst meth="repeat">
-      <a:schemeClr val="accent1"/>
-    </dgm:linClrLst>
-    <dgm:effectClrLst/>
-    <dgm:txLinClrLst/>
-    <dgm:txFillClrLst meth="repeat">
-      <a:schemeClr val="lt1"/>
-    </dgm:txFillClrLst>
-    <dgm:txEffectClrLst/>
-  </dgm:styleLbl>
-  <dgm:styleLbl name="parChTrans2D4">
-    <dgm:fillClrLst meth="repeat">
-      <a:schemeClr val="accent1"/>
-    </dgm:fillClrLst>
-    <dgm:linClrLst meth="repeat">
-      <a:schemeClr val="accent1"/>
-    </dgm:linClrLst>
-    <dgm:effectClrLst/>
-    <dgm:txLinClrLst/>
-    <dgm:txFillClrLst meth="repeat">
-      <a:schemeClr val="lt1"/>
-    </dgm:txFillClrLst>
-    <dgm:txEffectClrLst/>
-  </dgm:styleLbl>
-  <dgm:styleLbl name="parChTrans1D1">
-    <dgm:fillClrLst meth="repeat">
-      <a:schemeClr val="accent1"/>
-    </dgm:fillClrLst>
-    <dgm:linClrLst meth="repeat">
-      <a:schemeClr val="accent1">
-        <a:shade val="60000"/>
-      </a:schemeClr>
-    </dgm:linClrLst>
-    <dgm:effectClrLst/>
-    <dgm:txLinClrLst/>
-    <dgm:txFillClrLst meth="repeat">
-      <a:schemeClr val="tx1"/>
-    </dgm:txFillClrLst>
-    <dgm:txEffectClrLst/>
-  </dgm:styleLbl>
-  <dgm:styleLbl name="parChTrans1D2">
-    <dgm:fillClrLst meth="repeat">
-      <a:schemeClr val="accent1"/>
-    </dgm:fillClrLst>
-    <dgm:linClrLst meth="repeat">
-      <a:schemeClr val="accent1">
-        <a:shade val="60000"/>
-      </a:schemeClr>
-    </dgm:linClrLst>
-    <dgm:effectClrLst/>
-    <dgm:txLinClrLst/>
-    <dgm:txFillClrLst meth="repeat">
-      <a:schemeClr val="tx1"/>
-    </dgm:txFillClrLst>
-    <dgm:txEffectClrLst/>
-  </dgm:styleLbl>
-  <dgm:styleLbl name="parChTrans1D3">
-    <dgm:fillClrLst meth="repeat">
-      <a:schemeClr val="accent1"/>
-    </dgm:fillClrLst>
-    <dgm:linClrLst meth="repeat">
-      <a:schemeClr val="accent1">
-        <a:shade val="80000"/>
-      </a:schemeClr>
-    </dgm:linClrLst>
-    <dgm:effectClrLst/>
-    <dgm:txLinClrLst/>
-    <dgm:txFillClrLst meth="repeat">
-      <a:schemeClr val="tx1"/>
-    </dgm:txFillClrLst>
-    <dgm:txEffectClrLst/>
-  </dgm:styleLbl>
-  <dgm:styleLbl name="parChTrans1D4">
-    <dgm:fillClrLst meth="repeat">
-      <a:schemeClr val="accent1"/>
-    </dgm:fillClrLst>
-    <dgm:linClrLst meth="repeat">
-      <a:schemeClr val="accent1">
-        <a:shade val="80000"/>
-      </a:schemeClr>
-    </dgm:linClrLst>
-    <dgm:effectClrLst/>
-    <dgm:txLinClrLst/>
-    <dgm:txFillClrLst meth="repeat">
-      <a:schemeClr val="tx1"/>
-    </dgm:txFillClrLst>
-    <dgm:txEffectClrLst/>
-  </dgm:styleLbl>
-  <dgm:styleLbl name="fgAcc1">
-    <dgm:fillClrLst meth="repeat">
-      <a:schemeClr val="lt1">
-        <a:alpha val="90000"/>
-      </a:schemeClr>
-    </dgm:fillClrLst>
-    <dgm:linClrLst meth="repeat">
-      <a:schemeClr val="accent1"/>
-    </dgm:linClrLst>
-    <dgm:effectClrLst/>
-    <dgm:txLinClrLst/>
-    <dgm:txFillClrLst meth="repeat">
-      <a:schemeClr val="dk1"/>
-    </dgm:txFillClrLst>
-    <dgm:txEffectClrLst/>
-  </dgm:styleLbl>
-  <dgm:styleLbl name="conFgAcc1">
-    <dgm:fillClrLst meth="repeat">
-      <a:schemeClr val="lt1">
-        <a:alpha val="90000"/>
-      </a:schemeClr>
-    </dgm:fillClrLst>
-    <dgm:linClrLst meth="repeat">
-      <a:schemeClr val="accent1"/>
-    </dgm:linClrLst>
-    <dgm:effectClrLst/>
-    <dgm:txLinClrLst/>
-    <dgm:txFillClrLst meth="repeat">
-      <a:schemeClr val="dk1"/>
-    </dgm:txFillClrLst>
-    <dgm:txEffectClrLst/>
-  </dgm:styleLbl>
-  <dgm:styleLbl name="alignAcc1">
-    <dgm:fillClrLst meth="repeat">
-      <a:schemeClr val="lt1">
-        <a:alpha val="90000"/>
-      </a:schemeClr>
-    </dgm:fillClrLst>
-    <dgm:linClrLst meth="repeat">
-      <a:schemeClr val="accent1"/>
-    </dgm:linClrLst>
-    <dgm:effectClrLst/>
-    <dgm:txLinClrLst/>
-    <dgm:txFillClrLst meth="repeat">
-      <a:schemeClr val="dk1"/>
-    </dgm:txFillClrLst>
-    <dgm:txEffectClrLst/>
-  </dgm:styleLbl>
-  <dgm:styleLbl name="trAlignAcc1">
-    <dgm:fillClrLst meth="repeat">
-      <a:schemeClr val="lt1">
-        <a:alpha val="40000"/>
-      </a:schemeClr>
-    </dgm:fillClrLst>
-    <dgm:linClrLst meth="repeat">
-      <a:schemeClr val="accent1"/>
-    </dgm:linClrLst>
-    <dgm:effectClrLst/>
-    <dgm:txLinClrLst/>
-    <dgm:txFillClrLst meth="repeat">
-      <a:schemeClr val="dk1"/>
-    </dgm:txFillClrLst>
-    <dgm:txEffectClrLst/>
-  </dgm:styleLbl>
-  <dgm:styleLbl name="bgAcc1">
-    <dgm:fillClrLst meth="repeat">
-      <a:schemeClr val="lt1">
-        <a:alpha val="90000"/>
-      </a:schemeClr>
-    </dgm:fillClrLst>
-    <dgm:linClrLst meth="repeat">
-      <a:schemeClr val="accent1"/>
-    </dgm:linClrLst>
-    <dgm:effectClrLst/>
-    <dgm:txLinClrLst/>
-    <dgm:txFillClrLst meth="repeat">
-      <a:schemeClr val="dk1"/>
-    </dgm:txFillClrLst>
-    <dgm:txEffectClrLst/>
-  </dgm:styleLbl>
-  <dgm:styleLbl name="solidFgAcc1">
-    <dgm:fillClrLst meth="repeat">
-      <a:schemeClr val="lt1"/>
-    </dgm:fillClrLst>
-    <dgm:linClrLst meth="repeat">
-      <a:schemeClr val="accent1"/>
-    </dgm:linClrLst>
-    <dgm:effectClrLst/>
-    <dgm:txLinClrLst/>
-    <dgm:txFillClrLst meth="repeat">
-      <a:schemeClr val="dk1"/>
-    </dgm:txFillClrLst>
-    <dgm:txEffectClrLst/>
-  </dgm:styleLbl>
-  <dgm:styleLbl name="solidAlignAcc1">
-    <dgm:fillClrLst meth="repeat">
-      <a:schemeClr val="lt1"/>
-    </dgm:fillClrLst>
-    <dgm:linClrLst meth="repeat">
-      <a:schemeClr val="accent1"/>
-    </dgm:linClrLst>
-    <dgm:effectClrLst/>
-    <dgm:txLinClrLst/>
-    <dgm:txFillClrLst meth="repeat">
-      <a:schemeClr val="dk1"/>
-    </dgm:txFillClrLst>
-    <dgm:txEffectClrLst/>
-  </dgm:styleLbl>
-  <dgm:styleLbl name="solidBgAcc1">
-    <dgm:fillClrLst meth="repeat">
-      <a:schemeClr val="lt1"/>
-    </dgm:fillClrLst>
-    <dgm:linClrLst meth="repeat">
-      <a:schemeClr val="accent1"/>
-    </dgm:linClrLst>
-    <dgm:effectClrLst/>
-    <dgm:txLinClrLst/>
-    <dgm:txFillClrLst meth="repeat">
-      <a:schemeClr val="dk1"/>
-    </dgm:txFillClrLst>
-    <dgm:txEffectClrLst/>
-  </dgm:styleLbl>
-  <dgm:styleLbl name="fgAccFollowNode1">
-    <dgm:fillClrLst meth="repeat">
-      <a:schemeClr val="accent1">
-        <a:alpha val="90000"/>
-        <a:tint val="40000"/>
-      </a:schemeClr>
-    </dgm:fillClrLst>
-    <dgm:linClrLst meth="repeat">
-      <a:schemeClr val="accent1">
-        <a:alpha val="90000"/>
-        <a:tint val="40000"/>
-      </a:schemeClr>
-    </dgm:linClrLst>
-    <dgm:effectClrLst/>
-    <dgm:txLinClrLst/>
-    <dgm:txFillClrLst meth="repeat">
-      <a:schemeClr val="dk1"/>
-    </dgm:txFillClrLst>
-    <dgm:txEffectClrLst/>
-  </dgm:styleLbl>
-  <dgm:styleLbl name="alignAccFollowNode1">
-    <dgm:fillClrLst meth="repeat">
-      <a:schemeClr val="accent1">
-        <a:alpha val="90000"/>
-        <a:tint val="40000"/>
-      </a:schemeClr>
-    </dgm:fillClrLst>
-    <dgm:linClrLst meth="repeat">
-      <a:schemeClr val="accent1">
-        <a:alpha val="90000"/>
-        <a:tint val="40000"/>
-      </a:schemeClr>
-    </dgm:linClrLst>
-    <dgm:effectClrLst/>
-    <dgm:txLinClrLst/>
-    <dgm:txFillClrLst meth="repeat">
-      <a:schemeClr val="dk1"/>
-    </dgm:txFillClrLst>
-    <dgm:txEffectClrLst/>
-  </dgm:styleLbl>
-  <dgm:styleLbl name="bgAccFollowNode1">
-    <dgm:fillClrLst meth="repeat">
-      <a:schemeClr val="accent1">
-        <a:alpha val="90000"/>
-        <a:tint val="40000"/>
-      </a:schemeClr>
-    </dgm:fillClrLst>
-    <dgm:linClrLst meth="repeat">
-      <a:schemeClr val="accent1">
-        <a:alpha val="90000"/>
-        <a:tint val="40000"/>
-      </a:schemeClr>
-    </dgm:linClrLst>
-    <dgm:effectClrLst/>
-    <dgm:txLinClrLst/>
-    <dgm:txFillClrLst meth="repeat">
-      <a:schemeClr val="dk1"/>
-    </dgm:txFillClrLst>
-    <dgm:txEffectClrLst/>
-  </dgm:styleLbl>
-  <dgm:styleLbl name="fgAcc0">
-    <dgm:fillClrLst meth="repeat">
-      <a:schemeClr val="lt1">
-        <a:alpha val="90000"/>
-      </a:schemeClr>
-    </dgm:fillClrLst>
-    <dgm:linClrLst meth="repeat">
-      <a:schemeClr val="accent1"/>
-    </dgm:linClrLst>
-    <dgm:effectClrLst/>
-    <dgm:txLinClrLst/>
-    <dgm:txFillClrLst meth="repeat">
-      <a:schemeClr val="dk1"/>
-    </dgm:txFillClrLst>
-    <dgm:txEffectClrLst/>
-  </dgm:styleLbl>
-  <dgm:styleLbl name="fgAcc2">
-    <dgm:fillClrLst meth="repeat">
-      <a:schemeClr val="lt1">
-        <a:alpha val="90000"/>
-      </a:schemeClr>
-    </dgm:fillClrLst>
-    <dgm:linClrLst meth="repeat">
-      <a:schemeClr val="accent1"/>
-    </dgm:linClrLst>
-    <dgm:effectClrLst/>
-    <dgm:txLinClrLst/>
-    <dgm:txFillClrLst meth="repeat">
-      <a:schemeClr val="dk1"/>
-    </dgm:txFillClrLst>
-    <dgm:txEffectClrLst/>
-  </dgm:styleLbl>
-  <dgm:styleLbl name="fgAcc3">
-    <dgm:fillClrLst meth="repeat">
-      <a:schemeClr val="lt1">
-        <a:alpha val="90000"/>
-      </a:schemeClr>
-    </dgm:fillClrLst>
-    <dgm:linClrLst meth="repeat">
-      <a:schemeClr val="accent1"/>
-    </dgm:linClrLst>
-    <dgm:effectClrLst/>
-    <dgm:txLinClrLst/>
-    <dgm:txFillClrLst meth="repeat">
-      <a:schemeClr val="dk1"/>
-    </dgm:txFillClrLst>
-    <dgm:txEffectClrLst/>
-  </dgm:styleLbl>
-  <dgm:styleLbl name="fgAcc4">
-    <dgm:fillClrLst meth="repeat">
-      <a:schemeClr val="lt1">
-        <a:alpha val="90000"/>
-      </a:schemeClr>
-    </dgm:fillClrLst>
-    <dgm:linClrLst meth="repeat">
-      <a:schemeClr val="accent1"/>
-    </dgm:linClrLst>
-    <dgm:effectClrLst/>
-    <dgm:txLinClrLst/>
-    <dgm:txFillClrLst meth="repeat">
-      <a:schemeClr val="dk1"/>
-    </dgm:txFillClrLst>
-    <dgm:txEffectClrLst/>
-  </dgm:styleLbl>
-  <dgm:styleLbl name="bgShp">
-    <dgm:fillClrLst meth="repeat">
-      <a:schemeClr val="accent1">
-        <a:tint val="40000"/>
-      </a:schemeClr>
-    </dgm:fillClrLst>
-    <dgm:linClrLst meth="repeat">
-      <a:schemeClr val="accent1"/>
-    </dgm:linClrLst>
-    <dgm:effectClrLst/>
-    <dgm:txLinClrLst/>
-    <dgm:txFillClrLst meth="repeat">
-      <a:schemeClr val="dk1"/>
-    </dgm:txFillClrLst>
-    <dgm:txEffectClrLst/>
-  </dgm:styleLbl>
-  <dgm:styleLbl name="dkBgShp">
-    <dgm:fillClrLst meth="repeat">
-      <a:schemeClr val="accent1">
-        <a:shade val="80000"/>
-      </a:schemeClr>
-    </dgm:fillClrLst>
-    <dgm:linClrLst meth="repeat">
-      <a:schemeClr val="accent1"/>
-    </dgm:linClrLst>
-    <dgm:effectClrLst/>
-    <dgm:txLinClrLst/>
-    <dgm:txFillClrLst meth="repeat">
-      <a:schemeClr val="lt1"/>
-    </dgm:txFillClrLst>
-    <dgm:txEffectClrLst/>
-  </dgm:styleLbl>
-  <dgm:styleLbl name="trBgShp">
-    <dgm:fillClrLst meth="repeat">
-      <a:schemeClr val="accent1">
-        <a:tint val="50000"/>
-        <a:alpha val="40000"/>
-      </a:schemeClr>
-    </dgm:fillClrLst>
-    <dgm:linClrLst meth="repeat">
-      <a:schemeClr val="accent1"/>
-    </dgm:linClrLst>
-    <dgm:effectClrLst/>
-    <dgm:txLinClrLst/>
-    <dgm:txFillClrLst meth="repeat">
-      <a:schemeClr val="lt1"/>
-    </dgm:txFillClrLst>
-    <dgm:txEffectClrLst/>
-  </dgm:styleLbl>
-  <dgm:styleLbl name="fgShp">
-    <dgm:fillClrLst meth="repeat">
-      <a:schemeClr val="accent1">
-        <a:tint val="60000"/>
-      </a:schemeClr>
-    </dgm:fillClrLst>
-    <dgm:linClrLst meth="repeat">
-      <a:schemeClr val="lt1"/>
-    </dgm:linClrLst>
-    <dgm:effectClrLst/>
-    <dgm:txLinClrLst/>
-    <dgm:txFillClrLst meth="repeat">
-      <a:schemeClr val="dk1"/>
-    </dgm:txFillClrLst>
-    <dgm:txEffectClrLst/>
-  </dgm:styleLbl>
-  <dgm:styleLbl name="revTx">
-    <dgm:fillClrLst meth="repeat">
-      <a:schemeClr val="lt1">
-        <a:alpha val="0"/>
-      </a:schemeClr>
-    </dgm:fillClrLst>
-    <dgm:linClrLst meth="repeat">
-      <a:schemeClr val="dk1">
-        <a:alpha val="0"/>
-      </a:schemeClr>
-    </dgm:linClrLst>
-    <dgm:effectClrLst/>
-    <dgm:txLinClrLst/>
-    <dgm:txFillClrLst meth="repeat">
-      <a:schemeClr val="tx1"/>
-    </dgm:txFillClrLst>
-    <dgm:txEffectClrLst/>
-  </dgm:styleLbl>
-</dgm:colorsDef>
-</file>
-
-<file path=ppt/diagrams/colors4.xml><?xml version="1.0" encoding="utf-8"?>
 <dgm:colorsDef xmlns:dgm="http://schemas.openxmlformats.org/drawingml/2006/diagram" xmlns:a="http://schemas.openxmlformats.org/drawingml/2006/main" uniqueId="urn:microsoft.com/office/officeart/2005/8/colors/accent1_2">
   <dgm:title val=""/>
   <dgm:desc val=""/>
@@ -4210,15 +3462,7 @@
         <a:p>
           <a:r>
             <a:rPr lang="en-US" dirty="0"/>
-            <a:t>You can call the </a:t>
-          </a:r>
-          <a:r>
-            <a:rPr lang="en-US" dirty="0" err="1"/>
-            <a:t>mthod</a:t>
-          </a:r>
-          <a:r>
-            <a:rPr lang="en-US" dirty="0"/>
-            <a:t> right away, which will execute the M code and return data</a:t>
+            <a:t>You can call the method right away, which will execute the M code and return data</a:t>
           </a:r>
           <a:endParaRPr lang="en-NL" dirty="0"/>
         </a:p>
@@ -4338,445 +3582,6 @@
     <dgm:cxn modelId="{E08349A5-0353-4C9E-91A6-357A61A8D518}" type="presParOf" srcId="{42508249-CB23-4C29-BA91-0FBF4F3FC221}" destId="{CF98FD1A-AABC-4833-9CC8-F5ECB925415E}" srcOrd="3" destOrd="0" presId="urn:microsoft.com/office/officeart/2009/3/layout/IncreasingArrowsProcess"/>
     <dgm:cxn modelId="{A7BB57EB-A38D-4276-BCED-684F1223C668}" type="presParOf" srcId="{42508249-CB23-4C29-BA91-0FBF4F3FC221}" destId="{F9AE15FA-8263-4E7F-B6DC-79DA0B2F7B75}" srcOrd="4" destOrd="0" presId="urn:microsoft.com/office/officeart/2009/3/layout/IncreasingArrowsProcess"/>
     <dgm:cxn modelId="{479950C8-AF5C-4106-992A-1C66634BB90B}" type="presParOf" srcId="{42508249-CB23-4C29-BA91-0FBF4F3FC221}" destId="{A1C7FE50-A7A9-4DCF-9D2D-0D9BE2138934}" srcOrd="5" destOrd="0" presId="urn:microsoft.com/office/officeart/2009/3/layout/IncreasingArrowsProcess"/>
-  </dgm:cxnLst>
-  <dgm:bg/>
-  <dgm:whole/>
-  <dgm:extLst>
-    <a:ext uri="http://schemas.microsoft.com/office/drawing/2008/diagram">
-      <dsp:dataModelExt xmlns:dsp="http://schemas.microsoft.com/office/drawing/2008/diagram" relId="rId6" minVer="http://schemas.openxmlformats.org/drawingml/2006/diagram"/>
-    </a:ext>
-  </dgm:extLst>
-</dgm:dataModel>
-</file>
-
-<file path=ppt/diagrams/data4.xml><?xml version="1.0" encoding="utf-8"?>
-<dgm:dataModel xmlns:dgm="http://schemas.openxmlformats.org/drawingml/2006/diagram" xmlns:a="http://schemas.openxmlformats.org/drawingml/2006/main">
-  <dgm:ptLst>
-    <dgm:pt modelId="{996C4E6A-2C60-4428-8C91-27910EF058EC}" type="doc">
-      <dgm:prSet loTypeId="urn:microsoft.com/office/officeart/2024/3/layout/hArchList1" loCatId="List" qsTypeId="urn:microsoft.com/office/officeart/2005/8/quickstyle/simple1" qsCatId="simple" csTypeId="urn:microsoft.com/office/officeart/2005/8/colors/accent1_2" csCatId="accent1" phldr="1"/>
-      <dgm:spPr/>
-      <dgm:t>
-        <a:bodyPr/>
-        <a:lstStyle/>
-        <a:p>
-          <a:endParaRPr lang="en-US"/>
-        </a:p>
-      </dgm:t>
-    </dgm:pt>
-    <dgm:pt modelId="{D594FA1A-CAFE-4FC9-B29F-017F3AF2316D}">
-      <dgm:prSet/>
-      <dgm:spPr/>
-      <dgm:t>
-        <a:bodyPr/>
-        <a:lstStyle/>
-        <a:p>
-          <a:pPr>
-            <a:lnSpc>
-              <a:spcPct val="100000"/>
-            </a:lnSpc>
-            <a:defRPr b="1"/>
-          </a:pPr>
-          <a:r>
-            <a:rPr lang="en-US" dirty="0"/>
-            <a:t>Simple to install,</a:t>
-          </a:r>
-        </a:p>
-        <a:p>
-          <a:pPr>
-            <a:lnSpc>
-              <a:spcPct val="100000"/>
-            </a:lnSpc>
-            <a:defRPr b="1"/>
-          </a:pPr>
-          <a:r>
-            <a:rPr lang="en-US" dirty="0"/>
-            <a:t>Simple to run…</a:t>
-          </a:r>
-        </a:p>
-      </dgm:t>
-    </dgm:pt>
-    <dgm:pt modelId="{B692412B-C32F-404E-A62A-E42191694563}" type="parTrans" cxnId="{CECC1115-8D04-4BE9-A207-B030BD568392}">
-      <dgm:prSet/>
-      <dgm:spPr/>
-      <dgm:t>
-        <a:bodyPr/>
-        <a:lstStyle/>
-        <a:p>
-          <a:endParaRPr lang="en-US"/>
-        </a:p>
-      </dgm:t>
-    </dgm:pt>
-    <dgm:pt modelId="{3AB04008-29BA-487D-8C45-AE18FA21868B}" type="sibTrans" cxnId="{CECC1115-8D04-4BE9-A207-B030BD568392}">
-      <dgm:prSet/>
-      <dgm:spPr/>
-      <dgm:t>
-        <a:bodyPr/>
-        <a:lstStyle/>
-        <a:p>
-          <a:pPr>
-            <a:lnSpc>
-              <a:spcPct val="100000"/>
-            </a:lnSpc>
-            <a:defRPr b="1"/>
-          </a:pPr>
-          <a:endParaRPr lang="en-US"/>
-        </a:p>
-      </dgm:t>
-    </dgm:pt>
-    <dgm:pt modelId="{06204C76-8052-4671-8722-9895BD95AC98}">
-      <dgm:prSet/>
-      <dgm:spPr/>
-      <dgm:t>
-        <a:bodyPr/>
-        <a:lstStyle/>
-        <a:p>
-          <a:pPr>
-            <a:lnSpc>
-              <a:spcPct val="100000"/>
-            </a:lnSpc>
-          </a:pPr>
-          <a:r>
-            <a:rPr lang="en-US" dirty="0"/>
-            <a:t>MIND Server gets installed as standard YottaDB plugin on top of your YottaDB installation with a one-liner command.</a:t>
-          </a:r>
-        </a:p>
-        <a:p>
-          <a:pPr>
-            <a:lnSpc>
-              <a:spcPct val="100000"/>
-            </a:lnSpc>
-          </a:pPr>
-          <a:r>
-            <a:rPr lang="en-US" dirty="0"/>
-            <a:t>You can then either run it directly of configure it using the .conf file or command line switches.</a:t>
-          </a:r>
-        </a:p>
-      </dgm:t>
-    </dgm:pt>
-    <dgm:pt modelId="{0923777E-212F-46F7-9676-1B1CD76B367F}" type="parTrans" cxnId="{1FF11245-068A-4CA3-BCBC-AA141B75607D}">
-      <dgm:prSet/>
-      <dgm:spPr/>
-      <dgm:t>
-        <a:bodyPr/>
-        <a:lstStyle/>
-        <a:p>
-          <a:endParaRPr lang="en-US"/>
-        </a:p>
-      </dgm:t>
-    </dgm:pt>
-    <dgm:pt modelId="{2AE3F090-A320-4B38-A931-78BE74ADF0F7}" type="sibTrans" cxnId="{1FF11245-068A-4CA3-BCBC-AA141B75607D}">
-      <dgm:prSet/>
-      <dgm:spPr/>
-      <dgm:t>
-        <a:bodyPr/>
-        <a:lstStyle/>
-        <a:p>
-          <a:endParaRPr lang="en-US"/>
-        </a:p>
-      </dgm:t>
-    </dgm:pt>
-    <dgm:pt modelId="{768B9187-70A7-4F24-98C9-4549D9A80F20}">
-      <dgm:prSet/>
-      <dgm:spPr/>
-      <dgm:t>
-        <a:bodyPr/>
-        <a:lstStyle/>
-        <a:p>
-          <a:pPr>
-            <a:lnSpc>
-              <a:spcPct val="100000"/>
-            </a:lnSpc>
-            <a:defRPr b="1"/>
-          </a:pPr>
-          <a:r>
-            <a:rPr lang="en-US" dirty="0"/>
-            <a:t>Designed putting both MUMPS and back-end developers first</a:t>
-          </a:r>
-        </a:p>
-      </dgm:t>
-    </dgm:pt>
-    <dgm:pt modelId="{28680839-1F10-452B-8A00-49D86D2208FE}" type="parTrans" cxnId="{0FF7CFDA-06D0-49E7-971D-B87E044D11AB}">
-      <dgm:prSet/>
-      <dgm:spPr/>
-      <dgm:t>
-        <a:bodyPr/>
-        <a:lstStyle/>
-        <a:p>
-          <a:endParaRPr lang="en-US"/>
-        </a:p>
-      </dgm:t>
-    </dgm:pt>
-    <dgm:pt modelId="{E137F926-3C8F-4C45-8350-903EA88D75AF}" type="sibTrans" cxnId="{0FF7CFDA-06D0-49E7-971D-B87E044D11AB}">
-      <dgm:prSet/>
-      <dgm:spPr/>
-      <dgm:t>
-        <a:bodyPr/>
-        <a:lstStyle/>
-        <a:p>
-          <a:pPr>
-            <a:lnSpc>
-              <a:spcPct val="100000"/>
-            </a:lnSpc>
-            <a:defRPr b="1"/>
-          </a:pPr>
-          <a:endParaRPr lang="en-US"/>
-        </a:p>
-      </dgm:t>
-    </dgm:pt>
-    <dgm:pt modelId="{4C74B0FE-0F44-43D7-940D-B9AF6ABF1025}">
-      <dgm:prSet/>
-      <dgm:spPr/>
-      <dgm:t>
-        <a:bodyPr/>
-        <a:lstStyle/>
-        <a:p>
-          <a:pPr>
-            <a:lnSpc>
-              <a:spcPct val="100000"/>
-            </a:lnSpc>
-          </a:pPr>
-          <a:r>
-            <a:rPr lang="en-US" dirty="0"/>
-            <a:t>Keeping in mind that back-end languages use data-types and Objects, we created data translators to move data to and from YottaDB.</a:t>
-          </a:r>
-        </a:p>
-        <a:p>
-          <a:pPr>
-            <a:lnSpc>
-              <a:spcPct val="100000"/>
-            </a:lnSpc>
-          </a:pPr>
-          <a:r>
-            <a:rPr lang="en-US" dirty="0"/>
-            <a:t>And, of course, we support JSON in both directions.</a:t>
-          </a:r>
-        </a:p>
-      </dgm:t>
-    </dgm:pt>
-    <dgm:pt modelId="{E239FEBF-B4AE-47D3-8223-FDECC72F0B62}" type="parTrans" cxnId="{3288A1A6-BC96-42D9-B282-F903D3D28B27}">
-      <dgm:prSet/>
-      <dgm:spPr/>
-      <dgm:t>
-        <a:bodyPr/>
-        <a:lstStyle/>
-        <a:p>
-          <a:endParaRPr lang="en-US"/>
-        </a:p>
-      </dgm:t>
-    </dgm:pt>
-    <dgm:pt modelId="{44570744-E566-439D-B1FF-599460901ED9}" type="sibTrans" cxnId="{3288A1A6-BC96-42D9-B282-F903D3D28B27}">
-      <dgm:prSet/>
-      <dgm:spPr/>
-      <dgm:t>
-        <a:bodyPr/>
-        <a:lstStyle/>
-        <a:p>
-          <a:endParaRPr lang="en-US"/>
-        </a:p>
-      </dgm:t>
-    </dgm:pt>
-    <dgm:pt modelId="{FBA685A8-C4ED-4A44-BA15-A95087C22363}">
-      <dgm:prSet/>
-      <dgm:spPr/>
-      <dgm:t>
-        <a:bodyPr/>
-        <a:lstStyle/>
-        <a:p>
-          <a:pPr>
-            <a:lnSpc>
-              <a:spcPct val="100000"/>
-            </a:lnSpc>
-            <a:defRPr b="1"/>
-          </a:pPr>
-          <a:r>
-            <a:rPr lang="en-US" dirty="0"/>
-            <a:t>ZERO coding needed in the client (back-end) driver.</a:t>
-          </a:r>
-        </a:p>
-      </dgm:t>
-    </dgm:pt>
-    <dgm:pt modelId="{DF0B6627-E6C7-4B6F-AEF0-D5B4D98FAE0D}" type="parTrans" cxnId="{741CCF7E-FAFA-4680-999D-03CF38C0793B}">
-      <dgm:prSet/>
-      <dgm:spPr/>
-      <dgm:t>
-        <a:bodyPr/>
-        <a:lstStyle/>
-        <a:p>
-          <a:endParaRPr lang="en-US"/>
-        </a:p>
-      </dgm:t>
-    </dgm:pt>
-    <dgm:pt modelId="{AD175B27-BF85-41B6-9B87-24460515CD3C}" type="sibTrans" cxnId="{741CCF7E-FAFA-4680-999D-03CF38C0793B}">
-      <dgm:prSet/>
-      <dgm:spPr/>
-      <dgm:t>
-        <a:bodyPr/>
-        <a:lstStyle/>
-        <a:p>
-          <a:endParaRPr lang="en-US"/>
-        </a:p>
-      </dgm:t>
-    </dgm:pt>
-    <dgm:pt modelId="{FABA06FE-F150-48B5-B3D7-2915E3C41ABD}">
-      <dgm:prSet/>
-      <dgm:spPr/>
-      <dgm:t>
-        <a:bodyPr/>
-        <a:lstStyle/>
-        <a:p>
-          <a:pPr>
-            <a:lnSpc>
-              <a:spcPct val="100000"/>
-            </a:lnSpc>
-          </a:pPr>
-          <a:r>
-            <a:rPr lang="en-US" dirty="0"/>
-            <a:t>Once you describe your MUMPS functions / procedure in a JSON file, they will “magically” appear in the client driver and ready to use.</a:t>
-          </a:r>
-        </a:p>
-        <a:p>
-          <a:pPr>
-            <a:lnSpc>
-              <a:spcPct val="100000"/>
-            </a:lnSpc>
-          </a:pPr>
-          <a:r>
-            <a:rPr lang="en-US" dirty="0"/>
-            <a:t>Additionally, they will also perform validation of the supplied parameters.</a:t>
-          </a:r>
-        </a:p>
-      </dgm:t>
-    </dgm:pt>
-    <dgm:pt modelId="{AF3000A7-0375-4FA4-B30C-7D0027C5A577}" type="parTrans" cxnId="{31032E6F-283D-4219-981D-934A8C3F1D57}">
-      <dgm:prSet/>
-      <dgm:spPr/>
-      <dgm:t>
-        <a:bodyPr/>
-        <a:lstStyle/>
-        <a:p>
-          <a:endParaRPr lang="en-US"/>
-        </a:p>
-      </dgm:t>
-    </dgm:pt>
-    <dgm:pt modelId="{A35B9477-3565-4F41-85B7-3C421108E7F6}" type="sibTrans" cxnId="{31032E6F-283D-4219-981D-934A8C3F1D57}">
-      <dgm:prSet/>
-      <dgm:spPr/>
-      <dgm:t>
-        <a:bodyPr/>
-        <a:lstStyle/>
-        <a:p>
-          <a:endParaRPr lang="en-US"/>
-        </a:p>
-      </dgm:t>
-    </dgm:pt>
-    <dgm:pt modelId="{3171E97B-CDE9-41AD-B264-8ADEE4D73563}" type="pres">
-      <dgm:prSet presAssocID="{996C4E6A-2C60-4428-8C91-27910EF058EC}" presName="Name0" presStyleCnt="0">
-        <dgm:presLayoutVars>
-          <dgm:dir/>
-          <dgm:resizeHandles val="exact"/>
-        </dgm:presLayoutVars>
-      </dgm:prSet>
-      <dgm:spPr/>
-    </dgm:pt>
-    <dgm:pt modelId="{673D3BE1-0B49-408D-A9B7-2ACE218FD35D}" type="pres">
-      <dgm:prSet presAssocID="{D594FA1A-CAFE-4FC9-B29F-017F3AF2316D}" presName="compNode" presStyleCnt="0"/>
-      <dgm:spPr/>
-    </dgm:pt>
-    <dgm:pt modelId="{018F7438-E01D-44D7-ADD6-157BC62500E3}" type="pres">
-      <dgm:prSet presAssocID="{D594FA1A-CAFE-4FC9-B29F-017F3AF2316D}" presName="pictRect" presStyleLbl="revTx" presStyleIdx="0" presStyleCnt="6">
-        <dgm:presLayoutVars>
-          <dgm:chMax val="0"/>
-          <dgm:bulletEnabled/>
-        </dgm:presLayoutVars>
-      </dgm:prSet>
-      <dgm:spPr/>
-    </dgm:pt>
-    <dgm:pt modelId="{5C90C3CA-0AA3-4EBE-B50C-5D1938624D21}" type="pres">
-      <dgm:prSet presAssocID="{D594FA1A-CAFE-4FC9-B29F-017F3AF2316D}" presName="textRect" presStyleLbl="revTx" presStyleIdx="1" presStyleCnt="6">
-        <dgm:presLayoutVars>
-          <dgm:bulletEnabled/>
-        </dgm:presLayoutVars>
-      </dgm:prSet>
-      <dgm:spPr/>
-    </dgm:pt>
-    <dgm:pt modelId="{4CD37533-18BB-44AF-9438-CA8C06D267FF}" type="pres">
-      <dgm:prSet presAssocID="{3AB04008-29BA-487D-8C45-AE18FA21868B}" presName="sibTrans" presStyleLbl="sibTrans2D1" presStyleIdx="0" presStyleCnt="0"/>
-      <dgm:spPr/>
-    </dgm:pt>
-    <dgm:pt modelId="{4A15BD43-FC5C-486B-BBDD-003A13A15493}" type="pres">
-      <dgm:prSet presAssocID="{768B9187-70A7-4F24-98C9-4549D9A80F20}" presName="compNode" presStyleCnt="0"/>
-      <dgm:spPr/>
-    </dgm:pt>
-    <dgm:pt modelId="{58CF0B87-5490-46B7-A456-64A277CB332C}" type="pres">
-      <dgm:prSet presAssocID="{768B9187-70A7-4F24-98C9-4549D9A80F20}" presName="pictRect" presStyleLbl="revTx" presStyleIdx="2" presStyleCnt="6">
-        <dgm:presLayoutVars>
-          <dgm:chMax val="0"/>
-          <dgm:bulletEnabled/>
-        </dgm:presLayoutVars>
-      </dgm:prSet>
-      <dgm:spPr/>
-    </dgm:pt>
-    <dgm:pt modelId="{8BB355F9-6CC2-4480-9B7E-D892D65FD34C}" type="pres">
-      <dgm:prSet presAssocID="{768B9187-70A7-4F24-98C9-4549D9A80F20}" presName="textRect" presStyleLbl="revTx" presStyleIdx="3" presStyleCnt="6" custLinFactNeighborX="0" custLinFactNeighborY="3582">
-        <dgm:presLayoutVars>
-          <dgm:bulletEnabled/>
-        </dgm:presLayoutVars>
-      </dgm:prSet>
-      <dgm:spPr/>
-    </dgm:pt>
-    <dgm:pt modelId="{412E2C94-E9BF-4E2B-961F-50EF83661C9E}" type="pres">
-      <dgm:prSet presAssocID="{E137F926-3C8F-4C45-8350-903EA88D75AF}" presName="sibTrans" presStyleLbl="sibTrans2D1" presStyleIdx="0" presStyleCnt="0"/>
-      <dgm:spPr/>
-    </dgm:pt>
-    <dgm:pt modelId="{00797D44-CAE9-428C-9B5E-3CE638B13212}" type="pres">
-      <dgm:prSet presAssocID="{FBA685A8-C4ED-4A44-BA15-A95087C22363}" presName="compNode" presStyleCnt="0"/>
-      <dgm:spPr/>
-    </dgm:pt>
-    <dgm:pt modelId="{E38D88DE-6630-449F-B815-64F25EB69547}" type="pres">
-      <dgm:prSet presAssocID="{FBA685A8-C4ED-4A44-BA15-A95087C22363}" presName="pictRect" presStyleLbl="revTx" presStyleIdx="4" presStyleCnt="6">
-        <dgm:presLayoutVars>
-          <dgm:chMax val="0"/>
-          <dgm:bulletEnabled/>
-        </dgm:presLayoutVars>
-      </dgm:prSet>
-      <dgm:spPr/>
-    </dgm:pt>
-    <dgm:pt modelId="{6BD7537A-36A9-42F0-9C36-0D4BA2D0752A}" type="pres">
-      <dgm:prSet presAssocID="{FBA685A8-C4ED-4A44-BA15-A95087C22363}" presName="textRect" presStyleLbl="revTx" presStyleIdx="5" presStyleCnt="6">
-        <dgm:presLayoutVars>
-          <dgm:bulletEnabled/>
-        </dgm:presLayoutVars>
-      </dgm:prSet>
-      <dgm:spPr/>
-    </dgm:pt>
-  </dgm:ptLst>
-  <dgm:cxnLst>
-    <dgm:cxn modelId="{CECC1115-8D04-4BE9-A207-B030BD568392}" srcId="{996C4E6A-2C60-4428-8C91-27910EF058EC}" destId="{D594FA1A-CAFE-4FC9-B29F-017F3AF2316D}" srcOrd="0" destOrd="0" parTransId="{B692412B-C32F-404E-A62A-E42191694563}" sibTransId="{3AB04008-29BA-487D-8C45-AE18FA21868B}"/>
-    <dgm:cxn modelId="{1F3DF617-CC3F-4D66-8EA6-35BB1DC8CBA6}" type="presOf" srcId="{4C74B0FE-0F44-43D7-940D-B9AF6ABF1025}" destId="{8BB355F9-6CC2-4480-9B7E-D892D65FD34C}" srcOrd="0" destOrd="0" presId="urn:microsoft.com/office/officeart/2024/3/layout/hArchList1"/>
-    <dgm:cxn modelId="{F2BA5920-A477-487A-BF0F-C34CB4B62146}" type="presOf" srcId="{FABA06FE-F150-48B5-B3D7-2915E3C41ABD}" destId="{6BD7537A-36A9-42F0-9C36-0D4BA2D0752A}" srcOrd="0" destOrd="0" presId="urn:microsoft.com/office/officeart/2024/3/layout/hArchList1"/>
-    <dgm:cxn modelId="{A340B23A-91D0-462C-A679-3ACAAB787D70}" type="presOf" srcId="{768B9187-70A7-4F24-98C9-4549D9A80F20}" destId="{58CF0B87-5490-46B7-A456-64A277CB332C}" srcOrd="0" destOrd="0" presId="urn:microsoft.com/office/officeart/2024/3/layout/hArchList1"/>
-    <dgm:cxn modelId="{1FF11245-068A-4CA3-BCBC-AA141B75607D}" srcId="{D594FA1A-CAFE-4FC9-B29F-017F3AF2316D}" destId="{06204C76-8052-4671-8722-9895BD95AC98}" srcOrd="0" destOrd="0" parTransId="{0923777E-212F-46F7-9676-1B1CD76B367F}" sibTransId="{2AE3F090-A320-4B38-A931-78BE74ADF0F7}"/>
-    <dgm:cxn modelId="{31032E6F-283D-4219-981D-934A8C3F1D57}" srcId="{FBA685A8-C4ED-4A44-BA15-A95087C22363}" destId="{FABA06FE-F150-48B5-B3D7-2915E3C41ABD}" srcOrd="0" destOrd="0" parTransId="{AF3000A7-0375-4FA4-B30C-7D0027C5A577}" sibTransId="{A35B9477-3565-4F41-85B7-3C421108E7F6}"/>
-    <dgm:cxn modelId="{F7F0874F-D139-4205-A17A-D7D9567787E6}" type="presOf" srcId="{996C4E6A-2C60-4428-8C91-27910EF058EC}" destId="{3171E97B-CDE9-41AD-B264-8ADEE4D73563}" srcOrd="0" destOrd="0" presId="urn:microsoft.com/office/officeart/2024/3/layout/hArchList1"/>
-    <dgm:cxn modelId="{A939996F-AA57-4AB8-94FF-5D1362537617}" type="presOf" srcId="{3AB04008-29BA-487D-8C45-AE18FA21868B}" destId="{4CD37533-18BB-44AF-9438-CA8C06D267FF}" srcOrd="0" destOrd="0" presId="urn:microsoft.com/office/officeart/2024/3/layout/hArchList1"/>
-    <dgm:cxn modelId="{83C57875-C8C0-42D4-A258-93D49EA82CD8}" type="presOf" srcId="{D594FA1A-CAFE-4FC9-B29F-017F3AF2316D}" destId="{018F7438-E01D-44D7-ADD6-157BC62500E3}" srcOrd="0" destOrd="0" presId="urn:microsoft.com/office/officeart/2024/3/layout/hArchList1"/>
-    <dgm:cxn modelId="{741CCF7E-FAFA-4680-999D-03CF38C0793B}" srcId="{996C4E6A-2C60-4428-8C91-27910EF058EC}" destId="{FBA685A8-C4ED-4A44-BA15-A95087C22363}" srcOrd="2" destOrd="0" parTransId="{DF0B6627-E6C7-4B6F-AEF0-D5B4D98FAE0D}" sibTransId="{AD175B27-BF85-41B6-9B87-24460515CD3C}"/>
-    <dgm:cxn modelId="{D7BB7C97-F788-497C-BCAA-B9131F94E09F}" type="presOf" srcId="{06204C76-8052-4671-8722-9895BD95AC98}" destId="{5C90C3CA-0AA3-4EBE-B50C-5D1938624D21}" srcOrd="0" destOrd="0" presId="urn:microsoft.com/office/officeart/2024/3/layout/hArchList1"/>
-    <dgm:cxn modelId="{3288A1A6-BC96-42D9-B282-F903D3D28B27}" srcId="{768B9187-70A7-4F24-98C9-4549D9A80F20}" destId="{4C74B0FE-0F44-43D7-940D-B9AF6ABF1025}" srcOrd="0" destOrd="0" parTransId="{E239FEBF-B4AE-47D3-8223-FDECC72F0B62}" sibTransId="{44570744-E566-439D-B1FF-599460901ED9}"/>
-    <dgm:cxn modelId="{D39160A8-01E5-4CBB-83C0-E26188120B2B}" type="presOf" srcId="{FBA685A8-C4ED-4A44-BA15-A95087C22363}" destId="{E38D88DE-6630-449F-B815-64F25EB69547}" srcOrd="0" destOrd="0" presId="urn:microsoft.com/office/officeart/2024/3/layout/hArchList1"/>
-    <dgm:cxn modelId="{2D4E08CE-615F-4DDD-B3D3-2BFE9E67E070}" type="presOf" srcId="{E137F926-3C8F-4C45-8350-903EA88D75AF}" destId="{412E2C94-E9BF-4E2B-961F-50EF83661C9E}" srcOrd="0" destOrd="0" presId="urn:microsoft.com/office/officeart/2024/3/layout/hArchList1"/>
-    <dgm:cxn modelId="{0FF7CFDA-06D0-49E7-971D-B87E044D11AB}" srcId="{996C4E6A-2C60-4428-8C91-27910EF058EC}" destId="{768B9187-70A7-4F24-98C9-4549D9A80F20}" srcOrd="1" destOrd="0" parTransId="{28680839-1F10-452B-8A00-49D86D2208FE}" sibTransId="{E137F926-3C8F-4C45-8350-903EA88D75AF}"/>
-    <dgm:cxn modelId="{582F0F5E-244F-45D2-B023-A57BD75D1EC1}" type="presParOf" srcId="{3171E97B-CDE9-41AD-B264-8ADEE4D73563}" destId="{673D3BE1-0B49-408D-A9B7-2ACE218FD35D}" srcOrd="0" destOrd="0" presId="urn:microsoft.com/office/officeart/2024/3/layout/hArchList1"/>
-    <dgm:cxn modelId="{A548ED9C-046D-4BB1-8D3C-6FD046C27F60}" type="presParOf" srcId="{673D3BE1-0B49-408D-A9B7-2ACE218FD35D}" destId="{018F7438-E01D-44D7-ADD6-157BC62500E3}" srcOrd="0" destOrd="0" presId="urn:microsoft.com/office/officeart/2024/3/layout/hArchList1"/>
-    <dgm:cxn modelId="{5643C7C9-5160-4BEC-9A38-173A21075E9B}" type="presParOf" srcId="{673D3BE1-0B49-408D-A9B7-2ACE218FD35D}" destId="{5C90C3CA-0AA3-4EBE-B50C-5D1938624D21}" srcOrd="1" destOrd="0" presId="urn:microsoft.com/office/officeart/2024/3/layout/hArchList1"/>
-    <dgm:cxn modelId="{503658CB-B4DE-40D1-A7FE-6D4AA57F070B}" type="presParOf" srcId="{3171E97B-CDE9-41AD-B264-8ADEE4D73563}" destId="{4CD37533-18BB-44AF-9438-CA8C06D267FF}" srcOrd="1" destOrd="0" presId="urn:microsoft.com/office/officeart/2024/3/layout/hArchList1"/>
-    <dgm:cxn modelId="{B502C618-10E0-4DFC-8F21-DC74D44E314E}" type="presParOf" srcId="{3171E97B-CDE9-41AD-B264-8ADEE4D73563}" destId="{4A15BD43-FC5C-486B-BBDD-003A13A15493}" srcOrd="2" destOrd="0" presId="urn:microsoft.com/office/officeart/2024/3/layout/hArchList1"/>
-    <dgm:cxn modelId="{74482876-705F-4982-9BF6-7250ABFA8208}" type="presParOf" srcId="{4A15BD43-FC5C-486B-BBDD-003A13A15493}" destId="{58CF0B87-5490-46B7-A456-64A277CB332C}" srcOrd="0" destOrd="0" presId="urn:microsoft.com/office/officeart/2024/3/layout/hArchList1"/>
-    <dgm:cxn modelId="{86291A9B-A7BD-4A17-9FA3-73B5F1192B26}" type="presParOf" srcId="{4A15BD43-FC5C-486B-BBDD-003A13A15493}" destId="{8BB355F9-6CC2-4480-9B7E-D892D65FD34C}" srcOrd="1" destOrd="0" presId="urn:microsoft.com/office/officeart/2024/3/layout/hArchList1"/>
-    <dgm:cxn modelId="{C6516519-8B52-440E-94E2-D6A7B633422D}" type="presParOf" srcId="{3171E97B-CDE9-41AD-B264-8ADEE4D73563}" destId="{412E2C94-E9BF-4E2B-961F-50EF83661C9E}" srcOrd="3" destOrd="0" presId="urn:microsoft.com/office/officeart/2024/3/layout/hArchList1"/>
-    <dgm:cxn modelId="{45AFFFFC-BE63-4F53-B4D2-90F1E0549280}" type="presParOf" srcId="{3171E97B-CDE9-41AD-B264-8ADEE4D73563}" destId="{00797D44-CAE9-428C-9B5E-3CE638B13212}" srcOrd="4" destOrd="0" presId="urn:microsoft.com/office/officeart/2024/3/layout/hArchList1"/>
-    <dgm:cxn modelId="{51AF1C5B-A6A3-4F7E-9193-00ED0BBF587E}" type="presParOf" srcId="{00797D44-CAE9-428C-9B5E-3CE638B13212}" destId="{E38D88DE-6630-449F-B815-64F25EB69547}" srcOrd="0" destOrd="0" presId="urn:microsoft.com/office/officeart/2024/3/layout/hArchList1"/>
-    <dgm:cxn modelId="{8A06BC44-10F2-41E6-A83A-BD9AC8EC5EB6}" type="presParOf" srcId="{00797D44-CAE9-428C-9B5E-3CE638B13212}" destId="{6BD7537A-36A9-42F0-9C36-0D4BA2D0752A}" srcOrd="1" destOrd="0" presId="urn:microsoft.com/office/officeart/2024/3/layout/hArchList1"/>
   </dgm:cxnLst>
   <dgm:bg/>
   <dgm:whole/>
@@ -6172,15 +4977,7 @@
           </a:pPr>
           <a:r>
             <a:rPr lang="en-US" sz="2500" kern="1200" dirty="0"/>
-            <a:t>You can call the </a:t>
-          </a:r>
-          <a:r>
-            <a:rPr lang="en-US" sz="2500" kern="1200" dirty="0" err="1"/>
-            <a:t>mthod</a:t>
-          </a:r>
-          <a:r>
-            <a:rPr lang="en-US" sz="2500" kern="1200" dirty="0"/>
-            <a:t> right away, which will execute the M code and return data</a:t>
+            <a:t>You can call the method right away, which will execute the M code and return data</a:t>
           </a:r>
           <a:endParaRPr lang="en-NL" sz="2500" kern="1200" dirty="0"/>
         </a:p>
@@ -6188,454 +4985,6 @@
       <dsp:txXfrm>
         <a:off x="6063019" y="1914827"/>
         <a:ext cx="2801413" cy="2514420"/>
-      </dsp:txXfrm>
-    </dsp:sp>
-  </dsp:spTree>
-</dsp:drawing>
-</file>
-
-<file path=ppt/diagrams/drawing4.xml><?xml version="1.0" encoding="utf-8"?>
-<dsp:drawing xmlns:dgm="http://schemas.openxmlformats.org/drawingml/2006/diagram" xmlns:dsp="http://schemas.microsoft.com/office/drawing/2008/diagram" xmlns:a="http://schemas.openxmlformats.org/drawingml/2006/main">
-  <dsp:spTree>
-    <dsp:nvGrpSpPr>
-      <dsp:cNvPr id="0" name=""/>
-      <dsp:cNvGrpSpPr/>
-    </dsp:nvGrpSpPr>
-    <dsp:grpSpPr/>
-    <dsp:sp modelId="{018F7438-E01D-44D7-ADD6-157BC62500E3}">
-      <dsp:nvSpPr>
-        <dsp:cNvPr id="0" name=""/>
-        <dsp:cNvSpPr/>
-      </dsp:nvSpPr>
-      <dsp:spPr>
-        <a:xfrm>
-          <a:off x="0" y="0"/>
-          <a:ext cx="2587153" cy="846926"/>
-        </a:xfrm>
-        <a:prstGeom prst="rect">
-          <a:avLst/>
-        </a:prstGeom>
-        <a:noFill/>
-        <a:ln>
-          <a:noFill/>
-        </a:ln>
-        <a:effectLst/>
-      </dsp:spPr>
-      <dsp:style>
-        <a:lnRef idx="0">
-          <a:scrgbClr r="0" g="0" b="0"/>
-        </a:lnRef>
-        <a:fillRef idx="0">
-          <a:scrgbClr r="0" g="0" b="0"/>
-        </a:fillRef>
-        <a:effectRef idx="0">
-          <a:scrgbClr r="0" g="0" b="0"/>
-        </a:effectRef>
-        <a:fontRef idx="minor"/>
-      </dsp:style>
-      <dsp:txBody>
-        <a:bodyPr spcFirstLastPara="0" vert="horz" wrap="square" lIns="137160" tIns="21590" rIns="21590" bIns="21590" numCol="1" spcCol="1270" anchor="t" anchorCtr="0">
-          <a:noAutofit/>
-        </a:bodyPr>
-        <a:lstStyle/>
-        <a:p>
-          <a:pPr marL="0" lvl="0" indent="0" algn="l" defTabSz="755650">
-            <a:lnSpc>
-              <a:spcPct val="100000"/>
-            </a:lnSpc>
-            <a:spcBef>
-              <a:spcPct val="0"/>
-            </a:spcBef>
-            <a:spcAft>
-              <a:spcPct val="35000"/>
-            </a:spcAft>
-            <a:buNone/>
-            <a:defRPr b="1"/>
-          </a:pPr>
-          <a:r>
-            <a:rPr lang="en-US" sz="1700" kern="1200" dirty="0"/>
-            <a:t>Simple to install,</a:t>
-          </a:r>
-        </a:p>
-        <a:p>
-          <a:pPr marL="0" lvl="0" indent="0" algn="l" defTabSz="755650">
-            <a:lnSpc>
-              <a:spcPct val="100000"/>
-            </a:lnSpc>
-            <a:spcBef>
-              <a:spcPct val="0"/>
-            </a:spcBef>
-            <a:spcAft>
-              <a:spcPct val="35000"/>
-            </a:spcAft>
-            <a:buNone/>
-            <a:defRPr b="1"/>
-          </a:pPr>
-          <a:r>
-            <a:rPr lang="en-US" sz="1700" kern="1200" dirty="0"/>
-            <a:t>Simple to run…</a:t>
-          </a:r>
-        </a:p>
-      </dsp:txBody>
-      <dsp:txXfrm>
-        <a:off x="0" y="0"/>
-        <a:ext cx="2587153" cy="846926"/>
-      </dsp:txXfrm>
-    </dsp:sp>
-    <dsp:sp modelId="{5C90C3CA-0AA3-4EBE-B50C-5D1938624D21}">
-      <dsp:nvSpPr>
-        <dsp:cNvPr id="0" name=""/>
-        <dsp:cNvSpPr/>
-      </dsp:nvSpPr>
-      <dsp:spPr>
-        <a:xfrm>
-          <a:off x="0" y="846926"/>
-          <a:ext cx="2587153" cy="2238564"/>
-        </a:xfrm>
-        <a:prstGeom prst="rect">
-          <a:avLst/>
-        </a:prstGeom>
-        <a:noFill/>
-        <a:ln>
-          <a:noFill/>
-        </a:ln>
-        <a:effectLst/>
-      </dsp:spPr>
-      <dsp:style>
-        <a:lnRef idx="0">
-          <a:scrgbClr r="0" g="0" b="0"/>
-        </a:lnRef>
-        <a:fillRef idx="0">
-          <a:scrgbClr r="0" g="0" b="0"/>
-        </a:fillRef>
-        <a:effectRef idx="0">
-          <a:scrgbClr r="0" g="0" b="0"/>
-        </a:effectRef>
-        <a:fontRef idx="minor"/>
-      </dsp:style>
-      <dsp:txBody>
-        <a:bodyPr spcFirstLastPara="0" vert="horz" wrap="square" lIns="137160" tIns="16510" rIns="16510" bIns="16510" numCol="1" spcCol="1270" anchor="t" anchorCtr="0">
-          <a:noAutofit/>
-        </a:bodyPr>
-        <a:lstStyle/>
-        <a:p>
-          <a:pPr marL="0" lvl="0" indent="0" algn="l" defTabSz="577850">
-            <a:lnSpc>
-              <a:spcPct val="100000"/>
-            </a:lnSpc>
-            <a:spcBef>
-              <a:spcPct val="0"/>
-            </a:spcBef>
-            <a:spcAft>
-              <a:spcPct val="35000"/>
-            </a:spcAft>
-            <a:buNone/>
-          </a:pPr>
-          <a:r>
-            <a:rPr lang="en-US" sz="1300" kern="1200" dirty="0"/>
-            <a:t>MIND Server gets installed as standard YottaDB plugin on top of your YottaDB installation with a one-liner command.</a:t>
-          </a:r>
-        </a:p>
-        <a:p>
-          <a:pPr marL="0" lvl="0" indent="0" algn="l" defTabSz="577850">
-            <a:lnSpc>
-              <a:spcPct val="100000"/>
-            </a:lnSpc>
-            <a:spcBef>
-              <a:spcPct val="0"/>
-            </a:spcBef>
-            <a:spcAft>
-              <a:spcPct val="35000"/>
-            </a:spcAft>
-            <a:buNone/>
-          </a:pPr>
-          <a:r>
-            <a:rPr lang="en-US" sz="1300" kern="1200" dirty="0"/>
-            <a:t>You can then either run it directly of configure it using the .conf file or command line switches.</a:t>
-          </a:r>
-        </a:p>
-      </dsp:txBody>
-      <dsp:txXfrm>
-        <a:off x="0" y="846926"/>
-        <a:ext cx="2587153" cy="2238564"/>
-      </dsp:txXfrm>
-    </dsp:sp>
-    <dsp:sp modelId="{58CF0B87-5490-46B7-A456-64A277CB332C}">
-      <dsp:nvSpPr>
-        <dsp:cNvPr id="0" name=""/>
-        <dsp:cNvSpPr/>
-      </dsp:nvSpPr>
-      <dsp:spPr>
-        <a:xfrm>
-          <a:off x="2845869" y="0"/>
-          <a:ext cx="2587153" cy="846926"/>
-        </a:xfrm>
-        <a:prstGeom prst="rect">
-          <a:avLst/>
-        </a:prstGeom>
-        <a:noFill/>
-        <a:ln>
-          <a:noFill/>
-        </a:ln>
-        <a:effectLst/>
-      </dsp:spPr>
-      <dsp:style>
-        <a:lnRef idx="0">
-          <a:scrgbClr r="0" g="0" b="0"/>
-        </a:lnRef>
-        <a:fillRef idx="0">
-          <a:scrgbClr r="0" g="0" b="0"/>
-        </a:fillRef>
-        <a:effectRef idx="0">
-          <a:scrgbClr r="0" g="0" b="0"/>
-        </a:effectRef>
-        <a:fontRef idx="minor"/>
-      </dsp:style>
-      <dsp:txBody>
-        <a:bodyPr spcFirstLastPara="0" vert="horz" wrap="square" lIns="137160" tIns="21590" rIns="21590" bIns="21590" numCol="1" spcCol="1270" anchor="t" anchorCtr="0">
-          <a:noAutofit/>
-        </a:bodyPr>
-        <a:lstStyle/>
-        <a:p>
-          <a:pPr marL="0" lvl="0" indent="0" algn="l" defTabSz="755650">
-            <a:lnSpc>
-              <a:spcPct val="100000"/>
-            </a:lnSpc>
-            <a:spcBef>
-              <a:spcPct val="0"/>
-            </a:spcBef>
-            <a:spcAft>
-              <a:spcPct val="35000"/>
-            </a:spcAft>
-            <a:buNone/>
-            <a:defRPr b="1"/>
-          </a:pPr>
-          <a:r>
-            <a:rPr lang="en-US" sz="1700" kern="1200" dirty="0"/>
-            <a:t>Designed putting both MUMPS and back-end developers first</a:t>
-          </a:r>
-        </a:p>
-      </dsp:txBody>
-      <dsp:txXfrm>
-        <a:off x="2845869" y="0"/>
-        <a:ext cx="2587153" cy="846926"/>
-      </dsp:txXfrm>
-    </dsp:sp>
-    <dsp:sp modelId="{8BB355F9-6CC2-4480-9B7E-D892D65FD34C}">
-      <dsp:nvSpPr>
-        <dsp:cNvPr id="0" name=""/>
-        <dsp:cNvSpPr/>
-      </dsp:nvSpPr>
-      <dsp:spPr>
-        <a:xfrm>
-          <a:off x="2845869" y="927112"/>
-          <a:ext cx="2587153" cy="2238564"/>
-        </a:xfrm>
-        <a:prstGeom prst="rect">
-          <a:avLst/>
-        </a:prstGeom>
-        <a:noFill/>
-        <a:ln>
-          <a:noFill/>
-        </a:ln>
-        <a:effectLst/>
-      </dsp:spPr>
-      <dsp:style>
-        <a:lnRef idx="0">
-          <a:scrgbClr r="0" g="0" b="0"/>
-        </a:lnRef>
-        <a:fillRef idx="0">
-          <a:scrgbClr r="0" g="0" b="0"/>
-        </a:fillRef>
-        <a:effectRef idx="0">
-          <a:scrgbClr r="0" g="0" b="0"/>
-        </a:effectRef>
-        <a:fontRef idx="minor"/>
-      </dsp:style>
-      <dsp:txBody>
-        <a:bodyPr spcFirstLastPara="0" vert="horz" wrap="square" lIns="137160" tIns="16510" rIns="16510" bIns="16510" numCol="1" spcCol="1270" anchor="t" anchorCtr="0">
-          <a:noAutofit/>
-        </a:bodyPr>
-        <a:lstStyle/>
-        <a:p>
-          <a:pPr marL="0" lvl="0" indent="0" algn="l" defTabSz="577850">
-            <a:lnSpc>
-              <a:spcPct val="100000"/>
-            </a:lnSpc>
-            <a:spcBef>
-              <a:spcPct val="0"/>
-            </a:spcBef>
-            <a:spcAft>
-              <a:spcPct val="35000"/>
-            </a:spcAft>
-            <a:buNone/>
-          </a:pPr>
-          <a:r>
-            <a:rPr lang="en-US" sz="1300" kern="1200" dirty="0"/>
-            <a:t>Keeping in mind that back-end languages use data-types and Objects, we created data translators to move data to and from YottaDB.</a:t>
-          </a:r>
-        </a:p>
-        <a:p>
-          <a:pPr marL="0" lvl="0" indent="0" algn="l" defTabSz="577850">
-            <a:lnSpc>
-              <a:spcPct val="100000"/>
-            </a:lnSpc>
-            <a:spcBef>
-              <a:spcPct val="0"/>
-            </a:spcBef>
-            <a:spcAft>
-              <a:spcPct val="35000"/>
-            </a:spcAft>
-            <a:buNone/>
-          </a:pPr>
-          <a:r>
-            <a:rPr lang="en-US" sz="1300" kern="1200" dirty="0"/>
-            <a:t>And, of course, we support JSON in both directions.</a:t>
-          </a:r>
-        </a:p>
-      </dsp:txBody>
-      <dsp:txXfrm>
-        <a:off x="2845869" y="927112"/>
-        <a:ext cx="2587153" cy="2238564"/>
-      </dsp:txXfrm>
-    </dsp:sp>
-    <dsp:sp modelId="{E38D88DE-6630-449F-B815-64F25EB69547}">
-      <dsp:nvSpPr>
-        <dsp:cNvPr id="0" name=""/>
-        <dsp:cNvSpPr/>
-      </dsp:nvSpPr>
-      <dsp:spPr>
-        <a:xfrm>
-          <a:off x="5691738" y="0"/>
-          <a:ext cx="2587153" cy="846926"/>
-        </a:xfrm>
-        <a:prstGeom prst="rect">
-          <a:avLst/>
-        </a:prstGeom>
-        <a:noFill/>
-        <a:ln>
-          <a:noFill/>
-        </a:ln>
-        <a:effectLst/>
-      </dsp:spPr>
-      <dsp:style>
-        <a:lnRef idx="0">
-          <a:scrgbClr r="0" g="0" b="0"/>
-        </a:lnRef>
-        <a:fillRef idx="0">
-          <a:scrgbClr r="0" g="0" b="0"/>
-        </a:fillRef>
-        <a:effectRef idx="0">
-          <a:scrgbClr r="0" g="0" b="0"/>
-        </a:effectRef>
-        <a:fontRef idx="minor"/>
-      </dsp:style>
-      <dsp:txBody>
-        <a:bodyPr spcFirstLastPara="0" vert="horz" wrap="square" lIns="137160" tIns="21590" rIns="21590" bIns="21590" numCol="1" spcCol="1270" anchor="t" anchorCtr="0">
-          <a:noAutofit/>
-        </a:bodyPr>
-        <a:lstStyle/>
-        <a:p>
-          <a:pPr marL="0" lvl="0" indent="0" algn="l" defTabSz="755650">
-            <a:lnSpc>
-              <a:spcPct val="100000"/>
-            </a:lnSpc>
-            <a:spcBef>
-              <a:spcPct val="0"/>
-            </a:spcBef>
-            <a:spcAft>
-              <a:spcPct val="35000"/>
-            </a:spcAft>
-            <a:buNone/>
-            <a:defRPr b="1"/>
-          </a:pPr>
-          <a:r>
-            <a:rPr lang="en-US" sz="1700" kern="1200" dirty="0"/>
-            <a:t>ZERO coding needed in the client (back-end) driver.</a:t>
-          </a:r>
-        </a:p>
-      </dsp:txBody>
-      <dsp:txXfrm>
-        <a:off x="5691738" y="0"/>
-        <a:ext cx="2587153" cy="846926"/>
-      </dsp:txXfrm>
-    </dsp:sp>
-    <dsp:sp modelId="{6BD7537A-36A9-42F0-9C36-0D4BA2D0752A}">
-      <dsp:nvSpPr>
-        <dsp:cNvPr id="0" name=""/>
-        <dsp:cNvSpPr/>
-      </dsp:nvSpPr>
-      <dsp:spPr>
-        <a:xfrm>
-          <a:off x="5691738" y="846926"/>
-          <a:ext cx="2587153" cy="2238564"/>
-        </a:xfrm>
-        <a:prstGeom prst="rect">
-          <a:avLst/>
-        </a:prstGeom>
-        <a:noFill/>
-        <a:ln>
-          <a:noFill/>
-        </a:ln>
-        <a:effectLst/>
-      </dsp:spPr>
-      <dsp:style>
-        <a:lnRef idx="0">
-          <a:scrgbClr r="0" g="0" b="0"/>
-        </a:lnRef>
-        <a:fillRef idx="0">
-          <a:scrgbClr r="0" g="0" b="0"/>
-        </a:fillRef>
-        <a:effectRef idx="0">
-          <a:scrgbClr r="0" g="0" b="0"/>
-        </a:effectRef>
-        <a:fontRef idx="minor"/>
-      </dsp:style>
-      <dsp:txBody>
-        <a:bodyPr spcFirstLastPara="0" vert="horz" wrap="square" lIns="137160" tIns="16510" rIns="16510" bIns="16510" numCol="1" spcCol="1270" anchor="t" anchorCtr="0">
-          <a:noAutofit/>
-        </a:bodyPr>
-        <a:lstStyle/>
-        <a:p>
-          <a:pPr marL="0" lvl="0" indent="0" algn="l" defTabSz="577850">
-            <a:lnSpc>
-              <a:spcPct val="100000"/>
-            </a:lnSpc>
-            <a:spcBef>
-              <a:spcPct val="0"/>
-            </a:spcBef>
-            <a:spcAft>
-              <a:spcPct val="35000"/>
-            </a:spcAft>
-            <a:buNone/>
-          </a:pPr>
-          <a:r>
-            <a:rPr lang="en-US" sz="1300" kern="1200" dirty="0"/>
-            <a:t>Once you describe your MUMPS functions / procedure in a JSON file, they will “magically” appear in the client driver and ready to use.</a:t>
-          </a:r>
-        </a:p>
-        <a:p>
-          <a:pPr marL="0" lvl="0" indent="0" algn="l" defTabSz="577850">
-            <a:lnSpc>
-              <a:spcPct val="100000"/>
-            </a:lnSpc>
-            <a:spcBef>
-              <a:spcPct val="0"/>
-            </a:spcBef>
-            <a:spcAft>
-              <a:spcPct val="35000"/>
-            </a:spcAft>
-            <a:buNone/>
-          </a:pPr>
-          <a:r>
-            <a:rPr lang="en-US" sz="1300" kern="1200" dirty="0"/>
-            <a:t>Additionally, they will also perform validation of the supplied parameters.</a:t>
-          </a:r>
-        </a:p>
-      </dsp:txBody>
-      <dsp:txXfrm>
-        <a:off x="5691738" y="846926"/>
-        <a:ext cx="2587153" cy="2238564"/>
       </dsp:txXfrm>
     </dsp:sp>
   </dsp:spTree>
@@ -8328,229 +6677,6 @@
 </dgm:layoutDef>
 </file>
 
-<file path=ppt/diagrams/layout4.xml><?xml version="1.0" encoding="utf-8"?>
-<dgm:layoutDef xmlns:dgm="http://schemas.openxmlformats.org/drawingml/2006/diagram" xmlns:a="http://schemas.openxmlformats.org/drawingml/2006/main" uniqueId="urn:microsoft.com/office/officeart/2024/3/layout/hArchList1">
-  <dgm:title val="Horizontal Text Blocks"/>
-  <dgm:desc val="Short bits of text with formatted headers. Use as an easier-to-read alternative to a bulleted list."/>
-  <dgm:catLst>
-    <dgm:cat type="list" pri="100"/>
-    <dgm:cat type="timeline" pri="500"/>
-    <dgm:cat type="process" pri="600"/>
-  </dgm:catLst>
-  <dgm:sampData>
-    <dgm:dataModel>
-      <dgm:ptLst>
-        <dgm:pt modelId="0" type="doc"/>
-        <dgm:pt modelId="1">
-          <dgm:prSet phldr="1"/>
-        </dgm:pt>
-        <dgm:pt modelId="2">
-          <dgm:prSet phldr="1"/>
-        </dgm:pt>
-        <dgm:pt modelId="3">
-          <dgm:prSet phldr="1"/>
-        </dgm:pt>
-        <dgm:pt modelId="4">
-          <dgm:prSet phldr="1"/>
-        </dgm:pt>
-      </dgm:ptLst>
-      <dgm:cxnLst>
-        <dgm:cxn modelId="7" srcId="0" destId="1" srcOrd="0" destOrd="0"/>
-        <dgm:cxn modelId="8" srcId="0" destId="2" srcOrd="1" destOrd="0"/>
-        <dgm:cxn modelId="9" srcId="0" destId="3" srcOrd="2" destOrd="0"/>
-        <dgm:cxn modelId="10" srcId="0" destId="4" srcOrd="3" destOrd="0"/>
-      </dgm:cxnLst>
-      <dgm:bg/>
-      <dgm:whole/>
-    </dgm:dataModel>
-  </dgm:sampData>
-  <dgm:styleData>
-    <dgm:dataModel>
-      <dgm:ptLst>
-        <dgm:pt modelId="0" type="doc"/>
-        <dgm:pt modelId="1"/>
-        <dgm:pt modelId="2"/>
-      </dgm:ptLst>
-      <dgm:cxnLst>
-        <dgm:cxn modelId="3" srcId="0" destId="1" srcOrd="0" destOrd="0"/>
-        <dgm:cxn modelId="4" srcId="0" destId="2" srcOrd="1" destOrd="0"/>
-      </dgm:cxnLst>
-      <dgm:bg/>
-      <dgm:whole/>
-    </dgm:dataModel>
-  </dgm:styleData>
-  <dgm:clrData>
-    <dgm:dataModel>
-      <dgm:ptLst>
-        <dgm:pt modelId="0" type="doc"/>
-        <dgm:pt modelId="1"/>
-        <dgm:pt modelId="2"/>
-        <dgm:pt modelId="3"/>
-        <dgm:pt modelId="4"/>
-      </dgm:ptLst>
-      <dgm:cxnLst>
-        <dgm:cxn modelId="5" srcId="0" destId="1" srcOrd="0" destOrd="0"/>
-        <dgm:cxn modelId="6" srcId="0" destId="2" srcOrd="1" destOrd="0"/>
-        <dgm:cxn modelId="7" srcId="0" destId="3" srcOrd="2" destOrd="0"/>
-        <dgm:cxn modelId="8" srcId="0" destId="4" srcOrd="3" destOrd="0"/>
-      </dgm:cxnLst>
-      <dgm:bg/>
-      <dgm:whole/>
-    </dgm:dataModel>
-  </dgm:clrData>
-  <dgm:layoutNode name="Name0">
-    <dgm:varLst>
-      <dgm:dir/>
-      <dgm:resizeHandles val="exact"/>
-    </dgm:varLst>
-    <dgm:choose name="Name1">
-      <dgm:if name="Name2" func="var" arg="dir" op="equ" val="norm">
-        <dgm:alg type="lin">
-          <dgm:param type="vertAlign" val="t"/>
-          <dgm:param type="horzAlign" val="l"/>
-        </dgm:alg>
-      </dgm:if>
-      <dgm:else name="Name3">
-        <dgm:alg type="lin">
-          <dgm:param type="vertAlign" val="t"/>
-          <dgm:param type="horzAlign" val="r"/>
-        </dgm:alg>
-      </dgm:else>
-    </dgm:choose>
-    <dgm:presOf/>
-    <dgm:constrLst>
-      <dgm:constr type="primFontSz" for="des" forName="pictRect" op="equ" val="18"/>
-      <dgm:constr type="primFontSz" for="des" forName="textRect" refType="primFontSz" refFor="des" refForName="pictRect" op="equ" fact="0.77"/>
-      <dgm:constr type="w" for="ch" forName="compNode" refType="w"/>
-      <dgm:constr type="h" for="ch" forName="compNode" refType="h"/>
-      <dgm:constr type="h" for="des" forName="pictRect" op="equ"/>
-      <dgm:constr type="h" for="des" forName="pictRect" refType="primFontSz" refFor="des" refForName="pictRect" fact="3"/>
-      <dgm:constr type="w" for="ch" ptType="sibTrans" refType="w" refFor="ch" refForName="compNode" op="equ" fact="0.1"/>
-      <dgm:constr type="sp" refType="w" refFor="ch" refForName="compNode" op="equ" fact="0.1"/>
-    </dgm:constrLst>
-    <dgm:ruleLst/>
-    <dgm:forEach name="Name4" axis="ch" ptType="node" cnt="20">
-      <dgm:layoutNode name="compNode">
-        <dgm:alg type="composite"/>
-        <dgm:shape xmlns:r="http://schemas.openxmlformats.org/officeDocument/2006/relationships" r:blip="">
-          <dgm:adjLst/>
-        </dgm:shape>
-        <dgm:presOf axis="self"/>
-        <dgm:constrLst>
-          <dgm:constr type="h" for="ch" forName="pictRect" refType="h" fact="0.1"/>
-          <dgm:constr type="l" for="ch" forName="pictRect"/>
-          <dgm:constr type="t" for="ch" forName="pictRect"/>
-          <dgm:constr type="l" for="ch" forName="textRect"/>
-          <dgm:constr type="t" for="ch" forName="textRect" refType="b" refFor="ch" refForName="pictRect"/>
-        </dgm:constrLst>
-        <dgm:ruleLst/>
-        <dgm:layoutNode name="pictRect" styleLbl="revTx">
-          <dgm:varLst>
-            <dgm:chMax val="0"/>
-            <dgm:bulletEnabled/>
-          </dgm:varLst>
-          <dgm:alg type="tx">
-            <dgm:param type="parTxLTRAlign" val="l"/>
-            <dgm:param type="parTxRTLAlign" val="r"/>
-            <dgm:param type="txAnchorVert" val="t"/>
-          </dgm:alg>
-          <dgm:shape xmlns:r="http://schemas.openxmlformats.org/officeDocument/2006/relationships" type="rect" r:blip="">
-            <dgm:adjLst/>
-          </dgm:shape>
-          <dgm:presOf axis="self"/>
-          <dgm:choose name="choosePictRectConstraints">
-            <dgm:if name="ifPictRectConstraints" func="var" arg="dir" op="equ" val="norm">
-              <dgm:constrLst>
-                <dgm:constr type="h" refType="w" op="lte" fact="0.4"/>
-                <dgm:constr type="lMarg" val="10.8"/>
-                <dgm:constr type="rMarg" refType="primFontSz" fact="0.1"/>
-                <dgm:constr type="tMarg" refType="primFontSz" fact="0.1"/>
-                <dgm:constr type="bMarg" refType="primFontSz" fact="0.1"/>
-              </dgm:constrLst>
-            </dgm:if>
-            <dgm:else name="elsePictRectConstraints">
-              <dgm:constrLst>
-                <dgm:constr type="lMarg" refType="primFontSz" fact="0.1"/>
-                <dgm:constr type="rMarg" val="10.8"/>
-                <dgm:constr type="tMarg" refType="primFontSz" fact="0.1"/>
-                <dgm:constr type="bMarg" refType="primFontSz" fact="0.1"/>
-              </dgm:constrLst>
-            </dgm:else>
-          </dgm:choose>
-          <dgm:ruleLst>
-            <dgm:rule type="h" val="INF" fact="NaN" max="NaN"/>
-            <dgm:rule type="primFontSz" val="5" fact="NaN" max="NaN"/>
-          </dgm:ruleLst>
-        </dgm:layoutNode>
-        <dgm:layoutNode name="textRect" styleLbl="revTx">
-          <dgm:varLst>
-            <dgm:bulletEnabled/>
-          </dgm:varLst>
-          <dgm:alg type="tx">
-            <dgm:param type="parTxLTRAlign" val="l"/>
-            <dgm:param type="parTxRTLAlign" val="r"/>
-            <dgm:param type="txAnchorVert" val="t"/>
-          </dgm:alg>
-          <dgm:shape xmlns:r="http://schemas.openxmlformats.org/officeDocument/2006/relationships" type="rect" r:blip="">
-            <dgm:adjLst/>
-          </dgm:shape>
-          <dgm:presOf axis="des" ptType="node"/>
-          <dgm:choose name="chooseTextRectConstraints">
-            <dgm:if name="ifTextRectConstraints" func="var" arg="dir" op="equ" val="norm">
-              <dgm:constrLst>
-                <dgm:constr type="lMarg" val="10.8"/>
-                <dgm:constr type="rMarg" refType="primFontSz" fact="0.1"/>
-                <dgm:constr type="tMarg" refType="primFontSz" fact="0.1"/>
-                <dgm:constr type="bMarg" refType="primFontSz" fact="0.1"/>
-              </dgm:constrLst>
-            </dgm:if>
-            <dgm:else name="elseTextRectConstraints">
-              <dgm:constrLst>
-                <dgm:constr type="lMarg" refType="primFontSz" fact="0.1"/>
-                <dgm:constr type="rMarg" val="10.8"/>
-                <dgm:constr type="tMarg" refType="primFontSz" fact="0.1"/>
-                <dgm:constr type="bMarg" refType="primFontSz" fact="0.1"/>
-              </dgm:constrLst>
-            </dgm:else>
-          </dgm:choose>
-          <dgm:ruleLst>
-            <dgm:rule type="primFontSz" val="5" fact="NaN" max="NaN"/>
-          </dgm:ruleLst>
-        </dgm:layoutNode>
-      </dgm:layoutNode>
-      <dgm:forEach name="Name5" axis="followSib" ptType="sibTrans" cnt="1">
-        <dgm:layoutNode name="sibTrans">
-          <dgm:alg type="sp"/>
-          <dgm:shape xmlns:r="http://schemas.openxmlformats.org/officeDocument/2006/relationships" type="rect" r:blip="" hideGeom="1">
-            <dgm:adjLst/>
-          </dgm:shape>
-          <dgm:presOf axis="self"/>
-          <dgm:constrLst/>
-          <dgm:ruleLst/>
-        </dgm:layoutNode>
-      </dgm:forEach>
-    </dgm:forEach>
-  </dgm:layoutNode>
-  <dgm:extLst>
-    <a:ext uri="{68A01E43-0DF5-4B5B-8FA6-DAF915123BFB}">
-      <dgm1612:lstStyle xmlns:dgm1612="http://schemas.microsoft.com/office/drawing/2016/12/diagram">
-        <a:lvl1pPr>
-          <a:lnSpc>
-            <a:spcPct val="100000"/>
-          </a:lnSpc>
-          <a:defRPr b="1"/>
-        </a:lvl1pPr>
-        <a:lvl2pPr>
-          <a:lnSpc>
-            <a:spcPct val="100000"/>
-          </a:lnSpc>
-        </a:lvl2pPr>
-      </dgm1612:lstStyle>
-    </a:ext>
-  </dgm:extLst>
-</dgm:layoutDef>
-</file>
-
 <file path=ppt/diagrams/quickStyle1.xml><?xml version="1.0" encoding="utf-8"?>
 <dgm:styleDef xmlns:dgm="http://schemas.openxmlformats.org/drawingml/2006/diagram" xmlns:a="http://schemas.openxmlformats.org/drawingml/2006/main" uniqueId="urn:microsoft.com/office/officeart/2005/8/quickstyle/simple1">
   <dgm:title val=""/>
@@ -10620,1040 +8746,6 @@
 </file>
 
 <file path=ppt/diagrams/quickStyle3.xml><?xml version="1.0" encoding="utf-8"?>
-<dgm:styleDef xmlns:dgm="http://schemas.openxmlformats.org/drawingml/2006/diagram" xmlns:a="http://schemas.openxmlformats.org/drawingml/2006/main" uniqueId="urn:microsoft.com/office/officeart/2005/8/quickstyle/simple1">
-  <dgm:title val=""/>
-  <dgm:desc val=""/>
-  <dgm:catLst>
-    <dgm:cat type="simple" pri="10100"/>
-  </dgm:catLst>
-  <dgm:scene3d>
-    <a:camera prst="orthographicFront"/>
-    <a:lightRig rig="threePt" dir="t"/>
-  </dgm:scene3d>
-  <dgm:styleLbl name="node0">
-    <dgm:scene3d>
-      <a:camera prst="orthographicFront"/>
-      <a:lightRig rig="threePt" dir="t"/>
-    </dgm:scene3d>
-    <dgm:sp3d/>
-    <dgm:txPr/>
-    <dgm:style>
-      <a:lnRef idx="2">
-        <a:scrgbClr r="0" g="0" b="0"/>
-      </a:lnRef>
-      <a:fillRef idx="1">
-        <a:scrgbClr r="0" g="0" b="0"/>
-      </a:fillRef>
-      <a:effectRef idx="0">
-        <a:scrgbClr r="0" g="0" b="0"/>
-      </a:effectRef>
-      <a:fontRef idx="minor">
-        <a:schemeClr val="lt1"/>
-      </a:fontRef>
-    </dgm:style>
-  </dgm:styleLbl>
-  <dgm:styleLbl name="lnNode1">
-    <dgm:scene3d>
-      <a:camera prst="orthographicFront"/>
-      <a:lightRig rig="threePt" dir="t"/>
-    </dgm:scene3d>
-    <dgm:sp3d/>
-    <dgm:txPr/>
-    <dgm:style>
-      <a:lnRef idx="2">
-        <a:scrgbClr r="0" g="0" b="0"/>
-      </a:lnRef>
-      <a:fillRef idx="1">
-        <a:scrgbClr r="0" g="0" b="0"/>
-      </a:fillRef>
-      <a:effectRef idx="0">
-        <a:scrgbClr r="0" g="0" b="0"/>
-      </a:effectRef>
-      <a:fontRef idx="minor">
-        <a:schemeClr val="lt1"/>
-      </a:fontRef>
-    </dgm:style>
-  </dgm:styleLbl>
-  <dgm:styleLbl name="vennNode1">
-    <dgm:scene3d>
-      <a:camera prst="orthographicFront"/>
-      <a:lightRig rig="threePt" dir="t"/>
-    </dgm:scene3d>
-    <dgm:sp3d/>
-    <dgm:txPr/>
-    <dgm:style>
-      <a:lnRef idx="2">
-        <a:scrgbClr r="0" g="0" b="0"/>
-      </a:lnRef>
-      <a:fillRef idx="1">
-        <a:scrgbClr r="0" g="0" b="0"/>
-      </a:fillRef>
-      <a:effectRef idx="0">
-        <a:scrgbClr r="0" g="0" b="0"/>
-      </a:effectRef>
-      <a:fontRef idx="minor">
-        <a:schemeClr val="tx1"/>
-      </a:fontRef>
-    </dgm:style>
-  </dgm:styleLbl>
-  <dgm:styleLbl name="alignNode1">
-    <dgm:scene3d>
-      <a:camera prst="orthographicFront"/>
-      <a:lightRig rig="threePt" dir="t"/>
-    </dgm:scene3d>
-    <dgm:sp3d/>
-    <dgm:txPr/>
-    <dgm:style>
-      <a:lnRef idx="2">
-        <a:scrgbClr r="0" g="0" b="0"/>
-      </a:lnRef>
-      <a:fillRef idx="1">
-        <a:scrgbClr r="0" g="0" b="0"/>
-      </a:fillRef>
-      <a:effectRef idx="0">
-        <a:scrgbClr r="0" g="0" b="0"/>
-      </a:effectRef>
-      <a:fontRef idx="minor">
-        <a:schemeClr val="lt1"/>
-      </a:fontRef>
-    </dgm:style>
-  </dgm:styleLbl>
-  <dgm:styleLbl name="node1">
-    <dgm:scene3d>
-      <a:camera prst="orthographicFront"/>
-      <a:lightRig rig="threePt" dir="t"/>
-    </dgm:scene3d>
-    <dgm:sp3d/>
-    <dgm:txPr/>
-    <dgm:style>
-      <a:lnRef idx="2">
-        <a:scrgbClr r="0" g="0" b="0"/>
-      </a:lnRef>
-      <a:fillRef idx="1">
-        <a:scrgbClr r="0" g="0" b="0"/>
-      </a:fillRef>
-      <a:effectRef idx="0">
-        <a:scrgbClr r="0" g="0" b="0"/>
-      </a:effectRef>
-      <a:fontRef idx="minor">
-        <a:schemeClr val="lt1"/>
-      </a:fontRef>
-    </dgm:style>
-  </dgm:styleLbl>
-  <dgm:styleLbl name="node2">
-    <dgm:scene3d>
-      <a:camera prst="orthographicFront"/>
-      <a:lightRig rig="threePt" dir="t"/>
-    </dgm:scene3d>
-    <dgm:sp3d/>
-    <dgm:txPr/>
-    <dgm:style>
-      <a:lnRef idx="2">
-        <a:scrgbClr r="0" g="0" b="0"/>
-      </a:lnRef>
-      <a:fillRef idx="1">
-        <a:scrgbClr r="0" g="0" b="0"/>
-      </a:fillRef>
-      <a:effectRef idx="0">
-        <a:scrgbClr r="0" g="0" b="0"/>
-      </a:effectRef>
-      <a:fontRef idx="minor">
-        <a:schemeClr val="lt1"/>
-      </a:fontRef>
-    </dgm:style>
-  </dgm:styleLbl>
-  <dgm:styleLbl name="node3">
-    <dgm:scene3d>
-      <a:camera prst="orthographicFront"/>
-      <a:lightRig rig="threePt" dir="t"/>
-    </dgm:scene3d>
-    <dgm:sp3d/>
-    <dgm:txPr/>
-    <dgm:style>
-      <a:lnRef idx="2">
-        <a:scrgbClr r="0" g="0" b="0"/>
-      </a:lnRef>
-      <a:fillRef idx="1">
-        <a:scrgbClr r="0" g="0" b="0"/>
-      </a:fillRef>
-      <a:effectRef idx="0">
-        <a:scrgbClr r="0" g="0" b="0"/>
-      </a:effectRef>
-      <a:fontRef idx="minor">
-        <a:schemeClr val="lt1"/>
-      </a:fontRef>
-    </dgm:style>
-  </dgm:styleLbl>
-  <dgm:styleLbl name="node4">
-    <dgm:scene3d>
-      <a:camera prst="orthographicFront"/>
-      <a:lightRig rig="threePt" dir="t"/>
-    </dgm:scene3d>
-    <dgm:sp3d/>
-    <dgm:txPr/>
-    <dgm:style>
-      <a:lnRef idx="2">
-        <a:scrgbClr r="0" g="0" b="0"/>
-      </a:lnRef>
-      <a:fillRef idx="1">
-        <a:scrgbClr r="0" g="0" b="0"/>
-      </a:fillRef>
-      <a:effectRef idx="0">
-        <a:scrgbClr r="0" g="0" b="0"/>
-      </a:effectRef>
-      <a:fontRef idx="minor">
-        <a:schemeClr val="lt1"/>
-      </a:fontRef>
-    </dgm:style>
-  </dgm:styleLbl>
-  <dgm:styleLbl name="fgImgPlace1">
-    <dgm:scene3d>
-      <a:camera prst="orthographicFront"/>
-      <a:lightRig rig="threePt" dir="t"/>
-    </dgm:scene3d>
-    <dgm:sp3d/>
-    <dgm:txPr/>
-    <dgm:style>
-      <a:lnRef idx="2">
-        <a:scrgbClr r="0" g="0" b="0"/>
-      </a:lnRef>
-      <a:fillRef idx="1">
-        <a:scrgbClr r="0" g="0" b="0"/>
-      </a:fillRef>
-      <a:effectRef idx="0">
-        <a:scrgbClr r="0" g="0" b="0"/>
-      </a:effectRef>
-      <a:fontRef idx="minor"/>
-    </dgm:style>
-  </dgm:styleLbl>
-  <dgm:styleLbl name="alignImgPlace1">
-    <dgm:scene3d>
-      <a:camera prst="orthographicFront"/>
-      <a:lightRig rig="threePt" dir="t"/>
-    </dgm:scene3d>
-    <dgm:sp3d/>
-    <dgm:txPr/>
-    <dgm:style>
-      <a:lnRef idx="2">
-        <a:scrgbClr r="0" g="0" b="0"/>
-      </a:lnRef>
-      <a:fillRef idx="1">
-        <a:scrgbClr r="0" g="0" b="0"/>
-      </a:fillRef>
-      <a:effectRef idx="0">
-        <a:scrgbClr r="0" g="0" b="0"/>
-      </a:effectRef>
-      <a:fontRef idx="minor"/>
-    </dgm:style>
-  </dgm:styleLbl>
-  <dgm:styleLbl name="bgImgPlace1">
-    <dgm:scene3d>
-      <a:camera prst="orthographicFront"/>
-      <a:lightRig rig="threePt" dir="t"/>
-    </dgm:scene3d>
-    <dgm:sp3d/>
-    <dgm:txPr/>
-    <dgm:style>
-      <a:lnRef idx="2">
-        <a:scrgbClr r="0" g="0" b="0"/>
-      </a:lnRef>
-      <a:fillRef idx="1">
-        <a:scrgbClr r="0" g="0" b="0"/>
-      </a:fillRef>
-      <a:effectRef idx="0">
-        <a:scrgbClr r="0" g="0" b="0"/>
-      </a:effectRef>
-      <a:fontRef idx="minor"/>
-    </dgm:style>
-  </dgm:styleLbl>
-  <dgm:styleLbl name="sibTrans2D1">
-    <dgm:scene3d>
-      <a:camera prst="orthographicFront"/>
-      <a:lightRig rig="threePt" dir="t"/>
-    </dgm:scene3d>
-    <dgm:sp3d/>
-    <dgm:txPr/>
-    <dgm:style>
-      <a:lnRef idx="0">
-        <a:scrgbClr r="0" g="0" b="0"/>
-      </a:lnRef>
-      <a:fillRef idx="1">
-        <a:scrgbClr r="0" g="0" b="0"/>
-      </a:fillRef>
-      <a:effectRef idx="0">
-        <a:scrgbClr r="0" g="0" b="0"/>
-      </a:effectRef>
-      <a:fontRef idx="minor">
-        <a:schemeClr val="lt1"/>
-      </a:fontRef>
-    </dgm:style>
-  </dgm:styleLbl>
-  <dgm:styleLbl name="fgSibTrans2D1">
-    <dgm:scene3d>
-      <a:camera prst="orthographicFront"/>
-      <a:lightRig rig="threePt" dir="t"/>
-    </dgm:scene3d>
-    <dgm:sp3d/>
-    <dgm:txPr/>
-    <dgm:style>
-      <a:lnRef idx="0">
-        <a:scrgbClr r="0" g="0" b="0"/>
-      </a:lnRef>
-      <a:fillRef idx="1">
-        <a:scrgbClr r="0" g="0" b="0"/>
-      </a:fillRef>
-      <a:effectRef idx="0">
-        <a:scrgbClr r="0" g="0" b="0"/>
-      </a:effectRef>
-      <a:fontRef idx="minor">
-        <a:schemeClr val="lt1"/>
-      </a:fontRef>
-    </dgm:style>
-  </dgm:styleLbl>
-  <dgm:styleLbl name="bgSibTrans2D1">
-    <dgm:scene3d>
-      <a:camera prst="orthographicFront"/>
-      <a:lightRig rig="threePt" dir="t"/>
-    </dgm:scene3d>
-    <dgm:sp3d/>
-    <dgm:txPr/>
-    <dgm:style>
-      <a:lnRef idx="0">
-        <a:scrgbClr r="0" g="0" b="0"/>
-      </a:lnRef>
-      <a:fillRef idx="1">
-        <a:scrgbClr r="0" g="0" b="0"/>
-      </a:fillRef>
-      <a:effectRef idx="0">
-        <a:scrgbClr r="0" g="0" b="0"/>
-      </a:effectRef>
-      <a:fontRef idx="minor">
-        <a:schemeClr val="lt1"/>
-      </a:fontRef>
-    </dgm:style>
-  </dgm:styleLbl>
-  <dgm:styleLbl name="sibTrans1D1">
-    <dgm:scene3d>
-      <a:camera prst="orthographicFront"/>
-      <a:lightRig rig="threePt" dir="t"/>
-    </dgm:scene3d>
-    <dgm:sp3d/>
-    <dgm:txPr/>
-    <dgm:style>
-      <a:lnRef idx="1">
-        <a:scrgbClr r="0" g="0" b="0"/>
-      </a:lnRef>
-      <a:fillRef idx="0">
-        <a:scrgbClr r="0" g="0" b="0"/>
-      </a:fillRef>
-      <a:effectRef idx="0">
-        <a:scrgbClr r="0" g="0" b="0"/>
-      </a:effectRef>
-      <a:fontRef idx="minor"/>
-    </dgm:style>
-  </dgm:styleLbl>
-  <dgm:styleLbl name="callout">
-    <dgm:scene3d>
-      <a:camera prst="orthographicFront"/>
-      <a:lightRig rig="threePt" dir="t"/>
-    </dgm:scene3d>
-    <dgm:sp3d/>
-    <dgm:txPr/>
-    <dgm:style>
-      <a:lnRef idx="2">
-        <a:scrgbClr r="0" g="0" b="0"/>
-      </a:lnRef>
-      <a:fillRef idx="1">
-        <a:scrgbClr r="0" g="0" b="0"/>
-      </a:fillRef>
-      <a:effectRef idx="0">
-        <a:scrgbClr r="0" g="0" b="0"/>
-      </a:effectRef>
-      <a:fontRef idx="minor"/>
-    </dgm:style>
-  </dgm:styleLbl>
-  <dgm:styleLbl name="asst0">
-    <dgm:scene3d>
-      <a:camera prst="orthographicFront"/>
-      <a:lightRig rig="threePt" dir="t"/>
-    </dgm:scene3d>
-    <dgm:sp3d/>
-    <dgm:txPr/>
-    <dgm:style>
-      <a:lnRef idx="2">
-        <a:scrgbClr r="0" g="0" b="0"/>
-      </a:lnRef>
-      <a:fillRef idx="1">
-        <a:scrgbClr r="0" g="0" b="0"/>
-      </a:fillRef>
-      <a:effectRef idx="0">
-        <a:scrgbClr r="0" g="0" b="0"/>
-      </a:effectRef>
-      <a:fontRef idx="minor">
-        <a:schemeClr val="lt1"/>
-      </a:fontRef>
-    </dgm:style>
-  </dgm:styleLbl>
-  <dgm:styleLbl name="asst1">
-    <dgm:scene3d>
-      <a:camera prst="orthographicFront"/>
-      <a:lightRig rig="threePt" dir="t"/>
-    </dgm:scene3d>
-    <dgm:sp3d/>
-    <dgm:txPr/>
-    <dgm:style>
-      <a:lnRef idx="2">
-        <a:scrgbClr r="0" g="0" b="0"/>
-      </a:lnRef>
-      <a:fillRef idx="1">
-        <a:scrgbClr r="0" g="0" b="0"/>
-      </a:fillRef>
-      <a:effectRef idx="0">
-        <a:scrgbClr r="0" g="0" b="0"/>
-      </a:effectRef>
-      <a:fontRef idx="minor">
-        <a:schemeClr val="lt1"/>
-      </a:fontRef>
-    </dgm:style>
-  </dgm:styleLbl>
-  <dgm:styleLbl name="asst2">
-    <dgm:scene3d>
-      <a:camera prst="orthographicFront"/>
-      <a:lightRig rig="threePt" dir="t"/>
-    </dgm:scene3d>
-    <dgm:sp3d/>
-    <dgm:txPr/>
-    <dgm:style>
-      <a:lnRef idx="2">
-        <a:scrgbClr r="0" g="0" b="0"/>
-      </a:lnRef>
-      <a:fillRef idx="1">
-        <a:scrgbClr r="0" g="0" b="0"/>
-      </a:fillRef>
-      <a:effectRef idx="0">
-        <a:scrgbClr r="0" g="0" b="0"/>
-      </a:effectRef>
-      <a:fontRef idx="minor">
-        <a:schemeClr val="lt1"/>
-      </a:fontRef>
-    </dgm:style>
-  </dgm:styleLbl>
-  <dgm:styleLbl name="asst3">
-    <dgm:scene3d>
-      <a:camera prst="orthographicFront"/>
-      <a:lightRig rig="threePt" dir="t"/>
-    </dgm:scene3d>
-    <dgm:sp3d/>
-    <dgm:txPr/>
-    <dgm:style>
-      <a:lnRef idx="2">
-        <a:scrgbClr r="0" g="0" b="0"/>
-      </a:lnRef>
-      <a:fillRef idx="1">
-        <a:scrgbClr r="0" g="0" b="0"/>
-      </a:fillRef>
-      <a:effectRef idx="0">
-        <a:scrgbClr r="0" g="0" b="0"/>
-      </a:effectRef>
-      <a:fontRef idx="minor">
-        <a:schemeClr val="lt1"/>
-      </a:fontRef>
-    </dgm:style>
-  </dgm:styleLbl>
-  <dgm:styleLbl name="asst4">
-    <dgm:scene3d>
-      <a:camera prst="orthographicFront"/>
-      <a:lightRig rig="threePt" dir="t"/>
-    </dgm:scene3d>
-    <dgm:sp3d/>
-    <dgm:txPr/>
-    <dgm:style>
-      <a:lnRef idx="2">
-        <a:scrgbClr r="0" g="0" b="0"/>
-      </a:lnRef>
-      <a:fillRef idx="1">
-        <a:scrgbClr r="0" g="0" b="0"/>
-      </a:fillRef>
-      <a:effectRef idx="0">
-        <a:scrgbClr r="0" g="0" b="0"/>
-      </a:effectRef>
-      <a:fontRef idx="minor">
-        <a:schemeClr val="lt1"/>
-      </a:fontRef>
-    </dgm:style>
-  </dgm:styleLbl>
-  <dgm:styleLbl name="parChTrans2D1">
-    <dgm:scene3d>
-      <a:camera prst="orthographicFront"/>
-      <a:lightRig rig="threePt" dir="t"/>
-    </dgm:scene3d>
-    <dgm:sp3d/>
-    <dgm:txPr/>
-    <dgm:style>
-      <a:lnRef idx="2">
-        <a:scrgbClr r="0" g="0" b="0"/>
-      </a:lnRef>
-      <a:fillRef idx="1">
-        <a:scrgbClr r="0" g="0" b="0"/>
-      </a:fillRef>
-      <a:effectRef idx="0">
-        <a:scrgbClr r="0" g="0" b="0"/>
-      </a:effectRef>
-      <a:fontRef idx="minor">
-        <a:schemeClr val="lt1"/>
-      </a:fontRef>
-    </dgm:style>
-  </dgm:styleLbl>
-  <dgm:styleLbl name="parChTrans2D2">
-    <dgm:scene3d>
-      <a:camera prst="orthographicFront"/>
-      <a:lightRig rig="threePt" dir="t"/>
-    </dgm:scene3d>
-    <dgm:sp3d/>
-    <dgm:txPr/>
-    <dgm:style>
-      <a:lnRef idx="2">
-        <a:scrgbClr r="0" g="0" b="0"/>
-      </a:lnRef>
-      <a:fillRef idx="1">
-        <a:scrgbClr r="0" g="0" b="0"/>
-      </a:fillRef>
-      <a:effectRef idx="0">
-        <a:scrgbClr r="0" g="0" b="0"/>
-      </a:effectRef>
-      <a:fontRef idx="minor">
-        <a:schemeClr val="lt1"/>
-      </a:fontRef>
-    </dgm:style>
-  </dgm:styleLbl>
-  <dgm:styleLbl name="parChTrans2D3">
-    <dgm:scene3d>
-      <a:camera prst="orthographicFront"/>
-      <a:lightRig rig="threePt" dir="t"/>
-    </dgm:scene3d>
-    <dgm:sp3d/>
-    <dgm:txPr/>
-    <dgm:style>
-      <a:lnRef idx="2">
-        <a:scrgbClr r="0" g="0" b="0"/>
-      </a:lnRef>
-      <a:fillRef idx="1">
-        <a:scrgbClr r="0" g="0" b="0"/>
-      </a:fillRef>
-      <a:effectRef idx="0">
-        <a:scrgbClr r="0" g="0" b="0"/>
-      </a:effectRef>
-      <a:fontRef idx="minor">
-        <a:schemeClr val="lt1"/>
-      </a:fontRef>
-    </dgm:style>
-  </dgm:styleLbl>
-  <dgm:styleLbl name="parChTrans2D4">
-    <dgm:scene3d>
-      <a:camera prst="orthographicFront"/>
-      <a:lightRig rig="threePt" dir="t"/>
-    </dgm:scene3d>
-    <dgm:sp3d/>
-    <dgm:txPr/>
-    <dgm:style>
-      <a:lnRef idx="2">
-        <a:scrgbClr r="0" g="0" b="0"/>
-      </a:lnRef>
-      <a:fillRef idx="1">
-        <a:scrgbClr r="0" g="0" b="0"/>
-      </a:fillRef>
-      <a:effectRef idx="0">
-        <a:scrgbClr r="0" g="0" b="0"/>
-      </a:effectRef>
-      <a:fontRef idx="minor">
-        <a:schemeClr val="lt1"/>
-      </a:fontRef>
-    </dgm:style>
-  </dgm:styleLbl>
-  <dgm:styleLbl name="parChTrans1D1">
-    <dgm:scene3d>
-      <a:camera prst="orthographicFront"/>
-      <a:lightRig rig="threePt" dir="t"/>
-    </dgm:scene3d>
-    <dgm:sp3d/>
-    <dgm:txPr/>
-    <dgm:style>
-      <a:lnRef idx="2">
-        <a:scrgbClr r="0" g="0" b="0"/>
-      </a:lnRef>
-      <a:fillRef idx="0">
-        <a:scrgbClr r="0" g="0" b="0"/>
-      </a:fillRef>
-      <a:effectRef idx="0">
-        <a:scrgbClr r="0" g="0" b="0"/>
-      </a:effectRef>
-      <a:fontRef idx="minor"/>
-    </dgm:style>
-  </dgm:styleLbl>
-  <dgm:styleLbl name="parChTrans1D2">
-    <dgm:scene3d>
-      <a:camera prst="orthographicFront"/>
-      <a:lightRig rig="threePt" dir="t"/>
-    </dgm:scene3d>
-    <dgm:sp3d/>
-    <dgm:txPr/>
-    <dgm:style>
-      <a:lnRef idx="2">
-        <a:scrgbClr r="0" g="0" b="0"/>
-      </a:lnRef>
-      <a:fillRef idx="0">
-        <a:scrgbClr r="0" g="0" b="0"/>
-      </a:fillRef>
-      <a:effectRef idx="0">
-        <a:scrgbClr r="0" g="0" b="0"/>
-      </a:effectRef>
-      <a:fontRef idx="minor"/>
-    </dgm:style>
-  </dgm:styleLbl>
-  <dgm:styleLbl name="parChTrans1D3">
-    <dgm:scene3d>
-      <a:camera prst="orthographicFront"/>
-      <a:lightRig rig="threePt" dir="t"/>
-    </dgm:scene3d>
-    <dgm:sp3d/>
-    <dgm:txPr/>
-    <dgm:style>
-      <a:lnRef idx="2">
-        <a:scrgbClr r="0" g="0" b="0"/>
-      </a:lnRef>
-      <a:fillRef idx="0">
-        <a:scrgbClr r="0" g="0" b="0"/>
-      </a:fillRef>
-      <a:effectRef idx="0">
-        <a:scrgbClr r="0" g="0" b="0"/>
-      </a:effectRef>
-      <a:fontRef idx="minor"/>
-    </dgm:style>
-  </dgm:styleLbl>
-  <dgm:styleLbl name="parChTrans1D4">
-    <dgm:scene3d>
-      <a:camera prst="orthographicFront"/>
-      <a:lightRig rig="threePt" dir="t"/>
-    </dgm:scene3d>
-    <dgm:sp3d/>
-    <dgm:txPr/>
-    <dgm:style>
-      <a:lnRef idx="2">
-        <a:scrgbClr r="0" g="0" b="0"/>
-      </a:lnRef>
-      <a:fillRef idx="0">
-        <a:scrgbClr r="0" g="0" b="0"/>
-      </a:fillRef>
-      <a:effectRef idx="0">
-        <a:scrgbClr r="0" g="0" b="0"/>
-      </a:effectRef>
-      <a:fontRef idx="minor"/>
-    </dgm:style>
-  </dgm:styleLbl>
-  <dgm:styleLbl name="fgAcc1">
-    <dgm:scene3d>
-      <a:camera prst="orthographicFront"/>
-      <a:lightRig rig="threePt" dir="t"/>
-    </dgm:scene3d>
-    <dgm:sp3d/>
-    <dgm:txPr/>
-    <dgm:style>
-      <a:lnRef idx="2">
-        <a:scrgbClr r="0" g="0" b="0"/>
-      </a:lnRef>
-      <a:fillRef idx="1">
-        <a:scrgbClr r="0" g="0" b="0"/>
-      </a:fillRef>
-      <a:effectRef idx="0">
-        <a:scrgbClr r="0" g="0" b="0"/>
-      </a:effectRef>
-      <a:fontRef idx="minor"/>
-    </dgm:style>
-  </dgm:styleLbl>
-  <dgm:styleLbl name="conFgAcc1">
-    <dgm:scene3d>
-      <a:camera prst="orthographicFront"/>
-      <a:lightRig rig="threePt" dir="t"/>
-    </dgm:scene3d>
-    <dgm:sp3d/>
-    <dgm:txPr/>
-    <dgm:style>
-      <a:lnRef idx="2">
-        <a:scrgbClr r="0" g="0" b="0"/>
-      </a:lnRef>
-      <a:fillRef idx="1">
-        <a:scrgbClr r="0" g="0" b="0"/>
-      </a:fillRef>
-      <a:effectRef idx="0">
-        <a:scrgbClr r="0" g="0" b="0"/>
-      </a:effectRef>
-      <a:fontRef idx="minor"/>
-    </dgm:style>
-  </dgm:styleLbl>
-  <dgm:styleLbl name="alignAcc1">
-    <dgm:scene3d>
-      <a:camera prst="orthographicFront"/>
-      <a:lightRig rig="threePt" dir="t"/>
-    </dgm:scene3d>
-    <dgm:sp3d/>
-    <dgm:txPr/>
-    <dgm:style>
-      <a:lnRef idx="2">
-        <a:scrgbClr r="0" g="0" b="0"/>
-      </a:lnRef>
-      <a:fillRef idx="1">
-        <a:scrgbClr r="0" g="0" b="0"/>
-      </a:fillRef>
-      <a:effectRef idx="0">
-        <a:scrgbClr r="0" g="0" b="0"/>
-      </a:effectRef>
-      <a:fontRef idx="minor"/>
-    </dgm:style>
-  </dgm:styleLbl>
-  <dgm:styleLbl name="trAlignAcc1">
-    <dgm:scene3d>
-      <a:camera prst="orthographicFront"/>
-      <a:lightRig rig="threePt" dir="t"/>
-    </dgm:scene3d>
-    <dgm:sp3d/>
-    <dgm:txPr/>
-    <dgm:style>
-      <a:lnRef idx="1">
-        <a:scrgbClr r="0" g="0" b="0"/>
-      </a:lnRef>
-      <a:fillRef idx="1">
-        <a:scrgbClr r="0" g="0" b="0"/>
-      </a:fillRef>
-      <a:effectRef idx="0">
-        <a:scrgbClr r="0" g="0" b="0"/>
-      </a:effectRef>
-      <a:fontRef idx="minor"/>
-    </dgm:style>
-  </dgm:styleLbl>
-  <dgm:styleLbl name="bgAcc1">
-    <dgm:scene3d>
-      <a:camera prst="orthographicFront"/>
-      <a:lightRig rig="threePt" dir="t"/>
-    </dgm:scene3d>
-    <dgm:sp3d/>
-    <dgm:txPr/>
-    <dgm:style>
-      <a:lnRef idx="2">
-        <a:scrgbClr r="0" g="0" b="0"/>
-      </a:lnRef>
-      <a:fillRef idx="1">
-        <a:scrgbClr r="0" g="0" b="0"/>
-      </a:fillRef>
-      <a:effectRef idx="0">
-        <a:scrgbClr r="0" g="0" b="0"/>
-      </a:effectRef>
-      <a:fontRef idx="minor"/>
-    </dgm:style>
-  </dgm:styleLbl>
-  <dgm:styleLbl name="solidFgAcc1">
-    <dgm:scene3d>
-      <a:camera prst="orthographicFront"/>
-      <a:lightRig rig="threePt" dir="t"/>
-    </dgm:scene3d>
-    <dgm:sp3d/>
-    <dgm:txPr/>
-    <dgm:style>
-      <a:lnRef idx="2">
-        <a:scrgbClr r="0" g="0" b="0"/>
-      </a:lnRef>
-      <a:fillRef idx="1">
-        <a:scrgbClr r="0" g="0" b="0"/>
-      </a:fillRef>
-      <a:effectRef idx="0">
-        <a:scrgbClr r="0" g="0" b="0"/>
-      </a:effectRef>
-      <a:fontRef idx="minor"/>
-    </dgm:style>
-  </dgm:styleLbl>
-  <dgm:styleLbl name="solidAlignAcc1">
-    <dgm:scene3d>
-      <a:camera prst="orthographicFront"/>
-      <a:lightRig rig="threePt" dir="t"/>
-    </dgm:scene3d>
-    <dgm:sp3d/>
-    <dgm:txPr/>
-    <dgm:style>
-      <a:lnRef idx="2">
-        <a:scrgbClr r="0" g="0" b="0"/>
-      </a:lnRef>
-      <a:fillRef idx="1">
-        <a:scrgbClr r="0" g="0" b="0"/>
-      </a:fillRef>
-      <a:effectRef idx="0">
-        <a:scrgbClr r="0" g="0" b="0"/>
-      </a:effectRef>
-      <a:fontRef idx="minor"/>
-    </dgm:style>
-  </dgm:styleLbl>
-  <dgm:styleLbl name="solidBgAcc1">
-    <dgm:scene3d>
-      <a:camera prst="orthographicFront"/>
-      <a:lightRig rig="threePt" dir="t"/>
-    </dgm:scene3d>
-    <dgm:sp3d/>
-    <dgm:txPr/>
-    <dgm:style>
-      <a:lnRef idx="2">
-        <a:scrgbClr r="0" g="0" b="0"/>
-      </a:lnRef>
-      <a:fillRef idx="1">
-        <a:scrgbClr r="0" g="0" b="0"/>
-      </a:fillRef>
-      <a:effectRef idx="0">
-        <a:scrgbClr r="0" g="0" b="0"/>
-      </a:effectRef>
-      <a:fontRef idx="minor"/>
-    </dgm:style>
-  </dgm:styleLbl>
-  <dgm:styleLbl name="fgAccFollowNode1">
-    <dgm:scene3d>
-      <a:camera prst="orthographicFront"/>
-      <a:lightRig rig="threePt" dir="t"/>
-    </dgm:scene3d>
-    <dgm:sp3d/>
-    <dgm:txPr/>
-    <dgm:style>
-      <a:lnRef idx="2">
-        <a:scrgbClr r="0" g="0" b="0"/>
-      </a:lnRef>
-      <a:fillRef idx="1">
-        <a:scrgbClr r="0" g="0" b="0"/>
-      </a:fillRef>
-      <a:effectRef idx="0">
-        <a:scrgbClr r="0" g="0" b="0"/>
-      </a:effectRef>
-      <a:fontRef idx="minor"/>
-    </dgm:style>
-  </dgm:styleLbl>
-  <dgm:styleLbl name="alignAccFollowNode1">
-    <dgm:scene3d>
-      <a:camera prst="orthographicFront"/>
-      <a:lightRig rig="threePt" dir="t"/>
-    </dgm:scene3d>
-    <dgm:sp3d/>
-    <dgm:txPr/>
-    <dgm:style>
-      <a:lnRef idx="2">
-        <a:scrgbClr r="0" g="0" b="0"/>
-      </a:lnRef>
-      <a:fillRef idx="1">
-        <a:scrgbClr r="0" g="0" b="0"/>
-      </a:fillRef>
-      <a:effectRef idx="0">
-        <a:scrgbClr r="0" g="0" b="0"/>
-      </a:effectRef>
-      <a:fontRef idx="minor"/>
-    </dgm:style>
-  </dgm:styleLbl>
-  <dgm:styleLbl name="bgAccFollowNode1">
-    <dgm:scene3d>
-      <a:camera prst="orthographicFront"/>
-      <a:lightRig rig="threePt" dir="t"/>
-    </dgm:scene3d>
-    <dgm:sp3d/>
-    <dgm:txPr/>
-    <dgm:style>
-      <a:lnRef idx="2">
-        <a:scrgbClr r="0" g="0" b="0"/>
-      </a:lnRef>
-      <a:fillRef idx="1">
-        <a:scrgbClr r="0" g="0" b="0"/>
-      </a:fillRef>
-      <a:effectRef idx="0">
-        <a:scrgbClr r="0" g="0" b="0"/>
-      </a:effectRef>
-      <a:fontRef idx="minor"/>
-    </dgm:style>
-  </dgm:styleLbl>
-  <dgm:styleLbl name="fgAcc0">
-    <dgm:scene3d>
-      <a:camera prst="orthographicFront"/>
-      <a:lightRig rig="threePt" dir="t"/>
-    </dgm:scene3d>
-    <dgm:sp3d/>
-    <dgm:txPr/>
-    <dgm:style>
-      <a:lnRef idx="2">
-        <a:scrgbClr r="0" g="0" b="0"/>
-      </a:lnRef>
-      <a:fillRef idx="1">
-        <a:scrgbClr r="0" g="0" b="0"/>
-      </a:fillRef>
-      <a:effectRef idx="0">
-        <a:scrgbClr r="0" g="0" b="0"/>
-      </a:effectRef>
-      <a:fontRef idx="minor"/>
-    </dgm:style>
-  </dgm:styleLbl>
-  <dgm:styleLbl name="fgAcc2">
-    <dgm:scene3d>
-      <a:camera prst="orthographicFront"/>
-      <a:lightRig rig="threePt" dir="t"/>
-    </dgm:scene3d>
-    <dgm:sp3d/>
-    <dgm:txPr/>
-    <dgm:style>
-      <a:lnRef idx="2">
-        <a:scrgbClr r="0" g="0" b="0"/>
-      </a:lnRef>
-      <a:fillRef idx="1">
-        <a:scrgbClr r="0" g="0" b="0"/>
-      </a:fillRef>
-      <a:effectRef idx="0">
-        <a:scrgbClr r="0" g="0" b="0"/>
-      </a:effectRef>
-      <a:fontRef idx="minor"/>
-    </dgm:style>
-  </dgm:styleLbl>
-  <dgm:styleLbl name="fgAcc3">
-    <dgm:scene3d>
-      <a:camera prst="orthographicFront"/>
-      <a:lightRig rig="threePt" dir="t"/>
-    </dgm:scene3d>
-    <dgm:sp3d/>
-    <dgm:txPr/>
-    <dgm:style>
-      <a:lnRef idx="2">
-        <a:scrgbClr r="0" g="0" b="0"/>
-      </a:lnRef>
-      <a:fillRef idx="1">
-        <a:scrgbClr r="0" g="0" b="0"/>
-      </a:fillRef>
-      <a:effectRef idx="0">
-        <a:scrgbClr r="0" g="0" b="0"/>
-      </a:effectRef>
-      <a:fontRef idx="minor"/>
-    </dgm:style>
-  </dgm:styleLbl>
-  <dgm:styleLbl name="fgAcc4">
-    <dgm:scene3d>
-      <a:camera prst="orthographicFront"/>
-      <a:lightRig rig="threePt" dir="t"/>
-    </dgm:scene3d>
-    <dgm:sp3d/>
-    <dgm:txPr/>
-    <dgm:style>
-      <a:lnRef idx="2">
-        <a:scrgbClr r="0" g="0" b="0"/>
-      </a:lnRef>
-      <a:fillRef idx="1">
-        <a:scrgbClr r="0" g="0" b="0"/>
-      </a:fillRef>
-      <a:effectRef idx="0">
-        <a:scrgbClr r="0" g="0" b="0"/>
-      </a:effectRef>
-      <a:fontRef idx="minor"/>
-    </dgm:style>
-  </dgm:styleLbl>
-  <dgm:styleLbl name="bgShp">
-    <dgm:scene3d>
-      <a:camera prst="orthographicFront"/>
-      <a:lightRig rig="threePt" dir="t"/>
-    </dgm:scene3d>
-    <dgm:sp3d/>
-    <dgm:txPr/>
-    <dgm:style>
-      <a:lnRef idx="0">
-        <a:scrgbClr r="0" g="0" b="0"/>
-      </a:lnRef>
-      <a:fillRef idx="1">
-        <a:scrgbClr r="0" g="0" b="0"/>
-      </a:fillRef>
-      <a:effectRef idx="0">
-        <a:scrgbClr r="0" g="0" b="0"/>
-      </a:effectRef>
-      <a:fontRef idx="minor"/>
-    </dgm:style>
-  </dgm:styleLbl>
-  <dgm:styleLbl name="dkBgShp">
-    <dgm:scene3d>
-      <a:camera prst="orthographicFront"/>
-      <a:lightRig rig="threePt" dir="t"/>
-    </dgm:scene3d>
-    <dgm:sp3d/>
-    <dgm:txPr/>
-    <dgm:style>
-      <a:lnRef idx="0">
-        <a:scrgbClr r="0" g="0" b="0"/>
-      </a:lnRef>
-      <a:fillRef idx="1">
-        <a:scrgbClr r="0" g="0" b="0"/>
-      </a:fillRef>
-      <a:effectRef idx="0">
-        <a:scrgbClr r="0" g="0" b="0"/>
-      </a:effectRef>
-      <a:fontRef idx="minor"/>
-    </dgm:style>
-  </dgm:styleLbl>
-  <dgm:styleLbl name="trBgShp">
-    <dgm:scene3d>
-      <a:camera prst="orthographicFront"/>
-      <a:lightRig rig="threePt" dir="t"/>
-    </dgm:scene3d>
-    <dgm:sp3d/>
-    <dgm:txPr/>
-    <dgm:style>
-      <a:lnRef idx="0">
-        <a:scrgbClr r="0" g="0" b="0"/>
-      </a:lnRef>
-      <a:fillRef idx="1">
-        <a:scrgbClr r="0" g="0" b="0"/>
-      </a:fillRef>
-      <a:effectRef idx="0">
-        <a:scrgbClr r="0" g="0" b="0"/>
-      </a:effectRef>
-      <a:fontRef idx="minor"/>
-    </dgm:style>
-  </dgm:styleLbl>
-  <dgm:styleLbl name="fgShp">
-    <dgm:scene3d>
-      <a:camera prst="orthographicFront"/>
-      <a:lightRig rig="threePt" dir="t"/>
-    </dgm:scene3d>
-    <dgm:sp3d/>
-    <dgm:txPr/>
-    <dgm:style>
-      <a:lnRef idx="2">
-        <a:scrgbClr r="0" g="0" b="0"/>
-      </a:lnRef>
-      <a:fillRef idx="1">
-        <a:scrgbClr r="0" g="0" b="0"/>
-      </a:fillRef>
-      <a:effectRef idx="0">
-        <a:scrgbClr r="0" g="0" b="0"/>
-      </a:effectRef>
-      <a:fontRef idx="minor"/>
-    </dgm:style>
-  </dgm:styleLbl>
-  <dgm:styleLbl name="revTx">
-    <dgm:scene3d>
-      <a:camera prst="orthographicFront"/>
-      <a:lightRig rig="threePt" dir="t"/>
-    </dgm:scene3d>
-    <dgm:sp3d/>
-    <dgm:txPr/>
-    <dgm:style>
-      <a:lnRef idx="0">
-        <a:scrgbClr r="0" g="0" b="0"/>
-      </a:lnRef>
-      <a:fillRef idx="0">
-        <a:scrgbClr r="0" g="0" b="0"/>
-      </a:fillRef>
-      <a:effectRef idx="0">
-        <a:scrgbClr r="0" g="0" b="0"/>
-      </a:effectRef>
-      <a:fontRef idx="minor"/>
-    </dgm:style>
-  </dgm:styleLbl>
-</dgm:styleDef>
-</file>
-
-<file path=ppt/diagrams/quickStyle4.xml><?xml version="1.0" encoding="utf-8"?>
 <dgm:styleDef xmlns:dgm="http://schemas.openxmlformats.org/drawingml/2006/diagram" xmlns:a="http://schemas.openxmlformats.org/drawingml/2006/main" uniqueId="urn:microsoft.com/office/officeart/2005/8/quickstyle/simple1">
   <dgm:title val=""/>
   <dgm:desc val=""/>
@@ -13036,7 +10128,7 @@
           <a:p>
             <a:fld id="{3E30469F-474B-44E0-9013-119402DD7996}" type="datetimeFigureOut">
               <a:rPr lang="en-NL" smtClean="0"/>
-              <a:t>23/02/2026</a:t>
+              <a:t>25/02/2026</a:t>
             </a:fld>
             <a:endParaRPr lang="en-NL"/>
           </a:p>
@@ -14131,7 +11223,7 @@
           <a:p>
             <a:fld id="{3E30469F-474B-44E0-9013-119402DD7996}" type="datetimeFigureOut">
               <a:rPr lang="en-NL" smtClean="0"/>
-              <a:t>23/02/2026</a:t>
+              <a:t>25/02/2026</a:t>
             </a:fld>
             <a:endParaRPr lang="en-NL"/>
           </a:p>
@@ -15111,7 +12203,7 @@
           <a:p>
             <a:fld id="{3E30469F-474B-44E0-9013-119402DD7996}" type="datetimeFigureOut">
               <a:rPr lang="en-NL" smtClean="0"/>
-              <a:t>23/02/2026</a:t>
+              <a:t>25/02/2026</a:t>
             </a:fld>
             <a:endParaRPr lang="en-NL"/>
           </a:p>
@@ -16245,7 +13337,7 @@
           <a:p>
             <a:fld id="{3E30469F-474B-44E0-9013-119402DD7996}" type="datetimeFigureOut">
               <a:rPr lang="en-NL" smtClean="0"/>
-              <a:t>23/02/2026</a:t>
+              <a:t>25/02/2026</a:t>
             </a:fld>
             <a:endParaRPr lang="en-NL"/>
           </a:p>
@@ -17278,7 +14370,7 @@
           <a:p>
             <a:fld id="{3E30469F-474B-44E0-9013-119402DD7996}" type="datetimeFigureOut">
               <a:rPr lang="en-NL" smtClean="0"/>
-              <a:t>23/02/2026</a:t>
+              <a:t>25/02/2026</a:t>
             </a:fld>
             <a:endParaRPr lang="en-NL"/>
           </a:p>
@@ -17938,7 +15030,7 @@
           <a:p>
             <a:fld id="{3E30469F-474B-44E0-9013-119402DD7996}" type="datetimeFigureOut">
               <a:rPr lang="en-NL" smtClean="0"/>
-              <a:t>23/02/2026</a:t>
+              <a:t>25/02/2026</a:t>
             </a:fld>
             <a:endParaRPr lang="en-NL"/>
           </a:p>
@@ -18799,7 +15891,7 @@
           <a:p>
             <a:fld id="{3E30469F-474B-44E0-9013-119402DD7996}" type="datetimeFigureOut">
               <a:rPr lang="en-NL" smtClean="0"/>
-              <a:t>23/02/2026</a:t>
+              <a:t>25/02/2026</a:t>
             </a:fld>
             <a:endParaRPr lang="en-NL"/>
           </a:p>
@@ -18989,7 +16081,7 @@
           <a:p>
             <a:fld id="{3E30469F-474B-44E0-9013-119402DD7996}" type="datetimeFigureOut">
               <a:rPr lang="en-NL" smtClean="0"/>
-              <a:t>23/02/2026</a:t>
+              <a:t>25/02/2026</a:t>
             </a:fld>
             <a:endParaRPr lang="en-NL"/>
           </a:p>
@@ -19961,7 +17053,7 @@
           <a:p>
             <a:fld id="{3E30469F-474B-44E0-9013-119402DD7996}" type="datetimeFigureOut">
               <a:rPr lang="en-NL" smtClean="0"/>
-              <a:t>23/02/2026</a:t>
+              <a:t>25/02/2026</a:t>
             </a:fld>
             <a:endParaRPr lang="en-NL"/>
           </a:p>
@@ -20172,7 +17264,7 @@
           <a:p>
             <a:fld id="{3E30469F-474B-44E0-9013-119402DD7996}" type="datetimeFigureOut">
               <a:rPr lang="en-NL" smtClean="0"/>
-              <a:t>23/02/2026</a:t>
+              <a:t>25/02/2026</a:t>
             </a:fld>
             <a:endParaRPr lang="en-NL"/>
           </a:p>
@@ -21206,7 +18298,7 @@
           <a:p>
             <a:fld id="{3E30469F-474B-44E0-9013-119402DD7996}" type="datetimeFigureOut">
               <a:rPr lang="en-NL" smtClean="0"/>
-              <a:t>23/02/2026</a:t>
+              <a:t>25/02/2026</a:t>
             </a:fld>
             <a:endParaRPr lang="en-NL"/>
           </a:p>
@@ -21478,7 +18570,7 @@
           <a:p>
             <a:fld id="{3E30469F-474B-44E0-9013-119402DD7996}" type="datetimeFigureOut">
               <a:rPr lang="en-NL" smtClean="0"/>
-              <a:t>23/02/2026</a:t>
+              <a:t>25/02/2026</a:t>
             </a:fld>
             <a:endParaRPr lang="en-NL"/>
           </a:p>
@@ -21888,7 +18980,7 @@
           <a:p>
             <a:fld id="{3E30469F-474B-44E0-9013-119402DD7996}" type="datetimeFigureOut">
               <a:rPr lang="en-NL" smtClean="0"/>
-              <a:t>23/02/2026</a:t>
+              <a:t>25/02/2026</a:t>
             </a:fld>
             <a:endParaRPr lang="en-NL"/>
           </a:p>
@@ -22015,7 +19107,7 @@
           <a:p>
             <a:fld id="{3E30469F-474B-44E0-9013-119402DD7996}" type="datetimeFigureOut">
               <a:rPr lang="en-NL" smtClean="0"/>
-              <a:t>23/02/2026</a:t>
+              <a:t>25/02/2026</a:t>
             </a:fld>
             <a:endParaRPr lang="en-NL"/>
           </a:p>
@@ -22110,7 +19202,7 @@
           <a:p>
             <a:fld id="{3E30469F-474B-44E0-9013-119402DD7996}" type="datetimeFigureOut">
               <a:rPr lang="en-NL" smtClean="0"/>
-              <a:t>23/02/2026</a:t>
+              <a:t>25/02/2026</a:t>
             </a:fld>
             <a:endParaRPr lang="en-NL"/>
           </a:p>
@@ -23191,7 +20283,7 @@
           <a:p>
             <a:fld id="{3E30469F-474B-44E0-9013-119402DD7996}" type="datetimeFigureOut">
               <a:rPr lang="en-NL" smtClean="0"/>
-              <a:t>23/02/2026</a:t>
+              <a:t>25/02/2026</a:t>
             </a:fld>
             <a:endParaRPr lang="en-NL"/>
           </a:p>
@@ -24299,7 +21391,7 @@
           <a:p>
             <a:fld id="{3E30469F-474B-44E0-9013-119402DD7996}" type="datetimeFigureOut">
               <a:rPr lang="en-NL" smtClean="0"/>
-              <a:t>23/02/2026</a:t>
+              <a:t>25/02/2026</a:t>
             </a:fld>
             <a:endParaRPr lang="en-NL"/>
           </a:p>
@@ -25359,7 +22451,7 @@
           <a:p>
             <a:fld id="{3E30469F-474B-44E0-9013-119402DD7996}" type="datetimeFigureOut">
               <a:rPr lang="en-NL" smtClean="0"/>
-              <a:t>23/02/2026</a:t>
+              <a:t>25/02/2026</a:t>
             </a:fld>
             <a:endParaRPr lang="en-NL"/>
           </a:p>
@@ -26013,13 +23105,8 @@
                   <a:srgbClr val="FFFFFF"/>
                 </a:solidFill>
               </a:rPr>
-              <a:t>A remote MUMPS API Framework</a:t>
+              <a:t>MUMPS RPC FRAMEWORK</a:t>
             </a:r>
-            <a:endParaRPr lang="en-NL" sz="4400" dirty="0">
-              <a:solidFill>
-                <a:srgbClr val="FFFFFF"/>
-              </a:solidFill>
-            </a:endParaRPr>
           </a:p>
         </p:txBody>
       </p:sp>
@@ -26098,7 +23185,7 @@
             <p:ph idx="1"/>
             <p:extLst>
               <p:ext uri="{D42A27DB-BD31-4B8C-83A1-F6EECF244321}">
-                <p14:modId xmlns:p14="http://schemas.microsoft.com/office/powerpoint/2010/main" val="1384979283"/>
+                <p14:modId xmlns:p14="http://schemas.microsoft.com/office/powerpoint/2010/main" val="885243221"/>
               </p:ext>
             </p:extLst>
           </p:nvPr>
@@ -26129,23 +23216,9 @@
 <file path=ppt/slides/slide11.xml><?xml version="1.0" encoding="utf-8"?>
 <p:sld xmlns:a="http://schemas.openxmlformats.org/drawingml/2006/main" xmlns:r="http://schemas.openxmlformats.org/officeDocument/2006/relationships" xmlns:p="http://schemas.openxmlformats.org/presentationml/2006/main">
   <p:cSld>
-    <p:bg>
-      <p:bgPr>
-        <a:solidFill>
-          <a:schemeClr val="bg1"/>
-        </a:solidFill>
-        <a:effectLst/>
-      </p:bgPr>
-    </p:bg>
     <p:spTree>
       <p:nvGrpSpPr>
-        <p:cNvPr id="1" name="">
-          <a:extLst>
-            <a:ext uri="{FF2B5EF4-FFF2-40B4-BE49-F238E27FC236}">
-              <a16:creationId xmlns:a16="http://schemas.microsoft.com/office/drawing/2014/main" id="{4D6DC185-0273-5F80-868C-0BB3B7C23D97}"/>
-            </a:ext>
-          </a:extLst>
-        </p:cNvPr>
+        <p:cNvPr id="1" name=""/>
         <p:cNvGrpSpPr/>
         <p:nvPr/>
       </p:nvGrpSpPr>
@@ -26162,7 +23235,7 @@
           <p:cNvPr id="2" name="Title 1">
             <a:extLst>
               <a:ext uri="{FF2B5EF4-FFF2-40B4-BE49-F238E27FC236}">
-                <a16:creationId xmlns:a16="http://schemas.microsoft.com/office/drawing/2014/main" id="{DE27AA2B-1A44-5B47-5FA9-76DF0396F137}"/>
+                <a16:creationId xmlns:a16="http://schemas.microsoft.com/office/drawing/2014/main" id="{8F3EF3D6-9CF4-AB0F-7C86-99C919DD435B}"/>
               </a:ext>
             </a:extLst>
           </p:cNvPr>
@@ -26173,66 +23246,92 @@
             <p:ph type="title"/>
           </p:nvPr>
         </p:nvSpPr>
-        <p:spPr>
-          <a:xfrm>
-            <a:off x="1952481" y="800783"/>
-            <a:ext cx="8278891" cy="1323867"/>
-          </a:xfrm>
-        </p:spPr>
+        <p:spPr/>
         <p:txBody>
-          <a:bodyPr anchor="b">
-            <a:normAutofit/>
-          </a:bodyPr>
+          <a:bodyPr/>
           <a:lstStyle/>
           <a:p>
             <a:r>
-              <a:rPr lang="en-US" dirty="0" err="1"/>
-              <a:t>fdssdf</a:t>
+              <a:rPr lang="en-US" dirty="0"/>
+              <a:t>Can still have full remote access to YDB</a:t>
             </a:r>
             <a:endParaRPr lang="en-NL" dirty="0"/>
           </a:p>
         </p:txBody>
       </p:sp>
-      <p:graphicFrame>
-        <p:nvGraphicFramePr>
-          <p:cNvPr id="11" name="Content Placeholder 2">
+      <p:sp>
+        <p:nvSpPr>
+          <p:cNvPr id="3" name="Content Placeholder 2">
             <a:extLst>
               <a:ext uri="{FF2B5EF4-FFF2-40B4-BE49-F238E27FC236}">
-                <a16:creationId xmlns:a16="http://schemas.microsoft.com/office/drawing/2014/main" id="{088B2664-C99A-188C-C5EF-0529B0374B0B}"/>
+                <a16:creationId xmlns:a16="http://schemas.microsoft.com/office/drawing/2014/main" id="{D4CE1B68-CFBA-9041-161A-56428EE83C6F}"/>
               </a:ext>
             </a:extLst>
           </p:cNvPr>
-          <p:cNvGraphicFramePr>
-            <a:graphicFrameLocks noGrp="1"/>
-          </p:cNvGraphicFramePr>
+          <p:cNvSpPr>
+            <a:spLocks noGrp="1"/>
+          </p:cNvSpPr>
           <p:nvPr>
             <p:ph idx="1"/>
-            <p:extLst>
-              <p:ext uri="{E7BDC344-281C-4309-B0C6-D0EE65EED2A8}">
-                <p202:designPr xmlns:p202="http://schemas.microsoft.com/office/powerpoint/2020/02/main">
-                  <p202:designTagLst>
-                    <p202:designTag name="ARCH:1:CLS" val="InformationBlock"/>
-                    <p202:designTag name="ARCH:1:VSVAR" val="TitledTextBox"/>
-                  </p202:designTagLst>
-                </p202:designPr>
-              </p:ext>
-            </p:extLst>
           </p:nvPr>
-        </p:nvGraphicFramePr>
-        <p:xfrm>
-          <a:off x="1952481" y="2495774"/>
-          <a:ext cx="8278892" cy="3273426"/>
-        </p:xfrm>
-        <a:graphic>
-          <a:graphicData uri="http://schemas.openxmlformats.org/drawingml/2006/diagram">
-            <dgm:relIds xmlns:dgm="http://schemas.openxmlformats.org/drawingml/2006/diagram" xmlns:r="http://schemas.openxmlformats.org/officeDocument/2006/relationships" r:dm="rId2" r:lo="rId3" r:qs="rId4" r:cs="rId5"/>
-          </a:graphicData>
-        </a:graphic>
-      </p:graphicFrame>
+        </p:nvSpPr>
+        <p:spPr/>
+        <p:txBody>
+          <a:bodyPr/>
+          <a:lstStyle/>
+          <a:p>
+            <a:r>
+              <a:rPr lang="en-US" dirty="0"/>
+              <a:t>Built-in objects in the client allow direct access to the following:</a:t>
+            </a:r>
+          </a:p>
+          <a:p>
+            <a:pPr lvl="1"/>
+            <a:r>
+              <a:rPr lang="en-US" dirty="0"/>
+              <a:t>Globals</a:t>
+            </a:r>
+          </a:p>
+          <a:p>
+            <a:pPr lvl="1"/>
+            <a:r>
+              <a:rPr lang="en-US" dirty="0"/>
+              <a:t>Vars</a:t>
+            </a:r>
+          </a:p>
+          <a:p>
+            <a:pPr lvl="1"/>
+            <a:r>
+              <a:rPr lang="en-US" dirty="0"/>
+              <a:t>File system</a:t>
+            </a:r>
+          </a:p>
+          <a:p>
+            <a:pPr lvl="1"/>
+            <a:r>
+              <a:rPr lang="en-US" dirty="0"/>
+              <a:t>Process</a:t>
+            </a:r>
+          </a:p>
+          <a:p>
+            <a:pPr lvl="1"/>
+            <a:r>
+              <a:rPr lang="en-US" dirty="0"/>
+              <a:t>Server</a:t>
+            </a:r>
+          </a:p>
+          <a:p>
+            <a:r>
+              <a:rPr lang="en-US" dirty="0"/>
+              <a:t>The client-side methods follow the client language syntax and conventions</a:t>
+            </a:r>
+          </a:p>
+        </p:txBody>
+      </p:sp>
     </p:spTree>
     <p:extLst>
       <p:ext uri="{BB962C8B-B14F-4D97-AF65-F5344CB8AC3E}">
-        <p14:creationId xmlns:p14="http://schemas.microsoft.com/office/powerpoint/2010/main" val="2760101554"/>
+        <p14:creationId xmlns:p14="http://schemas.microsoft.com/office/powerpoint/2010/main" val="1643443457"/>
       </p:ext>
     </p:extLst>
   </p:cSld>
@@ -26264,7 +23363,7 @@
           <p:cNvPr id="2" name="Title 1">
             <a:extLst>
               <a:ext uri="{FF2B5EF4-FFF2-40B4-BE49-F238E27FC236}">
-                <a16:creationId xmlns:a16="http://schemas.microsoft.com/office/drawing/2014/main" id="{50DF909B-EE31-EFAE-7A0A-716460177410}"/>
+                <a16:creationId xmlns:a16="http://schemas.microsoft.com/office/drawing/2014/main" id="{9C17F876-DA93-1729-16F9-4679C8BBE4B2}"/>
               </a:ext>
             </a:extLst>
           </p:cNvPr>
@@ -26282,7 +23381,7 @@
           <a:p>
             <a:r>
               <a:rPr lang="en-US" dirty="0"/>
-              <a:t>Multiple client topology</a:t>
+              <a:t>What’s in for the future</a:t>
             </a:r>
             <a:endParaRPr lang="en-NL" dirty="0"/>
           </a:p>
@@ -26293,723 +23392,7 @@
           <p:cNvPr id="3" name="Content Placeholder 2">
             <a:extLst>
               <a:ext uri="{FF2B5EF4-FFF2-40B4-BE49-F238E27FC236}">
-                <a16:creationId xmlns:a16="http://schemas.microsoft.com/office/drawing/2014/main" id="{827D319E-4957-2EE4-4C13-0595662B4AAA}"/>
-              </a:ext>
-            </a:extLst>
-          </p:cNvPr>
-          <p:cNvSpPr>
-            <a:spLocks noGrp="1"/>
-          </p:cNvSpPr>
-          <p:nvPr>
-            <p:ph idx="1"/>
-          </p:nvPr>
-        </p:nvSpPr>
-        <p:spPr>
-          <a:xfrm>
-            <a:off x="1154954" y="3037840"/>
-            <a:ext cx="8825659" cy="3416300"/>
-          </a:xfrm>
-        </p:spPr>
-        <p:txBody>
-          <a:bodyPr/>
-          <a:lstStyle/>
-          <a:p>
-            <a:endParaRPr lang="en-NL" dirty="0"/>
-          </a:p>
-        </p:txBody>
-      </p:sp>
-      <p:sp>
-        <p:nvSpPr>
-          <p:cNvPr id="4" name="Rectangle: Rounded Corners 3">
-            <a:extLst>
-              <a:ext uri="{FF2B5EF4-FFF2-40B4-BE49-F238E27FC236}">
-                <a16:creationId xmlns:a16="http://schemas.microsoft.com/office/drawing/2014/main" id="{62F072E5-7887-F607-BF39-D96818D9FA72}"/>
-              </a:ext>
-            </a:extLst>
-          </p:cNvPr>
-          <p:cNvSpPr/>
-          <p:nvPr/>
-        </p:nvSpPr>
-        <p:spPr>
-          <a:xfrm>
-            <a:off x="7259541" y="2668657"/>
-            <a:ext cx="3633746" cy="3617843"/>
-          </a:xfrm>
-          <a:prstGeom prst="roundRect">
-            <a:avLst/>
-          </a:prstGeom>
-          <a:gradFill>
-            <a:gsLst>
-              <a:gs pos="0">
-                <a:schemeClr val="accent5">
-                  <a:lumMod val="60000"/>
-                  <a:lumOff val="40000"/>
-                </a:schemeClr>
-              </a:gs>
-              <a:gs pos="74000">
-                <a:schemeClr val="accent1">
-                  <a:lumMod val="45000"/>
-                  <a:lumOff val="55000"/>
-                </a:schemeClr>
-              </a:gs>
-              <a:gs pos="83000">
-                <a:schemeClr val="accent1">
-                  <a:lumMod val="45000"/>
-                  <a:lumOff val="55000"/>
-                </a:schemeClr>
-              </a:gs>
-              <a:gs pos="100000">
-                <a:schemeClr val="accent5">
-                  <a:lumMod val="60000"/>
-                  <a:lumOff val="40000"/>
-                </a:schemeClr>
-              </a:gs>
-            </a:gsLst>
-            <a:lin ang="5400000" scaled="1"/>
-          </a:gradFill>
-        </p:spPr>
-        <p:style>
-          <a:lnRef idx="2">
-            <a:schemeClr val="accent1">
-              <a:shade val="15000"/>
-            </a:schemeClr>
-          </a:lnRef>
-          <a:fillRef idx="1">
-            <a:schemeClr val="accent1"/>
-          </a:fillRef>
-          <a:effectRef idx="0">
-            <a:schemeClr val="accent1"/>
-          </a:effectRef>
-          <a:fontRef idx="minor">
-            <a:schemeClr val="lt1"/>
-          </a:fontRef>
-        </p:style>
-        <p:txBody>
-          <a:bodyPr rtlCol="0" anchor="ctr"/>
-          <a:lstStyle/>
-          <a:p>
-            <a:pPr algn="ctr"/>
-            <a:endParaRPr lang="en-NL"/>
-          </a:p>
-        </p:txBody>
-      </p:sp>
-      <p:sp>
-        <p:nvSpPr>
-          <p:cNvPr id="5" name="Rectangle: Rounded Corners 4">
-            <a:extLst>
-              <a:ext uri="{FF2B5EF4-FFF2-40B4-BE49-F238E27FC236}">
-                <a16:creationId xmlns:a16="http://schemas.microsoft.com/office/drawing/2014/main" id="{36498F2A-2B3E-EC6E-3370-BDA6ECEEBCD1}"/>
-              </a:ext>
-            </a:extLst>
-          </p:cNvPr>
-          <p:cNvSpPr/>
-          <p:nvPr/>
-        </p:nvSpPr>
-        <p:spPr>
-          <a:xfrm>
-            <a:off x="1338470" y="3051644"/>
-            <a:ext cx="1550504" cy="662609"/>
-          </a:xfrm>
-          <a:prstGeom prst="roundRect">
-            <a:avLst/>
-          </a:prstGeom>
-        </p:spPr>
-        <p:style>
-          <a:lnRef idx="2">
-            <a:schemeClr val="accent1">
-              <a:shade val="15000"/>
-            </a:schemeClr>
-          </a:lnRef>
-          <a:fillRef idx="1">
-            <a:schemeClr val="accent1"/>
-          </a:fillRef>
-          <a:effectRef idx="0">
-            <a:schemeClr val="accent1"/>
-          </a:effectRef>
-          <a:fontRef idx="minor">
-            <a:schemeClr val="lt1"/>
-          </a:fontRef>
-        </p:style>
-        <p:txBody>
-          <a:bodyPr rtlCol="0" anchor="ctr"/>
-          <a:lstStyle/>
-          <a:p>
-            <a:pPr algn="ctr"/>
-            <a:r>
-              <a:rPr lang="en-US" dirty="0"/>
-              <a:t>Client</a:t>
-            </a:r>
-          </a:p>
-          <a:p>
-            <a:pPr algn="ctr"/>
-            <a:r>
-              <a:rPr lang="en-US" dirty="0"/>
-              <a:t>(nodejs)</a:t>
-            </a:r>
-            <a:endParaRPr lang="en-NL" dirty="0"/>
-          </a:p>
-        </p:txBody>
-      </p:sp>
-      <p:sp>
-        <p:nvSpPr>
-          <p:cNvPr id="6" name="Rectangle: Rounded Corners 5">
-            <a:extLst>
-              <a:ext uri="{FF2B5EF4-FFF2-40B4-BE49-F238E27FC236}">
-                <a16:creationId xmlns:a16="http://schemas.microsoft.com/office/drawing/2014/main" id="{C617F3A1-D3FE-2883-548B-55FBC5FAB49B}"/>
-              </a:ext>
-            </a:extLst>
-          </p:cNvPr>
-          <p:cNvSpPr/>
-          <p:nvPr/>
-        </p:nvSpPr>
-        <p:spPr>
-          <a:xfrm>
-            <a:off x="1338470" y="4052184"/>
-            <a:ext cx="1550504" cy="662609"/>
-          </a:xfrm>
-          <a:prstGeom prst="roundRect">
-            <a:avLst/>
-          </a:prstGeom>
-        </p:spPr>
-        <p:style>
-          <a:lnRef idx="2">
-            <a:schemeClr val="accent1">
-              <a:shade val="15000"/>
-            </a:schemeClr>
-          </a:lnRef>
-          <a:fillRef idx="1">
-            <a:schemeClr val="accent1"/>
-          </a:fillRef>
-          <a:effectRef idx="0">
-            <a:schemeClr val="accent1"/>
-          </a:effectRef>
-          <a:fontRef idx="minor">
-            <a:schemeClr val="lt1"/>
-          </a:fontRef>
-        </p:style>
-        <p:txBody>
-          <a:bodyPr rtlCol="0" anchor="ctr"/>
-          <a:lstStyle/>
-          <a:p>
-            <a:pPr algn="ctr"/>
-            <a:r>
-              <a:rPr lang="en-US" dirty="0"/>
-              <a:t>Client</a:t>
-            </a:r>
-          </a:p>
-          <a:p>
-            <a:pPr algn="ctr"/>
-            <a:r>
-              <a:rPr lang="en-US" dirty="0"/>
-              <a:t>(Go)</a:t>
-            </a:r>
-            <a:endParaRPr lang="en-NL" dirty="0"/>
-          </a:p>
-        </p:txBody>
-      </p:sp>
-      <p:sp>
-        <p:nvSpPr>
-          <p:cNvPr id="7" name="Rectangle: Rounded Corners 6">
-            <a:extLst>
-              <a:ext uri="{FF2B5EF4-FFF2-40B4-BE49-F238E27FC236}">
-                <a16:creationId xmlns:a16="http://schemas.microsoft.com/office/drawing/2014/main" id="{17CB8825-4B0A-2B99-5CCA-B5B43ED68D5E}"/>
-              </a:ext>
-            </a:extLst>
-          </p:cNvPr>
-          <p:cNvSpPr/>
-          <p:nvPr/>
-        </p:nvSpPr>
-        <p:spPr>
-          <a:xfrm>
-            <a:off x="1338470" y="5138864"/>
-            <a:ext cx="1550504" cy="662609"/>
-          </a:xfrm>
-          <a:prstGeom prst="roundRect">
-            <a:avLst/>
-          </a:prstGeom>
-        </p:spPr>
-        <p:style>
-          <a:lnRef idx="2">
-            <a:schemeClr val="accent1">
-              <a:shade val="15000"/>
-            </a:schemeClr>
-          </a:lnRef>
-          <a:fillRef idx="1">
-            <a:schemeClr val="accent1"/>
-          </a:fillRef>
-          <a:effectRef idx="0">
-            <a:schemeClr val="accent1"/>
-          </a:effectRef>
-          <a:fontRef idx="minor">
-            <a:schemeClr val="lt1"/>
-          </a:fontRef>
-        </p:style>
-        <p:txBody>
-          <a:bodyPr rtlCol="0" anchor="ctr"/>
-          <a:lstStyle/>
-          <a:p>
-            <a:pPr algn="ctr"/>
-            <a:r>
-              <a:rPr lang="en-US" dirty="0"/>
-              <a:t>Client</a:t>
-            </a:r>
-          </a:p>
-          <a:p>
-            <a:pPr algn="ctr"/>
-            <a:r>
-              <a:rPr lang="en-US" dirty="0"/>
-              <a:t>(Python)</a:t>
-            </a:r>
-            <a:endParaRPr lang="en-NL" dirty="0"/>
-          </a:p>
-        </p:txBody>
-      </p:sp>
-      <p:sp>
-        <p:nvSpPr>
-          <p:cNvPr id="8" name="TextBox 7">
-            <a:extLst>
-              <a:ext uri="{FF2B5EF4-FFF2-40B4-BE49-F238E27FC236}">
-                <a16:creationId xmlns:a16="http://schemas.microsoft.com/office/drawing/2014/main" id="{B05DF86D-A187-60DE-9EAA-60488AC3907E}"/>
-              </a:ext>
-            </a:extLst>
-          </p:cNvPr>
-          <p:cNvSpPr txBox="1"/>
-          <p:nvPr/>
-        </p:nvSpPr>
-        <p:spPr>
-          <a:xfrm>
-            <a:off x="9558414" y="5156235"/>
-            <a:ext cx="1457740" cy="646331"/>
-          </a:xfrm>
-          <a:prstGeom prst="rect">
-            <a:avLst/>
-          </a:prstGeom>
-          <a:noFill/>
-        </p:spPr>
-        <p:txBody>
-          <a:bodyPr wrap="square" rtlCol="0">
-            <a:spAutoFit/>
-          </a:bodyPr>
-          <a:lstStyle/>
-          <a:p>
-            <a:r>
-              <a:rPr lang="en-US" b="1" dirty="0">
-                <a:solidFill>
-                  <a:srgbClr val="FFFF00"/>
-                </a:solidFill>
-              </a:rPr>
-              <a:t>YottaDB</a:t>
-            </a:r>
-          </a:p>
-          <a:p>
-            <a:r>
-              <a:rPr lang="en-US" b="1" dirty="0">
-                <a:solidFill>
-                  <a:srgbClr val="FFFF00"/>
-                </a:solidFill>
-              </a:rPr>
-              <a:t>database</a:t>
-            </a:r>
-            <a:endParaRPr lang="en-NL" b="1" dirty="0">
-              <a:solidFill>
-                <a:srgbClr val="FFFF00"/>
-              </a:solidFill>
-            </a:endParaRPr>
-          </a:p>
-        </p:txBody>
-      </p:sp>
-      <p:sp>
-        <p:nvSpPr>
-          <p:cNvPr id="9" name="Arrow: Left-Right 8">
-            <a:extLst>
-              <a:ext uri="{FF2B5EF4-FFF2-40B4-BE49-F238E27FC236}">
-                <a16:creationId xmlns:a16="http://schemas.microsoft.com/office/drawing/2014/main" id="{8B874837-BD2C-4052-D10C-2C6FD0E0B0CD}"/>
-              </a:ext>
-            </a:extLst>
-          </p:cNvPr>
-          <p:cNvSpPr/>
-          <p:nvPr/>
-        </p:nvSpPr>
-        <p:spPr>
-          <a:xfrm>
-            <a:off x="2888974" y="3098027"/>
-            <a:ext cx="4723406" cy="490330"/>
-          </a:xfrm>
-          <a:prstGeom prst="leftRightArrow">
-            <a:avLst/>
-          </a:prstGeom>
-          <a:gradFill>
-            <a:gsLst>
-              <a:gs pos="0">
-                <a:schemeClr val="accent1">
-                  <a:lumMod val="5000"/>
-                  <a:lumOff val="95000"/>
-                </a:schemeClr>
-              </a:gs>
-              <a:gs pos="74000">
-                <a:schemeClr val="accent1">
-                  <a:lumMod val="45000"/>
-                  <a:lumOff val="55000"/>
-                </a:schemeClr>
-              </a:gs>
-              <a:gs pos="83000">
-                <a:schemeClr val="accent1">
-                  <a:lumMod val="45000"/>
-                  <a:lumOff val="55000"/>
-                </a:schemeClr>
-              </a:gs>
-              <a:gs pos="100000">
-                <a:schemeClr val="accent1">
-                  <a:lumMod val="30000"/>
-                  <a:lumOff val="70000"/>
-                </a:schemeClr>
-              </a:gs>
-            </a:gsLst>
-            <a:lin ang="5400000" scaled="1"/>
-          </a:gradFill>
-        </p:spPr>
-        <p:style>
-          <a:lnRef idx="2">
-            <a:schemeClr val="accent1">
-              <a:shade val="15000"/>
-            </a:schemeClr>
-          </a:lnRef>
-          <a:fillRef idx="1">
-            <a:schemeClr val="accent1"/>
-          </a:fillRef>
-          <a:effectRef idx="0">
-            <a:schemeClr val="accent1"/>
-          </a:effectRef>
-          <a:fontRef idx="minor">
-            <a:schemeClr val="lt1"/>
-          </a:fontRef>
-        </p:style>
-        <p:txBody>
-          <a:bodyPr rtlCol="0" anchor="ctr"/>
-          <a:lstStyle/>
-          <a:p>
-            <a:pPr algn="ctr"/>
-            <a:r>
-              <a:rPr lang="en-US" dirty="0"/>
-              <a:t>RESP3</a:t>
-            </a:r>
-            <a:endParaRPr lang="en-NL" dirty="0"/>
-          </a:p>
-        </p:txBody>
-      </p:sp>
-      <p:sp>
-        <p:nvSpPr>
-          <p:cNvPr id="10" name="Arrow: Left-Right 9">
-            <a:extLst>
-              <a:ext uri="{FF2B5EF4-FFF2-40B4-BE49-F238E27FC236}">
-                <a16:creationId xmlns:a16="http://schemas.microsoft.com/office/drawing/2014/main" id="{361A8CD9-16B7-755F-4E8A-F0E7175BCAB8}"/>
-              </a:ext>
-            </a:extLst>
-          </p:cNvPr>
-          <p:cNvSpPr/>
-          <p:nvPr/>
-        </p:nvSpPr>
-        <p:spPr>
-          <a:xfrm>
-            <a:off x="2888972" y="4138324"/>
-            <a:ext cx="4723405" cy="490330"/>
-          </a:xfrm>
-          <a:prstGeom prst="leftRightArrow">
-            <a:avLst/>
-          </a:prstGeom>
-          <a:gradFill>
-            <a:gsLst>
-              <a:gs pos="0">
-                <a:schemeClr val="accent1">
-                  <a:lumMod val="5000"/>
-                  <a:lumOff val="95000"/>
-                </a:schemeClr>
-              </a:gs>
-              <a:gs pos="74000">
-                <a:schemeClr val="accent1">
-                  <a:lumMod val="45000"/>
-                  <a:lumOff val="55000"/>
-                </a:schemeClr>
-              </a:gs>
-              <a:gs pos="83000">
-                <a:schemeClr val="accent1">
-                  <a:lumMod val="45000"/>
-                  <a:lumOff val="55000"/>
-                </a:schemeClr>
-              </a:gs>
-              <a:gs pos="100000">
-                <a:schemeClr val="accent1">
-                  <a:lumMod val="30000"/>
-                  <a:lumOff val="70000"/>
-                </a:schemeClr>
-              </a:gs>
-            </a:gsLst>
-            <a:lin ang="5400000" scaled="1"/>
-          </a:gradFill>
-        </p:spPr>
-        <p:style>
-          <a:lnRef idx="2">
-            <a:schemeClr val="accent1">
-              <a:shade val="15000"/>
-            </a:schemeClr>
-          </a:lnRef>
-          <a:fillRef idx="1">
-            <a:schemeClr val="accent1"/>
-          </a:fillRef>
-          <a:effectRef idx="0">
-            <a:schemeClr val="accent1"/>
-          </a:effectRef>
-          <a:fontRef idx="minor">
-            <a:schemeClr val="lt1"/>
-          </a:fontRef>
-        </p:style>
-        <p:txBody>
-          <a:bodyPr rtlCol="0" anchor="ctr"/>
-          <a:lstStyle/>
-          <a:p>
-            <a:pPr algn="ctr"/>
-            <a:r>
-              <a:rPr lang="en-US" dirty="0"/>
-              <a:t>RESP3</a:t>
-            </a:r>
-            <a:endParaRPr lang="en-NL" dirty="0"/>
-          </a:p>
-        </p:txBody>
-      </p:sp>
-      <p:sp>
-        <p:nvSpPr>
-          <p:cNvPr id="11" name="Arrow: Left-Right 10">
-            <a:extLst>
-              <a:ext uri="{FF2B5EF4-FFF2-40B4-BE49-F238E27FC236}">
-                <a16:creationId xmlns:a16="http://schemas.microsoft.com/office/drawing/2014/main" id="{6DFC8CCF-17FF-8005-BDBE-EC14BF92D6E8}"/>
-              </a:ext>
-            </a:extLst>
-          </p:cNvPr>
-          <p:cNvSpPr/>
-          <p:nvPr/>
-        </p:nvSpPr>
-        <p:spPr>
-          <a:xfrm>
-            <a:off x="2888974" y="5198496"/>
-            <a:ext cx="4723403" cy="490330"/>
-          </a:xfrm>
-          <a:prstGeom prst="leftRightArrow">
-            <a:avLst/>
-          </a:prstGeom>
-          <a:gradFill>
-            <a:gsLst>
-              <a:gs pos="0">
-                <a:schemeClr val="accent1">
-                  <a:lumMod val="5000"/>
-                  <a:lumOff val="95000"/>
-                </a:schemeClr>
-              </a:gs>
-              <a:gs pos="74000">
-                <a:schemeClr val="accent1">
-                  <a:lumMod val="45000"/>
-                  <a:lumOff val="55000"/>
-                </a:schemeClr>
-              </a:gs>
-              <a:gs pos="83000">
-                <a:schemeClr val="accent1">
-                  <a:lumMod val="45000"/>
-                  <a:lumOff val="55000"/>
-                </a:schemeClr>
-              </a:gs>
-              <a:gs pos="100000">
-                <a:schemeClr val="accent1">
-                  <a:lumMod val="30000"/>
-                  <a:lumOff val="70000"/>
-                </a:schemeClr>
-              </a:gs>
-            </a:gsLst>
-            <a:lin ang="5400000" scaled="1"/>
-          </a:gradFill>
-        </p:spPr>
-        <p:style>
-          <a:lnRef idx="2">
-            <a:schemeClr val="accent1">
-              <a:shade val="15000"/>
-            </a:schemeClr>
-          </a:lnRef>
-          <a:fillRef idx="1">
-            <a:schemeClr val="accent1"/>
-          </a:fillRef>
-          <a:effectRef idx="0">
-            <a:schemeClr val="accent1"/>
-          </a:effectRef>
-          <a:fontRef idx="minor">
-            <a:schemeClr val="lt1"/>
-          </a:fontRef>
-        </p:style>
-        <p:txBody>
-          <a:bodyPr rtlCol="0" anchor="ctr"/>
-          <a:lstStyle/>
-          <a:p>
-            <a:pPr algn="ctr"/>
-            <a:r>
-              <a:rPr lang="en-US" dirty="0"/>
-              <a:t>RESP3</a:t>
-            </a:r>
-            <a:endParaRPr lang="en-NL" dirty="0"/>
-          </a:p>
-        </p:txBody>
-      </p:sp>
-      <p:sp>
-        <p:nvSpPr>
-          <p:cNvPr id="12" name="Rectangle: Rounded Corners 11">
-            <a:extLst>
-              <a:ext uri="{FF2B5EF4-FFF2-40B4-BE49-F238E27FC236}">
-                <a16:creationId xmlns:a16="http://schemas.microsoft.com/office/drawing/2014/main" id="{F2353F4B-EBEF-762E-C172-A1A47A2201EF}"/>
-              </a:ext>
-            </a:extLst>
-          </p:cNvPr>
-          <p:cNvSpPr/>
-          <p:nvPr/>
-        </p:nvSpPr>
-        <p:spPr>
-          <a:xfrm>
-            <a:off x="7612380" y="2900238"/>
-            <a:ext cx="1690646" cy="3154680"/>
-          </a:xfrm>
-          <a:prstGeom prst="roundRect">
-            <a:avLst/>
-          </a:prstGeom>
-        </p:spPr>
-        <p:style>
-          <a:lnRef idx="2">
-            <a:schemeClr val="accent1">
-              <a:shade val="15000"/>
-            </a:schemeClr>
-          </a:lnRef>
-          <a:fillRef idx="1">
-            <a:schemeClr val="accent1"/>
-          </a:fillRef>
-          <a:effectRef idx="0">
-            <a:schemeClr val="accent1"/>
-          </a:effectRef>
-          <a:fontRef idx="minor">
-            <a:schemeClr val="lt1"/>
-          </a:fontRef>
-        </p:style>
-        <p:txBody>
-          <a:bodyPr rtlCol="0" anchor="ctr"/>
-          <a:lstStyle/>
-          <a:p>
-            <a:pPr algn="ctr"/>
-            <a:endParaRPr lang="en-NL"/>
-          </a:p>
-        </p:txBody>
-      </p:sp>
-      <p:sp>
-        <p:nvSpPr>
-          <p:cNvPr id="17" name="TextBox 16">
-            <a:extLst>
-              <a:ext uri="{FF2B5EF4-FFF2-40B4-BE49-F238E27FC236}">
-                <a16:creationId xmlns:a16="http://schemas.microsoft.com/office/drawing/2014/main" id="{FEABB92C-848E-CB9F-39FD-089BE313EB37}"/>
-              </a:ext>
-            </a:extLst>
-          </p:cNvPr>
-          <p:cNvSpPr txBox="1"/>
-          <p:nvPr/>
-        </p:nvSpPr>
-        <p:spPr>
-          <a:xfrm>
-            <a:off x="8174125" y="4099659"/>
-            <a:ext cx="978463" cy="646331"/>
-          </a:xfrm>
-          <a:prstGeom prst="rect">
-            <a:avLst/>
-          </a:prstGeom>
-          <a:noFill/>
-        </p:spPr>
-        <p:txBody>
-          <a:bodyPr wrap="square" rtlCol="0">
-            <a:spAutoFit/>
-          </a:bodyPr>
-          <a:lstStyle/>
-          <a:p>
-            <a:r>
-              <a:rPr lang="en-US" b="1" dirty="0">
-                <a:solidFill>
-                  <a:srgbClr val="FFFF00"/>
-                </a:solidFill>
-              </a:rPr>
-              <a:t>MIND server</a:t>
-            </a:r>
-            <a:endParaRPr lang="en-NL" b="1" dirty="0">
-              <a:solidFill>
-                <a:srgbClr val="FFFF00"/>
-              </a:solidFill>
-            </a:endParaRPr>
-          </a:p>
-        </p:txBody>
-      </p:sp>
-    </p:spTree>
-    <p:extLst>
-      <p:ext uri="{BB962C8B-B14F-4D97-AF65-F5344CB8AC3E}">
-        <p14:creationId xmlns:p14="http://schemas.microsoft.com/office/powerpoint/2010/main" val="3503112432"/>
-      </p:ext>
-    </p:extLst>
-  </p:cSld>
-  <p:clrMapOvr>
-    <a:masterClrMapping/>
-  </p:clrMapOvr>
-</p:sld>
-</file>
-
-<file path=ppt/slides/slide13.xml><?xml version="1.0" encoding="utf-8"?>
-<p:sld xmlns:a="http://schemas.openxmlformats.org/drawingml/2006/main" xmlns:r="http://schemas.openxmlformats.org/officeDocument/2006/relationships" xmlns:p="http://schemas.openxmlformats.org/presentationml/2006/main">
-  <p:cSld>
-    <p:spTree>
-      <p:nvGrpSpPr>
-        <p:cNvPr id="1" name=""/>
-        <p:cNvGrpSpPr/>
-        <p:nvPr/>
-      </p:nvGrpSpPr>
-      <p:grpSpPr>
-        <a:xfrm>
-          <a:off x="0" y="0"/>
-          <a:ext cx="0" cy="0"/>
-          <a:chOff x="0" y="0"/>
-          <a:chExt cx="0" cy="0"/>
-        </a:xfrm>
-      </p:grpSpPr>
-      <p:sp>
-        <p:nvSpPr>
-          <p:cNvPr id="2" name="Title 1">
-            <a:extLst>
-              <a:ext uri="{FF2B5EF4-FFF2-40B4-BE49-F238E27FC236}">
-                <a16:creationId xmlns:a16="http://schemas.microsoft.com/office/drawing/2014/main" id="{71A0E760-2C4C-850E-B41F-5ABE7C392222}"/>
-              </a:ext>
-            </a:extLst>
-          </p:cNvPr>
-          <p:cNvSpPr>
-            <a:spLocks noGrp="1"/>
-          </p:cNvSpPr>
-          <p:nvPr>
-            <p:ph type="title"/>
-          </p:nvPr>
-        </p:nvSpPr>
-        <p:spPr/>
-        <p:txBody>
-          <a:bodyPr/>
-          <a:lstStyle/>
-          <a:p>
-            <a:r>
-              <a:rPr lang="en-US" dirty="0"/>
-              <a:t>Future</a:t>
-            </a:r>
-            <a:endParaRPr lang="en-NL" dirty="0"/>
-          </a:p>
-        </p:txBody>
-      </p:sp>
-      <p:sp>
-        <p:nvSpPr>
-          <p:cNvPr id="3" name="Content Placeholder 2">
-            <a:extLst>
-              <a:ext uri="{FF2B5EF4-FFF2-40B4-BE49-F238E27FC236}">
-                <a16:creationId xmlns:a16="http://schemas.microsoft.com/office/drawing/2014/main" id="{557E02B4-15A9-AA4C-6998-FB05601E23DF}"/>
+                <a16:creationId xmlns:a16="http://schemas.microsoft.com/office/drawing/2014/main" id="{5D936BA7-2755-5F52-756F-939E758F9BA3}"/>
               </a:ext>
             </a:extLst>
           </p:cNvPr>
@@ -27025,14 +23408,32 @@
           <a:bodyPr/>
           <a:lstStyle/>
           <a:p>
-            <a:endParaRPr lang="en-NL"/>
+            <a:r>
+              <a:rPr lang="en-US" dirty="0"/>
+              <a:t>The DBMS class will expose a JSON / Object database</a:t>
+            </a:r>
+          </a:p>
+          <a:p>
+            <a:r>
+              <a:rPr lang="en-US" dirty="0"/>
+              <a:t>It will allow tables linking in a similar way Fileman does</a:t>
+            </a:r>
+          </a:p>
+          <a:p>
+            <a:r>
+              <a:rPr lang="en-US" dirty="0"/>
+              <a:t>It will support deep-indexing (indexes of fields deep into object props and arrays)</a:t>
+            </a:r>
+          </a:p>
+          <a:p>
+            <a:endParaRPr lang="en-NL" dirty="0"/>
           </a:p>
         </p:txBody>
       </p:sp>
     </p:spTree>
     <p:extLst>
       <p:ext uri="{BB962C8B-B14F-4D97-AF65-F5344CB8AC3E}">
-        <p14:creationId xmlns:p14="http://schemas.microsoft.com/office/powerpoint/2010/main" val="4078133730"/>
+        <p14:creationId xmlns:p14="http://schemas.microsoft.com/office/powerpoint/2010/main" val="3545671728"/>
       </p:ext>
     </p:extLst>
   </p:cSld>
@@ -28690,7 +25091,7 @@
           <a:p>
             <a:r>
               <a:rPr lang="en-US" dirty="0"/>
-              <a:t>Describe you return value data-type</a:t>
+              <a:t>Describe your (optional) return value data-type</a:t>
             </a:r>
           </a:p>
           <a:p>

--- a/docs/slides/def1.pptx
+++ b/docs/slides/def1.pptx
@@ -6,17 +6,18 @@
   </p:sldMasterIdLst>
   <p:sldIdLst>
     <p:sldId id="256" r:id="rId2"/>
-    <p:sldId id="258" r:id="rId3"/>
-    <p:sldId id="264" r:id="rId4"/>
-    <p:sldId id="259" r:id="rId5"/>
-    <p:sldId id="257" r:id="rId6"/>
-    <p:sldId id="267" r:id="rId7"/>
+    <p:sldId id="257" r:id="rId3"/>
+    <p:sldId id="267" r:id="rId4"/>
+    <p:sldId id="258" r:id="rId5"/>
+    <p:sldId id="264" r:id="rId6"/>
+    <p:sldId id="259" r:id="rId7"/>
     <p:sldId id="266" r:id="rId8"/>
     <p:sldId id="263" r:id="rId9"/>
     <p:sldId id="260" r:id="rId10"/>
     <p:sldId id="268" r:id="rId11"/>
     <p:sldId id="270" r:id="rId12"/>
-    <p:sldId id="269" r:id="rId13"/>
+    <p:sldId id="271" r:id="rId13"/>
+    <p:sldId id="269" r:id="rId14"/>
   </p:sldIdLst>
   <p:sldSz cx="12192000" cy="6858000"/>
   <p:notesSz cx="6858000" cy="9144000"/>
@@ -3079,6 +3080,12 @@
         <a:bodyPr/>
         <a:lstStyle/>
         <a:p>
+          <a:pPr>
+            <a:lnSpc>
+              <a:spcPct val="100000"/>
+            </a:lnSpc>
+            <a:defRPr b="1"/>
+          </a:pPr>
           <a:endParaRPr lang="en-US"/>
         </a:p>
       </dgm:t>
@@ -3135,6 +3142,139 @@
         </a:p>
       </dgm:t>
     </dgm:pt>
+    <dgm:pt modelId="{3AA2FA24-1521-4189-A205-F4F5DE278920}">
+      <dgm:prSet/>
+      <dgm:spPr/>
+      <dgm:t>
+        <a:bodyPr/>
+        <a:lstStyle/>
+        <a:p>
+          <a:pPr>
+            <a:lnSpc>
+              <a:spcPct val="100000"/>
+            </a:lnSpc>
+            <a:defRPr b="1"/>
+          </a:pPr>
+          <a:r>
+            <a:rPr lang="en-US" dirty="0"/>
+            <a:t>Support your existing M code right away</a:t>
+          </a:r>
+          <a:endParaRPr lang="en-NL" dirty="0"/>
+        </a:p>
+      </dgm:t>
+    </dgm:pt>
+    <dgm:pt modelId="{8EB9754A-2D2C-47B0-86CE-A121140B02A9}" type="parTrans" cxnId="{EE50A9F9-0633-48E6-8993-9AAE38539E93}">
+      <dgm:prSet/>
+      <dgm:spPr/>
+      <dgm:t>
+        <a:bodyPr/>
+        <a:lstStyle/>
+        <a:p>
+          <a:endParaRPr lang="en-NL"/>
+        </a:p>
+      </dgm:t>
+    </dgm:pt>
+    <dgm:pt modelId="{E9066788-C52E-4A94-AF8C-EFACB72EE811}" type="sibTrans" cxnId="{EE50A9F9-0633-48E6-8993-9AAE38539E93}">
+      <dgm:prSet/>
+      <dgm:spPr/>
+      <dgm:t>
+        <a:bodyPr/>
+        <a:lstStyle/>
+        <a:p>
+          <a:pPr>
+            <a:lnSpc>
+              <a:spcPct val="100000"/>
+            </a:lnSpc>
+            <a:defRPr b="1"/>
+          </a:pPr>
+          <a:endParaRPr lang="en-NL"/>
+        </a:p>
+      </dgm:t>
+    </dgm:pt>
+    <dgm:pt modelId="{341895CC-F5AE-4185-A7B4-20DAAD306EDB}">
+      <dgm:prSet/>
+      <dgm:spPr/>
+      <dgm:t>
+        <a:bodyPr/>
+        <a:lstStyle/>
+        <a:p>
+          <a:pPr>
+            <a:lnSpc>
+              <a:spcPct val="100000"/>
+            </a:lnSpc>
+          </a:pPr>
+          <a:r>
+            <a:rPr lang="en-US" dirty="0"/>
+            <a:t>You can call your existing code directly, specifying parameters and (eventual) return value.</a:t>
+          </a:r>
+          <a:endParaRPr lang="en-NL" dirty="0"/>
+        </a:p>
+      </dgm:t>
+    </dgm:pt>
+    <dgm:pt modelId="{51E34353-253B-4A09-907A-C1F0F987F1E7}" type="parTrans" cxnId="{29E62658-E0CD-4D06-ADB0-9341313A866D}">
+      <dgm:prSet/>
+      <dgm:spPr/>
+      <dgm:t>
+        <a:bodyPr/>
+        <a:lstStyle/>
+        <a:p>
+          <a:endParaRPr lang="en-NL"/>
+        </a:p>
+      </dgm:t>
+    </dgm:pt>
+    <dgm:pt modelId="{5EEB0805-A565-4B85-B7A5-6ACF3C848277}" type="sibTrans" cxnId="{29E62658-E0CD-4D06-ADB0-9341313A866D}">
+      <dgm:prSet/>
+      <dgm:spPr/>
+      <dgm:t>
+        <a:bodyPr/>
+        <a:lstStyle/>
+        <a:p>
+          <a:endParaRPr lang="en-NL"/>
+        </a:p>
+      </dgm:t>
+    </dgm:pt>
+    <dgm:pt modelId="{C0297382-340E-4BD9-9668-818CC13B2B4C}">
+      <dgm:prSet/>
+      <dgm:spPr/>
+      <dgm:t>
+        <a:bodyPr/>
+        <a:lstStyle/>
+        <a:p>
+          <a:pPr>
+            <a:lnSpc>
+              <a:spcPct val="100000"/>
+            </a:lnSpc>
+          </a:pPr>
+          <a:r>
+            <a:rPr lang="en-US" dirty="0"/>
+            <a:t>Once you describe your code in the JSON file, it is available in the client right away</a:t>
+          </a:r>
+          <a:endParaRPr lang="en-NL" dirty="0"/>
+        </a:p>
+      </dgm:t>
+    </dgm:pt>
+    <dgm:pt modelId="{0AE2E466-7E32-43D2-AC2C-09CEF94D0E22}" type="parTrans" cxnId="{FBF3D7A3-FCBE-4402-8DBE-E5365C2A14BD}">
+      <dgm:prSet/>
+      <dgm:spPr/>
+      <dgm:t>
+        <a:bodyPr/>
+        <a:lstStyle/>
+        <a:p>
+          <a:endParaRPr lang="en-NL"/>
+        </a:p>
+      </dgm:t>
+    </dgm:pt>
+    <dgm:pt modelId="{061912DC-B2E0-4F87-B8A9-21B8C40566D7}" type="sibTrans" cxnId="{FBF3D7A3-FCBE-4402-8DBE-E5365C2A14BD}">
+      <dgm:prSet/>
+      <dgm:spPr/>
+      <dgm:t>
+        <a:bodyPr/>
+        <a:lstStyle/>
+        <a:p>
+          <a:endParaRPr lang="en-NL"/>
+        </a:p>
+      </dgm:t>
+    </dgm:pt>
     <dgm:pt modelId="{3171E97B-CDE9-41AD-B264-8ADEE4D73563}" type="pres">
       <dgm:prSet presAssocID="{996C4E6A-2C60-4428-8C91-27910EF058EC}" presName="Name0" presStyleCnt="0">
         <dgm:presLayoutVars>
@@ -3149,7 +3289,7 @@
       <dgm:spPr/>
     </dgm:pt>
     <dgm:pt modelId="{018F7438-E01D-44D7-ADD6-157BC62500E3}" type="pres">
-      <dgm:prSet presAssocID="{D594FA1A-CAFE-4FC9-B29F-017F3AF2316D}" presName="pictRect" presStyleLbl="revTx" presStyleIdx="0" presStyleCnt="6">
+      <dgm:prSet presAssocID="{D594FA1A-CAFE-4FC9-B29F-017F3AF2316D}" presName="pictRect" presStyleLbl="revTx" presStyleIdx="0" presStyleCnt="8">
         <dgm:presLayoutVars>
           <dgm:chMax val="0"/>
           <dgm:bulletEnabled/>
@@ -3158,7 +3298,7 @@
       <dgm:spPr/>
     </dgm:pt>
     <dgm:pt modelId="{5C90C3CA-0AA3-4EBE-B50C-5D1938624D21}" type="pres">
-      <dgm:prSet presAssocID="{D594FA1A-CAFE-4FC9-B29F-017F3AF2316D}" presName="textRect" presStyleLbl="revTx" presStyleIdx="1" presStyleCnt="6">
+      <dgm:prSet presAssocID="{D594FA1A-CAFE-4FC9-B29F-017F3AF2316D}" presName="textRect" presStyleLbl="revTx" presStyleIdx="1" presStyleCnt="8">
         <dgm:presLayoutVars>
           <dgm:bulletEnabled/>
         </dgm:presLayoutVars>
@@ -3174,7 +3314,7 @@
       <dgm:spPr/>
     </dgm:pt>
     <dgm:pt modelId="{58CF0B87-5490-46B7-A456-64A277CB332C}" type="pres">
-      <dgm:prSet presAssocID="{768B9187-70A7-4F24-98C9-4549D9A80F20}" presName="pictRect" presStyleLbl="revTx" presStyleIdx="2" presStyleCnt="6">
+      <dgm:prSet presAssocID="{768B9187-70A7-4F24-98C9-4549D9A80F20}" presName="pictRect" presStyleLbl="revTx" presStyleIdx="2" presStyleCnt="8">
         <dgm:presLayoutVars>
           <dgm:chMax val="0"/>
           <dgm:bulletEnabled/>
@@ -3183,7 +3323,7 @@
       <dgm:spPr/>
     </dgm:pt>
     <dgm:pt modelId="{8BB355F9-6CC2-4480-9B7E-D892D65FD34C}" type="pres">
-      <dgm:prSet presAssocID="{768B9187-70A7-4F24-98C9-4549D9A80F20}" presName="textRect" presStyleLbl="revTx" presStyleIdx="3" presStyleCnt="6" custLinFactNeighborX="0" custLinFactNeighborY="3582">
+      <dgm:prSet presAssocID="{768B9187-70A7-4F24-98C9-4549D9A80F20}" presName="textRect" presStyleLbl="revTx" presStyleIdx="3" presStyleCnt="8" custLinFactNeighborX="0" custLinFactNeighborY="3582">
         <dgm:presLayoutVars>
           <dgm:bulletEnabled/>
         </dgm:presLayoutVars>
@@ -3199,7 +3339,7 @@
       <dgm:spPr/>
     </dgm:pt>
     <dgm:pt modelId="{E38D88DE-6630-449F-B815-64F25EB69547}" type="pres">
-      <dgm:prSet presAssocID="{FBA685A8-C4ED-4A44-BA15-A95087C22363}" presName="pictRect" presStyleLbl="revTx" presStyleIdx="4" presStyleCnt="6">
+      <dgm:prSet presAssocID="{FBA685A8-C4ED-4A44-BA15-A95087C22363}" presName="pictRect" presStyleLbl="revTx" presStyleIdx="4" presStyleCnt="8">
         <dgm:presLayoutVars>
           <dgm:chMax val="0"/>
           <dgm:bulletEnabled/>
@@ -3208,7 +3348,32 @@
       <dgm:spPr/>
     </dgm:pt>
     <dgm:pt modelId="{6BD7537A-36A9-42F0-9C36-0D4BA2D0752A}" type="pres">
-      <dgm:prSet presAssocID="{FBA685A8-C4ED-4A44-BA15-A95087C22363}" presName="textRect" presStyleLbl="revTx" presStyleIdx="5" presStyleCnt="6">
+      <dgm:prSet presAssocID="{FBA685A8-C4ED-4A44-BA15-A95087C22363}" presName="textRect" presStyleLbl="revTx" presStyleIdx="5" presStyleCnt="8">
+        <dgm:presLayoutVars>
+          <dgm:bulletEnabled/>
+        </dgm:presLayoutVars>
+      </dgm:prSet>
+      <dgm:spPr/>
+    </dgm:pt>
+    <dgm:pt modelId="{22C7BBDA-E201-4BCB-B174-C638359A9190}" type="pres">
+      <dgm:prSet presAssocID="{AD175B27-BF85-41B6-9B87-24460515CD3C}" presName="sibTrans" presStyleLbl="sibTrans2D1" presStyleIdx="0" presStyleCnt="0"/>
+      <dgm:spPr/>
+    </dgm:pt>
+    <dgm:pt modelId="{84A4A014-22ED-4AEA-9E9D-867A9F401653}" type="pres">
+      <dgm:prSet presAssocID="{3AA2FA24-1521-4189-A205-F4F5DE278920}" presName="compNode" presStyleCnt="0"/>
+      <dgm:spPr/>
+    </dgm:pt>
+    <dgm:pt modelId="{76448584-D501-4333-884C-F960C3FAA9BE}" type="pres">
+      <dgm:prSet presAssocID="{3AA2FA24-1521-4189-A205-F4F5DE278920}" presName="pictRect" presStyleLbl="revTx" presStyleIdx="6" presStyleCnt="8">
+        <dgm:presLayoutVars>
+          <dgm:chMax val="0"/>
+          <dgm:bulletEnabled/>
+        </dgm:presLayoutVars>
+      </dgm:prSet>
+      <dgm:spPr/>
+    </dgm:pt>
+    <dgm:pt modelId="{9925560B-C3AD-44BD-A1A3-25292C97D5DC}" type="pres">
+      <dgm:prSet presAssocID="{3AA2FA24-1521-4189-A205-F4F5DE278920}" presName="textRect" presStyleLbl="revTx" presStyleIdx="7" presStyleCnt="8">
         <dgm:presLayoutVars>
           <dgm:bulletEnabled/>
         </dgm:presLayoutVars>
@@ -3217,32 +3382,43 @@
     </dgm:pt>
   </dgm:ptLst>
   <dgm:cxnLst>
+    <dgm:cxn modelId="{E7E6B004-430A-4872-9340-3ACECE2825E4}" type="presOf" srcId="{768B9187-70A7-4F24-98C9-4549D9A80F20}" destId="{58CF0B87-5490-46B7-A456-64A277CB332C}" srcOrd="0" destOrd="0" presId="urn:microsoft.com/office/officeart/2024/3/layout/hArchList1"/>
+    <dgm:cxn modelId="{3F8CA406-7939-4295-928C-F9868B166F2F}" type="presOf" srcId="{E137F926-3C8F-4C45-8350-903EA88D75AF}" destId="{412E2C94-E9BF-4E2B-961F-50EF83661C9E}" srcOrd="0" destOrd="0" presId="urn:microsoft.com/office/officeart/2024/3/layout/hArchList1"/>
+    <dgm:cxn modelId="{19150107-6B36-4FF7-9783-871469064D76}" type="presOf" srcId="{3AB04008-29BA-487D-8C45-AE18FA21868B}" destId="{4CD37533-18BB-44AF-9438-CA8C06D267FF}" srcOrd="0" destOrd="0" presId="urn:microsoft.com/office/officeart/2024/3/layout/hArchList1"/>
     <dgm:cxn modelId="{CECC1115-8D04-4BE9-A207-B030BD568392}" srcId="{996C4E6A-2C60-4428-8C91-27910EF058EC}" destId="{D594FA1A-CAFE-4FC9-B29F-017F3AF2316D}" srcOrd="0" destOrd="0" parTransId="{B692412B-C32F-404E-A62A-E42191694563}" sibTransId="{3AB04008-29BA-487D-8C45-AE18FA21868B}"/>
-    <dgm:cxn modelId="{1F3DF617-CC3F-4D66-8EA6-35BB1DC8CBA6}" type="presOf" srcId="{4C74B0FE-0F44-43D7-940D-B9AF6ABF1025}" destId="{8BB355F9-6CC2-4480-9B7E-D892D65FD34C}" srcOrd="0" destOrd="0" presId="urn:microsoft.com/office/officeart/2024/3/layout/hArchList1"/>
-    <dgm:cxn modelId="{F2BA5920-A477-487A-BF0F-C34CB4B62146}" type="presOf" srcId="{FABA06FE-F150-48B5-B3D7-2915E3C41ABD}" destId="{6BD7537A-36A9-42F0-9C36-0D4BA2D0752A}" srcOrd="0" destOrd="0" presId="urn:microsoft.com/office/officeart/2024/3/layout/hArchList1"/>
-    <dgm:cxn modelId="{A340B23A-91D0-462C-A679-3ACAAB787D70}" type="presOf" srcId="{768B9187-70A7-4F24-98C9-4549D9A80F20}" destId="{58CF0B87-5490-46B7-A456-64A277CB332C}" srcOrd="0" destOrd="0" presId="urn:microsoft.com/office/officeart/2024/3/layout/hArchList1"/>
+    <dgm:cxn modelId="{C456C91E-E619-47D2-B54F-13F0F1774580}" type="presOf" srcId="{FABA06FE-F150-48B5-B3D7-2915E3C41ABD}" destId="{6BD7537A-36A9-42F0-9C36-0D4BA2D0752A}" srcOrd="0" destOrd="0" presId="urn:microsoft.com/office/officeart/2024/3/layout/hArchList1"/>
+    <dgm:cxn modelId="{A7C5D724-BF33-4994-B4B6-08D41035EC43}" type="presOf" srcId="{341895CC-F5AE-4185-A7B4-20DAAD306EDB}" destId="{9925560B-C3AD-44BD-A1A3-25292C97D5DC}" srcOrd="0" destOrd="0" presId="urn:microsoft.com/office/officeart/2024/3/layout/hArchList1"/>
+    <dgm:cxn modelId="{CDA5292D-7BF0-451F-8FCA-6B1ABEAEA1B0}" type="presOf" srcId="{FBA685A8-C4ED-4A44-BA15-A95087C22363}" destId="{E38D88DE-6630-449F-B815-64F25EB69547}" srcOrd="0" destOrd="0" presId="urn:microsoft.com/office/officeart/2024/3/layout/hArchList1"/>
     <dgm:cxn modelId="{1FF11245-068A-4CA3-BCBC-AA141B75607D}" srcId="{D594FA1A-CAFE-4FC9-B29F-017F3AF2316D}" destId="{06204C76-8052-4671-8722-9895BD95AC98}" srcOrd="0" destOrd="0" parTransId="{0923777E-212F-46F7-9676-1B1CD76B367F}" sibTransId="{2AE3F090-A320-4B38-A931-78BE74ADF0F7}"/>
     <dgm:cxn modelId="{31032E6F-283D-4219-981D-934A8C3F1D57}" srcId="{FBA685A8-C4ED-4A44-BA15-A95087C22363}" destId="{FABA06FE-F150-48B5-B3D7-2915E3C41ABD}" srcOrd="0" destOrd="0" parTransId="{AF3000A7-0375-4FA4-B30C-7D0027C5A577}" sibTransId="{A35B9477-3565-4F41-85B7-3C421108E7F6}"/>
     <dgm:cxn modelId="{F7F0874F-D139-4205-A17A-D7D9567787E6}" type="presOf" srcId="{996C4E6A-2C60-4428-8C91-27910EF058EC}" destId="{3171E97B-CDE9-41AD-B264-8ADEE4D73563}" srcOrd="0" destOrd="0" presId="urn:microsoft.com/office/officeart/2024/3/layout/hArchList1"/>
-    <dgm:cxn modelId="{A939996F-AA57-4AB8-94FF-5D1362537617}" type="presOf" srcId="{3AB04008-29BA-487D-8C45-AE18FA21868B}" destId="{4CD37533-18BB-44AF-9438-CA8C06D267FF}" srcOrd="0" destOrd="0" presId="urn:microsoft.com/office/officeart/2024/3/layout/hArchList1"/>
-    <dgm:cxn modelId="{83C57875-C8C0-42D4-A258-93D49EA82CD8}" type="presOf" srcId="{D594FA1A-CAFE-4FC9-B29F-017F3AF2316D}" destId="{018F7438-E01D-44D7-ADD6-157BC62500E3}" srcOrd="0" destOrd="0" presId="urn:microsoft.com/office/officeart/2024/3/layout/hArchList1"/>
+    <dgm:cxn modelId="{29E62658-E0CD-4D06-ADB0-9341313A866D}" srcId="{3AA2FA24-1521-4189-A205-F4F5DE278920}" destId="{341895CC-F5AE-4185-A7B4-20DAAD306EDB}" srcOrd="0" destOrd="0" parTransId="{51E34353-253B-4A09-907A-C1F0F987F1E7}" sibTransId="{5EEB0805-A565-4B85-B7A5-6ACF3C848277}"/>
     <dgm:cxn modelId="{741CCF7E-FAFA-4680-999D-03CF38C0793B}" srcId="{996C4E6A-2C60-4428-8C91-27910EF058EC}" destId="{FBA685A8-C4ED-4A44-BA15-A95087C22363}" srcOrd="2" destOrd="0" parTransId="{DF0B6627-E6C7-4B6F-AEF0-D5B4D98FAE0D}" sibTransId="{AD175B27-BF85-41B6-9B87-24460515CD3C}"/>
-    <dgm:cxn modelId="{D7BB7C97-F788-497C-BCAA-B9131F94E09F}" type="presOf" srcId="{06204C76-8052-4671-8722-9895BD95AC98}" destId="{5C90C3CA-0AA3-4EBE-B50C-5D1938624D21}" srcOrd="0" destOrd="0" presId="urn:microsoft.com/office/officeart/2024/3/layout/hArchList1"/>
+    <dgm:cxn modelId="{9FCD8897-0BC0-43A9-AFF0-F8CA6CBC7C43}" type="presOf" srcId="{3AA2FA24-1521-4189-A205-F4F5DE278920}" destId="{76448584-D501-4333-884C-F960C3FAA9BE}" srcOrd="0" destOrd="0" presId="urn:microsoft.com/office/officeart/2024/3/layout/hArchList1"/>
+    <dgm:cxn modelId="{FBF3D7A3-FCBE-4402-8DBE-E5365C2A14BD}" srcId="{3AA2FA24-1521-4189-A205-F4F5DE278920}" destId="{C0297382-340E-4BD9-9668-818CC13B2B4C}" srcOrd="1" destOrd="0" parTransId="{0AE2E466-7E32-43D2-AC2C-09CEF94D0E22}" sibTransId="{061912DC-B2E0-4F87-B8A9-21B8C40566D7}"/>
+    <dgm:cxn modelId="{A2103AA5-AF3F-447E-8CF3-66CE371D7265}" type="presOf" srcId="{06204C76-8052-4671-8722-9895BD95AC98}" destId="{5C90C3CA-0AA3-4EBE-B50C-5D1938624D21}" srcOrd="0" destOrd="0" presId="urn:microsoft.com/office/officeart/2024/3/layout/hArchList1"/>
     <dgm:cxn modelId="{3288A1A6-BC96-42D9-B282-F903D3D28B27}" srcId="{768B9187-70A7-4F24-98C9-4549D9A80F20}" destId="{4C74B0FE-0F44-43D7-940D-B9AF6ABF1025}" srcOrd="0" destOrd="0" parTransId="{E239FEBF-B4AE-47D3-8223-FDECC72F0B62}" sibTransId="{44570744-E566-439D-B1FF-599460901ED9}"/>
-    <dgm:cxn modelId="{D39160A8-01E5-4CBB-83C0-E26188120B2B}" type="presOf" srcId="{FBA685A8-C4ED-4A44-BA15-A95087C22363}" destId="{E38D88DE-6630-449F-B815-64F25EB69547}" srcOrd="0" destOrd="0" presId="urn:microsoft.com/office/officeart/2024/3/layout/hArchList1"/>
-    <dgm:cxn modelId="{2D4E08CE-615F-4DDD-B3D3-2BFE9E67E070}" type="presOf" srcId="{E137F926-3C8F-4C45-8350-903EA88D75AF}" destId="{412E2C94-E9BF-4E2B-961F-50EF83661C9E}" srcOrd="0" destOrd="0" presId="urn:microsoft.com/office/officeart/2024/3/layout/hArchList1"/>
+    <dgm:cxn modelId="{8D0B0EA9-AA1F-4F96-AA49-A7CF8580FB84}" type="presOf" srcId="{C0297382-340E-4BD9-9668-818CC13B2B4C}" destId="{9925560B-C3AD-44BD-A1A3-25292C97D5DC}" srcOrd="0" destOrd="1" presId="urn:microsoft.com/office/officeart/2024/3/layout/hArchList1"/>
+    <dgm:cxn modelId="{4E464CB9-1F50-4CEF-8D1D-4D37F1D6F177}" type="presOf" srcId="{AD175B27-BF85-41B6-9B87-24460515CD3C}" destId="{22C7BBDA-E201-4BCB-B174-C638359A9190}" srcOrd="0" destOrd="0" presId="urn:microsoft.com/office/officeart/2024/3/layout/hArchList1"/>
+    <dgm:cxn modelId="{E750A9C7-4CEF-45C9-B133-81EC3F5CA578}" type="presOf" srcId="{D594FA1A-CAFE-4FC9-B29F-017F3AF2316D}" destId="{018F7438-E01D-44D7-ADD6-157BC62500E3}" srcOrd="0" destOrd="0" presId="urn:microsoft.com/office/officeart/2024/3/layout/hArchList1"/>
     <dgm:cxn modelId="{0FF7CFDA-06D0-49E7-971D-B87E044D11AB}" srcId="{996C4E6A-2C60-4428-8C91-27910EF058EC}" destId="{768B9187-70A7-4F24-98C9-4549D9A80F20}" srcOrd="1" destOrd="0" parTransId="{28680839-1F10-452B-8A00-49D86D2208FE}" sibTransId="{E137F926-3C8F-4C45-8350-903EA88D75AF}"/>
-    <dgm:cxn modelId="{582F0F5E-244F-45D2-B023-A57BD75D1EC1}" type="presParOf" srcId="{3171E97B-CDE9-41AD-B264-8ADEE4D73563}" destId="{673D3BE1-0B49-408D-A9B7-2ACE218FD35D}" srcOrd="0" destOrd="0" presId="urn:microsoft.com/office/officeart/2024/3/layout/hArchList1"/>
-    <dgm:cxn modelId="{A548ED9C-046D-4BB1-8D3C-6FD046C27F60}" type="presParOf" srcId="{673D3BE1-0B49-408D-A9B7-2ACE218FD35D}" destId="{018F7438-E01D-44D7-ADD6-157BC62500E3}" srcOrd="0" destOrd="0" presId="urn:microsoft.com/office/officeart/2024/3/layout/hArchList1"/>
-    <dgm:cxn modelId="{5643C7C9-5160-4BEC-9A38-173A21075E9B}" type="presParOf" srcId="{673D3BE1-0B49-408D-A9B7-2ACE218FD35D}" destId="{5C90C3CA-0AA3-4EBE-B50C-5D1938624D21}" srcOrd="1" destOrd="0" presId="urn:microsoft.com/office/officeart/2024/3/layout/hArchList1"/>
-    <dgm:cxn modelId="{503658CB-B4DE-40D1-A7FE-6D4AA57F070B}" type="presParOf" srcId="{3171E97B-CDE9-41AD-B264-8ADEE4D73563}" destId="{4CD37533-18BB-44AF-9438-CA8C06D267FF}" srcOrd="1" destOrd="0" presId="urn:microsoft.com/office/officeart/2024/3/layout/hArchList1"/>
-    <dgm:cxn modelId="{B502C618-10E0-4DFC-8F21-DC74D44E314E}" type="presParOf" srcId="{3171E97B-CDE9-41AD-B264-8ADEE4D73563}" destId="{4A15BD43-FC5C-486B-BBDD-003A13A15493}" srcOrd="2" destOrd="0" presId="urn:microsoft.com/office/officeart/2024/3/layout/hArchList1"/>
-    <dgm:cxn modelId="{74482876-705F-4982-9BF6-7250ABFA8208}" type="presParOf" srcId="{4A15BD43-FC5C-486B-BBDD-003A13A15493}" destId="{58CF0B87-5490-46B7-A456-64A277CB332C}" srcOrd="0" destOrd="0" presId="urn:microsoft.com/office/officeart/2024/3/layout/hArchList1"/>
-    <dgm:cxn modelId="{86291A9B-A7BD-4A17-9FA3-73B5F1192B26}" type="presParOf" srcId="{4A15BD43-FC5C-486B-BBDD-003A13A15493}" destId="{8BB355F9-6CC2-4480-9B7E-D892D65FD34C}" srcOrd="1" destOrd="0" presId="urn:microsoft.com/office/officeart/2024/3/layout/hArchList1"/>
-    <dgm:cxn modelId="{C6516519-8B52-440E-94E2-D6A7B633422D}" type="presParOf" srcId="{3171E97B-CDE9-41AD-B264-8ADEE4D73563}" destId="{412E2C94-E9BF-4E2B-961F-50EF83661C9E}" srcOrd="3" destOrd="0" presId="urn:microsoft.com/office/officeart/2024/3/layout/hArchList1"/>
-    <dgm:cxn modelId="{45AFFFFC-BE63-4F53-B4D2-90F1E0549280}" type="presParOf" srcId="{3171E97B-CDE9-41AD-B264-8ADEE4D73563}" destId="{00797D44-CAE9-428C-9B5E-3CE638B13212}" srcOrd="4" destOrd="0" presId="urn:microsoft.com/office/officeart/2024/3/layout/hArchList1"/>
-    <dgm:cxn modelId="{51AF1C5B-A6A3-4F7E-9193-00ED0BBF587E}" type="presParOf" srcId="{00797D44-CAE9-428C-9B5E-3CE638B13212}" destId="{E38D88DE-6630-449F-B815-64F25EB69547}" srcOrd="0" destOrd="0" presId="urn:microsoft.com/office/officeart/2024/3/layout/hArchList1"/>
-    <dgm:cxn modelId="{8A06BC44-10F2-41E6-A83A-BD9AC8EC5EB6}" type="presParOf" srcId="{00797D44-CAE9-428C-9B5E-3CE638B13212}" destId="{6BD7537A-36A9-42F0-9C36-0D4BA2D0752A}" srcOrd="1" destOrd="0" presId="urn:microsoft.com/office/officeart/2024/3/layout/hArchList1"/>
+    <dgm:cxn modelId="{EE50A9F9-0633-48E6-8993-9AAE38539E93}" srcId="{996C4E6A-2C60-4428-8C91-27910EF058EC}" destId="{3AA2FA24-1521-4189-A205-F4F5DE278920}" srcOrd="3" destOrd="0" parTransId="{8EB9754A-2D2C-47B0-86CE-A121140B02A9}" sibTransId="{E9066788-C52E-4A94-AF8C-EFACB72EE811}"/>
+    <dgm:cxn modelId="{748F7AFB-7607-418D-A0F6-37BC3EA60FDD}" type="presOf" srcId="{4C74B0FE-0F44-43D7-940D-B9AF6ABF1025}" destId="{8BB355F9-6CC2-4480-9B7E-D892D65FD34C}" srcOrd="0" destOrd="0" presId="urn:microsoft.com/office/officeart/2024/3/layout/hArchList1"/>
+    <dgm:cxn modelId="{932A69D6-9FD0-4CA2-924C-1D1A8CAAD84C}" type="presParOf" srcId="{3171E97B-CDE9-41AD-B264-8ADEE4D73563}" destId="{673D3BE1-0B49-408D-A9B7-2ACE218FD35D}" srcOrd="0" destOrd="0" presId="urn:microsoft.com/office/officeart/2024/3/layout/hArchList1"/>
+    <dgm:cxn modelId="{552B63F5-0D2A-4F04-902F-B97F064A6E15}" type="presParOf" srcId="{673D3BE1-0B49-408D-A9B7-2ACE218FD35D}" destId="{018F7438-E01D-44D7-ADD6-157BC62500E3}" srcOrd="0" destOrd="0" presId="urn:microsoft.com/office/officeart/2024/3/layout/hArchList1"/>
+    <dgm:cxn modelId="{8E79F0D3-C7F2-4B51-BDA1-2FF112573160}" type="presParOf" srcId="{673D3BE1-0B49-408D-A9B7-2ACE218FD35D}" destId="{5C90C3CA-0AA3-4EBE-B50C-5D1938624D21}" srcOrd="1" destOrd="0" presId="urn:microsoft.com/office/officeart/2024/3/layout/hArchList1"/>
+    <dgm:cxn modelId="{2C70E249-B11D-4A23-B02F-C47971B7B4C4}" type="presParOf" srcId="{3171E97B-CDE9-41AD-B264-8ADEE4D73563}" destId="{4CD37533-18BB-44AF-9438-CA8C06D267FF}" srcOrd="1" destOrd="0" presId="urn:microsoft.com/office/officeart/2024/3/layout/hArchList1"/>
+    <dgm:cxn modelId="{8E8D458A-E2A4-419E-AA5F-BBDC102BEBF5}" type="presParOf" srcId="{3171E97B-CDE9-41AD-B264-8ADEE4D73563}" destId="{4A15BD43-FC5C-486B-BBDD-003A13A15493}" srcOrd="2" destOrd="0" presId="urn:microsoft.com/office/officeart/2024/3/layout/hArchList1"/>
+    <dgm:cxn modelId="{62B0DF6F-7D62-4697-8A07-E4F111FE0B91}" type="presParOf" srcId="{4A15BD43-FC5C-486B-BBDD-003A13A15493}" destId="{58CF0B87-5490-46B7-A456-64A277CB332C}" srcOrd="0" destOrd="0" presId="urn:microsoft.com/office/officeart/2024/3/layout/hArchList1"/>
+    <dgm:cxn modelId="{74D36ED4-C91E-4326-A3CE-31E5901E0D66}" type="presParOf" srcId="{4A15BD43-FC5C-486B-BBDD-003A13A15493}" destId="{8BB355F9-6CC2-4480-9B7E-D892D65FD34C}" srcOrd="1" destOrd="0" presId="urn:microsoft.com/office/officeart/2024/3/layout/hArchList1"/>
+    <dgm:cxn modelId="{31F2C47B-BCE4-43BE-8C57-66ED7D20A082}" type="presParOf" srcId="{3171E97B-CDE9-41AD-B264-8ADEE4D73563}" destId="{412E2C94-E9BF-4E2B-961F-50EF83661C9E}" srcOrd="3" destOrd="0" presId="urn:microsoft.com/office/officeart/2024/3/layout/hArchList1"/>
+    <dgm:cxn modelId="{108791BD-7EA8-4543-A6F0-B4F2B3076A1F}" type="presParOf" srcId="{3171E97B-CDE9-41AD-B264-8ADEE4D73563}" destId="{00797D44-CAE9-428C-9B5E-3CE638B13212}" srcOrd="4" destOrd="0" presId="urn:microsoft.com/office/officeart/2024/3/layout/hArchList1"/>
+    <dgm:cxn modelId="{A60C68F2-12F4-4CB1-9BC0-BC3F1F6D9D24}" type="presParOf" srcId="{00797D44-CAE9-428C-9B5E-3CE638B13212}" destId="{E38D88DE-6630-449F-B815-64F25EB69547}" srcOrd="0" destOrd="0" presId="urn:microsoft.com/office/officeart/2024/3/layout/hArchList1"/>
+    <dgm:cxn modelId="{EBA866BF-59B4-4164-AE7F-17E8484DBF08}" type="presParOf" srcId="{00797D44-CAE9-428C-9B5E-3CE638B13212}" destId="{6BD7537A-36A9-42F0-9C36-0D4BA2D0752A}" srcOrd="1" destOrd="0" presId="urn:microsoft.com/office/officeart/2024/3/layout/hArchList1"/>
+    <dgm:cxn modelId="{D99F9705-CCB6-4448-93E9-8DC7147510C6}" type="presParOf" srcId="{3171E97B-CDE9-41AD-B264-8ADEE4D73563}" destId="{22C7BBDA-E201-4BCB-B174-C638359A9190}" srcOrd="5" destOrd="0" presId="urn:microsoft.com/office/officeart/2024/3/layout/hArchList1"/>
+    <dgm:cxn modelId="{CB27171A-FBFD-49B7-8337-5C076C564E6D}" type="presParOf" srcId="{3171E97B-CDE9-41AD-B264-8ADEE4D73563}" destId="{84A4A014-22ED-4AEA-9E9D-867A9F401653}" srcOrd="6" destOrd="0" presId="urn:microsoft.com/office/officeart/2024/3/layout/hArchList1"/>
+    <dgm:cxn modelId="{D405B57B-B234-4593-9E1C-D62B389B34B5}" type="presParOf" srcId="{84A4A014-22ED-4AEA-9E9D-867A9F401653}" destId="{76448584-D501-4333-884C-F960C3FAA9BE}" srcOrd="0" destOrd="0" presId="urn:microsoft.com/office/officeart/2024/3/layout/hArchList1"/>
+    <dgm:cxn modelId="{6F8E35E4-614F-4546-A85D-8B1CD3FDCAE2}" type="presParOf" srcId="{84A4A014-22ED-4AEA-9E9D-867A9F401653}" destId="{9925560B-C3AD-44BD-A1A3-25292C97D5DC}" srcOrd="1" destOrd="0" presId="urn:microsoft.com/office/officeart/2024/3/layout/hArchList1"/>
   </dgm:cxnLst>
   <dgm:bg/>
   <dgm:whole/>
@@ -4076,87 +4252,7 @@
       <dsp:spPr>
         <a:xfrm>
           <a:off x="0" y="0"/>
-          <a:ext cx="2587153" cy="846926"/>
-        </a:xfrm>
-        <a:prstGeom prst="rect">
-          <a:avLst/>
-        </a:prstGeom>
-        <a:noFill/>
-        <a:ln>
-          <a:noFill/>
-        </a:ln>
-        <a:effectLst/>
-      </dsp:spPr>
-      <dsp:style>
-        <a:lnRef idx="0">
-          <a:scrgbClr r="0" g="0" b="0"/>
-        </a:lnRef>
-        <a:fillRef idx="0">
-          <a:scrgbClr r="0" g="0" b="0"/>
-        </a:fillRef>
-        <a:effectRef idx="0">
-          <a:scrgbClr r="0" g="0" b="0"/>
-        </a:effectRef>
-        <a:fontRef idx="minor"/>
-      </dsp:style>
-      <dsp:txBody>
-        <a:bodyPr spcFirstLastPara="0" vert="horz" wrap="square" lIns="137160" tIns="21590" rIns="21590" bIns="21590" numCol="1" spcCol="1270" anchor="t" anchorCtr="0">
-          <a:noAutofit/>
-        </a:bodyPr>
-        <a:lstStyle/>
-        <a:p>
-          <a:pPr marL="0" lvl="0" indent="0" algn="l" defTabSz="755650">
-            <a:lnSpc>
-              <a:spcPct val="100000"/>
-            </a:lnSpc>
-            <a:spcBef>
-              <a:spcPct val="0"/>
-            </a:spcBef>
-            <a:spcAft>
-              <a:spcPct val="35000"/>
-            </a:spcAft>
-            <a:buNone/>
-            <a:defRPr b="1"/>
-          </a:pPr>
-          <a:r>
-            <a:rPr lang="en-US" sz="1700" kern="1200" dirty="0"/>
-            <a:t>Easy to install,</a:t>
-          </a:r>
-        </a:p>
-        <a:p>
-          <a:pPr marL="0" lvl="0" indent="0" algn="l" defTabSz="755650">
-            <a:lnSpc>
-              <a:spcPct val="100000"/>
-            </a:lnSpc>
-            <a:spcBef>
-              <a:spcPct val="0"/>
-            </a:spcBef>
-            <a:spcAft>
-              <a:spcPct val="35000"/>
-            </a:spcAft>
-            <a:buNone/>
-            <a:defRPr b="1"/>
-          </a:pPr>
-          <a:r>
-            <a:rPr lang="en-US" sz="1700" kern="1200" dirty="0"/>
-            <a:t>Simple to run…</a:t>
-          </a:r>
-        </a:p>
-      </dsp:txBody>
-      <dsp:txXfrm>
-        <a:off x="0" y="0"/>
-        <a:ext cx="2587153" cy="846926"/>
-      </dsp:txXfrm>
-    </dsp:sp>
-    <dsp:sp modelId="{5C90C3CA-0AA3-4EBE-B50C-5D1938624D21}">
-      <dsp:nvSpPr>
-        <dsp:cNvPr id="0" name=""/>
-        <dsp:cNvSpPr/>
-      </dsp:nvSpPr>
-      <dsp:spPr>
-        <a:xfrm>
-          <a:off x="0" y="846926"/>
-          <a:ext cx="2587153" cy="2238564"/>
+          <a:ext cx="1924195" cy="645271"/>
         </a:xfrm>
         <a:prstGeom prst="rect">
           <a:avLst/>
@@ -4196,10 +4292,11 @@
               <a:spcPct val="35000"/>
             </a:spcAft>
             <a:buNone/>
+            <a:defRPr b="1"/>
           </a:pPr>
           <a:r>
             <a:rPr lang="en-US" sz="1300" kern="1200" dirty="0"/>
-            <a:t>MIND Server gets installed as standard YottaDB plugin on top of your YottaDB installation with a one-liner command.</a:t>
+            <a:t>Easy to install,</a:t>
           </a:r>
         </a:p>
         <a:p>
@@ -4214,27 +4311,28 @@
               <a:spcPct val="35000"/>
             </a:spcAft>
             <a:buNone/>
+            <a:defRPr b="1"/>
           </a:pPr>
           <a:r>
             <a:rPr lang="en-US" sz="1300" kern="1200" dirty="0"/>
-            <a:t>You can then either run it directly of configure it using the .conf file or command line switches.</a:t>
+            <a:t>Simple to run…</a:t>
           </a:r>
         </a:p>
       </dsp:txBody>
       <dsp:txXfrm>
-        <a:off x="0" y="846926"/>
-        <a:ext cx="2587153" cy="2238564"/>
+        <a:off x="0" y="0"/>
+        <a:ext cx="1924195" cy="645271"/>
       </dsp:txXfrm>
     </dsp:sp>
-    <dsp:sp modelId="{58CF0B87-5490-46B7-A456-64A277CB332C}">
+    <dsp:sp modelId="{5C90C3CA-0AA3-4EBE-B50C-5D1938624D21}">
       <dsp:nvSpPr>
         <dsp:cNvPr id="0" name=""/>
         <dsp:cNvSpPr/>
       </dsp:nvSpPr>
       <dsp:spPr>
         <a:xfrm>
-          <a:off x="2845869" y="0"/>
-          <a:ext cx="2587153" cy="846926"/>
+          <a:off x="0" y="645271"/>
+          <a:ext cx="1924195" cy="2503747"/>
         </a:xfrm>
         <a:prstGeom prst="rect">
           <a:avLst/>
@@ -4258,12 +4356,12 @@
         <a:fontRef idx="minor"/>
       </dsp:style>
       <dsp:txBody>
-        <a:bodyPr spcFirstLastPara="0" vert="horz" wrap="square" lIns="137160" tIns="21590" rIns="21590" bIns="21590" numCol="1" spcCol="1270" anchor="t" anchorCtr="0">
+        <a:bodyPr spcFirstLastPara="0" vert="horz" wrap="square" lIns="137160" tIns="12700" rIns="12700" bIns="12700" numCol="1" spcCol="1270" anchor="t" anchorCtr="0">
           <a:noAutofit/>
         </a:bodyPr>
         <a:lstStyle/>
         <a:p>
-          <a:pPr marL="0" lvl="0" indent="0" algn="l" defTabSz="755650">
+          <a:pPr marL="0" lvl="0" indent="0" algn="l" defTabSz="444500">
             <a:lnSpc>
               <a:spcPct val="100000"/>
             </a:lnSpc>
@@ -4274,28 +4372,45 @@
               <a:spcPct val="35000"/>
             </a:spcAft>
             <a:buNone/>
-            <a:defRPr b="1"/>
           </a:pPr>
           <a:r>
-            <a:rPr lang="en-US" sz="1700" kern="1200" dirty="0"/>
-            <a:t>Designed putting both MUMPS and back-end developers first</a:t>
+            <a:rPr lang="en-US" sz="1000" kern="1200" dirty="0"/>
+            <a:t>MIND Server gets installed as standard YottaDB plugin on top of your YottaDB installation with a one-liner command.</a:t>
+          </a:r>
+        </a:p>
+        <a:p>
+          <a:pPr marL="0" lvl="0" indent="0" algn="l" defTabSz="444500">
+            <a:lnSpc>
+              <a:spcPct val="100000"/>
+            </a:lnSpc>
+            <a:spcBef>
+              <a:spcPct val="0"/>
+            </a:spcBef>
+            <a:spcAft>
+              <a:spcPct val="35000"/>
+            </a:spcAft>
+            <a:buNone/>
+          </a:pPr>
+          <a:r>
+            <a:rPr lang="en-US" sz="1000" kern="1200" dirty="0"/>
+            <a:t>You can then either run it directly of configure it using the .conf file or command line switches.</a:t>
           </a:r>
         </a:p>
       </dsp:txBody>
       <dsp:txXfrm>
-        <a:off x="2845869" y="0"/>
-        <a:ext cx="2587153" cy="846926"/>
+        <a:off x="0" y="645271"/>
+        <a:ext cx="1924195" cy="2503747"/>
       </dsp:txXfrm>
     </dsp:sp>
-    <dsp:sp modelId="{8BB355F9-6CC2-4480-9B7E-D892D65FD34C}">
+    <dsp:sp modelId="{58CF0B87-5490-46B7-A456-64A277CB332C}">
       <dsp:nvSpPr>
         <dsp:cNvPr id="0" name=""/>
         <dsp:cNvSpPr/>
       </dsp:nvSpPr>
       <dsp:spPr>
         <a:xfrm>
-          <a:off x="2845869" y="927112"/>
-          <a:ext cx="2587153" cy="2238564"/>
+          <a:off x="2116615" y="0"/>
+          <a:ext cx="1924195" cy="645271"/>
         </a:xfrm>
         <a:prstGeom prst="rect">
           <a:avLst/>
@@ -4335,45 +4450,28 @@
               <a:spcPct val="35000"/>
             </a:spcAft>
             <a:buNone/>
+            <a:defRPr b="1"/>
           </a:pPr>
           <a:r>
             <a:rPr lang="en-US" sz="1300" kern="1200" dirty="0"/>
-            <a:t>Keeping in mind that back-end languages use data-types and Objects, we created data translators to move data to and from YottaDB.</a:t>
-          </a:r>
-        </a:p>
-        <a:p>
-          <a:pPr marL="0" lvl="0" indent="0" algn="l" defTabSz="577850">
-            <a:lnSpc>
-              <a:spcPct val="100000"/>
-            </a:lnSpc>
-            <a:spcBef>
-              <a:spcPct val="0"/>
-            </a:spcBef>
-            <a:spcAft>
-              <a:spcPct val="35000"/>
-            </a:spcAft>
-            <a:buNone/>
-          </a:pPr>
-          <a:r>
-            <a:rPr lang="en-US" sz="1300" kern="1200" dirty="0"/>
-            <a:t>And, of course, we support JSON in both directions.</a:t>
+            <a:t>Designed putting both MUMPS and back-end developers first</a:t>
           </a:r>
         </a:p>
       </dsp:txBody>
       <dsp:txXfrm>
-        <a:off x="2845869" y="927112"/>
-        <a:ext cx="2587153" cy="2238564"/>
+        <a:off x="2116615" y="0"/>
+        <a:ext cx="1924195" cy="645271"/>
       </dsp:txXfrm>
     </dsp:sp>
-    <dsp:sp modelId="{E38D88DE-6630-449F-B815-64F25EB69547}">
+    <dsp:sp modelId="{8BB355F9-6CC2-4480-9B7E-D892D65FD34C}">
       <dsp:nvSpPr>
         <dsp:cNvPr id="0" name=""/>
         <dsp:cNvSpPr/>
       </dsp:nvSpPr>
       <dsp:spPr>
         <a:xfrm>
-          <a:off x="5691738" y="0"/>
-          <a:ext cx="2587153" cy="846926"/>
+          <a:off x="2116615" y="734955"/>
+          <a:ext cx="1924195" cy="2503747"/>
         </a:xfrm>
         <a:prstGeom prst="rect">
           <a:avLst/>
@@ -4397,12 +4495,12 @@
         <a:fontRef idx="minor"/>
       </dsp:style>
       <dsp:txBody>
-        <a:bodyPr spcFirstLastPara="0" vert="horz" wrap="square" lIns="137160" tIns="21590" rIns="21590" bIns="21590" numCol="1" spcCol="1270" anchor="t" anchorCtr="0">
+        <a:bodyPr spcFirstLastPara="0" vert="horz" wrap="square" lIns="137160" tIns="12700" rIns="12700" bIns="12700" numCol="1" spcCol="1270" anchor="t" anchorCtr="0">
           <a:noAutofit/>
         </a:bodyPr>
         <a:lstStyle/>
         <a:p>
-          <a:pPr marL="0" lvl="0" indent="0" algn="l" defTabSz="755650">
+          <a:pPr marL="0" lvl="0" indent="0" algn="l" defTabSz="444500">
             <a:lnSpc>
               <a:spcPct val="100000"/>
             </a:lnSpc>
@@ -4413,28 +4511,45 @@
               <a:spcPct val="35000"/>
             </a:spcAft>
             <a:buNone/>
-            <a:defRPr b="1"/>
           </a:pPr>
           <a:r>
-            <a:rPr lang="en-US" sz="1700" kern="1200" dirty="0"/>
-            <a:t>ZERO coding needed in the client (back-end) driver.</a:t>
+            <a:rPr lang="en-US" sz="1000" kern="1200" dirty="0"/>
+            <a:t>Keeping in mind that back-end languages use data-types and Objects, we created data translators to move data to and from YottaDB.</a:t>
+          </a:r>
+        </a:p>
+        <a:p>
+          <a:pPr marL="0" lvl="0" indent="0" algn="l" defTabSz="444500">
+            <a:lnSpc>
+              <a:spcPct val="100000"/>
+            </a:lnSpc>
+            <a:spcBef>
+              <a:spcPct val="0"/>
+            </a:spcBef>
+            <a:spcAft>
+              <a:spcPct val="35000"/>
+            </a:spcAft>
+            <a:buNone/>
+          </a:pPr>
+          <a:r>
+            <a:rPr lang="en-US" sz="1000" kern="1200" dirty="0"/>
+            <a:t>And, of course, we support JSON in both directions.</a:t>
           </a:r>
         </a:p>
       </dsp:txBody>
       <dsp:txXfrm>
-        <a:off x="5691738" y="0"/>
-        <a:ext cx="2587153" cy="846926"/>
+        <a:off x="2116615" y="734955"/>
+        <a:ext cx="1924195" cy="2503747"/>
       </dsp:txXfrm>
     </dsp:sp>
-    <dsp:sp modelId="{6BD7537A-36A9-42F0-9C36-0D4BA2D0752A}">
+    <dsp:sp modelId="{E38D88DE-6630-449F-B815-64F25EB69547}">
       <dsp:nvSpPr>
         <dsp:cNvPr id="0" name=""/>
         <dsp:cNvSpPr/>
       </dsp:nvSpPr>
       <dsp:spPr>
         <a:xfrm>
-          <a:off x="5691738" y="846926"/>
-          <a:ext cx="2587153" cy="2238564"/>
+          <a:off x="4233230" y="0"/>
+          <a:ext cx="1924195" cy="645271"/>
         </a:xfrm>
         <a:prstGeom prst="rect">
           <a:avLst/>
@@ -4474,12 +4589,133 @@
               <a:spcPct val="35000"/>
             </a:spcAft>
             <a:buNone/>
+            <a:defRPr b="1"/>
           </a:pPr>
           <a:r>
             <a:rPr lang="en-US" sz="1300" kern="1200" dirty="0"/>
+            <a:t>ZERO coding needed in the client (back-end) driver.</a:t>
+          </a:r>
+        </a:p>
+      </dsp:txBody>
+      <dsp:txXfrm>
+        <a:off x="4233230" y="0"/>
+        <a:ext cx="1924195" cy="645271"/>
+      </dsp:txXfrm>
+    </dsp:sp>
+    <dsp:sp modelId="{6BD7537A-36A9-42F0-9C36-0D4BA2D0752A}">
+      <dsp:nvSpPr>
+        <dsp:cNvPr id="0" name=""/>
+        <dsp:cNvSpPr/>
+      </dsp:nvSpPr>
+      <dsp:spPr>
+        <a:xfrm>
+          <a:off x="4233230" y="645271"/>
+          <a:ext cx="1924195" cy="2503747"/>
+        </a:xfrm>
+        <a:prstGeom prst="rect">
+          <a:avLst/>
+        </a:prstGeom>
+        <a:noFill/>
+        <a:ln>
+          <a:noFill/>
+        </a:ln>
+        <a:effectLst/>
+      </dsp:spPr>
+      <dsp:style>
+        <a:lnRef idx="0">
+          <a:scrgbClr r="0" g="0" b="0"/>
+        </a:lnRef>
+        <a:fillRef idx="0">
+          <a:scrgbClr r="0" g="0" b="0"/>
+        </a:fillRef>
+        <a:effectRef idx="0">
+          <a:scrgbClr r="0" g="0" b="0"/>
+        </a:effectRef>
+        <a:fontRef idx="minor"/>
+      </dsp:style>
+      <dsp:txBody>
+        <a:bodyPr spcFirstLastPara="0" vert="horz" wrap="square" lIns="137160" tIns="12700" rIns="12700" bIns="12700" numCol="1" spcCol="1270" anchor="t" anchorCtr="0">
+          <a:noAutofit/>
+        </a:bodyPr>
+        <a:lstStyle/>
+        <a:p>
+          <a:pPr marL="0" lvl="0" indent="0" algn="l" defTabSz="444500">
+            <a:lnSpc>
+              <a:spcPct val="100000"/>
+            </a:lnSpc>
+            <a:spcBef>
+              <a:spcPct val="0"/>
+            </a:spcBef>
+            <a:spcAft>
+              <a:spcPct val="35000"/>
+            </a:spcAft>
+            <a:buNone/>
+          </a:pPr>
+          <a:r>
+            <a:rPr lang="en-US" sz="1000" kern="1200" dirty="0"/>
             <a:t>Once you describe your MUMPS functions / procedure in a JSON file, they will “magically” appear in the client driver and ready to use.</a:t>
           </a:r>
         </a:p>
+        <a:p>
+          <a:pPr marL="0" lvl="0" indent="0" algn="l" defTabSz="444500">
+            <a:lnSpc>
+              <a:spcPct val="100000"/>
+            </a:lnSpc>
+            <a:spcBef>
+              <a:spcPct val="0"/>
+            </a:spcBef>
+            <a:spcAft>
+              <a:spcPct val="35000"/>
+            </a:spcAft>
+            <a:buNone/>
+          </a:pPr>
+          <a:r>
+            <a:rPr lang="en-US" sz="1000" kern="1200" dirty="0"/>
+            <a:t>Additionally, automatic  validation of the supplied parameters is performed with no code needed.</a:t>
+          </a:r>
+        </a:p>
+      </dsp:txBody>
+      <dsp:txXfrm>
+        <a:off x="4233230" y="645271"/>
+        <a:ext cx="1924195" cy="2503747"/>
+      </dsp:txXfrm>
+    </dsp:sp>
+    <dsp:sp modelId="{76448584-D501-4333-884C-F960C3FAA9BE}">
+      <dsp:nvSpPr>
+        <dsp:cNvPr id="0" name=""/>
+        <dsp:cNvSpPr/>
+      </dsp:nvSpPr>
+      <dsp:spPr>
+        <a:xfrm>
+          <a:off x="6349845" y="0"/>
+          <a:ext cx="1924195" cy="645271"/>
+        </a:xfrm>
+        <a:prstGeom prst="rect">
+          <a:avLst/>
+        </a:prstGeom>
+        <a:noFill/>
+        <a:ln>
+          <a:noFill/>
+        </a:ln>
+        <a:effectLst/>
+      </dsp:spPr>
+      <dsp:style>
+        <a:lnRef idx="0">
+          <a:scrgbClr r="0" g="0" b="0"/>
+        </a:lnRef>
+        <a:fillRef idx="0">
+          <a:scrgbClr r="0" g="0" b="0"/>
+        </a:fillRef>
+        <a:effectRef idx="0">
+          <a:scrgbClr r="0" g="0" b="0"/>
+        </a:effectRef>
+        <a:fontRef idx="minor"/>
+      </dsp:style>
+      <dsp:txBody>
+        <a:bodyPr spcFirstLastPara="0" vert="horz" wrap="square" lIns="137160" tIns="16510" rIns="16510" bIns="16510" numCol="1" spcCol="1270" anchor="t" anchorCtr="0">
+          <a:noAutofit/>
+        </a:bodyPr>
+        <a:lstStyle/>
         <a:p>
           <a:pPr marL="0" lvl="0" indent="0" algn="l" defTabSz="577850">
             <a:lnSpc>
@@ -4492,16 +4728,98 @@
               <a:spcPct val="35000"/>
             </a:spcAft>
             <a:buNone/>
+            <a:defRPr b="1"/>
           </a:pPr>
           <a:r>
             <a:rPr lang="en-US" sz="1300" kern="1200" dirty="0"/>
-            <a:t>Additionally, automatic  validation of the supplied parameters is performed with no code needed.</a:t>
+            <a:t>Support your existing M code right away</a:t>
           </a:r>
+          <a:endParaRPr lang="en-NL" sz="1300" kern="1200" dirty="0"/>
         </a:p>
       </dsp:txBody>
       <dsp:txXfrm>
-        <a:off x="5691738" y="846926"/>
-        <a:ext cx="2587153" cy="2238564"/>
+        <a:off x="6349845" y="0"/>
+        <a:ext cx="1924195" cy="645271"/>
+      </dsp:txXfrm>
+    </dsp:sp>
+    <dsp:sp modelId="{9925560B-C3AD-44BD-A1A3-25292C97D5DC}">
+      <dsp:nvSpPr>
+        <dsp:cNvPr id="0" name=""/>
+        <dsp:cNvSpPr/>
+      </dsp:nvSpPr>
+      <dsp:spPr>
+        <a:xfrm>
+          <a:off x="6349845" y="645271"/>
+          <a:ext cx="1924195" cy="2503747"/>
+        </a:xfrm>
+        <a:prstGeom prst="rect">
+          <a:avLst/>
+        </a:prstGeom>
+        <a:noFill/>
+        <a:ln>
+          <a:noFill/>
+        </a:ln>
+        <a:effectLst/>
+      </dsp:spPr>
+      <dsp:style>
+        <a:lnRef idx="0">
+          <a:scrgbClr r="0" g="0" b="0"/>
+        </a:lnRef>
+        <a:fillRef idx="0">
+          <a:scrgbClr r="0" g="0" b="0"/>
+        </a:fillRef>
+        <a:effectRef idx="0">
+          <a:scrgbClr r="0" g="0" b="0"/>
+        </a:effectRef>
+        <a:fontRef idx="minor"/>
+      </dsp:style>
+      <dsp:txBody>
+        <a:bodyPr spcFirstLastPara="0" vert="horz" wrap="square" lIns="137160" tIns="12700" rIns="12700" bIns="12700" numCol="1" spcCol="1270" anchor="t" anchorCtr="0">
+          <a:noAutofit/>
+        </a:bodyPr>
+        <a:lstStyle/>
+        <a:p>
+          <a:pPr marL="0" lvl="0" indent="0" algn="l" defTabSz="444500">
+            <a:lnSpc>
+              <a:spcPct val="100000"/>
+            </a:lnSpc>
+            <a:spcBef>
+              <a:spcPct val="0"/>
+            </a:spcBef>
+            <a:spcAft>
+              <a:spcPct val="35000"/>
+            </a:spcAft>
+            <a:buNone/>
+          </a:pPr>
+          <a:r>
+            <a:rPr lang="en-US" sz="1000" kern="1200" dirty="0"/>
+            <a:t>You can call your existing code directly, specifying parameters and (eventual) return value.</a:t>
+          </a:r>
+          <a:endParaRPr lang="en-NL" sz="1000" kern="1200" dirty="0"/>
+        </a:p>
+        <a:p>
+          <a:pPr marL="0" lvl="0" indent="0" algn="l" defTabSz="444500">
+            <a:lnSpc>
+              <a:spcPct val="100000"/>
+            </a:lnSpc>
+            <a:spcBef>
+              <a:spcPct val="0"/>
+            </a:spcBef>
+            <a:spcAft>
+              <a:spcPct val="35000"/>
+            </a:spcAft>
+            <a:buNone/>
+          </a:pPr>
+          <a:r>
+            <a:rPr lang="en-US" sz="1000" kern="1200" dirty="0"/>
+            <a:t>Once you describe your code in the JSON file, it is available in the client right away</a:t>
+          </a:r>
+          <a:endParaRPr lang="en-NL" sz="1000" kern="1200" dirty="0"/>
+        </a:p>
+      </dsp:txBody>
+      <dsp:txXfrm>
+        <a:off x="6349845" y="645271"/>
+        <a:ext cx="1924195" cy="2503747"/>
       </dsp:txXfrm>
     </dsp:sp>
   </dsp:spTree>
@@ -10128,7 +10446,7 @@
           <a:p>
             <a:fld id="{3E30469F-474B-44E0-9013-119402DD7996}" type="datetimeFigureOut">
               <a:rPr lang="en-NL" smtClean="0"/>
-              <a:t>25/02/2026</a:t>
+              <a:t>27/02/2026</a:t>
             </a:fld>
             <a:endParaRPr lang="en-NL"/>
           </a:p>
@@ -11223,7 +11541,7 @@
           <a:p>
             <a:fld id="{3E30469F-474B-44E0-9013-119402DD7996}" type="datetimeFigureOut">
               <a:rPr lang="en-NL" smtClean="0"/>
-              <a:t>25/02/2026</a:t>
+              <a:t>27/02/2026</a:t>
             </a:fld>
             <a:endParaRPr lang="en-NL"/>
           </a:p>
@@ -12203,7 +12521,7 @@
           <a:p>
             <a:fld id="{3E30469F-474B-44E0-9013-119402DD7996}" type="datetimeFigureOut">
               <a:rPr lang="en-NL" smtClean="0"/>
-              <a:t>25/02/2026</a:t>
+              <a:t>27/02/2026</a:t>
             </a:fld>
             <a:endParaRPr lang="en-NL"/>
           </a:p>
@@ -13337,7 +13655,7 @@
           <a:p>
             <a:fld id="{3E30469F-474B-44E0-9013-119402DD7996}" type="datetimeFigureOut">
               <a:rPr lang="en-NL" smtClean="0"/>
-              <a:t>25/02/2026</a:t>
+              <a:t>27/02/2026</a:t>
             </a:fld>
             <a:endParaRPr lang="en-NL"/>
           </a:p>
@@ -14370,7 +14688,7 @@
           <a:p>
             <a:fld id="{3E30469F-474B-44E0-9013-119402DD7996}" type="datetimeFigureOut">
               <a:rPr lang="en-NL" smtClean="0"/>
-              <a:t>25/02/2026</a:t>
+              <a:t>27/02/2026</a:t>
             </a:fld>
             <a:endParaRPr lang="en-NL"/>
           </a:p>
@@ -15030,7 +15348,7 @@
           <a:p>
             <a:fld id="{3E30469F-474B-44E0-9013-119402DD7996}" type="datetimeFigureOut">
               <a:rPr lang="en-NL" smtClean="0"/>
-              <a:t>25/02/2026</a:t>
+              <a:t>27/02/2026</a:t>
             </a:fld>
             <a:endParaRPr lang="en-NL"/>
           </a:p>
@@ -15891,7 +16209,7 @@
           <a:p>
             <a:fld id="{3E30469F-474B-44E0-9013-119402DD7996}" type="datetimeFigureOut">
               <a:rPr lang="en-NL" smtClean="0"/>
-              <a:t>25/02/2026</a:t>
+              <a:t>27/02/2026</a:t>
             </a:fld>
             <a:endParaRPr lang="en-NL"/>
           </a:p>
@@ -16081,7 +16399,7 @@
           <a:p>
             <a:fld id="{3E30469F-474B-44E0-9013-119402DD7996}" type="datetimeFigureOut">
               <a:rPr lang="en-NL" smtClean="0"/>
-              <a:t>25/02/2026</a:t>
+              <a:t>27/02/2026</a:t>
             </a:fld>
             <a:endParaRPr lang="en-NL"/>
           </a:p>
@@ -17053,7 +17371,7 @@
           <a:p>
             <a:fld id="{3E30469F-474B-44E0-9013-119402DD7996}" type="datetimeFigureOut">
               <a:rPr lang="en-NL" smtClean="0"/>
-              <a:t>25/02/2026</a:t>
+              <a:t>27/02/2026</a:t>
             </a:fld>
             <a:endParaRPr lang="en-NL"/>
           </a:p>
@@ -17264,7 +17582,7 @@
           <a:p>
             <a:fld id="{3E30469F-474B-44E0-9013-119402DD7996}" type="datetimeFigureOut">
               <a:rPr lang="en-NL" smtClean="0"/>
-              <a:t>25/02/2026</a:t>
+              <a:t>27/02/2026</a:t>
             </a:fld>
             <a:endParaRPr lang="en-NL"/>
           </a:p>
@@ -18298,7 +18616,7 @@
           <a:p>
             <a:fld id="{3E30469F-474B-44E0-9013-119402DD7996}" type="datetimeFigureOut">
               <a:rPr lang="en-NL" smtClean="0"/>
-              <a:t>25/02/2026</a:t>
+              <a:t>27/02/2026</a:t>
             </a:fld>
             <a:endParaRPr lang="en-NL"/>
           </a:p>
@@ -18570,7 +18888,7 @@
           <a:p>
             <a:fld id="{3E30469F-474B-44E0-9013-119402DD7996}" type="datetimeFigureOut">
               <a:rPr lang="en-NL" smtClean="0"/>
-              <a:t>25/02/2026</a:t>
+              <a:t>27/02/2026</a:t>
             </a:fld>
             <a:endParaRPr lang="en-NL"/>
           </a:p>
@@ -18980,7 +19298,7 @@
           <a:p>
             <a:fld id="{3E30469F-474B-44E0-9013-119402DD7996}" type="datetimeFigureOut">
               <a:rPr lang="en-NL" smtClean="0"/>
-              <a:t>25/02/2026</a:t>
+              <a:t>27/02/2026</a:t>
             </a:fld>
             <a:endParaRPr lang="en-NL"/>
           </a:p>
@@ -19107,7 +19425,7 @@
           <a:p>
             <a:fld id="{3E30469F-474B-44E0-9013-119402DD7996}" type="datetimeFigureOut">
               <a:rPr lang="en-NL" smtClean="0"/>
-              <a:t>25/02/2026</a:t>
+              <a:t>27/02/2026</a:t>
             </a:fld>
             <a:endParaRPr lang="en-NL"/>
           </a:p>
@@ -19202,7 +19520,7 @@
           <a:p>
             <a:fld id="{3E30469F-474B-44E0-9013-119402DD7996}" type="datetimeFigureOut">
               <a:rPr lang="en-NL" smtClean="0"/>
-              <a:t>25/02/2026</a:t>
+              <a:t>27/02/2026</a:t>
             </a:fld>
             <a:endParaRPr lang="en-NL"/>
           </a:p>
@@ -20283,7 +20601,7 @@
           <a:p>
             <a:fld id="{3E30469F-474B-44E0-9013-119402DD7996}" type="datetimeFigureOut">
               <a:rPr lang="en-NL" smtClean="0"/>
-              <a:t>25/02/2026</a:t>
+              <a:t>27/02/2026</a:t>
             </a:fld>
             <a:endParaRPr lang="en-NL"/>
           </a:p>
@@ -21391,7 +21709,7 @@
           <a:p>
             <a:fld id="{3E30469F-474B-44E0-9013-119402DD7996}" type="datetimeFigureOut">
               <a:rPr lang="en-NL" smtClean="0"/>
-              <a:t>25/02/2026</a:t>
+              <a:t>27/02/2026</a:t>
             </a:fld>
             <a:endParaRPr lang="en-NL"/>
           </a:p>
@@ -22451,7 +22769,7 @@
           <a:p>
             <a:fld id="{3E30469F-474B-44E0-9013-119402DD7996}" type="datetimeFigureOut">
               <a:rPr lang="en-NL" smtClean="0"/>
-              <a:t>25/02/2026</a:t>
+              <a:t>27/02/2026</a:t>
             </a:fld>
             <a:endParaRPr lang="en-NL"/>
           </a:p>
@@ -23323,7 +23641,7 @@
           <a:p>
             <a:r>
               <a:rPr lang="en-US" dirty="0"/>
-              <a:t>The client-side methods follow the client language syntax and conventions</a:t>
+              <a:t>The client-side methods follow the client language naming, syntax and conventions, making the life easy to back-end programmers</a:t>
             </a:r>
           </a:p>
         </p:txBody>
@@ -23342,6 +23660,138 @@
 </file>
 
 <file path=ppt/slides/slide12.xml><?xml version="1.0" encoding="utf-8"?>
+<p:sld xmlns:a="http://schemas.openxmlformats.org/drawingml/2006/main" xmlns:r="http://schemas.openxmlformats.org/officeDocument/2006/relationships" xmlns:p="http://schemas.openxmlformats.org/presentationml/2006/main">
+  <p:cSld>
+    <p:spTree>
+      <p:nvGrpSpPr>
+        <p:cNvPr id="1" name=""/>
+        <p:cNvGrpSpPr/>
+        <p:nvPr/>
+      </p:nvGrpSpPr>
+      <p:grpSpPr>
+        <a:xfrm>
+          <a:off x="0" y="0"/>
+          <a:ext cx="0" cy="0"/>
+          <a:chOff x="0" y="0"/>
+          <a:chExt cx="0" cy="0"/>
+        </a:xfrm>
+      </p:grpSpPr>
+      <p:sp>
+        <p:nvSpPr>
+          <p:cNvPr id="2" name="Title 1">
+            <a:extLst>
+              <a:ext uri="{FF2B5EF4-FFF2-40B4-BE49-F238E27FC236}">
+                <a16:creationId xmlns:a16="http://schemas.microsoft.com/office/drawing/2014/main" id="{3768FF1B-F9AC-D8C7-D9EF-A0FC34AD11ED}"/>
+              </a:ext>
+            </a:extLst>
+          </p:cNvPr>
+          <p:cNvSpPr>
+            <a:spLocks noGrp="1"/>
+          </p:cNvSpPr>
+          <p:nvPr>
+            <p:ph type="title"/>
+          </p:nvPr>
+        </p:nvSpPr>
+        <p:spPr/>
+        <p:txBody>
+          <a:bodyPr/>
+          <a:lstStyle/>
+          <a:p>
+            <a:r>
+              <a:rPr lang="en-US" dirty="0"/>
+              <a:t>Designed for programmers</a:t>
+            </a:r>
+            <a:endParaRPr lang="en-NL" dirty="0"/>
+          </a:p>
+        </p:txBody>
+      </p:sp>
+      <p:sp>
+        <p:nvSpPr>
+          <p:cNvPr id="3" name="Content Placeholder 2">
+            <a:extLst>
+              <a:ext uri="{FF2B5EF4-FFF2-40B4-BE49-F238E27FC236}">
+                <a16:creationId xmlns:a16="http://schemas.microsoft.com/office/drawing/2014/main" id="{B0E88B97-6A21-F842-82B1-F8FFAB38DBEB}"/>
+              </a:ext>
+            </a:extLst>
+          </p:cNvPr>
+          <p:cNvSpPr>
+            <a:spLocks noGrp="1"/>
+          </p:cNvSpPr>
+          <p:nvPr>
+            <p:ph idx="1"/>
+          </p:nvPr>
+        </p:nvSpPr>
+        <p:spPr/>
+        <p:txBody>
+          <a:bodyPr>
+            <a:normAutofit lnSpcReduction="10000"/>
+          </a:bodyPr>
+          <a:lstStyle/>
+          <a:p>
+            <a:r>
+              <a:rPr lang="en-US" dirty="0"/>
+              <a:t>We expose a wide range of tools to help you debug problems and improve performances:</a:t>
+            </a:r>
+          </a:p>
+          <a:p>
+            <a:pPr lvl="1"/>
+            <a:r>
+              <a:rPr lang="en-US" dirty="0"/>
+              <a:t>Dump the request</a:t>
+            </a:r>
+          </a:p>
+          <a:p>
+            <a:pPr lvl="1"/>
+            <a:r>
+              <a:rPr lang="en-US" dirty="0"/>
+              <a:t>Dump the response</a:t>
+            </a:r>
+          </a:p>
+          <a:p>
+            <a:pPr lvl="1"/>
+            <a:r>
+              <a:rPr lang="en-US" dirty="0"/>
+              <a:t>Dump the timing in microseconds</a:t>
+            </a:r>
+          </a:p>
+          <a:p>
+            <a:pPr lvl="1"/>
+            <a:r>
+              <a:rPr lang="en-US" dirty="0"/>
+              <a:t>Add custom log messages in the server console, also in colors (to stand out) for debugging purposes</a:t>
+            </a:r>
+          </a:p>
+          <a:p>
+            <a:r>
+              <a:rPr lang="en-US" dirty="0"/>
+              <a:t>RESP3 library, to bypass the framework and make manual calls</a:t>
+            </a:r>
+          </a:p>
+          <a:p>
+            <a:r>
+              <a:rPr lang="en-US" dirty="0"/>
+              <a:t>Built-in objects, to perform pre-compiled disk, variables, globals and process utilities</a:t>
+            </a:r>
+          </a:p>
+          <a:p>
+            <a:endParaRPr lang="en-NL" dirty="0"/>
+          </a:p>
+        </p:txBody>
+      </p:sp>
+    </p:spTree>
+    <p:extLst>
+      <p:ext uri="{BB962C8B-B14F-4D97-AF65-F5344CB8AC3E}">
+        <p14:creationId xmlns:p14="http://schemas.microsoft.com/office/powerpoint/2010/main" val="3763323384"/>
+      </p:ext>
+    </p:extLst>
+  </p:cSld>
+  <p:clrMapOvr>
+    <a:masterClrMapping/>
+  </p:clrMapOvr>
+</p:sld>
+</file>
+
+<file path=ppt/slides/slide13.xml><?xml version="1.0" encoding="utf-8"?>
 <p:sld xmlns:a="http://schemas.openxmlformats.org/drawingml/2006/main" xmlns:r="http://schemas.openxmlformats.org/officeDocument/2006/relationships" xmlns:p="http://schemas.openxmlformats.org/presentationml/2006/main">
   <p:cSld>
     <p:spTree>
@@ -23405,25 +23855,84 @@
         </p:nvSpPr>
         <p:spPr/>
         <p:txBody>
-          <a:bodyPr/>
+          <a:bodyPr>
+            <a:normAutofit fontScale="92500" lnSpcReduction="20000"/>
+          </a:bodyPr>
           <a:lstStyle/>
           <a:p>
             <a:r>
               <a:rPr lang="en-US" dirty="0"/>
-              <a:t>The DBMS class will expose a JSON / Object database</a:t>
+              <a:t>The DBMS class </a:t>
             </a:r>
           </a:p>
           <a:p>
+            <a:pPr lvl="1"/>
+            <a:r>
+              <a:rPr lang="en-US" dirty="0"/>
+              <a:t>will expose a JSON / Object database</a:t>
+            </a:r>
+          </a:p>
+          <a:p>
+            <a:pPr lvl="1"/>
             <a:r>
               <a:rPr lang="en-US" dirty="0"/>
               <a:t>It will allow tables linking in a similar way Fileman does</a:t>
             </a:r>
           </a:p>
           <a:p>
+            <a:pPr lvl="1"/>
             <a:r>
               <a:rPr lang="en-US" dirty="0"/>
               <a:t>It will support deep-indexing (indexes of fields deep into object props and arrays)</a:t>
             </a:r>
+          </a:p>
+          <a:p>
+            <a:pPr lvl="1"/>
+            <a:r>
+              <a:rPr lang="en-US" dirty="0"/>
+              <a:t>It will use the client-side to execute commands directly</a:t>
+            </a:r>
+          </a:p>
+          <a:p>
+            <a:r>
+              <a:rPr lang="en-US" dirty="0"/>
+              <a:t>The DB class:</a:t>
+            </a:r>
+          </a:p>
+          <a:p>
+            <a:pPr lvl="1"/>
+            <a:r>
+              <a:rPr lang="en-US" dirty="0"/>
+              <a:t>Will expose an advanced global search (using the ZWRITE call from the GUI that allows:</a:t>
+            </a:r>
+          </a:p>
+          <a:p>
+            <a:pPr lvl="2"/>
+            <a:r>
+              <a:rPr lang="en-US" dirty="0"/>
+              <a:t>Ranges on subscripts</a:t>
+            </a:r>
+          </a:p>
+          <a:p>
+            <a:pPr lvl="2"/>
+            <a:r>
+              <a:rPr lang="en-US" dirty="0"/>
+              <a:t>Search backwards (still using ranges)</a:t>
+            </a:r>
+          </a:p>
+          <a:p>
+            <a:pPr lvl="2"/>
+            <a:r>
+              <a:rPr lang="en-US"/>
+              <a:t>Directly supports </a:t>
+            </a:r>
+            <a:r>
+              <a:rPr lang="en-US" dirty="0"/>
+              <a:t>lazy-fetching (needed for large global)</a:t>
+            </a:r>
+          </a:p>
+          <a:p>
+            <a:endParaRPr lang="en-US" dirty="0"/>
           </a:p>
           <a:p>
             <a:endParaRPr lang="en-NL" dirty="0"/>
@@ -23444,6 +23953,260 @@
 </file>
 
 <file path=ppt/slides/slide2.xml><?xml version="1.0" encoding="utf-8"?>
+<p:sld xmlns:a="http://schemas.openxmlformats.org/drawingml/2006/main" xmlns:r="http://schemas.openxmlformats.org/officeDocument/2006/relationships" xmlns:p="http://schemas.openxmlformats.org/presentationml/2006/main">
+  <p:cSld>
+    <p:spTree>
+      <p:nvGrpSpPr>
+        <p:cNvPr id="1" name=""/>
+        <p:cNvGrpSpPr/>
+        <p:nvPr/>
+      </p:nvGrpSpPr>
+      <p:grpSpPr>
+        <a:xfrm>
+          <a:off x="0" y="0"/>
+          <a:ext cx="0" cy="0"/>
+          <a:chOff x="0" y="0"/>
+          <a:chExt cx="0" cy="0"/>
+        </a:xfrm>
+      </p:grpSpPr>
+      <p:sp>
+        <p:nvSpPr>
+          <p:cNvPr id="2" name="Title 1">
+            <a:extLst>
+              <a:ext uri="{FF2B5EF4-FFF2-40B4-BE49-F238E27FC236}">
+                <a16:creationId xmlns:a16="http://schemas.microsoft.com/office/drawing/2014/main" id="{AAFD5D0B-3FF4-4FED-DDC8-D173C4403E65}"/>
+              </a:ext>
+            </a:extLst>
+          </p:cNvPr>
+          <p:cNvSpPr>
+            <a:spLocks noGrp="1"/>
+          </p:cNvSpPr>
+          <p:nvPr>
+            <p:ph type="title"/>
+          </p:nvPr>
+        </p:nvSpPr>
+        <p:spPr/>
+        <p:txBody>
+          <a:bodyPr/>
+          <a:lstStyle/>
+          <a:p>
+            <a:r>
+              <a:rPr lang="en-US" dirty="0"/>
+              <a:t>Private comment</a:t>
+            </a:r>
+            <a:endParaRPr lang="en-NL" dirty="0"/>
+          </a:p>
+        </p:txBody>
+      </p:sp>
+      <p:sp>
+        <p:nvSpPr>
+          <p:cNvPr id="3" name="Content Placeholder 2">
+            <a:extLst>
+              <a:ext uri="{FF2B5EF4-FFF2-40B4-BE49-F238E27FC236}">
+                <a16:creationId xmlns:a16="http://schemas.microsoft.com/office/drawing/2014/main" id="{6ECD4B7A-F343-5BCB-94C9-E80EB92EE397}"/>
+              </a:ext>
+            </a:extLst>
+          </p:cNvPr>
+          <p:cNvSpPr>
+            <a:spLocks noGrp="1"/>
+          </p:cNvSpPr>
+          <p:nvPr>
+            <p:ph idx="1"/>
+          </p:nvPr>
+        </p:nvSpPr>
+        <p:spPr/>
+        <p:txBody>
+          <a:bodyPr>
+            <a:normAutofit lnSpcReduction="10000"/>
+          </a:bodyPr>
+          <a:lstStyle/>
+          <a:p>
+            <a:r>
+              <a:rPr lang="en-US" dirty="0"/>
+              <a:t>Practically every database in the market has a remote access through sockets</a:t>
+            </a:r>
+          </a:p>
+          <a:p>
+            <a:r>
+              <a:rPr lang="en-US" dirty="0"/>
+              <a:t>One of the main reasons is the growing amount of processed data, leaving horizontal back-end scalability (multiple servers behind a load balancer) accessing a monolithic database a good compromise.</a:t>
+            </a:r>
+          </a:p>
+          <a:p>
+            <a:r>
+              <a:rPr lang="en-US" dirty="0"/>
+              <a:t>At the same time, executing only pure data API running on the server and moving all the business-tiers to external machines increase the power of the database server allowing a monolithic system to handle more traffic.</a:t>
+            </a:r>
+          </a:p>
+          <a:p>
+            <a:r>
+              <a:rPr lang="en-US" dirty="0" err="1"/>
+              <a:t>GTm</a:t>
+            </a:r>
+            <a:r>
+              <a:rPr lang="en-US" dirty="0"/>
+              <a:t> and YottaDB don’t have remote access, but I can understand that it is not easy to find the right compromise talking to remote servers with foreign programming languages</a:t>
+            </a:r>
+          </a:p>
+          <a:p>
+            <a:pPr lvl="1"/>
+            <a:endParaRPr lang="en-NL" dirty="0"/>
+          </a:p>
+        </p:txBody>
+      </p:sp>
+    </p:spTree>
+    <p:extLst>
+      <p:ext uri="{BB962C8B-B14F-4D97-AF65-F5344CB8AC3E}">
+        <p14:creationId xmlns:p14="http://schemas.microsoft.com/office/powerpoint/2010/main" val="2240125713"/>
+      </p:ext>
+    </p:extLst>
+  </p:cSld>
+  <p:clrMapOvr>
+    <a:masterClrMapping/>
+  </p:clrMapOvr>
+</p:sld>
+</file>
+
+<file path=ppt/slides/slide3.xml><?xml version="1.0" encoding="utf-8"?>
+<p:sld xmlns:a="http://schemas.openxmlformats.org/drawingml/2006/main" xmlns:r="http://schemas.openxmlformats.org/officeDocument/2006/relationships" xmlns:p="http://schemas.openxmlformats.org/presentationml/2006/main">
+  <p:cSld>
+    <p:spTree>
+      <p:nvGrpSpPr>
+        <p:cNvPr id="1" name="">
+          <a:extLst>
+            <a:ext uri="{FF2B5EF4-FFF2-40B4-BE49-F238E27FC236}">
+              <a16:creationId xmlns:a16="http://schemas.microsoft.com/office/drawing/2014/main" id="{932B73CC-7ECC-7075-0FFC-14EB9A731C77}"/>
+            </a:ext>
+          </a:extLst>
+        </p:cNvPr>
+        <p:cNvGrpSpPr/>
+        <p:nvPr/>
+      </p:nvGrpSpPr>
+      <p:grpSpPr>
+        <a:xfrm>
+          <a:off x="0" y="0"/>
+          <a:ext cx="0" cy="0"/>
+          <a:chOff x="0" y="0"/>
+          <a:chExt cx="0" cy="0"/>
+        </a:xfrm>
+      </p:grpSpPr>
+      <p:sp>
+        <p:nvSpPr>
+          <p:cNvPr id="2" name="Title 1">
+            <a:extLst>
+              <a:ext uri="{FF2B5EF4-FFF2-40B4-BE49-F238E27FC236}">
+                <a16:creationId xmlns:a16="http://schemas.microsoft.com/office/drawing/2014/main" id="{E56B026E-8CEF-8EBE-7D93-0A0EE6BAB81F}"/>
+              </a:ext>
+            </a:extLst>
+          </p:cNvPr>
+          <p:cNvSpPr>
+            <a:spLocks noGrp="1"/>
+          </p:cNvSpPr>
+          <p:nvPr>
+            <p:ph type="title"/>
+          </p:nvPr>
+        </p:nvSpPr>
+        <p:spPr/>
+        <p:txBody>
+          <a:bodyPr/>
+          <a:lstStyle/>
+          <a:p>
+            <a:r>
+              <a:rPr lang="en-US" dirty="0"/>
+              <a:t>Private comment</a:t>
+            </a:r>
+            <a:endParaRPr lang="en-NL" dirty="0"/>
+          </a:p>
+        </p:txBody>
+      </p:sp>
+      <p:sp>
+        <p:nvSpPr>
+          <p:cNvPr id="3" name="Content Placeholder 2">
+            <a:extLst>
+              <a:ext uri="{FF2B5EF4-FFF2-40B4-BE49-F238E27FC236}">
+                <a16:creationId xmlns:a16="http://schemas.microsoft.com/office/drawing/2014/main" id="{D2EC6879-A4B1-89EF-4659-2698C7501C18}"/>
+              </a:ext>
+            </a:extLst>
+          </p:cNvPr>
+          <p:cNvSpPr>
+            <a:spLocks noGrp="1"/>
+          </p:cNvSpPr>
+          <p:nvPr>
+            <p:ph idx="1"/>
+          </p:nvPr>
+        </p:nvSpPr>
+        <p:spPr/>
+        <p:txBody>
+          <a:bodyPr>
+            <a:normAutofit/>
+          </a:bodyPr>
+          <a:lstStyle/>
+          <a:p>
+            <a:r>
+              <a:rPr lang="en-US" dirty="0"/>
+              <a:t>That’s why Mind fill all the gaps:</a:t>
+            </a:r>
+          </a:p>
+          <a:p>
+            <a:pPr lvl="1"/>
+            <a:r>
+              <a:rPr lang="en-US" dirty="0"/>
+              <a:t>Talks M to M programmers and </a:t>
+            </a:r>
+            <a:r>
+              <a:rPr lang="en-US" dirty="0" err="1"/>
+              <a:t>js</a:t>
+            </a:r>
+            <a:r>
+              <a:rPr lang="en-US" dirty="0"/>
+              <a:t> / java / Go to remote programmers</a:t>
+            </a:r>
+          </a:p>
+          <a:p>
+            <a:pPr lvl="1"/>
+            <a:r>
+              <a:rPr lang="en-US" dirty="0"/>
+              <a:t>Expose data in back-end “standard” formats (data-types, Objects) for smoother integration</a:t>
+            </a:r>
+          </a:p>
+          <a:p>
+            <a:r>
+              <a:rPr lang="en-US" dirty="0"/>
+              <a:t>It is the natural “remote extension” of the multi-language packages YottaDB already offers…</a:t>
+            </a:r>
+          </a:p>
+          <a:p>
+            <a:r>
+              <a:rPr lang="en-US" dirty="0"/>
+              <a:t>It removes the need to have ALL the client’s code running on the database server, which is now the case (and, in some situation, a limitation for potential customers)</a:t>
+            </a:r>
+          </a:p>
+          <a:p>
+            <a:r>
+              <a:rPr lang="en-US" dirty="0"/>
+              <a:t>Why not offer both?</a:t>
+            </a:r>
+          </a:p>
+          <a:p>
+            <a:pPr lvl="1"/>
+            <a:endParaRPr lang="en-NL" dirty="0"/>
+          </a:p>
+        </p:txBody>
+      </p:sp>
+    </p:spTree>
+    <p:extLst>
+      <p:ext uri="{BB962C8B-B14F-4D97-AF65-F5344CB8AC3E}">
+        <p14:creationId xmlns:p14="http://schemas.microsoft.com/office/powerpoint/2010/main" val="3005701212"/>
+      </p:ext>
+    </p:extLst>
+  </p:cSld>
+  <p:clrMapOvr>
+    <a:masterClrMapping/>
+  </p:clrMapOvr>
+</p:sld>
+</file>
+
+<file path=ppt/slides/slide4.xml><?xml version="1.0" encoding="utf-8"?>
 <p:sld xmlns:a="http://schemas.openxmlformats.org/drawingml/2006/main" xmlns:r="http://schemas.openxmlformats.org/officeDocument/2006/relationships" xmlns:p="http://schemas.openxmlformats.org/presentationml/2006/main">
   <p:cSld>
     <p:bg>
@@ -23556,7 +24319,7 @@
 </p:sld>
 </file>
 
-<file path=ppt/slides/slide3.xml><?xml version="1.0" encoding="utf-8"?>
+<file path=ppt/slides/slide5.xml><?xml version="1.0" encoding="utf-8"?>
 <p:sld xmlns:a="http://schemas.openxmlformats.org/drawingml/2006/main" xmlns:r="http://schemas.openxmlformats.org/officeDocument/2006/relationships" xmlns:p="http://schemas.openxmlformats.org/presentationml/2006/main">
   <p:cSld>
     <p:spTree>
@@ -23687,7 +24450,7 @@
 </p:sld>
 </file>
 
-<file path=ppt/slides/slide4.xml><?xml version="1.0" encoding="utf-8"?>
+<file path=ppt/slides/slide6.xml><?xml version="1.0" encoding="utf-8"?>
 <p:sld xmlns:a="http://schemas.openxmlformats.org/drawingml/2006/main" xmlns:r="http://schemas.openxmlformats.org/officeDocument/2006/relationships" xmlns:p="http://schemas.openxmlformats.org/presentationml/2006/main">
   <p:cSld>
     <p:bg>
@@ -23770,7 +24533,7 @@
             <p:ph idx="1"/>
             <p:extLst>
               <p:ext uri="{D42A27DB-BD31-4B8C-83A1-F6EECF244321}">
-                <p14:modId xmlns:p14="http://schemas.microsoft.com/office/powerpoint/2010/main" val="1780370495"/>
+                <p14:modId xmlns:p14="http://schemas.microsoft.com/office/powerpoint/2010/main" val="1191674732"/>
               </p:ext>
               <p:ext uri="{E7BDC344-281C-4309-B0C6-D0EE65EED2A8}">
                 <p202:designPr xmlns:p202="http://schemas.microsoft.com/office/powerpoint/2020/02/main">
@@ -23797,260 +24560,6 @@
     <p:extLst>
       <p:ext uri="{BB962C8B-B14F-4D97-AF65-F5344CB8AC3E}">
         <p14:creationId xmlns:p14="http://schemas.microsoft.com/office/powerpoint/2010/main" val="2532632543"/>
-      </p:ext>
-    </p:extLst>
-  </p:cSld>
-  <p:clrMapOvr>
-    <a:masterClrMapping/>
-  </p:clrMapOvr>
-</p:sld>
-</file>
-
-<file path=ppt/slides/slide5.xml><?xml version="1.0" encoding="utf-8"?>
-<p:sld xmlns:a="http://schemas.openxmlformats.org/drawingml/2006/main" xmlns:r="http://schemas.openxmlformats.org/officeDocument/2006/relationships" xmlns:p="http://schemas.openxmlformats.org/presentationml/2006/main">
-  <p:cSld>
-    <p:spTree>
-      <p:nvGrpSpPr>
-        <p:cNvPr id="1" name=""/>
-        <p:cNvGrpSpPr/>
-        <p:nvPr/>
-      </p:nvGrpSpPr>
-      <p:grpSpPr>
-        <a:xfrm>
-          <a:off x="0" y="0"/>
-          <a:ext cx="0" cy="0"/>
-          <a:chOff x="0" y="0"/>
-          <a:chExt cx="0" cy="0"/>
-        </a:xfrm>
-      </p:grpSpPr>
-      <p:sp>
-        <p:nvSpPr>
-          <p:cNvPr id="2" name="Title 1">
-            <a:extLst>
-              <a:ext uri="{FF2B5EF4-FFF2-40B4-BE49-F238E27FC236}">
-                <a16:creationId xmlns:a16="http://schemas.microsoft.com/office/drawing/2014/main" id="{AAFD5D0B-3FF4-4FED-DDC8-D173C4403E65}"/>
-              </a:ext>
-            </a:extLst>
-          </p:cNvPr>
-          <p:cNvSpPr>
-            <a:spLocks noGrp="1"/>
-          </p:cNvSpPr>
-          <p:nvPr>
-            <p:ph type="title"/>
-          </p:nvPr>
-        </p:nvSpPr>
-        <p:spPr/>
-        <p:txBody>
-          <a:bodyPr/>
-          <a:lstStyle/>
-          <a:p>
-            <a:r>
-              <a:rPr lang="en-US" dirty="0"/>
-              <a:t>Private comment</a:t>
-            </a:r>
-            <a:endParaRPr lang="en-NL" dirty="0"/>
-          </a:p>
-        </p:txBody>
-      </p:sp>
-      <p:sp>
-        <p:nvSpPr>
-          <p:cNvPr id="3" name="Content Placeholder 2">
-            <a:extLst>
-              <a:ext uri="{FF2B5EF4-FFF2-40B4-BE49-F238E27FC236}">
-                <a16:creationId xmlns:a16="http://schemas.microsoft.com/office/drawing/2014/main" id="{6ECD4B7A-F343-5BCB-94C9-E80EB92EE397}"/>
-              </a:ext>
-            </a:extLst>
-          </p:cNvPr>
-          <p:cNvSpPr>
-            <a:spLocks noGrp="1"/>
-          </p:cNvSpPr>
-          <p:nvPr>
-            <p:ph idx="1"/>
-          </p:nvPr>
-        </p:nvSpPr>
-        <p:spPr/>
-        <p:txBody>
-          <a:bodyPr>
-            <a:normAutofit lnSpcReduction="10000"/>
-          </a:bodyPr>
-          <a:lstStyle/>
-          <a:p>
-            <a:r>
-              <a:rPr lang="en-US" dirty="0"/>
-              <a:t>Practically every database in the market has a remote access through sockets</a:t>
-            </a:r>
-          </a:p>
-          <a:p>
-            <a:r>
-              <a:rPr lang="en-US" dirty="0"/>
-              <a:t>One of the main reasons is the growing amount of processed data, leaving horizontal back-end scalability (multiple servers behind a load balancer) accessing a monolithic database a good compromise.</a:t>
-            </a:r>
-          </a:p>
-          <a:p>
-            <a:r>
-              <a:rPr lang="en-US" dirty="0"/>
-              <a:t>At the same time, executing only pure data API running on the server and moving all the business-tiers to external machines increase the power of the database server allowing a monolithic system to handle more traffic.</a:t>
-            </a:r>
-          </a:p>
-          <a:p>
-            <a:r>
-              <a:rPr lang="en-US" dirty="0" err="1"/>
-              <a:t>GTm</a:t>
-            </a:r>
-            <a:r>
-              <a:rPr lang="en-US" dirty="0"/>
-              <a:t> and YottaDB don’t have remote access, but I can understand that it is not easy to find the right compromise talking to remote servers with foreign programming languages</a:t>
-            </a:r>
-          </a:p>
-          <a:p>
-            <a:pPr lvl="1"/>
-            <a:endParaRPr lang="en-NL" dirty="0"/>
-          </a:p>
-        </p:txBody>
-      </p:sp>
-    </p:spTree>
-    <p:extLst>
-      <p:ext uri="{BB962C8B-B14F-4D97-AF65-F5344CB8AC3E}">
-        <p14:creationId xmlns:p14="http://schemas.microsoft.com/office/powerpoint/2010/main" val="2240125713"/>
-      </p:ext>
-    </p:extLst>
-  </p:cSld>
-  <p:clrMapOvr>
-    <a:masterClrMapping/>
-  </p:clrMapOvr>
-</p:sld>
-</file>
-
-<file path=ppt/slides/slide6.xml><?xml version="1.0" encoding="utf-8"?>
-<p:sld xmlns:a="http://schemas.openxmlformats.org/drawingml/2006/main" xmlns:r="http://schemas.openxmlformats.org/officeDocument/2006/relationships" xmlns:p="http://schemas.openxmlformats.org/presentationml/2006/main">
-  <p:cSld>
-    <p:spTree>
-      <p:nvGrpSpPr>
-        <p:cNvPr id="1" name="">
-          <a:extLst>
-            <a:ext uri="{FF2B5EF4-FFF2-40B4-BE49-F238E27FC236}">
-              <a16:creationId xmlns:a16="http://schemas.microsoft.com/office/drawing/2014/main" id="{932B73CC-7ECC-7075-0FFC-14EB9A731C77}"/>
-            </a:ext>
-          </a:extLst>
-        </p:cNvPr>
-        <p:cNvGrpSpPr/>
-        <p:nvPr/>
-      </p:nvGrpSpPr>
-      <p:grpSpPr>
-        <a:xfrm>
-          <a:off x="0" y="0"/>
-          <a:ext cx="0" cy="0"/>
-          <a:chOff x="0" y="0"/>
-          <a:chExt cx="0" cy="0"/>
-        </a:xfrm>
-      </p:grpSpPr>
-      <p:sp>
-        <p:nvSpPr>
-          <p:cNvPr id="2" name="Title 1">
-            <a:extLst>
-              <a:ext uri="{FF2B5EF4-FFF2-40B4-BE49-F238E27FC236}">
-                <a16:creationId xmlns:a16="http://schemas.microsoft.com/office/drawing/2014/main" id="{E56B026E-8CEF-8EBE-7D93-0A0EE6BAB81F}"/>
-              </a:ext>
-            </a:extLst>
-          </p:cNvPr>
-          <p:cNvSpPr>
-            <a:spLocks noGrp="1"/>
-          </p:cNvSpPr>
-          <p:nvPr>
-            <p:ph type="title"/>
-          </p:nvPr>
-        </p:nvSpPr>
-        <p:spPr/>
-        <p:txBody>
-          <a:bodyPr/>
-          <a:lstStyle/>
-          <a:p>
-            <a:r>
-              <a:rPr lang="en-US" dirty="0"/>
-              <a:t>Private comment</a:t>
-            </a:r>
-            <a:endParaRPr lang="en-NL" dirty="0"/>
-          </a:p>
-        </p:txBody>
-      </p:sp>
-      <p:sp>
-        <p:nvSpPr>
-          <p:cNvPr id="3" name="Content Placeholder 2">
-            <a:extLst>
-              <a:ext uri="{FF2B5EF4-FFF2-40B4-BE49-F238E27FC236}">
-                <a16:creationId xmlns:a16="http://schemas.microsoft.com/office/drawing/2014/main" id="{D2EC6879-A4B1-89EF-4659-2698C7501C18}"/>
-              </a:ext>
-            </a:extLst>
-          </p:cNvPr>
-          <p:cNvSpPr>
-            <a:spLocks noGrp="1"/>
-          </p:cNvSpPr>
-          <p:nvPr>
-            <p:ph idx="1"/>
-          </p:nvPr>
-        </p:nvSpPr>
-        <p:spPr/>
-        <p:txBody>
-          <a:bodyPr>
-            <a:normAutofit/>
-          </a:bodyPr>
-          <a:lstStyle/>
-          <a:p>
-            <a:r>
-              <a:rPr lang="en-US" dirty="0"/>
-              <a:t>That’s why Mind fill all the gaps:</a:t>
-            </a:r>
-          </a:p>
-          <a:p>
-            <a:pPr lvl="1"/>
-            <a:r>
-              <a:rPr lang="en-US" dirty="0"/>
-              <a:t>Talks M to M programmers and </a:t>
-            </a:r>
-            <a:r>
-              <a:rPr lang="en-US" dirty="0" err="1"/>
-              <a:t>js</a:t>
-            </a:r>
-            <a:r>
-              <a:rPr lang="en-US" dirty="0"/>
-              <a:t> / java / Go to remote programmers</a:t>
-            </a:r>
-          </a:p>
-          <a:p>
-            <a:pPr lvl="1"/>
-            <a:r>
-              <a:rPr lang="en-US" dirty="0"/>
-              <a:t>Expose data in back-end “standard” formats (data-types, Objects) for smoother integration</a:t>
-            </a:r>
-          </a:p>
-          <a:p>
-            <a:r>
-              <a:rPr lang="en-US" dirty="0"/>
-              <a:t>It is the natural “remote extension” of the multi-language packages YottaDB already offers…</a:t>
-            </a:r>
-          </a:p>
-          <a:p>
-            <a:r>
-              <a:rPr lang="en-US" dirty="0"/>
-              <a:t>It removes the need to have ALL the client’s code running on the database server, which is now the case (and, in some situation, a limitation for potential customers)</a:t>
-            </a:r>
-          </a:p>
-          <a:p>
-            <a:r>
-              <a:rPr lang="en-US" dirty="0"/>
-              <a:t>Why not offer both?</a:t>
-            </a:r>
-          </a:p>
-          <a:p>
-            <a:pPr lvl="1"/>
-            <a:endParaRPr lang="en-NL" dirty="0"/>
-          </a:p>
-        </p:txBody>
-      </p:sp>
-    </p:spTree>
-    <p:extLst>
-      <p:ext uri="{BB962C8B-B14F-4D97-AF65-F5344CB8AC3E}">
-        <p14:creationId xmlns:p14="http://schemas.microsoft.com/office/powerpoint/2010/main" val="3005701212"/>
       </p:ext>
     </p:extLst>
   </p:cSld>
@@ -24917,7 +25426,7 @@
             <a:pPr algn="ctr"/>
             <a:r>
               <a:rPr lang="en-US" dirty="0"/>
-              <a:t>Data layer API</a:t>
+              <a:t>new API</a:t>
             </a:r>
             <a:endParaRPr lang="en-NL" dirty="0"/>
           </a:p>
@@ -24999,6 +25508,54 @@
           <a:bodyPr/>
           <a:lstStyle/>
           <a:p>
+            <a:endParaRPr lang="en-NL" dirty="0"/>
+          </a:p>
+        </p:txBody>
+      </p:sp>
+      <p:sp>
+        <p:nvSpPr>
+          <p:cNvPr id="3" name="Speech Bubble: Rectangle with Corners Rounded 2">
+            <a:extLst>
+              <a:ext uri="{FF2B5EF4-FFF2-40B4-BE49-F238E27FC236}">
+                <a16:creationId xmlns:a16="http://schemas.microsoft.com/office/drawing/2014/main" id="{B3C09524-0BFC-9A22-794B-436AC536DD53}"/>
+              </a:ext>
+            </a:extLst>
+          </p:cNvPr>
+          <p:cNvSpPr/>
+          <p:nvPr/>
+        </p:nvSpPr>
+        <p:spPr>
+          <a:xfrm>
+            <a:off x="9750535" y="1243211"/>
+            <a:ext cx="1252331" cy="1701016"/>
+          </a:xfrm>
+          <a:prstGeom prst="wedgeRoundRectCallout">
+            <a:avLst/>
+          </a:prstGeom>
+        </p:spPr>
+        <p:style>
+          <a:lnRef idx="2">
+            <a:schemeClr val="accent6"/>
+          </a:lnRef>
+          <a:fillRef idx="1">
+            <a:schemeClr val="lt1"/>
+          </a:fillRef>
+          <a:effectRef idx="0">
+            <a:schemeClr val="accent6"/>
+          </a:effectRef>
+          <a:fontRef idx="minor">
+            <a:schemeClr val="dk1"/>
+          </a:fontRef>
+        </p:style>
+        <p:txBody>
+          <a:bodyPr rtlCol="0" anchor="ctr"/>
+          <a:lstStyle/>
+          <a:p>
+            <a:pPr algn="ctr"/>
+            <a:r>
+              <a:rPr lang="en-US" dirty="0"/>
+              <a:t>Your existing code</a:t>
+            </a:r>
             <a:endParaRPr lang="en-NL" dirty="0"/>
           </a:p>
         </p:txBody>

--- a/docs/slides/def1.pptx
+++ b/docs/slides/def1.pptx
@@ -6,18 +6,18 @@
   </p:sldMasterIdLst>
   <p:sldIdLst>
     <p:sldId id="256" r:id="rId2"/>
-    <p:sldId id="258" r:id="rId3"/>
-    <p:sldId id="264" r:id="rId4"/>
-    <p:sldId id="259" r:id="rId5"/>
-    <p:sldId id="257" r:id="rId6"/>
-    <p:sldId id="267" r:id="rId7"/>
+    <p:sldId id="257" r:id="rId3"/>
+    <p:sldId id="267" r:id="rId4"/>
+    <p:sldId id="258" r:id="rId5"/>
+    <p:sldId id="264" r:id="rId6"/>
+    <p:sldId id="259" r:id="rId7"/>
     <p:sldId id="266" r:id="rId8"/>
     <p:sldId id="263" r:id="rId9"/>
     <p:sldId id="260" r:id="rId10"/>
     <p:sldId id="268" r:id="rId11"/>
-    <p:sldId id="261" r:id="rId12"/>
-    <p:sldId id="262" r:id="rId13"/>
-    <p:sldId id="265" r:id="rId14"/>
+    <p:sldId id="270" r:id="rId12"/>
+    <p:sldId id="271" r:id="rId13"/>
+    <p:sldId id="269" r:id="rId14"/>
   </p:sldIdLst>
   <p:sldSz cx="12192000" cy="6858000"/>
   <p:notesSz cx="6858000" cy="9144000"/>
@@ -1619,753 +1619,6 @@
 </file>
 
 <file path=ppt/diagrams/colors3.xml><?xml version="1.0" encoding="utf-8"?>
-<dgm:colorsDef xmlns:dgm="http://schemas.openxmlformats.org/drawingml/2006/diagram" xmlns:a="http://schemas.openxmlformats.org/drawingml/2006/main" uniqueId="urn:microsoft.com/office/officeart/2005/8/colors/accent1_2">
-  <dgm:title val=""/>
-  <dgm:desc val=""/>
-  <dgm:catLst>
-    <dgm:cat type="accent1" pri="11200"/>
-  </dgm:catLst>
-  <dgm:styleLbl name="node0">
-    <dgm:fillClrLst meth="repeat">
-      <a:schemeClr val="accent1"/>
-    </dgm:fillClrLst>
-    <dgm:linClrLst meth="repeat">
-      <a:schemeClr val="lt1"/>
-    </dgm:linClrLst>
-    <dgm:effectClrLst/>
-    <dgm:txLinClrLst/>
-    <dgm:txFillClrLst/>
-    <dgm:txEffectClrLst/>
-  </dgm:styleLbl>
-  <dgm:styleLbl name="alignNode1">
-    <dgm:fillClrLst meth="repeat">
-      <a:schemeClr val="accent1"/>
-    </dgm:fillClrLst>
-    <dgm:linClrLst meth="repeat">
-      <a:schemeClr val="accent1"/>
-    </dgm:linClrLst>
-    <dgm:effectClrLst/>
-    <dgm:txLinClrLst/>
-    <dgm:txFillClrLst/>
-    <dgm:txEffectClrLst/>
-  </dgm:styleLbl>
-  <dgm:styleLbl name="node1">
-    <dgm:fillClrLst meth="repeat">
-      <a:schemeClr val="accent1"/>
-    </dgm:fillClrLst>
-    <dgm:linClrLst meth="repeat">
-      <a:schemeClr val="lt1"/>
-    </dgm:linClrLst>
-    <dgm:effectClrLst/>
-    <dgm:txLinClrLst/>
-    <dgm:txFillClrLst/>
-    <dgm:txEffectClrLst/>
-  </dgm:styleLbl>
-  <dgm:styleLbl name="lnNode1">
-    <dgm:fillClrLst meth="repeat">
-      <a:schemeClr val="accent1"/>
-    </dgm:fillClrLst>
-    <dgm:linClrLst meth="repeat">
-      <a:schemeClr val="lt1"/>
-    </dgm:linClrLst>
-    <dgm:effectClrLst/>
-    <dgm:txLinClrLst/>
-    <dgm:txFillClrLst/>
-    <dgm:txEffectClrLst/>
-  </dgm:styleLbl>
-  <dgm:styleLbl name="vennNode1">
-    <dgm:fillClrLst meth="repeat">
-      <a:schemeClr val="accent1">
-        <a:alpha val="50000"/>
-      </a:schemeClr>
-    </dgm:fillClrLst>
-    <dgm:linClrLst meth="repeat">
-      <a:schemeClr val="lt1"/>
-    </dgm:linClrLst>
-    <dgm:effectClrLst/>
-    <dgm:txLinClrLst/>
-    <dgm:txFillClrLst/>
-    <dgm:txEffectClrLst/>
-  </dgm:styleLbl>
-  <dgm:styleLbl name="node2">
-    <dgm:fillClrLst meth="repeat">
-      <a:schemeClr val="accent1"/>
-    </dgm:fillClrLst>
-    <dgm:linClrLst meth="repeat">
-      <a:schemeClr val="lt1"/>
-    </dgm:linClrLst>
-    <dgm:effectClrLst/>
-    <dgm:txLinClrLst/>
-    <dgm:txFillClrLst/>
-    <dgm:txEffectClrLst/>
-  </dgm:styleLbl>
-  <dgm:styleLbl name="node3">
-    <dgm:fillClrLst meth="repeat">
-      <a:schemeClr val="accent1"/>
-    </dgm:fillClrLst>
-    <dgm:linClrLst meth="repeat">
-      <a:schemeClr val="lt1"/>
-    </dgm:linClrLst>
-    <dgm:effectClrLst/>
-    <dgm:txLinClrLst/>
-    <dgm:txFillClrLst/>
-    <dgm:txEffectClrLst/>
-  </dgm:styleLbl>
-  <dgm:styleLbl name="node4">
-    <dgm:fillClrLst meth="repeat">
-      <a:schemeClr val="accent1"/>
-    </dgm:fillClrLst>
-    <dgm:linClrLst meth="repeat">
-      <a:schemeClr val="lt1"/>
-    </dgm:linClrLst>
-    <dgm:effectClrLst/>
-    <dgm:txLinClrLst/>
-    <dgm:txFillClrLst/>
-    <dgm:txEffectClrLst/>
-  </dgm:styleLbl>
-  <dgm:styleLbl name="fgImgPlace1">
-    <dgm:fillClrLst meth="repeat">
-      <a:schemeClr val="accent1">
-        <a:tint val="50000"/>
-      </a:schemeClr>
-    </dgm:fillClrLst>
-    <dgm:linClrLst meth="repeat">
-      <a:schemeClr val="lt1"/>
-    </dgm:linClrLst>
-    <dgm:effectClrLst/>
-    <dgm:txLinClrLst/>
-    <dgm:txFillClrLst meth="repeat">
-      <a:schemeClr val="lt1"/>
-    </dgm:txFillClrLst>
-    <dgm:txEffectClrLst/>
-  </dgm:styleLbl>
-  <dgm:styleLbl name="alignImgPlace1">
-    <dgm:fillClrLst meth="repeat">
-      <a:schemeClr val="accent1">
-        <a:tint val="50000"/>
-      </a:schemeClr>
-    </dgm:fillClrLst>
-    <dgm:linClrLst meth="repeat">
-      <a:schemeClr val="lt1"/>
-    </dgm:linClrLst>
-    <dgm:effectClrLst/>
-    <dgm:txLinClrLst/>
-    <dgm:txFillClrLst meth="repeat">
-      <a:schemeClr val="lt1"/>
-    </dgm:txFillClrLst>
-    <dgm:txEffectClrLst/>
-  </dgm:styleLbl>
-  <dgm:styleLbl name="bgImgPlace1">
-    <dgm:fillClrLst meth="repeat">
-      <a:schemeClr val="accent1">
-        <a:tint val="50000"/>
-      </a:schemeClr>
-    </dgm:fillClrLst>
-    <dgm:linClrLst meth="repeat">
-      <a:schemeClr val="lt1"/>
-    </dgm:linClrLst>
-    <dgm:effectClrLst/>
-    <dgm:txLinClrLst/>
-    <dgm:txFillClrLst meth="repeat">
-      <a:schemeClr val="lt1"/>
-    </dgm:txFillClrLst>
-    <dgm:txEffectClrLst/>
-  </dgm:styleLbl>
-  <dgm:styleLbl name="sibTrans2D1">
-    <dgm:fillClrLst meth="repeat">
-      <a:schemeClr val="accent1">
-        <a:tint val="60000"/>
-      </a:schemeClr>
-    </dgm:fillClrLst>
-    <dgm:linClrLst meth="repeat">
-      <a:schemeClr val="accent1">
-        <a:tint val="60000"/>
-      </a:schemeClr>
-    </dgm:linClrLst>
-    <dgm:effectClrLst/>
-    <dgm:txLinClrLst/>
-    <dgm:txFillClrLst/>
-    <dgm:txEffectClrLst/>
-  </dgm:styleLbl>
-  <dgm:styleLbl name="fgSibTrans2D1">
-    <dgm:fillClrLst meth="repeat">
-      <a:schemeClr val="accent1">
-        <a:tint val="60000"/>
-      </a:schemeClr>
-    </dgm:fillClrLst>
-    <dgm:linClrLst meth="repeat">
-      <a:schemeClr val="accent1">
-        <a:tint val="60000"/>
-      </a:schemeClr>
-    </dgm:linClrLst>
-    <dgm:effectClrLst/>
-    <dgm:txLinClrLst/>
-    <dgm:txFillClrLst/>
-    <dgm:txEffectClrLst/>
-  </dgm:styleLbl>
-  <dgm:styleLbl name="bgSibTrans2D1">
-    <dgm:fillClrLst meth="repeat">
-      <a:schemeClr val="accent1">
-        <a:tint val="60000"/>
-      </a:schemeClr>
-    </dgm:fillClrLst>
-    <dgm:linClrLst meth="repeat">
-      <a:schemeClr val="accent1">
-        <a:tint val="60000"/>
-      </a:schemeClr>
-    </dgm:linClrLst>
-    <dgm:effectClrLst/>
-    <dgm:txLinClrLst/>
-    <dgm:txFillClrLst/>
-    <dgm:txEffectClrLst/>
-  </dgm:styleLbl>
-  <dgm:styleLbl name="sibTrans1D1">
-    <dgm:fillClrLst meth="repeat">
-      <a:schemeClr val="accent1"/>
-    </dgm:fillClrLst>
-    <dgm:linClrLst meth="repeat">
-      <a:schemeClr val="accent1"/>
-    </dgm:linClrLst>
-    <dgm:effectClrLst/>
-    <dgm:txLinClrLst/>
-    <dgm:txFillClrLst meth="repeat">
-      <a:schemeClr val="tx1"/>
-    </dgm:txFillClrLst>
-    <dgm:txEffectClrLst/>
-  </dgm:styleLbl>
-  <dgm:styleLbl name="callout">
-    <dgm:fillClrLst meth="repeat">
-      <a:schemeClr val="accent1"/>
-    </dgm:fillClrLst>
-    <dgm:linClrLst meth="repeat">
-      <a:schemeClr val="accent1">
-        <a:tint val="50000"/>
-      </a:schemeClr>
-    </dgm:linClrLst>
-    <dgm:effectClrLst/>
-    <dgm:txLinClrLst/>
-    <dgm:txFillClrLst meth="repeat">
-      <a:schemeClr val="tx1"/>
-    </dgm:txFillClrLst>
-    <dgm:txEffectClrLst/>
-  </dgm:styleLbl>
-  <dgm:styleLbl name="asst0">
-    <dgm:fillClrLst meth="repeat">
-      <a:schemeClr val="accent1"/>
-    </dgm:fillClrLst>
-    <dgm:linClrLst meth="repeat">
-      <a:schemeClr val="lt1"/>
-    </dgm:linClrLst>
-    <dgm:effectClrLst/>
-    <dgm:txLinClrLst/>
-    <dgm:txFillClrLst/>
-    <dgm:txEffectClrLst/>
-  </dgm:styleLbl>
-  <dgm:styleLbl name="asst1">
-    <dgm:fillClrLst meth="repeat">
-      <a:schemeClr val="accent1"/>
-    </dgm:fillClrLst>
-    <dgm:linClrLst meth="repeat">
-      <a:schemeClr val="lt1"/>
-    </dgm:linClrLst>
-    <dgm:effectClrLst/>
-    <dgm:txLinClrLst/>
-    <dgm:txFillClrLst/>
-    <dgm:txEffectClrLst/>
-  </dgm:styleLbl>
-  <dgm:styleLbl name="asst2">
-    <dgm:fillClrLst meth="repeat">
-      <a:schemeClr val="accent1"/>
-    </dgm:fillClrLst>
-    <dgm:linClrLst meth="repeat">
-      <a:schemeClr val="lt1"/>
-    </dgm:linClrLst>
-    <dgm:effectClrLst/>
-    <dgm:txLinClrLst/>
-    <dgm:txFillClrLst/>
-    <dgm:txEffectClrLst/>
-  </dgm:styleLbl>
-  <dgm:styleLbl name="asst3">
-    <dgm:fillClrLst meth="repeat">
-      <a:schemeClr val="accent1"/>
-    </dgm:fillClrLst>
-    <dgm:linClrLst meth="repeat">
-      <a:schemeClr val="lt1"/>
-    </dgm:linClrLst>
-    <dgm:effectClrLst/>
-    <dgm:txLinClrLst/>
-    <dgm:txFillClrLst/>
-    <dgm:txEffectClrLst/>
-  </dgm:styleLbl>
-  <dgm:styleLbl name="asst4">
-    <dgm:fillClrLst meth="repeat">
-      <a:schemeClr val="accent1"/>
-    </dgm:fillClrLst>
-    <dgm:linClrLst meth="repeat">
-      <a:schemeClr val="lt1"/>
-    </dgm:linClrLst>
-    <dgm:effectClrLst/>
-    <dgm:txLinClrLst/>
-    <dgm:txFillClrLst/>
-    <dgm:txEffectClrLst/>
-  </dgm:styleLbl>
-  <dgm:styleLbl name="parChTrans2D1">
-    <dgm:fillClrLst meth="repeat">
-      <a:schemeClr val="accent1">
-        <a:tint val="60000"/>
-      </a:schemeClr>
-    </dgm:fillClrLst>
-    <dgm:linClrLst meth="repeat">
-      <a:schemeClr val="accent1">
-        <a:tint val="60000"/>
-      </a:schemeClr>
-    </dgm:linClrLst>
-    <dgm:effectClrLst/>
-    <dgm:txLinClrLst/>
-    <dgm:txFillClrLst meth="repeat">
-      <a:schemeClr val="lt1"/>
-    </dgm:txFillClrLst>
-    <dgm:txEffectClrLst/>
-  </dgm:styleLbl>
-  <dgm:styleLbl name="parChTrans2D2">
-    <dgm:fillClrLst meth="repeat">
-      <a:schemeClr val="accent1"/>
-    </dgm:fillClrLst>
-    <dgm:linClrLst meth="repeat">
-      <a:schemeClr val="accent1"/>
-    </dgm:linClrLst>
-    <dgm:effectClrLst/>
-    <dgm:txLinClrLst/>
-    <dgm:txFillClrLst meth="repeat">
-      <a:schemeClr val="lt1"/>
-    </dgm:txFillClrLst>
-    <dgm:txEffectClrLst/>
-  </dgm:styleLbl>
-  <dgm:styleLbl name="parChTrans2D3">
-    <dgm:fillClrLst meth="repeat">
-      <a:schemeClr val="accent1"/>
-    </dgm:fillClrLst>
-    <dgm:linClrLst meth="repeat">
-      <a:schemeClr val="accent1"/>
-    </dgm:linClrLst>
-    <dgm:effectClrLst/>
-    <dgm:txLinClrLst/>
-    <dgm:txFillClrLst meth="repeat">
-      <a:schemeClr val="lt1"/>
-    </dgm:txFillClrLst>
-    <dgm:txEffectClrLst/>
-  </dgm:styleLbl>
-  <dgm:styleLbl name="parChTrans2D4">
-    <dgm:fillClrLst meth="repeat">
-      <a:schemeClr val="accent1"/>
-    </dgm:fillClrLst>
-    <dgm:linClrLst meth="repeat">
-      <a:schemeClr val="accent1"/>
-    </dgm:linClrLst>
-    <dgm:effectClrLst/>
-    <dgm:txLinClrLst/>
-    <dgm:txFillClrLst meth="repeat">
-      <a:schemeClr val="lt1"/>
-    </dgm:txFillClrLst>
-    <dgm:txEffectClrLst/>
-  </dgm:styleLbl>
-  <dgm:styleLbl name="parChTrans1D1">
-    <dgm:fillClrLst meth="repeat">
-      <a:schemeClr val="accent1"/>
-    </dgm:fillClrLst>
-    <dgm:linClrLst meth="repeat">
-      <a:schemeClr val="accent1">
-        <a:shade val="60000"/>
-      </a:schemeClr>
-    </dgm:linClrLst>
-    <dgm:effectClrLst/>
-    <dgm:txLinClrLst/>
-    <dgm:txFillClrLst meth="repeat">
-      <a:schemeClr val="tx1"/>
-    </dgm:txFillClrLst>
-    <dgm:txEffectClrLst/>
-  </dgm:styleLbl>
-  <dgm:styleLbl name="parChTrans1D2">
-    <dgm:fillClrLst meth="repeat">
-      <a:schemeClr val="accent1"/>
-    </dgm:fillClrLst>
-    <dgm:linClrLst meth="repeat">
-      <a:schemeClr val="accent1">
-        <a:shade val="60000"/>
-      </a:schemeClr>
-    </dgm:linClrLst>
-    <dgm:effectClrLst/>
-    <dgm:txLinClrLst/>
-    <dgm:txFillClrLst meth="repeat">
-      <a:schemeClr val="tx1"/>
-    </dgm:txFillClrLst>
-    <dgm:txEffectClrLst/>
-  </dgm:styleLbl>
-  <dgm:styleLbl name="parChTrans1D3">
-    <dgm:fillClrLst meth="repeat">
-      <a:schemeClr val="accent1"/>
-    </dgm:fillClrLst>
-    <dgm:linClrLst meth="repeat">
-      <a:schemeClr val="accent1">
-        <a:shade val="80000"/>
-      </a:schemeClr>
-    </dgm:linClrLst>
-    <dgm:effectClrLst/>
-    <dgm:txLinClrLst/>
-    <dgm:txFillClrLst meth="repeat">
-      <a:schemeClr val="tx1"/>
-    </dgm:txFillClrLst>
-    <dgm:txEffectClrLst/>
-  </dgm:styleLbl>
-  <dgm:styleLbl name="parChTrans1D4">
-    <dgm:fillClrLst meth="repeat">
-      <a:schemeClr val="accent1"/>
-    </dgm:fillClrLst>
-    <dgm:linClrLst meth="repeat">
-      <a:schemeClr val="accent1">
-        <a:shade val="80000"/>
-      </a:schemeClr>
-    </dgm:linClrLst>
-    <dgm:effectClrLst/>
-    <dgm:txLinClrLst/>
-    <dgm:txFillClrLst meth="repeat">
-      <a:schemeClr val="tx1"/>
-    </dgm:txFillClrLst>
-    <dgm:txEffectClrLst/>
-  </dgm:styleLbl>
-  <dgm:styleLbl name="fgAcc1">
-    <dgm:fillClrLst meth="repeat">
-      <a:schemeClr val="lt1">
-        <a:alpha val="90000"/>
-      </a:schemeClr>
-    </dgm:fillClrLst>
-    <dgm:linClrLst meth="repeat">
-      <a:schemeClr val="accent1"/>
-    </dgm:linClrLst>
-    <dgm:effectClrLst/>
-    <dgm:txLinClrLst/>
-    <dgm:txFillClrLst meth="repeat">
-      <a:schemeClr val="dk1"/>
-    </dgm:txFillClrLst>
-    <dgm:txEffectClrLst/>
-  </dgm:styleLbl>
-  <dgm:styleLbl name="conFgAcc1">
-    <dgm:fillClrLst meth="repeat">
-      <a:schemeClr val="lt1">
-        <a:alpha val="90000"/>
-      </a:schemeClr>
-    </dgm:fillClrLst>
-    <dgm:linClrLst meth="repeat">
-      <a:schemeClr val="accent1"/>
-    </dgm:linClrLst>
-    <dgm:effectClrLst/>
-    <dgm:txLinClrLst/>
-    <dgm:txFillClrLst meth="repeat">
-      <a:schemeClr val="dk1"/>
-    </dgm:txFillClrLst>
-    <dgm:txEffectClrLst/>
-  </dgm:styleLbl>
-  <dgm:styleLbl name="alignAcc1">
-    <dgm:fillClrLst meth="repeat">
-      <a:schemeClr val="lt1">
-        <a:alpha val="90000"/>
-      </a:schemeClr>
-    </dgm:fillClrLst>
-    <dgm:linClrLst meth="repeat">
-      <a:schemeClr val="accent1"/>
-    </dgm:linClrLst>
-    <dgm:effectClrLst/>
-    <dgm:txLinClrLst/>
-    <dgm:txFillClrLst meth="repeat">
-      <a:schemeClr val="dk1"/>
-    </dgm:txFillClrLst>
-    <dgm:txEffectClrLst/>
-  </dgm:styleLbl>
-  <dgm:styleLbl name="trAlignAcc1">
-    <dgm:fillClrLst meth="repeat">
-      <a:schemeClr val="lt1">
-        <a:alpha val="40000"/>
-      </a:schemeClr>
-    </dgm:fillClrLst>
-    <dgm:linClrLst meth="repeat">
-      <a:schemeClr val="accent1"/>
-    </dgm:linClrLst>
-    <dgm:effectClrLst/>
-    <dgm:txLinClrLst/>
-    <dgm:txFillClrLst meth="repeat">
-      <a:schemeClr val="dk1"/>
-    </dgm:txFillClrLst>
-    <dgm:txEffectClrLst/>
-  </dgm:styleLbl>
-  <dgm:styleLbl name="bgAcc1">
-    <dgm:fillClrLst meth="repeat">
-      <a:schemeClr val="lt1">
-        <a:alpha val="90000"/>
-      </a:schemeClr>
-    </dgm:fillClrLst>
-    <dgm:linClrLst meth="repeat">
-      <a:schemeClr val="accent1"/>
-    </dgm:linClrLst>
-    <dgm:effectClrLst/>
-    <dgm:txLinClrLst/>
-    <dgm:txFillClrLst meth="repeat">
-      <a:schemeClr val="dk1"/>
-    </dgm:txFillClrLst>
-    <dgm:txEffectClrLst/>
-  </dgm:styleLbl>
-  <dgm:styleLbl name="solidFgAcc1">
-    <dgm:fillClrLst meth="repeat">
-      <a:schemeClr val="lt1"/>
-    </dgm:fillClrLst>
-    <dgm:linClrLst meth="repeat">
-      <a:schemeClr val="accent1"/>
-    </dgm:linClrLst>
-    <dgm:effectClrLst/>
-    <dgm:txLinClrLst/>
-    <dgm:txFillClrLst meth="repeat">
-      <a:schemeClr val="dk1"/>
-    </dgm:txFillClrLst>
-    <dgm:txEffectClrLst/>
-  </dgm:styleLbl>
-  <dgm:styleLbl name="solidAlignAcc1">
-    <dgm:fillClrLst meth="repeat">
-      <a:schemeClr val="lt1"/>
-    </dgm:fillClrLst>
-    <dgm:linClrLst meth="repeat">
-      <a:schemeClr val="accent1"/>
-    </dgm:linClrLst>
-    <dgm:effectClrLst/>
-    <dgm:txLinClrLst/>
-    <dgm:txFillClrLst meth="repeat">
-      <a:schemeClr val="dk1"/>
-    </dgm:txFillClrLst>
-    <dgm:txEffectClrLst/>
-  </dgm:styleLbl>
-  <dgm:styleLbl name="solidBgAcc1">
-    <dgm:fillClrLst meth="repeat">
-      <a:schemeClr val="lt1"/>
-    </dgm:fillClrLst>
-    <dgm:linClrLst meth="repeat">
-      <a:schemeClr val="accent1"/>
-    </dgm:linClrLst>
-    <dgm:effectClrLst/>
-    <dgm:txLinClrLst/>
-    <dgm:txFillClrLst meth="repeat">
-      <a:schemeClr val="dk1"/>
-    </dgm:txFillClrLst>
-    <dgm:txEffectClrLst/>
-  </dgm:styleLbl>
-  <dgm:styleLbl name="fgAccFollowNode1">
-    <dgm:fillClrLst meth="repeat">
-      <a:schemeClr val="accent1">
-        <a:alpha val="90000"/>
-        <a:tint val="40000"/>
-      </a:schemeClr>
-    </dgm:fillClrLst>
-    <dgm:linClrLst meth="repeat">
-      <a:schemeClr val="accent1">
-        <a:alpha val="90000"/>
-        <a:tint val="40000"/>
-      </a:schemeClr>
-    </dgm:linClrLst>
-    <dgm:effectClrLst/>
-    <dgm:txLinClrLst/>
-    <dgm:txFillClrLst meth="repeat">
-      <a:schemeClr val="dk1"/>
-    </dgm:txFillClrLst>
-    <dgm:txEffectClrLst/>
-  </dgm:styleLbl>
-  <dgm:styleLbl name="alignAccFollowNode1">
-    <dgm:fillClrLst meth="repeat">
-      <a:schemeClr val="accent1">
-        <a:alpha val="90000"/>
-        <a:tint val="40000"/>
-      </a:schemeClr>
-    </dgm:fillClrLst>
-    <dgm:linClrLst meth="repeat">
-      <a:schemeClr val="accent1">
-        <a:alpha val="90000"/>
-        <a:tint val="40000"/>
-      </a:schemeClr>
-    </dgm:linClrLst>
-    <dgm:effectClrLst/>
-    <dgm:txLinClrLst/>
-    <dgm:txFillClrLst meth="repeat">
-      <a:schemeClr val="dk1"/>
-    </dgm:txFillClrLst>
-    <dgm:txEffectClrLst/>
-  </dgm:styleLbl>
-  <dgm:styleLbl name="bgAccFollowNode1">
-    <dgm:fillClrLst meth="repeat">
-      <a:schemeClr val="accent1">
-        <a:alpha val="90000"/>
-        <a:tint val="40000"/>
-      </a:schemeClr>
-    </dgm:fillClrLst>
-    <dgm:linClrLst meth="repeat">
-      <a:schemeClr val="accent1">
-        <a:alpha val="90000"/>
-        <a:tint val="40000"/>
-      </a:schemeClr>
-    </dgm:linClrLst>
-    <dgm:effectClrLst/>
-    <dgm:txLinClrLst/>
-    <dgm:txFillClrLst meth="repeat">
-      <a:schemeClr val="dk1"/>
-    </dgm:txFillClrLst>
-    <dgm:txEffectClrLst/>
-  </dgm:styleLbl>
-  <dgm:styleLbl name="fgAcc0">
-    <dgm:fillClrLst meth="repeat">
-      <a:schemeClr val="lt1">
-        <a:alpha val="90000"/>
-      </a:schemeClr>
-    </dgm:fillClrLst>
-    <dgm:linClrLst meth="repeat">
-      <a:schemeClr val="accent1"/>
-    </dgm:linClrLst>
-    <dgm:effectClrLst/>
-    <dgm:txLinClrLst/>
-    <dgm:txFillClrLst meth="repeat">
-      <a:schemeClr val="dk1"/>
-    </dgm:txFillClrLst>
-    <dgm:txEffectClrLst/>
-  </dgm:styleLbl>
-  <dgm:styleLbl name="fgAcc2">
-    <dgm:fillClrLst meth="repeat">
-      <a:schemeClr val="lt1">
-        <a:alpha val="90000"/>
-      </a:schemeClr>
-    </dgm:fillClrLst>
-    <dgm:linClrLst meth="repeat">
-      <a:schemeClr val="accent1"/>
-    </dgm:linClrLst>
-    <dgm:effectClrLst/>
-    <dgm:txLinClrLst/>
-    <dgm:txFillClrLst meth="repeat">
-      <a:schemeClr val="dk1"/>
-    </dgm:txFillClrLst>
-    <dgm:txEffectClrLst/>
-  </dgm:styleLbl>
-  <dgm:styleLbl name="fgAcc3">
-    <dgm:fillClrLst meth="repeat">
-      <a:schemeClr val="lt1">
-        <a:alpha val="90000"/>
-      </a:schemeClr>
-    </dgm:fillClrLst>
-    <dgm:linClrLst meth="repeat">
-      <a:schemeClr val="accent1"/>
-    </dgm:linClrLst>
-    <dgm:effectClrLst/>
-    <dgm:txLinClrLst/>
-    <dgm:txFillClrLst meth="repeat">
-      <a:schemeClr val="dk1"/>
-    </dgm:txFillClrLst>
-    <dgm:txEffectClrLst/>
-  </dgm:styleLbl>
-  <dgm:styleLbl name="fgAcc4">
-    <dgm:fillClrLst meth="repeat">
-      <a:schemeClr val="lt1">
-        <a:alpha val="90000"/>
-      </a:schemeClr>
-    </dgm:fillClrLst>
-    <dgm:linClrLst meth="repeat">
-      <a:schemeClr val="accent1"/>
-    </dgm:linClrLst>
-    <dgm:effectClrLst/>
-    <dgm:txLinClrLst/>
-    <dgm:txFillClrLst meth="repeat">
-      <a:schemeClr val="dk1"/>
-    </dgm:txFillClrLst>
-    <dgm:txEffectClrLst/>
-  </dgm:styleLbl>
-  <dgm:styleLbl name="bgShp">
-    <dgm:fillClrLst meth="repeat">
-      <a:schemeClr val="accent1">
-        <a:tint val="40000"/>
-      </a:schemeClr>
-    </dgm:fillClrLst>
-    <dgm:linClrLst meth="repeat">
-      <a:schemeClr val="accent1"/>
-    </dgm:linClrLst>
-    <dgm:effectClrLst/>
-    <dgm:txLinClrLst/>
-    <dgm:txFillClrLst meth="repeat">
-      <a:schemeClr val="dk1"/>
-    </dgm:txFillClrLst>
-    <dgm:txEffectClrLst/>
-  </dgm:styleLbl>
-  <dgm:styleLbl name="dkBgShp">
-    <dgm:fillClrLst meth="repeat">
-      <a:schemeClr val="accent1">
-        <a:shade val="80000"/>
-      </a:schemeClr>
-    </dgm:fillClrLst>
-    <dgm:linClrLst meth="repeat">
-      <a:schemeClr val="accent1"/>
-    </dgm:linClrLst>
-    <dgm:effectClrLst/>
-    <dgm:txLinClrLst/>
-    <dgm:txFillClrLst meth="repeat">
-      <a:schemeClr val="lt1"/>
-    </dgm:txFillClrLst>
-    <dgm:txEffectClrLst/>
-  </dgm:styleLbl>
-  <dgm:styleLbl name="trBgShp">
-    <dgm:fillClrLst meth="repeat">
-      <a:schemeClr val="accent1">
-        <a:tint val="50000"/>
-        <a:alpha val="40000"/>
-      </a:schemeClr>
-    </dgm:fillClrLst>
-    <dgm:linClrLst meth="repeat">
-      <a:schemeClr val="accent1"/>
-    </dgm:linClrLst>
-    <dgm:effectClrLst/>
-    <dgm:txLinClrLst/>
-    <dgm:txFillClrLst meth="repeat">
-      <a:schemeClr val="lt1"/>
-    </dgm:txFillClrLst>
-    <dgm:txEffectClrLst/>
-  </dgm:styleLbl>
-  <dgm:styleLbl name="fgShp">
-    <dgm:fillClrLst meth="repeat">
-      <a:schemeClr val="accent1">
-        <a:tint val="60000"/>
-      </a:schemeClr>
-    </dgm:fillClrLst>
-    <dgm:linClrLst meth="repeat">
-      <a:schemeClr val="lt1"/>
-    </dgm:linClrLst>
-    <dgm:effectClrLst/>
-    <dgm:txLinClrLst/>
-    <dgm:txFillClrLst meth="repeat">
-      <a:schemeClr val="dk1"/>
-    </dgm:txFillClrLst>
-    <dgm:txEffectClrLst/>
-  </dgm:styleLbl>
-  <dgm:styleLbl name="revTx">
-    <dgm:fillClrLst meth="repeat">
-      <a:schemeClr val="lt1">
-        <a:alpha val="0"/>
-      </a:schemeClr>
-    </dgm:fillClrLst>
-    <dgm:linClrLst meth="repeat">
-      <a:schemeClr val="dk1">
-        <a:alpha val="0"/>
-      </a:schemeClr>
-    </dgm:linClrLst>
-    <dgm:effectClrLst/>
-    <dgm:txLinClrLst/>
-    <dgm:txFillClrLst meth="repeat">
-      <a:schemeClr val="tx1"/>
-    </dgm:txFillClrLst>
-    <dgm:txEffectClrLst/>
-  </dgm:styleLbl>
-</dgm:colorsDef>
-</file>
-
-<file path=ppt/diagrams/colors4.xml><?xml version="1.0" encoding="utf-8"?>
 <dgm:colorsDef xmlns:dgm="http://schemas.openxmlformats.org/drawingml/2006/diagram" xmlns:a="http://schemas.openxmlformats.org/drawingml/2006/main" uniqueId="urn:microsoft.com/office/officeart/2005/8/colors/accent1_2">
   <dgm:title val=""/>
   <dgm:desc val=""/>
@@ -3827,6 +3080,12 @@
         <a:bodyPr/>
         <a:lstStyle/>
         <a:p>
+          <a:pPr>
+            <a:lnSpc>
+              <a:spcPct val="100000"/>
+            </a:lnSpc>
+            <a:defRPr b="1"/>
+          </a:pPr>
           <a:endParaRPr lang="en-US"/>
         </a:p>
       </dgm:t>
@@ -3883,6 +3142,139 @@
         </a:p>
       </dgm:t>
     </dgm:pt>
+    <dgm:pt modelId="{3AA2FA24-1521-4189-A205-F4F5DE278920}">
+      <dgm:prSet/>
+      <dgm:spPr/>
+      <dgm:t>
+        <a:bodyPr/>
+        <a:lstStyle/>
+        <a:p>
+          <a:pPr>
+            <a:lnSpc>
+              <a:spcPct val="100000"/>
+            </a:lnSpc>
+            <a:defRPr b="1"/>
+          </a:pPr>
+          <a:r>
+            <a:rPr lang="en-US" dirty="0"/>
+            <a:t>Support your existing M code right away</a:t>
+          </a:r>
+          <a:endParaRPr lang="en-NL" dirty="0"/>
+        </a:p>
+      </dgm:t>
+    </dgm:pt>
+    <dgm:pt modelId="{8EB9754A-2D2C-47B0-86CE-A121140B02A9}" type="parTrans" cxnId="{EE50A9F9-0633-48E6-8993-9AAE38539E93}">
+      <dgm:prSet/>
+      <dgm:spPr/>
+      <dgm:t>
+        <a:bodyPr/>
+        <a:lstStyle/>
+        <a:p>
+          <a:endParaRPr lang="en-NL"/>
+        </a:p>
+      </dgm:t>
+    </dgm:pt>
+    <dgm:pt modelId="{E9066788-C52E-4A94-AF8C-EFACB72EE811}" type="sibTrans" cxnId="{EE50A9F9-0633-48E6-8993-9AAE38539E93}">
+      <dgm:prSet/>
+      <dgm:spPr/>
+      <dgm:t>
+        <a:bodyPr/>
+        <a:lstStyle/>
+        <a:p>
+          <a:pPr>
+            <a:lnSpc>
+              <a:spcPct val="100000"/>
+            </a:lnSpc>
+            <a:defRPr b="1"/>
+          </a:pPr>
+          <a:endParaRPr lang="en-NL"/>
+        </a:p>
+      </dgm:t>
+    </dgm:pt>
+    <dgm:pt modelId="{341895CC-F5AE-4185-A7B4-20DAAD306EDB}">
+      <dgm:prSet/>
+      <dgm:spPr/>
+      <dgm:t>
+        <a:bodyPr/>
+        <a:lstStyle/>
+        <a:p>
+          <a:pPr>
+            <a:lnSpc>
+              <a:spcPct val="100000"/>
+            </a:lnSpc>
+          </a:pPr>
+          <a:r>
+            <a:rPr lang="en-US" dirty="0"/>
+            <a:t>You can call your existing code directly, specifying parameters and (eventual) return value.</a:t>
+          </a:r>
+          <a:endParaRPr lang="en-NL" dirty="0"/>
+        </a:p>
+      </dgm:t>
+    </dgm:pt>
+    <dgm:pt modelId="{51E34353-253B-4A09-907A-C1F0F987F1E7}" type="parTrans" cxnId="{29E62658-E0CD-4D06-ADB0-9341313A866D}">
+      <dgm:prSet/>
+      <dgm:spPr/>
+      <dgm:t>
+        <a:bodyPr/>
+        <a:lstStyle/>
+        <a:p>
+          <a:endParaRPr lang="en-NL"/>
+        </a:p>
+      </dgm:t>
+    </dgm:pt>
+    <dgm:pt modelId="{5EEB0805-A565-4B85-B7A5-6ACF3C848277}" type="sibTrans" cxnId="{29E62658-E0CD-4D06-ADB0-9341313A866D}">
+      <dgm:prSet/>
+      <dgm:spPr/>
+      <dgm:t>
+        <a:bodyPr/>
+        <a:lstStyle/>
+        <a:p>
+          <a:endParaRPr lang="en-NL"/>
+        </a:p>
+      </dgm:t>
+    </dgm:pt>
+    <dgm:pt modelId="{C0297382-340E-4BD9-9668-818CC13B2B4C}">
+      <dgm:prSet/>
+      <dgm:spPr/>
+      <dgm:t>
+        <a:bodyPr/>
+        <a:lstStyle/>
+        <a:p>
+          <a:pPr>
+            <a:lnSpc>
+              <a:spcPct val="100000"/>
+            </a:lnSpc>
+          </a:pPr>
+          <a:r>
+            <a:rPr lang="en-US" dirty="0"/>
+            <a:t>Once you describe your code in the JSON file, it is available in the client right away</a:t>
+          </a:r>
+          <a:endParaRPr lang="en-NL" dirty="0"/>
+        </a:p>
+      </dgm:t>
+    </dgm:pt>
+    <dgm:pt modelId="{0AE2E466-7E32-43D2-AC2C-09CEF94D0E22}" type="parTrans" cxnId="{FBF3D7A3-FCBE-4402-8DBE-E5365C2A14BD}">
+      <dgm:prSet/>
+      <dgm:spPr/>
+      <dgm:t>
+        <a:bodyPr/>
+        <a:lstStyle/>
+        <a:p>
+          <a:endParaRPr lang="en-NL"/>
+        </a:p>
+      </dgm:t>
+    </dgm:pt>
+    <dgm:pt modelId="{061912DC-B2E0-4F87-B8A9-21B8C40566D7}" type="sibTrans" cxnId="{FBF3D7A3-FCBE-4402-8DBE-E5365C2A14BD}">
+      <dgm:prSet/>
+      <dgm:spPr/>
+      <dgm:t>
+        <a:bodyPr/>
+        <a:lstStyle/>
+        <a:p>
+          <a:endParaRPr lang="en-NL"/>
+        </a:p>
+      </dgm:t>
+    </dgm:pt>
     <dgm:pt modelId="{3171E97B-CDE9-41AD-B264-8ADEE4D73563}" type="pres">
       <dgm:prSet presAssocID="{996C4E6A-2C60-4428-8C91-27910EF058EC}" presName="Name0" presStyleCnt="0">
         <dgm:presLayoutVars>
@@ -3897,7 +3289,7 @@
       <dgm:spPr/>
     </dgm:pt>
     <dgm:pt modelId="{018F7438-E01D-44D7-ADD6-157BC62500E3}" type="pres">
-      <dgm:prSet presAssocID="{D594FA1A-CAFE-4FC9-B29F-017F3AF2316D}" presName="pictRect" presStyleLbl="revTx" presStyleIdx="0" presStyleCnt="6">
+      <dgm:prSet presAssocID="{D594FA1A-CAFE-4FC9-B29F-017F3AF2316D}" presName="pictRect" presStyleLbl="revTx" presStyleIdx="0" presStyleCnt="8">
         <dgm:presLayoutVars>
           <dgm:chMax val="0"/>
           <dgm:bulletEnabled/>
@@ -3906,7 +3298,7 @@
       <dgm:spPr/>
     </dgm:pt>
     <dgm:pt modelId="{5C90C3CA-0AA3-4EBE-B50C-5D1938624D21}" type="pres">
-      <dgm:prSet presAssocID="{D594FA1A-CAFE-4FC9-B29F-017F3AF2316D}" presName="textRect" presStyleLbl="revTx" presStyleIdx="1" presStyleCnt="6">
+      <dgm:prSet presAssocID="{D594FA1A-CAFE-4FC9-B29F-017F3AF2316D}" presName="textRect" presStyleLbl="revTx" presStyleIdx="1" presStyleCnt="8">
         <dgm:presLayoutVars>
           <dgm:bulletEnabled/>
         </dgm:presLayoutVars>
@@ -3922,7 +3314,7 @@
       <dgm:spPr/>
     </dgm:pt>
     <dgm:pt modelId="{58CF0B87-5490-46B7-A456-64A277CB332C}" type="pres">
-      <dgm:prSet presAssocID="{768B9187-70A7-4F24-98C9-4549D9A80F20}" presName="pictRect" presStyleLbl="revTx" presStyleIdx="2" presStyleCnt="6">
+      <dgm:prSet presAssocID="{768B9187-70A7-4F24-98C9-4549D9A80F20}" presName="pictRect" presStyleLbl="revTx" presStyleIdx="2" presStyleCnt="8">
         <dgm:presLayoutVars>
           <dgm:chMax val="0"/>
           <dgm:bulletEnabled/>
@@ -3931,7 +3323,7 @@
       <dgm:spPr/>
     </dgm:pt>
     <dgm:pt modelId="{8BB355F9-6CC2-4480-9B7E-D892D65FD34C}" type="pres">
-      <dgm:prSet presAssocID="{768B9187-70A7-4F24-98C9-4549D9A80F20}" presName="textRect" presStyleLbl="revTx" presStyleIdx="3" presStyleCnt="6" custLinFactNeighborX="0" custLinFactNeighborY="3582">
+      <dgm:prSet presAssocID="{768B9187-70A7-4F24-98C9-4549D9A80F20}" presName="textRect" presStyleLbl="revTx" presStyleIdx="3" presStyleCnt="8" custLinFactNeighborX="0" custLinFactNeighborY="3582">
         <dgm:presLayoutVars>
           <dgm:bulletEnabled/>
         </dgm:presLayoutVars>
@@ -3947,7 +3339,7 @@
       <dgm:spPr/>
     </dgm:pt>
     <dgm:pt modelId="{E38D88DE-6630-449F-B815-64F25EB69547}" type="pres">
-      <dgm:prSet presAssocID="{FBA685A8-C4ED-4A44-BA15-A95087C22363}" presName="pictRect" presStyleLbl="revTx" presStyleIdx="4" presStyleCnt="6">
+      <dgm:prSet presAssocID="{FBA685A8-C4ED-4A44-BA15-A95087C22363}" presName="pictRect" presStyleLbl="revTx" presStyleIdx="4" presStyleCnt="8">
         <dgm:presLayoutVars>
           <dgm:chMax val="0"/>
           <dgm:bulletEnabled/>
@@ -3956,7 +3348,32 @@
       <dgm:spPr/>
     </dgm:pt>
     <dgm:pt modelId="{6BD7537A-36A9-42F0-9C36-0D4BA2D0752A}" type="pres">
-      <dgm:prSet presAssocID="{FBA685A8-C4ED-4A44-BA15-A95087C22363}" presName="textRect" presStyleLbl="revTx" presStyleIdx="5" presStyleCnt="6">
+      <dgm:prSet presAssocID="{FBA685A8-C4ED-4A44-BA15-A95087C22363}" presName="textRect" presStyleLbl="revTx" presStyleIdx="5" presStyleCnt="8">
+        <dgm:presLayoutVars>
+          <dgm:bulletEnabled/>
+        </dgm:presLayoutVars>
+      </dgm:prSet>
+      <dgm:spPr/>
+    </dgm:pt>
+    <dgm:pt modelId="{22C7BBDA-E201-4BCB-B174-C638359A9190}" type="pres">
+      <dgm:prSet presAssocID="{AD175B27-BF85-41B6-9B87-24460515CD3C}" presName="sibTrans" presStyleLbl="sibTrans2D1" presStyleIdx="0" presStyleCnt="0"/>
+      <dgm:spPr/>
+    </dgm:pt>
+    <dgm:pt modelId="{84A4A014-22ED-4AEA-9E9D-867A9F401653}" type="pres">
+      <dgm:prSet presAssocID="{3AA2FA24-1521-4189-A205-F4F5DE278920}" presName="compNode" presStyleCnt="0"/>
+      <dgm:spPr/>
+    </dgm:pt>
+    <dgm:pt modelId="{76448584-D501-4333-884C-F960C3FAA9BE}" type="pres">
+      <dgm:prSet presAssocID="{3AA2FA24-1521-4189-A205-F4F5DE278920}" presName="pictRect" presStyleLbl="revTx" presStyleIdx="6" presStyleCnt="8">
+        <dgm:presLayoutVars>
+          <dgm:chMax val="0"/>
+          <dgm:bulletEnabled/>
+        </dgm:presLayoutVars>
+      </dgm:prSet>
+      <dgm:spPr/>
+    </dgm:pt>
+    <dgm:pt modelId="{9925560B-C3AD-44BD-A1A3-25292C97D5DC}" type="pres">
+      <dgm:prSet presAssocID="{3AA2FA24-1521-4189-A205-F4F5DE278920}" presName="textRect" presStyleLbl="revTx" presStyleIdx="7" presStyleCnt="8">
         <dgm:presLayoutVars>
           <dgm:bulletEnabled/>
         </dgm:presLayoutVars>
@@ -3965,32 +3382,43 @@
     </dgm:pt>
   </dgm:ptLst>
   <dgm:cxnLst>
+    <dgm:cxn modelId="{E7E6B004-430A-4872-9340-3ACECE2825E4}" type="presOf" srcId="{768B9187-70A7-4F24-98C9-4549D9A80F20}" destId="{58CF0B87-5490-46B7-A456-64A277CB332C}" srcOrd="0" destOrd="0" presId="urn:microsoft.com/office/officeart/2024/3/layout/hArchList1"/>
+    <dgm:cxn modelId="{3F8CA406-7939-4295-928C-F9868B166F2F}" type="presOf" srcId="{E137F926-3C8F-4C45-8350-903EA88D75AF}" destId="{412E2C94-E9BF-4E2B-961F-50EF83661C9E}" srcOrd="0" destOrd="0" presId="urn:microsoft.com/office/officeart/2024/3/layout/hArchList1"/>
+    <dgm:cxn modelId="{19150107-6B36-4FF7-9783-871469064D76}" type="presOf" srcId="{3AB04008-29BA-487D-8C45-AE18FA21868B}" destId="{4CD37533-18BB-44AF-9438-CA8C06D267FF}" srcOrd="0" destOrd="0" presId="urn:microsoft.com/office/officeart/2024/3/layout/hArchList1"/>
     <dgm:cxn modelId="{CECC1115-8D04-4BE9-A207-B030BD568392}" srcId="{996C4E6A-2C60-4428-8C91-27910EF058EC}" destId="{D594FA1A-CAFE-4FC9-B29F-017F3AF2316D}" srcOrd="0" destOrd="0" parTransId="{B692412B-C32F-404E-A62A-E42191694563}" sibTransId="{3AB04008-29BA-487D-8C45-AE18FA21868B}"/>
-    <dgm:cxn modelId="{1F3DF617-CC3F-4D66-8EA6-35BB1DC8CBA6}" type="presOf" srcId="{4C74B0FE-0F44-43D7-940D-B9AF6ABF1025}" destId="{8BB355F9-6CC2-4480-9B7E-D892D65FD34C}" srcOrd="0" destOrd="0" presId="urn:microsoft.com/office/officeart/2024/3/layout/hArchList1"/>
-    <dgm:cxn modelId="{F2BA5920-A477-487A-BF0F-C34CB4B62146}" type="presOf" srcId="{FABA06FE-F150-48B5-B3D7-2915E3C41ABD}" destId="{6BD7537A-36A9-42F0-9C36-0D4BA2D0752A}" srcOrd="0" destOrd="0" presId="urn:microsoft.com/office/officeart/2024/3/layout/hArchList1"/>
-    <dgm:cxn modelId="{A340B23A-91D0-462C-A679-3ACAAB787D70}" type="presOf" srcId="{768B9187-70A7-4F24-98C9-4549D9A80F20}" destId="{58CF0B87-5490-46B7-A456-64A277CB332C}" srcOrd="0" destOrd="0" presId="urn:microsoft.com/office/officeart/2024/3/layout/hArchList1"/>
+    <dgm:cxn modelId="{C456C91E-E619-47D2-B54F-13F0F1774580}" type="presOf" srcId="{FABA06FE-F150-48B5-B3D7-2915E3C41ABD}" destId="{6BD7537A-36A9-42F0-9C36-0D4BA2D0752A}" srcOrd="0" destOrd="0" presId="urn:microsoft.com/office/officeart/2024/3/layout/hArchList1"/>
+    <dgm:cxn modelId="{A7C5D724-BF33-4994-B4B6-08D41035EC43}" type="presOf" srcId="{341895CC-F5AE-4185-A7B4-20DAAD306EDB}" destId="{9925560B-C3AD-44BD-A1A3-25292C97D5DC}" srcOrd="0" destOrd="0" presId="urn:microsoft.com/office/officeart/2024/3/layout/hArchList1"/>
+    <dgm:cxn modelId="{CDA5292D-7BF0-451F-8FCA-6B1ABEAEA1B0}" type="presOf" srcId="{FBA685A8-C4ED-4A44-BA15-A95087C22363}" destId="{E38D88DE-6630-449F-B815-64F25EB69547}" srcOrd="0" destOrd="0" presId="urn:microsoft.com/office/officeart/2024/3/layout/hArchList1"/>
     <dgm:cxn modelId="{1FF11245-068A-4CA3-BCBC-AA141B75607D}" srcId="{D594FA1A-CAFE-4FC9-B29F-017F3AF2316D}" destId="{06204C76-8052-4671-8722-9895BD95AC98}" srcOrd="0" destOrd="0" parTransId="{0923777E-212F-46F7-9676-1B1CD76B367F}" sibTransId="{2AE3F090-A320-4B38-A931-78BE74ADF0F7}"/>
     <dgm:cxn modelId="{31032E6F-283D-4219-981D-934A8C3F1D57}" srcId="{FBA685A8-C4ED-4A44-BA15-A95087C22363}" destId="{FABA06FE-F150-48B5-B3D7-2915E3C41ABD}" srcOrd="0" destOrd="0" parTransId="{AF3000A7-0375-4FA4-B30C-7D0027C5A577}" sibTransId="{A35B9477-3565-4F41-85B7-3C421108E7F6}"/>
     <dgm:cxn modelId="{F7F0874F-D139-4205-A17A-D7D9567787E6}" type="presOf" srcId="{996C4E6A-2C60-4428-8C91-27910EF058EC}" destId="{3171E97B-CDE9-41AD-B264-8ADEE4D73563}" srcOrd="0" destOrd="0" presId="urn:microsoft.com/office/officeart/2024/3/layout/hArchList1"/>
-    <dgm:cxn modelId="{A939996F-AA57-4AB8-94FF-5D1362537617}" type="presOf" srcId="{3AB04008-29BA-487D-8C45-AE18FA21868B}" destId="{4CD37533-18BB-44AF-9438-CA8C06D267FF}" srcOrd="0" destOrd="0" presId="urn:microsoft.com/office/officeart/2024/3/layout/hArchList1"/>
-    <dgm:cxn modelId="{83C57875-C8C0-42D4-A258-93D49EA82CD8}" type="presOf" srcId="{D594FA1A-CAFE-4FC9-B29F-017F3AF2316D}" destId="{018F7438-E01D-44D7-ADD6-157BC62500E3}" srcOrd="0" destOrd="0" presId="urn:microsoft.com/office/officeart/2024/3/layout/hArchList1"/>
+    <dgm:cxn modelId="{29E62658-E0CD-4D06-ADB0-9341313A866D}" srcId="{3AA2FA24-1521-4189-A205-F4F5DE278920}" destId="{341895CC-F5AE-4185-A7B4-20DAAD306EDB}" srcOrd="0" destOrd="0" parTransId="{51E34353-253B-4A09-907A-C1F0F987F1E7}" sibTransId="{5EEB0805-A565-4B85-B7A5-6ACF3C848277}"/>
     <dgm:cxn modelId="{741CCF7E-FAFA-4680-999D-03CF38C0793B}" srcId="{996C4E6A-2C60-4428-8C91-27910EF058EC}" destId="{FBA685A8-C4ED-4A44-BA15-A95087C22363}" srcOrd="2" destOrd="0" parTransId="{DF0B6627-E6C7-4B6F-AEF0-D5B4D98FAE0D}" sibTransId="{AD175B27-BF85-41B6-9B87-24460515CD3C}"/>
-    <dgm:cxn modelId="{D7BB7C97-F788-497C-BCAA-B9131F94E09F}" type="presOf" srcId="{06204C76-8052-4671-8722-9895BD95AC98}" destId="{5C90C3CA-0AA3-4EBE-B50C-5D1938624D21}" srcOrd="0" destOrd="0" presId="urn:microsoft.com/office/officeart/2024/3/layout/hArchList1"/>
+    <dgm:cxn modelId="{9FCD8897-0BC0-43A9-AFF0-F8CA6CBC7C43}" type="presOf" srcId="{3AA2FA24-1521-4189-A205-F4F5DE278920}" destId="{76448584-D501-4333-884C-F960C3FAA9BE}" srcOrd="0" destOrd="0" presId="urn:microsoft.com/office/officeart/2024/3/layout/hArchList1"/>
+    <dgm:cxn modelId="{FBF3D7A3-FCBE-4402-8DBE-E5365C2A14BD}" srcId="{3AA2FA24-1521-4189-A205-F4F5DE278920}" destId="{C0297382-340E-4BD9-9668-818CC13B2B4C}" srcOrd="1" destOrd="0" parTransId="{0AE2E466-7E32-43D2-AC2C-09CEF94D0E22}" sibTransId="{061912DC-B2E0-4F87-B8A9-21B8C40566D7}"/>
+    <dgm:cxn modelId="{A2103AA5-AF3F-447E-8CF3-66CE371D7265}" type="presOf" srcId="{06204C76-8052-4671-8722-9895BD95AC98}" destId="{5C90C3CA-0AA3-4EBE-B50C-5D1938624D21}" srcOrd="0" destOrd="0" presId="urn:microsoft.com/office/officeart/2024/3/layout/hArchList1"/>
     <dgm:cxn modelId="{3288A1A6-BC96-42D9-B282-F903D3D28B27}" srcId="{768B9187-70A7-4F24-98C9-4549D9A80F20}" destId="{4C74B0FE-0F44-43D7-940D-B9AF6ABF1025}" srcOrd="0" destOrd="0" parTransId="{E239FEBF-B4AE-47D3-8223-FDECC72F0B62}" sibTransId="{44570744-E566-439D-B1FF-599460901ED9}"/>
-    <dgm:cxn modelId="{D39160A8-01E5-4CBB-83C0-E26188120B2B}" type="presOf" srcId="{FBA685A8-C4ED-4A44-BA15-A95087C22363}" destId="{E38D88DE-6630-449F-B815-64F25EB69547}" srcOrd="0" destOrd="0" presId="urn:microsoft.com/office/officeart/2024/3/layout/hArchList1"/>
-    <dgm:cxn modelId="{2D4E08CE-615F-4DDD-B3D3-2BFE9E67E070}" type="presOf" srcId="{E137F926-3C8F-4C45-8350-903EA88D75AF}" destId="{412E2C94-E9BF-4E2B-961F-50EF83661C9E}" srcOrd="0" destOrd="0" presId="urn:microsoft.com/office/officeart/2024/3/layout/hArchList1"/>
+    <dgm:cxn modelId="{8D0B0EA9-AA1F-4F96-AA49-A7CF8580FB84}" type="presOf" srcId="{C0297382-340E-4BD9-9668-818CC13B2B4C}" destId="{9925560B-C3AD-44BD-A1A3-25292C97D5DC}" srcOrd="0" destOrd="1" presId="urn:microsoft.com/office/officeart/2024/3/layout/hArchList1"/>
+    <dgm:cxn modelId="{4E464CB9-1F50-4CEF-8D1D-4D37F1D6F177}" type="presOf" srcId="{AD175B27-BF85-41B6-9B87-24460515CD3C}" destId="{22C7BBDA-E201-4BCB-B174-C638359A9190}" srcOrd="0" destOrd="0" presId="urn:microsoft.com/office/officeart/2024/3/layout/hArchList1"/>
+    <dgm:cxn modelId="{E750A9C7-4CEF-45C9-B133-81EC3F5CA578}" type="presOf" srcId="{D594FA1A-CAFE-4FC9-B29F-017F3AF2316D}" destId="{018F7438-E01D-44D7-ADD6-157BC62500E3}" srcOrd="0" destOrd="0" presId="urn:microsoft.com/office/officeart/2024/3/layout/hArchList1"/>
     <dgm:cxn modelId="{0FF7CFDA-06D0-49E7-971D-B87E044D11AB}" srcId="{996C4E6A-2C60-4428-8C91-27910EF058EC}" destId="{768B9187-70A7-4F24-98C9-4549D9A80F20}" srcOrd="1" destOrd="0" parTransId="{28680839-1F10-452B-8A00-49D86D2208FE}" sibTransId="{E137F926-3C8F-4C45-8350-903EA88D75AF}"/>
-    <dgm:cxn modelId="{582F0F5E-244F-45D2-B023-A57BD75D1EC1}" type="presParOf" srcId="{3171E97B-CDE9-41AD-B264-8ADEE4D73563}" destId="{673D3BE1-0B49-408D-A9B7-2ACE218FD35D}" srcOrd="0" destOrd="0" presId="urn:microsoft.com/office/officeart/2024/3/layout/hArchList1"/>
-    <dgm:cxn modelId="{A548ED9C-046D-4BB1-8D3C-6FD046C27F60}" type="presParOf" srcId="{673D3BE1-0B49-408D-A9B7-2ACE218FD35D}" destId="{018F7438-E01D-44D7-ADD6-157BC62500E3}" srcOrd="0" destOrd="0" presId="urn:microsoft.com/office/officeart/2024/3/layout/hArchList1"/>
-    <dgm:cxn modelId="{5643C7C9-5160-4BEC-9A38-173A21075E9B}" type="presParOf" srcId="{673D3BE1-0B49-408D-A9B7-2ACE218FD35D}" destId="{5C90C3CA-0AA3-4EBE-B50C-5D1938624D21}" srcOrd="1" destOrd="0" presId="urn:microsoft.com/office/officeart/2024/3/layout/hArchList1"/>
-    <dgm:cxn modelId="{503658CB-B4DE-40D1-A7FE-6D4AA57F070B}" type="presParOf" srcId="{3171E97B-CDE9-41AD-B264-8ADEE4D73563}" destId="{4CD37533-18BB-44AF-9438-CA8C06D267FF}" srcOrd="1" destOrd="0" presId="urn:microsoft.com/office/officeart/2024/3/layout/hArchList1"/>
-    <dgm:cxn modelId="{B502C618-10E0-4DFC-8F21-DC74D44E314E}" type="presParOf" srcId="{3171E97B-CDE9-41AD-B264-8ADEE4D73563}" destId="{4A15BD43-FC5C-486B-BBDD-003A13A15493}" srcOrd="2" destOrd="0" presId="urn:microsoft.com/office/officeart/2024/3/layout/hArchList1"/>
-    <dgm:cxn modelId="{74482876-705F-4982-9BF6-7250ABFA8208}" type="presParOf" srcId="{4A15BD43-FC5C-486B-BBDD-003A13A15493}" destId="{58CF0B87-5490-46B7-A456-64A277CB332C}" srcOrd="0" destOrd="0" presId="urn:microsoft.com/office/officeart/2024/3/layout/hArchList1"/>
-    <dgm:cxn modelId="{86291A9B-A7BD-4A17-9FA3-73B5F1192B26}" type="presParOf" srcId="{4A15BD43-FC5C-486B-BBDD-003A13A15493}" destId="{8BB355F9-6CC2-4480-9B7E-D892D65FD34C}" srcOrd="1" destOrd="0" presId="urn:microsoft.com/office/officeart/2024/3/layout/hArchList1"/>
-    <dgm:cxn modelId="{C6516519-8B52-440E-94E2-D6A7B633422D}" type="presParOf" srcId="{3171E97B-CDE9-41AD-B264-8ADEE4D73563}" destId="{412E2C94-E9BF-4E2B-961F-50EF83661C9E}" srcOrd="3" destOrd="0" presId="urn:microsoft.com/office/officeart/2024/3/layout/hArchList1"/>
-    <dgm:cxn modelId="{45AFFFFC-BE63-4F53-B4D2-90F1E0549280}" type="presParOf" srcId="{3171E97B-CDE9-41AD-B264-8ADEE4D73563}" destId="{00797D44-CAE9-428C-9B5E-3CE638B13212}" srcOrd="4" destOrd="0" presId="urn:microsoft.com/office/officeart/2024/3/layout/hArchList1"/>
-    <dgm:cxn modelId="{51AF1C5B-A6A3-4F7E-9193-00ED0BBF587E}" type="presParOf" srcId="{00797D44-CAE9-428C-9B5E-3CE638B13212}" destId="{E38D88DE-6630-449F-B815-64F25EB69547}" srcOrd="0" destOrd="0" presId="urn:microsoft.com/office/officeart/2024/3/layout/hArchList1"/>
-    <dgm:cxn modelId="{8A06BC44-10F2-41E6-A83A-BD9AC8EC5EB6}" type="presParOf" srcId="{00797D44-CAE9-428C-9B5E-3CE638B13212}" destId="{6BD7537A-36A9-42F0-9C36-0D4BA2D0752A}" srcOrd="1" destOrd="0" presId="urn:microsoft.com/office/officeart/2024/3/layout/hArchList1"/>
+    <dgm:cxn modelId="{EE50A9F9-0633-48E6-8993-9AAE38539E93}" srcId="{996C4E6A-2C60-4428-8C91-27910EF058EC}" destId="{3AA2FA24-1521-4189-A205-F4F5DE278920}" srcOrd="3" destOrd="0" parTransId="{8EB9754A-2D2C-47B0-86CE-A121140B02A9}" sibTransId="{E9066788-C52E-4A94-AF8C-EFACB72EE811}"/>
+    <dgm:cxn modelId="{748F7AFB-7607-418D-A0F6-37BC3EA60FDD}" type="presOf" srcId="{4C74B0FE-0F44-43D7-940D-B9AF6ABF1025}" destId="{8BB355F9-6CC2-4480-9B7E-D892D65FD34C}" srcOrd="0" destOrd="0" presId="urn:microsoft.com/office/officeart/2024/3/layout/hArchList1"/>
+    <dgm:cxn modelId="{932A69D6-9FD0-4CA2-924C-1D1A8CAAD84C}" type="presParOf" srcId="{3171E97B-CDE9-41AD-B264-8ADEE4D73563}" destId="{673D3BE1-0B49-408D-A9B7-2ACE218FD35D}" srcOrd="0" destOrd="0" presId="urn:microsoft.com/office/officeart/2024/3/layout/hArchList1"/>
+    <dgm:cxn modelId="{552B63F5-0D2A-4F04-902F-B97F064A6E15}" type="presParOf" srcId="{673D3BE1-0B49-408D-A9B7-2ACE218FD35D}" destId="{018F7438-E01D-44D7-ADD6-157BC62500E3}" srcOrd="0" destOrd="0" presId="urn:microsoft.com/office/officeart/2024/3/layout/hArchList1"/>
+    <dgm:cxn modelId="{8E79F0D3-C7F2-4B51-BDA1-2FF112573160}" type="presParOf" srcId="{673D3BE1-0B49-408D-A9B7-2ACE218FD35D}" destId="{5C90C3CA-0AA3-4EBE-B50C-5D1938624D21}" srcOrd="1" destOrd="0" presId="urn:microsoft.com/office/officeart/2024/3/layout/hArchList1"/>
+    <dgm:cxn modelId="{2C70E249-B11D-4A23-B02F-C47971B7B4C4}" type="presParOf" srcId="{3171E97B-CDE9-41AD-B264-8ADEE4D73563}" destId="{4CD37533-18BB-44AF-9438-CA8C06D267FF}" srcOrd="1" destOrd="0" presId="urn:microsoft.com/office/officeart/2024/3/layout/hArchList1"/>
+    <dgm:cxn modelId="{8E8D458A-E2A4-419E-AA5F-BBDC102BEBF5}" type="presParOf" srcId="{3171E97B-CDE9-41AD-B264-8ADEE4D73563}" destId="{4A15BD43-FC5C-486B-BBDD-003A13A15493}" srcOrd="2" destOrd="0" presId="urn:microsoft.com/office/officeart/2024/3/layout/hArchList1"/>
+    <dgm:cxn modelId="{62B0DF6F-7D62-4697-8A07-E4F111FE0B91}" type="presParOf" srcId="{4A15BD43-FC5C-486B-BBDD-003A13A15493}" destId="{58CF0B87-5490-46B7-A456-64A277CB332C}" srcOrd="0" destOrd="0" presId="urn:microsoft.com/office/officeart/2024/3/layout/hArchList1"/>
+    <dgm:cxn modelId="{74D36ED4-C91E-4326-A3CE-31E5901E0D66}" type="presParOf" srcId="{4A15BD43-FC5C-486B-BBDD-003A13A15493}" destId="{8BB355F9-6CC2-4480-9B7E-D892D65FD34C}" srcOrd="1" destOrd="0" presId="urn:microsoft.com/office/officeart/2024/3/layout/hArchList1"/>
+    <dgm:cxn modelId="{31F2C47B-BCE4-43BE-8C57-66ED7D20A082}" type="presParOf" srcId="{3171E97B-CDE9-41AD-B264-8ADEE4D73563}" destId="{412E2C94-E9BF-4E2B-961F-50EF83661C9E}" srcOrd="3" destOrd="0" presId="urn:microsoft.com/office/officeart/2024/3/layout/hArchList1"/>
+    <dgm:cxn modelId="{108791BD-7EA8-4543-A6F0-B4F2B3076A1F}" type="presParOf" srcId="{3171E97B-CDE9-41AD-B264-8ADEE4D73563}" destId="{00797D44-CAE9-428C-9B5E-3CE638B13212}" srcOrd="4" destOrd="0" presId="urn:microsoft.com/office/officeart/2024/3/layout/hArchList1"/>
+    <dgm:cxn modelId="{A60C68F2-12F4-4CB1-9BC0-BC3F1F6D9D24}" type="presParOf" srcId="{00797D44-CAE9-428C-9B5E-3CE638B13212}" destId="{E38D88DE-6630-449F-B815-64F25EB69547}" srcOrd="0" destOrd="0" presId="urn:microsoft.com/office/officeart/2024/3/layout/hArchList1"/>
+    <dgm:cxn modelId="{EBA866BF-59B4-4164-AE7F-17E8484DBF08}" type="presParOf" srcId="{00797D44-CAE9-428C-9B5E-3CE638B13212}" destId="{6BD7537A-36A9-42F0-9C36-0D4BA2D0752A}" srcOrd="1" destOrd="0" presId="urn:microsoft.com/office/officeart/2024/3/layout/hArchList1"/>
+    <dgm:cxn modelId="{D99F9705-CCB6-4448-93E9-8DC7147510C6}" type="presParOf" srcId="{3171E97B-CDE9-41AD-B264-8ADEE4D73563}" destId="{22C7BBDA-E201-4BCB-B174-C638359A9190}" srcOrd="5" destOrd="0" presId="urn:microsoft.com/office/officeart/2024/3/layout/hArchList1"/>
+    <dgm:cxn modelId="{CB27171A-FBFD-49B7-8337-5C076C564E6D}" type="presParOf" srcId="{3171E97B-CDE9-41AD-B264-8ADEE4D73563}" destId="{84A4A014-22ED-4AEA-9E9D-867A9F401653}" srcOrd="6" destOrd="0" presId="urn:microsoft.com/office/officeart/2024/3/layout/hArchList1"/>
+    <dgm:cxn modelId="{D405B57B-B234-4593-9E1C-D62B389B34B5}" type="presParOf" srcId="{84A4A014-22ED-4AEA-9E9D-867A9F401653}" destId="{76448584-D501-4333-884C-F960C3FAA9BE}" srcOrd="0" destOrd="0" presId="urn:microsoft.com/office/officeart/2024/3/layout/hArchList1"/>
+    <dgm:cxn modelId="{6F8E35E4-614F-4546-A85D-8B1CD3FDCAE2}" type="presParOf" srcId="{84A4A014-22ED-4AEA-9E9D-867A9F401653}" destId="{9925560B-C3AD-44BD-A1A3-25292C97D5DC}" srcOrd="1" destOrd="0" presId="urn:microsoft.com/office/officeart/2024/3/layout/hArchList1"/>
   </dgm:cxnLst>
   <dgm:bg/>
   <dgm:whole/>
@@ -4210,15 +3638,7 @@
         <a:p>
           <a:r>
             <a:rPr lang="en-US" dirty="0"/>
-            <a:t>You can call the </a:t>
-          </a:r>
-          <a:r>
-            <a:rPr lang="en-US" dirty="0" err="1"/>
-            <a:t>mthod</a:t>
-          </a:r>
-          <a:r>
-            <a:rPr lang="en-US" dirty="0"/>
-            <a:t> right away, which will execute the M code and return data</a:t>
+            <a:t>You can call the method right away, which will execute the M code and return data</a:t>
           </a:r>
           <a:endParaRPr lang="en-NL" dirty="0"/>
         </a:p>
@@ -4338,445 +3758,6 @@
     <dgm:cxn modelId="{E08349A5-0353-4C9E-91A6-357A61A8D518}" type="presParOf" srcId="{42508249-CB23-4C29-BA91-0FBF4F3FC221}" destId="{CF98FD1A-AABC-4833-9CC8-F5ECB925415E}" srcOrd="3" destOrd="0" presId="urn:microsoft.com/office/officeart/2009/3/layout/IncreasingArrowsProcess"/>
     <dgm:cxn modelId="{A7BB57EB-A38D-4276-BCED-684F1223C668}" type="presParOf" srcId="{42508249-CB23-4C29-BA91-0FBF4F3FC221}" destId="{F9AE15FA-8263-4E7F-B6DC-79DA0B2F7B75}" srcOrd="4" destOrd="0" presId="urn:microsoft.com/office/officeart/2009/3/layout/IncreasingArrowsProcess"/>
     <dgm:cxn modelId="{479950C8-AF5C-4106-992A-1C66634BB90B}" type="presParOf" srcId="{42508249-CB23-4C29-BA91-0FBF4F3FC221}" destId="{A1C7FE50-A7A9-4DCF-9D2D-0D9BE2138934}" srcOrd="5" destOrd="0" presId="urn:microsoft.com/office/officeart/2009/3/layout/IncreasingArrowsProcess"/>
-  </dgm:cxnLst>
-  <dgm:bg/>
-  <dgm:whole/>
-  <dgm:extLst>
-    <a:ext uri="http://schemas.microsoft.com/office/drawing/2008/diagram">
-      <dsp:dataModelExt xmlns:dsp="http://schemas.microsoft.com/office/drawing/2008/diagram" relId="rId6" minVer="http://schemas.openxmlformats.org/drawingml/2006/diagram"/>
-    </a:ext>
-  </dgm:extLst>
-</dgm:dataModel>
-</file>
-
-<file path=ppt/diagrams/data4.xml><?xml version="1.0" encoding="utf-8"?>
-<dgm:dataModel xmlns:dgm="http://schemas.openxmlformats.org/drawingml/2006/diagram" xmlns:a="http://schemas.openxmlformats.org/drawingml/2006/main">
-  <dgm:ptLst>
-    <dgm:pt modelId="{996C4E6A-2C60-4428-8C91-27910EF058EC}" type="doc">
-      <dgm:prSet loTypeId="urn:microsoft.com/office/officeart/2024/3/layout/hArchList1" loCatId="List" qsTypeId="urn:microsoft.com/office/officeart/2005/8/quickstyle/simple1" qsCatId="simple" csTypeId="urn:microsoft.com/office/officeart/2005/8/colors/accent1_2" csCatId="accent1" phldr="1"/>
-      <dgm:spPr/>
-      <dgm:t>
-        <a:bodyPr/>
-        <a:lstStyle/>
-        <a:p>
-          <a:endParaRPr lang="en-US"/>
-        </a:p>
-      </dgm:t>
-    </dgm:pt>
-    <dgm:pt modelId="{D594FA1A-CAFE-4FC9-B29F-017F3AF2316D}">
-      <dgm:prSet/>
-      <dgm:spPr/>
-      <dgm:t>
-        <a:bodyPr/>
-        <a:lstStyle/>
-        <a:p>
-          <a:pPr>
-            <a:lnSpc>
-              <a:spcPct val="100000"/>
-            </a:lnSpc>
-            <a:defRPr b="1"/>
-          </a:pPr>
-          <a:r>
-            <a:rPr lang="en-US" dirty="0"/>
-            <a:t>Simple to install,</a:t>
-          </a:r>
-        </a:p>
-        <a:p>
-          <a:pPr>
-            <a:lnSpc>
-              <a:spcPct val="100000"/>
-            </a:lnSpc>
-            <a:defRPr b="1"/>
-          </a:pPr>
-          <a:r>
-            <a:rPr lang="en-US" dirty="0"/>
-            <a:t>Simple to run…</a:t>
-          </a:r>
-        </a:p>
-      </dgm:t>
-    </dgm:pt>
-    <dgm:pt modelId="{B692412B-C32F-404E-A62A-E42191694563}" type="parTrans" cxnId="{CECC1115-8D04-4BE9-A207-B030BD568392}">
-      <dgm:prSet/>
-      <dgm:spPr/>
-      <dgm:t>
-        <a:bodyPr/>
-        <a:lstStyle/>
-        <a:p>
-          <a:endParaRPr lang="en-US"/>
-        </a:p>
-      </dgm:t>
-    </dgm:pt>
-    <dgm:pt modelId="{3AB04008-29BA-487D-8C45-AE18FA21868B}" type="sibTrans" cxnId="{CECC1115-8D04-4BE9-A207-B030BD568392}">
-      <dgm:prSet/>
-      <dgm:spPr/>
-      <dgm:t>
-        <a:bodyPr/>
-        <a:lstStyle/>
-        <a:p>
-          <a:pPr>
-            <a:lnSpc>
-              <a:spcPct val="100000"/>
-            </a:lnSpc>
-            <a:defRPr b="1"/>
-          </a:pPr>
-          <a:endParaRPr lang="en-US"/>
-        </a:p>
-      </dgm:t>
-    </dgm:pt>
-    <dgm:pt modelId="{06204C76-8052-4671-8722-9895BD95AC98}">
-      <dgm:prSet/>
-      <dgm:spPr/>
-      <dgm:t>
-        <a:bodyPr/>
-        <a:lstStyle/>
-        <a:p>
-          <a:pPr>
-            <a:lnSpc>
-              <a:spcPct val="100000"/>
-            </a:lnSpc>
-          </a:pPr>
-          <a:r>
-            <a:rPr lang="en-US" dirty="0"/>
-            <a:t>MIND Server gets installed as standard YottaDB plugin on top of your YottaDB installation with a one-liner command.</a:t>
-          </a:r>
-        </a:p>
-        <a:p>
-          <a:pPr>
-            <a:lnSpc>
-              <a:spcPct val="100000"/>
-            </a:lnSpc>
-          </a:pPr>
-          <a:r>
-            <a:rPr lang="en-US" dirty="0"/>
-            <a:t>You can then either run it directly of configure it using the .conf file or command line switches.</a:t>
-          </a:r>
-        </a:p>
-      </dgm:t>
-    </dgm:pt>
-    <dgm:pt modelId="{0923777E-212F-46F7-9676-1B1CD76B367F}" type="parTrans" cxnId="{1FF11245-068A-4CA3-BCBC-AA141B75607D}">
-      <dgm:prSet/>
-      <dgm:spPr/>
-      <dgm:t>
-        <a:bodyPr/>
-        <a:lstStyle/>
-        <a:p>
-          <a:endParaRPr lang="en-US"/>
-        </a:p>
-      </dgm:t>
-    </dgm:pt>
-    <dgm:pt modelId="{2AE3F090-A320-4B38-A931-78BE74ADF0F7}" type="sibTrans" cxnId="{1FF11245-068A-4CA3-BCBC-AA141B75607D}">
-      <dgm:prSet/>
-      <dgm:spPr/>
-      <dgm:t>
-        <a:bodyPr/>
-        <a:lstStyle/>
-        <a:p>
-          <a:endParaRPr lang="en-US"/>
-        </a:p>
-      </dgm:t>
-    </dgm:pt>
-    <dgm:pt modelId="{768B9187-70A7-4F24-98C9-4549D9A80F20}">
-      <dgm:prSet/>
-      <dgm:spPr/>
-      <dgm:t>
-        <a:bodyPr/>
-        <a:lstStyle/>
-        <a:p>
-          <a:pPr>
-            <a:lnSpc>
-              <a:spcPct val="100000"/>
-            </a:lnSpc>
-            <a:defRPr b="1"/>
-          </a:pPr>
-          <a:r>
-            <a:rPr lang="en-US" dirty="0"/>
-            <a:t>Designed putting both MUMPS and back-end developers first</a:t>
-          </a:r>
-        </a:p>
-      </dgm:t>
-    </dgm:pt>
-    <dgm:pt modelId="{28680839-1F10-452B-8A00-49D86D2208FE}" type="parTrans" cxnId="{0FF7CFDA-06D0-49E7-971D-B87E044D11AB}">
-      <dgm:prSet/>
-      <dgm:spPr/>
-      <dgm:t>
-        <a:bodyPr/>
-        <a:lstStyle/>
-        <a:p>
-          <a:endParaRPr lang="en-US"/>
-        </a:p>
-      </dgm:t>
-    </dgm:pt>
-    <dgm:pt modelId="{E137F926-3C8F-4C45-8350-903EA88D75AF}" type="sibTrans" cxnId="{0FF7CFDA-06D0-49E7-971D-B87E044D11AB}">
-      <dgm:prSet/>
-      <dgm:spPr/>
-      <dgm:t>
-        <a:bodyPr/>
-        <a:lstStyle/>
-        <a:p>
-          <a:pPr>
-            <a:lnSpc>
-              <a:spcPct val="100000"/>
-            </a:lnSpc>
-            <a:defRPr b="1"/>
-          </a:pPr>
-          <a:endParaRPr lang="en-US"/>
-        </a:p>
-      </dgm:t>
-    </dgm:pt>
-    <dgm:pt modelId="{4C74B0FE-0F44-43D7-940D-B9AF6ABF1025}">
-      <dgm:prSet/>
-      <dgm:spPr/>
-      <dgm:t>
-        <a:bodyPr/>
-        <a:lstStyle/>
-        <a:p>
-          <a:pPr>
-            <a:lnSpc>
-              <a:spcPct val="100000"/>
-            </a:lnSpc>
-          </a:pPr>
-          <a:r>
-            <a:rPr lang="en-US" dirty="0"/>
-            <a:t>Keeping in mind that back-end languages use data-types and Objects, we created data translators to move data to and from YottaDB.</a:t>
-          </a:r>
-        </a:p>
-        <a:p>
-          <a:pPr>
-            <a:lnSpc>
-              <a:spcPct val="100000"/>
-            </a:lnSpc>
-          </a:pPr>
-          <a:r>
-            <a:rPr lang="en-US" dirty="0"/>
-            <a:t>And, of course, we support JSON in both directions.</a:t>
-          </a:r>
-        </a:p>
-      </dgm:t>
-    </dgm:pt>
-    <dgm:pt modelId="{E239FEBF-B4AE-47D3-8223-FDECC72F0B62}" type="parTrans" cxnId="{3288A1A6-BC96-42D9-B282-F903D3D28B27}">
-      <dgm:prSet/>
-      <dgm:spPr/>
-      <dgm:t>
-        <a:bodyPr/>
-        <a:lstStyle/>
-        <a:p>
-          <a:endParaRPr lang="en-US"/>
-        </a:p>
-      </dgm:t>
-    </dgm:pt>
-    <dgm:pt modelId="{44570744-E566-439D-B1FF-599460901ED9}" type="sibTrans" cxnId="{3288A1A6-BC96-42D9-B282-F903D3D28B27}">
-      <dgm:prSet/>
-      <dgm:spPr/>
-      <dgm:t>
-        <a:bodyPr/>
-        <a:lstStyle/>
-        <a:p>
-          <a:endParaRPr lang="en-US"/>
-        </a:p>
-      </dgm:t>
-    </dgm:pt>
-    <dgm:pt modelId="{FBA685A8-C4ED-4A44-BA15-A95087C22363}">
-      <dgm:prSet/>
-      <dgm:spPr/>
-      <dgm:t>
-        <a:bodyPr/>
-        <a:lstStyle/>
-        <a:p>
-          <a:pPr>
-            <a:lnSpc>
-              <a:spcPct val="100000"/>
-            </a:lnSpc>
-            <a:defRPr b="1"/>
-          </a:pPr>
-          <a:r>
-            <a:rPr lang="en-US" dirty="0"/>
-            <a:t>ZERO coding needed in the client (back-end) driver.</a:t>
-          </a:r>
-        </a:p>
-      </dgm:t>
-    </dgm:pt>
-    <dgm:pt modelId="{DF0B6627-E6C7-4B6F-AEF0-D5B4D98FAE0D}" type="parTrans" cxnId="{741CCF7E-FAFA-4680-999D-03CF38C0793B}">
-      <dgm:prSet/>
-      <dgm:spPr/>
-      <dgm:t>
-        <a:bodyPr/>
-        <a:lstStyle/>
-        <a:p>
-          <a:endParaRPr lang="en-US"/>
-        </a:p>
-      </dgm:t>
-    </dgm:pt>
-    <dgm:pt modelId="{AD175B27-BF85-41B6-9B87-24460515CD3C}" type="sibTrans" cxnId="{741CCF7E-FAFA-4680-999D-03CF38C0793B}">
-      <dgm:prSet/>
-      <dgm:spPr/>
-      <dgm:t>
-        <a:bodyPr/>
-        <a:lstStyle/>
-        <a:p>
-          <a:endParaRPr lang="en-US"/>
-        </a:p>
-      </dgm:t>
-    </dgm:pt>
-    <dgm:pt modelId="{FABA06FE-F150-48B5-B3D7-2915E3C41ABD}">
-      <dgm:prSet/>
-      <dgm:spPr/>
-      <dgm:t>
-        <a:bodyPr/>
-        <a:lstStyle/>
-        <a:p>
-          <a:pPr>
-            <a:lnSpc>
-              <a:spcPct val="100000"/>
-            </a:lnSpc>
-          </a:pPr>
-          <a:r>
-            <a:rPr lang="en-US" dirty="0"/>
-            <a:t>Once you describe your MUMPS functions / procedure in a JSON file, they will “magically” appear in the client driver and ready to use.</a:t>
-          </a:r>
-        </a:p>
-        <a:p>
-          <a:pPr>
-            <a:lnSpc>
-              <a:spcPct val="100000"/>
-            </a:lnSpc>
-          </a:pPr>
-          <a:r>
-            <a:rPr lang="en-US" dirty="0"/>
-            <a:t>Additionally, they will also perform validation of the supplied parameters.</a:t>
-          </a:r>
-        </a:p>
-      </dgm:t>
-    </dgm:pt>
-    <dgm:pt modelId="{AF3000A7-0375-4FA4-B30C-7D0027C5A577}" type="parTrans" cxnId="{31032E6F-283D-4219-981D-934A8C3F1D57}">
-      <dgm:prSet/>
-      <dgm:spPr/>
-      <dgm:t>
-        <a:bodyPr/>
-        <a:lstStyle/>
-        <a:p>
-          <a:endParaRPr lang="en-US"/>
-        </a:p>
-      </dgm:t>
-    </dgm:pt>
-    <dgm:pt modelId="{A35B9477-3565-4F41-85B7-3C421108E7F6}" type="sibTrans" cxnId="{31032E6F-283D-4219-981D-934A8C3F1D57}">
-      <dgm:prSet/>
-      <dgm:spPr/>
-      <dgm:t>
-        <a:bodyPr/>
-        <a:lstStyle/>
-        <a:p>
-          <a:endParaRPr lang="en-US"/>
-        </a:p>
-      </dgm:t>
-    </dgm:pt>
-    <dgm:pt modelId="{3171E97B-CDE9-41AD-B264-8ADEE4D73563}" type="pres">
-      <dgm:prSet presAssocID="{996C4E6A-2C60-4428-8C91-27910EF058EC}" presName="Name0" presStyleCnt="0">
-        <dgm:presLayoutVars>
-          <dgm:dir/>
-          <dgm:resizeHandles val="exact"/>
-        </dgm:presLayoutVars>
-      </dgm:prSet>
-      <dgm:spPr/>
-    </dgm:pt>
-    <dgm:pt modelId="{673D3BE1-0B49-408D-A9B7-2ACE218FD35D}" type="pres">
-      <dgm:prSet presAssocID="{D594FA1A-CAFE-4FC9-B29F-017F3AF2316D}" presName="compNode" presStyleCnt="0"/>
-      <dgm:spPr/>
-    </dgm:pt>
-    <dgm:pt modelId="{018F7438-E01D-44D7-ADD6-157BC62500E3}" type="pres">
-      <dgm:prSet presAssocID="{D594FA1A-CAFE-4FC9-B29F-017F3AF2316D}" presName="pictRect" presStyleLbl="revTx" presStyleIdx="0" presStyleCnt="6">
-        <dgm:presLayoutVars>
-          <dgm:chMax val="0"/>
-          <dgm:bulletEnabled/>
-        </dgm:presLayoutVars>
-      </dgm:prSet>
-      <dgm:spPr/>
-    </dgm:pt>
-    <dgm:pt modelId="{5C90C3CA-0AA3-4EBE-B50C-5D1938624D21}" type="pres">
-      <dgm:prSet presAssocID="{D594FA1A-CAFE-4FC9-B29F-017F3AF2316D}" presName="textRect" presStyleLbl="revTx" presStyleIdx="1" presStyleCnt="6">
-        <dgm:presLayoutVars>
-          <dgm:bulletEnabled/>
-        </dgm:presLayoutVars>
-      </dgm:prSet>
-      <dgm:spPr/>
-    </dgm:pt>
-    <dgm:pt modelId="{4CD37533-18BB-44AF-9438-CA8C06D267FF}" type="pres">
-      <dgm:prSet presAssocID="{3AB04008-29BA-487D-8C45-AE18FA21868B}" presName="sibTrans" presStyleLbl="sibTrans2D1" presStyleIdx="0" presStyleCnt="0"/>
-      <dgm:spPr/>
-    </dgm:pt>
-    <dgm:pt modelId="{4A15BD43-FC5C-486B-BBDD-003A13A15493}" type="pres">
-      <dgm:prSet presAssocID="{768B9187-70A7-4F24-98C9-4549D9A80F20}" presName="compNode" presStyleCnt="0"/>
-      <dgm:spPr/>
-    </dgm:pt>
-    <dgm:pt modelId="{58CF0B87-5490-46B7-A456-64A277CB332C}" type="pres">
-      <dgm:prSet presAssocID="{768B9187-70A7-4F24-98C9-4549D9A80F20}" presName="pictRect" presStyleLbl="revTx" presStyleIdx="2" presStyleCnt="6">
-        <dgm:presLayoutVars>
-          <dgm:chMax val="0"/>
-          <dgm:bulletEnabled/>
-        </dgm:presLayoutVars>
-      </dgm:prSet>
-      <dgm:spPr/>
-    </dgm:pt>
-    <dgm:pt modelId="{8BB355F9-6CC2-4480-9B7E-D892D65FD34C}" type="pres">
-      <dgm:prSet presAssocID="{768B9187-70A7-4F24-98C9-4549D9A80F20}" presName="textRect" presStyleLbl="revTx" presStyleIdx="3" presStyleCnt="6" custLinFactNeighborX="0" custLinFactNeighborY="3582">
-        <dgm:presLayoutVars>
-          <dgm:bulletEnabled/>
-        </dgm:presLayoutVars>
-      </dgm:prSet>
-      <dgm:spPr/>
-    </dgm:pt>
-    <dgm:pt modelId="{412E2C94-E9BF-4E2B-961F-50EF83661C9E}" type="pres">
-      <dgm:prSet presAssocID="{E137F926-3C8F-4C45-8350-903EA88D75AF}" presName="sibTrans" presStyleLbl="sibTrans2D1" presStyleIdx="0" presStyleCnt="0"/>
-      <dgm:spPr/>
-    </dgm:pt>
-    <dgm:pt modelId="{00797D44-CAE9-428C-9B5E-3CE638B13212}" type="pres">
-      <dgm:prSet presAssocID="{FBA685A8-C4ED-4A44-BA15-A95087C22363}" presName="compNode" presStyleCnt="0"/>
-      <dgm:spPr/>
-    </dgm:pt>
-    <dgm:pt modelId="{E38D88DE-6630-449F-B815-64F25EB69547}" type="pres">
-      <dgm:prSet presAssocID="{FBA685A8-C4ED-4A44-BA15-A95087C22363}" presName="pictRect" presStyleLbl="revTx" presStyleIdx="4" presStyleCnt="6">
-        <dgm:presLayoutVars>
-          <dgm:chMax val="0"/>
-          <dgm:bulletEnabled/>
-        </dgm:presLayoutVars>
-      </dgm:prSet>
-      <dgm:spPr/>
-    </dgm:pt>
-    <dgm:pt modelId="{6BD7537A-36A9-42F0-9C36-0D4BA2D0752A}" type="pres">
-      <dgm:prSet presAssocID="{FBA685A8-C4ED-4A44-BA15-A95087C22363}" presName="textRect" presStyleLbl="revTx" presStyleIdx="5" presStyleCnt="6">
-        <dgm:presLayoutVars>
-          <dgm:bulletEnabled/>
-        </dgm:presLayoutVars>
-      </dgm:prSet>
-      <dgm:spPr/>
-    </dgm:pt>
-  </dgm:ptLst>
-  <dgm:cxnLst>
-    <dgm:cxn modelId="{CECC1115-8D04-4BE9-A207-B030BD568392}" srcId="{996C4E6A-2C60-4428-8C91-27910EF058EC}" destId="{D594FA1A-CAFE-4FC9-B29F-017F3AF2316D}" srcOrd="0" destOrd="0" parTransId="{B692412B-C32F-404E-A62A-E42191694563}" sibTransId="{3AB04008-29BA-487D-8C45-AE18FA21868B}"/>
-    <dgm:cxn modelId="{1F3DF617-CC3F-4D66-8EA6-35BB1DC8CBA6}" type="presOf" srcId="{4C74B0FE-0F44-43D7-940D-B9AF6ABF1025}" destId="{8BB355F9-6CC2-4480-9B7E-D892D65FD34C}" srcOrd="0" destOrd="0" presId="urn:microsoft.com/office/officeart/2024/3/layout/hArchList1"/>
-    <dgm:cxn modelId="{F2BA5920-A477-487A-BF0F-C34CB4B62146}" type="presOf" srcId="{FABA06FE-F150-48B5-B3D7-2915E3C41ABD}" destId="{6BD7537A-36A9-42F0-9C36-0D4BA2D0752A}" srcOrd="0" destOrd="0" presId="urn:microsoft.com/office/officeart/2024/3/layout/hArchList1"/>
-    <dgm:cxn modelId="{A340B23A-91D0-462C-A679-3ACAAB787D70}" type="presOf" srcId="{768B9187-70A7-4F24-98C9-4549D9A80F20}" destId="{58CF0B87-5490-46B7-A456-64A277CB332C}" srcOrd="0" destOrd="0" presId="urn:microsoft.com/office/officeart/2024/3/layout/hArchList1"/>
-    <dgm:cxn modelId="{1FF11245-068A-4CA3-BCBC-AA141B75607D}" srcId="{D594FA1A-CAFE-4FC9-B29F-017F3AF2316D}" destId="{06204C76-8052-4671-8722-9895BD95AC98}" srcOrd="0" destOrd="0" parTransId="{0923777E-212F-46F7-9676-1B1CD76B367F}" sibTransId="{2AE3F090-A320-4B38-A931-78BE74ADF0F7}"/>
-    <dgm:cxn modelId="{31032E6F-283D-4219-981D-934A8C3F1D57}" srcId="{FBA685A8-C4ED-4A44-BA15-A95087C22363}" destId="{FABA06FE-F150-48B5-B3D7-2915E3C41ABD}" srcOrd="0" destOrd="0" parTransId="{AF3000A7-0375-4FA4-B30C-7D0027C5A577}" sibTransId="{A35B9477-3565-4F41-85B7-3C421108E7F6}"/>
-    <dgm:cxn modelId="{F7F0874F-D139-4205-A17A-D7D9567787E6}" type="presOf" srcId="{996C4E6A-2C60-4428-8C91-27910EF058EC}" destId="{3171E97B-CDE9-41AD-B264-8ADEE4D73563}" srcOrd="0" destOrd="0" presId="urn:microsoft.com/office/officeart/2024/3/layout/hArchList1"/>
-    <dgm:cxn modelId="{A939996F-AA57-4AB8-94FF-5D1362537617}" type="presOf" srcId="{3AB04008-29BA-487D-8C45-AE18FA21868B}" destId="{4CD37533-18BB-44AF-9438-CA8C06D267FF}" srcOrd="0" destOrd="0" presId="urn:microsoft.com/office/officeart/2024/3/layout/hArchList1"/>
-    <dgm:cxn modelId="{83C57875-C8C0-42D4-A258-93D49EA82CD8}" type="presOf" srcId="{D594FA1A-CAFE-4FC9-B29F-017F3AF2316D}" destId="{018F7438-E01D-44D7-ADD6-157BC62500E3}" srcOrd="0" destOrd="0" presId="urn:microsoft.com/office/officeart/2024/3/layout/hArchList1"/>
-    <dgm:cxn modelId="{741CCF7E-FAFA-4680-999D-03CF38C0793B}" srcId="{996C4E6A-2C60-4428-8C91-27910EF058EC}" destId="{FBA685A8-C4ED-4A44-BA15-A95087C22363}" srcOrd="2" destOrd="0" parTransId="{DF0B6627-E6C7-4B6F-AEF0-D5B4D98FAE0D}" sibTransId="{AD175B27-BF85-41B6-9B87-24460515CD3C}"/>
-    <dgm:cxn modelId="{D7BB7C97-F788-497C-BCAA-B9131F94E09F}" type="presOf" srcId="{06204C76-8052-4671-8722-9895BD95AC98}" destId="{5C90C3CA-0AA3-4EBE-B50C-5D1938624D21}" srcOrd="0" destOrd="0" presId="urn:microsoft.com/office/officeart/2024/3/layout/hArchList1"/>
-    <dgm:cxn modelId="{3288A1A6-BC96-42D9-B282-F903D3D28B27}" srcId="{768B9187-70A7-4F24-98C9-4549D9A80F20}" destId="{4C74B0FE-0F44-43D7-940D-B9AF6ABF1025}" srcOrd="0" destOrd="0" parTransId="{E239FEBF-B4AE-47D3-8223-FDECC72F0B62}" sibTransId="{44570744-E566-439D-B1FF-599460901ED9}"/>
-    <dgm:cxn modelId="{D39160A8-01E5-4CBB-83C0-E26188120B2B}" type="presOf" srcId="{FBA685A8-C4ED-4A44-BA15-A95087C22363}" destId="{E38D88DE-6630-449F-B815-64F25EB69547}" srcOrd="0" destOrd="0" presId="urn:microsoft.com/office/officeart/2024/3/layout/hArchList1"/>
-    <dgm:cxn modelId="{2D4E08CE-615F-4DDD-B3D3-2BFE9E67E070}" type="presOf" srcId="{E137F926-3C8F-4C45-8350-903EA88D75AF}" destId="{412E2C94-E9BF-4E2B-961F-50EF83661C9E}" srcOrd="0" destOrd="0" presId="urn:microsoft.com/office/officeart/2024/3/layout/hArchList1"/>
-    <dgm:cxn modelId="{0FF7CFDA-06D0-49E7-971D-B87E044D11AB}" srcId="{996C4E6A-2C60-4428-8C91-27910EF058EC}" destId="{768B9187-70A7-4F24-98C9-4549D9A80F20}" srcOrd="1" destOrd="0" parTransId="{28680839-1F10-452B-8A00-49D86D2208FE}" sibTransId="{E137F926-3C8F-4C45-8350-903EA88D75AF}"/>
-    <dgm:cxn modelId="{582F0F5E-244F-45D2-B023-A57BD75D1EC1}" type="presParOf" srcId="{3171E97B-CDE9-41AD-B264-8ADEE4D73563}" destId="{673D3BE1-0B49-408D-A9B7-2ACE218FD35D}" srcOrd="0" destOrd="0" presId="urn:microsoft.com/office/officeart/2024/3/layout/hArchList1"/>
-    <dgm:cxn modelId="{A548ED9C-046D-4BB1-8D3C-6FD046C27F60}" type="presParOf" srcId="{673D3BE1-0B49-408D-A9B7-2ACE218FD35D}" destId="{018F7438-E01D-44D7-ADD6-157BC62500E3}" srcOrd="0" destOrd="0" presId="urn:microsoft.com/office/officeart/2024/3/layout/hArchList1"/>
-    <dgm:cxn modelId="{5643C7C9-5160-4BEC-9A38-173A21075E9B}" type="presParOf" srcId="{673D3BE1-0B49-408D-A9B7-2ACE218FD35D}" destId="{5C90C3CA-0AA3-4EBE-B50C-5D1938624D21}" srcOrd="1" destOrd="0" presId="urn:microsoft.com/office/officeart/2024/3/layout/hArchList1"/>
-    <dgm:cxn modelId="{503658CB-B4DE-40D1-A7FE-6D4AA57F070B}" type="presParOf" srcId="{3171E97B-CDE9-41AD-B264-8ADEE4D73563}" destId="{4CD37533-18BB-44AF-9438-CA8C06D267FF}" srcOrd="1" destOrd="0" presId="urn:microsoft.com/office/officeart/2024/3/layout/hArchList1"/>
-    <dgm:cxn modelId="{B502C618-10E0-4DFC-8F21-DC74D44E314E}" type="presParOf" srcId="{3171E97B-CDE9-41AD-B264-8ADEE4D73563}" destId="{4A15BD43-FC5C-486B-BBDD-003A13A15493}" srcOrd="2" destOrd="0" presId="urn:microsoft.com/office/officeart/2024/3/layout/hArchList1"/>
-    <dgm:cxn modelId="{74482876-705F-4982-9BF6-7250ABFA8208}" type="presParOf" srcId="{4A15BD43-FC5C-486B-BBDD-003A13A15493}" destId="{58CF0B87-5490-46B7-A456-64A277CB332C}" srcOrd="0" destOrd="0" presId="urn:microsoft.com/office/officeart/2024/3/layout/hArchList1"/>
-    <dgm:cxn modelId="{86291A9B-A7BD-4A17-9FA3-73B5F1192B26}" type="presParOf" srcId="{4A15BD43-FC5C-486B-BBDD-003A13A15493}" destId="{8BB355F9-6CC2-4480-9B7E-D892D65FD34C}" srcOrd="1" destOrd="0" presId="urn:microsoft.com/office/officeart/2024/3/layout/hArchList1"/>
-    <dgm:cxn modelId="{C6516519-8B52-440E-94E2-D6A7B633422D}" type="presParOf" srcId="{3171E97B-CDE9-41AD-B264-8ADEE4D73563}" destId="{412E2C94-E9BF-4E2B-961F-50EF83661C9E}" srcOrd="3" destOrd="0" presId="urn:microsoft.com/office/officeart/2024/3/layout/hArchList1"/>
-    <dgm:cxn modelId="{45AFFFFC-BE63-4F53-B4D2-90F1E0549280}" type="presParOf" srcId="{3171E97B-CDE9-41AD-B264-8ADEE4D73563}" destId="{00797D44-CAE9-428C-9B5E-3CE638B13212}" srcOrd="4" destOrd="0" presId="urn:microsoft.com/office/officeart/2024/3/layout/hArchList1"/>
-    <dgm:cxn modelId="{51AF1C5B-A6A3-4F7E-9193-00ED0BBF587E}" type="presParOf" srcId="{00797D44-CAE9-428C-9B5E-3CE638B13212}" destId="{E38D88DE-6630-449F-B815-64F25EB69547}" srcOrd="0" destOrd="0" presId="urn:microsoft.com/office/officeart/2024/3/layout/hArchList1"/>
-    <dgm:cxn modelId="{8A06BC44-10F2-41E6-A83A-BD9AC8EC5EB6}" type="presParOf" srcId="{00797D44-CAE9-428C-9B5E-3CE638B13212}" destId="{6BD7537A-36A9-42F0-9C36-0D4BA2D0752A}" srcOrd="1" destOrd="0" presId="urn:microsoft.com/office/officeart/2024/3/layout/hArchList1"/>
   </dgm:cxnLst>
   <dgm:bg/>
   <dgm:whole/>
@@ -5271,87 +4252,7 @@
       <dsp:spPr>
         <a:xfrm>
           <a:off x="0" y="0"/>
-          <a:ext cx="2587153" cy="846926"/>
-        </a:xfrm>
-        <a:prstGeom prst="rect">
-          <a:avLst/>
-        </a:prstGeom>
-        <a:noFill/>
-        <a:ln>
-          <a:noFill/>
-        </a:ln>
-        <a:effectLst/>
-      </dsp:spPr>
-      <dsp:style>
-        <a:lnRef idx="0">
-          <a:scrgbClr r="0" g="0" b="0"/>
-        </a:lnRef>
-        <a:fillRef idx="0">
-          <a:scrgbClr r="0" g="0" b="0"/>
-        </a:fillRef>
-        <a:effectRef idx="0">
-          <a:scrgbClr r="0" g="0" b="0"/>
-        </a:effectRef>
-        <a:fontRef idx="minor"/>
-      </dsp:style>
-      <dsp:txBody>
-        <a:bodyPr spcFirstLastPara="0" vert="horz" wrap="square" lIns="137160" tIns="21590" rIns="21590" bIns="21590" numCol="1" spcCol="1270" anchor="t" anchorCtr="0">
-          <a:noAutofit/>
-        </a:bodyPr>
-        <a:lstStyle/>
-        <a:p>
-          <a:pPr marL="0" lvl="0" indent="0" algn="l" defTabSz="755650">
-            <a:lnSpc>
-              <a:spcPct val="100000"/>
-            </a:lnSpc>
-            <a:spcBef>
-              <a:spcPct val="0"/>
-            </a:spcBef>
-            <a:spcAft>
-              <a:spcPct val="35000"/>
-            </a:spcAft>
-            <a:buNone/>
-            <a:defRPr b="1"/>
-          </a:pPr>
-          <a:r>
-            <a:rPr lang="en-US" sz="1700" kern="1200" dirty="0"/>
-            <a:t>Easy to install,</a:t>
-          </a:r>
-        </a:p>
-        <a:p>
-          <a:pPr marL="0" lvl="0" indent="0" algn="l" defTabSz="755650">
-            <a:lnSpc>
-              <a:spcPct val="100000"/>
-            </a:lnSpc>
-            <a:spcBef>
-              <a:spcPct val="0"/>
-            </a:spcBef>
-            <a:spcAft>
-              <a:spcPct val="35000"/>
-            </a:spcAft>
-            <a:buNone/>
-            <a:defRPr b="1"/>
-          </a:pPr>
-          <a:r>
-            <a:rPr lang="en-US" sz="1700" kern="1200" dirty="0"/>
-            <a:t>Simple to run…</a:t>
-          </a:r>
-        </a:p>
-      </dsp:txBody>
-      <dsp:txXfrm>
-        <a:off x="0" y="0"/>
-        <a:ext cx="2587153" cy="846926"/>
-      </dsp:txXfrm>
-    </dsp:sp>
-    <dsp:sp modelId="{5C90C3CA-0AA3-4EBE-B50C-5D1938624D21}">
-      <dsp:nvSpPr>
-        <dsp:cNvPr id="0" name=""/>
-        <dsp:cNvSpPr/>
-      </dsp:nvSpPr>
-      <dsp:spPr>
-        <a:xfrm>
-          <a:off x="0" y="846926"/>
-          <a:ext cx="2587153" cy="2238564"/>
+          <a:ext cx="1924195" cy="645271"/>
         </a:xfrm>
         <a:prstGeom prst="rect">
           <a:avLst/>
@@ -5391,10 +4292,11 @@
               <a:spcPct val="35000"/>
             </a:spcAft>
             <a:buNone/>
+            <a:defRPr b="1"/>
           </a:pPr>
           <a:r>
             <a:rPr lang="en-US" sz="1300" kern="1200" dirty="0"/>
-            <a:t>MIND Server gets installed as standard YottaDB plugin on top of your YottaDB installation with a one-liner command.</a:t>
+            <a:t>Easy to install,</a:t>
           </a:r>
         </a:p>
         <a:p>
@@ -5409,27 +4311,28 @@
               <a:spcPct val="35000"/>
             </a:spcAft>
             <a:buNone/>
+            <a:defRPr b="1"/>
           </a:pPr>
           <a:r>
             <a:rPr lang="en-US" sz="1300" kern="1200" dirty="0"/>
-            <a:t>You can then either run it directly of configure it using the .conf file or command line switches.</a:t>
+            <a:t>Simple to run…</a:t>
           </a:r>
         </a:p>
       </dsp:txBody>
       <dsp:txXfrm>
-        <a:off x="0" y="846926"/>
-        <a:ext cx="2587153" cy="2238564"/>
+        <a:off x="0" y="0"/>
+        <a:ext cx="1924195" cy="645271"/>
       </dsp:txXfrm>
     </dsp:sp>
-    <dsp:sp modelId="{58CF0B87-5490-46B7-A456-64A277CB332C}">
+    <dsp:sp modelId="{5C90C3CA-0AA3-4EBE-B50C-5D1938624D21}">
       <dsp:nvSpPr>
         <dsp:cNvPr id="0" name=""/>
         <dsp:cNvSpPr/>
       </dsp:nvSpPr>
       <dsp:spPr>
         <a:xfrm>
-          <a:off x="2845869" y="0"/>
-          <a:ext cx="2587153" cy="846926"/>
+          <a:off x="0" y="645271"/>
+          <a:ext cx="1924195" cy="2503747"/>
         </a:xfrm>
         <a:prstGeom prst="rect">
           <a:avLst/>
@@ -5453,12 +4356,12 @@
         <a:fontRef idx="minor"/>
       </dsp:style>
       <dsp:txBody>
-        <a:bodyPr spcFirstLastPara="0" vert="horz" wrap="square" lIns="137160" tIns="21590" rIns="21590" bIns="21590" numCol="1" spcCol="1270" anchor="t" anchorCtr="0">
+        <a:bodyPr spcFirstLastPara="0" vert="horz" wrap="square" lIns="137160" tIns="12700" rIns="12700" bIns="12700" numCol="1" spcCol="1270" anchor="t" anchorCtr="0">
           <a:noAutofit/>
         </a:bodyPr>
         <a:lstStyle/>
         <a:p>
-          <a:pPr marL="0" lvl="0" indent="0" algn="l" defTabSz="755650">
+          <a:pPr marL="0" lvl="0" indent="0" algn="l" defTabSz="444500">
             <a:lnSpc>
               <a:spcPct val="100000"/>
             </a:lnSpc>
@@ -5469,28 +4372,45 @@
               <a:spcPct val="35000"/>
             </a:spcAft>
             <a:buNone/>
-            <a:defRPr b="1"/>
           </a:pPr>
           <a:r>
-            <a:rPr lang="en-US" sz="1700" kern="1200" dirty="0"/>
-            <a:t>Designed putting both MUMPS and back-end developers first</a:t>
+            <a:rPr lang="en-US" sz="1000" kern="1200" dirty="0"/>
+            <a:t>MIND Server gets installed as standard YottaDB plugin on top of your YottaDB installation with a one-liner command.</a:t>
+          </a:r>
+        </a:p>
+        <a:p>
+          <a:pPr marL="0" lvl="0" indent="0" algn="l" defTabSz="444500">
+            <a:lnSpc>
+              <a:spcPct val="100000"/>
+            </a:lnSpc>
+            <a:spcBef>
+              <a:spcPct val="0"/>
+            </a:spcBef>
+            <a:spcAft>
+              <a:spcPct val="35000"/>
+            </a:spcAft>
+            <a:buNone/>
+          </a:pPr>
+          <a:r>
+            <a:rPr lang="en-US" sz="1000" kern="1200" dirty="0"/>
+            <a:t>You can then either run it directly of configure it using the .conf file or command line switches.</a:t>
           </a:r>
         </a:p>
       </dsp:txBody>
       <dsp:txXfrm>
-        <a:off x="2845869" y="0"/>
-        <a:ext cx="2587153" cy="846926"/>
+        <a:off x="0" y="645271"/>
+        <a:ext cx="1924195" cy="2503747"/>
       </dsp:txXfrm>
     </dsp:sp>
-    <dsp:sp modelId="{8BB355F9-6CC2-4480-9B7E-D892D65FD34C}">
+    <dsp:sp modelId="{58CF0B87-5490-46B7-A456-64A277CB332C}">
       <dsp:nvSpPr>
         <dsp:cNvPr id="0" name=""/>
         <dsp:cNvSpPr/>
       </dsp:nvSpPr>
       <dsp:spPr>
         <a:xfrm>
-          <a:off x="2845869" y="927112"/>
-          <a:ext cx="2587153" cy="2238564"/>
+          <a:off x="2116615" y="0"/>
+          <a:ext cx="1924195" cy="645271"/>
         </a:xfrm>
         <a:prstGeom prst="rect">
           <a:avLst/>
@@ -5530,45 +4450,28 @@
               <a:spcPct val="35000"/>
             </a:spcAft>
             <a:buNone/>
+            <a:defRPr b="1"/>
           </a:pPr>
           <a:r>
             <a:rPr lang="en-US" sz="1300" kern="1200" dirty="0"/>
-            <a:t>Keeping in mind that back-end languages use data-types and Objects, we created data translators to move data to and from YottaDB.</a:t>
-          </a:r>
-        </a:p>
-        <a:p>
-          <a:pPr marL="0" lvl="0" indent="0" algn="l" defTabSz="577850">
-            <a:lnSpc>
-              <a:spcPct val="100000"/>
-            </a:lnSpc>
-            <a:spcBef>
-              <a:spcPct val="0"/>
-            </a:spcBef>
-            <a:spcAft>
-              <a:spcPct val="35000"/>
-            </a:spcAft>
-            <a:buNone/>
-          </a:pPr>
-          <a:r>
-            <a:rPr lang="en-US" sz="1300" kern="1200" dirty="0"/>
-            <a:t>And, of course, we support JSON in both directions.</a:t>
+            <a:t>Designed putting both MUMPS and back-end developers first</a:t>
           </a:r>
         </a:p>
       </dsp:txBody>
       <dsp:txXfrm>
-        <a:off x="2845869" y="927112"/>
-        <a:ext cx="2587153" cy="2238564"/>
+        <a:off x="2116615" y="0"/>
+        <a:ext cx="1924195" cy="645271"/>
       </dsp:txXfrm>
     </dsp:sp>
-    <dsp:sp modelId="{E38D88DE-6630-449F-B815-64F25EB69547}">
+    <dsp:sp modelId="{8BB355F9-6CC2-4480-9B7E-D892D65FD34C}">
       <dsp:nvSpPr>
         <dsp:cNvPr id="0" name=""/>
         <dsp:cNvSpPr/>
       </dsp:nvSpPr>
       <dsp:spPr>
         <a:xfrm>
-          <a:off x="5691738" y="0"/>
-          <a:ext cx="2587153" cy="846926"/>
+          <a:off x="2116615" y="734955"/>
+          <a:ext cx="1924195" cy="2503747"/>
         </a:xfrm>
         <a:prstGeom prst="rect">
           <a:avLst/>
@@ -5592,12 +4495,12 @@
         <a:fontRef idx="minor"/>
       </dsp:style>
       <dsp:txBody>
-        <a:bodyPr spcFirstLastPara="0" vert="horz" wrap="square" lIns="137160" tIns="21590" rIns="21590" bIns="21590" numCol="1" spcCol="1270" anchor="t" anchorCtr="0">
+        <a:bodyPr spcFirstLastPara="0" vert="horz" wrap="square" lIns="137160" tIns="12700" rIns="12700" bIns="12700" numCol="1" spcCol="1270" anchor="t" anchorCtr="0">
           <a:noAutofit/>
         </a:bodyPr>
         <a:lstStyle/>
         <a:p>
-          <a:pPr marL="0" lvl="0" indent="0" algn="l" defTabSz="755650">
+          <a:pPr marL="0" lvl="0" indent="0" algn="l" defTabSz="444500">
             <a:lnSpc>
               <a:spcPct val="100000"/>
             </a:lnSpc>
@@ -5608,28 +4511,45 @@
               <a:spcPct val="35000"/>
             </a:spcAft>
             <a:buNone/>
-            <a:defRPr b="1"/>
           </a:pPr>
           <a:r>
-            <a:rPr lang="en-US" sz="1700" kern="1200" dirty="0"/>
-            <a:t>ZERO coding needed in the client (back-end) driver.</a:t>
+            <a:rPr lang="en-US" sz="1000" kern="1200" dirty="0"/>
+            <a:t>Keeping in mind that back-end languages use data-types and Objects, we created data translators to move data to and from YottaDB.</a:t>
+          </a:r>
+        </a:p>
+        <a:p>
+          <a:pPr marL="0" lvl="0" indent="0" algn="l" defTabSz="444500">
+            <a:lnSpc>
+              <a:spcPct val="100000"/>
+            </a:lnSpc>
+            <a:spcBef>
+              <a:spcPct val="0"/>
+            </a:spcBef>
+            <a:spcAft>
+              <a:spcPct val="35000"/>
+            </a:spcAft>
+            <a:buNone/>
+          </a:pPr>
+          <a:r>
+            <a:rPr lang="en-US" sz="1000" kern="1200" dirty="0"/>
+            <a:t>And, of course, we support JSON in both directions.</a:t>
           </a:r>
         </a:p>
       </dsp:txBody>
       <dsp:txXfrm>
-        <a:off x="5691738" y="0"/>
-        <a:ext cx="2587153" cy="846926"/>
+        <a:off x="2116615" y="734955"/>
+        <a:ext cx="1924195" cy="2503747"/>
       </dsp:txXfrm>
     </dsp:sp>
-    <dsp:sp modelId="{6BD7537A-36A9-42F0-9C36-0D4BA2D0752A}">
+    <dsp:sp modelId="{E38D88DE-6630-449F-B815-64F25EB69547}">
       <dsp:nvSpPr>
         <dsp:cNvPr id="0" name=""/>
         <dsp:cNvSpPr/>
       </dsp:nvSpPr>
       <dsp:spPr>
         <a:xfrm>
-          <a:off x="5691738" y="846926"/>
-          <a:ext cx="2587153" cy="2238564"/>
+          <a:off x="4233230" y="0"/>
+          <a:ext cx="1924195" cy="645271"/>
         </a:xfrm>
         <a:prstGeom prst="rect">
           <a:avLst/>
@@ -5669,12 +4589,133 @@
               <a:spcPct val="35000"/>
             </a:spcAft>
             <a:buNone/>
+            <a:defRPr b="1"/>
           </a:pPr>
           <a:r>
             <a:rPr lang="en-US" sz="1300" kern="1200" dirty="0"/>
+            <a:t>ZERO coding needed in the client (back-end) driver.</a:t>
+          </a:r>
+        </a:p>
+      </dsp:txBody>
+      <dsp:txXfrm>
+        <a:off x="4233230" y="0"/>
+        <a:ext cx="1924195" cy="645271"/>
+      </dsp:txXfrm>
+    </dsp:sp>
+    <dsp:sp modelId="{6BD7537A-36A9-42F0-9C36-0D4BA2D0752A}">
+      <dsp:nvSpPr>
+        <dsp:cNvPr id="0" name=""/>
+        <dsp:cNvSpPr/>
+      </dsp:nvSpPr>
+      <dsp:spPr>
+        <a:xfrm>
+          <a:off x="4233230" y="645271"/>
+          <a:ext cx="1924195" cy="2503747"/>
+        </a:xfrm>
+        <a:prstGeom prst="rect">
+          <a:avLst/>
+        </a:prstGeom>
+        <a:noFill/>
+        <a:ln>
+          <a:noFill/>
+        </a:ln>
+        <a:effectLst/>
+      </dsp:spPr>
+      <dsp:style>
+        <a:lnRef idx="0">
+          <a:scrgbClr r="0" g="0" b="0"/>
+        </a:lnRef>
+        <a:fillRef idx="0">
+          <a:scrgbClr r="0" g="0" b="0"/>
+        </a:fillRef>
+        <a:effectRef idx="0">
+          <a:scrgbClr r="0" g="0" b="0"/>
+        </a:effectRef>
+        <a:fontRef idx="minor"/>
+      </dsp:style>
+      <dsp:txBody>
+        <a:bodyPr spcFirstLastPara="0" vert="horz" wrap="square" lIns="137160" tIns="12700" rIns="12700" bIns="12700" numCol="1" spcCol="1270" anchor="t" anchorCtr="0">
+          <a:noAutofit/>
+        </a:bodyPr>
+        <a:lstStyle/>
+        <a:p>
+          <a:pPr marL="0" lvl="0" indent="0" algn="l" defTabSz="444500">
+            <a:lnSpc>
+              <a:spcPct val="100000"/>
+            </a:lnSpc>
+            <a:spcBef>
+              <a:spcPct val="0"/>
+            </a:spcBef>
+            <a:spcAft>
+              <a:spcPct val="35000"/>
+            </a:spcAft>
+            <a:buNone/>
+          </a:pPr>
+          <a:r>
+            <a:rPr lang="en-US" sz="1000" kern="1200" dirty="0"/>
             <a:t>Once you describe your MUMPS functions / procedure in a JSON file, they will “magically” appear in the client driver and ready to use.</a:t>
           </a:r>
         </a:p>
+        <a:p>
+          <a:pPr marL="0" lvl="0" indent="0" algn="l" defTabSz="444500">
+            <a:lnSpc>
+              <a:spcPct val="100000"/>
+            </a:lnSpc>
+            <a:spcBef>
+              <a:spcPct val="0"/>
+            </a:spcBef>
+            <a:spcAft>
+              <a:spcPct val="35000"/>
+            </a:spcAft>
+            <a:buNone/>
+          </a:pPr>
+          <a:r>
+            <a:rPr lang="en-US" sz="1000" kern="1200" dirty="0"/>
+            <a:t>Additionally, automatic  validation of the supplied parameters is performed with no code needed.</a:t>
+          </a:r>
+        </a:p>
+      </dsp:txBody>
+      <dsp:txXfrm>
+        <a:off x="4233230" y="645271"/>
+        <a:ext cx="1924195" cy="2503747"/>
+      </dsp:txXfrm>
+    </dsp:sp>
+    <dsp:sp modelId="{76448584-D501-4333-884C-F960C3FAA9BE}">
+      <dsp:nvSpPr>
+        <dsp:cNvPr id="0" name=""/>
+        <dsp:cNvSpPr/>
+      </dsp:nvSpPr>
+      <dsp:spPr>
+        <a:xfrm>
+          <a:off x="6349845" y="0"/>
+          <a:ext cx="1924195" cy="645271"/>
+        </a:xfrm>
+        <a:prstGeom prst="rect">
+          <a:avLst/>
+        </a:prstGeom>
+        <a:noFill/>
+        <a:ln>
+          <a:noFill/>
+        </a:ln>
+        <a:effectLst/>
+      </dsp:spPr>
+      <dsp:style>
+        <a:lnRef idx="0">
+          <a:scrgbClr r="0" g="0" b="0"/>
+        </a:lnRef>
+        <a:fillRef idx="0">
+          <a:scrgbClr r="0" g="0" b="0"/>
+        </a:fillRef>
+        <a:effectRef idx="0">
+          <a:scrgbClr r="0" g="0" b="0"/>
+        </a:effectRef>
+        <a:fontRef idx="minor"/>
+      </dsp:style>
+      <dsp:txBody>
+        <a:bodyPr spcFirstLastPara="0" vert="horz" wrap="square" lIns="137160" tIns="16510" rIns="16510" bIns="16510" numCol="1" spcCol="1270" anchor="t" anchorCtr="0">
+          <a:noAutofit/>
+        </a:bodyPr>
+        <a:lstStyle/>
         <a:p>
           <a:pPr marL="0" lvl="0" indent="0" algn="l" defTabSz="577850">
             <a:lnSpc>
@@ -5687,16 +4728,98 @@
               <a:spcPct val="35000"/>
             </a:spcAft>
             <a:buNone/>
+            <a:defRPr b="1"/>
           </a:pPr>
           <a:r>
             <a:rPr lang="en-US" sz="1300" kern="1200" dirty="0"/>
-            <a:t>Additionally, automatic  validation of the supplied parameters is performed with no code needed.</a:t>
+            <a:t>Support your existing M code right away</a:t>
           </a:r>
+          <a:endParaRPr lang="en-NL" sz="1300" kern="1200" dirty="0"/>
         </a:p>
       </dsp:txBody>
       <dsp:txXfrm>
-        <a:off x="5691738" y="846926"/>
-        <a:ext cx="2587153" cy="2238564"/>
+        <a:off x="6349845" y="0"/>
+        <a:ext cx="1924195" cy="645271"/>
+      </dsp:txXfrm>
+    </dsp:sp>
+    <dsp:sp modelId="{9925560B-C3AD-44BD-A1A3-25292C97D5DC}">
+      <dsp:nvSpPr>
+        <dsp:cNvPr id="0" name=""/>
+        <dsp:cNvSpPr/>
+      </dsp:nvSpPr>
+      <dsp:spPr>
+        <a:xfrm>
+          <a:off x="6349845" y="645271"/>
+          <a:ext cx="1924195" cy="2503747"/>
+        </a:xfrm>
+        <a:prstGeom prst="rect">
+          <a:avLst/>
+        </a:prstGeom>
+        <a:noFill/>
+        <a:ln>
+          <a:noFill/>
+        </a:ln>
+        <a:effectLst/>
+      </dsp:spPr>
+      <dsp:style>
+        <a:lnRef idx="0">
+          <a:scrgbClr r="0" g="0" b="0"/>
+        </a:lnRef>
+        <a:fillRef idx="0">
+          <a:scrgbClr r="0" g="0" b="0"/>
+        </a:fillRef>
+        <a:effectRef idx="0">
+          <a:scrgbClr r="0" g="0" b="0"/>
+        </a:effectRef>
+        <a:fontRef idx="minor"/>
+      </dsp:style>
+      <dsp:txBody>
+        <a:bodyPr spcFirstLastPara="0" vert="horz" wrap="square" lIns="137160" tIns="12700" rIns="12700" bIns="12700" numCol="1" spcCol="1270" anchor="t" anchorCtr="0">
+          <a:noAutofit/>
+        </a:bodyPr>
+        <a:lstStyle/>
+        <a:p>
+          <a:pPr marL="0" lvl="0" indent="0" algn="l" defTabSz="444500">
+            <a:lnSpc>
+              <a:spcPct val="100000"/>
+            </a:lnSpc>
+            <a:spcBef>
+              <a:spcPct val="0"/>
+            </a:spcBef>
+            <a:spcAft>
+              <a:spcPct val="35000"/>
+            </a:spcAft>
+            <a:buNone/>
+          </a:pPr>
+          <a:r>
+            <a:rPr lang="en-US" sz="1000" kern="1200" dirty="0"/>
+            <a:t>You can call your existing code directly, specifying parameters and (eventual) return value.</a:t>
+          </a:r>
+          <a:endParaRPr lang="en-NL" sz="1000" kern="1200" dirty="0"/>
+        </a:p>
+        <a:p>
+          <a:pPr marL="0" lvl="0" indent="0" algn="l" defTabSz="444500">
+            <a:lnSpc>
+              <a:spcPct val="100000"/>
+            </a:lnSpc>
+            <a:spcBef>
+              <a:spcPct val="0"/>
+            </a:spcBef>
+            <a:spcAft>
+              <a:spcPct val="35000"/>
+            </a:spcAft>
+            <a:buNone/>
+          </a:pPr>
+          <a:r>
+            <a:rPr lang="en-US" sz="1000" kern="1200" dirty="0"/>
+            <a:t>Once you describe your code in the JSON file, it is available in the client right away</a:t>
+          </a:r>
+          <a:endParaRPr lang="en-NL" sz="1000" kern="1200" dirty="0"/>
+        </a:p>
+      </dsp:txBody>
+      <dsp:txXfrm>
+        <a:off x="6349845" y="645271"/>
+        <a:ext cx="1924195" cy="2503747"/>
       </dsp:txXfrm>
     </dsp:sp>
   </dsp:spTree>
@@ -6172,15 +5295,7 @@
           </a:pPr>
           <a:r>
             <a:rPr lang="en-US" sz="2500" kern="1200" dirty="0"/>
-            <a:t>You can call the </a:t>
-          </a:r>
-          <a:r>
-            <a:rPr lang="en-US" sz="2500" kern="1200" dirty="0" err="1"/>
-            <a:t>mthod</a:t>
-          </a:r>
-          <a:r>
-            <a:rPr lang="en-US" sz="2500" kern="1200" dirty="0"/>
-            <a:t> right away, which will execute the M code and return data</a:t>
+            <a:t>You can call the method right away, which will execute the M code and return data</a:t>
           </a:r>
           <a:endParaRPr lang="en-NL" sz="2500" kern="1200" dirty="0"/>
         </a:p>
@@ -6188,454 +5303,6 @@
       <dsp:txXfrm>
         <a:off x="6063019" y="1914827"/>
         <a:ext cx="2801413" cy="2514420"/>
-      </dsp:txXfrm>
-    </dsp:sp>
-  </dsp:spTree>
-</dsp:drawing>
-</file>
-
-<file path=ppt/diagrams/drawing4.xml><?xml version="1.0" encoding="utf-8"?>
-<dsp:drawing xmlns:dgm="http://schemas.openxmlformats.org/drawingml/2006/diagram" xmlns:dsp="http://schemas.microsoft.com/office/drawing/2008/diagram" xmlns:a="http://schemas.openxmlformats.org/drawingml/2006/main">
-  <dsp:spTree>
-    <dsp:nvGrpSpPr>
-      <dsp:cNvPr id="0" name=""/>
-      <dsp:cNvGrpSpPr/>
-    </dsp:nvGrpSpPr>
-    <dsp:grpSpPr/>
-    <dsp:sp modelId="{018F7438-E01D-44D7-ADD6-157BC62500E3}">
-      <dsp:nvSpPr>
-        <dsp:cNvPr id="0" name=""/>
-        <dsp:cNvSpPr/>
-      </dsp:nvSpPr>
-      <dsp:spPr>
-        <a:xfrm>
-          <a:off x="0" y="0"/>
-          <a:ext cx="2587153" cy="846926"/>
-        </a:xfrm>
-        <a:prstGeom prst="rect">
-          <a:avLst/>
-        </a:prstGeom>
-        <a:noFill/>
-        <a:ln>
-          <a:noFill/>
-        </a:ln>
-        <a:effectLst/>
-      </dsp:spPr>
-      <dsp:style>
-        <a:lnRef idx="0">
-          <a:scrgbClr r="0" g="0" b="0"/>
-        </a:lnRef>
-        <a:fillRef idx="0">
-          <a:scrgbClr r="0" g="0" b="0"/>
-        </a:fillRef>
-        <a:effectRef idx="0">
-          <a:scrgbClr r="0" g="0" b="0"/>
-        </a:effectRef>
-        <a:fontRef idx="minor"/>
-      </dsp:style>
-      <dsp:txBody>
-        <a:bodyPr spcFirstLastPara="0" vert="horz" wrap="square" lIns="137160" tIns="21590" rIns="21590" bIns="21590" numCol="1" spcCol="1270" anchor="t" anchorCtr="0">
-          <a:noAutofit/>
-        </a:bodyPr>
-        <a:lstStyle/>
-        <a:p>
-          <a:pPr marL="0" lvl="0" indent="0" algn="l" defTabSz="755650">
-            <a:lnSpc>
-              <a:spcPct val="100000"/>
-            </a:lnSpc>
-            <a:spcBef>
-              <a:spcPct val="0"/>
-            </a:spcBef>
-            <a:spcAft>
-              <a:spcPct val="35000"/>
-            </a:spcAft>
-            <a:buNone/>
-            <a:defRPr b="1"/>
-          </a:pPr>
-          <a:r>
-            <a:rPr lang="en-US" sz="1700" kern="1200" dirty="0"/>
-            <a:t>Simple to install,</a:t>
-          </a:r>
-        </a:p>
-        <a:p>
-          <a:pPr marL="0" lvl="0" indent="0" algn="l" defTabSz="755650">
-            <a:lnSpc>
-              <a:spcPct val="100000"/>
-            </a:lnSpc>
-            <a:spcBef>
-              <a:spcPct val="0"/>
-            </a:spcBef>
-            <a:spcAft>
-              <a:spcPct val="35000"/>
-            </a:spcAft>
-            <a:buNone/>
-            <a:defRPr b="1"/>
-          </a:pPr>
-          <a:r>
-            <a:rPr lang="en-US" sz="1700" kern="1200" dirty="0"/>
-            <a:t>Simple to run…</a:t>
-          </a:r>
-        </a:p>
-      </dsp:txBody>
-      <dsp:txXfrm>
-        <a:off x="0" y="0"/>
-        <a:ext cx="2587153" cy="846926"/>
-      </dsp:txXfrm>
-    </dsp:sp>
-    <dsp:sp modelId="{5C90C3CA-0AA3-4EBE-B50C-5D1938624D21}">
-      <dsp:nvSpPr>
-        <dsp:cNvPr id="0" name=""/>
-        <dsp:cNvSpPr/>
-      </dsp:nvSpPr>
-      <dsp:spPr>
-        <a:xfrm>
-          <a:off x="0" y="846926"/>
-          <a:ext cx="2587153" cy="2238564"/>
-        </a:xfrm>
-        <a:prstGeom prst="rect">
-          <a:avLst/>
-        </a:prstGeom>
-        <a:noFill/>
-        <a:ln>
-          <a:noFill/>
-        </a:ln>
-        <a:effectLst/>
-      </dsp:spPr>
-      <dsp:style>
-        <a:lnRef idx="0">
-          <a:scrgbClr r="0" g="0" b="0"/>
-        </a:lnRef>
-        <a:fillRef idx="0">
-          <a:scrgbClr r="0" g="0" b="0"/>
-        </a:fillRef>
-        <a:effectRef idx="0">
-          <a:scrgbClr r="0" g="0" b="0"/>
-        </a:effectRef>
-        <a:fontRef idx="minor"/>
-      </dsp:style>
-      <dsp:txBody>
-        <a:bodyPr spcFirstLastPara="0" vert="horz" wrap="square" lIns="137160" tIns="16510" rIns="16510" bIns="16510" numCol="1" spcCol="1270" anchor="t" anchorCtr="0">
-          <a:noAutofit/>
-        </a:bodyPr>
-        <a:lstStyle/>
-        <a:p>
-          <a:pPr marL="0" lvl="0" indent="0" algn="l" defTabSz="577850">
-            <a:lnSpc>
-              <a:spcPct val="100000"/>
-            </a:lnSpc>
-            <a:spcBef>
-              <a:spcPct val="0"/>
-            </a:spcBef>
-            <a:spcAft>
-              <a:spcPct val="35000"/>
-            </a:spcAft>
-            <a:buNone/>
-          </a:pPr>
-          <a:r>
-            <a:rPr lang="en-US" sz="1300" kern="1200" dirty="0"/>
-            <a:t>MIND Server gets installed as standard YottaDB plugin on top of your YottaDB installation with a one-liner command.</a:t>
-          </a:r>
-        </a:p>
-        <a:p>
-          <a:pPr marL="0" lvl="0" indent="0" algn="l" defTabSz="577850">
-            <a:lnSpc>
-              <a:spcPct val="100000"/>
-            </a:lnSpc>
-            <a:spcBef>
-              <a:spcPct val="0"/>
-            </a:spcBef>
-            <a:spcAft>
-              <a:spcPct val="35000"/>
-            </a:spcAft>
-            <a:buNone/>
-          </a:pPr>
-          <a:r>
-            <a:rPr lang="en-US" sz="1300" kern="1200" dirty="0"/>
-            <a:t>You can then either run it directly of configure it using the .conf file or command line switches.</a:t>
-          </a:r>
-        </a:p>
-      </dsp:txBody>
-      <dsp:txXfrm>
-        <a:off x="0" y="846926"/>
-        <a:ext cx="2587153" cy="2238564"/>
-      </dsp:txXfrm>
-    </dsp:sp>
-    <dsp:sp modelId="{58CF0B87-5490-46B7-A456-64A277CB332C}">
-      <dsp:nvSpPr>
-        <dsp:cNvPr id="0" name=""/>
-        <dsp:cNvSpPr/>
-      </dsp:nvSpPr>
-      <dsp:spPr>
-        <a:xfrm>
-          <a:off x="2845869" y="0"/>
-          <a:ext cx="2587153" cy="846926"/>
-        </a:xfrm>
-        <a:prstGeom prst="rect">
-          <a:avLst/>
-        </a:prstGeom>
-        <a:noFill/>
-        <a:ln>
-          <a:noFill/>
-        </a:ln>
-        <a:effectLst/>
-      </dsp:spPr>
-      <dsp:style>
-        <a:lnRef idx="0">
-          <a:scrgbClr r="0" g="0" b="0"/>
-        </a:lnRef>
-        <a:fillRef idx="0">
-          <a:scrgbClr r="0" g="0" b="0"/>
-        </a:fillRef>
-        <a:effectRef idx="0">
-          <a:scrgbClr r="0" g="0" b="0"/>
-        </a:effectRef>
-        <a:fontRef idx="minor"/>
-      </dsp:style>
-      <dsp:txBody>
-        <a:bodyPr spcFirstLastPara="0" vert="horz" wrap="square" lIns="137160" tIns="21590" rIns="21590" bIns="21590" numCol="1" spcCol="1270" anchor="t" anchorCtr="0">
-          <a:noAutofit/>
-        </a:bodyPr>
-        <a:lstStyle/>
-        <a:p>
-          <a:pPr marL="0" lvl="0" indent="0" algn="l" defTabSz="755650">
-            <a:lnSpc>
-              <a:spcPct val="100000"/>
-            </a:lnSpc>
-            <a:spcBef>
-              <a:spcPct val="0"/>
-            </a:spcBef>
-            <a:spcAft>
-              <a:spcPct val="35000"/>
-            </a:spcAft>
-            <a:buNone/>
-            <a:defRPr b="1"/>
-          </a:pPr>
-          <a:r>
-            <a:rPr lang="en-US" sz="1700" kern="1200" dirty="0"/>
-            <a:t>Designed putting both MUMPS and back-end developers first</a:t>
-          </a:r>
-        </a:p>
-      </dsp:txBody>
-      <dsp:txXfrm>
-        <a:off x="2845869" y="0"/>
-        <a:ext cx="2587153" cy="846926"/>
-      </dsp:txXfrm>
-    </dsp:sp>
-    <dsp:sp modelId="{8BB355F9-6CC2-4480-9B7E-D892D65FD34C}">
-      <dsp:nvSpPr>
-        <dsp:cNvPr id="0" name=""/>
-        <dsp:cNvSpPr/>
-      </dsp:nvSpPr>
-      <dsp:spPr>
-        <a:xfrm>
-          <a:off x="2845869" y="927112"/>
-          <a:ext cx="2587153" cy="2238564"/>
-        </a:xfrm>
-        <a:prstGeom prst="rect">
-          <a:avLst/>
-        </a:prstGeom>
-        <a:noFill/>
-        <a:ln>
-          <a:noFill/>
-        </a:ln>
-        <a:effectLst/>
-      </dsp:spPr>
-      <dsp:style>
-        <a:lnRef idx="0">
-          <a:scrgbClr r="0" g="0" b="0"/>
-        </a:lnRef>
-        <a:fillRef idx="0">
-          <a:scrgbClr r="0" g="0" b="0"/>
-        </a:fillRef>
-        <a:effectRef idx="0">
-          <a:scrgbClr r="0" g="0" b="0"/>
-        </a:effectRef>
-        <a:fontRef idx="minor"/>
-      </dsp:style>
-      <dsp:txBody>
-        <a:bodyPr spcFirstLastPara="0" vert="horz" wrap="square" lIns="137160" tIns="16510" rIns="16510" bIns="16510" numCol="1" spcCol="1270" anchor="t" anchorCtr="0">
-          <a:noAutofit/>
-        </a:bodyPr>
-        <a:lstStyle/>
-        <a:p>
-          <a:pPr marL="0" lvl="0" indent="0" algn="l" defTabSz="577850">
-            <a:lnSpc>
-              <a:spcPct val="100000"/>
-            </a:lnSpc>
-            <a:spcBef>
-              <a:spcPct val="0"/>
-            </a:spcBef>
-            <a:spcAft>
-              <a:spcPct val="35000"/>
-            </a:spcAft>
-            <a:buNone/>
-          </a:pPr>
-          <a:r>
-            <a:rPr lang="en-US" sz="1300" kern="1200" dirty="0"/>
-            <a:t>Keeping in mind that back-end languages use data-types and Objects, we created data translators to move data to and from YottaDB.</a:t>
-          </a:r>
-        </a:p>
-        <a:p>
-          <a:pPr marL="0" lvl="0" indent="0" algn="l" defTabSz="577850">
-            <a:lnSpc>
-              <a:spcPct val="100000"/>
-            </a:lnSpc>
-            <a:spcBef>
-              <a:spcPct val="0"/>
-            </a:spcBef>
-            <a:spcAft>
-              <a:spcPct val="35000"/>
-            </a:spcAft>
-            <a:buNone/>
-          </a:pPr>
-          <a:r>
-            <a:rPr lang="en-US" sz="1300" kern="1200" dirty="0"/>
-            <a:t>And, of course, we support JSON in both directions.</a:t>
-          </a:r>
-        </a:p>
-      </dsp:txBody>
-      <dsp:txXfrm>
-        <a:off x="2845869" y="927112"/>
-        <a:ext cx="2587153" cy="2238564"/>
-      </dsp:txXfrm>
-    </dsp:sp>
-    <dsp:sp modelId="{E38D88DE-6630-449F-B815-64F25EB69547}">
-      <dsp:nvSpPr>
-        <dsp:cNvPr id="0" name=""/>
-        <dsp:cNvSpPr/>
-      </dsp:nvSpPr>
-      <dsp:spPr>
-        <a:xfrm>
-          <a:off x="5691738" y="0"/>
-          <a:ext cx="2587153" cy="846926"/>
-        </a:xfrm>
-        <a:prstGeom prst="rect">
-          <a:avLst/>
-        </a:prstGeom>
-        <a:noFill/>
-        <a:ln>
-          <a:noFill/>
-        </a:ln>
-        <a:effectLst/>
-      </dsp:spPr>
-      <dsp:style>
-        <a:lnRef idx="0">
-          <a:scrgbClr r="0" g="0" b="0"/>
-        </a:lnRef>
-        <a:fillRef idx="0">
-          <a:scrgbClr r="0" g="0" b="0"/>
-        </a:fillRef>
-        <a:effectRef idx="0">
-          <a:scrgbClr r="0" g="0" b="0"/>
-        </a:effectRef>
-        <a:fontRef idx="minor"/>
-      </dsp:style>
-      <dsp:txBody>
-        <a:bodyPr spcFirstLastPara="0" vert="horz" wrap="square" lIns="137160" tIns="21590" rIns="21590" bIns="21590" numCol="1" spcCol="1270" anchor="t" anchorCtr="0">
-          <a:noAutofit/>
-        </a:bodyPr>
-        <a:lstStyle/>
-        <a:p>
-          <a:pPr marL="0" lvl="0" indent="0" algn="l" defTabSz="755650">
-            <a:lnSpc>
-              <a:spcPct val="100000"/>
-            </a:lnSpc>
-            <a:spcBef>
-              <a:spcPct val="0"/>
-            </a:spcBef>
-            <a:spcAft>
-              <a:spcPct val="35000"/>
-            </a:spcAft>
-            <a:buNone/>
-            <a:defRPr b="1"/>
-          </a:pPr>
-          <a:r>
-            <a:rPr lang="en-US" sz="1700" kern="1200" dirty="0"/>
-            <a:t>ZERO coding needed in the client (back-end) driver.</a:t>
-          </a:r>
-        </a:p>
-      </dsp:txBody>
-      <dsp:txXfrm>
-        <a:off x="5691738" y="0"/>
-        <a:ext cx="2587153" cy="846926"/>
-      </dsp:txXfrm>
-    </dsp:sp>
-    <dsp:sp modelId="{6BD7537A-36A9-42F0-9C36-0D4BA2D0752A}">
-      <dsp:nvSpPr>
-        <dsp:cNvPr id="0" name=""/>
-        <dsp:cNvSpPr/>
-      </dsp:nvSpPr>
-      <dsp:spPr>
-        <a:xfrm>
-          <a:off x="5691738" y="846926"/>
-          <a:ext cx="2587153" cy="2238564"/>
-        </a:xfrm>
-        <a:prstGeom prst="rect">
-          <a:avLst/>
-        </a:prstGeom>
-        <a:noFill/>
-        <a:ln>
-          <a:noFill/>
-        </a:ln>
-        <a:effectLst/>
-      </dsp:spPr>
-      <dsp:style>
-        <a:lnRef idx="0">
-          <a:scrgbClr r="0" g="0" b="0"/>
-        </a:lnRef>
-        <a:fillRef idx="0">
-          <a:scrgbClr r="0" g="0" b="0"/>
-        </a:fillRef>
-        <a:effectRef idx="0">
-          <a:scrgbClr r="0" g="0" b="0"/>
-        </a:effectRef>
-        <a:fontRef idx="minor"/>
-      </dsp:style>
-      <dsp:txBody>
-        <a:bodyPr spcFirstLastPara="0" vert="horz" wrap="square" lIns="137160" tIns="16510" rIns="16510" bIns="16510" numCol="1" spcCol="1270" anchor="t" anchorCtr="0">
-          <a:noAutofit/>
-        </a:bodyPr>
-        <a:lstStyle/>
-        <a:p>
-          <a:pPr marL="0" lvl="0" indent="0" algn="l" defTabSz="577850">
-            <a:lnSpc>
-              <a:spcPct val="100000"/>
-            </a:lnSpc>
-            <a:spcBef>
-              <a:spcPct val="0"/>
-            </a:spcBef>
-            <a:spcAft>
-              <a:spcPct val="35000"/>
-            </a:spcAft>
-            <a:buNone/>
-          </a:pPr>
-          <a:r>
-            <a:rPr lang="en-US" sz="1300" kern="1200" dirty="0"/>
-            <a:t>Once you describe your MUMPS functions / procedure in a JSON file, they will “magically” appear in the client driver and ready to use.</a:t>
-          </a:r>
-        </a:p>
-        <a:p>
-          <a:pPr marL="0" lvl="0" indent="0" algn="l" defTabSz="577850">
-            <a:lnSpc>
-              <a:spcPct val="100000"/>
-            </a:lnSpc>
-            <a:spcBef>
-              <a:spcPct val="0"/>
-            </a:spcBef>
-            <a:spcAft>
-              <a:spcPct val="35000"/>
-            </a:spcAft>
-            <a:buNone/>
-          </a:pPr>
-          <a:r>
-            <a:rPr lang="en-US" sz="1300" kern="1200" dirty="0"/>
-            <a:t>Additionally, they will also perform validation of the supplied parameters.</a:t>
-          </a:r>
-        </a:p>
-      </dsp:txBody>
-      <dsp:txXfrm>
-        <a:off x="5691738" y="846926"/>
-        <a:ext cx="2587153" cy="2238564"/>
       </dsp:txXfrm>
     </dsp:sp>
   </dsp:spTree>
@@ -8328,229 +6995,6 @@
 </dgm:layoutDef>
 </file>
 
-<file path=ppt/diagrams/layout4.xml><?xml version="1.0" encoding="utf-8"?>
-<dgm:layoutDef xmlns:dgm="http://schemas.openxmlformats.org/drawingml/2006/diagram" xmlns:a="http://schemas.openxmlformats.org/drawingml/2006/main" uniqueId="urn:microsoft.com/office/officeart/2024/3/layout/hArchList1">
-  <dgm:title val="Horizontal Text Blocks"/>
-  <dgm:desc val="Short bits of text with formatted headers. Use as an easier-to-read alternative to a bulleted list."/>
-  <dgm:catLst>
-    <dgm:cat type="list" pri="100"/>
-    <dgm:cat type="timeline" pri="500"/>
-    <dgm:cat type="process" pri="600"/>
-  </dgm:catLst>
-  <dgm:sampData>
-    <dgm:dataModel>
-      <dgm:ptLst>
-        <dgm:pt modelId="0" type="doc"/>
-        <dgm:pt modelId="1">
-          <dgm:prSet phldr="1"/>
-        </dgm:pt>
-        <dgm:pt modelId="2">
-          <dgm:prSet phldr="1"/>
-        </dgm:pt>
-        <dgm:pt modelId="3">
-          <dgm:prSet phldr="1"/>
-        </dgm:pt>
-        <dgm:pt modelId="4">
-          <dgm:prSet phldr="1"/>
-        </dgm:pt>
-      </dgm:ptLst>
-      <dgm:cxnLst>
-        <dgm:cxn modelId="7" srcId="0" destId="1" srcOrd="0" destOrd="0"/>
-        <dgm:cxn modelId="8" srcId="0" destId="2" srcOrd="1" destOrd="0"/>
-        <dgm:cxn modelId="9" srcId="0" destId="3" srcOrd="2" destOrd="0"/>
-        <dgm:cxn modelId="10" srcId="0" destId="4" srcOrd="3" destOrd="0"/>
-      </dgm:cxnLst>
-      <dgm:bg/>
-      <dgm:whole/>
-    </dgm:dataModel>
-  </dgm:sampData>
-  <dgm:styleData>
-    <dgm:dataModel>
-      <dgm:ptLst>
-        <dgm:pt modelId="0" type="doc"/>
-        <dgm:pt modelId="1"/>
-        <dgm:pt modelId="2"/>
-      </dgm:ptLst>
-      <dgm:cxnLst>
-        <dgm:cxn modelId="3" srcId="0" destId="1" srcOrd="0" destOrd="0"/>
-        <dgm:cxn modelId="4" srcId="0" destId="2" srcOrd="1" destOrd="0"/>
-      </dgm:cxnLst>
-      <dgm:bg/>
-      <dgm:whole/>
-    </dgm:dataModel>
-  </dgm:styleData>
-  <dgm:clrData>
-    <dgm:dataModel>
-      <dgm:ptLst>
-        <dgm:pt modelId="0" type="doc"/>
-        <dgm:pt modelId="1"/>
-        <dgm:pt modelId="2"/>
-        <dgm:pt modelId="3"/>
-        <dgm:pt modelId="4"/>
-      </dgm:ptLst>
-      <dgm:cxnLst>
-        <dgm:cxn modelId="5" srcId="0" destId="1" srcOrd="0" destOrd="0"/>
-        <dgm:cxn modelId="6" srcId="0" destId="2" srcOrd="1" destOrd="0"/>
-        <dgm:cxn modelId="7" srcId="0" destId="3" srcOrd="2" destOrd="0"/>
-        <dgm:cxn modelId="8" srcId="0" destId="4" srcOrd="3" destOrd="0"/>
-      </dgm:cxnLst>
-      <dgm:bg/>
-      <dgm:whole/>
-    </dgm:dataModel>
-  </dgm:clrData>
-  <dgm:layoutNode name="Name0">
-    <dgm:varLst>
-      <dgm:dir/>
-      <dgm:resizeHandles val="exact"/>
-    </dgm:varLst>
-    <dgm:choose name="Name1">
-      <dgm:if name="Name2" func="var" arg="dir" op="equ" val="norm">
-        <dgm:alg type="lin">
-          <dgm:param type="vertAlign" val="t"/>
-          <dgm:param type="horzAlign" val="l"/>
-        </dgm:alg>
-      </dgm:if>
-      <dgm:else name="Name3">
-        <dgm:alg type="lin">
-          <dgm:param type="vertAlign" val="t"/>
-          <dgm:param type="horzAlign" val="r"/>
-        </dgm:alg>
-      </dgm:else>
-    </dgm:choose>
-    <dgm:presOf/>
-    <dgm:constrLst>
-      <dgm:constr type="primFontSz" for="des" forName="pictRect" op="equ" val="18"/>
-      <dgm:constr type="primFontSz" for="des" forName="textRect" refType="primFontSz" refFor="des" refForName="pictRect" op="equ" fact="0.77"/>
-      <dgm:constr type="w" for="ch" forName="compNode" refType="w"/>
-      <dgm:constr type="h" for="ch" forName="compNode" refType="h"/>
-      <dgm:constr type="h" for="des" forName="pictRect" op="equ"/>
-      <dgm:constr type="h" for="des" forName="pictRect" refType="primFontSz" refFor="des" refForName="pictRect" fact="3"/>
-      <dgm:constr type="w" for="ch" ptType="sibTrans" refType="w" refFor="ch" refForName="compNode" op="equ" fact="0.1"/>
-      <dgm:constr type="sp" refType="w" refFor="ch" refForName="compNode" op="equ" fact="0.1"/>
-    </dgm:constrLst>
-    <dgm:ruleLst/>
-    <dgm:forEach name="Name4" axis="ch" ptType="node" cnt="20">
-      <dgm:layoutNode name="compNode">
-        <dgm:alg type="composite"/>
-        <dgm:shape xmlns:r="http://schemas.openxmlformats.org/officeDocument/2006/relationships" r:blip="">
-          <dgm:adjLst/>
-        </dgm:shape>
-        <dgm:presOf axis="self"/>
-        <dgm:constrLst>
-          <dgm:constr type="h" for="ch" forName="pictRect" refType="h" fact="0.1"/>
-          <dgm:constr type="l" for="ch" forName="pictRect"/>
-          <dgm:constr type="t" for="ch" forName="pictRect"/>
-          <dgm:constr type="l" for="ch" forName="textRect"/>
-          <dgm:constr type="t" for="ch" forName="textRect" refType="b" refFor="ch" refForName="pictRect"/>
-        </dgm:constrLst>
-        <dgm:ruleLst/>
-        <dgm:layoutNode name="pictRect" styleLbl="revTx">
-          <dgm:varLst>
-            <dgm:chMax val="0"/>
-            <dgm:bulletEnabled/>
-          </dgm:varLst>
-          <dgm:alg type="tx">
-            <dgm:param type="parTxLTRAlign" val="l"/>
-            <dgm:param type="parTxRTLAlign" val="r"/>
-            <dgm:param type="txAnchorVert" val="t"/>
-          </dgm:alg>
-          <dgm:shape xmlns:r="http://schemas.openxmlformats.org/officeDocument/2006/relationships" type="rect" r:blip="">
-            <dgm:adjLst/>
-          </dgm:shape>
-          <dgm:presOf axis="self"/>
-          <dgm:choose name="choosePictRectConstraints">
-            <dgm:if name="ifPictRectConstraints" func="var" arg="dir" op="equ" val="norm">
-              <dgm:constrLst>
-                <dgm:constr type="h" refType="w" op="lte" fact="0.4"/>
-                <dgm:constr type="lMarg" val="10.8"/>
-                <dgm:constr type="rMarg" refType="primFontSz" fact="0.1"/>
-                <dgm:constr type="tMarg" refType="primFontSz" fact="0.1"/>
-                <dgm:constr type="bMarg" refType="primFontSz" fact="0.1"/>
-              </dgm:constrLst>
-            </dgm:if>
-            <dgm:else name="elsePictRectConstraints">
-              <dgm:constrLst>
-                <dgm:constr type="lMarg" refType="primFontSz" fact="0.1"/>
-                <dgm:constr type="rMarg" val="10.8"/>
-                <dgm:constr type="tMarg" refType="primFontSz" fact="0.1"/>
-                <dgm:constr type="bMarg" refType="primFontSz" fact="0.1"/>
-              </dgm:constrLst>
-            </dgm:else>
-          </dgm:choose>
-          <dgm:ruleLst>
-            <dgm:rule type="h" val="INF" fact="NaN" max="NaN"/>
-            <dgm:rule type="primFontSz" val="5" fact="NaN" max="NaN"/>
-          </dgm:ruleLst>
-        </dgm:layoutNode>
-        <dgm:layoutNode name="textRect" styleLbl="revTx">
-          <dgm:varLst>
-            <dgm:bulletEnabled/>
-          </dgm:varLst>
-          <dgm:alg type="tx">
-            <dgm:param type="parTxLTRAlign" val="l"/>
-            <dgm:param type="parTxRTLAlign" val="r"/>
-            <dgm:param type="txAnchorVert" val="t"/>
-          </dgm:alg>
-          <dgm:shape xmlns:r="http://schemas.openxmlformats.org/officeDocument/2006/relationships" type="rect" r:blip="">
-            <dgm:adjLst/>
-          </dgm:shape>
-          <dgm:presOf axis="des" ptType="node"/>
-          <dgm:choose name="chooseTextRectConstraints">
-            <dgm:if name="ifTextRectConstraints" func="var" arg="dir" op="equ" val="norm">
-              <dgm:constrLst>
-                <dgm:constr type="lMarg" val="10.8"/>
-                <dgm:constr type="rMarg" refType="primFontSz" fact="0.1"/>
-                <dgm:constr type="tMarg" refType="primFontSz" fact="0.1"/>
-                <dgm:constr type="bMarg" refType="primFontSz" fact="0.1"/>
-              </dgm:constrLst>
-            </dgm:if>
-            <dgm:else name="elseTextRectConstraints">
-              <dgm:constrLst>
-                <dgm:constr type="lMarg" refType="primFontSz" fact="0.1"/>
-                <dgm:constr type="rMarg" val="10.8"/>
-                <dgm:constr type="tMarg" refType="primFontSz" fact="0.1"/>
-                <dgm:constr type="bMarg" refType="primFontSz" fact="0.1"/>
-              </dgm:constrLst>
-            </dgm:else>
-          </dgm:choose>
-          <dgm:ruleLst>
-            <dgm:rule type="primFontSz" val="5" fact="NaN" max="NaN"/>
-          </dgm:ruleLst>
-        </dgm:layoutNode>
-      </dgm:layoutNode>
-      <dgm:forEach name="Name5" axis="followSib" ptType="sibTrans" cnt="1">
-        <dgm:layoutNode name="sibTrans">
-          <dgm:alg type="sp"/>
-          <dgm:shape xmlns:r="http://schemas.openxmlformats.org/officeDocument/2006/relationships" type="rect" r:blip="" hideGeom="1">
-            <dgm:adjLst/>
-          </dgm:shape>
-          <dgm:presOf axis="self"/>
-          <dgm:constrLst/>
-          <dgm:ruleLst/>
-        </dgm:layoutNode>
-      </dgm:forEach>
-    </dgm:forEach>
-  </dgm:layoutNode>
-  <dgm:extLst>
-    <a:ext uri="{68A01E43-0DF5-4B5B-8FA6-DAF915123BFB}">
-      <dgm1612:lstStyle xmlns:dgm1612="http://schemas.microsoft.com/office/drawing/2016/12/diagram">
-        <a:lvl1pPr>
-          <a:lnSpc>
-            <a:spcPct val="100000"/>
-          </a:lnSpc>
-          <a:defRPr b="1"/>
-        </a:lvl1pPr>
-        <a:lvl2pPr>
-          <a:lnSpc>
-            <a:spcPct val="100000"/>
-          </a:lnSpc>
-        </a:lvl2pPr>
-      </dgm1612:lstStyle>
-    </a:ext>
-  </dgm:extLst>
-</dgm:layoutDef>
-</file>
-
 <file path=ppt/diagrams/quickStyle1.xml><?xml version="1.0" encoding="utf-8"?>
 <dgm:styleDef xmlns:dgm="http://schemas.openxmlformats.org/drawingml/2006/diagram" xmlns:a="http://schemas.openxmlformats.org/drawingml/2006/main" uniqueId="urn:microsoft.com/office/officeart/2005/8/quickstyle/simple1">
   <dgm:title val=""/>
@@ -10620,1040 +9064,6 @@
 </file>
 
 <file path=ppt/diagrams/quickStyle3.xml><?xml version="1.0" encoding="utf-8"?>
-<dgm:styleDef xmlns:dgm="http://schemas.openxmlformats.org/drawingml/2006/diagram" xmlns:a="http://schemas.openxmlformats.org/drawingml/2006/main" uniqueId="urn:microsoft.com/office/officeart/2005/8/quickstyle/simple1">
-  <dgm:title val=""/>
-  <dgm:desc val=""/>
-  <dgm:catLst>
-    <dgm:cat type="simple" pri="10100"/>
-  </dgm:catLst>
-  <dgm:scene3d>
-    <a:camera prst="orthographicFront"/>
-    <a:lightRig rig="threePt" dir="t"/>
-  </dgm:scene3d>
-  <dgm:styleLbl name="node0">
-    <dgm:scene3d>
-      <a:camera prst="orthographicFront"/>
-      <a:lightRig rig="threePt" dir="t"/>
-    </dgm:scene3d>
-    <dgm:sp3d/>
-    <dgm:txPr/>
-    <dgm:style>
-      <a:lnRef idx="2">
-        <a:scrgbClr r="0" g="0" b="0"/>
-      </a:lnRef>
-      <a:fillRef idx="1">
-        <a:scrgbClr r="0" g="0" b="0"/>
-      </a:fillRef>
-      <a:effectRef idx="0">
-        <a:scrgbClr r="0" g="0" b="0"/>
-      </a:effectRef>
-      <a:fontRef idx="minor">
-        <a:schemeClr val="lt1"/>
-      </a:fontRef>
-    </dgm:style>
-  </dgm:styleLbl>
-  <dgm:styleLbl name="lnNode1">
-    <dgm:scene3d>
-      <a:camera prst="orthographicFront"/>
-      <a:lightRig rig="threePt" dir="t"/>
-    </dgm:scene3d>
-    <dgm:sp3d/>
-    <dgm:txPr/>
-    <dgm:style>
-      <a:lnRef idx="2">
-        <a:scrgbClr r="0" g="0" b="0"/>
-      </a:lnRef>
-      <a:fillRef idx="1">
-        <a:scrgbClr r="0" g="0" b="0"/>
-      </a:fillRef>
-      <a:effectRef idx="0">
-        <a:scrgbClr r="0" g="0" b="0"/>
-      </a:effectRef>
-      <a:fontRef idx="minor">
-        <a:schemeClr val="lt1"/>
-      </a:fontRef>
-    </dgm:style>
-  </dgm:styleLbl>
-  <dgm:styleLbl name="vennNode1">
-    <dgm:scene3d>
-      <a:camera prst="orthographicFront"/>
-      <a:lightRig rig="threePt" dir="t"/>
-    </dgm:scene3d>
-    <dgm:sp3d/>
-    <dgm:txPr/>
-    <dgm:style>
-      <a:lnRef idx="2">
-        <a:scrgbClr r="0" g="0" b="0"/>
-      </a:lnRef>
-      <a:fillRef idx="1">
-        <a:scrgbClr r="0" g="0" b="0"/>
-      </a:fillRef>
-      <a:effectRef idx="0">
-        <a:scrgbClr r="0" g="0" b="0"/>
-      </a:effectRef>
-      <a:fontRef idx="minor">
-        <a:schemeClr val="tx1"/>
-      </a:fontRef>
-    </dgm:style>
-  </dgm:styleLbl>
-  <dgm:styleLbl name="alignNode1">
-    <dgm:scene3d>
-      <a:camera prst="orthographicFront"/>
-      <a:lightRig rig="threePt" dir="t"/>
-    </dgm:scene3d>
-    <dgm:sp3d/>
-    <dgm:txPr/>
-    <dgm:style>
-      <a:lnRef idx="2">
-        <a:scrgbClr r="0" g="0" b="0"/>
-      </a:lnRef>
-      <a:fillRef idx="1">
-        <a:scrgbClr r="0" g="0" b="0"/>
-      </a:fillRef>
-      <a:effectRef idx="0">
-        <a:scrgbClr r="0" g="0" b="0"/>
-      </a:effectRef>
-      <a:fontRef idx="minor">
-        <a:schemeClr val="lt1"/>
-      </a:fontRef>
-    </dgm:style>
-  </dgm:styleLbl>
-  <dgm:styleLbl name="node1">
-    <dgm:scene3d>
-      <a:camera prst="orthographicFront"/>
-      <a:lightRig rig="threePt" dir="t"/>
-    </dgm:scene3d>
-    <dgm:sp3d/>
-    <dgm:txPr/>
-    <dgm:style>
-      <a:lnRef idx="2">
-        <a:scrgbClr r="0" g="0" b="0"/>
-      </a:lnRef>
-      <a:fillRef idx="1">
-        <a:scrgbClr r="0" g="0" b="0"/>
-      </a:fillRef>
-      <a:effectRef idx="0">
-        <a:scrgbClr r="0" g="0" b="0"/>
-      </a:effectRef>
-      <a:fontRef idx="minor">
-        <a:schemeClr val="lt1"/>
-      </a:fontRef>
-    </dgm:style>
-  </dgm:styleLbl>
-  <dgm:styleLbl name="node2">
-    <dgm:scene3d>
-      <a:camera prst="orthographicFront"/>
-      <a:lightRig rig="threePt" dir="t"/>
-    </dgm:scene3d>
-    <dgm:sp3d/>
-    <dgm:txPr/>
-    <dgm:style>
-      <a:lnRef idx="2">
-        <a:scrgbClr r="0" g="0" b="0"/>
-      </a:lnRef>
-      <a:fillRef idx="1">
-        <a:scrgbClr r="0" g="0" b="0"/>
-      </a:fillRef>
-      <a:effectRef idx="0">
-        <a:scrgbClr r="0" g="0" b="0"/>
-      </a:effectRef>
-      <a:fontRef idx="minor">
-        <a:schemeClr val="lt1"/>
-      </a:fontRef>
-    </dgm:style>
-  </dgm:styleLbl>
-  <dgm:styleLbl name="node3">
-    <dgm:scene3d>
-      <a:camera prst="orthographicFront"/>
-      <a:lightRig rig="threePt" dir="t"/>
-    </dgm:scene3d>
-    <dgm:sp3d/>
-    <dgm:txPr/>
-    <dgm:style>
-      <a:lnRef idx="2">
-        <a:scrgbClr r="0" g="0" b="0"/>
-      </a:lnRef>
-      <a:fillRef idx="1">
-        <a:scrgbClr r="0" g="0" b="0"/>
-      </a:fillRef>
-      <a:effectRef idx="0">
-        <a:scrgbClr r="0" g="0" b="0"/>
-      </a:effectRef>
-      <a:fontRef idx="minor">
-        <a:schemeClr val="lt1"/>
-      </a:fontRef>
-    </dgm:style>
-  </dgm:styleLbl>
-  <dgm:styleLbl name="node4">
-    <dgm:scene3d>
-      <a:camera prst="orthographicFront"/>
-      <a:lightRig rig="threePt" dir="t"/>
-    </dgm:scene3d>
-    <dgm:sp3d/>
-    <dgm:txPr/>
-    <dgm:style>
-      <a:lnRef idx="2">
-        <a:scrgbClr r="0" g="0" b="0"/>
-      </a:lnRef>
-      <a:fillRef idx="1">
-        <a:scrgbClr r="0" g="0" b="0"/>
-      </a:fillRef>
-      <a:effectRef idx="0">
-        <a:scrgbClr r="0" g="0" b="0"/>
-      </a:effectRef>
-      <a:fontRef idx="minor">
-        <a:schemeClr val="lt1"/>
-      </a:fontRef>
-    </dgm:style>
-  </dgm:styleLbl>
-  <dgm:styleLbl name="fgImgPlace1">
-    <dgm:scene3d>
-      <a:camera prst="orthographicFront"/>
-      <a:lightRig rig="threePt" dir="t"/>
-    </dgm:scene3d>
-    <dgm:sp3d/>
-    <dgm:txPr/>
-    <dgm:style>
-      <a:lnRef idx="2">
-        <a:scrgbClr r="0" g="0" b="0"/>
-      </a:lnRef>
-      <a:fillRef idx="1">
-        <a:scrgbClr r="0" g="0" b="0"/>
-      </a:fillRef>
-      <a:effectRef idx="0">
-        <a:scrgbClr r="0" g="0" b="0"/>
-      </a:effectRef>
-      <a:fontRef idx="minor"/>
-    </dgm:style>
-  </dgm:styleLbl>
-  <dgm:styleLbl name="alignImgPlace1">
-    <dgm:scene3d>
-      <a:camera prst="orthographicFront"/>
-      <a:lightRig rig="threePt" dir="t"/>
-    </dgm:scene3d>
-    <dgm:sp3d/>
-    <dgm:txPr/>
-    <dgm:style>
-      <a:lnRef idx="2">
-        <a:scrgbClr r="0" g="0" b="0"/>
-      </a:lnRef>
-      <a:fillRef idx="1">
-        <a:scrgbClr r="0" g="0" b="0"/>
-      </a:fillRef>
-      <a:effectRef idx="0">
-        <a:scrgbClr r="0" g="0" b="0"/>
-      </a:effectRef>
-      <a:fontRef idx="minor"/>
-    </dgm:style>
-  </dgm:styleLbl>
-  <dgm:styleLbl name="bgImgPlace1">
-    <dgm:scene3d>
-      <a:camera prst="orthographicFront"/>
-      <a:lightRig rig="threePt" dir="t"/>
-    </dgm:scene3d>
-    <dgm:sp3d/>
-    <dgm:txPr/>
-    <dgm:style>
-      <a:lnRef idx="2">
-        <a:scrgbClr r="0" g="0" b="0"/>
-      </a:lnRef>
-      <a:fillRef idx="1">
-        <a:scrgbClr r="0" g="0" b="0"/>
-      </a:fillRef>
-      <a:effectRef idx="0">
-        <a:scrgbClr r="0" g="0" b="0"/>
-      </a:effectRef>
-      <a:fontRef idx="minor"/>
-    </dgm:style>
-  </dgm:styleLbl>
-  <dgm:styleLbl name="sibTrans2D1">
-    <dgm:scene3d>
-      <a:camera prst="orthographicFront"/>
-      <a:lightRig rig="threePt" dir="t"/>
-    </dgm:scene3d>
-    <dgm:sp3d/>
-    <dgm:txPr/>
-    <dgm:style>
-      <a:lnRef idx="0">
-        <a:scrgbClr r="0" g="0" b="0"/>
-      </a:lnRef>
-      <a:fillRef idx="1">
-        <a:scrgbClr r="0" g="0" b="0"/>
-      </a:fillRef>
-      <a:effectRef idx="0">
-        <a:scrgbClr r="0" g="0" b="0"/>
-      </a:effectRef>
-      <a:fontRef idx="minor">
-        <a:schemeClr val="lt1"/>
-      </a:fontRef>
-    </dgm:style>
-  </dgm:styleLbl>
-  <dgm:styleLbl name="fgSibTrans2D1">
-    <dgm:scene3d>
-      <a:camera prst="orthographicFront"/>
-      <a:lightRig rig="threePt" dir="t"/>
-    </dgm:scene3d>
-    <dgm:sp3d/>
-    <dgm:txPr/>
-    <dgm:style>
-      <a:lnRef idx="0">
-        <a:scrgbClr r="0" g="0" b="0"/>
-      </a:lnRef>
-      <a:fillRef idx="1">
-        <a:scrgbClr r="0" g="0" b="0"/>
-      </a:fillRef>
-      <a:effectRef idx="0">
-        <a:scrgbClr r="0" g="0" b="0"/>
-      </a:effectRef>
-      <a:fontRef idx="minor">
-        <a:schemeClr val="lt1"/>
-      </a:fontRef>
-    </dgm:style>
-  </dgm:styleLbl>
-  <dgm:styleLbl name="bgSibTrans2D1">
-    <dgm:scene3d>
-      <a:camera prst="orthographicFront"/>
-      <a:lightRig rig="threePt" dir="t"/>
-    </dgm:scene3d>
-    <dgm:sp3d/>
-    <dgm:txPr/>
-    <dgm:style>
-      <a:lnRef idx="0">
-        <a:scrgbClr r="0" g="0" b="0"/>
-      </a:lnRef>
-      <a:fillRef idx="1">
-        <a:scrgbClr r="0" g="0" b="0"/>
-      </a:fillRef>
-      <a:effectRef idx="0">
-        <a:scrgbClr r="0" g="0" b="0"/>
-      </a:effectRef>
-      <a:fontRef idx="minor">
-        <a:schemeClr val="lt1"/>
-      </a:fontRef>
-    </dgm:style>
-  </dgm:styleLbl>
-  <dgm:styleLbl name="sibTrans1D1">
-    <dgm:scene3d>
-      <a:camera prst="orthographicFront"/>
-      <a:lightRig rig="threePt" dir="t"/>
-    </dgm:scene3d>
-    <dgm:sp3d/>
-    <dgm:txPr/>
-    <dgm:style>
-      <a:lnRef idx="1">
-        <a:scrgbClr r="0" g="0" b="0"/>
-      </a:lnRef>
-      <a:fillRef idx="0">
-        <a:scrgbClr r="0" g="0" b="0"/>
-      </a:fillRef>
-      <a:effectRef idx="0">
-        <a:scrgbClr r="0" g="0" b="0"/>
-      </a:effectRef>
-      <a:fontRef idx="minor"/>
-    </dgm:style>
-  </dgm:styleLbl>
-  <dgm:styleLbl name="callout">
-    <dgm:scene3d>
-      <a:camera prst="orthographicFront"/>
-      <a:lightRig rig="threePt" dir="t"/>
-    </dgm:scene3d>
-    <dgm:sp3d/>
-    <dgm:txPr/>
-    <dgm:style>
-      <a:lnRef idx="2">
-        <a:scrgbClr r="0" g="0" b="0"/>
-      </a:lnRef>
-      <a:fillRef idx="1">
-        <a:scrgbClr r="0" g="0" b="0"/>
-      </a:fillRef>
-      <a:effectRef idx="0">
-        <a:scrgbClr r="0" g="0" b="0"/>
-      </a:effectRef>
-      <a:fontRef idx="minor"/>
-    </dgm:style>
-  </dgm:styleLbl>
-  <dgm:styleLbl name="asst0">
-    <dgm:scene3d>
-      <a:camera prst="orthographicFront"/>
-      <a:lightRig rig="threePt" dir="t"/>
-    </dgm:scene3d>
-    <dgm:sp3d/>
-    <dgm:txPr/>
-    <dgm:style>
-      <a:lnRef idx="2">
-        <a:scrgbClr r="0" g="0" b="0"/>
-      </a:lnRef>
-      <a:fillRef idx="1">
-        <a:scrgbClr r="0" g="0" b="0"/>
-      </a:fillRef>
-      <a:effectRef idx="0">
-        <a:scrgbClr r="0" g="0" b="0"/>
-      </a:effectRef>
-      <a:fontRef idx="minor">
-        <a:schemeClr val="lt1"/>
-      </a:fontRef>
-    </dgm:style>
-  </dgm:styleLbl>
-  <dgm:styleLbl name="asst1">
-    <dgm:scene3d>
-      <a:camera prst="orthographicFront"/>
-      <a:lightRig rig="threePt" dir="t"/>
-    </dgm:scene3d>
-    <dgm:sp3d/>
-    <dgm:txPr/>
-    <dgm:style>
-      <a:lnRef idx="2">
-        <a:scrgbClr r="0" g="0" b="0"/>
-      </a:lnRef>
-      <a:fillRef idx="1">
-        <a:scrgbClr r="0" g="0" b="0"/>
-      </a:fillRef>
-      <a:effectRef idx="0">
-        <a:scrgbClr r="0" g="0" b="0"/>
-      </a:effectRef>
-      <a:fontRef idx="minor">
-        <a:schemeClr val="lt1"/>
-      </a:fontRef>
-    </dgm:style>
-  </dgm:styleLbl>
-  <dgm:styleLbl name="asst2">
-    <dgm:scene3d>
-      <a:camera prst="orthographicFront"/>
-      <a:lightRig rig="threePt" dir="t"/>
-    </dgm:scene3d>
-    <dgm:sp3d/>
-    <dgm:txPr/>
-    <dgm:style>
-      <a:lnRef idx="2">
-        <a:scrgbClr r="0" g="0" b="0"/>
-      </a:lnRef>
-      <a:fillRef idx="1">
-        <a:scrgbClr r="0" g="0" b="0"/>
-      </a:fillRef>
-      <a:effectRef idx="0">
-        <a:scrgbClr r="0" g="0" b="0"/>
-      </a:effectRef>
-      <a:fontRef idx="minor">
-        <a:schemeClr val="lt1"/>
-      </a:fontRef>
-    </dgm:style>
-  </dgm:styleLbl>
-  <dgm:styleLbl name="asst3">
-    <dgm:scene3d>
-      <a:camera prst="orthographicFront"/>
-      <a:lightRig rig="threePt" dir="t"/>
-    </dgm:scene3d>
-    <dgm:sp3d/>
-    <dgm:txPr/>
-    <dgm:style>
-      <a:lnRef idx="2">
-        <a:scrgbClr r="0" g="0" b="0"/>
-      </a:lnRef>
-      <a:fillRef idx="1">
-        <a:scrgbClr r="0" g="0" b="0"/>
-      </a:fillRef>
-      <a:effectRef idx="0">
-        <a:scrgbClr r="0" g="0" b="0"/>
-      </a:effectRef>
-      <a:fontRef idx="minor">
-        <a:schemeClr val="lt1"/>
-      </a:fontRef>
-    </dgm:style>
-  </dgm:styleLbl>
-  <dgm:styleLbl name="asst4">
-    <dgm:scene3d>
-      <a:camera prst="orthographicFront"/>
-      <a:lightRig rig="threePt" dir="t"/>
-    </dgm:scene3d>
-    <dgm:sp3d/>
-    <dgm:txPr/>
-    <dgm:style>
-      <a:lnRef idx="2">
-        <a:scrgbClr r="0" g="0" b="0"/>
-      </a:lnRef>
-      <a:fillRef idx="1">
-        <a:scrgbClr r="0" g="0" b="0"/>
-      </a:fillRef>
-      <a:effectRef idx="0">
-        <a:scrgbClr r="0" g="0" b="0"/>
-      </a:effectRef>
-      <a:fontRef idx="minor">
-        <a:schemeClr val="lt1"/>
-      </a:fontRef>
-    </dgm:style>
-  </dgm:styleLbl>
-  <dgm:styleLbl name="parChTrans2D1">
-    <dgm:scene3d>
-      <a:camera prst="orthographicFront"/>
-      <a:lightRig rig="threePt" dir="t"/>
-    </dgm:scene3d>
-    <dgm:sp3d/>
-    <dgm:txPr/>
-    <dgm:style>
-      <a:lnRef idx="2">
-        <a:scrgbClr r="0" g="0" b="0"/>
-      </a:lnRef>
-      <a:fillRef idx="1">
-        <a:scrgbClr r="0" g="0" b="0"/>
-      </a:fillRef>
-      <a:effectRef idx="0">
-        <a:scrgbClr r="0" g="0" b="0"/>
-      </a:effectRef>
-      <a:fontRef idx="minor">
-        <a:schemeClr val="lt1"/>
-      </a:fontRef>
-    </dgm:style>
-  </dgm:styleLbl>
-  <dgm:styleLbl name="parChTrans2D2">
-    <dgm:scene3d>
-      <a:camera prst="orthographicFront"/>
-      <a:lightRig rig="threePt" dir="t"/>
-    </dgm:scene3d>
-    <dgm:sp3d/>
-    <dgm:txPr/>
-    <dgm:style>
-      <a:lnRef idx="2">
-        <a:scrgbClr r="0" g="0" b="0"/>
-      </a:lnRef>
-      <a:fillRef idx="1">
-        <a:scrgbClr r="0" g="0" b="0"/>
-      </a:fillRef>
-      <a:effectRef idx="0">
-        <a:scrgbClr r="0" g="0" b="0"/>
-      </a:effectRef>
-      <a:fontRef idx="minor">
-        <a:schemeClr val="lt1"/>
-      </a:fontRef>
-    </dgm:style>
-  </dgm:styleLbl>
-  <dgm:styleLbl name="parChTrans2D3">
-    <dgm:scene3d>
-      <a:camera prst="orthographicFront"/>
-      <a:lightRig rig="threePt" dir="t"/>
-    </dgm:scene3d>
-    <dgm:sp3d/>
-    <dgm:txPr/>
-    <dgm:style>
-      <a:lnRef idx="2">
-        <a:scrgbClr r="0" g="0" b="0"/>
-      </a:lnRef>
-      <a:fillRef idx="1">
-        <a:scrgbClr r="0" g="0" b="0"/>
-      </a:fillRef>
-      <a:effectRef idx="0">
-        <a:scrgbClr r="0" g="0" b="0"/>
-      </a:effectRef>
-      <a:fontRef idx="minor">
-        <a:schemeClr val="lt1"/>
-      </a:fontRef>
-    </dgm:style>
-  </dgm:styleLbl>
-  <dgm:styleLbl name="parChTrans2D4">
-    <dgm:scene3d>
-      <a:camera prst="orthographicFront"/>
-      <a:lightRig rig="threePt" dir="t"/>
-    </dgm:scene3d>
-    <dgm:sp3d/>
-    <dgm:txPr/>
-    <dgm:style>
-      <a:lnRef idx="2">
-        <a:scrgbClr r="0" g="0" b="0"/>
-      </a:lnRef>
-      <a:fillRef idx="1">
-        <a:scrgbClr r="0" g="0" b="0"/>
-      </a:fillRef>
-      <a:effectRef idx="0">
-        <a:scrgbClr r="0" g="0" b="0"/>
-      </a:effectRef>
-      <a:fontRef idx="minor">
-        <a:schemeClr val="lt1"/>
-      </a:fontRef>
-    </dgm:style>
-  </dgm:styleLbl>
-  <dgm:styleLbl name="parChTrans1D1">
-    <dgm:scene3d>
-      <a:camera prst="orthographicFront"/>
-      <a:lightRig rig="threePt" dir="t"/>
-    </dgm:scene3d>
-    <dgm:sp3d/>
-    <dgm:txPr/>
-    <dgm:style>
-      <a:lnRef idx="2">
-        <a:scrgbClr r="0" g="0" b="0"/>
-      </a:lnRef>
-      <a:fillRef idx="0">
-        <a:scrgbClr r="0" g="0" b="0"/>
-      </a:fillRef>
-      <a:effectRef idx="0">
-        <a:scrgbClr r="0" g="0" b="0"/>
-      </a:effectRef>
-      <a:fontRef idx="minor"/>
-    </dgm:style>
-  </dgm:styleLbl>
-  <dgm:styleLbl name="parChTrans1D2">
-    <dgm:scene3d>
-      <a:camera prst="orthographicFront"/>
-      <a:lightRig rig="threePt" dir="t"/>
-    </dgm:scene3d>
-    <dgm:sp3d/>
-    <dgm:txPr/>
-    <dgm:style>
-      <a:lnRef idx="2">
-        <a:scrgbClr r="0" g="0" b="0"/>
-      </a:lnRef>
-      <a:fillRef idx="0">
-        <a:scrgbClr r="0" g="0" b="0"/>
-      </a:fillRef>
-      <a:effectRef idx="0">
-        <a:scrgbClr r="0" g="0" b="0"/>
-      </a:effectRef>
-      <a:fontRef idx="minor"/>
-    </dgm:style>
-  </dgm:styleLbl>
-  <dgm:styleLbl name="parChTrans1D3">
-    <dgm:scene3d>
-      <a:camera prst="orthographicFront"/>
-      <a:lightRig rig="threePt" dir="t"/>
-    </dgm:scene3d>
-    <dgm:sp3d/>
-    <dgm:txPr/>
-    <dgm:style>
-      <a:lnRef idx="2">
-        <a:scrgbClr r="0" g="0" b="0"/>
-      </a:lnRef>
-      <a:fillRef idx="0">
-        <a:scrgbClr r="0" g="0" b="0"/>
-      </a:fillRef>
-      <a:effectRef idx="0">
-        <a:scrgbClr r="0" g="0" b="0"/>
-      </a:effectRef>
-      <a:fontRef idx="minor"/>
-    </dgm:style>
-  </dgm:styleLbl>
-  <dgm:styleLbl name="parChTrans1D4">
-    <dgm:scene3d>
-      <a:camera prst="orthographicFront"/>
-      <a:lightRig rig="threePt" dir="t"/>
-    </dgm:scene3d>
-    <dgm:sp3d/>
-    <dgm:txPr/>
-    <dgm:style>
-      <a:lnRef idx="2">
-        <a:scrgbClr r="0" g="0" b="0"/>
-      </a:lnRef>
-      <a:fillRef idx="0">
-        <a:scrgbClr r="0" g="0" b="0"/>
-      </a:fillRef>
-      <a:effectRef idx="0">
-        <a:scrgbClr r="0" g="0" b="0"/>
-      </a:effectRef>
-      <a:fontRef idx="minor"/>
-    </dgm:style>
-  </dgm:styleLbl>
-  <dgm:styleLbl name="fgAcc1">
-    <dgm:scene3d>
-      <a:camera prst="orthographicFront"/>
-      <a:lightRig rig="threePt" dir="t"/>
-    </dgm:scene3d>
-    <dgm:sp3d/>
-    <dgm:txPr/>
-    <dgm:style>
-      <a:lnRef idx="2">
-        <a:scrgbClr r="0" g="0" b="0"/>
-      </a:lnRef>
-      <a:fillRef idx="1">
-        <a:scrgbClr r="0" g="0" b="0"/>
-      </a:fillRef>
-      <a:effectRef idx="0">
-        <a:scrgbClr r="0" g="0" b="0"/>
-      </a:effectRef>
-      <a:fontRef idx="minor"/>
-    </dgm:style>
-  </dgm:styleLbl>
-  <dgm:styleLbl name="conFgAcc1">
-    <dgm:scene3d>
-      <a:camera prst="orthographicFront"/>
-      <a:lightRig rig="threePt" dir="t"/>
-    </dgm:scene3d>
-    <dgm:sp3d/>
-    <dgm:txPr/>
-    <dgm:style>
-      <a:lnRef idx="2">
-        <a:scrgbClr r="0" g="0" b="0"/>
-      </a:lnRef>
-      <a:fillRef idx="1">
-        <a:scrgbClr r="0" g="0" b="0"/>
-      </a:fillRef>
-      <a:effectRef idx="0">
-        <a:scrgbClr r="0" g="0" b="0"/>
-      </a:effectRef>
-      <a:fontRef idx="minor"/>
-    </dgm:style>
-  </dgm:styleLbl>
-  <dgm:styleLbl name="alignAcc1">
-    <dgm:scene3d>
-      <a:camera prst="orthographicFront"/>
-      <a:lightRig rig="threePt" dir="t"/>
-    </dgm:scene3d>
-    <dgm:sp3d/>
-    <dgm:txPr/>
-    <dgm:style>
-      <a:lnRef idx="2">
-        <a:scrgbClr r="0" g="0" b="0"/>
-      </a:lnRef>
-      <a:fillRef idx="1">
-        <a:scrgbClr r="0" g="0" b="0"/>
-      </a:fillRef>
-      <a:effectRef idx="0">
-        <a:scrgbClr r="0" g="0" b="0"/>
-      </a:effectRef>
-      <a:fontRef idx="minor"/>
-    </dgm:style>
-  </dgm:styleLbl>
-  <dgm:styleLbl name="trAlignAcc1">
-    <dgm:scene3d>
-      <a:camera prst="orthographicFront"/>
-      <a:lightRig rig="threePt" dir="t"/>
-    </dgm:scene3d>
-    <dgm:sp3d/>
-    <dgm:txPr/>
-    <dgm:style>
-      <a:lnRef idx="1">
-        <a:scrgbClr r="0" g="0" b="0"/>
-      </a:lnRef>
-      <a:fillRef idx="1">
-        <a:scrgbClr r="0" g="0" b="0"/>
-      </a:fillRef>
-      <a:effectRef idx="0">
-        <a:scrgbClr r="0" g="0" b="0"/>
-      </a:effectRef>
-      <a:fontRef idx="minor"/>
-    </dgm:style>
-  </dgm:styleLbl>
-  <dgm:styleLbl name="bgAcc1">
-    <dgm:scene3d>
-      <a:camera prst="orthographicFront"/>
-      <a:lightRig rig="threePt" dir="t"/>
-    </dgm:scene3d>
-    <dgm:sp3d/>
-    <dgm:txPr/>
-    <dgm:style>
-      <a:lnRef idx="2">
-        <a:scrgbClr r="0" g="0" b="0"/>
-      </a:lnRef>
-      <a:fillRef idx="1">
-        <a:scrgbClr r="0" g="0" b="0"/>
-      </a:fillRef>
-      <a:effectRef idx="0">
-        <a:scrgbClr r="0" g="0" b="0"/>
-      </a:effectRef>
-      <a:fontRef idx="minor"/>
-    </dgm:style>
-  </dgm:styleLbl>
-  <dgm:styleLbl name="solidFgAcc1">
-    <dgm:scene3d>
-      <a:camera prst="orthographicFront"/>
-      <a:lightRig rig="threePt" dir="t"/>
-    </dgm:scene3d>
-    <dgm:sp3d/>
-    <dgm:txPr/>
-    <dgm:style>
-      <a:lnRef idx="2">
-        <a:scrgbClr r="0" g="0" b="0"/>
-      </a:lnRef>
-      <a:fillRef idx="1">
-        <a:scrgbClr r="0" g="0" b="0"/>
-      </a:fillRef>
-      <a:effectRef idx="0">
-        <a:scrgbClr r="0" g="0" b="0"/>
-      </a:effectRef>
-      <a:fontRef idx="minor"/>
-    </dgm:style>
-  </dgm:styleLbl>
-  <dgm:styleLbl name="solidAlignAcc1">
-    <dgm:scene3d>
-      <a:camera prst="orthographicFront"/>
-      <a:lightRig rig="threePt" dir="t"/>
-    </dgm:scene3d>
-    <dgm:sp3d/>
-    <dgm:txPr/>
-    <dgm:style>
-      <a:lnRef idx="2">
-        <a:scrgbClr r="0" g="0" b="0"/>
-      </a:lnRef>
-      <a:fillRef idx="1">
-        <a:scrgbClr r="0" g="0" b="0"/>
-      </a:fillRef>
-      <a:effectRef idx="0">
-        <a:scrgbClr r="0" g="0" b="0"/>
-      </a:effectRef>
-      <a:fontRef idx="minor"/>
-    </dgm:style>
-  </dgm:styleLbl>
-  <dgm:styleLbl name="solidBgAcc1">
-    <dgm:scene3d>
-      <a:camera prst="orthographicFront"/>
-      <a:lightRig rig="threePt" dir="t"/>
-    </dgm:scene3d>
-    <dgm:sp3d/>
-    <dgm:txPr/>
-    <dgm:style>
-      <a:lnRef idx="2">
-        <a:scrgbClr r="0" g="0" b="0"/>
-      </a:lnRef>
-      <a:fillRef idx="1">
-        <a:scrgbClr r="0" g="0" b="0"/>
-      </a:fillRef>
-      <a:effectRef idx="0">
-        <a:scrgbClr r="0" g="0" b="0"/>
-      </a:effectRef>
-      <a:fontRef idx="minor"/>
-    </dgm:style>
-  </dgm:styleLbl>
-  <dgm:styleLbl name="fgAccFollowNode1">
-    <dgm:scene3d>
-      <a:camera prst="orthographicFront"/>
-      <a:lightRig rig="threePt" dir="t"/>
-    </dgm:scene3d>
-    <dgm:sp3d/>
-    <dgm:txPr/>
-    <dgm:style>
-      <a:lnRef idx="2">
-        <a:scrgbClr r="0" g="0" b="0"/>
-      </a:lnRef>
-      <a:fillRef idx="1">
-        <a:scrgbClr r="0" g="0" b="0"/>
-      </a:fillRef>
-      <a:effectRef idx="0">
-        <a:scrgbClr r="0" g="0" b="0"/>
-      </a:effectRef>
-      <a:fontRef idx="minor"/>
-    </dgm:style>
-  </dgm:styleLbl>
-  <dgm:styleLbl name="alignAccFollowNode1">
-    <dgm:scene3d>
-      <a:camera prst="orthographicFront"/>
-      <a:lightRig rig="threePt" dir="t"/>
-    </dgm:scene3d>
-    <dgm:sp3d/>
-    <dgm:txPr/>
-    <dgm:style>
-      <a:lnRef idx="2">
-        <a:scrgbClr r="0" g="0" b="0"/>
-      </a:lnRef>
-      <a:fillRef idx="1">
-        <a:scrgbClr r="0" g="0" b="0"/>
-      </a:fillRef>
-      <a:effectRef idx="0">
-        <a:scrgbClr r="0" g="0" b="0"/>
-      </a:effectRef>
-      <a:fontRef idx="minor"/>
-    </dgm:style>
-  </dgm:styleLbl>
-  <dgm:styleLbl name="bgAccFollowNode1">
-    <dgm:scene3d>
-      <a:camera prst="orthographicFront"/>
-      <a:lightRig rig="threePt" dir="t"/>
-    </dgm:scene3d>
-    <dgm:sp3d/>
-    <dgm:txPr/>
-    <dgm:style>
-      <a:lnRef idx="2">
-        <a:scrgbClr r="0" g="0" b="0"/>
-      </a:lnRef>
-      <a:fillRef idx="1">
-        <a:scrgbClr r="0" g="0" b="0"/>
-      </a:fillRef>
-      <a:effectRef idx="0">
-        <a:scrgbClr r="0" g="0" b="0"/>
-      </a:effectRef>
-      <a:fontRef idx="minor"/>
-    </dgm:style>
-  </dgm:styleLbl>
-  <dgm:styleLbl name="fgAcc0">
-    <dgm:scene3d>
-      <a:camera prst="orthographicFront"/>
-      <a:lightRig rig="threePt" dir="t"/>
-    </dgm:scene3d>
-    <dgm:sp3d/>
-    <dgm:txPr/>
-    <dgm:style>
-      <a:lnRef idx="2">
-        <a:scrgbClr r="0" g="0" b="0"/>
-      </a:lnRef>
-      <a:fillRef idx="1">
-        <a:scrgbClr r="0" g="0" b="0"/>
-      </a:fillRef>
-      <a:effectRef idx="0">
-        <a:scrgbClr r="0" g="0" b="0"/>
-      </a:effectRef>
-      <a:fontRef idx="minor"/>
-    </dgm:style>
-  </dgm:styleLbl>
-  <dgm:styleLbl name="fgAcc2">
-    <dgm:scene3d>
-      <a:camera prst="orthographicFront"/>
-      <a:lightRig rig="threePt" dir="t"/>
-    </dgm:scene3d>
-    <dgm:sp3d/>
-    <dgm:txPr/>
-    <dgm:style>
-      <a:lnRef idx="2">
-        <a:scrgbClr r="0" g="0" b="0"/>
-      </a:lnRef>
-      <a:fillRef idx="1">
-        <a:scrgbClr r="0" g="0" b="0"/>
-      </a:fillRef>
-      <a:effectRef idx="0">
-        <a:scrgbClr r="0" g="0" b="0"/>
-      </a:effectRef>
-      <a:fontRef idx="minor"/>
-    </dgm:style>
-  </dgm:styleLbl>
-  <dgm:styleLbl name="fgAcc3">
-    <dgm:scene3d>
-      <a:camera prst="orthographicFront"/>
-      <a:lightRig rig="threePt" dir="t"/>
-    </dgm:scene3d>
-    <dgm:sp3d/>
-    <dgm:txPr/>
-    <dgm:style>
-      <a:lnRef idx="2">
-        <a:scrgbClr r="0" g="0" b="0"/>
-      </a:lnRef>
-      <a:fillRef idx="1">
-        <a:scrgbClr r="0" g="0" b="0"/>
-      </a:fillRef>
-      <a:effectRef idx="0">
-        <a:scrgbClr r="0" g="0" b="0"/>
-      </a:effectRef>
-      <a:fontRef idx="minor"/>
-    </dgm:style>
-  </dgm:styleLbl>
-  <dgm:styleLbl name="fgAcc4">
-    <dgm:scene3d>
-      <a:camera prst="orthographicFront"/>
-      <a:lightRig rig="threePt" dir="t"/>
-    </dgm:scene3d>
-    <dgm:sp3d/>
-    <dgm:txPr/>
-    <dgm:style>
-      <a:lnRef idx="2">
-        <a:scrgbClr r="0" g="0" b="0"/>
-      </a:lnRef>
-      <a:fillRef idx="1">
-        <a:scrgbClr r="0" g="0" b="0"/>
-      </a:fillRef>
-      <a:effectRef idx="0">
-        <a:scrgbClr r="0" g="0" b="0"/>
-      </a:effectRef>
-      <a:fontRef idx="minor"/>
-    </dgm:style>
-  </dgm:styleLbl>
-  <dgm:styleLbl name="bgShp">
-    <dgm:scene3d>
-      <a:camera prst="orthographicFront"/>
-      <a:lightRig rig="threePt" dir="t"/>
-    </dgm:scene3d>
-    <dgm:sp3d/>
-    <dgm:txPr/>
-    <dgm:style>
-      <a:lnRef idx="0">
-        <a:scrgbClr r="0" g="0" b="0"/>
-      </a:lnRef>
-      <a:fillRef idx="1">
-        <a:scrgbClr r="0" g="0" b="0"/>
-      </a:fillRef>
-      <a:effectRef idx="0">
-        <a:scrgbClr r="0" g="0" b="0"/>
-      </a:effectRef>
-      <a:fontRef idx="minor"/>
-    </dgm:style>
-  </dgm:styleLbl>
-  <dgm:styleLbl name="dkBgShp">
-    <dgm:scene3d>
-      <a:camera prst="orthographicFront"/>
-      <a:lightRig rig="threePt" dir="t"/>
-    </dgm:scene3d>
-    <dgm:sp3d/>
-    <dgm:txPr/>
-    <dgm:style>
-      <a:lnRef idx="0">
-        <a:scrgbClr r="0" g="0" b="0"/>
-      </a:lnRef>
-      <a:fillRef idx="1">
-        <a:scrgbClr r="0" g="0" b="0"/>
-      </a:fillRef>
-      <a:effectRef idx="0">
-        <a:scrgbClr r="0" g="0" b="0"/>
-      </a:effectRef>
-      <a:fontRef idx="minor"/>
-    </dgm:style>
-  </dgm:styleLbl>
-  <dgm:styleLbl name="trBgShp">
-    <dgm:scene3d>
-      <a:camera prst="orthographicFront"/>
-      <a:lightRig rig="threePt" dir="t"/>
-    </dgm:scene3d>
-    <dgm:sp3d/>
-    <dgm:txPr/>
-    <dgm:style>
-      <a:lnRef idx="0">
-        <a:scrgbClr r="0" g="0" b="0"/>
-      </a:lnRef>
-      <a:fillRef idx="1">
-        <a:scrgbClr r="0" g="0" b="0"/>
-      </a:fillRef>
-      <a:effectRef idx="0">
-        <a:scrgbClr r="0" g="0" b="0"/>
-      </a:effectRef>
-      <a:fontRef idx="minor"/>
-    </dgm:style>
-  </dgm:styleLbl>
-  <dgm:styleLbl name="fgShp">
-    <dgm:scene3d>
-      <a:camera prst="orthographicFront"/>
-      <a:lightRig rig="threePt" dir="t"/>
-    </dgm:scene3d>
-    <dgm:sp3d/>
-    <dgm:txPr/>
-    <dgm:style>
-      <a:lnRef idx="2">
-        <a:scrgbClr r="0" g="0" b="0"/>
-      </a:lnRef>
-      <a:fillRef idx="1">
-        <a:scrgbClr r="0" g="0" b="0"/>
-      </a:fillRef>
-      <a:effectRef idx="0">
-        <a:scrgbClr r="0" g="0" b="0"/>
-      </a:effectRef>
-      <a:fontRef idx="minor"/>
-    </dgm:style>
-  </dgm:styleLbl>
-  <dgm:styleLbl name="revTx">
-    <dgm:scene3d>
-      <a:camera prst="orthographicFront"/>
-      <a:lightRig rig="threePt" dir="t"/>
-    </dgm:scene3d>
-    <dgm:sp3d/>
-    <dgm:txPr/>
-    <dgm:style>
-      <a:lnRef idx="0">
-        <a:scrgbClr r="0" g="0" b="0"/>
-      </a:lnRef>
-      <a:fillRef idx="0">
-        <a:scrgbClr r="0" g="0" b="0"/>
-      </a:fillRef>
-      <a:effectRef idx="0">
-        <a:scrgbClr r="0" g="0" b="0"/>
-      </a:effectRef>
-      <a:fontRef idx="minor"/>
-    </dgm:style>
-  </dgm:styleLbl>
-</dgm:styleDef>
-</file>
-
-<file path=ppt/diagrams/quickStyle4.xml><?xml version="1.0" encoding="utf-8"?>
 <dgm:styleDef xmlns:dgm="http://schemas.openxmlformats.org/drawingml/2006/diagram" xmlns:a="http://schemas.openxmlformats.org/drawingml/2006/main" uniqueId="urn:microsoft.com/office/officeart/2005/8/quickstyle/simple1">
   <dgm:title val=""/>
   <dgm:desc val=""/>
@@ -13036,7 +10446,7 @@
           <a:p>
             <a:fld id="{3E30469F-474B-44E0-9013-119402DD7996}" type="datetimeFigureOut">
               <a:rPr lang="en-NL" smtClean="0"/>
-              <a:t>23/02/2026</a:t>
+              <a:t>27/02/2026</a:t>
             </a:fld>
             <a:endParaRPr lang="en-NL"/>
           </a:p>
@@ -14131,7 +11541,7 @@
           <a:p>
             <a:fld id="{3E30469F-474B-44E0-9013-119402DD7996}" type="datetimeFigureOut">
               <a:rPr lang="en-NL" smtClean="0"/>
-              <a:t>23/02/2026</a:t>
+              <a:t>27/02/2026</a:t>
             </a:fld>
             <a:endParaRPr lang="en-NL"/>
           </a:p>
@@ -15111,7 +12521,7 @@
           <a:p>
             <a:fld id="{3E30469F-474B-44E0-9013-119402DD7996}" type="datetimeFigureOut">
               <a:rPr lang="en-NL" smtClean="0"/>
-              <a:t>23/02/2026</a:t>
+              <a:t>27/02/2026</a:t>
             </a:fld>
             <a:endParaRPr lang="en-NL"/>
           </a:p>
@@ -16245,7 +13655,7 @@
           <a:p>
             <a:fld id="{3E30469F-474B-44E0-9013-119402DD7996}" type="datetimeFigureOut">
               <a:rPr lang="en-NL" smtClean="0"/>
-              <a:t>23/02/2026</a:t>
+              <a:t>27/02/2026</a:t>
             </a:fld>
             <a:endParaRPr lang="en-NL"/>
           </a:p>
@@ -17278,7 +14688,7 @@
           <a:p>
             <a:fld id="{3E30469F-474B-44E0-9013-119402DD7996}" type="datetimeFigureOut">
               <a:rPr lang="en-NL" smtClean="0"/>
-              <a:t>23/02/2026</a:t>
+              <a:t>27/02/2026</a:t>
             </a:fld>
             <a:endParaRPr lang="en-NL"/>
           </a:p>
@@ -17938,7 +15348,7 @@
           <a:p>
             <a:fld id="{3E30469F-474B-44E0-9013-119402DD7996}" type="datetimeFigureOut">
               <a:rPr lang="en-NL" smtClean="0"/>
-              <a:t>23/02/2026</a:t>
+              <a:t>27/02/2026</a:t>
             </a:fld>
             <a:endParaRPr lang="en-NL"/>
           </a:p>
@@ -18799,7 +16209,7 @@
           <a:p>
             <a:fld id="{3E30469F-474B-44E0-9013-119402DD7996}" type="datetimeFigureOut">
               <a:rPr lang="en-NL" smtClean="0"/>
-              <a:t>23/02/2026</a:t>
+              <a:t>27/02/2026</a:t>
             </a:fld>
             <a:endParaRPr lang="en-NL"/>
           </a:p>
@@ -18989,7 +16399,7 @@
           <a:p>
             <a:fld id="{3E30469F-474B-44E0-9013-119402DD7996}" type="datetimeFigureOut">
               <a:rPr lang="en-NL" smtClean="0"/>
-              <a:t>23/02/2026</a:t>
+              <a:t>27/02/2026</a:t>
             </a:fld>
             <a:endParaRPr lang="en-NL"/>
           </a:p>
@@ -19961,7 +17371,7 @@
           <a:p>
             <a:fld id="{3E30469F-474B-44E0-9013-119402DD7996}" type="datetimeFigureOut">
               <a:rPr lang="en-NL" smtClean="0"/>
-              <a:t>23/02/2026</a:t>
+              <a:t>27/02/2026</a:t>
             </a:fld>
             <a:endParaRPr lang="en-NL"/>
           </a:p>
@@ -20172,7 +17582,7 @@
           <a:p>
             <a:fld id="{3E30469F-474B-44E0-9013-119402DD7996}" type="datetimeFigureOut">
               <a:rPr lang="en-NL" smtClean="0"/>
-              <a:t>23/02/2026</a:t>
+              <a:t>27/02/2026</a:t>
             </a:fld>
             <a:endParaRPr lang="en-NL"/>
           </a:p>
@@ -21206,7 +18616,7 @@
           <a:p>
             <a:fld id="{3E30469F-474B-44E0-9013-119402DD7996}" type="datetimeFigureOut">
               <a:rPr lang="en-NL" smtClean="0"/>
-              <a:t>23/02/2026</a:t>
+              <a:t>27/02/2026</a:t>
             </a:fld>
             <a:endParaRPr lang="en-NL"/>
           </a:p>
@@ -21478,7 +18888,7 @@
           <a:p>
             <a:fld id="{3E30469F-474B-44E0-9013-119402DD7996}" type="datetimeFigureOut">
               <a:rPr lang="en-NL" smtClean="0"/>
-              <a:t>23/02/2026</a:t>
+              <a:t>27/02/2026</a:t>
             </a:fld>
             <a:endParaRPr lang="en-NL"/>
           </a:p>
@@ -21888,7 +19298,7 @@
           <a:p>
             <a:fld id="{3E30469F-474B-44E0-9013-119402DD7996}" type="datetimeFigureOut">
               <a:rPr lang="en-NL" smtClean="0"/>
-              <a:t>23/02/2026</a:t>
+              <a:t>27/02/2026</a:t>
             </a:fld>
             <a:endParaRPr lang="en-NL"/>
           </a:p>
@@ -22015,7 +19425,7 @@
           <a:p>
             <a:fld id="{3E30469F-474B-44E0-9013-119402DD7996}" type="datetimeFigureOut">
               <a:rPr lang="en-NL" smtClean="0"/>
-              <a:t>23/02/2026</a:t>
+              <a:t>27/02/2026</a:t>
             </a:fld>
             <a:endParaRPr lang="en-NL"/>
           </a:p>
@@ -22110,7 +19520,7 @@
           <a:p>
             <a:fld id="{3E30469F-474B-44E0-9013-119402DD7996}" type="datetimeFigureOut">
               <a:rPr lang="en-NL" smtClean="0"/>
-              <a:t>23/02/2026</a:t>
+              <a:t>27/02/2026</a:t>
             </a:fld>
             <a:endParaRPr lang="en-NL"/>
           </a:p>
@@ -23191,7 +20601,7 @@
           <a:p>
             <a:fld id="{3E30469F-474B-44E0-9013-119402DD7996}" type="datetimeFigureOut">
               <a:rPr lang="en-NL" smtClean="0"/>
-              <a:t>23/02/2026</a:t>
+              <a:t>27/02/2026</a:t>
             </a:fld>
             <a:endParaRPr lang="en-NL"/>
           </a:p>
@@ -24299,7 +21709,7 @@
           <a:p>
             <a:fld id="{3E30469F-474B-44E0-9013-119402DD7996}" type="datetimeFigureOut">
               <a:rPr lang="en-NL" smtClean="0"/>
-              <a:t>23/02/2026</a:t>
+              <a:t>27/02/2026</a:t>
             </a:fld>
             <a:endParaRPr lang="en-NL"/>
           </a:p>
@@ -25359,7 +22769,7 @@
           <a:p>
             <a:fld id="{3E30469F-474B-44E0-9013-119402DD7996}" type="datetimeFigureOut">
               <a:rPr lang="en-NL" smtClean="0"/>
-              <a:t>23/02/2026</a:t>
+              <a:t>27/02/2026</a:t>
             </a:fld>
             <a:endParaRPr lang="en-NL"/>
           </a:p>
@@ -26013,13 +23423,8 @@
                   <a:srgbClr val="FFFFFF"/>
                 </a:solidFill>
               </a:rPr>
-              <a:t>A remote MUMPS API Framework</a:t>
+              <a:t>MUMPS RPC FRAMEWORK</a:t>
             </a:r>
-            <a:endParaRPr lang="en-NL" sz="4400" dirty="0">
-              <a:solidFill>
-                <a:srgbClr val="FFFFFF"/>
-              </a:solidFill>
-            </a:endParaRPr>
           </a:p>
         </p:txBody>
       </p:sp>
@@ -26098,7 +23503,7 @@
             <p:ph idx="1"/>
             <p:extLst>
               <p:ext uri="{D42A27DB-BD31-4B8C-83A1-F6EECF244321}">
-                <p14:modId xmlns:p14="http://schemas.microsoft.com/office/powerpoint/2010/main" val="1384979283"/>
+                <p14:modId xmlns:p14="http://schemas.microsoft.com/office/powerpoint/2010/main" val="885243221"/>
               </p:ext>
             </p:extLst>
           </p:nvPr>
@@ -26129,23 +23534,9 @@
 <file path=ppt/slides/slide11.xml><?xml version="1.0" encoding="utf-8"?>
 <p:sld xmlns:a="http://schemas.openxmlformats.org/drawingml/2006/main" xmlns:r="http://schemas.openxmlformats.org/officeDocument/2006/relationships" xmlns:p="http://schemas.openxmlformats.org/presentationml/2006/main">
   <p:cSld>
-    <p:bg>
-      <p:bgPr>
-        <a:solidFill>
-          <a:schemeClr val="bg1"/>
-        </a:solidFill>
-        <a:effectLst/>
-      </p:bgPr>
-    </p:bg>
     <p:spTree>
       <p:nvGrpSpPr>
-        <p:cNvPr id="1" name="">
-          <a:extLst>
-            <a:ext uri="{FF2B5EF4-FFF2-40B4-BE49-F238E27FC236}">
-              <a16:creationId xmlns:a16="http://schemas.microsoft.com/office/drawing/2014/main" id="{4D6DC185-0273-5F80-868C-0BB3B7C23D97}"/>
-            </a:ext>
-          </a:extLst>
-        </p:cNvPr>
+        <p:cNvPr id="1" name=""/>
         <p:cNvGrpSpPr/>
         <p:nvPr/>
       </p:nvGrpSpPr>
@@ -26162,7 +23553,7 @@
           <p:cNvPr id="2" name="Title 1">
             <a:extLst>
               <a:ext uri="{FF2B5EF4-FFF2-40B4-BE49-F238E27FC236}">
-                <a16:creationId xmlns:a16="http://schemas.microsoft.com/office/drawing/2014/main" id="{DE27AA2B-1A44-5B47-5FA9-76DF0396F137}"/>
+                <a16:creationId xmlns:a16="http://schemas.microsoft.com/office/drawing/2014/main" id="{8F3EF3D6-9CF4-AB0F-7C86-99C919DD435B}"/>
               </a:ext>
             </a:extLst>
           </p:cNvPr>
@@ -26173,66 +23564,92 @@
             <p:ph type="title"/>
           </p:nvPr>
         </p:nvSpPr>
-        <p:spPr>
-          <a:xfrm>
-            <a:off x="1952481" y="800783"/>
-            <a:ext cx="8278891" cy="1323867"/>
-          </a:xfrm>
-        </p:spPr>
+        <p:spPr/>
         <p:txBody>
-          <a:bodyPr anchor="b">
-            <a:normAutofit/>
-          </a:bodyPr>
+          <a:bodyPr/>
           <a:lstStyle/>
           <a:p>
             <a:r>
-              <a:rPr lang="en-US" dirty="0" err="1"/>
-              <a:t>fdssdf</a:t>
+              <a:rPr lang="en-US" dirty="0"/>
+              <a:t>Can still have full remote access to YDB</a:t>
             </a:r>
             <a:endParaRPr lang="en-NL" dirty="0"/>
           </a:p>
         </p:txBody>
       </p:sp>
-      <p:graphicFrame>
-        <p:nvGraphicFramePr>
-          <p:cNvPr id="11" name="Content Placeholder 2">
+      <p:sp>
+        <p:nvSpPr>
+          <p:cNvPr id="3" name="Content Placeholder 2">
             <a:extLst>
               <a:ext uri="{FF2B5EF4-FFF2-40B4-BE49-F238E27FC236}">
-                <a16:creationId xmlns:a16="http://schemas.microsoft.com/office/drawing/2014/main" id="{088B2664-C99A-188C-C5EF-0529B0374B0B}"/>
+                <a16:creationId xmlns:a16="http://schemas.microsoft.com/office/drawing/2014/main" id="{D4CE1B68-CFBA-9041-161A-56428EE83C6F}"/>
               </a:ext>
             </a:extLst>
           </p:cNvPr>
-          <p:cNvGraphicFramePr>
-            <a:graphicFrameLocks noGrp="1"/>
-          </p:cNvGraphicFramePr>
+          <p:cNvSpPr>
+            <a:spLocks noGrp="1"/>
+          </p:cNvSpPr>
           <p:nvPr>
             <p:ph idx="1"/>
-            <p:extLst>
-              <p:ext uri="{E7BDC344-281C-4309-B0C6-D0EE65EED2A8}">
-                <p202:designPr xmlns:p202="http://schemas.microsoft.com/office/powerpoint/2020/02/main">
-                  <p202:designTagLst>
-                    <p202:designTag name="ARCH:1:CLS" val="InformationBlock"/>
-                    <p202:designTag name="ARCH:1:VSVAR" val="TitledTextBox"/>
-                  </p202:designTagLst>
-                </p202:designPr>
-              </p:ext>
-            </p:extLst>
           </p:nvPr>
-        </p:nvGraphicFramePr>
-        <p:xfrm>
-          <a:off x="1952481" y="2495774"/>
-          <a:ext cx="8278892" cy="3273426"/>
-        </p:xfrm>
-        <a:graphic>
-          <a:graphicData uri="http://schemas.openxmlformats.org/drawingml/2006/diagram">
-            <dgm:relIds xmlns:dgm="http://schemas.openxmlformats.org/drawingml/2006/diagram" xmlns:r="http://schemas.openxmlformats.org/officeDocument/2006/relationships" r:dm="rId2" r:lo="rId3" r:qs="rId4" r:cs="rId5"/>
-          </a:graphicData>
-        </a:graphic>
-      </p:graphicFrame>
+        </p:nvSpPr>
+        <p:spPr/>
+        <p:txBody>
+          <a:bodyPr/>
+          <a:lstStyle/>
+          <a:p>
+            <a:r>
+              <a:rPr lang="en-US" dirty="0"/>
+              <a:t>Built-in objects in the client allow direct access to the following:</a:t>
+            </a:r>
+          </a:p>
+          <a:p>
+            <a:pPr lvl="1"/>
+            <a:r>
+              <a:rPr lang="en-US" dirty="0"/>
+              <a:t>Globals</a:t>
+            </a:r>
+          </a:p>
+          <a:p>
+            <a:pPr lvl="1"/>
+            <a:r>
+              <a:rPr lang="en-US" dirty="0"/>
+              <a:t>Vars</a:t>
+            </a:r>
+          </a:p>
+          <a:p>
+            <a:pPr lvl="1"/>
+            <a:r>
+              <a:rPr lang="en-US" dirty="0"/>
+              <a:t>File system</a:t>
+            </a:r>
+          </a:p>
+          <a:p>
+            <a:pPr lvl="1"/>
+            <a:r>
+              <a:rPr lang="en-US" dirty="0"/>
+              <a:t>Process</a:t>
+            </a:r>
+          </a:p>
+          <a:p>
+            <a:pPr lvl="1"/>
+            <a:r>
+              <a:rPr lang="en-US" dirty="0"/>
+              <a:t>Server</a:t>
+            </a:r>
+          </a:p>
+          <a:p>
+            <a:r>
+              <a:rPr lang="en-US" dirty="0"/>
+              <a:t>The client-side methods follow the client language naming, syntax and conventions, making the life easy to back-end programmers</a:t>
+            </a:r>
+          </a:p>
+        </p:txBody>
+      </p:sp>
     </p:spTree>
     <p:extLst>
       <p:ext uri="{BB962C8B-B14F-4D97-AF65-F5344CB8AC3E}">
-        <p14:creationId xmlns:p14="http://schemas.microsoft.com/office/powerpoint/2010/main" val="2760101554"/>
+        <p14:creationId xmlns:p14="http://schemas.microsoft.com/office/powerpoint/2010/main" val="1643443457"/>
       </p:ext>
     </p:extLst>
   </p:cSld>
@@ -26264,7 +23681,7 @@
           <p:cNvPr id="2" name="Title 1">
             <a:extLst>
               <a:ext uri="{FF2B5EF4-FFF2-40B4-BE49-F238E27FC236}">
-                <a16:creationId xmlns:a16="http://schemas.microsoft.com/office/drawing/2014/main" id="{50DF909B-EE31-EFAE-7A0A-716460177410}"/>
+                <a16:creationId xmlns:a16="http://schemas.microsoft.com/office/drawing/2014/main" id="{3768FF1B-F9AC-D8C7-D9EF-A0FC34AD11ED}"/>
               </a:ext>
             </a:extLst>
           </p:cNvPr>
@@ -26282,7 +23699,7 @@
           <a:p>
             <a:r>
               <a:rPr lang="en-US" dirty="0"/>
-              <a:t>Multiple client topology</a:t>
+              <a:t>Designed for programmers</a:t>
             </a:r>
             <a:endParaRPr lang="en-NL" dirty="0"/>
           </a:p>
@@ -26293,7 +23710,7 @@
           <p:cNvPr id="3" name="Content Placeholder 2">
             <a:extLst>
               <a:ext uri="{FF2B5EF4-FFF2-40B4-BE49-F238E27FC236}">
-                <a16:creationId xmlns:a16="http://schemas.microsoft.com/office/drawing/2014/main" id="{827D319E-4957-2EE4-4C13-0595662B4AAA}"/>
+                <a16:creationId xmlns:a16="http://schemas.microsoft.com/office/drawing/2014/main" id="{B0E88B97-6A21-F842-82B1-F8FFAB38DBEB}"/>
               </a:ext>
             </a:extLst>
           </p:cNvPr>
@@ -26304,651 +23721,67 @@
             <p:ph idx="1"/>
           </p:nvPr>
         </p:nvSpPr>
-        <p:spPr>
-          <a:xfrm>
-            <a:off x="1154954" y="3037840"/>
-            <a:ext cx="8825659" cy="3416300"/>
-          </a:xfrm>
-        </p:spPr>
+        <p:spPr/>
         <p:txBody>
-          <a:bodyPr/>
-          <a:lstStyle/>
-          <a:p>
-            <a:endParaRPr lang="en-NL" dirty="0"/>
-          </a:p>
-        </p:txBody>
-      </p:sp>
-      <p:sp>
-        <p:nvSpPr>
-          <p:cNvPr id="4" name="Rectangle: Rounded Corners 3">
-            <a:extLst>
-              <a:ext uri="{FF2B5EF4-FFF2-40B4-BE49-F238E27FC236}">
-                <a16:creationId xmlns:a16="http://schemas.microsoft.com/office/drawing/2014/main" id="{62F072E5-7887-F607-BF39-D96818D9FA72}"/>
-              </a:ext>
-            </a:extLst>
-          </p:cNvPr>
-          <p:cNvSpPr/>
-          <p:nvPr/>
-        </p:nvSpPr>
-        <p:spPr>
-          <a:xfrm>
-            <a:off x="7259541" y="2668657"/>
-            <a:ext cx="3633746" cy="3617843"/>
-          </a:xfrm>
-          <a:prstGeom prst="roundRect">
-            <a:avLst/>
-          </a:prstGeom>
-          <a:gradFill>
-            <a:gsLst>
-              <a:gs pos="0">
-                <a:schemeClr val="accent5">
-                  <a:lumMod val="60000"/>
-                  <a:lumOff val="40000"/>
-                </a:schemeClr>
-              </a:gs>
-              <a:gs pos="74000">
-                <a:schemeClr val="accent1">
-                  <a:lumMod val="45000"/>
-                  <a:lumOff val="55000"/>
-                </a:schemeClr>
-              </a:gs>
-              <a:gs pos="83000">
-                <a:schemeClr val="accent1">
-                  <a:lumMod val="45000"/>
-                  <a:lumOff val="55000"/>
-                </a:schemeClr>
-              </a:gs>
-              <a:gs pos="100000">
-                <a:schemeClr val="accent5">
-                  <a:lumMod val="60000"/>
-                  <a:lumOff val="40000"/>
-                </a:schemeClr>
-              </a:gs>
-            </a:gsLst>
-            <a:lin ang="5400000" scaled="1"/>
-          </a:gradFill>
-        </p:spPr>
-        <p:style>
-          <a:lnRef idx="2">
-            <a:schemeClr val="accent1">
-              <a:shade val="15000"/>
-            </a:schemeClr>
-          </a:lnRef>
-          <a:fillRef idx="1">
-            <a:schemeClr val="accent1"/>
-          </a:fillRef>
-          <a:effectRef idx="0">
-            <a:schemeClr val="accent1"/>
-          </a:effectRef>
-          <a:fontRef idx="minor">
-            <a:schemeClr val="lt1"/>
-          </a:fontRef>
-        </p:style>
-        <p:txBody>
-          <a:bodyPr rtlCol="0" anchor="ctr"/>
-          <a:lstStyle/>
-          <a:p>
-            <a:pPr algn="ctr"/>
-            <a:endParaRPr lang="en-NL"/>
-          </a:p>
-        </p:txBody>
-      </p:sp>
-      <p:sp>
-        <p:nvSpPr>
-          <p:cNvPr id="5" name="Rectangle: Rounded Corners 4">
-            <a:extLst>
-              <a:ext uri="{FF2B5EF4-FFF2-40B4-BE49-F238E27FC236}">
-                <a16:creationId xmlns:a16="http://schemas.microsoft.com/office/drawing/2014/main" id="{36498F2A-2B3E-EC6E-3370-BDA6ECEEBCD1}"/>
-              </a:ext>
-            </a:extLst>
-          </p:cNvPr>
-          <p:cNvSpPr/>
-          <p:nvPr/>
-        </p:nvSpPr>
-        <p:spPr>
-          <a:xfrm>
-            <a:off x="1338470" y="3051644"/>
-            <a:ext cx="1550504" cy="662609"/>
-          </a:xfrm>
-          <a:prstGeom prst="roundRect">
-            <a:avLst/>
-          </a:prstGeom>
-        </p:spPr>
-        <p:style>
-          <a:lnRef idx="2">
-            <a:schemeClr val="accent1">
-              <a:shade val="15000"/>
-            </a:schemeClr>
-          </a:lnRef>
-          <a:fillRef idx="1">
-            <a:schemeClr val="accent1"/>
-          </a:fillRef>
-          <a:effectRef idx="0">
-            <a:schemeClr val="accent1"/>
-          </a:effectRef>
-          <a:fontRef idx="minor">
-            <a:schemeClr val="lt1"/>
-          </a:fontRef>
-        </p:style>
-        <p:txBody>
-          <a:bodyPr rtlCol="0" anchor="ctr"/>
-          <a:lstStyle/>
-          <a:p>
-            <a:pPr algn="ctr"/>
-            <a:r>
-              <a:rPr lang="en-US" dirty="0"/>
-              <a:t>Client</a:t>
-            </a:r>
-          </a:p>
-          <a:p>
-            <a:pPr algn="ctr"/>
-            <a:r>
-              <a:rPr lang="en-US" dirty="0"/>
-              <a:t>(nodejs)</a:t>
-            </a:r>
-            <a:endParaRPr lang="en-NL" dirty="0"/>
-          </a:p>
-        </p:txBody>
-      </p:sp>
-      <p:sp>
-        <p:nvSpPr>
-          <p:cNvPr id="6" name="Rectangle: Rounded Corners 5">
-            <a:extLst>
-              <a:ext uri="{FF2B5EF4-FFF2-40B4-BE49-F238E27FC236}">
-                <a16:creationId xmlns:a16="http://schemas.microsoft.com/office/drawing/2014/main" id="{C617F3A1-D3FE-2883-548B-55FBC5FAB49B}"/>
-              </a:ext>
-            </a:extLst>
-          </p:cNvPr>
-          <p:cNvSpPr/>
-          <p:nvPr/>
-        </p:nvSpPr>
-        <p:spPr>
-          <a:xfrm>
-            <a:off x="1338470" y="4052184"/>
-            <a:ext cx="1550504" cy="662609"/>
-          </a:xfrm>
-          <a:prstGeom prst="roundRect">
-            <a:avLst/>
-          </a:prstGeom>
-        </p:spPr>
-        <p:style>
-          <a:lnRef idx="2">
-            <a:schemeClr val="accent1">
-              <a:shade val="15000"/>
-            </a:schemeClr>
-          </a:lnRef>
-          <a:fillRef idx="1">
-            <a:schemeClr val="accent1"/>
-          </a:fillRef>
-          <a:effectRef idx="0">
-            <a:schemeClr val="accent1"/>
-          </a:effectRef>
-          <a:fontRef idx="minor">
-            <a:schemeClr val="lt1"/>
-          </a:fontRef>
-        </p:style>
-        <p:txBody>
-          <a:bodyPr rtlCol="0" anchor="ctr"/>
-          <a:lstStyle/>
-          <a:p>
-            <a:pPr algn="ctr"/>
-            <a:r>
-              <a:rPr lang="en-US" dirty="0"/>
-              <a:t>Client</a:t>
-            </a:r>
-          </a:p>
-          <a:p>
-            <a:pPr algn="ctr"/>
-            <a:r>
-              <a:rPr lang="en-US" dirty="0"/>
-              <a:t>(Go)</a:t>
-            </a:r>
-            <a:endParaRPr lang="en-NL" dirty="0"/>
-          </a:p>
-        </p:txBody>
-      </p:sp>
-      <p:sp>
-        <p:nvSpPr>
-          <p:cNvPr id="7" name="Rectangle: Rounded Corners 6">
-            <a:extLst>
-              <a:ext uri="{FF2B5EF4-FFF2-40B4-BE49-F238E27FC236}">
-                <a16:creationId xmlns:a16="http://schemas.microsoft.com/office/drawing/2014/main" id="{17CB8825-4B0A-2B99-5CCA-B5B43ED68D5E}"/>
-              </a:ext>
-            </a:extLst>
-          </p:cNvPr>
-          <p:cNvSpPr/>
-          <p:nvPr/>
-        </p:nvSpPr>
-        <p:spPr>
-          <a:xfrm>
-            <a:off x="1338470" y="5138864"/>
-            <a:ext cx="1550504" cy="662609"/>
-          </a:xfrm>
-          <a:prstGeom prst="roundRect">
-            <a:avLst/>
-          </a:prstGeom>
-        </p:spPr>
-        <p:style>
-          <a:lnRef idx="2">
-            <a:schemeClr val="accent1">
-              <a:shade val="15000"/>
-            </a:schemeClr>
-          </a:lnRef>
-          <a:fillRef idx="1">
-            <a:schemeClr val="accent1"/>
-          </a:fillRef>
-          <a:effectRef idx="0">
-            <a:schemeClr val="accent1"/>
-          </a:effectRef>
-          <a:fontRef idx="minor">
-            <a:schemeClr val="lt1"/>
-          </a:fontRef>
-        </p:style>
-        <p:txBody>
-          <a:bodyPr rtlCol="0" anchor="ctr"/>
-          <a:lstStyle/>
-          <a:p>
-            <a:pPr algn="ctr"/>
-            <a:r>
-              <a:rPr lang="en-US" dirty="0"/>
-              <a:t>Client</a:t>
-            </a:r>
-          </a:p>
-          <a:p>
-            <a:pPr algn="ctr"/>
-            <a:r>
-              <a:rPr lang="en-US" dirty="0"/>
-              <a:t>(Python)</a:t>
-            </a:r>
-            <a:endParaRPr lang="en-NL" dirty="0"/>
-          </a:p>
-        </p:txBody>
-      </p:sp>
-      <p:sp>
-        <p:nvSpPr>
-          <p:cNvPr id="8" name="TextBox 7">
-            <a:extLst>
-              <a:ext uri="{FF2B5EF4-FFF2-40B4-BE49-F238E27FC236}">
-                <a16:creationId xmlns:a16="http://schemas.microsoft.com/office/drawing/2014/main" id="{B05DF86D-A187-60DE-9EAA-60488AC3907E}"/>
-              </a:ext>
-            </a:extLst>
-          </p:cNvPr>
-          <p:cNvSpPr txBox="1"/>
-          <p:nvPr/>
-        </p:nvSpPr>
-        <p:spPr>
-          <a:xfrm>
-            <a:off x="9558414" y="5156235"/>
-            <a:ext cx="1457740" cy="646331"/>
-          </a:xfrm>
-          <a:prstGeom prst="rect">
-            <a:avLst/>
-          </a:prstGeom>
-          <a:noFill/>
-        </p:spPr>
-        <p:txBody>
-          <a:bodyPr wrap="square" rtlCol="0">
-            <a:spAutoFit/>
+          <a:bodyPr>
+            <a:normAutofit lnSpcReduction="10000"/>
           </a:bodyPr>
           <a:lstStyle/>
           <a:p>
             <a:r>
-              <a:rPr lang="en-US" b="1" dirty="0">
-                <a:solidFill>
-                  <a:srgbClr val="FFFF00"/>
-                </a:solidFill>
-              </a:rPr>
-              <a:t>YottaDB</a:t>
+              <a:rPr lang="en-US" dirty="0"/>
+              <a:t>We expose a wide range of tools to help you debug problems and improve performances:</a:t>
+            </a:r>
+          </a:p>
+          <a:p>
+            <a:pPr lvl="1"/>
+            <a:r>
+              <a:rPr lang="en-US" dirty="0"/>
+              <a:t>Dump the request</a:t>
+            </a:r>
+          </a:p>
+          <a:p>
+            <a:pPr lvl="1"/>
+            <a:r>
+              <a:rPr lang="en-US" dirty="0"/>
+              <a:t>Dump the response</a:t>
+            </a:r>
+          </a:p>
+          <a:p>
+            <a:pPr lvl="1"/>
+            <a:r>
+              <a:rPr lang="en-US" dirty="0"/>
+              <a:t>Dump the timing in microseconds</a:t>
+            </a:r>
+          </a:p>
+          <a:p>
+            <a:pPr lvl="1"/>
+            <a:r>
+              <a:rPr lang="en-US" dirty="0"/>
+              <a:t>Add custom log messages in the server console, also in colors (to stand out) for debugging purposes</a:t>
             </a:r>
           </a:p>
           <a:p>
             <a:r>
-              <a:rPr lang="en-US" b="1" dirty="0">
-                <a:solidFill>
-                  <a:srgbClr val="FFFF00"/>
-                </a:solidFill>
-              </a:rPr>
-              <a:t>database</a:t>
+              <a:rPr lang="en-US" dirty="0"/>
+              <a:t>RESP3 library, to bypass the framework and make manual calls</a:t>
             </a:r>
-            <a:endParaRPr lang="en-NL" b="1" dirty="0">
-              <a:solidFill>
-                <a:srgbClr val="FFFF00"/>
-              </a:solidFill>
-            </a:endParaRPr>
           </a:p>
-        </p:txBody>
-      </p:sp>
-      <p:sp>
-        <p:nvSpPr>
-          <p:cNvPr id="9" name="Arrow: Left-Right 8">
-            <a:extLst>
-              <a:ext uri="{FF2B5EF4-FFF2-40B4-BE49-F238E27FC236}">
-                <a16:creationId xmlns:a16="http://schemas.microsoft.com/office/drawing/2014/main" id="{8B874837-BD2C-4052-D10C-2C6FD0E0B0CD}"/>
-              </a:ext>
-            </a:extLst>
-          </p:cNvPr>
-          <p:cNvSpPr/>
-          <p:nvPr/>
-        </p:nvSpPr>
-        <p:spPr>
-          <a:xfrm>
-            <a:off x="2888974" y="3098027"/>
-            <a:ext cx="4723406" cy="490330"/>
-          </a:xfrm>
-          <a:prstGeom prst="leftRightArrow">
-            <a:avLst/>
-          </a:prstGeom>
-          <a:gradFill>
-            <a:gsLst>
-              <a:gs pos="0">
-                <a:schemeClr val="accent1">
-                  <a:lumMod val="5000"/>
-                  <a:lumOff val="95000"/>
-                </a:schemeClr>
-              </a:gs>
-              <a:gs pos="74000">
-                <a:schemeClr val="accent1">
-                  <a:lumMod val="45000"/>
-                  <a:lumOff val="55000"/>
-                </a:schemeClr>
-              </a:gs>
-              <a:gs pos="83000">
-                <a:schemeClr val="accent1">
-                  <a:lumMod val="45000"/>
-                  <a:lumOff val="55000"/>
-                </a:schemeClr>
-              </a:gs>
-              <a:gs pos="100000">
-                <a:schemeClr val="accent1">
-                  <a:lumMod val="30000"/>
-                  <a:lumOff val="70000"/>
-                </a:schemeClr>
-              </a:gs>
-            </a:gsLst>
-            <a:lin ang="5400000" scaled="1"/>
-          </a:gradFill>
-        </p:spPr>
-        <p:style>
-          <a:lnRef idx="2">
-            <a:schemeClr val="accent1">
-              <a:shade val="15000"/>
-            </a:schemeClr>
-          </a:lnRef>
-          <a:fillRef idx="1">
-            <a:schemeClr val="accent1"/>
-          </a:fillRef>
-          <a:effectRef idx="0">
-            <a:schemeClr val="accent1"/>
-          </a:effectRef>
-          <a:fontRef idx="minor">
-            <a:schemeClr val="lt1"/>
-          </a:fontRef>
-        </p:style>
-        <p:txBody>
-          <a:bodyPr rtlCol="0" anchor="ctr"/>
-          <a:lstStyle/>
           <a:p>
-            <a:pPr algn="ctr"/>
             <a:r>
               <a:rPr lang="en-US" dirty="0"/>
-              <a:t>RESP3</a:t>
+              <a:t>Built-in objects, to perform pre-compiled disk, variables, globals and process utilities</a:t>
             </a:r>
+          </a:p>
+          <a:p>
             <a:endParaRPr lang="en-NL" dirty="0"/>
-          </a:p>
-        </p:txBody>
-      </p:sp>
-      <p:sp>
-        <p:nvSpPr>
-          <p:cNvPr id="10" name="Arrow: Left-Right 9">
-            <a:extLst>
-              <a:ext uri="{FF2B5EF4-FFF2-40B4-BE49-F238E27FC236}">
-                <a16:creationId xmlns:a16="http://schemas.microsoft.com/office/drawing/2014/main" id="{361A8CD9-16B7-755F-4E8A-F0E7175BCAB8}"/>
-              </a:ext>
-            </a:extLst>
-          </p:cNvPr>
-          <p:cNvSpPr/>
-          <p:nvPr/>
-        </p:nvSpPr>
-        <p:spPr>
-          <a:xfrm>
-            <a:off x="2888972" y="4138324"/>
-            <a:ext cx="4723405" cy="490330"/>
-          </a:xfrm>
-          <a:prstGeom prst="leftRightArrow">
-            <a:avLst/>
-          </a:prstGeom>
-          <a:gradFill>
-            <a:gsLst>
-              <a:gs pos="0">
-                <a:schemeClr val="accent1">
-                  <a:lumMod val="5000"/>
-                  <a:lumOff val="95000"/>
-                </a:schemeClr>
-              </a:gs>
-              <a:gs pos="74000">
-                <a:schemeClr val="accent1">
-                  <a:lumMod val="45000"/>
-                  <a:lumOff val="55000"/>
-                </a:schemeClr>
-              </a:gs>
-              <a:gs pos="83000">
-                <a:schemeClr val="accent1">
-                  <a:lumMod val="45000"/>
-                  <a:lumOff val="55000"/>
-                </a:schemeClr>
-              </a:gs>
-              <a:gs pos="100000">
-                <a:schemeClr val="accent1">
-                  <a:lumMod val="30000"/>
-                  <a:lumOff val="70000"/>
-                </a:schemeClr>
-              </a:gs>
-            </a:gsLst>
-            <a:lin ang="5400000" scaled="1"/>
-          </a:gradFill>
-        </p:spPr>
-        <p:style>
-          <a:lnRef idx="2">
-            <a:schemeClr val="accent1">
-              <a:shade val="15000"/>
-            </a:schemeClr>
-          </a:lnRef>
-          <a:fillRef idx="1">
-            <a:schemeClr val="accent1"/>
-          </a:fillRef>
-          <a:effectRef idx="0">
-            <a:schemeClr val="accent1"/>
-          </a:effectRef>
-          <a:fontRef idx="minor">
-            <a:schemeClr val="lt1"/>
-          </a:fontRef>
-        </p:style>
-        <p:txBody>
-          <a:bodyPr rtlCol="0" anchor="ctr"/>
-          <a:lstStyle/>
-          <a:p>
-            <a:pPr algn="ctr"/>
-            <a:r>
-              <a:rPr lang="en-US" dirty="0"/>
-              <a:t>RESP3</a:t>
-            </a:r>
-            <a:endParaRPr lang="en-NL" dirty="0"/>
-          </a:p>
-        </p:txBody>
-      </p:sp>
-      <p:sp>
-        <p:nvSpPr>
-          <p:cNvPr id="11" name="Arrow: Left-Right 10">
-            <a:extLst>
-              <a:ext uri="{FF2B5EF4-FFF2-40B4-BE49-F238E27FC236}">
-                <a16:creationId xmlns:a16="http://schemas.microsoft.com/office/drawing/2014/main" id="{6DFC8CCF-17FF-8005-BDBE-EC14BF92D6E8}"/>
-              </a:ext>
-            </a:extLst>
-          </p:cNvPr>
-          <p:cNvSpPr/>
-          <p:nvPr/>
-        </p:nvSpPr>
-        <p:spPr>
-          <a:xfrm>
-            <a:off x="2888974" y="5198496"/>
-            <a:ext cx="4723403" cy="490330"/>
-          </a:xfrm>
-          <a:prstGeom prst="leftRightArrow">
-            <a:avLst/>
-          </a:prstGeom>
-          <a:gradFill>
-            <a:gsLst>
-              <a:gs pos="0">
-                <a:schemeClr val="accent1">
-                  <a:lumMod val="5000"/>
-                  <a:lumOff val="95000"/>
-                </a:schemeClr>
-              </a:gs>
-              <a:gs pos="74000">
-                <a:schemeClr val="accent1">
-                  <a:lumMod val="45000"/>
-                  <a:lumOff val="55000"/>
-                </a:schemeClr>
-              </a:gs>
-              <a:gs pos="83000">
-                <a:schemeClr val="accent1">
-                  <a:lumMod val="45000"/>
-                  <a:lumOff val="55000"/>
-                </a:schemeClr>
-              </a:gs>
-              <a:gs pos="100000">
-                <a:schemeClr val="accent1">
-                  <a:lumMod val="30000"/>
-                  <a:lumOff val="70000"/>
-                </a:schemeClr>
-              </a:gs>
-            </a:gsLst>
-            <a:lin ang="5400000" scaled="1"/>
-          </a:gradFill>
-        </p:spPr>
-        <p:style>
-          <a:lnRef idx="2">
-            <a:schemeClr val="accent1">
-              <a:shade val="15000"/>
-            </a:schemeClr>
-          </a:lnRef>
-          <a:fillRef idx="1">
-            <a:schemeClr val="accent1"/>
-          </a:fillRef>
-          <a:effectRef idx="0">
-            <a:schemeClr val="accent1"/>
-          </a:effectRef>
-          <a:fontRef idx="minor">
-            <a:schemeClr val="lt1"/>
-          </a:fontRef>
-        </p:style>
-        <p:txBody>
-          <a:bodyPr rtlCol="0" anchor="ctr"/>
-          <a:lstStyle/>
-          <a:p>
-            <a:pPr algn="ctr"/>
-            <a:r>
-              <a:rPr lang="en-US" dirty="0"/>
-              <a:t>RESP3</a:t>
-            </a:r>
-            <a:endParaRPr lang="en-NL" dirty="0"/>
-          </a:p>
-        </p:txBody>
-      </p:sp>
-      <p:sp>
-        <p:nvSpPr>
-          <p:cNvPr id="12" name="Rectangle: Rounded Corners 11">
-            <a:extLst>
-              <a:ext uri="{FF2B5EF4-FFF2-40B4-BE49-F238E27FC236}">
-                <a16:creationId xmlns:a16="http://schemas.microsoft.com/office/drawing/2014/main" id="{F2353F4B-EBEF-762E-C172-A1A47A2201EF}"/>
-              </a:ext>
-            </a:extLst>
-          </p:cNvPr>
-          <p:cNvSpPr/>
-          <p:nvPr/>
-        </p:nvSpPr>
-        <p:spPr>
-          <a:xfrm>
-            <a:off x="7612380" y="2900238"/>
-            <a:ext cx="1690646" cy="3154680"/>
-          </a:xfrm>
-          <a:prstGeom prst="roundRect">
-            <a:avLst/>
-          </a:prstGeom>
-        </p:spPr>
-        <p:style>
-          <a:lnRef idx="2">
-            <a:schemeClr val="accent1">
-              <a:shade val="15000"/>
-            </a:schemeClr>
-          </a:lnRef>
-          <a:fillRef idx="1">
-            <a:schemeClr val="accent1"/>
-          </a:fillRef>
-          <a:effectRef idx="0">
-            <a:schemeClr val="accent1"/>
-          </a:effectRef>
-          <a:fontRef idx="minor">
-            <a:schemeClr val="lt1"/>
-          </a:fontRef>
-        </p:style>
-        <p:txBody>
-          <a:bodyPr rtlCol="0" anchor="ctr"/>
-          <a:lstStyle/>
-          <a:p>
-            <a:pPr algn="ctr"/>
-            <a:endParaRPr lang="en-NL"/>
-          </a:p>
-        </p:txBody>
-      </p:sp>
-      <p:sp>
-        <p:nvSpPr>
-          <p:cNvPr id="17" name="TextBox 16">
-            <a:extLst>
-              <a:ext uri="{FF2B5EF4-FFF2-40B4-BE49-F238E27FC236}">
-                <a16:creationId xmlns:a16="http://schemas.microsoft.com/office/drawing/2014/main" id="{FEABB92C-848E-CB9F-39FD-089BE313EB37}"/>
-              </a:ext>
-            </a:extLst>
-          </p:cNvPr>
-          <p:cNvSpPr txBox="1"/>
-          <p:nvPr/>
-        </p:nvSpPr>
-        <p:spPr>
-          <a:xfrm>
-            <a:off x="8174125" y="4099659"/>
-            <a:ext cx="978463" cy="646331"/>
-          </a:xfrm>
-          <a:prstGeom prst="rect">
-            <a:avLst/>
-          </a:prstGeom>
-          <a:noFill/>
-        </p:spPr>
-        <p:txBody>
-          <a:bodyPr wrap="square" rtlCol="0">
-            <a:spAutoFit/>
-          </a:bodyPr>
-          <a:lstStyle/>
-          <a:p>
-            <a:r>
-              <a:rPr lang="en-US" b="1" dirty="0">
-                <a:solidFill>
-                  <a:srgbClr val="FFFF00"/>
-                </a:solidFill>
-              </a:rPr>
-              <a:t>MIND server</a:t>
-            </a:r>
-            <a:endParaRPr lang="en-NL" b="1" dirty="0">
-              <a:solidFill>
-                <a:srgbClr val="FFFF00"/>
-              </a:solidFill>
-            </a:endParaRPr>
           </a:p>
         </p:txBody>
       </p:sp>
     </p:spTree>
     <p:extLst>
       <p:ext uri="{BB962C8B-B14F-4D97-AF65-F5344CB8AC3E}">
-        <p14:creationId xmlns:p14="http://schemas.microsoft.com/office/powerpoint/2010/main" val="3503112432"/>
+        <p14:creationId xmlns:p14="http://schemas.microsoft.com/office/powerpoint/2010/main" val="3763323384"/>
       </p:ext>
     </p:extLst>
   </p:cSld>
@@ -26980,7 +23813,7 @@
           <p:cNvPr id="2" name="Title 1">
             <a:extLst>
               <a:ext uri="{FF2B5EF4-FFF2-40B4-BE49-F238E27FC236}">
-                <a16:creationId xmlns:a16="http://schemas.microsoft.com/office/drawing/2014/main" id="{71A0E760-2C4C-850E-B41F-5ABE7C392222}"/>
+                <a16:creationId xmlns:a16="http://schemas.microsoft.com/office/drawing/2014/main" id="{9C17F876-DA93-1729-16F9-4679C8BBE4B2}"/>
               </a:ext>
             </a:extLst>
           </p:cNvPr>
@@ -26998,7 +23831,7 @@
           <a:p>
             <a:r>
               <a:rPr lang="en-US" dirty="0"/>
-              <a:t>Future</a:t>
+              <a:t>What’s in for the future</a:t>
             </a:r>
             <a:endParaRPr lang="en-NL" dirty="0"/>
           </a:p>
@@ -27009,7 +23842,7 @@
           <p:cNvPr id="3" name="Content Placeholder 2">
             <a:extLst>
               <a:ext uri="{FF2B5EF4-FFF2-40B4-BE49-F238E27FC236}">
-                <a16:creationId xmlns:a16="http://schemas.microsoft.com/office/drawing/2014/main" id="{557E02B4-15A9-AA4C-6998-FB05601E23DF}"/>
+                <a16:creationId xmlns:a16="http://schemas.microsoft.com/office/drawing/2014/main" id="{5D936BA7-2755-5F52-756F-939E758F9BA3}"/>
               </a:ext>
             </a:extLst>
           </p:cNvPr>
@@ -27022,17 +23855,94 @@
         </p:nvSpPr>
         <p:spPr/>
         <p:txBody>
-          <a:bodyPr/>
+          <a:bodyPr>
+            <a:normAutofit fontScale="92500" lnSpcReduction="20000"/>
+          </a:bodyPr>
           <a:lstStyle/>
           <a:p>
-            <a:endParaRPr lang="en-NL"/>
+            <a:r>
+              <a:rPr lang="en-US" dirty="0"/>
+              <a:t>The DBMS class </a:t>
+            </a:r>
+          </a:p>
+          <a:p>
+            <a:pPr lvl="1"/>
+            <a:r>
+              <a:rPr lang="en-US" dirty="0"/>
+              <a:t>will expose a JSON / Object database</a:t>
+            </a:r>
+          </a:p>
+          <a:p>
+            <a:pPr lvl="1"/>
+            <a:r>
+              <a:rPr lang="en-US" dirty="0"/>
+              <a:t>It will allow tables linking in a similar way Fileman does</a:t>
+            </a:r>
+          </a:p>
+          <a:p>
+            <a:pPr lvl="1"/>
+            <a:r>
+              <a:rPr lang="en-US" dirty="0"/>
+              <a:t>It will support deep-indexing (indexes of fields deep into object props and arrays)</a:t>
+            </a:r>
+          </a:p>
+          <a:p>
+            <a:pPr lvl="1"/>
+            <a:r>
+              <a:rPr lang="en-US" dirty="0"/>
+              <a:t>It will use the client-side to execute commands directly</a:t>
+            </a:r>
+          </a:p>
+          <a:p>
+            <a:r>
+              <a:rPr lang="en-US" dirty="0"/>
+              <a:t>The DB class:</a:t>
+            </a:r>
+          </a:p>
+          <a:p>
+            <a:pPr lvl="1"/>
+            <a:r>
+              <a:rPr lang="en-US" dirty="0"/>
+              <a:t>Will expose an advanced global search (using the ZWRITE call from the GUI that allows:</a:t>
+            </a:r>
+          </a:p>
+          <a:p>
+            <a:pPr lvl="2"/>
+            <a:r>
+              <a:rPr lang="en-US" dirty="0"/>
+              <a:t>Ranges on subscripts</a:t>
+            </a:r>
+          </a:p>
+          <a:p>
+            <a:pPr lvl="2"/>
+            <a:r>
+              <a:rPr lang="en-US" dirty="0"/>
+              <a:t>Search backwards (still using ranges)</a:t>
+            </a:r>
+          </a:p>
+          <a:p>
+            <a:pPr lvl="2"/>
+            <a:r>
+              <a:rPr lang="en-US"/>
+              <a:t>Directly supports </a:t>
+            </a:r>
+            <a:r>
+              <a:rPr lang="en-US" dirty="0"/>
+              <a:t>lazy-fetching (needed for large global)</a:t>
+            </a:r>
+          </a:p>
+          <a:p>
+            <a:endParaRPr lang="en-US" dirty="0"/>
+          </a:p>
+          <a:p>
+            <a:endParaRPr lang="en-NL" dirty="0"/>
           </a:p>
         </p:txBody>
       </p:sp>
     </p:spTree>
     <p:extLst>
       <p:ext uri="{BB962C8B-B14F-4D97-AF65-F5344CB8AC3E}">
-        <p14:creationId xmlns:p14="http://schemas.microsoft.com/office/powerpoint/2010/main" val="4078133730"/>
+        <p14:creationId xmlns:p14="http://schemas.microsoft.com/office/powerpoint/2010/main" val="3545671728"/>
       </p:ext>
     </p:extLst>
   </p:cSld>
@@ -27043,6 +23953,260 @@
 </file>
 
 <file path=ppt/slides/slide2.xml><?xml version="1.0" encoding="utf-8"?>
+<p:sld xmlns:a="http://schemas.openxmlformats.org/drawingml/2006/main" xmlns:r="http://schemas.openxmlformats.org/officeDocument/2006/relationships" xmlns:p="http://schemas.openxmlformats.org/presentationml/2006/main">
+  <p:cSld>
+    <p:spTree>
+      <p:nvGrpSpPr>
+        <p:cNvPr id="1" name=""/>
+        <p:cNvGrpSpPr/>
+        <p:nvPr/>
+      </p:nvGrpSpPr>
+      <p:grpSpPr>
+        <a:xfrm>
+          <a:off x="0" y="0"/>
+          <a:ext cx="0" cy="0"/>
+          <a:chOff x="0" y="0"/>
+          <a:chExt cx="0" cy="0"/>
+        </a:xfrm>
+      </p:grpSpPr>
+      <p:sp>
+        <p:nvSpPr>
+          <p:cNvPr id="2" name="Title 1">
+            <a:extLst>
+              <a:ext uri="{FF2B5EF4-FFF2-40B4-BE49-F238E27FC236}">
+                <a16:creationId xmlns:a16="http://schemas.microsoft.com/office/drawing/2014/main" id="{AAFD5D0B-3FF4-4FED-DDC8-D173C4403E65}"/>
+              </a:ext>
+            </a:extLst>
+          </p:cNvPr>
+          <p:cNvSpPr>
+            <a:spLocks noGrp="1"/>
+          </p:cNvSpPr>
+          <p:nvPr>
+            <p:ph type="title"/>
+          </p:nvPr>
+        </p:nvSpPr>
+        <p:spPr/>
+        <p:txBody>
+          <a:bodyPr/>
+          <a:lstStyle/>
+          <a:p>
+            <a:r>
+              <a:rPr lang="en-US" dirty="0"/>
+              <a:t>Private comment</a:t>
+            </a:r>
+            <a:endParaRPr lang="en-NL" dirty="0"/>
+          </a:p>
+        </p:txBody>
+      </p:sp>
+      <p:sp>
+        <p:nvSpPr>
+          <p:cNvPr id="3" name="Content Placeholder 2">
+            <a:extLst>
+              <a:ext uri="{FF2B5EF4-FFF2-40B4-BE49-F238E27FC236}">
+                <a16:creationId xmlns:a16="http://schemas.microsoft.com/office/drawing/2014/main" id="{6ECD4B7A-F343-5BCB-94C9-E80EB92EE397}"/>
+              </a:ext>
+            </a:extLst>
+          </p:cNvPr>
+          <p:cNvSpPr>
+            <a:spLocks noGrp="1"/>
+          </p:cNvSpPr>
+          <p:nvPr>
+            <p:ph idx="1"/>
+          </p:nvPr>
+        </p:nvSpPr>
+        <p:spPr/>
+        <p:txBody>
+          <a:bodyPr>
+            <a:normAutofit lnSpcReduction="10000"/>
+          </a:bodyPr>
+          <a:lstStyle/>
+          <a:p>
+            <a:r>
+              <a:rPr lang="en-US" dirty="0"/>
+              <a:t>Practically every database in the market has a remote access through sockets</a:t>
+            </a:r>
+          </a:p>
+          <a:p>
+            <a:r>
+              <a:rPr lang="en-US" dirty="0"/>
+              <a:t>One of the main reasons is the growing amount of processed data, leaving horizontal back-end scalability (multiple servers behind a load balancer) accessing a monolithic database a good compromise.</a:t>
+            </a:r>
+          </a:p>
+          <a:p>
+            <a:r>
+              <a:rPr lang="en-US" dirty="0"/>
+              <a:t>At the same time, executing only pure data API running on the server and moving all the business-tiers to external machines increase the power of the database server allowing a monolithic system to handle more traffic.</a:t>
+            </a:r>
+          </a:p>
+          <a:p>
+            <a:r>
+              <a:rPr lang="en-US" dirty="0" err="1"/>
+              <a:t>GTm</a:t>
+            </a:r>
+            <a:r>
+              <a:rPr lang="en-US" dirty="0"/>
+              <a:t> and YottaDB don’t have remote access, but I can understand that it is not easy to find the right compromise talking to remote servers with foreign programming languages</a:t>
+            </a:r>
+          </a:p>
+          <a:p>
+            <a:pPr lvl="1"/>
+            <a:endParaRPr lang="en-NL" dirty="0"/>
+          </a:p>
+        </p:txBody>
+      </p:sp>
+    </p:spTree>
+    <p:extLst>
+      <p:ext uri="{BB962C8B-B14F-4D97-AF65-F5344CB8AC3E}">
+        <p14:creationId xmlns:p14="http://schemas.microsoft.com/office/powerpoint/2010/main" val="2240125713"/>
+      </p:ext>
+    </p:extLst>
+  </p:cSld>
+  <p:clrMapOvr>
+    <a:masterClrMapping/>
+  </p:clrMapOvr>
+</p:sld>
+</file>
+
+<file path=ppt/slides/slide3.xml><?xml version="1.0" encoding="utf-8"?>
+<p:sld xmlns:a="http://schemas.openxmlformats.org/drawingml/2006/main" xmlns:r="http://schemas.openxmlformats.org/officeDocument/2006/relationships" xmlns:p="http://schemas.openxmlformats.org/presentationml/2006/main">
+  <p:cSld>
+    <p:spTree>
+      <p:nvGrpSpPr>
+        <p:cNvPr id="1" name="">
+          <a:extLst>
+            <a:ext uri="{FF2B5EF4-FFF2-40B4-BE49-F238E27FC236}">
+              <a16:creationId xmlns:a16="http://schemas.microsoft.com/office/drawing/2014/main" id="{932B73CC-7ECC-7075-0FFC-14EB9A731C77}"/>
+            </a:ext>
+          </a:extLst>
+        </p:cNvPr>
+        <p:cNvGrpSpPr/>
+        <p:nvPr/>
+      </p:nvGrpSpPr>
+      <p:grpSpPr>
+        <a:xfrm>
+          <a:off x="0" y="0"/>
+          <a:ext cx="0" cy="0"/>
+          <a:chOff x="0" y="0"/>
+          <a:chExt cx="0" cy="0"/>
+        </a:xfrm>
+      </p:grpSpPr>
+      <p:sp>
+        <p:nvSpPr>
+          <p:cNvPr id="2" name="Title 1">
+            <a:extLst>
+              <a:ext uri="{FF2B5EF4-FFF2-40B4-BE49-F238E27FC236}">
+                <a16:creationId xmlns:a16="http://schemas.microsoft.com/office/drawing/2014/main" id="{E56B026E-8CEF-8EBE-7D93-0A0EE6BAB81F}"/>
+              </a:ext>
+            </a:extLst>
+          </p:cNvPr>
+          <p:cNvSpPr>
+            <a:spLocks noGrp="1"/>
+          </p:cNvSpPr>
+          <p:nvPr>
+            <p:ph type="title"/>
+          </p:nvPr>
+        </p:nvSpPr>
+        <p:spPr/>
+        <p:txBody>
+          <a:bodyPr/>
+          <a:lstStyle/>
+          <a:p>
+            <a:r>
+              <a:rPr lang="en-US" dirty="0"/>
+              <a:t>Private comment</a:t>
+            </a:r>
+            <a:endParaRPr lang="en-NL" dirty="0"/>
+          </a:p>
+        </p:txBody>
+      </p:sp>
+      <p:sp>
+        <p:nvSpPr>
+          <p:cNvPr id="3" name="Content Placeholder 2">
+            <a:extLst>
+              <a:ext uri="{FF2B5EF4-FFF2-40B4-BE49-F238E27FC236}">
+                <a16:creationId xmlns:a16="http://schemas.microsoft.com/office/drawing/2014/main" id="{D2EC6879-A4B1-89EF-4659-2698C7501C18}"/>
+              </a:ext>
+            </a:extLst>
+          </p:cNvPr>
+          <p:cNvSpPr>
+            <a:spLocks noGrp="1"/>
+          </p:cNvSpPr>
+          <p:nvPr>
+            <p:ph idx="1"/>
+          </p:nvPr>
+        </p:nvSpPr>
+        <p:spPr/>
+        <p:txBody>
+          <a:bodyPr>
+            <a:normAutofit/>
+          </a:bodyPr>
+          <a:lstStyle/>
+          <a:p>
+            <a:r>
+              <a:rPr lang="en-US" dirty="0"/>
+              <a:t>That’s why Mind fill all the gaps:</a:t>
+            </a:r>
+          </a:p>
+          <a:p>
+            <a:pPr lvl="1"/>
+            <a:r>
+              <a:rPr lang="en-US" dirty="0"/>
+              <a:t>Talks M to M programmers and </a:t>
+            </a:r>
+            <a:r>
+              <a:rPr lang="en-US" dirty="0" err="1"/>
+              <a:t>js</a:t>
+            </a:r>
+            <a:r>
+              <a:rPr lang="en-US" dirty="0"/>
+              <a:t> / java / Go to remote programmers</a:t>
+            </a:r>
+          </a:p>
+          <a:p>
+            <a:pPr lvl="1"/>
+            <a:r>
+              <a:rPr lang="en-US" dirty="0"/>
+              <a:t>Expose data in back-end “standard” formats (data-types, Objects) for smoother integration</a:t>
+            </a:r>
+          </a:p>
+          <a:p>
+            <a:r>
+              <a:rPr lang="en-US" dirty="0"/>
+              <a:t>It is the natural “remote extension” of the multi-language packages YottaDB already offers…</a:t>
+            </a:r>
+          </a:p>
+          <a:p>
+            <a:r>
+              <a:rPr lang="en-US" dirty="0"/>
+              <a:t>It removes the need to have ALL the client’s code running on the database server, which is now the case (and, in some situation, a limitation for potential customers)</a:t>
+            </a:r>
+          </a:p>
+          <a:p>
+            <a:r>
+              <a:rPr lang="en-US" dirty="0"/>
+              <a:t>Why not offer both?</a:t>
+            </a:r>
+          </a:p>
+          <a:p>
+            <a:pPr lvl="1"/>
+            <a:endParaRPr lang="en-NL" dirty="0"/>
+          </a:p>
+        </p:txBody>
+      </p:sp>
+    </p:spTree>
+    <p:extLst>
+      <p:ext uri="{BB962C8B-B14F-4D97-AF65-F5344CB8AC3E}">
+        <p14:creationId xmlns:p14="http://schemas.microsoft.com/office/powerpoint/2010/main" val="3005701212"/>
+      </p:ext>
+    </p:extLst>
+  </p:cSld>
+  <p:clrMapOvr>
+    <a:masterClrMapping/>
+  </p:clrMapOvr>
+</p:sld>
+</file>
+
+<file path=ppt/slides/slide4.xml><?xml version="1.0" encoding="utf-8"?>
 <p:sld xmlns:a="http://schemas.openxmlformats.org/drawingml/2006/main" xmlns:r="http://schemas.openxmlformats.org/officeDocument/2006/relationships" xmlns:p="http://schemas.openxmlformats.org/presentationml/2006/main">
   <p:cSld>
     <p:bg>
@@ -27155,7 +24319,7 @@
 </p:sld>
 </file>
 
-<file path=ppt/slides/slide3.xml><?xml version="1.0" encoding="utf-8"?>
+<file path=ppt/slides/slide5.xml><?xml version="1.0" encoding="utf-8"?>
 <p:sld xmlns:a="http://schemas.openxmlformats.org/drawingml/2006/main" xmlns:r="http://schemas.openxmlformats.org/officeDocument/2006/relationships" xmlns:p="http://schemas.openxmlformats.org/presentationml/2006/main">
   <p:cSld>
     <p:spTree>
@@ -27286,7 +24450,7 @@
 </p:sld>
 </file>
 
-<file path=ppt/slides/slide4.xml><?xml version="1.0" encoding="utf-8"?>
+<file path=ppt/slides/slide6.xml><?xml version="1.0" encoding="utf-8"?>
 <p:sld xmlns:a="http://schemas.openxmlformats.org/drawingml/2006/main" xmlns:r="http://schemas.openxmlformats.org/officeDocument/2006/relationships" xmlns:p="http://schemas.openxmlformats.org/presentationml/2006/main">
   <p:cSld>
     <p:bg>
@@ -27369,7 +24533,7 @@
             <p:ph idx="1"/>
             <p:extLst>
               <p:ext uri="{D42A27DB-BD31-4B8C-83A1-F6EECF244321}">
-                <p14:modId xmlns:p14="http://schemas.microsoft.com/office/powerpoint/2010/main" val="1780370495"/>
+                <p14:modId xmlns:p14="http://schemas.microsoft.com/office/powerpoint/2010/main" val="1191674732"/>
               </p:ext>
               <p:ext uri="{E7BDC344-281C-4309-B0C6-D0EE65EED2A8}">
                 <p202:designPr xmlns:p202="http://schemas.microsoft.com/office/powerpoint/2020/02/main">
@@ -27396,260 +24560,6 @@
     <p:extLst>
       <p:ext uri="{BB962C8B-B14F-4D97-AF65-F5344CB8AC3E}">
         <p14:creationId xmlns:p14="http://schemas.microsoft.com/office/powerpoint/2010/main" val="2532632543"/>
-      </p:ext>
-    </p:extLst>
-  </p:cSld>
-  <p:clrMapOvr>
-    <a:masterClrMapping/>
-  </p:clrMapOvr>
-</p:sld>
-</file>
-
-<file path=ppt/slides/slide5.xml><?xml version="1.0" encoding="utf-8"?>
-<p:sld xmlns:a="http://schemas.openxmlformats.org/drawingml/2006/main" xmlns:r="http://schemas.openxmlformats.org/officeDocument/2006/relationships" xmlns:p="http://schemas.openxmlformats.org/presentationml/2006/main">
-  <p:cSld>
-    <p:spTree>
-      <p:nvGrpSpPr>
-        <p:cNvPr id="1" name=""/>
-        <p:cNvGrpSpPr/>
-        <p:nvPr/>
-      </p:nvGrpSpPr>
-      <p:grpSpPr>
-        <a:xfrm>
-          <a:off x="0" y="0"/>
-          <a:ext cx="0" cy="0"/>
-          <a:chOff x="0" y="0"/>
-          <a:chExt cx="0" cy="0"/>
-        </a:xfrm>
-      </p:grpSpPr>
-      <p:sp>
-        <p:nvSpPr>
-          <p:cNvPr id="2" name="Title 1">
-            <a:extLst>
-              <a:ext uri="{FF2B5EF4-FFF2-40B4-BE49-F238E27FC236}">
-                <a16:creationId xmlns:a16="http://schemas.microsoft.com/office/drawing/2014/main" id="{AAFD5D0B-3FF4-4FED-DDC8-D173C4403E65}"/>
-              </a:ext>
-            </a:extLst>
-          </p:cNvPr>
-          <p:cNvSpPr>
-            <a:spLocks noGrp="1"/>
-          </p:cNvSpPr>
-          <p:nvPr>
-            <p:ph type="title"/>
-          </p:nvPr>
-        </p:nvSpPr>
-        <p:spPr/>
-        <p:txBody>
-          <a:bodyPr/>
-          <a:lstStyle/>
-          <a:p>
-            <a:r>
-              <a:rPr lang="en-US" dirty="0"/>
-              <a:t>Private comment</a:t>
-            </a:r>
-            <a:endParaRPr lang="en-NL" dirty="0"/>
-          </a:p>
-        </p:txBody>
-      </p:sp>
-      <p:sp>
-        <p:nvSpPr>
-          <p:cNvPr id="3" name="Content Placeholder 2">
-            <a:extLst>
-              <a:ext uri="{FF2B5EF4-FFF2-40B4-BE49-F238E27FC236}">
-                <a16:creationId xmlns:a16="http://schemas.microsoft.com/office/drawing/2014/main" id="{6ECD4B7A-F343-5BCB-94C9-E80EB92EE397}"/>
-              </a:ext>
-            </a:extLst>
-          </p:cNvPr>
-          <p:cNvSpPr>
-            <a:spLocks noGrp="1"/>
-          </p:cNvSpPr>
-          <p:nvPr>
-            <p:ph idx="1"/>
-          </p:nvPr>
-        </p:nvSpPr>
-        <p:spPr/>
-        <p:txBody>
-          <a:bodyPr>
-            <a:normAutofit lnSpcReduction="10000"/>
-          </a:bodyPr>
-          <a:lstStyle/>
-          <a:p>
-            <a:r>
-              <a:rPr lang="en-US" dirty="0"/>
-              <a:t>Practically every database in the market has a remote access through sockets</a:t>
-            </a:r>
-          </a:p>
-          <a:p>
-            <a:r>
-              <a:rPr lang="en-US" dirty="0"/>
-              <a:t>One of the main reasons is the growing amount of processed data, leaving horizontal back-end scalability (multiple servers behind a load balancer) accessing a monolithic database a good compromise.</a:t>
-            </a:r>
-          </a:p>
-          <a:p>
-            <a:r>
-              <a:rPr lang="en-US" dirty="0"/>
-              <a:t>At the same time, executing only pure data API running on the server and moving all the business-tiers to external machines increase the power of the database server allowing a monolithic system to handle more traffic.</a:t>
-            </a:r>
-          </a:p>
-          <a:p>
-            <a:r>
-              <a:rPr lang="en-US" dirty="0" err="1"/>
-              <a:t>GTm</a:t>
-            </a:r>
-            <a:r>
-              <a:rPr lang="en-US" dirty="0"/>
-              <a:t> and YottaDB don’t have remote access, but I can understand that it is not easy to find the right compromise talking to remote servers with foreign programming languages</a:t>
-            </a:r>
-          </a:p>
-          <a:p>
-            <a:pPr lvl="1"/>
-            <a:endParaRPr lang="en-NL" dirty="0"/>
-          </a:p>
-        </p:txBody>
-      </p:sp>
-    </p:spTree>
-    <p:extLst>
-      <p:ext uri="{BB962C8B-B14F-4D97-AF65-F5344CB8AC3E}">
-        <p14:creationId xmlns:p14="http://schemas.microsoft.com/office/powerpoint/2010/main" val="2240125713"/>
-      </p:ext>
-    </p:extLst>
-  </p:cSld>
-  <p:clrMapOvr>
-    <a:masterClrMapping/>
-  </p:clrMapOvr>
-</p:sld>
-</file>
-
-<file path=ppt/slides/slide6.xml><?xml version="1.0" encoding="utf-8"?>
-<p:sld xmlns:a="http://schemas.openxmlformats.org/drawingml/2006/main" xmlns:r="http://schemas.openxmlformats.org/officeDocument/2006/relationships" xmlns:p="http://schemas.openxmlformats.org/presentationml/2006/main">
-  <p:cSld>
-    <p:spTree>
-      <p:nvGrpSpPr>
-        <p:cNvPr id="1" name="">
-          <a:extLst>
-            <a:ext uri="{FF2B5EF4-FFF2-40B4-BE49-F238E27FC236}">
-              <a16:creationId xmlns:a16="http://schemas.microsoft.com/office/drawing/2014/main" id="{932B73CC-7ECC-7075-0FFC-14EB9A731C77}"/>
-            </a:ext>
-          </a:extLst>
-        </p:cNvPr>
-        <p:cNvGrpSpPr/>
-        <p:nvPr/>
-      </p:nvGrpSpPr>
-      <p:grpSpPr>
-        <a:xfrm>
-          <a:off x="0" y="0"/>
-          <a:ext cx="0" cy="0"/>
-          <a:chOff x="0" y="0"/>
-          <a:chExt cx="0" cy="0"/>
-        </a:xfrm>
-      </p:grpSpPr>
-      <p:sp>
-        <p:nvSpPr>
-          <p:cNvPr id="2" name="Title 1">
-            <a:extLst>
-              <a:ext uri="{FF2B5EF4-FFF2-40B4-BE49-F238E27FC236}">
-                <a16:creationId xmlns:a16="http://schemas.microsoft.com/office/drawing/2014/main" id="{E56B026E-8CEF-8EBE-7D93-0A0EE6BAB81F}"/>
-              </a:ext>
-            </a:extLst>
-          </p:cNvPr>
-          <p:cNvSpPr>
-            <a:spLocks noGrp="1"/>
-          </p:cNvSpPr>
-          <p:nvPr>
-            <p:ph type="title"/>
-          </p:nvPr>
-        </p:nvSpPr>
-        <p:spPr/>
-        <p:txBody>
-          <a:bodyPr/>
-          <a:lstStyle/>
-          <a:p>
-            <a:r>
-              <a:rPr lang="en-US" dirty="0"/>
-              <a:t>Private comment</a:t>
-            </a:r>
-            <a:endParaRPr lang="en-NL" dirty="0"/>
-          </a:p>
-        </p:txBody>
-      </p:sp>
-      <p:sp>
-        <p:nvSpPr>
-          <p:cNvPr id="3" name="Content Placeholder 2">
-            <a:extLst>
-              <a:ext uri="{FF2B5EF4-FFF2-40B4-BE49-F238E27FC236}">
-                <a16:creationId xmlns:a16="http://schemas.microsoft.com/office/drawing/2014/main" id="{D2EC6879-A4B1-89EF-4659-2698C7501C18}"/>
-              </a:ext>
-            </a:extLst>
-          </p:cNvPr>
-          <p:cNvSpPr>
-            <a:spLocks noGrp="1"/>
-          </p:cNvSpPr>
-          <p:nvPr>
-            <p:ph idx="1"/>
-          </p:nvPr>
-        </p:nvSpPr>
-        <p:spPr/>
-        <p:txBody>
-          <a:bodyPr>
-            <a:normAutofit/>
-          </a:bodyPr>
-          <a:lstStyle/>
-          <a:p>
-            <a:r>
-              <a:rPr lang="en-US" dirty="0"/>
-              <a:t>That’s why Mind fill all the gaps:</a:t>
-            </a:r>
-          </a:p>
-          <a:p>
-            <a:pPr lvl="1"/>
-            <a:r>
-              <a:rPr lang="en-US" dirty="0"/>
-              <a:t>Talks M to M programmers and </a:t>
-            </a:r>
-            <a:r>
-              <a:rPr lang="en-US" dirty="0" err="1"/>
-              <a:t>js</a:t>
-            </a:r>
-            <a:r>
-              <a:rPr lang="en-US" dirty="0"/>
-              <a:t> / java / Go to remote programmers</a:t>
-            </a:r>
-          </a:p>
-          <a:p>
-            <a:pPr lvl="1"/>
-            <a:r>
-              <a:rPr lang="en-US" dirty="0"/>
-              <a:t>Expose data in back-end “standard” formats (data-types, Objects) for smoother integration</a:t>
-            </a:r>
-          </a:p>
-          <a:p>
-            <a:r>
-              <a:rPr lang="en-US" dirty="0"/>
-              <a:t>It is the natural “remote extension” of the multi-language packages YottaDB already offers…</a:t>
-            </a:r>
-          </a:p>
-          <a:p>
-            <a:r>
-              <a:rPr lang="en-US" dirty="0"/>
-              <a:t>It removes the need to have ALL the client’s code running on the database server, which is now the case (and, in some situation, a limitation for potential customers)</a:t>
-            </a:r>
-          </a:p>
-          <a:p>
-            <a:r>
-              <a:rPr lang="en-US" dirty="0"/>
-              <a:t>Why not offer both?</a:t>
-            </a:r>
-          </a:p>
-          <a:p>
-            <a:pPr lvl="1"/>
-            <a:endParaRPr lang="en-NL" dirty="0"/>
-          </a:p>
-        </p:txBody>
-      </p:sp>
-    </p:spTree>
-    <p:extLst>
-      <p:ext uri="{BB962C8B-B14F-4D97-AF65-F5344CB8AC3E}">
-        <p14:creationId xmlns:p14="http://schemas.microsoft.com/office/powerpoint/2010/main" val="3005701212"/>
       </p:ext>
     </p:extLst>
   </p:cSld>
@@ -28516,7 +25426,7 @@
             <a:pPr algn="ctr"/>
             <a:r>
               <a:rPr lang="en-US" dirty="0"/>
-              <a:t>Data layer API</a:t>
+              <a:t>new API</a:t>
             </a:r>
             <a:endParaRPr lang="en-NL" dirty="0"/>
           </a:p>
@@ -28598,6 +25508,54 @@
           <a:bodyPr/>
           <a:lstStyle/>
           <a:p>
+            <a:endParaRPr lang="en-NL" dirty="0"/>
+          </a:p>
+        </p:txBody>
+      </p:sp>
+      <p:sp>
+        <p:nvSpPr>
+          <p:cNvPr id="3" name="Speech Bubble: Rectangle with Corners Rounded 2">
+            <a:extLst>
+              <a:ext uri="{FF2B5EF4-FFF2-40B4-BE49-F238E27FC236}">
+                <a16:creationId xmlns:a16="http://schemas.microsoft.com/office/drawing/2014/main" id="{B3C09524-0BFC-9A22-794B-436AC536DD53}"/>
+              </a:ext>
+            </a:extLst>
+          </p:cNvPr>
+          <p:cNvSpPr/>
+          <p:nvPr/>
+        </p:nvSpPr>
+        <p:spPr>
+          <a:xfrm>
+            <a:off x="9750535" y="1243211"/>
+            <a:ext cx="1252331" cy="1701016"/>
+          </a:xfrm>
+          <a:prstGeom prst="wedgeRoundRectCallout">
+            <a:avLst/>
+          </a:prstGeom>
+        </p:spPr>
+        <p:style>
+          <a:lnRef idx="2">
+            <a:schemeClr val="accent6"/>
+          </a:lnRef>
+          <a:fillRef idx="1">
+            <a:schemeClr val="lt1"/>
+          </a:fillRef>
+          <a:effectRef idx="0">
+            <a:schemeClr val="accent6"/>
+          </a:effectRef>
+          <a:fontRef idx="minor">
+            <a:schemeClr val="dk1"/>
+          </a:fontRef>
+        </p:style>
+        <p:txBody>
+          <a:bodyPr rtlCol="0" anchor="ctr"/>
+          <a:lstStyle/>
+          <a:p>
+            <a:pPr algn="ctr"/>
+            <a:r>
+              <a:rPr lang="en-US" dirty="0"/>
+              <a:t>Your existing code</a:t>
+            </a:r>
             <a:endParaRPr lang="en-NL" dirty="0"/>
           </a:p>
         </p:txBody>
@@ -28690,7 +25648,7 @@
           <a:p>
             <a:r>
               <a:rPr lang="en-US" dirty="0"/>
-              <a:t>Describe you return value data-type</a:t>
+              <a:t>Describe your (optional) return value data-type</a:t>
             </a:r>
           </a:p>
           <a:p>

--- a/docs/slides/def1.pptx
+++ b/docs/slides/def1.pptx
@@ -2649,14 +2649,6 @@
               <a:spcPct val="100000"/>
             </a:lnSpc>
           </a:pPr>
-          <a:endParaRPr lang="en-US" dirty="0"/>
-        </a:p>
-        <a:p>
-          <a:pPr>
-            <a:lnSpc>
-              <a:spcPct val="100000"/>
-            </a:lnSpc>
-          </a:pPr>
           <a:r>
             <a:rPr lang="en-US" dirty="0"/>
             <a:t>Currently nodejs is fully supported.</a:t>
@@ -2891,7 +2883,7 @@
       </dgm:t>
     </dgm:pt>
     <dgm:pt modelId="{06204C76-8052-4671-8722-9895BD95AC98}">
-      <dgm:prSet/>
+      <dgm:prSet custT="1"/>
       <dgm:spPr/>
       <dgm:t>
         <a:bodyPr/>
@@ -2903,7 +2895,7 @@
             </a:lnSpc>
           </a:pPr>
           <a:r>
-            <a:rPr lang="en-US" dirty="0"/>
+            <a:rPr lang="en-US" sz="1200" dirty="0"/>
             <a:t>MIND Server gets installed as standard YottaDB plugin on top of your YottaDB installation with a one-liner command.</a:t>
           </a:r>
         </a:p>
@@ -2914,7 +2906,7 @@
             </a:lnSpc>
           </a:pPr>
           <a:r>
-            <a:rPr lang="en-US" dirty="0"/>
+            <a:rPr lang="en-US" sz="1200" dirty="0"/>
             <a:t>You can then either run it directly of configure it using the .conf file or command line switches.</a:t>
           </a:r>
         </a:p>
@@ -2991,7 +2983,7 @@
       </dgm:t>
     </dgm:pt>
     <dgm:pt modelId="{4C74B0FE-0F44-43D7-940D-B9AF6ABF1025}">
-      <dgm:prSet/>
+      <dgm:prSet custT="1"/>
       <dgm:spPr/>
       <dgm:t>
         <a:bodyPr/>
@@ -3003,7 +2995,7 @@
             </a:lnSpc>
           </a:pPr>
           <a:r>
-            <a:rPr lang="en-US" dirty="0"/>
+            <a:rPr lang="en-US" sz="1200" dirty="0"/>
             <a:t>Keeping in mind that back-end languages use data-types and Objects, we created data translators to move data to and from YottaDB.</a:t>
           </a:r>
         </a:p>
@@ -3014,7 +3006,7 @@
             </a:lnSpc>
           </a:pPr>
           <a:r>
-            <a:rPr lang="en-US" dirty="0"/>
+            <a:rPr lang="en-US" sz="1200" dirty="0"/>
             <a:t>And, of course, we support JSON in both directions.</a:t>
           </a:r>
         </a:p>
@@ -3091,7 +3083,7 @@
       </dgm:t>
     </dgm:pt>
     <dgm:pt modelId="{FABA06FE-F150-48B5-B3D7-2915E3C41ABD}">
-      <dgm:prSet/>
+      <dgm:prSet custT="1"/>
       <dgm:spPr/>
       <dgm:t>
         <a:bodyPr/>
@@ -3103,7 +3095,7 @@
             </a:lnSpc>
           </a:pPr>
           <a:r>
-            <a:rPr lang="en-US" dirty="0"/>
+            <a:rPr lang="en-US" sz="1200" dirty="0"/>
             <a:t>Once you describe your MUMPS functions / procedure in a JSON file, they will “magically” appear in the client driver and ready to use.</a:t>
           </a:r>
         </a:p>
@@ -3114,7 +3106,7 @@
             </a:lnSpc>
           </a:pPr>
           <a:r>
-            <a:rPr lang="en-US" dirty="0"/>
+            <a:rPr lang="en-US" sz="1200" dirty="0"/>
             <a:t>Additionally, automatic  validation of the supplied parameters is performed with no code needed.</a:t>
           </a:r>
         </a:p>
@@ -3192,7 +3184,7 @@
       </dgm:t>
     </dgm:pt>
     <dgm:pt modelId="{341895CC-F5AE-4185-A7B4-20DAAD306EDB}">
-      <dgm:prSet/>
+      <dgm:prSet custT="1"/>
       <dgm:spPr/>
       <dgm:t>
         <a:bodyPr/>
@@ -3204,10 +3196,10 @@
             </a:lnSpc>
           </a:pPr>
           <a:r>
-            <a:rPr lang="en-US" dirty="0"/>
+            <a:rPr lang="en-US" sz="1200" dirty="0"/>
             <a:t>You can call your existing code directly, specifying parameters and (eventual) return value.</a:t>
           </a:r>
-          <a:endParaRPr lang="en-NL" dirty="0"/>
+          <a:endParaRPr lang="en-NL" sz="1200" dirty="0"/>
         </a:p>
       </dgm:t>
     </dgm:pt>
@@ -3234,7 +3226,7 @@
       </dgm:t>
     </dgm:pt>
     <dgm:pt modelId="{C0297382-340E-4BD9-9668-818CC13B2B4C}">
-      <dgm:prSet/>
+      <dgm:prSet custT="1"/>
       <dgm:spPr/>
       <dgm:t>
         <a:bodyPr/>
@@ -3246,10 +3238,10 @@
             </a:lnSpc>
           </a:pPr>
           <a:r>
-            <a:rPr lang="en-US" dirty="0"/>
+            <a:rPr lang="en-US" sz="1200" dirty="0"/>
             <a:t>Once you describe your code in the JSON file, it is available in the client right away</a:t>
           </a:r>
-          <a:endParaRPr lang="en-NL" dirty="0"/>
+          <a:endParaRPr lang="en-NL" sz="1200" dirty="0"/>
         </a:p>
       </dgm:t>
     </dgm:pt>
@@ -4188,21 +4180,6 @@
             </a:spcAft>
             <a:buNone/>
           </a:pPr>
-          <a:endParaRPr lang="en-US" sz="1400" kern="1200" dirty="0"/>
-        </a:p>
-        <a:p>
-          <a:pPr marL="0" lvl="0" indent="0" algn="l" defTabSz="622300">
-            <a:lnSpc>
-              <a:spcPct val="100000"/>
-            </a:lnSpc>
-            <a:spcBef>
-              <a:spcPct val="0"/>
-            </a:spcBef>
-            <a:spcAft>
-              <a:spcPct val="35000"/>
-            </a:spcAft>
-            <a:buNone/>
-          </a:pPr>
           <a:r>
             <a:rPr lang="en-US" sz="1400" kern="1200" dirty="0"/>
             <a:t>Currently nodejs is fully supported.</a:t>
@@ -4356,12 +4333,12 @@
         <a:fontRef idx="minor"/>
       </dsp:style>
       <dsp:txBody>
-        <a:bodyPr spcFirstLastPara="0" vert="horz" wrap="square" lIns="137160" tIns="12700" rIns="12700" bIns="12700" numCol="1" spcCol="1270" anchor="t" anchorCtr="0">
+        <a:bodyPr spcFirstLastPara="0" vert="horz" wrap="square" lIns="137160" tIns="15240" rIns="15240" bIns="15240" numCol="1" spcCol="1270" anchor="t" anchorCtr="0">
           <a:noAutofit/>
         </a:bodyPr>
         <a:lstStyle/>
         <a:p>
-          <a:pPr marL="0" lvl="0" indent="0" algn="l" defTabSz="444500">
+          <a:pPr marL="0" lvl="0" indent="0" algn="l" defTabSz="533400">
             <a:lnSpc>
               <a:spcPct val="100000"/>
             </a:lnSpc>
@@ -4374,12 +4351,12 @@
             <a:buNone/>
           </a:pPr>
           <a:r>
-            <a:rPr lang="en-US" sz="1000" kern="1200" dirty="0"/>
+            <a:rPr lang="en-US" sz="1200" kern="1200" dirty="0"/>
             <a:t>MIND Server gets installed as standard YottaDB plugin on top of your YottaDB installation with a one-liner command.</a:t>
           </a:r>
         </a:p>
         <a:p>
-          <a:pPr marL="0" lvl="0" indent="0" algn="l" defTabSz="444500">
+          <a:pPr marL="0" lvl="0" indent="0" algn="l" defTabSz="533400">
             <a:lnSpc>
               <a:spcPct val="100000"/>
             </a:lnSpc>
@@ -4392,7 +4369,7 @@
             <a:buNone/>
           </a:pPr>
           <a:r>
-            <a:rPr lang="en-US" sz="1000" kern="1200" dirty="0"/>
+            <a:rPr lang="en-US" sz="1200" kern="1200" dirty="0"/>
             <a:t>You can then either run it directly of configure it using the .conf file or command line switches.</a:t>
           </a:r>
         </a:p>
@@ -4495,12 +4472,12 @@
         <a:fontRef idx="minor"/>
       </dsp:style>
       <dsp:txBody>
-        <a:bodyPr spcFirstLastPara="0" vert="horz" wrap="square" lIns="137160" tIns="12700" rIns="12700" bIns="12700" numCol="1" spcCol="1270" anchor="t" anchorCtr="0">
+        <a:bodyPr spcFirstLastPara="0" vert="horz" wrap="square" lIns="137160" tIns="15240" rIns="15240" bIns="15240" numCol="1" spcCol="1270" anchor="t" anchorCtr="0">
           <a:noAutofit/>
         </a:bodyPr>
         <a:lstStyle/>
         <a:p>
-          <a:pPr marL="0" lvl="0" indent="0" algn="l" defTabSz="444500">
+          <a:pPr marL="0" lvl="0" indent="0" algn="l" defTabSz="533400">
             <a:lnSpc>
               <a:spcPct val="100000"/>
             </a:lnSpc>
@@ -4513,12 +4490,12 @@
             <a:buNone/>
           </a:pPr>
           <a:r>
-            <a:rPr lang="en-US" sz="1000" kern="1200" dirty="0"/>
+            <a:rPr lang="en-US" sz="1200" kern="1200" dirty="0"/>
             <a:t>Keeping in mind that back-end languages use data-types and Objects, we created data translators to move data to and from YottaDB.</a:t>
           </a:r>
         </a:p>
         <a:p>
-          <a:pPr marL="0" lvl="0" indent="0" algn="l" defTabSz="444500">
+          <a:pPr marL="0" lvl="0" indent="0" algn="l" defTabSz="533400">
             <a:lnSpc>
               <a:spcPct val="100000"/>
             </a:lnSpc>
@@ -4531,7 +4508,7 @@
             <a:buNone/>
           </a:pPr>
           <a:r>
-            <a:rPr lang="en-US" sz="1000" kern="1200" dirty="0"/>
+            <a:rPr lang="en-US" sz="1200" kern="1200" dirty="0"/>
             <a:t>And, of course, we support JSON in both directions.</a:t>
           </a:r>
         </a:p>
@@ -4634,12 +4611,12 @@
         <a:fontRef idx="minor"/>
       </dsp:style>
       <dsp:txBody>
-        <a:bodyPr spcFirstLastPara="0" vert="horz" wrap="square" lIns="137160" tIns="12700" rIns="12700" bIns="12700" numCol="1" spcCol="1270" anchor="t" anchorCtr="0">
+        <a:bodyPr spcFirstLastPara="0" vert="horz" wrap="square" lIns="137160" tIns="15240" rIns="15240" bIns="15240" numCol="1" spcCol="1270" anchor="t" anchorCtr="0">
           <a:noAutofit/>
         </a:bodyPr>
         <a:lstStyle/>
         <a:p>
-          <a:pPr marL="0" lvl="0" indent="0" algn="l" defTabSz="444500">
+          <a:pPr marL="0" lvl="0" indent="0" algn="l" defTabSz="533400">
             <a:lnSpc>
               <a:spcPct val="100000"/>
             </a:lnSpc>
@@ -4652,12 +4629,12 @@
             <a:buNone/>
           </a:pPr>
           <a:r>
-            <a:rPr lang="en-US" sz="1000" kern="1200" dirty="0"/>
+            <a:rPr lang="en-US" sz="1200" kern="1200" dirty="0"/>
             <a:t>Once you describe your MUMPS functions / procedure in a JSON file, they will “magically” appear in the client driver and ready to use.</a:t>
           </a:r>
         </a:p>
         <a:p>
-          <a:pPr marL="0" lvl="0" indent="0" algn="l" defTabSz="444500">
+          <a:pPr marL="0" lvl="0" indent="0" algn="l" defTabSz="533400">
             <a:lnSpc>
               <a:spcPct val="100000"/>
             </a:lnSpc>
@@ -4670,7 +4647,7 @@
             <a:buNone/>
           </a:pPr>
           <a:r>
-            <a:rPr lang="en-US" sz="1000" kern="1200" dirty="0"/>
+            <a:rPr lang="en-US" sz="1200" kern="1200" dirty="0"/>
             <a:t>Additionally, automatic  validation of the supplied parameters is performed with no code needed.</a:t>
           </a:r>
         </a:p>
@@ -4774,12 +4751,12 @@
         <a:fontRef idx="minor"/>
       </dsp:style>
       <dsp:txBody>
-        <a:bodyPr spcFirstLastPara="0" vert="horz" wrap="square" lIns="137160" tIns="12700" rIns="12700" bIns="12700" numCol="1" spcCol="1270" anchor="t" anchorCtr="0">
+        <a:bodyPr spcFirstLastPara="0" vert="horz" wrap="square" lIns="137160" tIns="15240" rIns="15240" bIns="15240" numCol="1" spcCol="1270" anchor="t" anchorCtr="0">
           <a:noAutofit/>
         </a:bodyPr>
         <a:lstStyle/>
         <a:p>
-          <a:pPr marL="0" lvl="0" indent="0" algn="l" defTabSz="444500">
+          <a:pPr marL="0" lvl="0" indent="0" algn="l" defTabSz="533400">
             <a:lnSpc>
               <a:spcPct val="100000"/>
             </a:lnSpc>
@@ -4792,13 +4769,13 @@
             <a:buNone/>
           </a:pPr>
           <a:r>
-            <a:rPr lang="en-US" sz="1000" kern="1200" dirty="0"/>
+            <a:rPr lang="en-US" sz="1200" kern="1200" dirty="0"/>
             <a:t>You can call your existing code directly, specifying parameters and (eventual) return value.</a:t>
           </a:r>
-          <a:endParaRPr lang="en-NL" sz="1000" kern="1200" dirty="0"/>
+          <a:endParaRPr lang="en-NL" sz="1200" kern="1200" dirty="0"/>
         </a:p>
         <a:p>
-          <a:pPr marL="0" lvl="0" indent="0" algn="l" defTabSz="444500">
+          <a:pPr marL="0" lvl="0" indent="0" algn="l" defTabSz="533400">
             <a:lnSpc>
               <a:spcPct val="100000"/>
             </a:lnSpc>
@@ -4811,10 +4788,10 @@
             <a:buNone/>
           </a:pPr>
           <a:r>
-            <a:rPr lang="en-US" sz="1000" kern="1200" dirty="0"/>
+            <a:rPr lang="en-US" sz="1200" kern="1200" dirty="0"/>
             <a:t>Once you describe your code in the JSON file, it is available in the client right away</a:t>
           </a:r>
-          <a:endParaRPr lang="en-NL" sz="1000" kern="1200" dirty="0"/>
+          <a:endParaRPr lang="en-NL" sz="1200" kern="1200" dirty="0"/>
         </a:p>
       </dsp:txBody>
       <dsp:txXfrm>
@@ -10446,7 +10423,7 @@
           <a:p>
             <a:fld id="{3E30469F-474B-44E0-9013-119402DD7996}" type="datetimeFigureOut">
               <a:rPr lang="en-NL" smtClean="0"/>
-              <a:t>27/02/2026</a:t>
+              <a:t>02/03/2026</a:t>
             </a:fld>
             <a:endParaRPr lang="en-NL"/>
           </a:p>
@@ -11541,7 +11518,7 @@
           <a:p>
             <a:fld id="{3E30469F-474B-44E0-9013-119402DD7996}" type="datetimeFigureOut">
               <a:rPr lang="en-NL" smtClean="0"/>
-              <a:t>27/02/2026</a:t>
+              <a:t>02/03/2026</a:t>
             </a:fld>
             <a:endParaRPr lang="en-NL"/>
           </a:p>
@@ -12521,7 +12498,7 @@
           <a:p>
             <a:fld id="{3E30469F-474B-44E0-9013-119402DD7996}" type="datetimeFigureOut">
               <a:rPr lang="en-NL" smtClean="0"/>
-              <a:t>27/02/2026</a:t>
+              <a:t>02/03/2026</a:t>
             </a:fld>
             <a:endParaRPr lang="en-NL"/>
           </a:p>
@@ -13655,7 +13632,7 @@
           <a:p>
             <a:fld id="{3E30469F-474B-44E0-9013-119402DD7996}" type="datetimeFigureOut">
               <a:rPr lang="en-NL" smtClean="0"/>
-              <a:t>27/02/2026</a:t>
+              <a:t>02/03/2026</a:t>
             </a:fld>
             <a:endParaRPr lang="en-NL"/>
           </a:p>
@@ -14688,7 +14665,7 @@
           <a:p>
             <a:fld id="{3E30469F-474B-44E0-9013-119402DD7996}" type="datetimeFigureOut">
               <a:rPr lang="en-NL" smtClean="0"/>
-              <a:t>27/02/2026</a:t>
+              <a:t>02/03/2026</a:t>
             </a:fld>
             <a:endParaRPr lang="en-NL"/>
           </a:p>
@@ -15348,7 +15325,7 @@
           <a:p>
             <a:fld id="{3E30469F-474B-44E0-9013-119402DD7996}" type="datetimeFigureOut">
               <a:rPr lang="en-NL" smtClean="0"/>
-              <a:t>27/02/2026</a:t>
+              <a:t>02/03/2026</a:t>
             </a:fld>
             <a:endParaRPr lang="en-NL"/>
           </a:p>
@@ -16209,7 +16186,7 @@
           <a:p>
             <a:fld id="{3E30469F-474B-44E0-9013-119402DD7996}" type="datetimeFigureOut">
               <a:rPr lang="en-NL" smtClean="0"/>
-              <a:t>27/02/2026</a:t>
+              <a:t>02/03/2026</a:t>
             </a:fld>
             <a:endParaRPr lang="en-NL"/>
           </a:p>
@@ -16399,7 +16376,7 @@
           <a:p>
             <a:fld id="{3E30469F-474B-44E0-9013-119402DD7996}" type="datetimeFigureOut">
               <a:rPr lang="en-NL" smtClean="0"/>
-              <a:t>27/02/2026</a:t>
+              <a:t>02/03/2026</a:t>
             </a:fld>
             <a:endParaRPr lang="en-NL"/>
           </a:p>
@@ -17371,7 +17348,7 @@
           <a:p>
             <a:fld id="{3E30469F-474B-44E0-9013-119402DD7996}" type="datetimeFigureOut">
               <a:rPr lang="en-NL" smtClean="0"/>
-              <a:t>27/02/2026</a:t>
+              <a:t>02/03/2026</a:t>
             </a:fld>
             <a:endParaRPr lang="en-NL"/>
           </a:p>
@@ -17582,7 +17559,7 @@
           <a:p>
             <a:fld id="{3E30469F-474B-44E0-9013-119402DD7996}" type="datetimeFigureOut">
               <a:rPr lang="en-NL" smtClean="0"/>
-              <a:t>27/02/2026</a:t>
+              <a:t>02/03/2026</a:t>
             </a:fld>
             <a:endParaRPr lang="en-NL"/>
           </a:p>
@@ -18616,7 +18593,7 @@
           <a:p>
             <a:fld id="{3E30469F-474B-44E0-9013-119402DD7996}" type="datetimeFigureOut">
               <a:rPr lang="en-NL" smtClean="0"/>
-              <a:t>27/02/2026</a:t>
+              <a:t>02/03/2026</a:t>
             </a:fld>
             <a:endParaRPr lang="en-NL"/>
           </a:p>
@@ -18888,7 +18865,7 @@
           <a:p>
             <a:fld id="{3E30469F-474B-44E0-9013-119402DD7996}" type="datetimeFigureOut">
               <a:rPr lang="en-NL" smtClean="0"/>
-              <a:t>27/02/2026</a:t>
+              <a:t>02/03/2026</a:t>
             </a:fld>
             <a:endParaRPr lang="en-NL"/>
           </a:p>
@@ -19298,7 +19275,7 @@
           <a:p>
             <a:fld id="{3E30469F-474B-44E0-9013-119402DD7996}" type="datetimeFigureOut">
               <a:rPr lang="en-NL" smtClean="0"/>
-              <a:t>27/02/2026</a:t>
+              <a:t>02/03/2026</a:t>
             </a:fld>
             <a:endParaRPr lang="en-NL"/>
           </a:p>
@@ -19425,7 +19402,7 @@
           <a:p>
             <a:fld id="{3E30469F-474B-44E0-9013-119402DD7996}" type="datetimeFigureOut">
               <a:rPr lang="en-NL" smtClean="0"/>
-              <a:t>27/02/2026</a:t>
+              <a:t>02/03/2026</a:t>
             </a:fld>
             <a:endParaRPr lang="en-NL"/>
           </a:p>
@@ -19520,7 +19497,7 @@
           <a:p>
             <a:fld id="{3E30469F-474B-44E0-9013-119402DD7996}" type="datetimeFigureOut">
               <a:rPr lang="en-NL" smtClean="0"/>
-              <a:t>27/02/2026</a:t>
+              <a:t>02/03/2026</a:t>
             </a:fld>
             <a:endParaRPr lang="en-NL"/>
           </a:p>
@@ -20601,7 +20578,7 @@
           <a:p>
             <a:fld id="{3E30469F-474B-44E0-9013-119402DD7996}" type="datetimeFigureOut">
               <a:rPr lang="en-NL" smtClean="0"/>
-              <a:t>27/02/2026</a:t>
+              <a:t>02/03/2026</a:t>
             </a:fld>
             <a:endParaRPr lang="en-NL"/>
           </a:p>
@@ -21709,7 +21686,7 @@
           <a:p>
             <a:fld id="{3E30469F-474B-44E0-9013-119402DD7996}" type="datetimeFigureOut">
               <a:rPr lang="en-NL" smtClean="0"/>
-              <a:t>27/02/2026</a:t>
+              <a:t>02/03/2026</a:t>
             </a:fld>
             <a:endParaRPr lang="en-NL"/>
           </a:p>
@@ -22769,7 +22746,7 @@
           <a:p>
             <a:fld id="{3E30469F-474B-44E0-9013-119402DD7996}" type="datetimeFigureOut">
               <a:rPr lang="en-NL" smtClean="0"/>
-              <a:t>27/02/2026</a:t>
+              <a:t>02/03/2026</a:t>
             </a:fld>
             <a:endParaRPr lang="en-NL"/>
           </a:p>
@@ -23923,12 +23900,8 @@
           <a:p>
             <a:pPr lvl="2"/>
             <a:r>
-              <a:rPr lang="en-US"/>
-              <a:t>Directly supports </a:t>
-            </a:r>
-            <a:r>
               <a:rPr lang="en-US" dirty="0"/>
-              <a:t>lazy-fetching (needed for large global)</a:t>
+              <a:t>Directly supports lazy-fetching (needed for large global)</a:t>
             </a:r>
           </a:p>
           <a:p>
@@ -24181,16 +24154,6 @@
               <a:t>It removes the need to have ALL the client’s code running on the database server, which is now the case (and, in some situation, a limitation for potential customers)</a:t>
             </a:r>
           </a:p>
-          <a:p>
-            <a:r>
-              <a:rPr lang="en-US" dirty="0"/>
-              <a:t>Why not offer both?</a:t>
-            </a:r>
-          </a:p>
-          <a:p>
-            <a:pPr lvl="1"/>
-            <a:endParaRPr lang="en-NL" dirty="0"/>
-          </a:p>
         </p:txBody>
       </p:sp>
     </p:spTree>
@@ -24283,7 +24246,7 @@
             <p:ph idx="1"/>
             <p:extLst>
               <p:ext uri="{D42A27DB-BD31-4B8C-83A1-F6EECF244321}">
-                <p14:modId xmlns:p14="http://schemas.microsoft.com/office/powerpoint/2010/main" val="4146353107"/>
+                <p14:modId xmlns:p14="http://schemas.microsoft.com/office/powerpoint/2010/main" val="2580379533"/>
               </p:ext>
               <p:ext uri="{E7BDC344-281C-4309-B0C6-D0EE65EED2A8}">
                 <p202:designPr xmlns:p202="http://schemas.microsoft.com/office/powerpoint/2020/02/main">
@@ -24533,7 +24496,7 @@
             <p:ph idx="1"/>
             <p:extLst>
               <p:ext uri="{D42A27DB-BD31-4B8C-83A1-F6EECF244321}">
-                <p14:modId xmlns:p14="http://schemas.microsoft.com/office/powerpoint/2010/main" val="1191674732"/>
+                <p14:modId xmlns:p14="http://schemas.microsoft.com/office/powerpoint/2010/main" val="3273523543"/>
               </p:ext>
               <p:ext uri="{E7BDC344-281C-4309-B0C6-D0EE65EED2A8}">
                 <p202:designPr xmlns:p202="http://schemas.microsoft.com/office/powerpoint/2020/02/main">
@@ -25560,6 +25523,64 @@
           </a:p>
         </p:txBody>
       </p:sp>
+      <p:sp>
+        <p:nvSpPr>
+          <p:cNvPr id="13" name="Rectangle: Rounded Corners 12">
+            <a:extLst>
+              <a:ext uri="{FF2B5EF4-FFF2-40B4-BE49-F238E27FC236}">
+                <a16:creationId xmlns:a16="http://schemas.microsoft.com/office/drawing/2014/main" id="{FC59F9E8-B7AE-1E48-4210-88A331AC1AEB}"/>
+              </a:ext>
+            </a:extLst>
+          </p:cNvPr>
+          <p:cNvSpPr/>
+          <p:nvPr/>
+        </p:nvSpPr>
+        <p:spPr>
+          <a:xfrm>
+            <a:off x="9634330" y="3160643"/>
+            <a:ext cx="1013792" cy="1995592"/>
+          </a:xfrm>
+          <a:prstGeom prst="roundRect">
+            <a:avLst/>
+          </a:prstGeom>
+        </p:spPr>
+        <p:style>
+          <a:lnRef idx="2">
+            <a:schemeClr val="accent1">
+              <a:shade val="15000"/>
+            </a:schemeClr>
+          </a:lnRef>
+          <a:fillRef idx="1">
+            <a:schemeClr val="accent1"/>
+          </a:fillRef>
+          <a:effectRef idx="0">
+            <a:schemeClr val="accent1"/>
+          </a:effectRef>
+          <a:fontRef idx="minor">
+            <a:schemeClr val="lt1"/>
+          </a:fontRef>
+        </p:style>
+        <p:txBody>
+          <a:bodyPr rtlCol="0" anchor="ctr"/>
+          <a:lstStyle/>
+          <a:p>
+            <a:pPr algn="ctr"/>
+            <a:r>
+              <a:rPr lang="en-US" b="1" dirty="0">
+                <a:solidFill>
+                  <a:srgbClr val="FFFF00"/>
+                </a:solidFill>
+              </a:rPr>
+              <a:t>M code</a:t>
+            </a:r>
+            <a:endParaRPr lang="en-NL" b="1" dirty="0">
+              <a:solidFill>
+                <a:srgbClr val="FFFF00"/>
+              </a:solidFill>
+            </a:endParaRPr>
+          </a:p>
+        </p:txBody>
+      </p:sp>
     </p:spTree>
     <p:extLst>
       <p:ext uri="{BB962C8B-B14F-4D97-AF65-F5344CB8AC3E}">

--- a/docs/slides/def1.pptx
+++ b/docs/slides/def1.pptx
@@ -10473,7 +10473,7 @@
           <a:p>
             <a:fld id="{3E30469F-474B-44E0-9013-119402DD7996}" type="datetimeFigureOut">
               <a:rPr lang="en-NL" smtClean="0"/>
-              <a:t>03/03/2026</a:t>
+              <a:t>04/03/2026</a:t>
             </a:fld>
             <a:endParaRPr lang="en-NL"/>
           </a:p>
@@ -11568,7 +11568,7 @@
           <a:p>
             <a:fld id="{3E30469F-474B-44E0-9013-119402DD7996}" type="datetimeFigureOut">
               <a:rPr lang="en-NL" smtClean="0"/>
-              <a:t>03/03/2026</a:t>
+              <a:t>04/03/2026</a:t>
             </a:fld>
             <a:endParaRPr lang="en-NL"/>
           </a:p>
@@ -12548,7 +12548,7 @@
           <a:p>
             <a:fld id="{3E30469F-474B-44E0-9013-119402DD7996}" type="datetimeFigureOut">
               <a:rPr lang="en-NL" smtClean="0"/>
-              <a:t>03/03/2026</a:t>
+              <a:t>04/03/2026</a:t>
             </a:fld>
             <a:endParaRPr lang="en-NL"/>
           </a:p>
@@ -13682,7 +13682,7 @@
           <a:p>
             <a:fld id="{3E30469F-474B-44E0-9013-119402DD7996}" type="datetimeFigureOut">
               <a:rPr lang="en-NL" smtClean="0"/>
-              <a:t>03/03/2026</a:t>
+              <a:t>04/03/2026</a:t>
             </a:fld>
             <a:endParaRPr lang="en-NL"/>
           </a:p>
@@ -14715,7 +14715,7 @@
           <a:p>
             <a:fld id="{3E30469F-474B-44E0-9013-119402DD7996}" type="datetimeFigureOut">
               <a:rPr lang="en-NL" smtClean="0"/>
-              <a:t>03/03/2026</a:t>
+              <a:t>04/03/2026</a:t>
             </a:fld>
             <a:endParaRPr lang="en-NL"/>
           </a:p>
@@ -15375,7 +15375,7 @@
           <a:p>
             <a:fld id="{3E30469F-474B-44E0-9013-119402DD7996}" type="datetimeFigureOut">
               <a:rPr lang="en-NL" smtClean="0"/>
-              <a:t>03/03/2026</a:t>
+              <a:t>04/03/2026</a:t>
             </a:fld>
             <a:endParaRPr lang="en-NL"/>
           </a:p>
@@ -16236,7 +16236,7 @@
           <a:p>
             <a:fld id="{3E30469F-474B-44E0-9013-119402DD7996}" type="datetimeFigureOut">
               <a:rPr lang="en-NL" smtClean="0"/>
-              <a:t>03/03/2026</a:t>
+              <a:t>04/03/2026</a:t>
             </a:fld>
             <a:endParaRPr lang="en-NL"/>
           </a:p>
@@ -16426,7 +16426,7 @@
           <a:p>
             <a:fld id="{3E30469F-474B-44E0-9013-119402DD7996}" type="datetimeFigureOut">
               <a:rPr lang="en-NL" smtClean="0"/>
-              <a:t>03/03/2026</a:t>
+              <a:t>04/03/2026</a:t>
             </a:fld>
             <a:endParaRPr lang="en-NL"/>
           </a:p>
@@ -17398,7 +17398,7 @@
           <a:p>
             <a:fld id="{3E30469F-474B-44E0-9013-119402DD7996}" type="datetimeFigureOut">
               <a:rPr lang="en-NL" smtClean="0"/>
-              <a:t>03/03/2026</a:t>
+              <a:t>04/03/2026</a:t>
             </a:fld>
             <a:endParaRPr lang="en-NL"/>
           </a:p>
@@ -17609,7 +17609,7 @@
           <a:p>
             <a:fld id="{3E30469F-474B-44E0-9013-119402DD7996}" type="datetimeFigureOut">
               <a:rPr lang="en-NL" smtClean="0"/>
-              <a:t>03/03/2026</a:t>
+              <a:t>04/03/2026</a:t>
             </a:fld>
             <a:endParaRPr lang="en-NL"/>
           </a:p>
@@ -18643,7 +18643,7 @@
           <a:p>
             <a:fld id="{3E30469F-474B-44E0-9013-119402DD7996}" type="datetimeFigureOut">
               <a:rPr lang="en-NL" smtClean="0"/>
-              <a:t>03/03/2026</a:t>
+              <a:t>04/03/2026</a:t>
             </a:fld>
             <a:endParaRPr lang="en-NL"/>
           </a:p>
@@ -18915,7 +18915,7 @@
           <a:p>
             <a:fld id="{3E30469F-474B-44E0-9013-119402DD7996}" type="datetimeFigureOut">
               <a:rPr lang="en-NL" smtClean="0"/>
-              <a:t>03/03/2026</a:t>
+              <a:t>04/03/2026</a:t>
             </a:fld>
             <a:endParaRPr lang="en-NL"/>
           </a:p>
@@ -19325,7 +19325,7 @@
           <a:p>
             <a:fld id="{3E30469F-474B-44E0-9013-119402DD7996}" type="datetimeFigureOut">
               <a:rPr lang="en-NL" smtClean="0"/>
-              <a:t>03/03/2026</a:t>
+              <a:t>04/03/2026</a:t>
             </a:fld>
             <a:endParaRPr lang="en-NL"/>
           </a:p>
@@ -19452,7 +19452,7 @@
           <a:p>
             <a:fld id="{3E30469F-474B-44E0-9013-119402DD7996}" type="datetimeFigureOut">
               <a:rPr lang="en-NL" smtClean="0"/>
-              <a:t>03/03/2026</a:t>
+              <a:t>04/03/2026</a:t>
             </a:fld>
             <a:endParaRPr lang="en-NL"/>
           </a:p>
@@ -19547,7 +19547,7 @@
           <a:p>
             <a:fld id="{3E30469F-474B-44E0-9013-119402DD7996}" type="datetimeFigureOut">
               <a:rPr lang="en-NL" smtClean="0"/>
-              <a:t>03/03/2026</a:t>
+              <a:t>04/03/2026</a:t>
             </a:fld>
             <a:endParaRPr lang="en-NL"/>
           </a:p>
@@ -20628,7 +20628,7 @@
           <a:p>
             <a:fld id="{3E30469F-474B-44E0-9013-119402DD7996}" type="datetimeFigureOut">
               <a:rPr lang="en-NL" smtClean="0"/>
-              <a:t>03/03/2026</a:t>
+              <a:t>04/03/2026</a:t>
             </a:fld>
             <a:endParaRPr lang="en-NL"/>
           </a:p>
@@ -21736,7 +21736,7 @@
           <a:p>
             <a:fld id="{3E30469F-474B-44E0-9013-119402DD7996}" type="datetimeFigureOut">
               <a:rPr lang="en-NL" smtClean="0"/>
-              <a:t>03/03/2026</a:t>
+              <a:t>04/03/2026</a:t>
             </a:fld>
             <a:endParaRPr lang="en-NL"/>
           </a:p>
@@ -22796,7 +22796,7 @@
           <a:p>
             <a:fld id="{3E30469F-474B-44E0-9013-119402DD7996}" type="datetimeFigureOut">
               <a:rPr lang="en-NL" smtClean="0"/>
-              <a:t>03/03/2026</a:t>
+              <a:t>04/03/2026</a:t>
             </a:fld>
             <a:endParaRPr lang="en-NL"/>
           </a:p>
@@ -30674,6 +30674,12 @@
           <a:p>
             <a:r>
               <a:rPr lang="en-US" dirty="0"/>
+              <a:t>Create a hierarchical tree structure to group your methods and properties</a:t>
+            </a:r>
+          </a:p>
+          <a:p>
+            <a:r>
+              <a:rPr lang="en-US" dirty="0"/>
               <a:t>Describe your procedures / functions with parameters name and data-types</a:t>
             </a:r>
           </a:p>
@@ -30681,12 +30687,6 @@
             <a:r>
               <a:rPr lang="en-US" dirty="0"/>
               <a:t>Describe your (optional) return value data-type</a:t>
-            </a:r>
-          </a:p>
-          <a:p>
-            <a:r>
-              <a:rPr lang="en-US" dirty="0"/>
-              <a:t>Create a tree structure to group your methods</a:t>
             </a:r>
           </a:p>
           <a:p>

--- a/docs/slides/def1.pptx
+++ b/docs/slides/def1.pptx
@@ -10,14 +10,14 @@
     <p:sldId id="267" r:id="rId4"/>
     <p:sldId id="258" r:id="rId5"/>
     <p:sldId id="264" r:id="rId6"/>
-    <p:sldId id="259" r:id="rId7"/>
-    <p:sldId id="266" r:id="rId8"/>
-    <p:sldId id="263" r:id="rId9"/>
+    <p:sldId id="263" r:id="rId7"/>
+    <p:sldId id="259" r:id="rId8"/>
+    <p:sldId id="268" r:id="rId9"/>
     <p:sldId id="260" r:id="rId10"/>
-    <p:sldId id="268" r:id="rId11"/>
-    <p:sldId id="270" r:id="rId12"/>
-    <p:sldId id="271" r:id="rId13"/>
-    <p:sldId id="269" r:id="rId14"/>
+    <p:sldId id="270" r:id="rId11"/>
+    <p:sldId id="271" r:id="rId12"/>
+    <p:sldId id="269" r:id="rId13"/>
+    <p:sldId id="266" r:id="rId14"/>
   </p:sldIdLst>
   <p:sldSz cx="12192000" cy="6858000"/>
   <p:notesSz cx="6858000" cy="9144000"/>
@@ -2402,6 +2402,15 @@
           </a:r>
           <a:endParaRPr lang="en-US" dirty="0"/>
         </a:p>
+        <a:p>
+          <a:pPr>
+            <a:lnSpc>
+              <a:spcPct val="100000"/>
+            </a:lnSpc>
+            <a:defRPr b="1"/>
+          </a:pPr>
+          <a:endParaRPr lang="en-US" dirty="0"/>
+        </a:p>
       </dgm:t>
     </dgm:pt>
     <dgm:pt modelId="{B692412B-C32F-404E-A62A-E42191694563}" type="parTrans" cxnId="{CECC1115-8D04-4BE9-A207-B030BD568392}">
@@ -2433,7 +2442,7 @@
       </dgm:t>
     </dgm:pt>
     <dgm:pt modelId="{06204C76-8052-4671-8722-9895BD95AC98}">
-      <dgm:prSet/>
+      <dgm:prSet custT="1"/>
       <dgm:spPr/>
       <dgm:t>
         <a:bodyPr/>
@@ -2445,7 +2454,7 @@
             </a:lnSpc>
           </a:pPr>
           <a:r>
-            <a:rPr lang="en-US" dirty="0"/>
+            <a:rPr lang="en-US" sz="1400" dirty="0"/>
             <a:t>Execute MUMPS procedure remotely using sockets using your preferred programming language. </a:t>
           </a:r>
         </a:p>
@@ -2456,7 +2465,7 @@
             </a:lnSpc>
           </a:pPr>
           <a:r>
-            <a:rPr lang="en-US" dirty="0"/>
+            <a:rPr lang="en-US" sz="1400" dirty="0"/>
             <a:t>This will isolate your database server from your back-end server(s), allowing horizontal scalability with no worries…</a:t>
           </a:r>
         </a:p>
@@ -2533,7 +2542,7 @@
       </dgm:t>
     </dgm:pt>
     <dgm:pt modelId="{4C74B0FE-0F44-43D7-940D-B9AF6ABF1025}">
-      <dgm:prSet/>
+      <dgm:prSet custT="1"/>
       <dgm:spPr/>
       <dgm:t>
         <a:bodyPr/>
@@ -2545,7 +2554,7 @@
             </a:lnSpc>
           </a:pPr>
           <a:r>
-            <a:rPr lang="en-US" dirty="0"/>
+            <a:rPr lang="en-US" sz="1400" dirty="0"/>
             <a:t>By removing the need to write extra code for communication and data conversion, MUMPS programmers can focus on data.</a:t>
           </a:r>
         </a:p>
@@ -2556,7 +2565,7 @@
             </a:lnSpc>
           </a:pPr>
           <a:r>
-            <a:rPr lang="en-US" dirty="0"/>
+            <a:rPr lang="en-US" sz="1400" dirty="0"/>
             <a:t>We natively support JSON / Objects in and out.</a:t>
           </a:r>
         </a:p>
@@ -2602,6 +2611,15 @@
             <a:t>Execute your MUMPS code remotely from multiple languages</a:t>
           </a:r>
         </a:p>
+        <a:p>
+          <a:pPr>
+            <a:lnSpc>
+              <a:spcPct val="100000"/>
+            </a:lnSpc>
+            <a:defRPr b="1"/>
+          </a:pPr>
+          <a:endParaRPr lang="en-US" dirty="0"/>
+        </a:p>
       </dgm:t>
     </dgm:pt>
     <dgm:pt modelId="{DF0B6627-E6C7-4B6F-AEF0-D5B4D98FAE0D}" type="parTrans" cxnId="{741CCF7E-FAFA-4680-999D-03CF38C0793B}">
@@ -2627,7 +2645,7 @@
       </dgm:t>
     </dgm:pt>
     <dgm:pt modelId="{FABA06FE-F150-48B5-B3D7-2915E3C41ABD}">
-      <dgm:prSet/>
+      <dgm:prSet custT="1"/>
       <dgm:spPr/>
       <dgm:t>
         <a:bodyPr/>
@@ -2639,7 +2657,7 @@
             </a:lnSpc>
           </a:pPr>
           <a:r>
-            <a:rPr lang="en-US" dirty="0"/>
+            <a:rPr lang="en-US" sz="1400" dirty="0"/>
             <a:t>Your MUMPS code can be remotely executed from several programming languages.</a:t>
           </a:r>
         </a:p>
@@ -2649,16 +2667,8 @@
               <a:spcPct val="100000"/>
             </a:lnSpc>
           </a:pPr>
-          <a:endParaRPr lang="en-US" dirty="0"/>
-        </a:p>
-        <a:p>
-          <a:pPr>
-            <a:lnSpc>
-              <a:spcPct val="100000"/>
-            </a:lnSpc>
-          </a:pPr>
           <a:r>
-            <a:rPr lang="en-US" dirty="0"/>
+            <a:rPr lang="en-US" sz="1400" dirty="0"/>
             <a:t>Currently nodejs is fully supported.</a:t>
           </a:r>
         </a:p>
@@ -2669,7 +2679,7 @@
             </a:lnSpc>
           </a:pPr>
           <a:r>
-            <a:rPr lang="en-US" dirty="0"/>
+            <a:rPr lang="en-US" sz="1400" dirty="0"/>
             <a:t>Soon Java, Go and .NET drivers will be available</a:t>
           </a:r>
         </a:p>
@@ -2891,7 +2901,7 @@
       </dgm:t>
     </dgm:pt>
     <dgm:pt modelId="{06204C76-8052-4671-8722-9895BD95AC98}">
-      <dgm:prSet/>
+      <dgm:prSet custT="1"/>
       <dgm:spPr/>
       <dgm:t>
         <a:bodyPr/>
@@ -2903,7 +2913,7 @@
             </a:lnSpc>
           </a:pPr>
           <a:r>
-            <a:rPr lang="en-US" dirty="0"/>
+            <a:rPr lang="en-US" sz="1200" dirty="0"/>
             <a:t>MIND Server gets installed as standard YottaDB plugin on top of your YottaDB installation with a one-liner command.</a:t>
           </a:r>
         </a:p>
@@ -2914,7 +2924,7 @@
             </a:lnSpc>
           </a:pPr>
           <a:r>
-            <a:rPr lang="en-US" dirty="0"/>
+            <a:rPr lang="en-US" sz="1200" dirty="0"/>
             <a:t>You can then either run it directly of configure it using the .conf file or command line switches.</a:t>
           </a:r>
         </a:p>
@@ -2991,7 +3001,7 @@
       </dgm:t>
     </dgm:pt>
     <dgm:pt modelId="{4C74B0FE-0F44-43D7-940D-B9AF6ABF1025}">
-      <dgm:prSet/>
+      <dgm:prSet custT="1"/>
       <dgm:spPr/>
       <dgm:t>
         <a:bodyPr/>
@@ -3003,7 +3013,7 @@
             </a:lnSpc>
           </a:pPr>
           <a:r>
-            <a:rPr lang="en-US" dirty="0"/>
+            <a:rPr lang="en-US" sz="1200" dirty="0"/>
             <a:t>Keeping in mind that back-end languages use data-types and Objects, we created data translators to move data to and from YottaDB.</a:t>
           </a:r>
         </a:p>
@@ -3014,7 +3024,7 @@
             </a:lnSpc>
           </a:pPr>
           <a:r>
-            <a:rPr lang="en-US" dirty="0"/>
+            <a:rPr lang="en-US" sz="1200" dirty="0"/>
             <a:t>And, of course, we support JSON in both directions.</a:t>
           </a:r>
         </a:p>
@@ -3091,7 +3101,7 @@
       </dgm:t>
     </dgm:pt>
     <dgm:pt modelId="{FABA06FE-F150-48B5-B3D7-2915E3C41ABD}">
-      <dgm:prSet/>
+      <dgm:prSet custT="1"/>
       <dgm:spPr/>
       <dgm:t>
         <a:bodyPr/>
@@ -3103,7 +3113,7 @@
             </a:lnSpc>
           </a:pPr>
           <a:r>
-            <a:rPr lang="en-US" dirty="0"/>
+            <a:rPr lang="en-US" sz="1200" dirty="0"/>
             <a:t>Once you describe your MUMPS functions / procedure in a JSON file, they will “magically” appear in the client driver and ready to use.</a:t>
           </a:r>
         </a:p>
@@ -3114,7 +3124,7 @@
             </a:lnSpc>
           </a:pPr>
           <a:r>
-            <a:rPr lang="en-US" dirty="0"/>
+            <a:rPr lang="en-US" sz="1200" dirty="0"/>
             <a:t>Additionally, automatic  validation of the supplied parameters is performed with no code needed.</a:t>
           </a:r>
         </a:p>
@@ -3192,7 +3202,7 @@
       </dgm:t>
     </dgm:pt>
     <dgm:pt modelId="{341895CC-F5AE-4185-A7B4-20DAAD306EDB}">
-      <dgm:prSet/>
+      <dgm:prSet custT="1"/>
       <dgm:spPr/>
       <dgm:t>
         <a:bodyPr/>
@@ -3204,10 +3214,10 @@
             </a:lnSpc>
           </a:pPr>
           <a:r>
-            <a:rPr lang="en-US" dirty="0"/>
+            <a:rPr lang="en-US" sz="1200" dirty="0"/>
             <a:t>You can call your existing code directly, specifying parameters and (eventual) return value.</a:t>
           </a:r>
-          <a:endParaRPr lang="en-NL" dirty="0"/>
+          <a:endParaRPr lang="en-NL" sz="1200" dirty="0"/>
         </a:p>
       </dgm:t>
     </dgm:pt>
@@ -3234,7 +3244,7 @@
       </dgm:t>
     </dgm:pt>
     <dgm:pt modelId="{C0297382-340E-4BD9-9668-818CC13B2B4C}">
-      <dgm:prSet/>
+      <dgm:prSet custT="1"/>
       <dgm:spPr/>
       <dgm:t>
         <a:bodyPr/>
@@ -3246,10 +3256,10 @@
             </a:lnSpc>
           </a:pPr>
           <a:r>
-            <a:rPr lang="en-US" dirty="0"/>
+            <a:rPr lang="en-US" sz="1200" dirty="0"/>
             <a:t>Once you describe your code in the JSON file, it is available in the client right away</a:t>
           </a:r>
-          <a:endParaRPr lang="en-NL" dirty="0"/>
+          <a:endParaRPr lang="en-NL" sz="1200" dirty="0"/>
         </a:p>
       </dgm:t>
     </dgm:pt>
@@ -3490,7 +3500,7 @@
         <a:p>
           <a:r>
             <a:rPr lang="en-US" dirty="0"/>
-            <a:t>Describe your method in a JSON file and restart the Mind server</a:t>
+            <a:t>Describe your method in a JSON file and restart the Mind server.</a:t>
           </a:r>
           <a:endParaRPr lang="en-NL" dirty="0"/>
         </a:p>
@@ -3564,7 +3574,7 @@
         <a:p>
           <a:r>
             <a:rPr lang="en-US" dirty="0"/>
-            <a:t>Write M code, using our framework to read arguments and return formatted data</a:t>
+            <a:t>Write M code or simply re-use your Legacy code.</a:t>
           </a:r>
           <a:endParaRPr lang="en-NL" dirty="0"/>
         </a:p>
@@ -3785,7 +3795,7 @@
       <dsp:spPr>
         <a:xfrm>
           <a:off x="0" y="0"/>
-          <a:ext cx="2587153" cy="902201"/>
+          <a:ext cx="2587153" cy="985114"/>
         </a:xfrm>
         <a:prstGeom prst="rect">
           <a:avLst/>
@@ -3809,12 +3819,12 @@
         <a:fontRef idx="minor"/>
       </dsp:style>
       <dsp:txBody>
-        <a:bodyPr spcFirstLastPara="0" vert="horz" wrap="square" lIns="137160" tIns="22860" rIns="22860" bIns="22860" numCol="1" spcCol="1270" anchor="t" anchorCtr="0">
+        <a:bodyPr spcFirstLastPara="0" vert="horz" wrap="square" lIns="137160" tIns="17780" rIns="17780" bIns="17780" numCol="1" spcCol="1270" anchor="t" anchorCtr="0">
           <a:noAutofit/>
         </a:bodyPr>
         <a:lstStyle/>
         <a:p>
-          <a:pPr marL="0" lvl="0" indent="0" algn="l" defTabSz="800100">
+          <a:pPr marL="0" lvl="0" indent="0" algn="l" defTabSz="622300">
             <a:lnSpc>
               <a:spcPct val="100000"/>
             </a:lnSpc>
@@ -3828,19 +3838,35 @@
             <a:defRPr b="1"/>
           </a:pPr>
           <a:r>
-            <a:rPr lang="en-US" sz="1800" kern="1200" dirty="0"/>
+            <a:rPr lang="en-US" sz="1400" kern="1200" dirty="0"/>
             <a:t>Isolate you back-end server(s) from the database</a:t>
           </a:r>
           <a:r>
-            <a:rPr lang="en-NL" sz="1800" kern="1200" dirty="0"/>
+            <a:rPr lang="en-NL" sz="1400" kern="1200" dirty="0"/>
             <a:t>​</a:t>
           </a:r>
-          <a:endParaRPr lang="en-US" sz="1800" kern="1200" dirty="0"/>
+          <a:endParaRPr lang="en-US" sz="1400" kern="1200" dirty="0"/>
+        </a:p>
+        <a:p>
+          <a:pPr marL="0" lvl="0" indent="0" algn="l" defTabSz="622300">
+            <a:lnSpc>
+              <a:spcPct val="100000"/>
+            </a:lnSpc>
+            <a:spcBef>
+              <a:spcPct val="0"/>
+            </a:spcBef>
+            <a:spcAft>
+              <a:spcPct val="35000"/>
+            </a:spcAft>
+            <a:buNone/>
+            <a:defRPr b="1"/>
+          </a:pPr>
+          <a:endParaRPr lang="en-US" sz="1400" kern="1200" dirty="0"/>
         </a:p>
       </dsp:txBody>
       <dsp:txXfrm>
         <a:off x="0" y="0"/>
-        <a:ext cx="2587153" cy="902201"/>
+        <a:ext cx="2587153" cy="985114"/>
       </dsp:txXfrm>
     </dsp:sp>
     <dsp:sp modelId="{5C90C3CA-0AA3-4EBE-B50C-5D1938624D21}">
@@ -3850,8 +3876,8 @@
       </dsp:nvSpPr>
       <dsp:spPr>
         <a:xfrm>
-          <a:off x="0" y="902201"/>
-          <a:ext cx="2587153" cy="2371224"/>
+          <a:off x="0" y="985114"/>
+          <a:ext cx="2587153" cy="2238564"/>
         </a:xfrm>
         <a:prstGeom prst="rect">
           <a:avLst/>
@@ -3917,8 +3943,8 @@
         </a:p>
       </dsp:txBody>
       <dsp:txXfrm>
-        <a:off x="0" y="902201"/>
-        <a:ext cx="2587153" cy="2371224"/>
+        <a:off x="0" y="985114"/>
+        <a:ext cx="2587153" cy="2238564"/>
       </dsp:txXfrm>
     </dsp:sp>
     <dsp:sp modelId="{58CF0B87-5490-46B7-A456-64A277CB332C}">
@@ -3929,7 +3955,7 @@
       <dsp:spPr>
         <a:xfrm>
           <a:off x="2845869" y="0"/>
-          <a:ext cx="2587153" cy="902201"/>
+          <a:ext cx="2587153" cy="985114"/>
         </a:xfrm>
         <a:prstGeom prst="rect">
           <a:avLst/>
@@ -3953,12 +3979,12 @@
         <a:fontRef idx="minor"/>
       </dsp:style>
       <dsp:txBody>
-        <a:bodyPr spcFirstLastPara="0" vert="horz" wrap="square" lIns="137160" tIns="22860" rIns="22860" bIns="22860" numCol="1" spcCol="1270" anchor="t" anchorCtr="0">
+        <a:bodyPr spcFirstLastPara="0" vert="horz" wrap="square" lIns="137160" tIns="17780" rIns="17780" bIns="17780" numCol="1" spcCol="1270" anchor="t" anchorCtr="0">
           <a:noAutofit/>
         </a:bodyPr>
         <a:lstStyle/>
         <a:p>
-          <a:pPr marL="0" lvl="0" indent="0" algn="l" defTabSz="800100">
+          <a:pPr marL="0" lvl="0" indent="0" algn="l" defTabSz="622300">
             <a:lnSpc>
               <a:spcPct val="100000"/>
             </a:lnSpc>
@@ -3972,14 +3998,14 @@
             <a:defRPr b="1"/>
           </a:pPr>
           <a:r>
-            <a:rPr lang="en-US" sz="1800" kern="1200" dirty="0"/>
+            <a:rPr lang="en-US" sz="1400" kern="1200" dirty="0"/>
             <a:t>Focus M development on database procedures</a:t>
           </a:r>
         </a:p>
       </dsp:txBody>
       <dsp:txXfrm>
         <a:off x="2845869" y="0"/>
-        <a:ext cx="2587153" cy="902201"/>
+        <a:ext cx="2587153" cy="985114"/>
       </dsp:txXfrm>
     </dsp:sp>
     <dsp:sp modelId="{8BB355F9-6CC2-4480-9B7E-D892D65FD34C}">
@@ -3989,8 +4015,8 @@
       </dsp:nvSpPr>
       <dsp:spPr>
         <a:xfrm>
-          <a:off x="2845869" y="902201"/>
-          <a:ext cx="2587153" cy="2371224"/>
+          <a:off x="2845869" y="985114"/>
+          <a:ext cx="2587153" cy="2238564"/>
         </a:xfrm>
         <a:prstGeom prst="rect">
           <a:avLst/>
@@ -4056,8 +4082,8 @@
         </a:p>
       </dsp:txBody>
       <dsp:txXfrm>
-        <a:off x="2845869" y="902201"/>
-        <a:ext cx="2587153" cy="2371224"/>
+        <a:off x="2845869" y="985114"/>
+        <a:ext cx="2587153" cy="2238564"/>
       </dsp:txXfrm>
     </dsp:sp>
     <dsp:sp modelId="{E38D88DE-6630-449F-B815-64F25EB69547}">
@@ -4068,7 +4094,7 @@
       <dsp:spPr>
         <a:xfrm>
           <a:off x="5691738" y="0"/>
-          <a:ext cx="2587153" cy="902201"/>
+          <a:ext cx="2587153" cy="985114"/>
         </a:xfrm>
         <a:prstGeom prst="rect">
           <a:avLst/>
@@ -4092,12 +4118,12 @@
         <a:fontRef idx="minor"/>
       </dsp:style>
       <dsp:txBody>
-        <a:bodyPr spcFirstLastPara="0" vert="horz" wrap="square" lIns="137160" tIns="22860" rIns="22860" bIns="22860" numCol="1" spcCol="1270" anchor="t" anchorCtr="0">
+        <a:bodyPr spcFirstLastPara="0" vert="horz" wrap="square" lIns="137160" tIns="17780" rIns="17780" bIns="17780" numCol="1" spcCol="1270" anchor="t" anchorCtr="0">
           <a:noAutofit/>
         </a:bodyPr>
         <a:lstStyle/>
         <a:p>
-          <a:pPr marL="0" lvl="0" indent="0" algn="l" defTabSz="800100">
+          <a:pPr marL="0" lvl="0" indent="0" algn="l" defTabSz="622300">
             <a:lnSpc>
               <a:spcPct val="100000"/>
             </a:lnSpc>
@@ -4111,14 +4137,30 @@
             <a:defRPr b="1"/>
           </a:pPr>
           <a:r>
-            <a:rPr lang="en-US" sz="1800" kern="1200" dirty="0"/>
+            <a:rPr lang="en-US" sz="1400" kern="1200" dirty="0"/>
             <a:t>Execute your MUMPS code remotely from multiple languages</a:t>
           </a:r>
+        </a:p>
+        <a:p>
+          <a:pPr marL="0" lvl="0" indent="0" algn="l" defTabSz="622300">
+            <a:lnSpc>
+              <a:spcPct val="100000"/>
+            </a:lnSpc>
+            <a:spcBef>
+              <a:spcPct val="0"/>
+            </a:spcBef>
+            <a:spcAft>
+              <a:spcPct val="35000"/>
+            </a:spcAft>
+            <a:buNone/>
+            <a:defRPr b="1"/>
+          </a:pPr>
+          <a:endParaRPr lang="en-US" sz="1400" kern="1200" dirty="0"/>
         </a:p>
       </dsp:txBody>
       <dsp:txXfrm>
         <a:off x="5691738" y="0"/>
-        <a:ext cx="2587153" cy="902201"/>
+        <a:ext cx="2587153" cy="985114"/>
       </dsp:txXfrm>
     </dsp:sp>
     <dsp:sp modelId="{6BD7537A-36A9-42F0-9C36-0D4BA2D0752A}">
@@ -4128,8 +4170,8 @@
       </dsp:nvSpPr>
       <dsp:spPr>
         <a:xfrm>
-          <a:off x="5691738" y="902201"/>
-          <a:ext cx="2587153" cy="2371224"/>
+          <a:off x="5691738" y="985114"/>
+          <a:ext cx="2587153" cy="2238564"/>
         </a:xfrm>
         <a:prstGeom prst="rect">
           <a:avLst/>
@@ -4188,21 +4230,6 @@
             </a:spcAft>
             <a:buNone/>
           </a:pPr>
-          <a:endParaRPr lang="en-US" sz="1400" kern="1200" dirty="0"/>
-        </a:p>
-        <a:p>
-          <a:pPr marL="0" lvl="0" indent="0" algn="l" defTabSz="622300">
-            <a:lnSpc>
-              <a:spcPct val="100000"/>
-            </a:lnSpc>
-            <a:spcBef>
-              <a:spcPct val="0"/>
-            </a:spcBef>
-            <a:spcAft>
-              <a:spcPct val="35000"/>
-            </a:spcAft>
-            <a:buNone/>
-          </a:pPr>
           <a:r>
             <a:rPr lang="en-US" sz="1400" kern="1200" dirty="0"/>
             <a:t>Currently nodejs is fully supported.</a:t>
@@ -4228,8 +4255,8 @@
         </a:p>
       </dsp:txBody>
       <dsp:txXfrm>
-        <a:off x="5691738" y="902201"/>
-        <a:ext cx="2587153" cy="2371224"/>
+        <a:off x="5691738" y="985114"/>
+        <a:ext cx="2587153" cy="2238564"/>
       </dsp:txXfrm>
     </dsp:sp>
   </dsp:spTree>
@@ -4356,12 +4383,12 @@
         <a:fontRef idx="minor"/>
       </dsp:style>
       <dsp:txBody>
-        <a:bodyPr spcFirstLastPara="0" vert="horz" wrap="square" lIns="137160" tIns="12700" rIns="12700" bIns="12700" numCol="1" spcCol="1270" anchor="t" anchorCtr="0">
+        <a:bodyPr spcFirstLastPara="0" vert="horz" wrap="square" lIns="137160" tIns="15240" rIns="15240" bIns="15240" numCol="1" spcCol="1270" anchor="t" anchorCtr="0">
           <a:noAutofit/>
         </a:bodyPr>
         <a:lstStyle/>
         <a:p>
-          <a:pPr marL="0" lvl="0" indent="0" algn="l" defTabSz="444500">
+          <a:pPr marL="0" lvl="0" indent="0" algn="l" defTabSz="533400">
             <a:lnSpc>
               <a:spcPct val="100000"/>
             </a:lnSpc>
@@ -4374,12 +4401,12 @@
             <a:buNone/>
           </a:pPr>
           <a:r>
-            <a:rPr lang="en-US" sz="1000" kern="1200" dirty="0"/>
+            <a:rPr lang="en-US" sz="1200" kern="1200" dirty="0"/>
             <a:t>MIND Server gets installed as standard YottaDB plugin on top of your YottaDB installation with a one-liner command.</a:t>
           </a:r>
         </a:p>
         <a:p>
-          <a:pPr marL="0" lvl="0" indent="0" algn="l" defTabSz="444500">
+          <a:pPr marL="0" lvl="0" indent="0" algn="l" defTabSz="533400">
             <a:lnSpc>
               <a:spcPct val="100000"/>
             </a:lnSpc>
@@ -4392,7 +4419,7 @@
             <a:buNone/>
           </a:pPr>
           <a:r>
-            <a:rPr lang="en-US" sz="1000" kern="1200" dirty="0"/>
+            <a:rPr lang="en-US" sz="1200" kern="1200" dirty="0"/>
             <a:t>You can then either run it directly of configure it using the .conf file or command line switches.</a:t>
           </a:r>
         </a:p>
@@ -4495,12 +4522,12 @@
         <a:fontRef idx="minor"/>
       </dsp:style>
       <dsp:txBody>
-        <a:bodyPr spcFirstLastPara="0" vert="horz" wrap="square" lIns="137160" tIns="12700" rIns="12700" bIns="12700" numCol="1" spcCol="1270" anchor="t" anchorCtr="0">
+        <a:bodyPr spcFirstLastPara="0" vert="horz" wrap="square" lIns="137160" tIns="15240" rIns="15240" bIns="15240" numCol="1" spcCol="1270" anchor="t" anchorCtr="0">
           <a:noAutofit/>
         </a:bodyPr>
         <a:lstStyle/>
         <a:p>
-          <a:pPr marL="0" lvl="0" indent="0" algn="l" defTabSz="444500">
+          <a:pPr marL="0" lvl="0" indent="0" algn="l" defTabSz="533400">
             <a:lnSpc>
               <a:spcPct val="100000"/>
             </a:lnSpc>
@@ -4513,12 +4540,12 @@
             <a:buNone/>
           </a:pPr>
           <a:r>
-            <a:rPr lang="en-US" sz="1000" kern="1200" dirty="0"/>
+            <a:rPr lang="en-US" sz="1200" kern="1200" dirty="0"/>
             <a:t>Keeping in mind that back-end languages use data-types and Objects, we created data translators to move data to and from YottaDB.</a:t>
           </a:r>
         </a:p>
         <a:p>
-          <a:pPr marL="0" lvl="0" indent="0" algn="l" defTabSz="444500">
+          <a:pPr marL="0" lvl="0" indent="0" algn="l" defTabSz="533400">
             <a:lnSpc>
               <a:spcPct val="100000"/>
             </a:lnSpc>
@@ -4531,7 +4558,7 @@
             <a:buNone/>
           </a:pPr>
           <a:r>
-            <a:rPr lang="en-US" sz="1000" kern="1200" dirty="0"/>
+            <a:rPr lang="en-US" sz="1200" kern="1200" dirty="0"/>
             <a:t>And, of course, we support JSON in both directions.</a:t>
           </a:r>
         </a:p>
@@ -4634,12 +4661,12 @@
         <a:fontRef idx="minor"/>
       </dsp:style>
       <dsp:txBody>
-        <a:bodyPr spcFirstLastPara="0" vert="horz" wrap="square" lIns="137160" tIns="12700" rIns="12700" bIns="12700" numCol="1" spcCol="1270" anchor="t" anchorCtr="0">
+        <a:bodyPr spcFirstLastPara="0" vert="horz" wrap="square" lIns="137160" tIns="15240" rIns="15240" bIns="15240" numCol="1" spcCol="1270" anchor="t" anchorCtr="0">
           <a:noAutofit/>
         </a:bodyPr>
         <a:lstStyle/>
         <a:p>
-          <a:pPr marL="0" lvl="0" indent="0" algn="l" defTabSz="444500">
+          <a:pPr marL="0" lvl="0" indent="0" algn="l" defTabSz="533400">
             <a:lnSpc>
               <a:spcPct val="100000"/>
             </a:lnSpc>
@@ -4652,12 +4679,12 @@
             <a:buNone/>
           </a:pPr>
           <a:r>
-            <a:rPr lang="en-US" sz="1000" kern="1200" dirty="0"/>
+            <a:rPr lang="en-US" sz="1200" kern="1200" dirty="0"/>
             <a:t>Once you describe your MUMPS functions / procedure in a JSON file, they will “magically” appear in the client driver and ready to use.</a:t>
           </a:r>
         </a:p>
         <a:p>
-          <a:pPr marL="0" lvl="0" indent="0" algn="l" defTabSz="444500">
+          <a:pPr marL="0" lvl="0" indent="0" algn="l" defTabSz="533400">
             <a:lnSpc>
               <a:spcPct val="100000"/>
             </a:lnSpc>
@@ -4670,7 +4697,7 @@
             <a:buNone/>
           </a:pPr>
           <a:r>
-            <a:rPr lang="en-US" sz="1000" kern="1200" dirty="0"/>
+            <a:rPr lang="en-US" sz="1200" kern="1200" dirty="0"/>
             <a:t>Additionally, automatic  validation of the supplied parameters is performed with no code needed.</a:t>
           </a:r>
         </a:p>
@@ -4774,12 +4801,12 @@
         <a:fontRef idx="minor"/>
       </dsp:style>
       <dsp:txBody>
-        <a:bodyPr spcFirstLastPara="0" vert="horz" wrap="square" lIns="137160" tIns="12700" rIns="12700" bIns="12700" numCol="1" spcCol="1270" anchor="t" anchorCtr="0">
+        <a:bodyPr spcFirstLastPara="0" vert="horz" wrap="square" lIns="137160" tIns="15240" rIns="15240" bIns="15240" numCol="1" spcCol="1270" anchor="t" anchorCtr="0">
           <a:noAutofit/>
         </a:bodyPr>
         <a:lstStyle/>
         <a:p>
-          <a:pPr marL="0" lvl="0" indent="0" algn="l" defTabSz="444500">
+          <a:pPr marL="0" lvl="0" indent="0" algn="l" defTabSz="533400">
             <a:lnSpc>
               <a:spcPct val="100000"/>
             </a:lnSpc>
@@ -4792,13 +4819,13 @@
             <a:buNone/>
           </a:pPr>
           <a:r>
-            <a:rPr lang="en-US" sz="1000" kern="1200" dirty="0"/>
+            <a:rPr lang="en-US" sz="1200" kern="1200" dirty="0"/>
             <a:t>You can call your existing code directly, specifying parameters and (eventual) return value.</a:t>
           </a:r>
-          <a:endParaRPr lang="en-NL" sz="1000" kern="1200" dirty="0"/>
+          <a:endParaRPr lang="en-NL" sz="1200" kern="1200" dirty="0"/>
         </a:p>
         <a:p>
-          <a:pPr marL="0" lvl="0" indent="0" algn="l" defTabSz="444500">
+          <a:pPr marL="0" lvl="0" indent="0" algn="l" defTabSz="533400">
             <a:lnSpc>
               <a:spcPct val="100000"/>
             </a:lnSpc>
@@ -4811,10 +4838,10 @@
             <a:buNone/>
           </a:pPr>
           <a:r>
-            <a:rPr lang="en-US" sz="1000" kern="1200" dirty="0"/>
+            <a:rPr lang="en-US" sz="1200" kern="1200" dirty="0"/>
             <a:t>Once you describe your code in the JSON file, it is available in the client right away</a:t>
           </a:r>
-          <a:endParaRPr lang="en-NL" sz="1000" kern="1200" dirty="0"/>
+          <a:endParaRPr lang="en-NL" sz="1200" kern="1200" dirty="0"/>
         </a:p>
       </dsp:txBody>
       <dsp:txXfrm>
@@ -4981,7 +5008,7 @@
           </a:pPr>
           <a:r>
             <a:rPr lang="en-US" sz="2500" kern="1200" dirty="0"/>
-            <a:t>Describe your method in a JSON file and restart the Mind server</a:t>
+            <a:t>Describe your method in a JSON file and restart the Mind server.</a:t>
           </a:r>
           <a:endParaRPr lang="en-NL" sz="2500" kern="1200" dirty="0"/>
         </a:p>
@@ -5138,7 +5165,7 @@
           </a:pPr>
           <a:r>
             <a:rPr lang="en-US" sz="2500" kern="1200" dirty="0"/>
-            <a:t>Write M code, using our framework to read arguments and return formatted data</a:t>
+            <a:t>Write M code or simply re-use your Legacy code.</a:t>
           </a:r>
           <a:endParaRPr lang="en-NL" sz="2500" kern="1200" dirty="0"/>
         </a:p>
@@ -10446,7 +10473,7 @@
           <a:p>
             <a:fld id="{3E30469F-474B-44E0-9013-119402DD7996}" type="datetimeFigureOut">
               <a:rPr lang="en-NL" smtClean="0"/>
-              <a:t>27/02/2026</a:t>
+              <a:t>04/03/2026</a:t>
             </a:fld>
             <a:endParaRPr lang="en-NL"/>
           </a:p>
@@ -11541,7 +11568,7 @@
           <a:p>
             <a:fld id="{3E30469F-474B-44E0-9013-119402DD7996}" type="datetimeFigureOut">
               <a:rPr lang="en-NL" smtClean="0"/>
-              <a:t>27/02/2026</a:t>
+              <a:t>04/03/2026</a:t>
             </a:fld>
             <a:endParaRPr lang="en-NL"/>
           </a:p>
@@ -12521,7 +12548,7 @@
           <a:p>
             <a:fld id="{3E30469F-474B-44E0-9013-119402DD7996}" type="datetimeFigureOut">
               <a:rPr lang="en-NL" smtClean="0"/>
-              <a:t>27/02/2026</a:t>
+              <a:t>04/03/2026</a:t>
             </a:fld>
             <a:endParaRPr lang="en-NL"/>
           </a:p>
@@ -13655,7 +13682,7 @@
           <a:p>
             <a:fld id="{3E30469F-474B-44E0-9013-119402DD7996}" type="datetimeFigureOut">
               <a:rPr lang="en-NL" smtClean="0"/>
-              <a:t>27/02/2026</a:t>
+              <a:t>04/03/2026</a:t>
             </a:fld>
             <a:endParaRPr lang="en-NL"/>
           </a:p>
@@ -14688,7 +14715,7 @@
           <a:p>
             <a:fld id="{3E30469F-474B-44E0-9013-119402DD7996}" type="datetimeFigureOut">
               <a:rPr lang="en-NL" smtClean="0"/>
-              <a:t>27/02/2026</a:t>
+              <a:t>04/03/2026</a:t>
             </a:fld>
             <a:endParaRPr lang="en-NL"/>
           </a:p>
@@ -15348,7 +15375,7 @@
           <a:p>
             <a:fld id="{3E30469F-474B-44E0-9013-119402DD7996}" type="datetimeFigureOut">
               <a:rPr lang="en-NL" smtClean="0"/>
-              <a:t>27/02/2026</a:t>
+              <a:t>04/03/2026</a:t>
             </a:fld>
             <a:endParaRPr lang="en-NL"/>
           </a:p>
@@ -16209,7 +16236,7 @@
           <a:p>
             <a:fld id="{3E30469F-474B-44E0-9013-119402DD7996}" type="datetimeFigureOut">
               <a:rPr lang="en-NL" smtClean="0"/>
-              <a:t>27/02/2026</a:t>
+              <a:t>04/03/2026</a:t>
             </a:fld>
             <a:endParaRPr lang="en-NL"/>
           </a:p>
@@ -16399,7 +16426,7 @@
           <a:p>
             <a:fld id="{3E30469F-474B-44E0-9013-119402DD7996}" type="datetimeFigureOut">
               <a:rPr lang="en-NL" smtClean="0"/>
-              <a:t>27/02/2026</a:t>
+              <a:t>04/03/2026</a:t>
             </a:fld>
             <a:endParaRPr lang="en-NL"/>
           </a:p>
@@ -17371,7 +17398,7 @@
           <a:p>
             <a:fld id="{3E30469F-474B-44E0-9013-119402DD7996}" type="datetimeFigureOut">
               <a:rPr lang="en-NL" smtClean="0"/>
-              <a:t>27/02/2026</a:t>
+              <a:t>04/03/2026</a:t>
             </a:fld>
             <a:endParaRPr lang="en-NL"/>
           </a:p>
@@ -17582,7 +17609,7 @@
           <a:p>
             <a:fld id="{3E30469F-474B-44E0-9013-119402DD7996}" type="datetimeFigureOut">
               <a:rPr lang="en-NL" smtClean="0"/>
-              <a:t>27/02/2026</a:t>
+              <a:t>04/03/2026</a:t>
             </a:fld>
             <a:endParaRPr lang="en-NL"/>
           </a:p>
@@ -18616,7 +18643,7 @@
           <a:p>
             <a:fld id="{3E30469F-474B-44E0-9013-119402DD7996}" type="datetimeFigureOut">
               <a:rPr lang="en-NL" smtClean="0"/>
-              <a:t>27/02/2026</a:t>
+              <a:t>04/03/2026</a:t>
             </a:fld>
             <a:endParaRPr lang="en-NL"/>
           </a:p>
@@ -18888,7 +18915,7 @@
           <a:p>
             <a:fld id="{3E30469F-474B-44E0-9013-119402DD7996}" type="datetimeFigureOut">
               <a:rPr lang="en-NL" smtClean="0"/>
-              <a:t>27/02/2026</a:t>
+              <a:t>04/03/2026</a:t>
             </a:fld>
             <a:endParaRPr lang="en-NL"/>
           </a:p>
@@ -19298,7 +19325,7 @@
           <a:p>
             <a:fld id="{3E30469F-474B-44E0-9013-119402DD7996}" type="datetimeFigureOut">
               <a:rPr lang="en-NL" smtClean="0"/>
-              <a:t>27/02/2026</a:t>
+              <a:t>04/03/2026</a:t>
             </a:fld>
             <a:endParaRPr lang="en-NL"/>
           </a:p>
@@ -19425,7 +19452,7 @@
           <a:p>
             <a:fld id="{3E30469F-474B-44E0-9013-119402DD7996}" type="datetimeFigureOut">
               <a:rPr lang="en-NL" smtClean="0"/>
-              <a:t>27/02/2026</a:t>
+              <a:t>04/03/2026</a:t>
             </a:fld>
             <a:endParaRPr lang="en-NL"/>
           </a:p>
@@ -19520,7 +19547,7 @@
           <a:p>
             <a:fld id="{3E30469F-474B-44E0-9013-119402DD7996}" type="datetimeFigureOut">
               <a:rPr lang="en-NL" smtClean="0"/>
-              <a:t>27/02/2026</a:t>
+              <a:t>04/03/2026</a:t>
             </a:fld>
             <a:endParaRPr lang="en-NL"/>
           </a:p>
@@ -20601,7 +20628,7 @@
           <a:p>
             <a:fld id="{3E30469F-474B-44E0-9013-119402DD7996}" type="datetimeFigureOut">
               <a:rPr lang="en-NL" smtClean="0"/>
-              <a:t>27/02/2026</a:t>
+              <a:t>04/03/2026</a:t>
             </a:fld>
             <a:endParaRPr lang="en-NL"/>
           </a:p>
@@ -21709,7 +21736,7 @@
           <a:p>
             <a:fld id="{3E30469F-474B-44E0-9013-119402DD7996}" type="datetimeFigureOut">
               <a:rPr lang="en-NL" smtClean="0"/>
-              <a:t>27/02/2026</a:t>
+              <a:t>04/03/2026</a:t>
             </a:fld>
             <a:endParaRPr lang="en-NL"/>
           </a:p>
@@ -22769,7 +22796,7 @@
           <a:p>
             <a:fld id="{3E30469F-474B-44E0-9013-119402DD7996}" type="datetimeFigureOut">
               <a:rPr lang="en-NL" smtClean="0"/>
-              <a:t>27/02/2026</a:t>
+              <a:t>04/03/2026</a:t>
             </a:fld>
             <a:endParaRPr lang="en-NL"/>
           </a:p>
@@ -23428,6 +23455,58 @@
           </a:p>
         </p:txBody>
       </p:sp>
+      <p:sp>
+        <p:nvSpPr>
+          <p:cNvPr id="4" name="TextBox 3">
+            <a:extLst>
+              <a:ext uri="{FF2B5EF4-FFF2-40B4-BE49-F238E27FC236}">
+                <a16:creationId xmlns:a16="http://schemas.microsoft.com/office/drawing/2014/main" id="{2F337CCA-BB4E-7F14-1B1F-C54470D3A2E7}"/>
+              </a:ext>
+            </a:extLst>
+          </p:cNvPr>
+          <p:cNvSpPr txBox="1"/>
+          <p:nvPr/>
+        </p:nvSpPr>
+        <p:spPr>
+          <a:xfrm>
+            <a:off x="746490" y="5778315"/>
+            <a:ext cx="1749287" cy="369332"/>
+          </a:xfrm>
+          <a:prstGeom prst="rect">
+            <a:avLst/>
+          </a:prstGeom>
+          <a:noFill/>
+        </p:spPr>
+        <p:txBody>
+          <a:bodyPr wrap="square" rtlCol="0">
+            <a:spAutoFit/>
+          </a:bodyPr>
+          <a:lstStyle/>
+          <a:p>
+            <a:r>
+              <a:rPr lang="en-US" dirty="0" err="1">
+                <a:solidFill>
+                  <a:schemeClr val="bg1"/>
+                </a:solidFill>
+              </a:rPr>
+              <a:t>DnaSoft</a:t>
+            </a:r>
+            <a:r>
+              <a:rPr lang="en-US" dirty="0">
+                <a:solidFill>
+                  <a:schemeClr val="bg1"/>
+                </a:solidFill>
+              </a:rPr>
+              <a:t> B.V.</a:t>
+            </a:r>
+            <a:endParaRPr lang="en-NL" dirty="0">
+              <a:solidFill>
+                <a:schemeClr val="bg1"/>
+              </a:solidFill>
+            </a:endParaRPr>
+          </a:p>
+        </p:txBody>
+      </p:sp>
     </p:spTree>
     <p:extLst>
       <p:ext uri="{BB962C8B-B14F-4D97-AF65-F5344CB8AC3E}">
@@ -23438,100 +23517,150 @@
   <p:clrMapOvr>
     <a:masterClrMapping/>
   </p:clrMapOvr>
+  <p:timing>
+    <p:tnLst>
+      <p:par>
+        <p:cTn id="1" dur="indefinite" restart="never" nodeType="tmRoot">
+          <p:childTnLst>
+            <p:seq concurrent="1" nextAc="seek">
+              <p:cTn id="2" dur="indefinite" nodeType="mainSeq">
+                <p:childTnLst>
+                  <p:par>
+                    <p:cTn id="3" fill="hold">
+                      <p:stCondLst>
+                        <p:cond delay="indefinite"/>
+                      </p:stCondLst>
+                      <p:childTnLst>
+                        <p:par>
+                          <p:cTn id="4" fill="hold">
+                            <p:stCondLst>
+                              <p:cond delay="0"/>
+                            </p:stCondLst>
+                            <p:childTnLst>
+                              <p:par>
+                                <p:cTn id="5" presetID="1" presetClass="entr" presetSubtype="0" fill="hold" grpId="0" nodeType="clickEffect">
+                                  <p:stCondLst>
+                                    <p:cond delay="0"/>
+                                  </p:stCondLst>
+                                  <p:childTnLst>
+                                    <p:set>
+                                      <p:cBhvr>
+                                        <p:cTn id="6" dur="1" fill="hold">
+                                          <p:stCondLst>
+                                            <p:cond delay="0"/>
+                                          </p:stCondLst>
+                                        </p:cTn>
+                                        <p:tgtEl>
+                                          <p:spTgt spid="2"/>
+                                        </p:tgtEl>
+                                        <p:attrNameLst>
+                                          <p:attrName>style.visibility</p:attrName>
+                                        </p:attrNameLst>
+                                      </p:cBhvr>
+                                      <p:to>
+                                        <p:strVal val="visible"/>
+                                      </p:to>
+                                    </p:set>
+                                  </p:childTnLst>
+                                </p:cTn>
+                              </p:par>
+                            </p:childTnLst>
+                          </p:cTn>
+                        </p:par>
+                      </p:childTnLst>
+                    </p:cTn>
+                  </p:par>
+                  <p:par>
+                    <p:cTn id="7" fill="hold">
+                      <p:stCondLst>
+                        <p:cond delay="indefinite"/>
+                      </p:stCondLst>
+                      <p:childTnLst>
+                        <p:par>
+                          <p:cTn id="8" fill="hold">
+                            <p:stCondLst>
+                              <p:cond delay="0"/>
+                            </p:stCondLst>
+                            <p:childTnLst>
+                              <p:par>
+                                <p:cTn id="9" presetID="10" presetClass="entr" presetSubtype="0" fill="hold" grpId="0" nodeType="clickEffect">
+                                  <p:stCondLst>
+                                    <p:cond delay="0"/>
+                                  </p:stCondLst>
+                                  <p:childTnLst>
+                                    <p:set>
+                                      <p:cBhvr>
+                                        <p:cTn id="10" dur="1" fill="hold">
+                                          <p:stCondLst>
+                                            <p:cond delay="0"/>
+                                          </p:stCondLst>
+                                        </p:cTn>
+                                        <p:tgtEl>
+                                          <p:spTgt spid="3">
+                                            <p:txEl>
+                                              <p:pRg st="0" end="0"/>
+                                            </p:txEl>
+                                          </p:spTgt>
+                                        </p:tgtEl>
+                                        <p:attrNameLst>
+                                          <p:attrName>style.visibility</p:attrName>
+                                        </p:attrNameLst>
+                                      </p:cBhvr>
+                                      <p:to>
+                                        <p:strVal val="visible"/>
+                                      </p:to>
+                                    </p:set>
+                                    <p:animEffect transition="in" filter="fade">
+                                      <p:cBhvr>
+                                        <p:cTn id="11" dur="500"/>
+                                        <p:tgtEl>
+                                          <p:spTgt spid="3">
+                                            <p:txEl>
+                                              <p:pRg st="0" end="0"/>
+                                            </p:txEl>
+                                          </p:spTgt>
+                                        </p:tgtEl>
+                                      </p:cBhvr>
+                                    </p:animEffect>
+                                  </p:childTnLst>
+                                </p:cTn>
+                              </p:par>
+                            </p:childTnLst>
+                          </p:cTn>
+                        </p:par>
+                      </p:childTnLst>
+                    </p:cTn>
+                  </p:par>
+                </p:childTnLst>
+              </p:cTn>
+              <p:prevCondLst>
+                <p:cond evt="onPrev" delay="0">
+                  <p:tgtEl>
+                    <p:sldTgt/>
+                  </p:tgtEl>
+                </p:cond>
+              </p:prevCondLst>
+              <p:nextCondLst>
+                <p:cond evt="onNext" delay="0">
+                  <p:tgtEl>
+                    <p:sldTgt/>
+                  </p:tgtEl>
+                </p:cond>
+              </p:nextCondLst>
+            </p:seq>
+          </p:childTnLst>
+        </p:cTn>
+      </p:par>
+    </p:tnLst>
+    <p:bldLst>
+      <p:bldP spid="2" grpId="0"/>
+      <p:bldP spid="3" grpId="0" build="p"/>
+    </p:bldLst>
+  </p:timing>
 </p:sld>
 </file>
 
 <file path=ppt/slides/slide10.xml><?xml version="1.0" encoding="utf-8"?>
-<p:sld xmlns:a="http://schemas.openxmlformats.org/drawingml/2006/main" xmlns:r="http://schemas.openxmlformats.org/officeDocument/2006/relationships" xmlns:p="http://schemas.openxmlformats.org/presentationml/2006/main">
-  <p:cSld>
-    <p:spTree>
-      <p:nvGrpSpPr>
-        <p:cNvPr id="1" name=""/>
-        <p:cNvGrpSpPr/>
-        <p:nvPr/>
-      </p:nvGrpSpPr>
-      <p:grpSpPr>
-        <a:xfrm>
-          <a:off x="0" y="0"/>
-          <a:ext cx="0" cy="0"/>
-          <a:chOff x="0" y="0"/>
-          <a:chExt cx="0" cy="0"/>
-        </a:xfrm>
-      </p:grpSpPr>
-      <p:sp>
-        <p:nvSpPr>
-          <p:cNvPr id="2" name="Title 1">
-            <a:extLst>
-              <a:ext uri="{FF2B5EF4-FFF2-40B4-BE49-F238E27FC236}">
-                <a16:creationId xmlns:a16="http://schemas.microsoft.com/office/drawing/2014/main" id="{BB4E38FE-D592-6E73-C864-BC346F3D9D8B}"/>
-              </a:ext>
-            </a:extLst>
-          </p:cNvPr>
-          <p:cNvSpPr>
-            <a:spLocks noGrp="1"/>
-          </p:cNvSpPr>
-          <p:nvPr>
-            <p:ph type="title"/>
-          </p:nvPr>
-        </p:nvSpPr>
-        <p:spPr/>
-        <p:txBody>
-          <a:bodyPr/>
-          <a:lstStyle/>
-          <a:p>
-            <a:r>
-              <a:rPr lang="en-US" dirty="0"/>
-              <a:t>Create and execute M code in 3 minutes</a:t>
-            </a:r>
-            <a:endParaRPr lang="en-NL" dirty="0"/>
-          </a:p>
-        </p:txBody>
-      </p:sp>
-      <p:graphicFrame>
-        <p:nvGraphicFramePr>
-          <p:cNvPr id="4" name="Content Placeholder 3">
-            <a:extLst>
-              <a:ext uri="{FF2B5EF4-FFF2-40B4-BE49-F238E27FC236}">
-                <a16:creationId xmlns:a16="http://schemas.microsoft.com/office/drawing/2014/main" id="{0C0FBF0F-89D4-2852-1FC1-C4E591267636}"/>
-              </a:ext>
-            </a:extLst>
-          </p:cNvPr>
-          <p:cNvGraphicFramePr>
-            <a:graphicFrameLocks noGrp="1"/>
-          </p:cNvGraphicFramePr>
-          <p:nvPr>
-            <p:ph idx="1"/>
-            <p:extLst>
-              <p:ext uri="{D42A27DB-BD31-4B8C-83A1-F6EECF244321}">
-                <p14:modId xmlns:p14="http://schemas.microsoft.com/office/powerpoint/2010/main" val="885243221"/>
-              </p:ext>
-            </p:extLst>
-          </p:nvPr>
-        </p:nvGraphicFramePr>
-        <p:xfrm>
-          <a:off x="1155700" y="2173357"/>
-          <a:ext cx="10015883" cy="4439478"/>
-        </p:xfrm>
-        <a:graphic>
-          <a:graphicData uri="http://schemas.openxmlformats.org/drawingml/2006/diagram">
-            <dgm:relIds xmlns:dgm="http://schemas.openxmlformats.org/drawingml/2006/diagram" xmlns:r="http://schemas.openxmlformats.org/officeDocument/2006/relationships" r:dm="rId2" r:lo="rId3" r:qs="rId4" r:cs="rId5"/>
-          </a:graphicData>
-        </a:graphic>
-      </p:graphicFrame>
-    </p:spTree>
-    <p:extLst>
-      <p:ext uri="{BB962C8B-B14F-4D97-AF65-F5344CB8AC3E}">
-        <p14:creationId xmlns:p14="http://schemas.microsoft.com/office/powerpoint/2010/main" val="1001963546"/>
-      </p:ext>
-    </p:extLst>
-  </p:cSld>
-  <p:clrMapOvr>
-    <a:masterClrMapping/>
-  </p:clrMapOvr>
-</p:sld>
-</file>
-
-<file path=ppt/slides/slide11.xml><?xml version="1.0" encoding="utf-8"?>
 <p:sld xmlns:a="http://schemas.openxmlformats.org/drawingml/2006/main" xmlns:r="http://schemas.openxmlformats.org/officeDocument/2006/relationships" xmlns:p="http://schemas.openxmlformats.org/presentationml/2006/main">
   <p:cSld>
     <p:spTree>
@@ -23571,7 +23700,7 @@
           <a:p>
             <a:r>
               <a:rPr lang="en-US" dirty="0"/>
-              <a:t>Can still have full remote access to YDB</a:t>
+              <a:t>Can still have full remote access to YDB and server / process resources</a:t>
             </a:r>
             <a:endParaRPr lang="en-NL" dirty="0"/>
           </a:p>
@@ -23656,10 +23785,470 @@
   <p:clrMapOvr>
     <a:masterClrMapping/>
   </p:clrMapOvr>
+  <p:timing>
+    <p:tnLst>
+      <p:par>
+        <p:cTn id="1" dur="indefinite" restart="never" nodeType="tmRoot">
+          <p:childTnLst>
+            <p:seq concurrent="1" nextAc="seek">
+              <p:cTn id="2" dur="indefinite" nodeType="mainSeq">
+                <p:childTnLst>
+                  <p:par>
+                    <p:cTn id="3" fill="hold">
+                      <p:stCondLst>
+                        <p:cond delay="indefinite"/>
+                      </p:stCondLst>
+                      <p:childTnLst>
+                        <p:par>
+                          <p:cTn id="4" fill="hold">
+                            <p:stCondLst>
+                              <p:cond delay="0"/>
+                            </p:stCondLst>
+                            <p:childTnLst>
+                              <p:par>
+                                <p:cTn id="5" presetID="10" presetClass="entr" presetSubtype="0" fill="hold" grpId="0" nodeType="clickEffect">
+                                  <p:stCondLst>
+                                    <p:cond delay="0"/>
+                                  </p:stCondLst>
+                                  <p:childTnLst>
+                                    <p:set>
+                                      <p:cBhvr>
+                                        <p:cTn id="6" dur="1" fill="hold">
+                                          <p:stCondLst>
+                                            <p:cond delay="0"/>
+                                          </p:stCondLst>
+                                        </p:cTn>
+                                        <p:tgtEl>
+                                          <p:spTgt spid="3">
+                                            <p:txEl>
+                                              <p:pRg st="0" end="0"/>
+                                            </p:txEl>
+                                          </p:spTgt>
+                                        </p:tgtEl>
+                                        <p:attrNameLst>
+                                          <p:attrName>style.visibility</p:attrName>
+                                        </p:attrNameLst>
+                                      </p:cBhvr>
+                                      <p:to>
+                                        <p:strVal val="visible"/>
+                                      </p:to>
+                                    </p:set>
+                                    <p:animEffect transition="in" filter="fade">
+                                      <p:cBhvr>
+                                        <p:cTn id="7" dur="500"/>
+                                        <p:tgtEl>
+                                          <p:spTgt spid="3">
+                                            <p:txEl>
+                                              <p:pRg st="0" end="0"/>
+                                            </p:txEl>
+                                          </p:spTgt>
+                                        </p:tgtEl>
+                                      </p:cBhvr>
+                                    </p:animEffect>
+                                  </p:childTnLst>
+                                </p:cTn>
+                              </p:par>
+                            </p:childTnLst>
+                          </p:cTn>
+                        </p:par>
+                      </p:childTnLst>
+                    </p:cTn>
+                  </p:par>
+                  <p:par>
+                    <p:cTn id="8" fill="hold">
+                      <p:stCondLst>
+                        <p:cond delay="indefinite"/>
+                      </p:stCondLst>
+                      <p:childTnLst>
+                        <p:par>
+                          <p:cTn id="9" fill="hold">
+                            <p:stCondLst>
+                              <p:cond delay="0"/>
+                            </p:stCondLst>
+                            <p:childTnLst>
+                              <p:par>
+                                <p:cTn id="10" presetID="10" presetClass="entr" presetSubtype="0" fill="hold" grpId="0" nodeType="clickEffect">
+                                  <p:stCondLst>
+                                    <p:cond delay="0"/>
+                                  </p:stCondLst>
+                                  <p:childTnLst>
+                                    <p:set>
+                                      <p:cBhvr>
+                                        <p:cTn id="11" dur="1" fill="hold">
+                                          <p:stCondLst>
+                                            <p:cond delay="0"/>
+                                          </p:stCondLst>
+                                        </p:cTn>
+                                        <p:tgtEl>
+                                          <p:spTgt spid="3">
+                                            <p:txEl>
+                                              <p:pRg st="1" end="1"/>
+                                            </p:txEl>
+                                          </p:spTgt>
+                                        </p:tgtEl>
+                                        <p:attrNameLst>
+                                          <p:attrName>style.visibility</p:attrName>
+                                        </p:attrNameLst>
+                                      </p:cBhvr>
+                                      <p:to>
+                                        <p:strVal val="visible"/>
+                                      </p:to>
+                                    </p:set>
+                                    <p:animEffect transition="in" filter="fade">
+                                      <p:cBhvr>
+                                        <p:cTn id="12" dur="500"/>
+                                        <p:tgtEl>
+                                          <p:spTgt spid="3">
+                                            <p:txEl>
+                                              <p:pRg st="1" end="1"/>
+                                            </p:txEl>
+                                          </p:spTgt>
+                                        </p:tgtEl>
+                                      </p:cBhvr>
+                                    </p:animEffect>
+                                  </p:childTnLst>
+                                </p:cTn>
+                              </p:par>
+                            </p:childTnLst>
+                          </p:cTn>
+                        </p:par>
+                      </p:childTnLst>
+                    </p:cTn>
+                  </p:par>
+                  <p:par>
+                    <p:cTn id="13" fill="hold">
+                      <p:stCondLst>
+                        <p:cond delay="indefinite"/>
+                      </p:stCondLst>
+                      <p:childTnLst>
+                        <p:par>
+                          <p:cTn id="14" fill="hold">
+                            <p:stCondLst>
+                              <p:cond delay="0"/>
+                            </p:stCondLst>
+                            <p:childTnLst>
+                              <p:par>
+                                <p:cTn id="15" presetID="10" presetClass="entr" presetSubtype="0" fill="hold" grpId="0" nodeType="clickEffect">
+                                  <p:stCondLst>
+                                    <p:cond delay="0"/>
+                                  </p:stCondLst>
+                                  <p:childTnLst>
+                                    <p:set>
+                                      <p:cBhvr>
+                                        <p:cTn id="16" dur="1" fill="hold">
+                                          <p:stCondLst>
+                                            <p:cond delay="0"/>
+                                          </p:stCondLst>
+                                        </p:cTn>
+                                        <p:tgtEl>
+                                          <p:spTgt spid="3">
+                                            <p:txEl>
+                                              <p:pRg st="2" end="2"/>
+                                            </p:txEl>
+                                          </p:spTgt>
+                                        </p:tgtEl>
+                                        <p:attrNameLst>
+                                          <p:attrName>style.visibility</p:attrName>
+                                        </p:attrNameLst>
+                                      </p:cBhvr>
+                                      <p:to>
+                                        <p:strVal val="visible"/>
+                                      </p:to>
+                                    </p:set>
+                                    <p:animEffect transition="in" filter="fade">
+                                      <p:cBhvr>
+                                        <p:cTn id="17" dur="500"/>
+                                        <p:tgtEl>
+                                          <p:spTgt spid="3">
+                                            <p:txEl>
+                                              <p:pRg st="2" end="2"/>
+                                            </p:txEl>
+                                          </p:spTgt>
+                                        </p:tgtEl>
+                                      </p:cBhvr>
+                                    </p:animEffect>
+                                  </p:childTnLst>
+                                </p:cTn>
+                              </p:par>
+                            </p:childTnLst>
+                          </p:cTn>
+                        </p:par>
+                      </p:childTnLst>
+                    </p:cTn>
+                  </p:par>
+                  <p:par>
+                    <p:cTn id="18" fill="hold">
+                      <p:stCondLst>
+                        <p:cond delay="indefinite"/>
+                      </p:stCondLst>
+                      <p:childTnLst>
+                        <p:par>
+                          <p:cTn id="19" fill="hold">
+                            <p:stCondLst>
+                              <p:cond delay="0"/>
+                            </p:stCondLst>
+                            <p:childTnLst>
+                              <p:par>
+                                <p:cTn id="20" presetID="10" presetClass="entr" presetSubtype="0" fill="hold" grpId="0" nodeType="clickEffect">
+                                  <p:stCondLst>
+                                    <p:cond delay="0"/>
+                                  </p:stCondLst>
+                                  <p:childTnLst>
+                                    <p:set>
+                                      <p:cBhvr>
+                                        <p:cTn id="21" dur="1" fill="hold">
+                                          <p:stCondLst>
+                                            <p:cond delay="0"/>
+                                          </p:stCondLst>
+                                        </p:cTn>
+                                        <p:tgtEl>
+                                          <p:spTgt spid="3">
+                                            <p:txEl>
+                                              <p:pRg st="3" end="3"/>
+                                            </p:txEl>
+                                          </p:spTgt>
+                                        </p:tgtEl>
+                                        <p:attrNameLst>
+                                          <p:attrName>style.visibility</p:attrName>
+                                        </p:attrNameLst>
+                                      </p:cBhvr>
+                                      <p:to>
+                                        <p:strVal val="visible"/>
+                                      </p:to>
+                                    </p:set>
+                                    <p:animEffect transition="in" filter="fade">
+                                      <p:cBhvr>
+                                        <p:cTn id="22" dur="500"/>
+                                        <p:tgtEl>
+                                          <p:spTgt spid="3">
+                                            <p:txEl>
+                                              <p:pRg st="3" end="3"/>
+                                            </p:txEl>
+                                          </p:spTgt>
+                                        </p:tgtEl>
+                                      </p:cBhvr>
+                                    </p:animEffect>
+                                  </p:childTnLst>
+                                </p:cTn>
+                              </p:par>
+                            </p:childTnLst>
+                          </p:cTn>
+                        </p:par>
+                      </p:childTnLst>
+                    </p:cTn>
+                  </p:par>
+                  <p:par>
+                    <p:cTn id="23" fill="hold">
+                      <p:stCondLst>
+                        <p:cond delay="indefinite"/>
+                      </p:stCondLst>
+                      <p:childTnLst>
+                        <p:par>
+                          <p:cTn id="24" fill="hold">
+                            <p:stCondLst>
+                              <p:cond delay="0"/>
+                            </p:stCondLst>
+                            <p:childTnLst>
+                              <p:par>
+                                <p:cTn id="25" presetID="10" presetClass="entr" presetSubtype="0" fill="hold" grpId="0" nodeType="clickEffect">
+                                  <p:stCondLst>
+                                    <p:cond delay="0"/>
+                                  </p:stCondLst>
+                                  <p:childTnLst>
+                                    <p:set>
+                                      <p:cBhvr>
+                                        <p:cTn id="26" dur="1" fill="hold">
+                                          <p:stCondLst>
+                                            <p:cond delay="0"/>
+                                          </p:stCondLst>
+                                        </p:cTn>
+                                        <p:tgtEl>
+                                          <p:spTgt spid="3">
+                                            <p:txEl>
+                                              <p:pRg st="4" end="4"/>
+                                            </p:txEl>
+                                          </p:spTgt>
+                                        </p:tgtEl>
+                                        <p:attrNameLst>
+                                          <p:attrName>style.visibility</p:attrName>
+                                        </p:attrNameLst>
+                                      </p:cBhvr>
+                                      <p:to>
+                                        <p:strVal val="visible"/>
+                                      </p:to>
+                                    </p:set>
+                                    <p:animEffect transition="in" filter="fade">
+                                      <p:cBhvr>
+                                        <p:cTn id="27" dur="500"/>
+                                        <p:tgtEl>
+                                          <p:spTgt spid="3">
+                                            <p:txEl>
+                                              <p:pRg st="4" end="4"/>
+                                            </p:txEl>
+                                          </p:spTgt>
+                                        </p:tgtEl>
+                                      </p:cBhvr>
+                                    </p:animEffect>
+                                  </p:childTnLst>
+                                </p:cTn>
+                              </p:par>
+                            </p:childTnLst>
+                          </p:cTn>
+                        </p:par>
+                      </p:childTnLst>
+                    </p:cTn>
+                  </p:par>
+                  <p:par>
+                    <p:cTn id="28" fill="hold">
+                      <p:stCondLst>
+                        <p:cond delay="indefinite"/>
+                      </p:stCondLst>
+                      <p:childTnLst>
+                        <p:par>
+                          <p:cTn id="29" fill="hold">
+                            <p:stCondLst>
+                              <p:cond delay="0"/>
+                            </p:stCondLst>
+                            <p:childTnLst>
+                              <p:par>
+                                <p:cTn id="30" presetID="10" presetClass="entr" presetSubtype="0" fill="hold" grpId="0" nodeType="clickEffect">
+                                  <p:stCondLst>
+                                    <p:cond delay="0"/>
+                                  </p:stCondLst>
+                                  <p:childTnLst>
+                                    <p:set>
+                                      <p:cBhvr>
+                                        <p:cTn id="31" dur="1" fill="hold">
+                                          <p:stCondLst>
+                                            <p:cond delay="0"/>
+                                          </p:stCondLst>
+                                        </p:cTn>
+                                        <p:tgtEl>
+                                          <p:spTgt spid="3">
+                                            <p:txEl>
+                                              <p:pRg st="5" end="5"/>
+                                            </p:txEl>
+                                          </p:spTgt>
+                                        </p:tgtEl>
+                                        <p:attrNameLst>
+                                          <p:attrName>style.visibility</p:attrName>
+                                        </p:attrNameLst>
+                                      </p:cBhvr>
+                                      <p:to>
+                                        <p:strVal val="visible"/>
+                                      </p:to>
+                                    </p:set>
+                                    <p:animEffect transition="in" filter="fade">
+                                      <p:cBhvr>
+                                        <p:cTn id="32" dur="500"/>
+                                        <p:tgtEl>
+                                          <p:spTgt spid="3">
+                                            <p:txEl>
+                                              <p:pRg st="5" end="5"/>
+                                            </p:txEl>
+                                          </p:spTgt>
+                                        </p:tgtEl>
+                                      </p:cBhvr>
+                                    </p:animEffect>
+                                  </p:childTnLst>
+                                </p:cTn>
+                              </p:par>
+                            </p:childTnLst>
+                          </p:cTn>
+                        </p:par>
+                      </p:childTnLst>
+                    </p:cTn>
+                  </p:par>
+                  <p:par>
+                    <p:cTn id="33" fill="hold">
+                      <p:stCondLst>
+                        <p:cond delay="indefinite"/>
+                      </p:stCondLst>
+                      <p:childTnLst>
+                        <p:par>
+                          <p:cTn id="34" fill="hold">
+                            <p:stCondLst>
+                              <p:cond delay="0"/>
+                            </p:stCondLst>
+                            <p:childTnLst>
+                              <p:par>
+                                <p:cTn id="35" presetID="10" presetClass="entr" presetSubtype="0" fill="hold" grpId="0" nodeType="clickEffect">
+                                  <p:stCondLst>
+                                    <p:cond delay="0"/>
+                                  </p:stCondLst>
+                                  <p:childTnLst>
+                                    <p:set>
+                                      <p:cBhvr>
+                                        <p:cTn id="36" dur="1" fill="hold">
+                                          <p:stCondLst>
+                                            <p:cond delay="0"/>
+                                          </p:stCondLst>
+                                        </p:cTn>
+                                        <p:tgtEl>
+                                          <p:spTgt spid="3">
+                                            <p:txEl>
+                                              <p:pRg st="6" end="6"/>
+                                            </p:txEl>
+                                          </p:spTgt>
+                                        </p:tgtEl>
+                                        <p:attrNameLst>
+                                          <p:attrName>style.visibility</p:attrName>
+                                        </p:attrNameLst>
+                                      </p:cBhvr>
+                                      <p:to>
+                                        <p:strVal val="visible"/>
+                                      </p:to>
+                                    </p:set>
+                                    <p:animEffect transition="in" filter="fade">
+                                      <p:cBhvr>
+                                        <p:cTn id="37" dur="500"/>
+                                        <p:tgtEl>
+                                          <p:spTgt spid="3">
+                                            <p:txEl>
+                                              <p:pRg st="6" end="6"/>
+                                            </p:txEl>
+                                          </p:spTgt>
+                                        </p:tgtEl>
+                                      </p:cBhvr>
+                                    </p:animEffect>
+                                  </p:childTnLst>
+                                </p:cTn>
+                              </p:par>
+                            </p:childTnLst>
+                          </p:cTn>
+                        </p:par>
+                      </p:childTnLst>
+                    </p:cTn>
+                  </p:par>
+                </p:childTnLst>
+              </p:cTn>
+              <p:prevCondLst>
+                <p:cond evt="onPrev" delay="0">
+                  <p:tgtEl>
+                    <p:sldTgt/>
+                  </p:tgtEl>
+                </p:cond>
+              </p:prevCondLst>
+              <p:nextCondLst>
+                <p:cond evt="onNext" delay="0">
+                  <p:tgtEl>
+                    <p:sldTgt/>
+                  </p:tgtEl>
+                </p:cond>
+              </p:nextCondLst>
+            </p:seq>
+          </p:childTnLst>
+        </p:cTn>
+      </p:par>
+    </p:tnLst>
+    <p:bldLst>
+      <p:bldP spid="3" grpId="0" uiExpand="1" build="p"/>
+    </p:bldLst>
+  </p:timing>
 </p:sld>
 </file>
 
-<file path=ppt/slides/slide12.xml><?xml version="1.0" encoding="utf-8"?>
+<file path=ppt/slides/slide11.xml><?xml version="1.0" encoding="utf-8"?>
 <p:sld xmlns:a="http://schemas.openxmlformats.org/drawingml/2006/main" xmlns:r="http://schemas.openxmlformats.org/officeDocument/2006/relationships" xmlns:p="http://schemas.openxmlformats.org/presentationml/2006/main">
   <p:cSld>
     <p:spTree>
@@ -23724,7 +24313,7 @@
         <p:spPr/>
         <p:txBody>
           <a:bodyPr>
-            <a:normAutofit lnSpcReduction="10000"/>
+            <a:normAutofit fontScale="85000" lnSpcReduction="10000"/>
           </a:bodyPr>
           <a:lstStyle/>
           <a:p>
@@ -23762,9 +24351,21 @@
             </a:r>
           </a:p>
           <a:p>
+            <a:pPr lvl="1"/>
             <a:r>
               <a:rPr lang="en-US" dirty="0"/>
-              <a:t>RESP3 library, to bypass the framework and make manual calls</a:t>
+              <a:t>Auto-generated methods description and signature on the client, to speed up development </a:t>
+            </a:r>
+            <a:r>
+              <a:rPr lang="en-US"/>
+              <a:t>and debugging</a:t>
+            </a:r>
+            <a:endParaRPr lang="en-US" dirty="0"/>
+          </a:p>
+          <a:p>
+            <a:r>
+              <a:rPr lang="en-US" dirty="0"/>
+              <a:t>RESP3 libraries in both client and server, to bypass the framework and make manual calls to the framework</a:t>
             </a:r>
           </a:p>
           <a:p>
@@ -23788,10 +24389,513 @@
   <p:clrMapOvr>
     <a:masterClrMapping/>
   </p:clrMapOvr>
+  <p:timing>
+    <p:tnLst>
+      <p:par>
+        <p:cTn id="1" dur="indefinite" restart="never" nodeType="tmRoot">
+          <p:childTnLst>
+            <p:seq concurrent="1" nextAc="seek">
+              <p:cTn id="2" dur="indefinite" nodeType="mainSeq">
+                <p:childTnLst>
+                  <p:par>
+                    <p:cTn id="3" fill="hold">
+                      <p:stCondLst>
+                        <p:cond delay="indefinite"/>
+                      </p:stCondLst>
+                      <p:childTnLst>
+                        <p:par>
+                          <p:cTn id="4" fill="hold">
+                            <p:stCondLst>
+                              <p:cond delay="0"/>
+                            </p:stCondLst>
+                            <p:childTnLst>
+                              <p:par>
+                                <p:cTn id="5" presetID="10" presetClass="entr" presetSubtype="0" fill="hold" grpId="0" nodeType="clickEffect">
+                                  <p:stCondLst>
+                                    <p:cond delay="0"/>
+                                  </p:stCondLst>
+                                  <p:childTnLst>
+                                    <p:set>
+                                      <p:cBhvr>
+                                        <p:cTn id="6" dur="1" fill="hold">
+                                          <p:stCondLst>
+                                            <p:cond delay="0"/>
+                                          </p:stCondLst>
+                                        </p:cTn>
+                                        <p:tgtEl>
+                                          <p:spTgt spid="3">
+                                            <p:txEl>
+                                              <p:pRg st="0" end="0"/>
+                                            </p:txEl>
+                                          </p:spTgt>
+                                        </p:tgtEl>
+                                        <p:attrNameLst>
+                                          <p:attrName>style.visibility</p:attrName>
+                                        </p:attrNameLst>
+                                      </p:cBhvr>
+                                      <p:to>
+                                        <p:strVal val="visible"/>
+                                      </p:to>
+                                    </p:set>
+                                    <p:animEffect transition="in" filter="fade">
+                                      <p:cBhvr>
+                                        <p:cTn id="7" dur="500"/>
+                                        <p:tgtEl>
+                                          <p:spTgt spid="3">
+                                            <p:txEl>
+                                              <p:pRg st="0" end="0"/>
+                                            </p:txEl>
+                                          </p:spTgt>
+                                        </p:tgtEl>
+                                      </p:cBhvr>
+                                    </p:animEffect>
+                                  </p:childTnLst>
+                                </p:cTn>
+                              </p:par>
+                            </p:childTnLst>
+                          </p:cTn>
+                        </p:par>
+                      </p:childTnLst>
+                    </p:cTn>
+                  </p:par>
+                  <p:par>
+                    <p:cTn id="8" fill="hold">
+                      <p:stCondLst>
+                        <p:cond delay="indefinite"/>
+                      </p:stCondLst>
+                      <p:childTnLst>
+                        <p:par>
+                          <p:cTn id="9" fill="hold">
+                            <p:stCondLst>
+                              <p:cond delay="0"/>
+                            </p:stCondLst>
+                            <p:childTnLst>
+                              <p:par>
+                                <p:cTn id="10" presetID="10" presetClass="entr" presetSubtype="0" fill="hold" grpId="0" nodeType="clickEffect">
+                                  <p:stCondLst>
+                                    <p:cond delay="0"/>
+                                  </p:stCondLst>
+                                  <p:childTnLst>
+                                    <p:set>
+                                      <p:cBhvr>
+                                        <p:cTn id="11" dur="1" fill="hold">
+                                          <p:stCondLst>
+                                            <p:cond delay="0"/>
+                                          </p:stCondLst>
+                                        </p:cTn>
+                                        <p:tgtEl>
+                                          <p:spTgt spid="3">
+                                            <p:txEl>
+                                              <p:pRg st="1" end="1"/>
+                                            </p:txEl>
+                                          </p:spTgt>
+                                        </p:tgtEl>
+                                        <p:attrNameLst>
+                                          <p:attrName>style.visibility</p:attrName>
+                                        </p:attrNameLst>
+                                      </p:cBhvr>
+                                      <p:to>
+                                        <p:strVal val="visible"/>
+                                      </p:to>
+                                    </p:set>
+                                    <p:animEffect transition="in" filter="fade">
+                                      <p:cBhvr>
+                                        <p:cTn id="12" dur="500"/>
+                                        <p:tgtEl>
+                                          <p:spTgt spid="3">
+                                            <p:txEl>
+                                              <p:pRg st="1" end="1"/>
+                                            </p:txEl>
+                                          </p:spTgt>
+                                        </p:tgtEl>
+                                      </p:cBhvr>
+                                    </p:animEffect>
+                                  </p:childTnLst>
+                                </p:cTn>
+                              </p:par>
+                            </p:childTnLst>
+                          </p:cTn>
+                        </p:par>
+                      </p:childTnLst>
+                    </p:cTn>
+                  </p:par>
+                  <p:par>
+                    <p:cTn id="13" fill="hold">
+                      <p:stCondLst>
+                        <p:cond delay="indefinite"/>
+                      </p:stCondLst>
+                      <p:childTnLst>
+                        <p:par>
+                          <p:cTn id="14" fill="hold">
+                            <p:stCondLst>
+                              <p:cond delay="0"/>
+                            </p:stCondLst>
+                            <p:childTnLst>
+                              <p:par>
+                                <p:cTn id="15" presetID="10" presetClass="entr" presetSubtype="0" fill="hold" grpId="0" nodeType="clickEffect">
+                                  <p:stCondLst>
+                                    <p:cond delay="0"/>
+                                  </p:stCondLst>
+                                  <p:childTnLst>
+                                    <p:set>
+                                      <p:cBhvr>
+                                        <p:cTn id="16" dur="1" fill="hold">
+                                          <p:stCondLst>
+                                            <p:cond delay="0"/>
+                                          </p:stCondLst>
+                                        </p:cTn>
+                                        <p:tgtEl>
+                                          <p:spTgt spid="3">
+                                            <p:txEl>
+                                              <p:pRg st="2" end="2"/>
+                                            </p:txEl>
+                                          </p:spTgt>
+                                        </p:tgtEl>
+                                        <p:attrNameLst>
+                                          <p:attrName>style.visibility</p:attrName>
+                                        </p:attrNameLst>
+                                      </p:cBhvr>
+                                      <p:to>
+                                        <p:strVal val="visible"/>
+                                      </p:to>
+                                    </p:set>
+                                    <p:animEffect transition="in" filter="fade">
+                                      <p:cBhvr>
+                                        <p:cTn id="17" dur="500"/>
+                                        <p:tgtEl>
+                                          <p:spTgt spid="3">
+                                            <p:txEl>
+                                              <p:pRg st="2" end="2"/>
+                                            </p:txEl>
+                                          </p:spTgt>
+                                        </p:tgtEl>
+                                      </p:cBhvr>
+                                    </p:animEffect>
+                                  </p:childTnLst>
+                                </p:cTn>
+                              </p:par>
+                            </p:childTnLst>
+                          </p:cTn>
+                        </p:par>
+                      </p:childTnLst>
+                    </p:cTn>
+                  </p:par>
+                  <p:par>
+                    <p:cTn id="18" fill="hold">
+                      <p:stCondLst>
+                        <p:cond delay="indefinite"/>
+                      </p:stCondLst>
+                      <p:childTnLst>
+                        <p:par>
+                          <p:cTn id="19" fill="hold">
+                            <p:stCondLst>
+                              <p:cond delay="0"/>
+                            </p:stCondLst>
+                            <p:childTnLst>
+                              <p:par>
+                                <p:cTn id="20" presetID="10" presetClass="entr" presetSubtype="0" fill="hold" grpId="0" nodeType="clickEffect">
+                                  <p:stCondLst>
+                                    <p:cond delay="0"/>
+                                  </p:stCondLst>
+                                  <p:childTnLst>
+                                    <p:set>
+                                      <p:cBhvr>
+                                        <p:cTn id="21" dur="1" fill="hold">
+                                          <p:stCondLst>
+                                            <p:cond delay="0"/>
+                                          </p:stCondLst>
+                                        </p:cTn>
+                                        <p:tgtEl>
+                                          <p:spTgt spid="3">
+                                            <p:txEl>
+                                              <p:pRg st="3" end="3"/>
+                                            </p:txEl>
+                                          </p:spTgt>
+                                        </p:tgtEl>
+                                        <p:attrNameLst>
+                                          <p:attrName>style.visibility</p:attrName>
+                                        </p:attrNameLst>
+                                      </p:cBhvr>
+                                      <p:to>
+                                        <p:strVal val="visible"/>
+                                      </p:to>
+                                    </p:set>
+                                    <p:animEffect transition="in" filter="fade">
+                                      <p:cBhvr>
+                                        <p:cTn id="22" dur="500"/>
+                                        <p:tgtEl>
+                                          <p:spTgt spid="3">
+                                            <p:txEl>
+                                              <p:pRg st="3" end="3"/>
+                                            </p:txEl>
+                                          </p:spTgt>
+                                        </p:tgtEl>
+                                      </p:cBhvr>
+                                    </p:animEffect>
+                                  </p:childTnLst>
+                                </p:cTn>
+                              </p:par>
+                            </p:childTnLst>
+                          </p:cTn>
+                        </p:par>
+                      </p:childTnLst>
+                    </p:cTn>
+                  </p:par>
+                  <p:par>
+                    <p:cTn id="23" fill="hold">
+                      <p:stCondLst>
+                        <p:cond delay="indefinite"/>
+                      </p:stCondLst>
+                      <p:childTnLst>
+                        <p:par>
+                          <p:cTn id="24" fill="hold">
+                            <p:stCondLst>
+                              <p:cond delay="0"/>
+                            </p:stCondLst>
+                            <p:childTnLst>
+                              <p:par>
+                                <p:cTn id="25" presetID="10" presetClass="entr" presetSubtype="0" fill="hold" grpId="0" nodeType="clickEffect">
+                                  <p:stCondLst>
+                                    <p:cond delay="0"/>
+                                  </p:stCondLst>
+                                  <p:childTnLst>
+                                    <p:set>
+                                      <p:cBhvr>
+                                        <p:cTn id="26" dur="1" fill="hold">
+                                          <p:stCondLst>
+                                            <p:cond delay="0"/>
+                                          </p:stCondLst>
+                                        </p:cTn>
+                                        <p:tgtEl>
+                                          <p:spTgt spid="3">
+                                            <p:txEl>
+                                              <p:pRg st="4" end="4"/>
+                                            </p:txEl>
+                                          </p:spTgt>
+                                        </p:tgtEl>
+                                        <p:attrNameLst>
+                                          <p:attrName>style.visibility</p:attrName>
+                                        </p:attrNameLst>
+                                      </p:cBhvr>
+                                      <p:to>
+                                        <p:strVal val="visible"/>
+                                      </p:to>
+                                    </p:set>
+                                    <p:animEffect transition="in" filter="fade">
+                                      <p:cBhvr>
+                                        <p:cTn id="27" dur="500"/>
+                                        <p:tgtEl>
+                                          <p:spTgt spid="3">
+                                            <p:txEl>
+                                              <p:pRg st="4" end="4"/>
+                                            </p:txEl>
+                                          </p:spTgt>
+                                        </p:tgtEl>
+                                      </p:cBhvr>
+                                    </p:animEffect>
+                                  </p:childTnLst>
+                                </p:cTn>
+                              </p:par>
+                              <p:par>
+                                <p:cTn id="28" presetID="10" presetClass="entr" presetSubtype="0" fill="hold" grpId="0" nodeType="withEffect">
+                                  <p:stCondLst>
+                                    <p:cond delay="0"/>
+                                  </p:stCondLst>
+                                  <p:childTnLst>
+                                    <p:set>
+                                      <p:cBhvr>
+                                        <p:cTn id="29" dur="1" fill="hold">
+                                          <p:stCondLst>
+                                            <p:cond delay="0"/>
+                                          </p:stCondLst>
+                                        </p:cTn>
+                                        <p:tgtEl>
+                                          <p:spTgt spid="3">
+                                            <p:txEl>
+                                              <p:pRg st="5" end="5"/>
+                                            </p:txEl>
+                                          </p:spTgt>
+                                        </p:tgtEl>
+                                        <p:attrNameLst>
+                                          <p:attrName>style.visibility</p:attrName>
+                                        </p:attrNameLst>
+                                      </p:cBhvr>
+                                      <p:to>
+                                        <p:strVal val="visible"/>
+                                      </p:to>
+                                    </p:set>
+                                    <p:animEffect transition="in" filter="fade">
+                                      <p:cBhvr>
+                                        <p:cTn id="30" dur="500"/>
+                                        <p:tgtEl>
+                                          <p:spTgt spid="3">
+                                            <p:txEl>
+                                              <p:pRg st="5" end="5"/>
+                                            </p:txEl>
+                                          </p:spTgt>
+                                        </p:tgtEl>
+                                      </p:cBhvr>
+                                    </p:animEffect>
+                                  </p:childTnLst>
+                                </p:cTn>
+                              </p:par>
+                            </p:childTnLst>
+                          </p:cTn>
+                        </p:par>
+                      </p:childTnLst>
+                    </p:cTn>
+                  </p:par>
+                  <p:par>
+                    <p:cTn id="31" fill="hold">
+                      <p:stCondLst>
+                        <p:cond delay="indefinite"/>
+                      </p:stCondLst>
+                      <p:childTnLst>
+                        <p:par>
+                          <p:cTn id="32" fill="hold">
+                            <p:stCondLst>
+                              <p:cond delay="0"/>
+                            </p:stCondLst>
+                            <p:childTnLst>
+                              <p:par>
+                                <p:cTn id="33" presetID="10" presetClass="entr" presetSubtype="0" fill="hold" grpId="0" nodeType="clickEffect">
+                                  <p:stCondLst>
+                                    <p:cond delay="0"/>
+                                  </p:stCondLst>
+                                  <p:childTnLst>
+                                    <p:set>
+                                      <p:cBhvr>
+                                        <p:cTn id="34" dur="1" fill="hold">
+                                          <p:stCondLst>
+                                            <p:cond delay="0"/>
+                                          </p:stCondLst>
+                                        </p:cTn>
+                                        <p:tgtEl>
+                                          <p:spTgt spid="3">
+                                            <p:txEl>
+                                              <p:pRg st="6" end="6"/>
+                                            </p:txEl>
+                                          </p:spTgt>
+                                        </p:tgtEl>
+                                        <p:attrNameLst>
+                                          <p:attrName>style.visibility</p:attrName>
+                                        </p:attrNameLst>
+                                      </p:cBhvr>
+                                      <p:to>
+                                        <p:strVal val="visible"/>
+                                      </p:to>
+                                    </p:set>
+                                    <p:animEffect transition="in" filter="fade">
+                                      <p:cBhvr>
+                                        <p:cTn id="35" dur="500"/>
+                                        <p:tgtEl>
+                                          <p:spTgt spid="3">
+                                            <p:txEl>
+                                              <p:pRg st="6" end="6"/>
+                                            </p:txEl>
+                                          </p:spTgt>
+                                        </p:tgtEl>
+                                      </p:cBhvr>
+                                    </p:animEffect>
+                                  </p:childTnLst>
+                                </p:cTn>
+                              </p:par>
+                            </p:childTnLst>
+                          </p:cTn>
+                        </p:par>
+                      </p:childTnLst>
+                    </p:cTn>
+                  </p:par>
+                  <p:par>
+                    <p:cTn id="36" fill="hold">
+                      <p:stCondLst>
+                        <p:cond delay="indefinite"/>
+                      </p:stCondLst>
+                      <p:childTnLst>
+                        <p:par>
+                          <p:cTn id="37" fill="hold">
+                            <p:stCondLst>
+                              <p:cond delay="0"/>
+                            </p:stCondLst>
+                            <p:childTnLst>
+                              <p:par>
+                                <p:cTn id="38" presetID="10" presetClass="entr" presetSubtype="0" fill="hold" grpId="0" nodeType="clickEffect">
+                                  <p:stCondLst>
+                                    <p:cond delay="0"/>
+                                  </p:stCondLst>
+                                  <p:childTnLst>
+                                    <p:set>
+                                      <p:cBhvr>
+                                        <p:cTn id="39" dur="1" fill="hold">
+                                          <p:stCondLst>
+                                            <p:cond delay="0"/>
+                                          </p:stCondLst>
+                                        </p:cTn>
+                                        <p:tgtEl>
+                                          <p:spTgt spid="3">
+                                            <p:txEl>
+                                              <p:pRg st="7" end="7"/>
+                                            </p:txEl>
+                                          </p:spTgt>
+                                        </p:tgtEl>
+                                        <p:attrNameLst>
+                                          <p:attrName>style.visibility</p:attrName>
+                                        </p:attrNameLst>
+                                      </p:cBhvr>
+                                      <p:to>
+                                        <p:strVal val="visible"/>
+                                      </p:to>
+                                    </p:set>
+                                    <p:animEffect transition="in" filter="fade">
+                                      <p:cBhvr>
+                                        <p:cTn id="40" dur="500"/>
+                                        <p:tgtEl>
+                                          <p:spTgt spid="3">
+                                            <p:txEl>
+                                              <p:pRg st="7" end="7"/>
+                                            </p:txEl>
+                                          </p:spTgt>
+                                        </p:tgtEl>
+                                      </p:cBhvr>
+                                    </p:animEffect>
+                                  </p:childTnLst>
+                                </p:cTn>
+                              </p:par>
+                            </p:childTnLst>
+                          </p:cTn>
+                        </p:par>
+                      </p:childTnLst>
+                    </p:cTn>
+                  </p:par>
+                </p:childTnLst>
+              </p:cTn>
+              <p:prevCondLst>
+                <p:cond evt="onPrev" delay="0">
+                  <p:tgtEl>
+                    <p:sldTgt/>
+                  </p:tgtEl>
+                </p:cond>
+              </p:prevCondLst>
+              <p:nextCondLst>
+                <p:cond evt="onNext" delay="0">
+                  <p:tgtEl>
+                    <p:sldTgt/>
+                  </p:tgtEl>
+                </p:cond>
+              </p:nextCondLst>
+            </p:seq>
+          </p:childTnLst>
+        </p:cTn>
+      </p:par>
+    </p:tnLst>
+    <p:bldLst>
+      <p:bldP spid="3" grpId="0" uiExpand="1" build="p"/>
+    </p:bldLst>
+  </p:timing>
 </p:sld>
 </file>
 
-<file path=ppt/slides/slide13.xml><?xml version="1.0" encoding="utf-8"?>
+<file path=ppt/slides/slide12.xml><?xml version="1.0" encoding="utf-8"?>
 <p:sld xmlns:a="http://schemas.openxmlformats.org/drawingml/2006/main" xmlns:r="http://schemas.openxmlformats.org/officeDocument/2006/relationships" xmlns:p="http://schemas.openxmlformats.org/presentationml/2006/main">
   <p:cSld>
     <p:spTree>
@@ -23923,12 +25027,8 @@
           <a:p>
             <a:pPr lvl="2"/>
             <a:r>
-              <a:rPr lang="en-US"/>
-              <a:t>Directly supports </a:t>
-            </a:r>
-            <a:r>
               <a:rPr lang="en-US" dirty="0"/>
-              <a:t>lazy-fetching (needed for large global)</a:t>
+              <a:t>Directly supports lazy-fetching (needed for large global)</a:t>
             </a:r>
           </a:p>
           <a:p>
@@ -23949,627 +25049,653 @@
   <p:clrMapOvr>
     <a:masterClrMapping/>
   </p:clrMapOvr>
+  <p:timing>
+    <p:tnLst>
+      <p:par>
+        <p:cTn id="1" dur="indefinite" restart="never" nodeType="tmRoot">
+          <p:childTnLst>
+            <p:seq concurrent="1" nextAc="seek">
+              <p:cTn id="2" dur="indefinite" nodeType="mainSeq">
+                <p:childTnLst>
+                  <p:par>
+                    <p:cTn id="3" fill="hold">
+                      <p:stCondLst>
+                        <p:cond delay="indefinite"/>
+                      </p:stCondLst>
+                      <p:childTnLst>
+                        <p:par>
+                          <p:cTn id="4" fill="hold">
+                            <p:stCondLst>
+                              <p:cond delay="0"/>
+                            </p:stCondLst>
+                            <p:childTnLst>
+                              <p:par>
+                                <p:cTn id="5" presetID="10" presetClass="entr" presetSubtype="0" fill="hold" grpId="0" nodeType="clickEffect">
+                                  <p:stCondLst>
+                                    <p:cond delay="0"/>
+                                  </p:stCondLst>
+                                  <p:childTnLst>
+                                    <p:set>
+                                      <p:cBhvr>
+                                        <p:cTn id="6" dur="1" fill="hold">
+                                          <p:stCondLst>
+                                            <p:cond delay="0"/>
+                                          </p:stCondLst>
+                                        </p:cTn>
+                                        <p:tgtEl>
+                                          <p:spTgt spid="3">
+                                            <p:txEl>
+                                              <p:pRg st="0" end="0"/>
+                                            </p:txEl>
+                                          </p:spTgt>
+                                        </p:tgtEl>
+                                        <p:attrNameLst>
+                                          <p:attrName>style.visibility</p:attrName>
+                                        </p:attrNameLst>
+                                      </p:cBhvr>
+                                      <p:to>
+                                        <p:strVal val="visible"/>
+                                      </p:to>
+                                    </p:set>
+                                    <p:animEffect transition="in" filter="fade">
+                                      <p:cBhvr>
+                                        <p:cTn id="7" dur="500"/>
+                                        <p:tgtEl>
+                                          <p:spTgt spid="3">
+                                            <p:txEl>
+                                              <p:pRg st="0" end="0"/>
+                                            </p:txEl>
+                                          </p:spTgt>
+                                        </p:tgtEl>
+                                      </p:cBhvr>
+                                    </p:animEffect>
+                                  </p:childTnLst>
+                                </p:cTn>
+                              </p:par>
+                            </p:childTnLst>
+                          </p:cTn>
+                        </p:par>
+                      </p:childTnLst>
+                    </p:cTn>
+                  </p:par>
+                  <p:par>
+                    <p:cTn id="8" fill="hold">
+                      <p:stCondLst>
+                        <p:cond delay="indefinite"/>
+                      </p:stCondLst>
+                      <p:childTnLst>
+                        <p:par>
+                          <p:cTn id="9" fill="hold">
+                            <p:stCondLst>
+                              <p:cond delay="0"/>
+                            </p:stCondLst>
+                            <p:childTnLst>
+                              <p:par>
+                                <p:cTn id="10" presetID="10" presetClass="entr" presetSubtype="0" fill="hold" grpId="0" nodeType="clickEffect">
+                                  <p:stCondLst>
+                                    <p:cond delay="0"/>
+                                  </p:stCondLst>
+                                  <p:childTnLst>
+                                    <p:set>
+                                      <p:cBhvr>
+                                        <p:cTn id="11" dur="1" fill="hold">
+                                          <p:stCondLst>
+                                            <p:cond delay="0"/>
+                                          </p:stCondLst>
+                                        </p:cTn>
+                                        <p:tgtEl>
+                                          <p:spTgt spid="3">
+                                            <p:txEl>
+                                              <p:pRg st="1" end="1"/>
+                                            </p:txEl>
+                                          </p:spTgt>
+                                        </p:tgtEl>
+                                        <p:attrNameLst>
+                                          <p:attrName>style.visibility</p:attrName>
+                                        </p:attrNameLst>
+                                      </p:cBhvr>
+                                      <p:to>
+                                        <p:strVal val="visible"/>
+                                      </p:to>
+                                    </p:set>
+                                    <p:animEffect transition="in" filter="fade">
+                                      <p:cBhvr>
+                                        <p:cTn id="12" dur="500"/>
+                                        <p:tgtEl>
+                                          <p:spTgt spid="3">
+                                            <p:txEl>
+                                              <p:pRg st="1" end="1"/>
+                                            </p:txEl>
+                                          </p:spTgt>
+                                        </p:tgtEl>
+                                      </p:cBhvr>
+                                    </p:animEffect>
+                                  </p:childTnLst>
+                                </p:cTn>
+                              </p:par>
+                            </p:childTnLst>
+                          </p:cTn>
+                        </p:par>
+                      </p:childTnLst>
+                    </p:cTn>
+                  </p:par>
+                  <p:par>
+                    <p:cTn id="13" fill="hold">
+                      <p:stCondLst>
+                        <p:cond delay="indefinite"/>
+                      </p:stCondLst>
+                      <p:childTnLst>
+                        <p:par>
+                          <p:cTn id="14" fill="hold">
+                            <p:stCondLst>
+                              <p:cond delay="0"/>
+                            </p:stCondLst>
+                            <p:childTnLst>
+                              <p:par>
+                                <p:cTn id="15" presetID="10" presetClass="entr" presetSubtype="0" fill="hold" grpId="0" nodeType="clickEffect">
+                                  <p:stCondLst>
+                                    <p:cond delay="0"/>
+                                  </p:stCondLst>
+                                  <p:childTnLst>
+                                    <p:set>
+                                      <p:cBhvr>
+                                        <p:cTn id="16" dur="1" fill="hold">
+                                          <p:stCondLst>
+                                            <p:cond delay="0"/>
+                                          </p:stCondLst>
+                                        </p:cTn>
+                                        <p:tgtEl>
+                                          <p:spTgt spid="3">
+                                            <p:txEl>
+                                              <p:pRg st="2" end="2"/>
+                                            </p:txEl>
+                                          </p:spTgt>
+                                        </p:tgtEl>
+                                        <p:attrNameLst>
+                                          <p:attrName>style.visibility</p:attrName>
+                                        </p:attrNameLst>
+                                      </p:cBhvr>
+                                      <p:to>
+                                        <p:strVal val="visible"/>
+                                      </p:to>
+                                    </p:set>
+                                    <p:animEffect transition="in" filter="fade">
+                                      <p:cBhvr>
+                                        <p:cTn id="17" dur="500"/>
+                                        <p:tgtEl>
+                                          <p:spTgt spid="3">
+                                            <p:txEl>
+                                              <p:pRg st="2" end="2"/>
+                                            </p:txEl>
+                                          </p:spTgt>
+                                        </p:tgtEl>
+                                      </p:cBhvr>
+                                    </p:animEffect>
+                                  </p:childTnLst>
+                                </p:cTn>
+                              </p:par>
+                            </p:childTnLst>
+                          </p:cTn>
+                        </p:par>
+                      </p:childTnLst>
+                    </p:cTn>
+                  </p:par>
+                  <p:par>
+                    <p:cTn id="18" fill="hold">
+                      <p:stCondLst>
+                        <p:cond delay="indefinite"/>
+                      </p:stCondLst>
+                      <p:childTnLst>
+                        <p:par>
+                          <p:cTn id="19" fill="hold">
+                            <p:stCondLst>
+                              <p:cond delay="0"/>
+                            </p:stCondLst>
+                            <p:childTnLst>
+                              <p:par>
+                                <p:cTn id="20" presetID="10" presetClass="entr" presetSubtype="0" fill="hold" grpId="0" nodeType="clickEffect">
+                                  <p:stCondLst>
+                                    <p:cond delay="0"/>
+                                  </p:stCondLst>
+                                  <p:childTnLst>
+                                    <p:set>
+                                      <p:cBhvr>
+                                        <p:cTn id="21" dur="1" fill="hold">
+                                          <p:stCondLst>
+                                            <p:cond delay="0"/>
+                                          </p:stCondLst>
+                                        </p:cTn>
+                                        <p:tgtEl>
+                                          <p:spTgt spid="3">
+                                            <p:txEl>
+                                              <p:pRg st="3" end="3"/>
+                                            </p:txEl>
+                                          </p:spTgt>
+                                        </p:tgtEl>
+                                        <p:attrNameLst>
+                                          <p:attrName>style.visibility</p:attrName>
+                                        </p:attrNameLst>
+                                      </p:cBhvr>
+                                      <p:to>
+                                        <p:strVal val="visible"/>
+                                      </p:to>
+                                    </p:set>
+                                    <p:animEffect transition="in" filter="fade">
+                                      <p:cBhvr>
+                                        <p:cTn id="22" dur="500"/>
+                                        <p:tgtEl>
+                                          <p:spTgt spid="3">
+                                            <p:txEl>
+                                              <p:pRg st="3" end="3"/>
+                                            </p:txEl>
+                                          </p:spTgt>
+                                        </p:tgtEl>
+                                      </p:cBhvr>
+                                    </p:animEffect>
+                                  </p:childTnLst>
+                                </p:cTn>
+                              </p:par>
+                            </p:childTnLst>
+                          </p:cTn>
+                        </p:par>
+                      </p:childTnLst>
+                    </p:cTn>
+                  </p:par>
+                  <p:par>
+                    <p:cTn id="23" fill="hold">
+                      <p:stCondLst>
+                        <p:cond delay="indefinite"/>
+                      </p:stCondLst>
+                      <p:childTnLst>
+                        <p:par>
+                          <p:cTn id="24" fill="hold">
+                            <p:stCondLst>
+                              <p:cond delay="0"/>
+                            </p:stCondLst>
+                            <p:childTnLst>
+                              <p:par>
+                                <p:cTn id="25" presetID="10" presetClass="entr" presetSubtype="0" fill="hold" grpId="0" nodeType="clickEffect">
+                                  <p:stCondLst>
+                                    <p:cond delay="0"/>
+                                  </p:stCondLst>
+                                  <p:childTnLst>
+                                    <p:set>
+                                      <p:cBhvr>
+                                        <p:cTn id="26" dur="1" fill="hold">
+                                          <p:stCondLst>
+                                            <p:cond delay="0"/>
+                                          </p:stCondLst>
+                                        </p:cTn>
+                                        <p:tgtEl>
+                                          <p:spTgt spid="3">
+                                            <p:txEl>
+                                              <p:pRg st="4" end="4"/>
+                                            </p:txEl>
+                                          </p:spTgt>
+                                        </p:tgtEl>
+                                        <p:attrNameLst>
+                                          <p:attrName>style.visibility</p:attrName>
+                                        </p:attrNameLst>
+                                      </p:cBhvr>
+                                      <p:to>
+                                        <p:strVal val="visible"/>
+                                      </p:to>
+                                    </p:set>
+                                    <p:animEffect transition="in" filter="fade">
+                                      <p:cBhvr>
+                                        <p:cTn id="27" dur="500"/>
+                                        <p:tgtEl>
+                                          <p:spTgt spid="3">
+                                            <p:txEl>
+                                              <p:pRg st="4" end="4"/>
+                                            </p:txEl>
+                                          </p:spTgt>
+                                        </p:tgtEl>
+                                      </p:cBhvr>
+                                    </p:animEffect>
+                                  </p:childTnLst>
+                                </p:cTn>
+                              </p:par>
+                            </p:childTnLst>
+                          </p:cTn>
+                        </p:par>
+                      </p:childTnLst>
+                    </p:cTn>
+                  </p:par>
+                  <p:par>
+                    <p:cTn id="28" fill="hold">
+                      <p:stCondLst>
+                        <p:cond delay="indefinite"/>
+                      </p:stCondLst>
+                      <p:childTnLst>
+                        <p:par>
+                          <p:cTn id="29" fill="hold">
+                            <p:stCondLst>
+                              <p:cond delay="0"/>
+                            </p:stCondLst>
+                            <p:childTnLst>
+                              <p:par>
+                                <p:cTn id="30" presetID="10" presetClass="entr" presetSubtype="0" fill="hold" grpId="0" nodeType="clickEffect">
+                                  <p:stCondLst>
+                                    <p:cond delay="0"/>
+                                  </p:stCondLst>
+                                  <p:childTnLst>
+                                    <p:set>
+                                      <p:cBhvr>
+                                        <p:cTn id="31" dur="1" fill="hold">
+                                          <p:stCondLst>
+                                            <p:cond delay="0"/>
+                                          </p:stCondLst>
+                                        </p:cTn>
+                                        <p:tgtEl>
+                                          <p:spTgt spid="3">
+                                            <p:txEl>
+                                              <p:pRg st="5" end="5"/>
+                                            </p:txEl>
+                                          </p:spTgt>
+                                        </p:tgtEl>
+                                        <p:attrNameLst>
+                                          <p:attrName>style.visibility</p:attrName>
+                                        </p:attrNameLst>
+                                      </p:cBhvr>
+                                      <p:to>
+                                        <p:strVal val="visible"/>
+                                      </p:to>
+                                    </p:set>
+                                    <p:animEffect transition="in" filter="fade">
+                                      <p:cBhvr>
+                                        <p:cTn id="32" dur="500"/>
+                                        <p:tgtEl>
+                                          <p:spTgt spid="3">
+                                            <p:txEl>
+                                              <p:pRg st="5" end="5"/>
+                                            </p:txEl>
+                                          </p:spTgt>
+                                        </p:tgtEl>
+                                      </p:cBhvr>
+                                    </p:animEffect>
+                                  </p:childTnLst>
+                                </p:cTn>
+                              </p:par>
+                            </p:childTnLst>
+                          </p:cTn>
+                        </p:par>
+                      </p:childTnLst>
+                    </p:cTn>
+                  </p:par>
+                  <p:par>
+                    <p:cTn id="33" fill="hold">
+                      <p:stCondLst>
+                        <p:cond delay="indefinite"/>
+                      </p:stCondLst>
+                      <p:childTnLst>
+                        <p:par>
+                          <p:cTn id="34" fill="hold">
+                            <p:stCondLst>
+                              <p:cond delay="0"/>
+                            </p:stCondLst>
+                            <p:childTnLst>
+                              <p:par>
+                                <p:cTn id="35" presetID="10" presetClass="entr" presetSubtype="0" fill="hold" grpId="0" nodeType="clickEffect">
+                                  <p:stCondLst>
+                                    <p:cond delay="0"/>
+                                  </p:stCondLst>
+                                  <p:childTnLst>
+                                    <p:set>
+                                      <p:cBhvr>
+                                        <p:cTn id="36" dur="1" fill="hold">
+                                          <p:stCondLst>
+                                            <p:cond delay="0"/>
+                                          </p:stCondLst>
+                                        </p:cTn>
+                                        <p:tgtEl>
+                                          <p:spTgt spid="3">
+                                            <p:txEl>
+                                              <p:pRg st="6" end="6"/>
+                                            </p:txEl>
+                                          </p:spTgt>
+                                        </p:tgtEl>
+                                        <p:attrNameLst>
+                                          <p:attrName>style.visibility</p:attrName>
+                                        </p:attrNameLst>
+                                      </p:cBhvr>
+                                      <p:to>
+                                        <p:strVal val="visible"/>
+                                      </p:to>
+                                    </p:set>
+                                    <p:animEffect transition="in" filter="fade">
+                                      <p:cBhvr>
+                                        <p:cTn id="37" dur="500"/>
+                                        <p:tgtEl>
+                                          <p:spTgt spid="3">
+                                            <p:txEl>
+                                              <p:pRg st="6" end="6"/>
+                                            </p:txEl>
+                                          </p:spTgt>
+                                        </p:tgtEl>
+                                      </p:cBhvr>
+                                    </p:animEffect>
+                                  </p:childTnLst>
+                                </p:cTn>
+                              </p:par>
+                            </p:childTnLst>
+                          </p:cTn>
+                        </p:par>
+                      </p:childTnLst>
+                    </p:cTn>
+                  </p:par>
+                  <p:par>
+                    <p:cTn id="38" fill="hold">
+                      <p:stCondLst>
+                        <p:cond delay="indefinite"/>
+                      </p:stCondLst>
+                      <p:childTnLst>
+                        <p:par>
+                          <p:cTn id="39" fill="hold">
+                            <p:stCondLst>
+                              <p:cond delay="0"/>
+                            </p:stCondLst>
+                            <p:childTnLst>
+                              <p:par>
+                                <p:cTn id="40" presetID="10" presetClass="entr" presetSubtype="0" fill="hold" grpId="0" nodeType="clickEffect">
+                                  <p:stCondLst>
+                                    <p:cond delay="0"/>
+                                  </p:stCondLst>
+                                  <p:childTnLst>
+                                    <p:set>
+                                      <p:cBhvr>
+                                        <p:cTn id="41" dur="1" fill="hold">
+                                          <p:stCondLst>
+                                            <p:cond delay="0"/>
+                                          </p:stCondLst>
+                                        </p:cTn>
+                                        <p:tgtEl>
+                                          <p:spTgt spid="3">
+                                            <p:txEl>
+                                              <p:pRg st="7" end="7"/>
+                                            </p:txEl>
+                                          </p:spTgt>
+                                        </p:tgtEl>
+                                        <p:attrNameLst>
+                                          <p:attrName>style.visibility</p:attrName>
+                                        </p:attrNameLst>
+                                      </p:cBhvr>
+                                      <p:to>
+                                        <p:strVal val="visible"/>
+                                      </p:to>
+                                    </p:set>
+                                    <p:animEffect transition="in" filter="fade">
+                                      <p:cBhvr>
+                                        <p:cTn id="42" dur="500"/>
+                                        <p:tgtEl>
+                                          <p:spTgt spid="3">
+                                            <p:txEl>
+                                              <p:pRg st="7" end="7"/>
+                                            </p:txEl>
+                                          </p:spTgt>
+                                        </p:tgtEl>
+                                      </p:cBhvr>
+                                    </p:animEffect>
+                                  </p:childTnLst>
+                                </p:cTn>
+                              </p:par>
+                            </p:childTnLst>
+                          </p:cTn>
+                        </p:par>
+                      </p:childTnLst>
+                    </p:cTn>
+                  </p:par>
+                  <p:par>
+                    <p:cTn id="43" fill="hold">
+                      <p:stCondLst>
+                        <p:cond delay="indefinite"/>
+                      </p:stCondLst>
+                      <p:childTnLst>
+                        <p:par>
+                          <p:cTn id="44" fill="hold">
+                            <p:stCondLst>
+                              <p:cond delay="0"/>
+                            </p:stCondLst>
+                            <p:childTnLst>
+                              <p:par>
+                                <p:cTn id="45" presetID="10" presetClass="entr" presetSubtype="0" fill="hold" grpId="0" nodeType="clickEffect">
+                                  <p:stCondLst>
+                                    <p:cond delay="0"/>
+                                  </p:stCondLst>
+                                  <p:childTnLst>
+                                    <p:set>
+                                      <p:cBhvr>
+                                        <p:cTn id="46" dur="1" fill="hold">
+                                          <p:stCondLst>
+                                            <p:cond delay="0"/>
+                                          </p:stCondLst>
+                                        </p:cTn>
+                                        <p:tgtEl>
+                                          <p:spTgt spid="3">
+                                            <p:txEl>
+                                              <p:pRg st="8" end="8"/>
+                                            </p:txEl>
+                                          </p:spTgt>
+                                        </p:tgtEl>
+                                        <p:attrNameLst>
+                                          <p:attrName>style.visibility</p:attrName>
+                                        </p:attrNameLst>
+                                      </p:cBhvr>
+                                      <p:to>
+                                        <p:strVal val="visible"/>
+                                      </p:to>
+                                    </p:set>
+                                    <p:animEffect transition="in" filter="fade">
+                                      <p:cBhvr>
+                                        <p:cTn id="47" dur="500"/>
+                                        <p:tgtEl>
+                                          <p:spTgt spid="3">
+                                            <p:txEl>
+                                              <p:pRg st="8" end="8"/>
+                                            </p:txEl>
+                                          </p:spTgt>
+                                        </p:tgtEl>
+                                      </p:cBhvr>
+                                    </p:animEffect>
+                                  </p:childTnLst>
+                                </p:cTn>
+                              </p:par>
+                            </p:childTnLst>
+                          </p:cTn>
+                        </p:par>
+                      </p:childTnLst>
+                    </p:cTn>
+                  </p:par>
+                  <p:par>
+                    <p:cTn id="48" fill="hold">
+                      <p:stCondLst>
+                        <p:cond delay="indefinite"/>
+                      </p:stCondLst>
+                      <p:childTnLst>
+                        <p:par>
+                          <p:cTn id="49" fill="hold">
+                            <p:stCondLst>
+                              <p:cond delay="0"/>
+                            </p:stCondLst>
+                            <p:childTnLst>
+                              <p:par>
+                                <p:cTn id="50" presetID="10" presetClass="entr" presetSubtype="0" fill="hold" grpId="0" nodeType="clickEffect">
+                                  <p:stCondLst>
+                                    <p:cond delay="0"/>
+                                  </p:stCondLst>
+                                  <p:childTnLst>
+                                    <p:set>
+                                      <p:cBhvr>
+                                        <p:cTn id="51" dur="1" fill="hold">
+                                          <p:stCondLst>
+                                            <p:cond delay="0"/>
+                                          </p:stCondLst>
+                                        </p:cTn>
+                                        <p:tgtEl>
+                                          <p:spTgt spid="3">
+                                            <p:txEl>
+                                              <p:pRg st="9" end="9"/>
+                                            </p:txEl>
+                                          </p:spTgt>
+                                        </p:tgtEl>
+                                        <p:attrNameLst>
+                                          <p:attrName>style.visibility</p:attrName>
+                                        </p:attrNameLst>
+                                      </p:cBhvr>
+                                      <p:to>
+                                        <p:strVal val="visible"/>
+                                      </p:to>
+                                    </p:set>
+                                    <p:animEffect transition="in" filter="fade">
+                                      <p:cBhvr>
+                                        <p:cTn id="52" dur="500"/>
+                                        <p:tgtEl>
+                                          <p:spTgt spid="3">
+                                            <p:txEl>
+                                              <p:pRg st="9" end="9"/>
+                                            </p:txEl>
+                                          </p:spTgt>
+                                        </p:tgtEl>
+                                      </p:cBhvr>
+                                    </p:animEffect>
+                                  </p:childTnLst>
+                                </p:cTn>
+                              </p:par>
+                            </p:childTnLst>
+                          </p:cTn>
+                        </p:par>
+                      </p:childTnLst>
+                    </p:cTn>
+                  </p:par>
+                </p:childTnLst>
+              </p:cTn>
+              <p:prevCondLst>
+                <p:cond evt="onPrev" delay="0">
+                  <p:tgtEl>
+                    <p:sldTgt/>
+                  </p:tgtEl>
+                </p:cond>
+              </p:prevCondLst>
+              <p:nextCondLst>
+                <p:cond evt="onNext" delay="0">
+                  <p:tgtEl>
+                    <p:sldTgt/>
+                  </p:tgtEl>
+                </p:cond>
+              </p:nextCondLst>
+            </p:seq>
+          </p:childTnLst>
+        </p:cTn>
+      </p:par>
+    </p:tnLst>
+    <p:bldLst>
+      <p:bldP spid="3" grpId="0" uiExpand="1" build="p"/>
+    </p:bldLst>
+  </p:timing>
 </p:sld>
 </file>
 
-<file path=ppt/slides/slide2.xml><?xml version="1.0" encoding="utf-8"?>
-<p:sld xmlns:a="http://schemas.openxmlformats.org/drawingml/2006/main" xmlns:r="http://schemas.openxmlformats.org/officeDocument/2006/relationships" xmlns:p="http://schemas.openxmlformats.org/presentationml/2006/main">
-  <p:cSld>
-    <p:spTree>
-      <p:nvGrpSpPr>
-        <p:cNvPr id="1" name=""/>
-        <p:cNvGrpSpPr/>
-        <p:nvPr/>
-      </p:nvGrpSpPr>
-      <p:grpSpPr>
-        <a:xfrm>
-          <a:off x="0" y="0"/>
-          <a:ext cx="0" cy="0"/>
-          <a:chOff x="0" y="0"/>
-          <a:chExt cx="0" cy="0"/>
-        </a:xfrm>
-      </p:grpSpPr>
-      <p:sp>
-        <p:nvSpPr>
-          <p:cNvPr id="2" name="Title 1">
-            <a:extLst>
-              <a:ext uri="{FF2B5EF4-FFF2-40B4-BE49-F238E27FC236}">
-                <a16:creationId xmlns:a16="http://schemas.microsoft.com/office/drawing/2014/main" id="{AAFD5D0B-3FF4-4FED-DDC8-D173C4403E65}"/>
-              </a:ext>
-            </a:extLst>
-          </p:cNvPr>
-          <p:cNvSpPr>
-            <a:spLocks noGrp="1"/>
-          </p:cNvSpPr>
-          <p:nvPr>
-            <p:ph type="title"/>
-          </p:nvPr>
-        </p:nvSpPr>
-        <p:spPr/>
-        <p:txBody>
-          <a:bodyPr/>
-          <a:lstStyle/>
-          <a:p>
-            <a:r>
-              <a:rPr lang="en-US" dirty="0"/>
-              <a:t>Private comment</a:t>
-            </a:r>
-            <a:endParaRPr lang="en-NL" dirty="0"/>
-          </a:p>
-        </p:txBody>
-      </p:sp>
-      <p:sp>
-        <p:nvSpPr>
-          <p:cNvPr id="3" name="Content Placeholder 2">
-            <a:extLst>
-              <a:ext uri="{FF2B5EF4-FFF2-40B4-BE49-F238E27FC236}">
-                <a16:creationId xmlns:a16="http://schemas.microsoft.com/office/drawing/2014/main" id="{6ECD4B7A-F343-5BCB-94C9-E80EB92EE397}"/>
-              </a:ext>
-            </a:extLst>
-          </p:cNvPr>
-          <p:cNvSpPr>
-            <a:spLocks noGrp="1"/>
-          </p:cNvSpPr>
-          <p:nvPr>
-            <p:ph idx="1"/>
-          </p:nvPr>
-        </p:nvSpPr>
-        <p:spPr/>
-        <p:txBody>
-          <a:bodyPr>
-            <a:normAutofit lnSpcReduction="10000"/>
-          </a:bodyPr>
-          <a:lstStyle/>
-          <a:p>
-            <a:r>
-              <a:rPr lang="en-US" dirty="0"/>
-              <a:t>Practically every database in the market has a remote access through sockets</a:t>
-            </a:r>
-          </a:p>
-          <a:p>
-            <a:r>
-              <a:rPr lang="en-US" dirty="0"/>
-              <a:t>One of the main reasons is the growing amount of processed data, leaving horizontal back-end scalability (multiple servers behind a load balancer) accessing a monolithic database a good compromise.</a:t>
-            </a:r>
-          </a:p>
-          <a:p>
-            <a:r>
-              <a:rPr lang="en-US" dirty="0"/>
-              <a:t>At the same time, executing only pure data API running on the server and moving all the business-tiers to external machines increase the power of the database server allowing a monolithic system to handle more traffic.</a:t>
-            </a:r>
-          </a:p>
-          <a:p>
-            <a:r>
-              <a:rPr lang="en-US" dirty="0" err="1"/>
-              <a:t>GTm</a:t>
-            </a:r>
-            <a:r>
-              <a:rPr lang="en-US" dirty="0"/>
-              <a:t> and YottaDB don’t have remote access, but I can understand that it is not easy to find the right compromise talking to remote servers with foreign programming languages</a:t>
-            </a:r>
-          </a:p>
-          <a:p>
-            <a:pPr lvl="1"/>
-            <a:endParaRPr lang="en-NL" dirty="0"/>
-          </a:p>
-        </p:txBody>
-      </p:sp>
-    </p:spTree>
-    <p:extLst>
-      <p:ext uri="{BB962C8B-B14F-4D97-AF65-F5344CB8AC3E}">
-        <p14:creationId xmlns:p14="http://schemas.microsoft.com/office/powerpoint/2010/main" val="2240125713"/>
-      </p:ext>
-    </p:extLst>
-  </p:cSld>
-  <p:clrMapOvr>
-    <a:masterClrMapping/>
-  </p:clrMapOvr>
-</p:sld>
-</file>
-
-<file path=ppt/slides/slide3.xml><?xml version="1.0" encoding="utf-8"?>
-<p:sld xmlns:a="http://schemas.openxmlformats.org/drawingml/2006/main" xmlns:r="http://schemas.openxmlformats.org/officeDocument/2006/relationships" xmlns:p="http://schemas.openxmlformats.org/presentationml/2006/main">
-  <p:cSld>
-    <p:spTree>
-      <p:nvGrpSpPr>
-        <p:cNvPr id="1" name="">
-          <a:extLst>
-            <a:ext uri="{FF2B5EF4-FFF2-40B4-BE49-F238E27FC236}">
-              <a16:creationId xmlns:a16="http://schemas.microsoft.com/office/drawing/2014/main" id="{932B73CC-7ECC-7075-0FFC-14EB9A731C77}"/>
-            </a:ext>
-          </a:extLst>
-        </p:cNvPr>
-        <p:cNvGrpSpPr/>
-        <p:nvPr/>
-      </p:nvGrpSpPr>
-      <p:grpSpPr>
-        <a:xfrm>
-          <a:off x="0" y="0"/>
-          <a:ext cx="0" cy="0"/>
-          <a:chOff x="0" y="0"/>
-          <a:chExt cx="0" cy="0"/>
-        </a:xfrm>
-      </p:grpSpPr>
-      <p:sp>
-        <p:nvSpPr>
-          <p:cNvPr id="2" name="Title 1">
-            <a:extLst>
-              <a:ext uri="{FF2B5EF4-FFF2-40B4-BE49-F238E27FC236}">
-                <a16:creationId xmlns:a16="http://schemas.microsoft.com/office/drawing/2014/main" id="{E56B026E-8CEF-8EBE-7D93-0A0EE6BAB81F}"/>
-              </a:ext>
-            </a:extLst>
-          </p:cNvPr>
-          <p:cNvSpPr>
-            <a:spLocks noGrp="1"/>
-          </p:cNvSpPr>
-          <p:nvPr>
-            <p:ph type="title"/>
-          </p:nvPr>
-        </p:nvSpPr>
-        <p:spPr/>
-        <p:txBody>
-          <a:bodyPr/>
-          <a:lstStyle/>
-          <a:p>
-            <a:r>
-              <a:rPr lang="en-US" dirty="0"/>
-              <a:t>Private comment</a:t>
-            </a:r>
-            <a:endParaRPr lang="en-NL" dirty="0"/>
-          </a:p>
-        </p:txBody>
-      </p:sp>
-      <p:sp>
-        <p:nvSpPr>
-          <p:cNvPr id="3" name="Content Placeholder 2">
-            <a:extLst>
-              <a:ext uri="{FF2B5EF4-FFF2-40B4-BE49-F238E27FC236}">
-                <a16:creationId xmlns:a16="http://schemas.microsoft.com/office/drawing/2014/main" id="{D2EC6879-A4B1-89EF-4659-2698C7501C18}"/>
-              </a:ext>
-            </a:extLst>
-          </p:cNvPr>
-          <p:cNvSpPr>
-            <a:spLocks noGrp="1"/>
-          </p:cNvSpPr>
-          <p:nvPr>
-            <p:ph idx="1"/>
-          </p:nvPr>
-        </p:nvSpPr>
-        <p:spPr/>
-        <p:txBody>
-          <a:bodyPr>
-            <a:normAutofit/>
-          </a:bodyPr>
-          <a:lstStyle/>
-          <a:p>
-            <a:r>
-              <a:rPr lang="en-US" dirty="0"/>
-              <a:t>That’s why Mind fill all the gaps:</a:t>
-            </a:r>
-          </a:p>
-          <a:p>
-            <a:pPr lvl="1"/>
-            <a:r>
-              <a:rPr lang="en-US" dirty="0"/>
-              <a:t>Talks M to M programmers and </a:t>
-            </a:r>
-            <a:r>
-              <a:rPr lang="en-US" dirty="0" err="1"/>
-              <a:t>js</a:t>
-            </a:r>
-            <a:r>
-              <a:rPr lang="en-US" dirty="0"/>
-              <a:t> / java / Go to remote programmers</a:t>
-            </a:r>
-          </a:p>
-          <a:p>
-            <a:pPr lvl="1"/>
-            <a:r>
-              <a:rPr lang="en-US" dirty="0"/>
-              <a:t>Expose data in back-end “standard” formats (data-types, Objects) for smoother integration</a:t>
-            </a:r>
-          </a:p>
-          <a:p>
-            <a:r>
-              <a:rPr lang="en-US" dirty="0"/>
-              <a:t>It is the natural “remote extension” of the multi-language packages YottaDB already offers…</a:t>
-            </a:r>
-          </a:p>
-          <a:p>
-            <a:r>
-              <a:rPr lang="en-US" dirty="0"/>
-              <a:t>It removes the need to have ALL the client’s code running on the database server, which is now the case (and, in some situation, a limitation for potential customers)</a:t>
-            </a:r>
-          </a:p>
-          <a:p>
-            <a:r>
-              <a:rPr lang="en-US" dirty="0"/>
-              <a:t>Why not offer both?</a:t>
-            </a:r>
-          </a:p>
-          <a:p>
-            <a:pPr lvl="1"/>
-            <a:endParaRPr lang="en-NL" dirty="0"/>
-          </a:p>
-        </p:txBody>
-      </p:sp>
-    </p:spTree>
-    <p:extLst>
-      <p:ext uri="{BB962C8B-B14F-4D97-AF65-F5344CB8AC3E}">
-        <p14:creationId xmlns:p14="http://schemas.microsoft.com/office/powerpoint/2010/main" val="3005701212"/>
-      </p:ext>
-    </p:extLst>
-  </p:cSld>
-  <p:clrMapOvr>
-    <a:masterClrMapping/>
-  </p:clrMapOvr>
-</p:sld>
-</file>
-
-<file path=ppt/slides/slide4.xml><?xml version="1.0" encoding="utf-8"?>
-<p:sld xmlns:a="http://schemas.openxmlformats.org/drawingml/2006/main" xmlns:r="http://schemas.openxmlformats.org/officeDocument/2006/relationships" xmlns:p="http://schemas.openxmlformats.org/presentationml/2006/main">
-  <p:cSld>
-    <p:bg>
-      <p:bgPr>
-        <a:solidFill>
-          <a:schemeClr val="bg1"/>
-        </a:solidFill>
-        <a:effectLst/>
-      </p:bgPr>
-    </p:bg>
-    <p:spTree>
-      <p:nvGrpSpPr>
-        <p:cNvPr id="1" name=""/>
-        <p:cNvGrpSpPr/>
-        <p:nvPr/>
-      </p:nvGrpSpPr>
-      <p:grpSpPr>
-        <a:xfrm>
-          <a:off x="0" y="0"/>
-          <a:ext cx="0" cy="0"/>
-          <a:chOff x="0" y="0"/>
-          <a:chExt cx="0" cy="0"/>
-        </a:xfrm>
-      </p:grpSpPr>
-      <p:sp>
-        <p:nvSpPr>
-          <p:cNvPr id="2" name="Title 1">
-            <a:extLst>
-              <a:ext uri="{FF2B5EF4-FFF2-40B4-BE49-F238E27FC236}">
-                <a16:creationId xmlns:a16="http://schemas.microsoft.com/office/drawing/2014/main" id="{401A599D-DBE5-8AF5-401F-90FC43402CBF}"/>
-              </a:ext>
-            </a:extLst>
-          </p:cNvPr>
-          <p:cNvSpPr>
-            <a:spLocks noGrp="1"/>
-          </p:cNvSpPr>
-          <p:nvPr>
-            <p:ph type="title"/>
-          </p:nvPr>
-        </p:nvSpPr>
-        <p:spPr>
-          <a:xfrm>
-            <a:off x="1952481" y="800783"/>
-            <a:ext cx="8278891" cy="1323867"/>
-          </a:xfrm>
-        </p:spPr>
-        <p:txBody>
-          <a:bodyPr anchor="b">
-            <a:normAutofit/>
-          </a:bodyPr>
-          <a:lstStyle/>
-          <a:p>
-            <a:r>
-              <a:rPr lang="en-US" dirty="0"/>
-              <a:t>Streamline MUMPS API development with no worries</a:t>
-            </a:r>
-            <a:endParaRPr lang="en-NL" dirty="0"/>
-          </a:p>
-        </p:txBody>
-      </p:sp>
-      <p:graphicFrame>
-        <p:nvGraphicFramePr>
-          <p:cNvPr id="11" name="Content Placeholder 2">
-            <a:extLst>
-              <a:ext uri="{FF2B5EF4-FFF2-40B4-BE49-F238E27FC236}">
-                <a16:creationId xmlns:a16="http://schemas.microsoft.com/office/drawing/2014/main" id="{C1D56428-A62A-F147-4135-9F747780E333}"/>
-              </a:ext>
-            </a:extLst>
-          </p:cNvPr>
-          <p:cNvGraphicFramePr>
-            <a:graphicFrameLocks noGrp="1"/>
-          </p:cNvGraphicFramePr>
-          <p:nvPr>
-            <p:ph idx="1"/>
-            <p:extLst>
-              <p:ext uri="{D42A27DB-BD31-4B8C-83A1-F6EECF244321}">
-                <p14:modId xmlns:p14="http://schemas.microsoft.com/office/powerpoint/2010/main" val="4146353107"/>
-              </p:ext>
-              <p:ext uri="{E7BDC344-281C-4309-B0C6-D0EE65EED2A8}">
-                <p202:designPr xmlns:p202="http://schemas.microsoft.com/office/powerpoint/2020/02/main">
-                  <p202:designTagLst>
-                    <p202:designTag name="ARCH:1:CLS" val="InformationBlock"/>
-                    <p202:designTag name="ARCH:1:VSVAR" val="TitledTextBox"/>
-                  </p202:designTagLst>
-                </p202:designPr>
-              </p:ext>
-            </p:extLst>
-          </p:nvPr>
-        </p:nvGraphicFramePr>
-        <p:xfrm>
-          <a:off x="1952481" y="2495774"/>
-          <a:ext cx="8278892" cy="3273426"/>
-        </p:xfrm>
-        <a:graphic>
-          <a:graphicData uri="http://schemas.openxmlformats.org/drawingml/2006/diagram">
-            <dgm:relIds xmlns:dgm="http://schemas.openxmlformats.org/drawingml/2006/diagram" xmlns:r="http://schemas.openxmlformats.org/officeDocument/2006/relationships" r:dm="rId2" r:lo="rId3" r:qs="rId4" r:cs="rId5"/>
-          </a:graphicData>
-        </a:graphic>
-      </p:graphicFrame>
-    </p:spTree>
-    <p:extLst>
-      <p:ext uri="{BB962C8B-B14F-4D97-AF65-F5344CB8AC3E}">
-        <p14:creationId xmlns:p14="http://schemas.microsoft.com/office/powerpoint/2010/main" val="3819192767"/>
-      </p:ext>
-    </p:extLst>
-  </p:cSld>
-  <p:clrMapOvr>
-    <a:masterClrMapping/>
-  </p:clrMapOvr>
-</p:sld>
-</file>
-
-<file path=ppt/slides/slide5.xml><?xml version="1.0" encoding="utf-8"?>
-<p:sld xmlns:a="http://schemas.openxmlformats.org/drawingml/2006/main" xmlns:r="http://schemas.openxmlformats.org/officeDocument/2006/relationships" xmlns:p="http://schemas.openxmlformats.org/presentationml/2006/main">
-  <p:cSld>
-    <p:spTree>
-      <p:nvGrpSpPr>
-        <p:cNvPr id="1" name="">
-          <a:extLst>
-            <a:ext uri="{FF2B5EF4-FFF2-40B4-BE49-F238E27FC236}">
-              <a16:creationId xmlns:a16="http://schemas.microsoft.com/office/drawing/2014/main" id="{F3742365-D6CF-DCC8-2123-A23EE2E67389}"/>
-            </a:ext>
-          </a:extLst>
-        </p:cNvPr>
-        <p:cNvGrpSpPr/>
-        <p:nvPr/>
-      </p:nvGrpSpPr>
-      <p:grpSpPr>
-        <a:xfrm>
-          <a:off x="0" y="0"/>
-          <a:ext cx="0" cy="0"/>
-          <a:chOff x="0" y="0"/>
-          <a:chExt cx="0" cy="0"/>
-        </a:xfrm>
-      </p:grpSpPr>
-      <p:sp>
-        <p:nvSpPr>
-          <p:cNvPr id="2" name="Title 1">
-            <a:extLst>
-              <a:ext uri="{FF2B5EF4-FFF2-40B4-BE49-F238E27FC236}">
-                <a16:creationId xmlns:a16="http://schemas.microsoft.com/office/drawing/2014/main" id="{A61D30CC-8AAB-925E-E6E3-3FC92EE1CD22}"/>
-              </a:ext>
-            </a:extLst>
-          </p:cNvPr>
-          <p:cNvSpPr>
-            <a:spLocks noGrp="1"/>
-          </p:cNvSpPr>
-          <p:nvPr>
-            <p:ph type="title"/>
-          </p:nvPr>
-        </p:nvSpPr>
-        <p:spPr/>
-        <p:txBody>
-          <a:bodyPr/>
-          <a:lstStyle/>
-          <a:p>
-            <a:r>
-              <a:rPr lang="en-US" dirty="0"/>
-              <a:t>Distributed architecture</a:t>
-            </a:r>
-            <a:endParaRPr lang="en-NL" dirty="0"/>
-          </a:p>
-        </p:txBody>
-      </p:sp>
-      <p:sp>
-        <p:nvSpPr>
-          <p:cNvPr id="3" name="Content Placeholder 2">
-            <a:extLst>
-              <a:ext uri="{FF2B5EF4-FFF2-40B4-BE49-F238E27FC236}">
-                <a16:creationId xmlns:a16="http://schemas.microsoft.com/office/drawing/2014/main" id="{BB7201A6-1E38-AF8A-F281-E4573822C16D}"/>
-              </a:ext>
-            </a:extLst>
-          </p:cNvPr>
-          <p:cNvSpPr>
-            <a:spLocks noGrp="1"/>
-          </p:cNvSpPr>
-          <p:nvPr>
-            <p:ph idx="1"/>
-          </p:nvPr>
-        </p:nvSpPr>
-        <p:spPr/>
-        <p:txBody>
-          <a:bodyPr/>
-          <a:lstStyle/>
-          <a:p>
-            <a:pPr lvl="1"/>
-            <a:r>
-              <a:rPr lang="en-US" dirty="0"/>
-              <a:t>Allow you to execute ONLY database related code on the MUMPS server</a:t>
-            </a:r>
-          </a:p>
-          <a:p>
-            <a:pPr lvl="1"/>
-            <a:endParaRPr lang="en-US" dirty="0"/>
-          </a:p>
-          <a:p>
-            <a:pPr lvl="1"/>
-            <a:r>
-              <a:rPr lang="en-US" dirty="0"/>
-              <a:t>Allow you to have multiple back-end servers, sharing the same database, to cope with increasing traffic</a:t>
-            </a:r>
-          </a:p>
-          <a:p>
-            <a:pPr lvl="1"/>
-            <a:endParaRPr lang="en-US" dirty="0"/>
-          </a:p>
-          <a:p>
-            <a:pPr lvl="1"/>
-            <a:r>
-              <a:rPr lang="en-US" dirty="0"/>
-              <a:t>Keep the power and speed of the M language for pure database access</a:t>
-            </a:r>
-          </a:p>
-          <a:p>
-            <a:pPr lvl="1"/>
-            <a:endParaRPr lang="en-US" dirty="0"/>
-          </a:p>
-          <a:p>
-            <a:pPr lvl="1"/>
-            <a:r>
-              <a:rPr lang="en-US" dirty="0"/>
-              <a:t>Use your preferred language for the back-end</a:t>
-            </a:r>
-          </a:p>
-          <a:p>
-            <a:pPr lvl="1"/>
-            <a:endParaRPr lang="en-NL" dirty="0"/>
-          </a:p>
-        </p:txBody>
-      </p:sp>
-    </p:spTree>
-    <p:extLst>
-      <p:ext uri="{BB962C8B-B14F-4D97-AF65-F5344CB8AC3E}">
-        <p14:creationId xmlns:p14="http://schemas.microsoft.com/office/powerpoint/2010/main" val="934243486"/>
-      </p:ext>
-    </p:extLst>
-  </p:cSld>
-  <p:clrMapOvr>
-    <a:masterClrMapping/>
-  </p:clrMapOvr>
-</p:sld>
-</file>
-
-<file path=ppt/slides/slide6.xml><?xml version="1.0" encoding="utf-8"?>
-<p:sld xmlns:a="http://schemas.openxmlformats.org/drawingml/2006/main" xmlns:r="http://schemas.openxmlformats.org/officeDocument/2006/relationships" xmlns:p="http://schemas.openxmlformats.org/presentationml/2006/main">
-  <p:cSld>
-    <p:bg>
-      <p:bgPr>
-        <a:solidFill>
-          <a:schemeClr val="bg1"/>
-        </a:solidFill>
-        <a:effectLst/>
-      </p:bgPr>
-    </p:bg>
-    <p:spTree>
-      <p:nvGrpSpPr>
-        <p:cNvPr id="1" name="">
-          <a:extLst>
-            <a:ext uri="{FF2B5EF4-FFF2-40B4-BE49-F238E27FC236}">
-              <a16:creationId xmlns:a16="http://schemas.microsoft.com/office/drawing/2014/main" id="{4B51CB98-4580-8873-E0DA-866BC69147AC}"/>
-            </a:ext>
-          </a:extLst>
-        </p:cNvPr>
-        <p:cNvGrpSpPr/>
-        <p:nvPr/>
-      </p:nvGrpSpPr>
-      <p:grpSpPr>
-        <a:xfrm>
-          <a:off x="0" y="0"/>
-          <a:ext cx="0" cy="0"/>
-          <a:chOff x="0" y="0"/>
-          <a:chExt cx="0" cy="0"/>
-        </a:xfrm>
-      </p:grpSpPr>
-      <p:sp>
-        <p:nvSpPr>
-          <p:cNvPr id="2" name="Title 1">
-            <a:extLst>
-              <a:ext uri="{FF2B5EF4-FFF2-40B4-BE49-F238E27FC236}">
-                <a16:creationId xmlns:a16="http://schemas.microsoft.com/office/drawing/2014/main" id="{5F93E169-56FE-4A21-427D-DC0431FB1745}"/>
-              </a:ext>
-            </a:extLst>
-          </p:cNvPr>
-          <p:cNvSpPr>
-            <a:spLocks noGrp="1"/>
-          </p:cNvSpPr>
-          <p:nvPr>
-            <p:ph type="title"/>
-          </p:nvPr>
-        </p:nvSpPr>
-        <p:spPr>
-          <a:xfrm>
-            <a:off x="1952481" y="800783"/>
-            <a:ext cx="8278891" cy="1323867"/>
-          </a:xfrm>
-        </p:spPr>
-        <p:txBody>
-          <a:bodyPr anchor="t" anchorCtr="0">
-            <a:normAutofit/>
-          </a:bodyPr>
-          <a:lstStyle/>
-          <a:p>
-            <a:r>
-              <a:rPr lang="en-US" dirty="0"/>
-              <a:t>Up and running in no time</a:t>
-            </a:r>
-            <a:endParaRPr lang="en-NL" dirty="0"/>
-          </a:p>
-        </p:txBody>
-      </p:sp>
-      <p:graphicFrame>
-        <p:nvGraphicFramePr>
-          <p:cNvPr id="11" name="Content Placeholder 2">
-            <a:extLst>
-              <a:ext uri="{FF2B5EF4-FFF2-40B4-BE49-F238E27FC236}">
-                <a16:creationId xmlns:a16="http://schemas.microsoft.com/office/drawing/2014/main" id="{1D5E5915-97B8-217F-6F2E-42601C6BF616}"/>
-              </a:ext>
-            </a:extLst>
-          </p:cNvPr>
-          <p:cNvGraphicFramePr>
-            <a:graphicFrameLocks noGrp="1"/>
-          </p:cNvGraphicFramePr>
-          <p:nvPr>
-            <p:ph idx="1"/>
-            <p:extLst>
-              <p:ext uri="{D42A27DB-BD31-4B8C-83A1-F6EECF244321}">
-                <p14:modId xmlns:p14="http://schemas.microsoft.com/office/powerpoint/2010/main" val="1191674732"/>
-              </p:ext>
-              <p:ext uri="{E7BDC344-281C-4309-B0C6-D0EE65EED2A8}">
-                <p202:designPr xmlns:p202="http://schemas.microsoft.com/office/powerpoint/2020/02/main">
-                  <p202:designTagLst>
-                    <p202:designTag name="ARCH:1:CLS" val="InformationBlock"/>
-                    <p202:designTag name="ARCH:1:VSVAR" val="TitledTextBox"/>
-                  </p202:designTagLst>
-                </p202:designPr>
-              </p:ext>
-            </p:extLst>
-          </p:nvPr>
-        </p:nvGraphicFramePr>
-        <p:xfrm>
-          <a:off x="1952481" y="2495774"/>
-          <a:ext cx="8278892" cy="3273426"/>
-        </p:xfrm>
-        <a:graphic>
-          <a:graphicData uri="http://schemas.openxmlformats.org/drawingml/2006/diagram">
-            <dgm:relIds xmlns:dgm="http://schemas.openxmlformats.org/drawingml/2006/diagram" xmlns:r="http://schemas.openxmlformats.org/officeDocument/2006/relationships" r:dm="rId2" r:lo="rId3" r:qs="rId4" r:cs="rId5"/>
-          </a:graphicData>
-        </a:graphic>
-      </p:graphicFrame>
-    </p:spTree>
-    <p:extLst>
-      <p:ext uri="{BB962C8B-B14F-4D97-AF65-F5344CB8AC3E}">
-        <p14:creationId xmlns:p14="http://schemas.microsoft.com/office/powerpoint/2010/main" val="2532632543"/>
-      </p:ext>
-    </p:extLst>
-  </p:cSld>
-  <p:clrMapOvr>
-    <a:masterClrMapping/>
-  </p:clrMapOvr>
-</p:sld>
-</file>
-
-<file path=ppt/slides/slide7.xml><?xml version="1.0" encoding="utf-8"?>
+<file path=ppt/slides/slide13.xml><?xml version="1.0" encoding="utf-8"?>
 <p:sld xmlns:a="http://schemas.openxmlformats.org/drawingml/2006/main" xmlns:r="http://schemas.openxmlformats.org/officeDocument/2006/relationships" xmlns:p="http://schemas.openxmlformats.org/presentationml/2006/main">
   <p:cSld>
     <p:spTree>
@@ -24702,10 +25828,2199 @@
   <p:clrMapOvr>
     <a:masterClrMapping/>
   </p:clrMapOvr>
+  <p:timing>
+    <p:tnLst>
+      <p:par>
+        <p:cTn id="1" dur="indefinite" restart="never" nodeType="tmRoot">
+          <p:childTnLst>
+            <p:seq concurrent="1" nextAc="seek">
+              <p:cTn id="2" dur="indefinite" nodeType="mainSeq">
+                <p:childTnLst>
+                  <p:par>
+                    <p:cTn id="3" fill="hold">
+                      <p:stCondLst>
+                        <p:cond delay="indefinite"/>
+                      </p:stCondLst>
+                      <p:childTnLst>
+                        <p:par>
+                          <p:cTn id="4" fill="hold">
+                            <p:stCondLst>
+                              <p:cond delay="0"/>
+                            </p:stCondLst>
+                            <p:childTnLst>
+                              <p:par>
+                                <p:cTn id="5" presetID="10" presetClass="entr" presetSubtype="0" fill="hold" grpId="0" nodeType="clickEffect">
+                                  <p:stCondLst>
+                                    <p:cond delay="0"/>
+                                  </p:stCondLst>
+                                  <p:childTnLst>
+                                    <p:set>
+                                      <p:cBhvr>
+                                        <p:cTn id="6" dur="1" fill="hold">
+                                          <p:stCondLst>
+                                            <p:cond delay="0"/>
+                                          </p:stCondLst>
+                                        </p:cTn>
+                                        <p:tgtEl>
+                                          <p:spTgt spid="3">
+                                            <p:txEl>
+                                              <p:pRg st="0" end="0"/>
+                                            </p:txEl>
+                                          </p:spTgt>
+                                        </p:tgtEl>
+                                        <p:attrNameLst>
+                                          <p:attrName>style.visibility</p:attrName>
+                                        </p:attrNameLst>
+                                      </p:cBhvr>
+                                      <p:to>
+                                        <p:strVal val="visible"/>
+                                      </p:to>
+                                    </p:set>
+                                    <p:animEffect transition="in" filter="fade">
+                                      <p:cBhvr>
+                                        <p:cTn id="7" dur="500"/>
+                                        <p:tgtEl>
+                                          <p:spTgt spid="3">
+                                            <p:txEl>
+                                              <p:pRg st="0" end="0"/>
+                                            </p:txEl>
+                                          </p:spTgt>
+                                        </p:tgtEl>
+                                      </p:cBhvr>
+                                    </p:animEffect>
+                                  </p:childTnLst>
+                                </p:cTn>
+                              </p:par>
+                            </p:childTnLst>
+                          </p:cTn>
+                        </p:par>
+                      </p:childTnLst>
+                    </p:cTn>
+                  </p:par>
+                  <p:par>
+                    <p:cTn id="8" fill="hold">
+                      <p:stCondLst>
+                        <p:cond delay="indefinite"/>
+                      </p:stCondLst>
+                      <p:childTnLst>
+                        <p:par>
+                          <p:cTn id="9" fill="hold">
+                            <p:stCondLst>
+                              <p:cond delay="0"/>
+                            </p:stCondLst>
+                            <p:childTnLst>
+                              <p:par>
+                                <p:cTn id="10" presetID="10" presetClass="entr" presetSubtype="0" fill="hold" grpId="0" nodeType="clickEffect">
+                                  <p:stCondLst>
+                                    <p:cond delay="0"/>
+                                  </p:stCondLst>
+                                  <p:childTnLst>
+                                    <p:set>
+                                      <p:cBhvr>
+                                        <p:cTn id="11" dur="1" fill="hold">
+                                          <p:stCondLst>
+                                            <p:cond delay="0"/>
+                                          </p:stCondLst>
+                                        </p:cTn>
+                                        <p:tgtEl>
+                                          <p:spTgt spid="3">
+                                            <p:txEl>
+                                              <p:pRg st="1" end="1"/>
+                                            </p:txEl>
+                                          </p:spTgt>
+                                        </p:tgtEl>
+                                        <p:attrNameLst>
+                                          <p:attrName>style.visibility</p:attrName>
+                                        </p:attrNameLst>
+                                      </p:cBhvr>
+                                      <p:to>
+                                        <p:strVal val="visible"/>
+                                      </p:to>
+                                    </p:set>
+                                    <p:animEffect transition="in" filter="fade">
+                                      <p:cBhvr>
+                                        <p:cTn id="12" dur="500"/>
+                                        <p:tgtEl>
+                                          <p:spTgt spid="3">
+                                            <p:txEl>
+                                              <p:pRg st="1" end="1"/>
+                                            </p:txEl>
+                                          </p:spTgt>
+                                        </p:tgtEl>
+                                      </p:cBhvr>
+                                    </p:animEffect>
+                                  </p:childTnLst>
+                                </p:cTn>
+                              </p:par>
+                            </p:childTnLst>
+                          </p:cTn>
+                        </p:par>
+                      </p:childTnLst>
+                    </p:cTn>
+                  </p:par>
+                  <p:par>
+                    <p:cTn id="13" fill="hold">
+                      <p:stCondLst>
+                        <p:cond delay="indefinite"/>
+                      </p:stCondLst>
+                      <p:childTnLst>
+                        <p:par>
+                          <p:cTn id="14" fill="hold">
+                            <p:stCondLst>
+                              <p:cond delay="0"/>
+                            </p:stCondLst>
+                            <p:childTnLst>
+                              <p:par>
+                                <p:cTn id="15" presetID="10" presetClass="entr" presetSubtype="0" fill="hold" grpId="0" nodeType="clickEffect">
+                                  <p:stCondLst>
+                                    <p:cond delay="0"/>
+                                  </p:stCondLst>
+                                  <p:childTnLst>
+                                    <p:set>
+                                      <p:cBhvr>
+                                        <p:cTn id="16" dur="1" fill="hold">
+                                          <p:stCondLst>
+                                            <p:cond delay="0"/>
+                                          </p:stCondLst>
+                                        </p:cTn>
+                                        <p:tgtEl>
+                                          <p:spTgt spid="3">
+                                            <p:txEl>
+                                              <p:pRg st="2" end="2"/>
+                                            </p:txEl>
+                                          </p:spTgt>
+                                        </p:tgtEl>
+                                        <p:attrNameLst>
+                                          <p:attrName>style.visibility</p:attrName>
+                                        </p:attrNameLst>
+                                      </p:cBhvr>
+                                      <p:to>
+                                        <p:strVal val="visible"/>
+                                      </p:to>
+                                    </p:set>
+                                    <p:animEffect transition="in" filter="fade">
+                                      <p:cBhvr>
+                                        <p:cTn id="17" dur="500"/>
+                                        <p:tgtEl>
+                                          <p:spTgt spid="3">
+                                            <p:txEl>
+                                              <p:pRg st="2" end="2"/>
+                                            </p:txEl>
+                                          </p:spTgt>
+                                        </p:tgtEl>
+                                      </p:cBhvr>
+                                    </p:animEffect>
+                                  </p:childTnLst>
+                                </p:cTn>
+                              </p:par>
+                            </p:childTnLst>
+                          </p:cTn>
+                        </p:par>
+                      </p:childTnLst>
+                    </p:cTn>
+                  </p:par>
+                  <p:par>
+                    <p:cTn id="18" fill="hold">
+                      <p:stCondLst>
+                        <p:cond delay="indefinite"/>
+                      </p:stCondLst>
+                      <p:childTnLst>
+                        <p:par>
+                          <p:cTn id="19" fill="hold">
+                            <p:stCondLst>
+                              <p:cond delay="0"/>
+                            </p:stCondLst>
+                            <p:childTnLst>
+                              <p:par>
+                                <p:cTn id="20" presetID="10" presetClass="entr" presetSubtype="0" fill="hold" grpId="0" nodeType="clickEffect">
+                                  <p:stCondLst>
+                                    <p:cond delay="0"/>
+                                  </p:stCondLst>
+                                  <p:childTnLst>
+                                    <p:set>
+                                      <p:cBhvr>
+                                        <p:cTn id="21" dur="1" fill="hold">
+                                          <p:stCondLst>
+                                            <p:cond delay="0"/>
+                                          </p:stCondLst>
+                                        </p:cTn>
+                                        <p:tgtEl>
+                                          <p:spTgt spid="3">
+                                            <p:txEl>
+                                              <p:pRg st="3" end="3"/>
+                                            </p:txEl>
+                                          </p:spTgt>
+                                        </p:tgtEl>
+                                        <p:attrNameLst>
+                                          <p:attrName>style.visibility</p:attrName>
+                                        </p:attrNameLst>
+                                      </p:cBhvr>
+                                      <p:to>
+                                        <p:strVal val="visible"/>
+                                      </p:to>
+                                    </p:set>
+                                    <p:animEffect transition="in" filter="fade">
+                                      <p:cBhvr>
+                                        <p:cTn id="22" dur="500"/>
+                                        <p:tgtEl>
+                                          <p:spTgt spid="3">
+                                            <p:txEl>
+                                              <p:pRg st="3" end="3"/>
+                                            </p:txEl>
+                                          </p:spTgt>
+                                        </p:tgtEl>
+                                      </p:cBhvr>
+                                    </p:animEffect>
+                                  </p:childTnLst>
+                                </p:cTn>
+                              </p:par>
+                            </p:childTnLst>
+                          </p:cTn>
+                        </p:par>
+                      </p:childTnLst>
+                    </p:cTn>
+                  </p:par>
+                  <p:par>
+                    <p:cTn id="23" fill="hold">
+                      <p:stCondLst>
+                        <p:cond delay="indefinite"/>
+                      </p:stCondLst>
+                      <p:childTnLst>
+                        <p:par>
+                          <p:cTn id="24" fill="hold">
+                            <p:stCondLst>
+                              <p:cond delay="0"/>
+                            </p:stCondLst>
+                            <p:childTnLst>
+                              <p:par>
+                                <p:cTn id="25" presetID="10" presetClass="entr" presetSubtype="0" fill="hold" grpId="0" nodeType="clickEffect">
+                                  <p:stCondLst>
+                                    <p:cond delay="0"/>
+                                  </p:stCondLst>
+                                  <p:childTnLst>
+                                    <p:set>
+                                      <p:cBhvr>
+                                        <p:cTn id="26" dur="1" fill="hold">
+                                          <p:stCondLst>
+                                            <p:cond delay="0"/>
+                                          </p:stCondLst>
+                                        </p:cTn>
+                                        <p:tgtEl>
+                                          <p:spTgt spid="3">
+                                            <p:txEl>
+                                              <p:pRg st="4" end="4"/>
+                                            </p:txEl>
+                                          </p:spTgt>
+                                        </p:tgtEl>
+                                        <p:attrNameLst>
+                                          <p:attrName>style.visibility</p:attrName>
+                                        </p:attrNameLst>
+                                      </p:cBhvr>
+                                      <p:to>
+                                        <p:strVal val="visible"/>
+                                      </p:to>
+                                    </p:set>
+                                    <p:animEffect transition="in" filter="fade">
+                                      <p:cBhvr>
+                                        <p:cTn id="27" dur="500"/>
+                                        <p:tgtEl>
+                                          <p:spTgt spid="3">
+                                            <p:txEl>
+                                              <p:pRg st="4" end="4"/>
+                                            </p:txEl>
+                                          </p:spTgt>
+                                        </p:tgtEl>
+                                      </p:cBhvr>
+                                    </p:animEffect>
+                                  </p:childTnLst>
+                                </p:cTn>
+                              </p:par>
+                            </p:childTnLst>
+                          </p:cTn>
+                        </p:par>
+                      </p:childTnLst>
+                    </p:cTn>
+                  </p:par>
+                  <p:par>
+                    <p:cTn id="28" fill="hold">
+                      <p:stCondLst>
+                        <p:cond delay="indefinite"/>
+                      </p:stCondLst>
+                      <p:childTnLst>
+                        <p:par>
+                          <p:cTn id="29" fill="hold">
+                            <p:stCondLst>
+                              <p:cond delay="0"/>
+                            </p:stCondLst>
+                            <p:childTnLst>
+                              <p:par>
+                                <p:cTn id="30" presetID="10" presetClass="entr" presetSubtype="0" fill="hold" grpId="0" nodeType="clickEffect">
+                                  <p:stCondLst>
+                                    <p:cond delay="0"/>
+                                  </p:stCondLst>
+                                  <p:childTnLst>
+                                    <p:set>
+                                      <p:cBhvr>
+                                        <p:cTn id="31" dur="1" fill="hold">
+                                          <p:stCondLst>
+                                            <p:cond delay="0"/>
+                                          </p:stCondLst>
+                                        </p:cTn>
+                                        <p:tgtEl>
+                                          <p:spTgt spid="3">
+                                            <p:txEl>
+                                              <p:pRg st="5" end="5"/>
+                                            </p:txEl>
+                                          </p:spTgt>
+                                        </p:tgtEl>
+                                        <p:attrNameLst>
+                                          <p:attrName>style.visibility</p:attrName>
+                                        </p:attrNameLst>
+                                      </p:cBhvr>
+                                      <p:to>
+                                        <p:strVal val="visible"/>
+                                      </p:to>
+                                    </p:set>
+                                    <p:animEffect transition="in" filter="fade">
+                                      <p:cBhvr>
+                                        <p:cTn id="32" dur="500"/>
+                                        <p:tgtEl>
+                                          <p:spTgt spid="3">
+                                            <p:txEl>
+                                              <p:pRg st="5" end="5"/>
+                                            </p:txEl>
+                                          </p:spTgt>
+                                        </p:tgtEl>
+                                      </p:cBhvr>
+                                    </p:animEffect>
+                                  </p:childTnLst>
+                                </p:cTn>
+                              </p:par>
+                            </p:childTnLst>
+                          </p:cTn>
+                        </p:par>
+                      </p:childTnLst>
+                    </p:cTn>
+                  </p:par>
+                  <p:par>
+                    <p:cTn id="33" fill="hold">
+                      <p:stCondLst>
+                        <p:cond delay="indefinite"/>
+                      </p:stCondLst>
+                      <p:childTnLst>
+                        <p:par>
+                          <p:cTn id="34" fill="hold">
+                            <p:stCondLst>
+                              <p:cond delay="0"/>
+                            </p:stCondLst>
+                            <p:childTnLst>
+                              <p:par>
+                                <p:cTn id="35" presetID="10" presetClass="entr" presetSubtype="0" fill="hold" grpId="0" nodeType="clickEffect">
+                                  <p:stCondLst>
+                                    <p:cond delay="0"/>
+                                  </p:stCondLst>
+                                  <p:childTnLst>
+                                    <p:set>
+                                      <p:cBhvr>
+                                        <p:cTn id="36" dur="1" fill="hold">
+                                          <p:stCondLst>
+                                            <p:cond delay="0"/>
+                                          </p:stCondLst>
+                                        </p:cTn>
+                                        <p:tgtEl>
+                                          <p:spTgt spid="3">
+                                            <p:txEl>
+                                              <p:pRg st="6" end="6"/>
+                                            </p:txEl>
+                                          </p:spTgt>
+                                        </p:tgtEl>
+                                        <p:attrNameLst>
+                                          <p:attrName>style.visibility</p:attrName>
+                                        </p:attrNameLst>
+                                      </p:cBhvr>
+                                      <p:to>
+                                        <p:strVal val="visible"/>
+                                      </p:to>
+                                    </p:set>
+                                    <p:animEffect transition="in" filter="fade">
+                                      <p:cBhvr>
+                                        <p:cTn id="37" dur="500"/>
+                                        <p:tgtEl>
+                                          <p:spTgt spid="3">
+                                            <p:txEl>
+                                              <p:pRg st="6" end="6"/>
+                                            </p:txEl>
+                                          </p:spTgt>
+                                        </p:tgtEl>
+                                      </p:cBhvr>
+                                    </p:animEffect>
+                                  </p:childTnLst>
+                                </p:cTn>
+                              </p:par>
+                            </p:childTnLst>
+                          </p:cTn>
+                        </p:par>
+                      </p:childTnLst>
+                    </p:cTn>
+                  </p:par>
+                </p:childTnLst>
+              </p:cTn>
+              <p:prevCondLst>
+                <p:cond evt="onPrev" delay="0">
+                  <p:tgtEl>
+                    <p:sldTgt/>
+                  </p:tgtEl>
+                </p:cond>
+              </p:prevCondLst>
+              <p:nextCondLst>
+                <p:cond evt="onNext" delay="0">
+                  <p:tgtEl>
+                    <p:sldTgt/>
+                  </p:tgtEl>
+                </p:cond>
+              </p:nextCondLst>
+            </p:seq>
+          </p:childTnLst>
+        </p:cTn>
+      </p:par>
+    </p:tnLst>
+    <p:bldLst>
+      <p:bldP spid="3" grpId="0" uiExpand="1" build="p"/>
+    </p:bldLst>
+  </p:timing>
 </p:sld>
 </file>
 
-<file path=ppt/slides/slide8.xml><?xml version="1.0" encoding="utf-8"?>
+<file path=ppt/slides/slide2.xml><?xml version="1.0" encoding="utf-8"?>
+<p:sld xmlns:a="http://schemas.openxmlformats.org/drawingml/2006/main" xmlns:r="http://schemas.openxmlformats.org/officeDocument/2006/relationships" xmlns:p="http://schemas.openxmlformats.org/presentationml/2006/main">
+  <p:cSld>
+    <p:spTree>
+      <p:nvGrpSpPr>
+        <p:cNvPr id="1" name=""/>
+        <p:cNvGrpSpPr/>
+        <p:nvPr/>
+      </p:nvGrpSpPr>
+      <p:grpSpPr>
+        <a:xfrm>
+          <a:off x="0" y="0"/>
+          <a:ext cx="0" cy="0"/>
+          <a:chOff x="0" y="0"/>
+          <a:chExt cx="0" cy="0"/>
+        </a:xfrm>
+      </p:grpSpPr>
+      <p:sp>
+        <p:nvSpPr>
+          <p:cNvPr id="2" name="Title 1">
+            <a:extLst>
+              <a:ext uri="{FF2B5EF4-FFF2-40B4-BE49-F238E27FC236}">
+                <a16:creationId xmlns:a16="http://schemas.microsoft.com/office/drawing/2014/main" id="{AAFD5D0B-3FF4-4FED-DDC8-D173C4403E65}"/>
+              </a:ext>
+            </a:extLst>
+          </p:cNvPr>
+          <p:cNvSpPr>
+            <a:spLocks noGrp="1"/>
+          </p:cNvSpPr>
+          <p:nvPr>
+            <p:ph type="title"/>
+          </p:nvPr>
+        </p:nvSpPr>
+        <p:spPr/>
+        <p:txBody>
+          <a:bodyPr/>
+          <a:lstStyle/>
+          <a:p>
+            <a:r>
+              <a:rPr lang="en-US" dirty="0"/>
+              <a:t>Private comment</a:t>
+            </a:r>
+            <a:endParaRPr lang="en-NL" dirty="0"/>
+          </a:p>
+        </p:txBody>
+      </p:sp>
+      <p:sp>
+        <p:nvSpPr>
+          <p:cNvPr id="3" name="Content Placeholder 2">
+            <a:extLst>
+              <a:ext uri="{FF2B5EF4-FFF2-40B4-BE49-F238E27FC236}">
+                <a16:creationId xmlns:a16="http://schemas.microsoft.com/office/drawing/2014/main" id="{6ECD4B7A-F343-5BCB-94C9-E80EB92EE397}"/>
+              </a:ext>
+            </a:extLst>
+          </p:cNvPr>
+          <p:cNvSpPr>
+            <a:spLocks noGrp="1"/>
+          </p:cNvSpPr>
+          <p:nvPr>
+            <p:ph idx="1"/>
+          </p:nvPr>
+        </p:nvSpPr>
+        <p:spPr/>
+        <p:txBody>
+          <a:bodyPr>
+            <a:normAutofit lnSpcReduction="10000"/>
+          </a:bodyPr>
+          <a:lstStyle/>
+          <a:p>
+            <a:r>
+              <a:rPr lang="en-US" dirty="0"/>
+              <a:t>Practically every database in the market has a remote access through sockets</a:t>
+            </a:r>
+          </a:p>
+          <a:p>
+            <a:r>
+              <a:rPr lang="en-US" dirty="0"/>
+              <a:t>One of the main reasons is the growing amount of processed data, leaving horizontal back-end scalability (multiple servers behind a load balancer) accessing a monolithic database a good compromise.</a:t>
+            </a:r>
+          </a:p>
+          <a:p>
+            <a:r>
+              <a:rPr lang="en-US" dirty="0"/>
+              <a:t>At the same time, executing only pure data API running on the server and moving all the business-tiers to external machines increase the power of the database server allowing a monolithic system to handle more traffic.</a:t>
+            </a:r>
+          </a:p>
+          <a:p>
+            <a:r>
+              <a:rPr lang="en-US" dirty="0" err="1"/>
+              <a:t>GTm</a:t>
+            </a:r>
+            <a:r>
+              <a:rPr lang="en-US" dirty="0"/>
+              <a:t> and YottaDB don’t have remote access, but I can understand that it is not easy to find the right compromise talking to remote servers with foreign programming languages</a:t>
+            </a:r>
+          </a:p>
+          <a:p>
+            <a:pPr lvl="1"/>
+            <a:endParaRPr lang="en-NL" dirty="0"/>
+          </a:p>
+        </p:txBody>
+      </p:sp>
+    </p:spTree>
+    <p:extLst>
+      <p:ext uri="{BB962C8B-B14F-4D97-AF65-F5344CB8AC3E}">
+        <p14:creationId xmlns:p14="http://schemas.microsoft.com/office/powerpoint/2010/main" val="2240125713"/>
+      </p:ext>
+    </p:extLst>
+  </p:cSld>
+  <p:clrMapOvr>
+    <a:masterClrMapping/>
+  </p:clrMapOvr>
+  <p:timing>
+    <p:tnLst>
+      <p:par>
+        <p:cTn id="1" dur="indefinite" restart="never" nodeType="tmRoot">
+          <p:childTnLst>
+            <p:seq concurrent="1" nextAc="seek">
+              <p:cTn id="2" dur="indefinite" nodeType="mainSeq">
+                <p:childTnLst>
+                  <p:par>
+                    <p:cTn id="3" fill="hold">
+                      <p:stCondLst>
+                        <p:cond delay="indefinite"/>
+                      </p:stCondLst>
+                      <p:childTnLst>
+                        <p:par>
+                          <p:cTn id="4" fill="hold">
+                            <p:stCondLst>
+                              <p:cond delay="0"/>
+                            </p:stCondLst>
+                            <p:childTnLst>
+                              <p:par>
+                                <p:cTn id="5" presetID="10" presetClass="entr" presetSubtype="0" fill="hold" grpId="0" nodeType="clickEffect">
+                                  <p:stCondLst>
+                                    <p:cond delay="0"/>
+                                  </p:stCondLst>
+                                  <p:childTnLst>
+                                    <p:set>
+                                      <p:cBhvr>
+                                        <p:cTn id="6" dur="1" fill="hold">
+                                          <p:stCondLst>
+                                            <p:cond delay="0"/>
+                                          </p:stCondLst>
+                                        </p:cTn>
+                                        <p:tgtEl>
+                                          <p:spTgt spid="3">
+                                            <p:txEl>
+                                              <p:pRg st="0" end="0"/>
+                                            </p:txEl>
+                                          </p:spTgt>
+                                        </p:tgtEl>
+                                        <p:attrNameLst>
+                                          <p:attrName>style.visibility</p:attrName>
+                                        </p:attrNameLst>
+                                      </p:cBhvr>
+                                      <p:to>
+                                        <p:strVal val="visible"/>
+                                      </p:to>
+                                    </p:set>
+                                    <p:animEffect transition="in" filter="fade">
+                                      <p:cBhvr>
+                                        <p:cTn id="7" dur="500"/>
+                                        <p:tgtEl>
+                                          <p:spTgt spid="3">
+                                            <p:txEl>
+                                              <p:pRg st="0" end="0"/>
+                                            </p:txEl>
+                                          </p:spTgt>
+                                        </p:tgtEl>
+                                      </p:cBhvr>
+                                    </p:animEffect>
+                                  </p:childTnLst>
+                                </p:cTn>
+                              </p:par>
+                            </p:childTnLst>
+                          </p:cTn>
+                        </p:par>
+                      </p:childTnLst>
+                    </p:cTn>
+                  </p:par>
+                  <p:par>
+                    <p:cTn id="8" fill="hold">
+                      <p:stCondLst>
+                        <p:cond delay="indefinite"/>
+                      </p:stCondLst>
+                      <p:childTnLst>
+                        <p:par>
+                          <p:cTn id="9" fill="hold">
+                            <p:stCondLst>
+                              <p:cond delay="0"/>
+                            </p:stCondLst>
+                            <p:childTnLst>
+                              <p:par>
+                                <p:cTn id="10" presetID="10" presetClass="entr" presetSubtype="0" fill="hold" grpId="0" nodeType="clickEffect">
+                                  <p:stCondLst>
+                                    <p:cond delay="0"/>
+                                  </p:stCondLst>
+                                  <p:childTnLst>
+                                    <p:set>
+                                      <p:cBhvr>
+                                        <p:cTn id="11" dur="1" fill="hold">
+                                          <p:stCondLst>
+                                            <p:cond delay="0"/>
+                                          </p:stCondLst>
+                                        </p:cTn>
+                                        <p:tgtEl>
+                                          <p:spTgt spid="3">
+                                            <p:txEl>
+                                              <p:pRg st="1" end="1"/>
+                                            </p:txEl>
+                                          </p:spTgt>
+                                        </p:tgtEl>
+                                        <p:attrNameLst>
+                                          <p:attrName>style.visibility</p:attrName>
+                                        </p:attrNameLst>
+                                      </p:cBhvr>
+                                      <p:to>
+                                        <p:strVal val="visible"/>
+                                      </p:to>
+                                    </p:set>
+                                    <p:animEffect transition="in" filter="fade">
+                                      <p:cBhvr>
+                                        <p:cTn id="12" dur="500"/>
+                                        <p:tgtEl>
+                                          <p:spTgt spid="3">
+                                            <p:txEl>
+                                              <p:pRg st="1" end="1"/>
+                                            </p:txEl>
+                                          </p:spTgt>
+                                        </p:tgtEl>
+                                      </p:cBhvr>
+                                    </p:animEffect>
+                                  </p:childTnLst>
+                                </p:cTn>
+                              </p:par>
+                            </p:childTnLst>
+                          </p:cTn>
+                        </p:par>
+                      </p:childTnLst>
+                    </p:cTn>
+                  </p:par>
+                  <p:par>
+                    <p:cTn id="13" fill="hold">
+                      <p:stCondLst>
+                        <p:cond delay="indefinite"/>
+                      </p:stCondLst>
+                      <p:childTnLst>
+                        <p:par>
+                          <p:cTn id="14" fill="hold">
+                            <p:stCondLst>
+                              <p:cond delay="0"/>
+                            </p:stCondLst>
+                            <p:childTnLst>
+                              <p:par>
+                                <p:cTn id="15" presetID="10" presetClass="entr" presetSubtype="0" fill="hold" grpId="0" nodeType="clickEffect">
+                                  <p:stCondLst>
+                                    <p:cond delay="0"/>
+                                  </p:stCondLst>
+                                  <p:childTnLst>
+                                    <p:set>
+                                      <p:cBhvr>
+                                        <p:cTn id="16" dur="1" fill="hold">
+                                          <p:stCondLst>
+                                            <p:cond delay="0"/>
+                                          </p:stCondLst>
+                                        </p:cTn>
+                                        <p:tgtEl>
+                                          <p:spTgt spid="3">
+                                            <p:txEl>
+                                              <p:pRg st="2" end="2"/>
+                                            </p:txEl>
+                                          </p:spTgt>
+                                        </p:tgtEl>
+                                        <p:attrNameLst>
+                                          <p:attrName>style.visibility</p:attrName>
+                                        </p:attrNameLst>
+                                      </p:cBhvr>
+                                      <p:to>
+                                        <p:strVal val="visible"/>
+                                      </p:to>
+                                    </p:set>
+                                    <p:animEffect transition="in" filter="fade">
+                                      <p:cBhvr>
+                                        <p:cTn id="17" dur="500"/>
+                                        <p:tgtEl>
+                                          <p:spTgt spid="3">
+                                            <p:txEl>
+                                              <p:pRg st="2" end="2"/>
+                                            </p:txEl>
+                                          </p:spTgt>
+                                        </p:tgtEl>
+                                      </p:cBhvr>
+                                    </p:animEffect>
+                                  </p:childTnLst>
+                                </p:cTn>
+                              </p:par>
+                            </p:childTnLst>
+                          </p:cTn>
+                        </p:par>
+                      </p:childTnLst>
+                    </p:cTn>
+                  </p:par>
+                  <p:par>
+                    <p:cTn id="18" fill="hold">
+                      <p:stCondLst>
+                        <p:cond delay="indefinite"/>
+                      </p:stCondLst>
+                      <p:childTnLst>
+                        <p:par>
+                          <p:cTn id="19" fill="hold">
+                            <p:stCondLst>
+                              <p:cond delay="0"/>
+                            </p:stCondLst>
+                            <p:childTnLst>
+                              <p:par>
+                                <p:cTn id="20" presetID="10" presetClass="entr" presetSubtype="0" fill="hold" grpId="0" nodeType="clickEffect">
+                                  <p:stCondLst>
+                                    <p:cond delay="0"/>
+                                  </p:stCondLst>
+                                  <p:childTnLst>
+                                    <p:set>
+                                      <p:cBhvr>
+                                        <p:cTn id="21" dur="1" fill="hold">
+                                          <p:stCondLst>
+                                            <p:cond delay="0"/>
+                                          </p:stCondLst>
+                                        </p:cTn>
+                                        <p:tgtEl>
+                                          <p:spTgt spid="3">
+                                            <p:txEl>
+                                              <p:pRg st="3" end="3"/>
+                                            </p:txEl>
+                                          </p:spTgt>
+                                        </p:tgtEl>
+                                        <p:attrNameLst>
+                                          <p:attrName>style.visibility</p:attrName>
+                                        </p:attrNameLst>
+                                      </p:cBhvr>
+                                      <p:to>
+                                        <p:strVal val="visible"/>
+                                      </p:to>
+                                    </p:set>
+                                    <p:animEffect transition="in" filter="fade">
+                                      <p:cBhvr>
+                                        <p:cTn id="22" dur="500"/>
+                                        <p:tgtEl>
+                                          <p:spTgt spid="3">
+                                            <p:txEl>
+                                              <p:pRg st="3" end="3"/>
+                                            </p:txEl>
+                                          </p:spTgt>
+                                        </p:tgtEl>
+                                      </p:cBhvr>
+                                    </p:animEffect>
+                                  </p:childTnLst>
+                                </p:cTn>
+                              </p:par>
+                            </p:childTnLst>
+                          </p:cTn>
+                        </p:par>
+                      </p:childTnLst>
+                    </p:cTn>
+                  </p:par>
+                </p:childTnLst>
+              </p:cTn>
+              <p:prevCondLst>
+                <p:cond evt="onPrev" delay="0">
+                  <p:tgtEl>
+                    <p:sldTgt/>
+                  </p:tgtEl>
+                </p:cond>
+              </p:prevCondLst>
+              <p:nextCondLst>
+                <p:cond evt="onNext" delay="0">
+                  <p:tgtEl>
+                    <p:sldTgt/>
+                  </p:tgtEl>
+                </p:cond>
+              </p:nextCondLst>
+            </p:seq>
+          </p:childTnLst>
+        </p:cTn>
+      </p:par>
+    </p:tnLst>
+    <p:bldLst>
+      <p:bldP spid="3" grpId="0" uiExpand="1" build="p"/>
+    </p:bldLst>
+  </p:timing>
+</p:sld>
+</file>
+
+<file path=ppt/slides/slide3.xml><?xml version="1.0" encoding="utf-8"?>
+<p:sld xmlns:a="http://schemas.openxmlformats.org/drawingml/2006/main" xmlns:r="http://schemas.openxmlformats.org/officeDocument/2006/relationships" xmlns:p="http://schemas.openxmlformats.org/presentationml/2006/main">
+  <p:cSld>
+    <p:spTree>
+      <p:nvGrpSpPr>
+        <p:cNvPr id="1" name="">
+          <a:extLst>
+            <a:ext uri="{FF2B5EF4-FFF2-40B4-BE49-F238E27FC236}">
+              <a16:creationId xmlns:a16="http://schemas.microsoft.com/office/drawing/2014/main" id="{932B73CC-7ECC-7075-0FFC-14EB9A731C77}"/>
+            </a:ext>
+          </a:extLst>
+        </p:cNvPr>
+        <p:cNvGrpSpPr/>
+        <p:nvPr/>
+      </p:nvGrpSpPr>
+      <p:grpSpPr>
+        <a:xfrm>
+          <a:off x="0" y="0"/>
+          <a:ext cx="0" cy="0"/>
+          <a:chOff x="0" y="0"/>
+          <a:chExt cx="0" cy="0"/>
+        </a:xfrm>
+      </p:grpSpPr>
+      <p:sp>
+        <p:nvSpPr>
+          <p:cNvPr id="2" name="Title 1">
+            <a:extLst>
+              <a:ext uri="{FF2B5EF4-FFF2-40B4-BE49-F238E27FC236}">
+                <a16:creationId xmlns:a16="http://schemas.microsoft.com/office/drawing/2014/main" id="{E56B026E-8CEF-8EBE-7D93-0A0EE6BAB81F}"/>
+              </a:ext>
+            </a:extLst>
+          </p:cNvPr>
+          <p:cNvSpPr>
+            <a:spLocks noGrp="1"/>
+          </p:cNvSpPr>
+          <p:nvPr>
+            <p:ph type="title"/>
+          </p:nvPr>
+        </p:nvSpPr>
+        <p:spPr/>
+        <p:txBody>
+          <a:bodyPr/>
+          <a:lstStyle/>
+          <a:p>
+            <a:r>
+              <a:rPr lang="en-US" dirty="0"/>
+              <a:t>Private comment</a:t>
+            </a:r>
+            <a:endParaRPr lang="en-NL" dirty="0"/>
+          </a:p>
+        </p:txBody>
+      </p:sp>
+      <p:sp>
+        <p:nvSpPr>
+          <p:cNvPr id="3" name="Content Placeholder 2">
+            <a:extLst>
+              <a:ext uri="{FF2B5EF4-FFF2-40B4-BE49-F238E27FC236}">
+                <a16:creationId xmlns:a16="http://schemas.microsoft.com/office/drawing/2014/main" id="{D2EC6879-A4B1-89EF-4659-2698C7501C18}"/>
+              </a:ext>
+            </a:extLst>
+          </p:cNvPr>
+          <p:cNvSpPr>
+            <a:spLocks noGrp="1"/>
+          </p:cNvSpPr>
+          <p:nvPr>
+            <p:ph idx="1"/>
+          </p:nvPr>
+        </p:nvSpPr>
+        <p:spPr/>
+        <p:txBody>
+          <a:bodyPr>
+            <a:normAutofit/>
+          </a:bodyPr>
+          <a:lstStyle/>
+          <a:p>
+            <a:r>
+              <a:rPr lang="en-US" dirty="0"/>
+              <a:t>That’s why Mind fill all the gaps:</a:t>
+            </a:r>
+          </a:p>
+          <a:p>
+            <a:pPr lvl="1"/>
+            <a:r>
+              <a:rPr lang="en-US" dirty="0"/>
+              <a:t>Talks M to M programmers and </a:t>
+            </a:r>
+            <a:r>
+              <a:rPr lang="en-US" dirty="0" err="1"/>
+              <a:t>js</a:t>
+            </a:r>
+            <a:r>
+              <a:rPr lang="en-US" dirty="0"/>
+              <a:t> / java / Go to remote programmers</a:t>
+            </a:r>
+          </a:p>
+          <a:p>
+            <a:pPr lvl="1"/>
+            <a:r>
+              <a:rPr lang="en-US" dirty="0"/>
+              <a:t>Expose data in back-end “standard” formats (data-types, Objects) for smoother integration</a:t>
+            </a:r>
+          </a:p>
+          <a:p>
+            <a:r>
+              <a:rPr lang="en-US" dirty="0"/>
+              <a:t>It is the natural “remote extension” of the multi-language packages YottaDB already offers…</a:t>
+            </a:r>
+          </a:p>
+          <a:p>
+            <a:r>
+              <a:rPr lang="en-US" dirty="0"/>
+              <a:t>It removes the need to have ALL the client’s code running on the database server, which is now the case (and, in some situation, a limitation for potential customers)</a:t>
+            </a:r>
+          </a:p>
+        </p:txBody>
+      </p:sp>
+    </p:spTree>
+    <p:extLst>
+      <p:ext uri="{BB962C8B-B14F-4D97-AF65-F5344CB8AC3E}">
+        <p14:creationId xmlns:p14="http://schemas.microsoft.com/office/powerpoint/2010/main" val="3005701212"/>
+      </p:ext>
+    </p:extLst>
+  </p:cSld>
+  <p:clrMapOvr>
+    <a:masterClrMapping/>
+  </p:clrMapOvr>
+  <p:timing>
+    <p:tnLst>
+      <p:par>
+        <p:cTn id="1" dur="indefinite" restart="never" nodeType="tmRoot">
+          <p:childTnLst>
+            <p:seq concurrent="1" nextAc="seek">
+              <p:cTn id="2" dur="indefinite" nodeType="mainSeq">
+                <p:childTnLst>
+                  <p:par>
+                    <p:cTn id="3" fill="hold">
+                      <p:stCondLst>
+                        <p:cond delay="indefinite"/>
+                      </p:stCondLst>
+                      <p:childTnLst>
+                        <p:par>
+                          <p:cTn id="4" fill="hold">
+                            <p:stCondLst>
+                              <p:cond delay="0"/>
+                            </p:stCondLst>
+                            <p:childTnLst>
+                              <p:par>
+                                <p:cTn id="5" presetID="10" presetClass="entr" presetSubtype="0" fill="hold" grpId="0" nodeType="clickEffect">
+                                  <p:stCondLst>
+                                    <p:cond delay="0"/>
+                                  </p:stCondLst>
+                                  <p:childTnLst>
+                                    <p:set>
+                                      <p:cBhvr>
+                                        <p:cTn id="6" dur="1" fill="hold">
+                                          <p:stCondLst>
+                                            <p:cond delay="0"/>
+                                          </p:stCondLst>
+                                        </p:cTn>
+                                        <p:tgtEl>
+                                          <p:spTgt spid="3">
+                                            <p:txEl>
+                                              <p:pRg st="0" end="0"/>
+                                            </p:txEl>
+                                          </p:spTgt>
+                                        </p:tgtEl>
+                                        <p:attrNameLst>
+                                          <p:attrName>style.visibility</p:attrName>
+                                        </p:attrNameLst>
+                                      </p:cBhvr>
+                                      <p:to>
+                                        <p:strVal val="visible"/>
+                                      </p:to>
+                                    </p:set>
+                                    <p:animEffect transition="in" filter="fade">
+                                      <p:cBhvr>
+                                        <p:cTn id="7" dur="500"/>
+                                        <p:tgtEl>
+                                          <p:spTgt spid="3">
+                                            <p:txEl>
+                                              <p:pRg st="0" end="0"/>
+                                            </p:txEl>
+                                          </p:spTgt>
+                                        </p:tgtEl>
+                                      </p:cBhvr>
+                                    </p:animEffect>
+                                  </p:childTnLst>
+                                </p:cTn>
+                              </p:par>
+                            </p:childTnLst>
+                          </p:cTn>
+                        </p:par>
+                      </p:childTnLst>
+                    </p:cTn>
+                  </p:par>
+                  <p:par>
+                    <p:cTn id="8" fill="hold">
+                      <p:stCondLst>
+                        <p:cond delay="indefinite"/>
+                      </p:stCondLst>
+                      <p:childTnLst>
+                        <p:par>
+                          <p:cTn id="9" fill="hold">
+                            <p:stCondLst>
+                              <p:cond delay="0"/>
+                            </p:stCondLst>
+                            <p:childTnLst>
+                              <p:par>
+                                <p:cTn id="10" presetID="10" presetClass="entr" presetSubtype="0" fill="hold" grpId="0" nodeType="clickEffect">
+                                  <p:stCondLst>
+                                    <p:cond delay="0"/>
+                                  </p:stCondLst>
+                                  <p:childTnLst>
+                                    <p:set>
+                                      <p:cBhvr>
+                                        <p:cTn id="11" dur="1" fill="hold">
+                                          <p:stCondLst>
+                                            <p:cond delay="0"/>
+                                          </p:stCondLst>
+                                        </p:cTn>
+                                        <p:tgtEl>
+                                          <p:spTgt spid="3">
+                                            <p:txEl>
+                                              <p:pRg st="1" end="1"/>
+                                            </p:txEl>
+                                          </p:spTgt>
+                                        </p:tgtEl>
+                                        <p:attrNameLst>
+                                          <p:attrName>style.visibility</p:attrName>
+                                        </p:attrNameLst>
+                                      </p:cBhvr>
+                                      <p:to>
+                                        <p:strVal val="visible"/>
+                                      </p:to>
+                                    </p:set>
+                                    <p:animEffect transition="in" filter="fade">
+                                      <p:cBhvr>
+                                        <p:cTn id="12" dur="500"/>
+                                        <p:tgtEl>
+                                          <p:spTgt spid="3">
+                                            <p:txEl>
+                                              <p:pRg st="1" end="1"/>
+                                            </p:txEl>
+                                          </p:spTgt>
+                                        </p:tgtEl>
+                                      </p:cBhvr>
+                                    </p:animEffect>
+                                  </p:childTnLst>
+                                </p:cTn>
+                              </p:par>
+                            </p:childTnLst>
+                          </p:cTn>
+                        </p:par>
+                      </p:childTnLst>
+                    </p:cTn>
+                  </p:par>
+                  <p:par>
+                    <p:cTn id="13" fill="hold">
+                      <p:stCondLst>
+                        <p:cond delay="indefinite"/>
+                      </p:stCondLst>
+                      <p:childTnLst>
+                        <p:par>
+                          <p:cTn id="14" fill="hold">
+                            <p:stCondLst>
+                              <p:cond delay="0"/>
+                            </p:stCondLst>
+                            <p:childTnLst>
+                              <p:par>
+                                <p:cTn id="15" presetID="10" presetClass="entr" presetSubtype="0" fill="hold" grpId="0" nodeType="clickEffect">
+                                  <p:stCondLst>
+                                    <p:cond delay="0"/>
+                                  </p:stCondLst>
+                                  <p:childTnLst>
+                                    <p:set>
+                                      <p:cBhvr>
+                                        <p:cTn id="16" dur="1" fill="hold">
+                                          <p:stCondLst>
+                                            <p:cond delay="0"/>
+                                          </p:stCondLst>
+                                        </p:cTn>
+                                        <p:tgtEl>
+                                          <p:spTgt spid="3">
+                                            <p:txEl>
+                                              <p:pRg st="2" end="2"/>
+                                            </p:txEl>
+                                          </p:spTgt>
+                                        </p:tgtEl>
+                                        <p:attrNameLst>
+                                          <p:attrName>style.visibility</p:attrName>
+                                        </p:attrNameLst>
+                                      </p:cBhvr>
+                                      <p:to>
+                                        <p:strVal val="visible"/>
+                                      </p:to>
+                                    </p:set>
+                                    <p:animEffect transition="in" filter="fade">
+                                      <p:cBhvr>
+                                        <p:cTn id="17" dur="500"/>
+                                        <p:tgtEl>
+                                          <p:spTgt spid="3">
+                                            <p:txEl>
+                                              <p:pRg st="2" end="2"/>
+                                            </p:txEl>
+                                          </p:spTgt>
+                                        </p:tgtEl>
+                                      </p:cBhvr>
+                                    </p:animEffect>
+                                  </p:childTnLst>
+                                </p:cTn>
+                              </p:par>
+                            </p:childTnLst>
+                          </p:cTn>
+                        </p:par>
+                      </p:childTnLst>
+                    </p:cTn>
+                  </p:par>
+                  <p:par>
+                    <p:cTn id="18" fill="hold">
+                      <p:stCondLst>
+                        <p:cond delay="indefinite"/>
+                      </p:stCondLst>
+                      <p:childTnLst>
+                        <p:par>
+                          <p:cTn id="19" fill="hold">
+                            <p:stCondLst>
+                              <p:cond delay="0"/>
+                            </p:stCondLst>
+                            <p:childTnLst>
+                              <p:par>
+                                <p:cTn id="20" presetID="10" presetClass="entr" presetSubtype="0" fill="hold" grpId="0" nodeType="clickEffect">
+                                  <p:stCondLst>
+                                    <p:cond delay="0"/>
+                                  </p:stCondLst>
+                                  <p:childTnLst>
+                                    <p:set>
+                                      <p:cBhvr>
+                                        <p:cTn id="21" dur="1" fill="hold">
+                                          <p:stCondLst>
+                                            <p:cond delay="0"/>
+                                          </p:stCondLst>
+                                        </p:cTn>
+                                        <p:tgtEl>
+                                          <p:spTgt spid="3">
+                                            <p:txEl>
+                                              <p:pRg st="3" end="3"/>
+                                            </p:txEl>
+                                          </p:spTgt>
+                                        </p:tgtEl>
+                                        <p:attrNameLst>
+                                          <p:attrName>style.visibility</p:attrName>
+                                        </p:attrNameLst>
+                                      </p:cBhvr>
+                                      <p:to>
+                                        <p:strVal val="visible"/>
+                                      </p:to>
+                                    </p:set>
+                                    <p:animEffect transition="in" filter="fade">
+                                      <p:cBhvr>
+                                        <p:cTn id="22" dur="500"/>
+                                        <p:tgtEl>
+                                          <p:spTgt spid="3">
+                                            <p:txEl>
+                                              <p:pRg st="3" end="3"/>
+                                            </p:txEl>
+                                          </p:spTgt>
+                                        </p:tgtEl>
+                                      </p:cBhvr>
+                                    </p:animEffect>
+                                  </p:childTnLst>
+                                </p:cTn>
+                              </p:par>
+                            </p:childTnLst>
+                          </p:cTn>
+                        </p:par>
+                      </p:childTnLst>
+                    </p:cTn>
+                  </p:par>
+                  <p:par>
+                    <p:cTn id="23" fill="hold">
+                      <p:stCondLst>
+                        <p:cond delay="indefinite"/>
+                      </p:stCondLst>
+                      <p:childTnLst>
+                        <p:par>
+                          <p:cTn id="24" fill="hold">
+                            <p:stCondLst>
+                              <p:cond delay="0"/>
+                            </p:stCondLst>
+                            <p:childTnLst>
+                              <p:par>
+                                <p:cTn id="25" presetID="10" presetClass="entr" presetSubtype="0" fill="hold" grpId="0" nodeType="clickEffect">
+                                  <p:stCondLst>
+                                    <p:cond delay="0"/>
+                                  </p:stCondLst>
+                                  <p:childTnLst>
+                                    <p:set>
+                                      <p:cBhvr>
+                                        <p:cTn id="26" dur="1" fill="hold">
+                                          <p:stCondLst>
+                                            <p:cond delay="0"/>
+                                          </p:stCondLst>
+                                        </p:cTn>
+                                        <p:tgtEl>
+                                          <p:spTgt spid="3">
+                                            <p:txEl>
+                                              <p:pRg st="4" end="4"/>
+                                            </p:txEl>
+                                          </p:spTgt>
+                                        </p:tgtEl>
+                                        <p:attrNameLst>
+                                          <p:attrName>style.visibility</p:attrName>
+                                        </p:attrNameLst>
+                                      </p:cBhvr>
+                                      <p:to>
+                                        <p:strVal val="visible"/>
+                                      </p:to>
+                                    </p:set>
+                                    <p:animEffect transition="in" filter="fade">
+                                      <p:cBhvr>
+                                        <p:cTn id="27" dur="500"/>
+                                        <p:tgtEl>
+                                          <p:spTgt spid="3">
+                                            <p:txEl>
+                                              <p:pRg st="4" end="4"/>
+                                            </p:txEl>
+                                          </p:spTgt>
+                                        </p:tgtEl>
+                                      </p:cBhvr>
+                                    </p:animEffect>
+                                  </p:childTnLst>
+                                </p:cTn>
+                              </p:par>
+                            </p:childTnLst>
+                          </p:cTn>
+                        </p:par>
+                      </p:childTnLst>
+                    </p:cTn>
+                  </p:par>
+                </p:childTnLst>
+              </p:cTn>
+              <p:prevCondLst>
+                <p:cond evt="onPrev" delay="0">
+                  <p:tgtEl>
+                    <p:sldTgt/>
+                  </p:tgtEl>
+                </p:cond>
+              </p:prevCondLst>
+              <p:nextCondLst>
+                <p:cond evt="onNext" delay="0">
+                  <p:tgtEl>
+                    <p:sldTgt/>
+                  </p:tgtEl>
+                </p:cond>
+              </p:nextCondLst>
+            </p:seq>
+          </p:childTnLst>
+        </p:cTn>
+      </p:par>
+    </p:tnLst>
+    <p:bldLst>
+      <p:bldP spid="3" grpId="0" uiExpand="1" build="p"/>
+    </p:bldLst>
+  </p:timing>
+</p:sld>
+</file>
+
+<file path=ppt/slides/slide4.xml><?xml version="1.0" encoding="utf-8"?>
+<p:sld xmlns:a="http://schemas.openxmlformats.org/drawingml/2006/main" xmlns:r="http://schemas.openxmlformats.org/officeDocument/2006/relationships" xmlns:p="http://schemas.openxmlformats.org/presentationml/2006/main">
+  <p:cSld>
+    <p:bg>
+      <p:bgPr>
+        <a:solidFill>
+          <a:schemeClr val="bg1"/>
+        </a:solidFill>
+        <a:effectLst/>
+      </p:bgPr>
+    </p:bg>
+    <p:spTree>
+      <p:nvGrpSpPr>
+        <p:cNvPr id="1" name=""/>
+        <p:cNvGrpSpPr/>
+        <p:nvPr/>
+      </p:nvGrpSpPr>
+      <p:grpSpPr>
+        <a:xfrm>
+          <a:off x="0" y="0"/>
+          <a:ext cx="0" cy="0"/>
+          <a:chOff x="0" y="0"/>
+          <a:chExt cx="0" cy="0"/>
+        </a:xfrm>
+      </p:grpSpPr>
+      <p:sp>
+        <p:nvSpPr>
+          <p:cNvPr id="2" name="Title 1">
+            <a:extLst>
+              <a:ext uri="{FF2B5EF4-FFF2-40B4-BE49-F238E27FC236}">
+                <a16:creationId xmlns:a16="http://schemas.microsoft.com/office/drawing/2014/main" id="{401A599D-DBE5-8AF5-401F-90FC43402CBF}"/>
+              </a:ext>
+            </a:extLst>
+          </p:cNvPr>
+          <p:cNvSpPr>
+            <a:spLocks noGrp="1"/>
+          </p:cNvSpPr>
+          <p:nvPr>
+            <p:ph type="title"/>
+          </p:nvPr>
+        </p:nvSpPr>
+        <p:spPr>
+          <a:xfrm>
+            <a:off x="1952481" y="800783"/>
+            <a:ext cx="8278891" cy="1323867"/>
+          </a:xfrm>
+        </p:spPr>
+        <p:txBody>
+          <a:bodyPr anchor="b">
+            <a:normAutofit/>
+          </a:bodyPr>
+          <a:lstStyle/>
+          <a:p>
+            <a:r>
+              <a:rPr lang="en-US" dirty="0"/>
+              <a:t>Streamline MUMPS API development with no worries</a:t>
+            </a:r>
+            <a:endParaRPr lang="en-NL" dirty="0"/>
+          </a:p>
+        </p:txBody>
+      </p:sp>
+      <p:graphicFrame>
+        <p:nvGraphicFramePr>
+          <p:cNvPr id="11" name="Content Placeholder 2">
+            <a:extLst>
+              <a:ext uri="{FF2B5EF4-FFF2-40B4-BE49-F238E27FC236}">
+                <a16:creationId xmlns:a16="http://schemas.microsoft.com/office/drawing/2014/main" id="{C1D56428-A62A-F147-4135-9F747780E333}"/>
+              </a:ext>
+            </a:extLst>
+          </p:cNvPr>
+          <p:cNvGraphicFramePr>
+            <a:graphicFrameLocks noGrp="1"/>
+          </p:cNvGraphicFramePr>
+          <p:nvPr>
+            <p:ph idx="1"/>
+            <p:extLst>
+              <p:ext uri="{D42A27DB-BD31-4B8C-83A1-F6EECF244321}">
+                <p14:modId xmlns:p14="http://schemas.microsoft.com/office/powerpoint/2010/main" val="1870334425"/>
+              </p:ext>
+              <p:ext uri="{E7BDC344-281C-4309-B0C6-D0EE65EED2A8}">
+                <p202:designPr xmlns:p202="http://schemas.microsoft.com/office/powerpoint/2020/02/main">
+                  <p202:designTagLst>
+                    <p202:designTag name="ARCH:1:CLS" val="InformationBlock"/>
+                    <p202:designTag name="ARCH:1:VSVAR" val="TitledTextBox"/>
+                  </p202:designTagLst>
+                </p202:designPr>
+              </p:ext>
+            </p:extLst>
+          </p:nvPr>
+        </p:nvGraphicFramePr>
+        <p:xfrm>
+          <a:off x="1952481" y="2495774"/>
+          <a:ext cx="8278892" cy="3273426"/>
+        </p:xfrm>
+        <a:graphic>
+          <a:graphicData uri="http://schemas.openxmlformats.org/drawingml/2006/diagram">
+            <dgm:relIds xmlns:dgm="http://schemas.openxmlformats.org/drawingml/2006/diagram" xmlns:r="http://schemas.openxmlformats.org/officeDocument/2006/relationships" r:dm="rId2" r:lo="rId3" r:qs="rId4" r:cs="rId5"/>
+          </a:graphicData>
+        </a:graphic>
+      </p:graphicFrame>
+    </p:spTree>
+    <p:extLst>
+      <p:ext uri="{BB962C8B-B14F-4D97-AF65-F5344CB8AC3E}">
+        <p14:creationId xmlns:p14="http://schemas.microsoft.com/office/powerpoint/2010/main" val="3819192767"/>
+      </p:ext>
+    </p:extLst>
+  </p:cSld>
+  <p:clrMapOvr>
+    <a:masterClrMapping/>
+  </p:clrMapOvr>
+  <p:timing>
+    <p:tnLst>
+      <p:par>
+        <p:cTn id="1" dur="indefinite" restart="never" nodeType="tmRoot">
+          <p:childTnLst>
+            <p:seq concurrent="1" nextAc="seek">
+              <p:cTn id="2" dur="indefinite" nodeType="mainSeq">
+                <p:childTnLst>
+                  <p:par>
+                    <p:cTn id="3" fill="hold">
+                      <p:stCondLst>
+                        <p:cond delay="indefinite"/>
+                      </p:stCondLst>
+                      <p:childTnLst>
+                        <p:par>
+                          <p:cTn id="4" fill="hold">
+                            <p:stCondLst>
+                              <p:cond delay="0"/>
+                            </p:stCondLst>
+                            <p:childTnLst>
+                              <p:par>
+                                <p:cTn id="5" presetID="10" presetClass="entr" presetSubtype="0" fill="hold" grpId="0" nodeType="clickEffect">
+                                  <p:stCondLst>
+                                    <p:cond delay="0"/>
+                                  </p:stCondLst>
+                                  <p:childTnLst>
+                                    <p:set>
+                                      <p:cBhvr>
+                                        <p:cTn id="6" dur="1" fill="hold">
+                                          <p:stCondLst>
+                                            <p:cond delay="0"/>
+                                          </p:stCondLst>
+                                        </p:cTn>
+                                        <p:tgtEl>
+                                          <p:spTgt spid="11">
+                                            <p:graphicEl>
+                                              <a:dgm id="{018F7438-E01D-44D7-ADD6-157BC62500E3}"/>
+                                            </p:graphicEl>
+                                          </p:spTgt>
+                                        </p:tgtEl>
+                                        <p:attrNameLst>
+                                          <p:attrName>style.visibility</p:attrName>
+                                        </p:attrNameLst>
+                                      </p:cBhvr>
+                                      <p:to>
+                                        <p:strVal val="visible"/>
+                                      </p:to>
+                                    </p:set>
+                                    <p:animEffect transition="in" filter="fade">
+                                      <p:cBhvr>
+                                        <p:cTn id="7" dur="500"/>
+                                        <p:tgtEl>
+                                          <p:spTgt spid="11">
+                                            <p:graphicEl>
+                                              <a:dgm id="{018F7438-E01D-44D7-ADD6-157BC62500E3}"/>
+                                            </p:graphicEl>
+                                          </p:spTgt>
+                                        </p:tgtEl>
+                                      </p:cBhvr>
+                                    </p:animEffect>
+                                  </p:childTnLst>
+                                </p:cTn>
+                              </p:par>
+                              <p:par>
+                                <p:cTn id="8" presetID="10" presetClass="entr" presetSubtype="0" fill="hold" grpId="0" nodeType="withEffect">
+                                  <p:stCondLst>
+                                    <p:cond delay="0"/>
+                                  </p:stCondLst>
+                                  <p:childTnLst>
+                                    <p:set>
+                                      <p:cBhvr>
+                                        <p:cTn id="9" dur="1" fill="hold">
+                                          <p:stCondLst>
+                                            <p:cond delay="0"/>
+                                          </p:stCondLst>
+                                        </p:cTn>
+                                        <p:tgtEl>
+                                          <p:spTgt spid="11">
+                                            <p:graphicEl>
+                                              <a:dgm id="{5C90C3CA-0AA3-4EBE-B50C-5D1938624D21}"/>
+                                            </p:graphicEl>
+                                          </p:spTgt>
+                                        </p:tgtEl>
+                                        <p:attrNameLst>
+                                          <p:attrName>style.visibility</p:attrName>
+                                        </p:attrNameLst>
+                                      </p:cBhvr>
+                                      <p:to>
+                                        <p:strVal val="visible"/>
+                                      </p:to>
+                                    </p:set>
+                                    <p:animEffect transition="in" filter="fade">
+                                      <p:cBhvr>
+                                        <p:cTn id="10" dur="500"/>
+                                        <p:tgtEl>
+                                          <p:spTgt spid="11">
+                                            <p:graphicEl>
+                                              <a:dgm id="{5C90C3CA-0AA3-4EBE-B50C-5D1938624D21}"/>
+                                            </p:graphicEl>
+                                          </p:spTgt>
+                                        </p:tgtEl>
+                                      </p:cBhvr>
+                                    </p:animEffect>
+                                  </p:childTnLst>
+                                </p:cTn>
+                              </p:par>
+                            </p:childTnLst>
+                          </p:cTn>
+                        </p:par>
+                      </p:childTnLst>
+                    </p:cTn>
+                  </p:par>
+                  <p:par>
+                    <p:cTn id="11" fill="hold">
+                      <p:stCondLst>
+                        <p:cond delay="indefinite"/>
+                      </p:stCondLst>
+                      <p:childTnLst>
+                        <p:par>
+                          <p:cTn id="12" fill="hold">
+                            <p:stCondLst>
+                              <p:cond delay="0"/>
+                            </p:stCondLst>
+                            <p:childTnLst>
+                              <p:par>
+                                <p:cTn id="13" presetID="10" presetClass="entr" presetSubtype="0" fill="hold" grpId="0" nodeType="clickEffect">
+                                  <p:stCondLst>
+                                    <p:cond delay="0"/>
+                                  </p:stCondLst>
+                                  <p:childTnLst>
+                                    <p:set>
+                                      <p:cBhvr>
+                                        <p:cTn id="14" dur="1" fill="hold">
+                                          <p:stCondLst>
+                                            <p:cond delay="0"/>
+                                          </p:stCondLst>
+                                        </p:cTn>
+                                        <p:tgtEl>
+                                          <p:spTgt spid="11">
+                                            <p:graphicEl>
+                                              <a:dgm id="{58CF0B87-5490-46B7-A456-64A277CB332C}"/>
+                                            </p:graphicEl>
+                                          </p:spTgt>
+                                        </p:tgtEl>
+                                        <p:attrNameLst>
+                                          <p:attrName>style.visibility</p:attrName>
+                                        </p:attrNameLst>
+                                      </p:cBhvr>
+                                      <p:to>
+                                        <p:strVal val="visible"/>
+                                      </p:to>
+                                    </p:set>
+                                    <p:animEffect transition="in" filter="fade">
+                                      <p:cBhvr>
+                                        <p:cTn id="15" dur="500"/>
+                                        <p:tgtEl>
+                                          <p:spTgt spid="11">
+                                            <p:graphicEl>
+                                              <a:dgm id="{58CF0B87-5490-46B7-A456-64A277CB332C}"/>
+                                            </p:graphicEl>
+                                          </p:spTgt>
+                                        </p:tgtEl>
+                                      </p:cBhvr>
+                                    </p:animEffect>
+                                  </p:childTnLst>
+                                </p:cTn>
+                              </p:par>
+                              <p:par>
+                                <p:cTn id="16" presetID="10" presetClass="entr" presetSubtype="0" fill="hold" grpId="0" nodeType="withEffect">
+                                  <p:stCondLst>
+                                    <p:cond delay="0"/>
+                                  </p:stCondLst>
+                                  <p:childTnLst>
+                                    <p:set>
+                                      <p:cBhvr>
+                                        <p:cTn id="17" dur="1" fill="hold">
+                                          <p:stCondLst>
+                                            <p:cond delay="0"/>
+                                          </p:stCondLst>
+                                        </p:cTn>
+                                        <p:tgtEl>
+                                          <p:spTgt spid="11">
+                                            <p:graphicEl>
+                                              <a:dgm id="{8BB355F9-6CC2-4480-9B7E-D892D65FD34C}"/>
+                                            </p:graphicEl>
+                                          </p:spTgt>
+                                        </p:tgtEl>
+                                        <p:attrNameLst>
+                                          <p:attrName>style.visibility</p:attrName>
+                                        </p:attrNameLst>
+                                      </p:cBhvr>
+                                      <p:to>
+                                        <p:strVal val="visible"/>
+                                      </p:to>
+                                    </p:set>
+                                    <p:animEffect transition="in" filter="fade">
+                                      <p:cBhvr>
+                                        <p:cTn id="18" dur="500"/>
+                                        <p:tgtEl>
+                                          <p:spTgt spid="11">
+                                            <p:graphicEl>
+                                              <a:dgm id="{8BB355F9-6CC2-4480-9B7E-D892D65FD34C}"/>
+                                            </p:graphicEl>
+                                          </p:spTgt>
+                                        </p:tgtEl>
+                                      </p:cBhvr>
+                                    </p:animEffect>
+                                  </p:childTnLst>
+                                </p:cTn>
+                              </p:par>
+                            </p:childTnLst>
+                          </p:cTn>
+                        </p:par>
+                      </p:childTnLst>
+                    </p:cTn>
+                  </p:par>
+                  <p:par>
+                    <p:cTn id="19" fill="hold">
+                      <p:stCondLst>
+                        <p:cond delay="indefinite"/>
+                      </p:stCondLst>
+                      <p:childTnLst>
+                        <p:par>
+                          <p:cTn id="20" fill="hold">
+                            <p:stCondLst>
+                              <p:cond delay="0"/>
+                            </p:stCondLst>
+                            <p:childTnLst>
+                              <p:par>
+                                <p:cTn id="21" presetID="10" presetClass="entr" presetSubtype="0" fill="hold" grpId="0" nodeType="clickEffect">
+                                  <p:stCondLst>
+                                    <p:cond delay="0"/>
+                                  </p:stCondLst>
+                                  <p:childTnLst>
+                                    <p:set>
+                                      <p:cBhvr>
+                                        <p:cTn id="22" dur="1" fill="hold">
+                                          <p:stCondLst>
+                                            <p:cond delay="0"/>
+                                          </p:stCondLst>
+                                        </p:cTn>
+                                        <p:tgtEl>
+                                          <p:spTgt spid="11">
+                                            <p:graphicEl>
+                                              <a:dgm id="{E38D88DE-6630-449F-B815-64F25EB69547}"/>
+                                            </p:graphicEl>
+                                          </p:spTgt>
+                                        </p:tgtEl>
+                                        <p:attrNameLst>
+                                          <p:attrName>style.visibility</p:attrName>
+                                        </p:attrNameLst>
+                                      </p:cBhvr>
+                                      <p:to>
+                                        <p:strVal val="visible"/>
+                                      </p:to>
+                                    </p:set>
+                                    <p:animEffect transition="in" filter="fade">
+                                      <p:cBhvr>
+                                        <p:cTn id="23" dur="500"/>
+                                        <p:tgtEl>
+                                          <p:spTgt spid="11">
+                                            <p:graphicEl>
+                                              <a:dgm id="{E38D88DE-6630-449F-B815-64F25EB69547}"/>
+                                            </p:graphicEl>
+                                          </p:spTgt>
+                                        </p:tgtEl>
+                                      </p:cBhvr>
+                                    </p:animEffect>
+                                  </p:childTnLst>
+                                </p:cTn>
+                              </p:par>
+                              <p:par>
+                                <p:cTn id="24" presetID="10" presetClass="entr" presetSubtype="0" fill="hold" grpId="0" nodeType="withEffect">
+                                  <p:stCondLst>
+                                    <p:cond delay="0"/>
+                                  </p:stCondLst>
+                                  <p:childTnLst>
+                                    <p:set>
+                                      <p:cBhvr>
+                                        <p:cTn id="25" dur="1" fill="hold">
+                                          <p:stCondLst>
+                                            <p:cond delay="0"/>
+                                          </p:stCondLst>
+                                        </p:cTn>
+                                        <p:tgtEl>
+                                          <p:spTgt spid="11">
+                                            <p:graphicEl>
+                                              <a:dgm id="{6BD7537A-36A9-42F0-9C36-0D4BA2D0752A}"/>
+                                            </p:graphicEl>
+                                          </p:spTgt>
+                                        </p:tgtEl>
+                                        <p:attrNameLst>
+                                          <p:attrName>style.visibility</p:attrName>
+                                        </p:attrNameLst>
+                                      </p:cBhvr>
+                                      <p:to>
+                                        <p:strVal val="visible"/>
+                                      </p:to>
+                                    </p:set>
+                                    <p:animEffect transition="in" filter="fade">
+                                      <p:cBhvr>
+                                        <p:cTn id="26" dur="500"/>
+                                        <p:tgtEl>
+                                          <p:spTgt spid="11">
+                                            <p:graphicEl>
+                                              <a:dgm id="{6BD7537A-36A9-42F0-9C36-0D4BA2D0752A}"/>
+                                            </p:graphicEl>
+                                          </p:spTgt>
+                                        </p:tgtEl>
+                                      </p:cBhvr>
+                                    </p:animEffect>
+                                  </p:childTnLst>
+                                </p:cTn>
+                              </p:par>
+                            </p:childTnLst>
+                          </p:cTn>
+                        </p:par>
+                      </p:childTnLst>
+                    </p:cTn>
+                  </p:par>
+                </p:childTnLst>
+              </p:cTn>
+              <p:prevCondLst>
+                <p:cond evt="onPrev" delay="0">
+                  <p:tgtEl>
+                    <p:sldTgt/>
+                  </p:tgtEl>
+                </p:cond>
+              </p:prevCondLst>
+              <p:nextCondLst>
+                <p:cond evt="onNext" delay="0">
+                  <p:tgtEl>
+                    <p:sldTgt/>
+                  </p:tgtEl>
+                </p:cond>
+              </p:nextCondLst>
+            </p:seq>
+          </p:childTnLst>
+        </p:cTn>
+      </p:par>
+    </p:tnLst>
+    <p:bldLst>
+      <p:bldGraphic spid="11" grpId="0" uiExpand="1">
+        <p:bldSub>
+          <a:bldDgm bld="one"/>
+        </p:bldSub>
+      </p:bldGraphic>
+    </p:bldLst>
+  </p:timing>
+</p:sld>
+</file>
+
+<file path=ppt/slides/slide5.xml><?xml version="1.0" encoding="utf-8"?>
+<p:sld xmlns:a="http://schemas.openxmlformats.org/drawingml/2006/main" xmlns:r="http://schemas.openxmlformats.org/officeDocument/2006/relationships" xmlns:p="http://schemas.openxmlformats.org/presentationml/2006/main">
+  <p:cSld>
+    <p:spTree>
+      <p:nvGrpSpPr>
+        <p:cNvPr id="1" name="">
+          <a:extLst>
+            <a:ext uri="{FF2B5EF4-FFF2-40B4-BE49-F238E27FC236}">
+              <a16:creationId xmlns:a16="http://schemas.microsoft.com/office/drawing/2014/main" id="{F3742365-D6CF-DCC8-2123-A23EE2E67389}"/>
+            </a:ext>
+          </a:extLst>
+        </p:cNvPr>
+        <p:cNvGrpSpPr/>
+        <p:nvPr/>
+      </p:nvGrpSpPr>
+      <p:grpSpPr>
+        <a:xfrm>
+          <a:off x="0" y="0"/>
+          <a:ext cx="0" cy="0"/>
+          <a:chOff x="0" y="0"/>
+          <a:chExt cx="0" cy="0"/>
+        </a:xfrm>
+      </p:grpSpPr>
+      <p:sp>
+        <p:nvSpPr>
+          <p:cNvPr id="2" name="Title 1">
+            <a:extLst>
+              <a:ext uri="{FF2B5EF4-FFF2-40B4-BE49-F238E27FC236}">
+                <a16:creationId xmlns:a16="http://schemas.microsoft.com/office/drawing/2014/main" id="{A61D30CC-8AAB-925E-E6E3-3FC92EE1CD22}"/>
+              </a:ext>
+            </a:extLst>
+          </p:cNvPr>
+          <p:cNvSpPr>
+            <a:spLocks noGrp="1"/>
+          </p:cNvSpPr>
+          <p:nvPr>
+            <p:ph type="title"/>
+          </p:nvPr>
+        </p:nvSpPr>
+        <p:spPr/>
+        <p:txBody>
+          <a:bodyPr/>
+          <a:lstStyle/>
+          <a:p>
+            <a:r>
+              <a:rPr lang="en-US" dirty="0"/>
+              <a:t>Distributed architecture</a:t>
+            </a:r>
+            <a:endParaRPr lang="en-NL" dirty="0"/>
+          </a:p>
+        </p:txBody>
+      </p:sp>
+      <p:sp>
+        <p:nvSpPr>
+          <p:cNvPr id="3" name="Content Placeholder 2">
+            <a:extLst>
+              <a:ext uri="{FF2B5EF4-FFF2-40B4-BE49-F238E27FC236}">
+                <a16:creationId xmlns:a16="http://schemas.microsoft.com/office/drawing/2014/main" id="{BB7201A6-1E38-AF8A-F281-E4573822C16D}"/>
+              </a:ext>
+            </a:extLst>
+          </p:cNvPr>
+          <p:cNvSpPr>
+            <a:spLocks noGrp="1"/>
+          </p:cNvSpPr>
+          <p:nvPr>
+            <p:ph idx="1"/>
+          </p:nvPr>
+        </p:nvSpPr>
+        <p:spPr/>
+        <p:txBody>
+          <a:bodyPr/>
+          <a:lstStyle/>
+          <a:p>
+            <a:pPr lvl="1"/>
+            <a:r>
+              <a:rPr lang="en-US" dirty="0"/>
+              <a:t>Allow you to execute ONLY database related code on the MUMPS server</a:t>
+            </a:r>
+          </a:p>
+          <a:p>
+            <a:pPr lvl="1"/>
+            <a:endParaRPr lang="en-US" dirty="0"/>
+          </a:p>
+          <a:p>
+            <a:pPr lvl="1"/>
+            <a:r>
+              <a:rPr lang="en-US" dirty="0"/>
+              <a:t>Allow you to have multiple back-end servers, sharing the same database, to cope with increasing traffic</a:t>
+            </a:r>
+          </a:p>
+          <a:p>
+            <a:pPr lvl="1"/>
+            <a:endParaRPr lang="en-US" dirty="0"/>
+          </a:p>
+          <a:p>
+            <a:pPr lvl="1"/>
+            <a:r>
+              <a:rPr lang="en-US" dirty="0"/>
+              <a:t>Keep the power and speed of the M language for pure database access</a:t>
+            </a:r>
+          </a:p>
+          <a:p>
+            <a:pPr lvl="1"/>
+            <a:endParaRPr lang="en-US" dirty="0"/>
+          </a:p>
+          <a:p>
+            <a:pPr lvl="1"/>
+            <a:r>
+              <a:rPr lang="en-US" dirty="0"/>
+              <a:t>Use your preferred language for the back-end</a:t>
+            </a:r>
+          </a:p>
+          <a:p>
+            <a:pPr lvl="1"/>
+            <a:endParaRPr lang="en-NL" dirty="0"/>
+          </a:p>
+        </p:txBody>
+      </p:sp>
+    </p:spTree>
+    <p:extLst>
+      <p:ext uri="{BB962C8B-B14F-4D97-AF65-F5344CB8AC3E}">
+        <p14:creationId xmlns:p14="http://schemas.microsoft.com/office/powerpoint/2010/main" val="934243486"/>
+      </p:ext>
+    </p:extLst>
+  </p:cSld>
+  <p:clrMapOvr>
+    <a:masterClrMapping/>
+  </p:clrMapOvr>
+  <p:timing>
+    <p:tnLst>
+      <p:par>
+        <p:cTn id="1" dur="indefinite" restart="never" nodeType="tmRoot">
+          <p:childTnLst>
+            <p:seq concurrent="1" nextAc="seek">
+              <p:cTn id="2" dur="indefinite" nodeType="mainSeq">
+                <p:childTnLst>
+                  <p:par>
+                    <p:cTn id="3" fill="hold">
+                      <p:stCondLst>
+                        <p:cond delay="indefinite"/>
+                      </p:stCondLst>
+                      <p:childTnLst>
+                        <p:par>
+                          <p:cTn id="4" fill="hold">
+                            <p:stCondLst>
+                              <p:cond delay="0"/>
+                            </p:stCondLst>
+                            <p:childTnLst>
+                              <p:par>
+                                <p:cTn id="5" presetID="10" presetClass="entr" presetSubtype="0" fill="hold" grpId="0" nodeType="clickEffect">
+                                  <p:stCondLst>
+                                    <p:cond delay="0"/>
+                                  </p:stCondLst>
+                                  <p:childTnLst>
+                                    <p:set>
+                                      <p:cBhvr>
+                                        <p:cTn id="6" dur="1" fill="hold">
+                                          <p:stCondLst>
+                                            <p:cond delay="0"/>
+                                          </p:stCondLst>
+                                        </p:cTn>
+                                        <p:tgtEl>
+                                          <p:spTgt spid="3">
+                                            <p:txEl>
+                                              <p:pRg st="0" end="0"/>
+                                            </p:txEl>
+                                          </p:spTgt>
+                                        </p:tgtEl>
+                                        <p:attrNameLst>
+                                          <p:attrName>style.visibility</p:attrName>
+                                        </p:attrNameLst>
+                                      </p:cBhvr>
+                                      <p:to>
+                                        <p:strVal val="visible"/>
+                                      </p:to>
+                                    </p:set>
+                                    <p:animEffect transition="in" filter="fade">
+                                      <p:cBhvr>
+                                        <p:cTn id="7" dur="500"/>
+                                        <p:tgtEl>
+                                          <p:spTgt spid="3">
+                                            <p:txEl>
+                                              <p:pRg st="0" end="0"/>
+                                            </p:txEl>
+                                          </p:spTgt>
+                                        </p:tgtEl>
+                                      </p:cBhvr>
+                                    </p:animEffect>
+                                  </p:childTnLst>
+                                </p:cTn>
+                              </p:par>
+                            </p:childTnLst>
+                          </p:cTn>
+                        </p:par>
+                      </p:childTnLst>
+                    </p:cTn>
+                  </p:par>
+                  <p:par>
+                    <p:cTn id="8" fill="hold">
+                      <p:stCondLst>
+                        <p:cond delay="indefinite"/>
+                      </p:stCondLst>
+                      <p:childTnLst>
+                        <p:par>
+                          <p:cTn id="9" fill="hold">
+                            <p:stCondLst>
+                              <p:cond delay="0"/>
+                            </p:stCondLst>
+                            <p:childTnLst>
+                              <p:par>
+                                <p:cTn id="10" presetID="10" presetClass="entr" presetSubtype="0" fill="hold" grpId="0" nodeType="clickEffect">
+                                  <p:stCondLst>
+                                    <p:cond delay="0"/>
+                                  </p:stCondLst>
+                                  <p:childTnLst>
+                                    <p:set>
+                                      <p:cBhvr>
+                                        <p:cTn id="11" dur="1" fill="hold">
+                                          <p:stCondLst>
+                                            <p:cond delay="0"/>
+                                          </p:stCondLst>
+                                        </p:cTn>
+                                        <p:tgtEl>
+                                          <p:spTgt spid="3">
+                                            <p:txEl>
+                                              <p:pRg st="2" end="2"/>
+                                            </p:txEl>
+                                          </p:spTgt>
+                                        </p:tgtEl>
+                                        <p:attrNameLst>
+                                          <p:attrName>style.visibility</p:attrName>
+                                        </p:attrNameLst>
+                                      </p:cBhvr>
+                                      <p:to>
+                                        <p:strVal val="visible"/>
+                                      </p:to>
+                                    </p:set>
+                                    <p:animEffect transition="in" filter="fade">
+                                      <p:cBhvr>
+                                        <p:cTn id="12" dur="500"/>
+                                        <p:tgtEl>
+                                          <p:spTgt spid="3">
+                                            <p:txEl>
+                                              <p:pRg st="2" end="2"/>
+                                            </p:txEl>
+                                          </p:spTgt>
+                                        </p:tgtEl>
+                                      </p:cBhvr>
+                                    </p:animEffect>
+                                  </p:childTnLst>
+                                </p:cTn>
+                              </p:par>
+                            </p:childTnLst>
+                          </p:cTn>
+                        </p:par>
+                      </p:childTnLst>
+                    </p:cTn>
+                  </p:par>
+                  <p:par>
+                    <p:cTn id="13" fill="hold">
+                      <p:stCondLst>
+                        <p:cond delay="indefinite"/>
+                      </p:stCondLst>
+                      <p:childTnLst>
+                        <p:par>
+                          <p:cTn id="14" fill="hold">
+                            <p:stCondLst>
+                              <p:cond delay="0"/>
+                            </p:stCondLst>
+                            <p:childTnLst>
+                              <p:par>
+                                <p:cTn id="15" presetID="10" presetClass="entr" presetSubtype="0" fill="hold" grpId="0" nodeType="clickEffect">
+                                  <p:stCondLst>
+                                    <p:cond delay="0"/>
+                                  </p:stCondLst>
+                                  <p:childTnLst>
+                                    <p:set>
+                                      <p:cBhvr>
+                                        <p:cTn id="16" dur="1" fill="hold">
+                                          <p:stCondLst>
+                                            <p:cond delay="0"/>
+                                          </p:stCondLst>
+                                        </p:cTn>
+                                        <p:tgtEl>
+                                          <p:spTgt spid="3">
+                                            <p:txEl>
+                                              <p:pRg st="4" end="4"/>
+                                            </p:txEl>
+                                          </p:spTgt>
+                                        </p:tgtEl>
+                                        <p:attrNameLst>
+                                          <p:attrName>style.visibility</p:attrName>
+                                        </p:attrNameLst>
+                                      </p:cBhvr>
+                                      <p:to>
+                                        <p:strVal val="visible"/>
+                                      </p:to>
+                                    </p:set>
+                                    <p:animEffect transition="in" filter="fade">
+                                      <p:cBhvr>
+                                        <p:cTn id="17" dur="500"/>
+                                        <p:tgtEl>
+                                          <p:spTgt spid="3">
+                                            <p:txEl>
+                                              <p:pRg st="4" end="4"/>
+                                            </p:txEl>
+                                          </p:spTgt>
+                                        </p:tgtEl>
+                                      </p:cBhvr>
+                                    </p:animEffect>
+                                  </p:childTnLst>
+                                </p:cTn>
+                              </p:par>
+                            </p:childTnLst>
+                          </p:cTn>
+                        </p:par>
+                      </p:childTnLst>
+                    </p:cTn>
+                  </p:par>
+                  <p:par>
+                    <p:cTn id="18" fill="hold">
+                      <p:stCondLst>
+                        <p:cond delay="indefinite"/>
+                      </p:stCondLst>
+                      <p:childTnLst>
+                        <p:par>
+                          <p:cTn id="19" fill="hold">
+                            <p:stCondLst>
+                              <p:cond delay="0"/>
+                            </p:stCondLst>
+                            <p:childTnLst>
+                              <p:par>
+                                <p:cTn id="20" presetID="10" presetClass="entr" presetSubtype="0" fill="hold" grpId="0" nodeType="clickEffect">
+                                  <p:stCondLst>
+                                    <p:cond delay="0"/>
+                                  </p:stCondLst>
+                                  <p:childTnLst>
+                                    <p:set>
+                                      <p:cBhvr>
+                                        <p:cTn id="21" dur="1" fill="hold">
+                                          <p:stCondLst>
+                                            <p:cond delay="0"/>
+                                          </p:stCondLst>
+                                        </p:cTn>
+                                        <p:tgtEl>
+                                          <p:spTgt spid="3">
+                                            <p:txEl>
+                                              <p:pRg st="6" end="6"/>
+                                            </p:txEl>
+                                          </p:spTgt>
+                                        </p:tgtEl>
+                                        <p:attrNameLst>
+                                          <p:attrName>style.visibility</p:attrName>
+                                        </p:attrNameLst>
+                                      </p:cBhvr>
+                                      <p:to>
+                                        <p:strVal val="visible"/>
+                                      </p:to>
+                                    </p:set>
+                                    <p:animEffect transition="in" filter="fade">
+                                      <p:cBhvr>
+                                        <p:cTn id="22" dur="500"/>
+                                        <p:tgtEl>
+                                          <p:spTgt spid="3">
+                                            <p:txEl>
+                                              <p:pRg st="6" end="6"/>
+                                            </p:txEl>
+                                          </p:spTgt>
+                                        </p:tgtEl>
+                                      </p:cBhvr>
+                                    </p:animEffect>
+                                  </p:childTnLst>
+                                </p:cTn>
+                              </p:par>
+                            </p:childTnLst>
+                          </p:cTn>
+                        </p:par>
+                      </p:childTnLst>
+                    </p:cTn>
+                  </p:par>
+                </p:childTnLst>
+              </p:cTn>
+              <p:prevCondLst>
+                <p:cond evt="onPrev" delay="0">
+                  <p:tgtEl>
+                    <p:sldTgt/>
+                  </p:tgtEl>
+                </p:cond>
+              </p:prevCondLst>
+              <p:nextCondLst>
+                <p:cond evt="onNext" delay="0">
+                  <p:tgtEl>
+                    <p:sldTgt/>
+                  </p:tgtEl>
+                </p:cond>
+              </p:nextCondLst>
+            </p:seq>
+          </p:childTnLst>
+        </p:cTn>
+      </p:par>
+    </p:tnLst>
+    <p:bldLst>
+      <p:bldP spid="3" grpId="0" uiExpand="1" build="p"/>
+    </p:bldLst>
+  </p:timing>
+</p:sld>
+</file>
+
+<file path=ppt/slides/slide6.xml><?xml version="1.0" encoding="utf-8"?>
 <p:sld xmlns:a="http://schemas.openxmlformats.org/drawingml/2006/main" xmlns:r="http://schemas.openxmlformats.org/officeDocument/2006/relationships" xmlns:p="http://schemas.openxmlformats.org/presentationml/2006/main">
   <p:cSld>
     <p:spTree>
@@ -24834,120 +28149,6 @@
       </p:sp>
       <p:sp>
         <p:nvSpPr>
-          <p:cNvPr id="5" name="Rectangle: Rounded Corners 4">
-            <a:extLst>
-              <a:ext uri="{FF2B5EF4-FFF2-40B4-BE49-F238E27FC236}">
-                <a16:creationId xmlns:a16="http://schemas.microsoft.com/office/drawing/2014/main" id="{5FF8366A-08FC-4B62-F659-F8D275AAC597}"/>
-              </a:ext>
-            </a:extLst>
-          </p:cNvPr>
-          <p:cNvSpPr/>
-          <p:nvPr/>
-        </p:nvSpPr>
-        <p:spPr>
-          <a:xfrm>
-            <a:off x="1338470" y="3051644"/>
-            <a:ext cx="1550504" cy="662609"/>
-          </a:xfrm>
-          <a:prstGeom prst="roundRect">
-            <a:avLst/>
-          </a:prstGeom>
-        </p:spPr>
-        <p:style>
-          <a:lnRef idx="2">
-            <a:schemeClr val="accent1">
-              <a:shade val="15000"/>
-            </a:schemeClr>
-          </a:lnRef>
-          <a:fillRef idx="1">
-            <a:schemeClr val="accent1"/>
-          </a:fillRef>
-          <a:effectRef idx="0">
-            <a:schemeClr val="accent1"/>
-          </a:effectRef>
-          <a:fontRef idx="minor">
-            <a:schemeClr val="lt1"/>
-          </a:fontRef>
-        </p:style>
-        <p:txBody>
-          <a:bodyPr rtlCol="0" anchor="ctr"/>
-          <a:lstStyle/>
-          <a:p>
-            <a:pPr algn="ctr"/>
-            <a:r>
-              <a:rPr lang="en-US" dirty="0"/>
-              <a:t>Client</a:t>
-            </a:r>
-          </a:p>
-          <a:p>
-            <a:pPr algn="ctr"/>
-            <a:r>
-              <a:rPr lang="en-US" dirty="0"/>
-              <a:t>(nodejs)</a:t>
-            </a:r>
-            <a:endParaRPr lang="en-NL" dirty="0"/>
-          </a:p>
-        </p:txBody>
-      </p:sp>
-      <p:sp>
-        <p:nvSpPr>
-          <p:cNvPr id="6" name="Rectangle: Rounded Corners 5">
-            <a:extLst>
-              <a:ext uri="{FF2B5EF4-FFF2-40B4-BE49-F238E27FC236}">
-                <a16:creationId xmlns:a16="http://schemas.microsoft.com/office/drawing/2014/main" id="{CC10AFFF-DA9B-3E3C-6714-16FA905FE75B}"/>
-              </a:ext>
-            </a:extLst>
-          </p:cNvPr>
-          <p:cNvSpPr/>
-          <p:nvPr/>
-        </p:nvSpPr>
-        <p:spPr>
-          <a:xfrm>
-            <a:off x="1338470" y="4052184"/>
-            <a:ext cx="1550504" cy="662609"/>
-          </a:xfrm>
-          <a:prstGeom prst="roundRect">
-            <a:avLst/>
-          </a:prstGeom>
-        </p:spPr>
-        <p:style>
-          <a:lnRef idx="2">
-            <a:schemeClr val="accent1">
-              <a:shade val="15000"/>
-            </a:schemeClr>
-          </a:lnRef>
-          <a:fillRef idx="1">
-            <a:schemeClr val="accent1"/>
-          </a:fillRef>
-          <a:effectRef idx="0">
-            <a:schemeClr val="accent1"/>
-          </a:effectRef>
-          <a:fontRef idx="minor">
-            <a:schemeClr val="lt1"/>
-          </a:fontRef>
-        </p:style>
-        <p:txBody>
-          <a:bodyPr rtlCol="0" anchor="ctr"/>
-          <a:lstStyle/>
-          <a:p>
-            <a:pPr algn="ctr"/>
-            <a:r>
-              <a:rPr lang="en-US" dirty="0"/>
-              <a:t>Client</a:t>
-            </a:r>
-          </a:p>
-          <a:p>
-            <a:pPr algn="ctr"/>
-            <a:r>
-              <a:rPr lang="en-US" dirty="0"/>
-              <a:t>(Go)</a:t>
-            </a:r>
-            <a:endParaRPr lang="en-NL" dirty="0"/>
-          </a:p>
-        </p:txBody>
-      </p:sp>
-      <p:sp>
-        <p:nvSpPr>
           <p:cNvPr id="7" name="Rectangle: Rounded Corners 6">
             <a:extLst>
               <a:ext uri="{FF2B5EF4-FFF2-40B4-BE49-F238E27FC236}">
@@ -24960,7 +28161,7 @@
         </p:nvSpPr>
         <p:spPr>
           <a:xfrm>
-            <a:off x="1338470" y="5138864"/>
+            <a:off x="1358346" y="5112356"/>
             <a:ext cx="1550504" cy="662609"/>
           </a:xfrm>
           <a:prstGeom prst="roundRect">
@@ -25434,86 +28635,6 @@
       </p:sp>
       <p:sp>
         <p:nvSpPr>
-          <p:cNvPr id="15" name="Speech Bubble: Rectangle with Corners Rounded 14">
-            <a:extLst>
-              <a:ext uri="{FF2B5EF4-FFF2-40B4-BE49-F238E27FC236}">
-                <a16:creationId xmlns:a16="http://schemas.microsoft.com/office/drawing/2014/main" id="{05AB315C-7E24-E436-A427-145E05EB83D4}"/>
-              </a:ext>
-            </a:extLst>
-          </p:cNvPr>
-          <p:cNvSpPr/>
-          <p:nvPr/>
-        </p:nvSpPr>
-        <p:spPr>
-          <a:xfrm>
-            <a:off x="1636641" y="1367195"/>
-            <a:ext cx="1252331" cy="1701016"/>
-          </a:xfrm>
-          <a:prstGeom prst="wedgeRoundRectCallout">
-            <a:avLst/>
-          </a:prstGeom>
-        </p:spPr>
-        <p:style>
-          <a:lnRef idx="2">
-            <a:schemeClr val="accent6"/>
-          </a:lnRef>
-          <a:fillRef idx="1">
-            <a:schemeClr val="lt1"/>
-          </a:fillRef>
-          <a:effectRef idx="0">
-            <a:schemeClr val="accent6"/>
-          </a:effectRef>
-          <a:fontRef idx="minor">
-            <a:schemeClr val="dk1"/>
-          </a:fontRef>
-        </p:style>
-        <p:txBody>
-          <a:bodyPr rtlCol="0" anchor="ctr"/>
-          <a:lstStyle/>
-          <a:p>
-            <a:pPr algn="ctr"/>
-            <a:r>
-              <a:rPr lang="en-US" dirty="0"/>
-              <a:t>Back-end</a:t>
-            </a:r>
-          </a:p>
-          <a:p>
-            <a:pPr algn="ctr"/>
-            <a:r>
-              <a:rPr lang="en-US" dirty="0"/>
-              <a:t>API</a:t>
-            </a:r>
-            <a:endParaRPr lang="en-NL" dirty="0"/>
-          </a:p>
-        </p:txBody>
-      </p:sp>
-      <p:sp>
-        <p:nvSpPr>
-          <p:cNvPr id="16" name="Content Placeholder 15">
-            <a:extLst>
-              <a:ext uri="{FF2B5EF4-FFF2-40B4-BE49-F238E27FC236}">
-                <a16:creationId xmlns:a16="http://schemas.microsoft.com/office/drawing/2014/main" id="{4CAA5F59-292A-95B6-42BE-6490A52E781B}"/>
-              </a:ext>
-            </a:extLst>
-          </p:cNvPr>
-          <p:cNvSpPr>
-            <a:spLocks noGrp="1"/>
-          </p:cNvSpPr>
-          <p:nvPr>
-            <p:ph idx="1"/>
-          </p:nvPr>
-        </p:nvSpPr>
-        <p:spPr/>
-        <p:txBody>
-          <a:bodyPr/>
-          <a:lstStyle/>
-          <a:p>
-            <a:endParaRPr lang="en-NL" dirty="0"/>
-          </a:p>
-        </p:txBody>
-      </p:sp>
-      <p:sp>
-        <p:nvSpPr>
           <p:cNvPr id="3" name="Speech Bubble: Rectangle with Corners Rounded 2">
             <a:extLst>
               <a:ext uri="{FF2B5EF4-FFF2-40B4-BE49-F238E27FC236}">
@@ -25560,6 +28681,237 @@
           </a:p>
         </p:txBody>
       </p:sp>
+      <p:sp>
+        <p:nvSpPr>
+          <p:cNvPr id="13" name="Rectangle: Rounded Corners 12">
+            <a:extLst>
+              <a:ext uri="{FF2B5EF4-FFF2-40B4-BE49-F238E27FC236}">
+                <a16:creationId xmlns:a16="http://schemas.microsoft.com/office/drawing/2014/main" id="{FC59F9E8-B7AE-1E48-4210-88A331AC1AEB}"/>
+              </a:ext>
+            </a:extLst>
+          </p:cNvPr>
+          <p:cNvSpPr/>
+          <p:nvPr/>
+        </p:nvSpPr>
+        <p:spPr>
+          <a:xfrm>
+            <a:off x="9634330" y="3160643"/>
+            <a:ext cx="1013792" cy="1995592"/>
+          </a:xfrm>
+          <a:prstGeom prst="roundRect">
+            <a:avLst/>
+          </a:prstGeom>
+        </p:spPr>
+        <p:style>
+          <a:lnRef idx="2">
+            <a:schemeClr val="accent1">
+              <a:shade val="15000"/>
+            </a:schemeClr>
+          </a:lnRef>
+          <a:fillRef idx="1">
+            <a:schemeClr val="accent1"/>
+          </a:fillRef>
+          <a:effectRef idx="0">
+            <a:schemeClr val="accent1"/>
+          </a:effectRef>
+          <a:fontRef idx="minor">
+            <a:schemeClr val="lt1"/>
+          </a:fontRef>
+        </p:style>
+        <p:txBody>
+          <a:bodyPr rtlCol="0" anchor="ctr"/>
+          <a:lstStyle/>
+          <a:p>
+            <a:pPr algn="ctr"/>
+            <a:r>
+              <a:rPr lang="en-US" b="1" dirty="0">
+                <a:solidFill>
+                  <a:srgbClr val="FFFF00"/>
+                </a:solidFill>
+              </a:rPr>
+              <a:t>M code</a:t>
+            </a:r>
+            <a:endParaRPr lang="en-NL" b="1" dirty="0">
+              <a:solidFill>
+                <a:srgbClr val="FFFF00"/>
+              </a:solidFill>
+            </a:endParaRPr>
+          </a:p>
+        </p:txBody>
+      </p:sp>
+      <p:sp>
+        <p:nvSpPr>
+          <p:cNvPr id="20" name="Rectangle: Rounded Corners 19">
+            <a:extLst>
+              <a:ext uri="{FF2B5EF4-FFF2-40B4-BE49-F238E27FC236}">
+                <a16:creationId xmlns:a16="http://schemas.microsoft.com/office/drawing/2014/main" id="{F8A44FCD-D24B-A718-3676-45AFDA510AE7}"/>
+              </a:ext>
+            </a:extLst>
+          </p:cNvPr>
+          <p:cNvSpPr/>
+          <p:nvPr/>
+        </p:nvSpPr>
+        <p:spPr>
+          <a:xfrm>
+            <a:off x="1358346" y="3011887"/>
+            <a:ext cx="1550504" cy="662609"/>
+          </a:xfrm>
+          <a:prstGeom prst="roundRect">
+            <a:avLst/>
+          </a:prstGeom>
+        </p:spPr>
+        <p:style>
+          <a:lnRef idx="2">
+            <a:schemeClr val="accent1">
+              <a:shade val="15000"/>
+            </a:schemeClr>
+          </a:lnRef>
+          <a:fillRef idx="1">
+            <a:schemeClr val="accent1"/>
+          </a:fillRef>
+          <a:effectRef idx="0">
+            <a:schemeClr val="accent1"/>
+          </a:effectRef>
+          <a:fontRef idx="minor">
+            <a:schemeClr val="lt1"/>
+          </a:fontRef>
+        </p:style>
+        <p:txBody>
+          <a:bodyPr rtlCol="0" anchor="ctr"/>
+          <a:lstStyle/>
+          <a:p>
+            <a:pPr algn="ctr"/>
+            <a:r>
+              <a:rPr lang="en-US" dirty="0"/>
+              <a:t>Client</a:t>
+            </a:r>
+          </a:p>
+          <a:p>
+            <a:pPr algn="ctr"/>
+            <a:r>
+              <a:rPr lang="en-US" dirty="0"/>
+              <a:t>(nodejs)</a:t>
+            </a:r>
+            <a:endParaRPr lang="en-NL" dirty="0"/>
+          </a:p>
+        </p:txBody>
+      </p:sp>
+      <p:sp>
+        <p:nvSpPr>
+          <p:cNvPr id="21" name="Rectangle: Rounded Corners 20">
+            <a:extLst>
+              <a:ext uri="{FF2B5EF4-FFF2-40B4-BE49-F238E27FC236}">
+                <a16:creationId xmlns:a16="http://schemas.microsoft.com/office/drawing/2014/main" id="{6A7FC178-18C2-C49F-A789-6C4B560B10D6}"/>
+              </a:ext>
+            </a:extLst>
+          </p:cNvPr>
+          <p:cNvSpPr/>
+          <p:nvPr/>
+        </p:nvSpPr>
+        <p:spPr>
+          <a:xfrm>
+            <a:off x="1338465" y="4029654"/>
+            <a:ext cx="1550504" cy="662609"/>
+          </a:xfrm>
+          <a:prstGeom prst="roundRect">
+            <a:avLst/>
+          </a:prstGeom>
+        </p:spPr>
+        <p:style>
+          <a:lnRef idx="2">
+            <a:schemeClr val="accent1">
+              <a:shade val="15000"/>
+            </a:schemeClr>
+          </a:lnRef>
+          <a:fillRef idx="1">
+            <a:schemeClr val="accent1"/>
+          </a:fillRef>
+          <a:effectRef idx="0">
+            <a:schemeClr val="accent1"/>
+          </a:effectRef>
+          <a:fontRef idx="minor">
+            <a:schemeClr val="lt1"/>
+          </a:fontRef>
+        </p:style>
+        <p:txBody>
+          <a:bodyPr rtlCol="0" anchor="ctr"/>
+          <a:lstStyle/>
+          <a:p>
+            <a:pPr algn="ctr"/>
+            <a:r>
+              <a:rPr lang="en-US" dirty="0"/>
+              <a:t>Client</a:t>
+            </a:r>
+          </a:p>
+          <a:p>
+            <a:pPr algn="ctr"/>
+            <a:r>
+              <a:rPr lang="en-US" dirty="0"/>
+              <a:t>(Go)</a:t>
+            </a:r>
+            <a:endParaRPr lang="en-NL" dirty="0"/>
+          </a:p>
+        </p:txBody>
+      </p:sp>
+      <p:sp>
+        <p:nvSpPr>
+          <p:cNvPr id="15" name="Speech Bubble: Rectangle with Corners Rounded 14">
+            <a:extLst>
+              <a:ext uri="{FF2B5EF4-FFF2-40B4-BE49-F238E27FC236}">
+                <a16:creationId xmlns:a16="http://schemas.microsoft.com/office/drawing/2014/main" id="{05AB315C-7E24-E436-A427-145E05EB83D4}"/>
+              </a:ext>
+            </a:extLst>
+          </p:cNvPr>
+          <p:cNvSpPr/>
+          <p:nvPr/>
+        </p:nvSpPr>
+        <p:spPr>
+          <a:xfrm>
+            <a:off x="4411832" y="399884"/>
+            <a:ext cx="1252331" cy="1701016"/>
+          </a:xfrm>
+          <a:prstGeom prst="wedgeRoundRectCallout">
+            <a:avLst>
+              <a:gd name="adj1" fmla="val -208408"/>
+              <a:gd name="adj2" fmla="val 105134"/>
+              <a:gd name="adj3" fmla="val 16667"/>
+            </a:avLst>
+          </a:prstGeom>
+        </p:spPr>
+        <p:style>
+          <a:lnRef idx="2">
+            <a:schemeClr val="accent6"/>
+          </a:lnRef>
+          <a:fillRef idx="1">
+            <a:schemeClr val="lt1"/>
+          </a:fillRef>
+          <a:effectRef idx="0">
+            <a:schemeClr val="accent6"/>
+          </a:effectRef>
+          <a:fontRef idx="minor">
+            <a:schemeClr val="dk1"/>
+          </a:fontRef>
+        </p:style>
+        <p:txBody>
+          <a:bodyPr rtlCol="0" anchor="ctr"/>
+          <a:lstStyle/>
+          <a:p>
+            <a:pPr algn="ctr"/>
+            <a:r>
+              <a:rPr lang="en-US" dirty="0"/>
+              <a:t>Back-end</a:t>
+            </a:r>
+          </a:p>
+          <a:p>
+            <a:pPr algn="ctr"/>
+            <a:r>
+              <a:rPr lang="en-US" dirty="0"/>
+              <a:t>API</a:t>
+            </a:r>
+            <a:endParaRPr lang="en-NL" dirty="0"/>
+          </a:p>
+        </p:txBody>
+      </p:sp>
     </p:spTree>
     <p:extLst>
       <p:ext uri="{BB962C8B-B14F-4D97-AF65-F5344CB8AC3E}">
@@ -25570,6 +28922,1679 @@
   <p:clrMapOvr>
     <a:masterClrMapping/>
   </p:clrMapOvr>
+  <p:timing>
+    <p:tnLst>
+      <p:par>
+        <p:cTn id="1" dur="indefinite" restart="never" nodeType="tmRoot">
+          <p:childTnLst>
+            <p:seq concurrent="1" nextAc="seek">
+              <p:cTn id="2" dur="indefinite" nodeType="mainSeq">
+                <p:childTnLst>
+                  <p:par>
+                    <p:cTn id="3" fill="hold">
+                      <p:stCondLst>
+                        <p:cond delay="indefinite"/>
+                      </p:stCondLst>
+                      <p:childTnLst>
+                        <p:par>
+                          <p:cTn id="4" fill="hold">
+                            <p:stCondLst>
+                              <p:cond delay="0"/>
+                            </p:stCondLst>
+                            <p:childTnLst>
+                              <p:par>
+                                <p:cTn id="5" presetID="10" presetClass="entr" presetSubtype="0" fill="hold" grpId="0" nodeType="clickEffect">
+                                  <p:stCondLst>
+                                    <p:cond delay="0"/>
+                                  </p:stCondLst>
+                                  <p:childTnLst>
+                                    <p:set>
+                                      <p:cBhvr>
+                                        <p:cTn id="6" dur="1" fill="hold">
+                                          <p:stCondLst>
+                                            <p:cond delay="0"/>
+                                          </p:stCondLst>
+                                        </p:cTn>
+                                        <p:tgtEl>
+                                          <p:spTgt spid="17"/>
+                                        </p:tgtEl>
+                                        <p:attrNameLst>
+                                          <p:attrName>style.visibility</p:attrName>
+                                        </p:attrNameLst>
+                                      </p:cBhvr>
+                                      <p:to>
+                                        <p:strVal val="visible"/>
+                                      </p:to>
+                                    </p:set>
+                                    <p:animEffect transition="in" filter="fade">
+                                      <p:cBhvr>
+                                        <p:cTn id="7" dur="500"/>
+                                        <p:tgtEl>
+                                          <p:spTgt spid="17"/>
+                                        </p:tgtEl>
+                                      </p:cBhvr>
+                                    </p:animEffect>
+                                  </p:childTnLst>
+                                </p:cTn>
+                              </p:par>
+                              <p:par>
+                                <p:cTn id="8" presetID="10" presetClass="entr" presetSubtype="0" fill="hold" grpId="0" nodeType="withEffect">
+                                  <p:stCondLst>
+                                    <p:cond delay="0"/>
+                                  </p:stCondLst>
+                                  <p:childTnLst>
+                                    <p:set>
+                                      <p:cBhvr>
+                                        <p:cTn id="9" dur="1" fill="hold">
+                                          <p:stCondLst>
+                                            <p:cond delay="0"/>
+                                          </p:stCondLst>
+                                        </p:cTn>
+                                        <p:tgtEl>
+                                          <p:spTgt spid="12"/>
+                                        </p:tgtEl>
+                                        <p:attrNameLst>
+                                          <p:attrName>style.visibility</p:attrName>
+                                        </p:attrNameLst>
+                                      </p:cBhvr>
+                                      <p:to>
+                                        <p:strVal val="visible"/>
+                                      </p:to>
+                                    </p:set>
+                                    <p:animEffect transition="in" filter="fade">
+                                      <p:cBhvr>
+                                        <p:cTn id="10" dur="500"/>
+                                        <p:tgtEl>
+                                          <p:spTgt spid="12"/>
+                                        </p:tgtEl>
+                                      </p:cBhvr>
+                                    </p:animEffect>
+                                  </p:childTnLst>
+                                </p:cTn>
+                              </p:par>
+                              <p:par>
+                                <p:cTn id="11" presetID="10" presetClass="entr" presetSubtype="0" fill="hold" grpId="0" nodeType="withEffect">
+                                  <p:stCondLst>
+                                    <p:cond delay="0"/>
+                                  </p:stCondLst>
+                                  <p:childTnLst>
+                                    <p:set>
+                                      <p:cBhvr>
+                                        <p:cTn id="12" dur="1" fill="hold">
+                                          <p:stCondLst>
+                                            <p:cond delay="0"/>
+                                          </p:stCondLst>
+                                        </p:cTn>
+                                        <p:tgtEl>
+                                          <p:spTgt spid="13"/>
+                                        </p:tgtEl>
+                                        <p:attrNameLst>
+                                          <p:attrName>style.visibility</p:attrName>
+                                        </p:attrNameLst>
+                                      </p:cBhvr>
+                                      <p:to>
+                                        <p:strVal val="visible"/>
+                                      </p:to>
+                                    </p:set>
+                                    <p:animEffect transition="in" filter="fade">
+                                      <p:cBhvr>
+                                        <p:cTn id="13" dur="500"/>
+                                        <p:tgtEl>
+                                          <p:spTgt spid="13"/>
+                                        </p:tgtEl>
+                                      </p:cBhvr>
+                                    </p:animEffect>
+                                  </p:childTnLst>
+                                </p:cTn>
+                              </p:par>
+                              <p:par>
+                                <p:cTn id="14" presetID="10" presetClass="entr" presetSubtype="0" fill="hold" grpId="0" nodeType="withEffect">
+                                  <p:stCondLst>
+                                    <p:cond delay="0"/>
+                                  </p:stCondLst>
+                                  <p:childTnLst>
+                                    <p:set>
+                                      <p:cBhvr>
+                                        <p:cTn id="15" dur="1" fill="hold">
+                                          <p:stCondLst>
+                                            <p:cond delay="0"/>
+                                          </p:stCondLst>
+                                        </p:cTn>
+                                        <p:tgtEl>
+                                          <p:spTgt spid="8"/>
+                                        </p:tgtEl>
+                                        <p:attrNameLst>
+                                          <p:attrName>style.visibility</p:attrName>
+                                        </p:attrNameLst>
+                                      </p:cBhvr>
+                                      <p:to>
+                                        <p:strVal val="visible"/>
+                                      </p:to>
+                                    </p:set>
+                                    <p:animEffect transition="in" filter="fade">
+                                      <p:cBhvr>
+                                        <p:cTn id="16" dur="500"/>
+                                        <p:tgtEl>
+                                          <p:spTgt spid="8"/>
+                                        </p:tgtEl>
+                                      </p:cBhvr>
+                                    </p:animEffect>
+                                  </p:childTnLst>
+                                </p:cTn>
+                              </p:par>
+                            </p:childTnLst>
+                          </p:cTn>
+                        </p:par>
+                      </p:childTnLst>
+                    </p:cTn>
+                  </p:par>
+                  <p:par>
+                    <p:cTn id="17" fill="hold">
+                      <p:stCondLst>
+                        <p:cond delay="indefinite"/>
+                      </p:stCondLst>
+                      <p:childTnLst>
+                        <p:par>
+                          <p:cTn id="18" fill="hold">
+                            <p:stCondLst>
+                              <p:cond delay="0"/>
+                            </p:stCondLst>
+                            <p:childTnLst>
+                              <p:par>
+                                <p:cTn id="19" presetID="10" presetClass="entr" presetSubtype="0" fill="hold" grpId="0" nodeType="clickEffect">
+                                  <p:stCondLst>
+                                    <p:cond delay="0"/>
+                                  </p:stCondLst>
+                                  <p:childTnLst>
+                                    <p:set>
+                                      <p:cBhvr>
+                                        <p:cTn id="20" dur="1" fill="hold">
+                                          <p:stCondLst>
+                                            <p:cond delay="0"/>
+                                          </p:stCondLst>
+                                        </p:cTn>
+                                        <p:tgtEl>
+                                          <p:spTgt spid="14"/>
+                                        </p:tgtEl>
+                                        <p:attrNameLst>
+                                          <p:attrName>style.visibility</p:attrName>
+                                        </p:attrNameLst>
+                                      </p:cBhvr>
+                                      <p:to>
+                                        <p:strVal val="visible"/>
+                                      </p:to>
+                                    </p:set>
+                                    <p:animEffect transition="in" filter="fade">
+                                      <p:cBhvr>
+                                        <p:cTn id="21" dur="500"/>
+                                        <p:tgtEl>
+                                          <p:spTgt spid="14"/>
+                                        </p:tgtEl>
+                                      </p:cBhvr>
+                                    </p:animEffect>
+                                  </p:childTnLst>
+                                </p:cTn>
+                              </p:par>
+                            </p:childTnLst>
+                          </p:cTn>
+                        </p:par>
+                      </p:childTnLst>
+                    </p:cTn>
+                  </p:par>
+                  <p:par>
+                    <p:cTn id="22" fill="hold">
+                      <p:stCondLst>
+                        <p:cond delay="indefinite"/>
+                      </p:stCondLst>
+                      <p:childTnLst>
+                        <p:par>
+                          <p:cTn id="23" fill="hold">
+                            <p:stCondLst>
+                              <p:cond delay="0"/>
+                            </p:stCondLst>
+                            <p:childTnLst>
+                              <p:par>
+                                <p:cTn id="24" presetID="10" presetClass="entr" presetSubtype="0" fill="hold" grpId="0" nodeType="clickEffect">
+                                  <p:stCondLst>
+                                    <p:cond delay="0"/>
+                                  </p:stCondLst>
+                                  <p:childTnLst>
+                                    <p:set>
+                                      <p:cBhvr>
+                                        <p:cTn id="25" dur="1" fill="hold">
+                                          <p:stCondLst>
+                                            <p:cond delay="0"/>
+                                          </p:stCondLst>
+                                        </p:cTn>
+                                        <p:tgtEl>
+                                          <p:spTgt spid="3"/>
+                                        </p:tgtEl>
+                                        <p:attrNameLst>
+                                          <p:attrName>style.visibility</p:attrName>
+                                        </p:attrNameLst>
+                                      </p:cBhvr>
+                                      <p:to>
+                                        <p:strVal val="visible"/>
+                                      </p:to>
+                                    </p:set>
+                                    <p:animEffect transition="in" filter="fade">
+                                      <p:cBhvr>
+                                        <p:cTn id="26" dur="500"/>
+                                        <p:tgtEl>
+                                          <p:spTgt spid="3"/>
+                                        </p:tgtEl>
+                                      </p:cBhvr>
+                                    </p:animEffect>
+                                  </p:childTnLst>
+                                </p:cTn>
+                              </p:par>
+                            </p:childTnLst>
+                          </p:cTn>
+                        </p:par>
+                      </p:childTnLst>
+                    </p:cTn>
+                  </p:par>
+                  <p:par>
+                    <p:cTn id="27" fill="hold">
+                      <p:stCondLst>
+                        <p:cond delay="indefinite"/>
+                      </p:stCondLst>
+                      <p:childTnLst>
+                        <p:par>
+                          <p:cTn id="28" fill="hold">
+                            <p:stCondLst>
+                              <p:cond delay="0"/>
+                            </p:stCondLst>
+                            <p:childTnLst>
+                              <p:par>
+                                <p:cTn id="29" presetID="10" presetClass="entr" presetSubtype="0" fill="hold" grpId="0" nodeType="clickEffect">
+                                  <p:stCondLst>
+                                    <p:cond delay="0"/>
+                                  </p:stCondLst>
+                                  <p:childTnLst>
+                                    <p:set>
+                                      <p:cBhvr>
+                                        <p:cTn id="30" dur="1" fill="hold">
+                                          <p:stCondLst>
+                                            <p:cond delay="0"/>
+                                          </p:stCondLst>
+                                        </p:cTn>
+                                        <p:tgtEl>
+                                          <p:spTgt spid="20"/>
+                                        </p:tgtEl>
+                                        <p:attrNameLst>
+                                          <p:attrName>style.visibility</p:attrName>
+                                        </p:attrNameLst>
+                                      </p:cBhvr>
+                                      <p:to>
+                                        <p:strVal val="visible"/>
+                                      </p:to>
+                                    </p:set>
+                                    <p:animEffect transition="in" filter="fade">
+                                      <p:cBhvr>
+                                        <p:cTn id="31" dur="500"/>
+                                        <p:tgtEl>
+                                          <p:spTgt spid="20"/>
+                                        </p:tgtEl>
+                                      </p:cBhvr>
+                                    </p:animEffect>
+                                  </p:childTnLst>
+                                </p:cTn>
+                              </p:par>
+                              <p:par>
+                                <p:cTn id="32" presetID="10" presetClass="entr" presetSubtype="0" fill="hold" grpId="0" nodeType="withEffect">
+                                  <p:stCondLst>
+                                    <p:cond delay="0"/>
+                                  </p:stCondLst>
+                                  <p:childTnLst>
+                                    <p:set>
+                                      <p:cBhvr>
+                                        <p:cTn id="33" dur="1" fill="hold">
+                                          <p:stCondLst>
+                                            <p:cond delay="0"/>
+                                          </p:stCondLst>
+                                        </p:cTn>
+                                        <p:tgtEl>
+                                          <p:spTgt spid="21"/>
+                                        </p:tgtEl>
+                                        <p:attrNameLst>
+                                          <p:attrName>style.visibility</p:attrName>
+                                        </p:attrNameLst>
+                                      </p:cBhvr>
+                                      <p:to>
+                                        <p:strVal val="visible"/>
+                                      </p:to>
+                                    </p:set>
+                                    <p:animEffect transition="in" filter="fade">
+                                      <p:cBhvr>
+                                        <p:cTn id="34" dur="500"/>
+                                        <p:tgtEl>
+                                          <p:spTgt spid="21"/>
+                                        </p:tgtEl>
+                                      </p:cBhvr>
+                                    </p:animEffect>
+                                  </p:childTnLst>
+                                </p:cTn>
+                              </p:par>
+                              <p:par>
+                                <p:cTn id="35" presetID="10" presetClass="entr" presetSubtype="0" fill="hold" grpId="0" nodeType="withEffect">
+                                  <p:stCondLst>
+                                    <p:cond delay="0"/>
+                                  </p:stCondLst>
+                                  <p:childTnLst>
+                                    <p:set>
+                                      <p:cBhvr>
+                                        <p:cTn id="36" dur="1" fill="hold">
+                                          <p:stCondLst>
+                                            <p:cond delay="0"/>
+                                          </p:stCondLst>
+                                        </p:cTn>
+                                        <p:tgtEl>
+                                          <p:spTgt spid="7"/>
+                                        </p:tgtEl>
+                                        <p:attrNameLst>
+                                          <p:attrName>style.visibility</p:attrName>
+                                        </p:attrNameLst>
+                                      </p:cBhvr>
+                                      <p:to>
+                                        <p:strVal val="visible"/>
+                                      </p:to>
+                                    </p:set>
+                                    <p:animEffect transition="in" filter="fade">
+                                      <p:cBhvr>
+                                        <p:cTn id="37" dur="500"/>
+                                        <p:tgtEl>
+                                          <p:spTgt spid="7"/>
+                                        </p:tgtEl>
+                                      </p:cBhvr>
+                                    </p:animEffect>
+                                  </p:childTnLst>
+                                </p:cTn>
+                              </p:par>
+                            </p:childTnLst>
+                          </p:cTn>
+                        </p:par>
+                      </p:childTnLst>
+                    </p:cTn>
+                  </p:par>
+                  <p:par>
+                    <p:cTn id="38" fill="hold">
+                      <p:stCondLst>
+                        <p:cond delay="indefinite"/>
+                      </p:stCondLst>
+                      <p:childTnLst>
+                        <p:par>
+                          <p:cTn id="39" fill="hold">
+                            <p:stCondLst>
+                              <p:cond delay="0"/>
+                            </p:stCondLst>
+                            <p:childTnLst>
+                              <p:par>
+                                <p:cTn id="40" presetID="10" presetClass="entr" presetSubtype="0" fill="hold" grpId="0" nodeType="clickEffect">
+                                  <p:stCondLst>
+                                    <p:cond delay="0"/>
+                                  </p:stCondLst>
+                                  <p:childTnLst>
+                                    <p:set>
+                                      <p:cBhvr>
+                                        <p:cTn id="41" dur="1" fill="hold">
+                                          <p:stCondLst>
+                                            <p:cond delay="0"/>
+                                          </p:stCondLst>
+                                        </p:cTn>
+                                        <p:tgtEl>
+                                          <p:spTgt spid="15"/>
+                                        </p:tgtEl>
+                                        <p:attrNameLst>
+                                          <p:attrName>style.visibility</p:attrName>
+                                        </p:attrNameLst>
+                                      </p:cBhvr>
+                                      <p:to>
+                                        <p:strVal val="visible"/>
+                                      </p:to>
+                                    </p:set>
+                                    <p:animEffect transition="in" filter="fade">
+                                      <p:cBhvr>
+                                        <p:cTn id="42" dur="500"/>
+                                        <p:tgtEl>
+                                          <p:spTgt spid="15"/>
+                                        </p:tgtEl>
+                                      </p:cBhvr>
+                                    </p:animEffect>
+                                  </p:childTnLst>
+                                </p:cTn>
+                              </p:par>
+                            </p:childTnLst>
+                          </p:cTn>
+                        </p:par>
+                      </p:childTnLst>
+                    </p:cTn>
+                  </p:par>
+                  <p:par>
+                    <p:cTn id="43" fill="hold">
+                      <p:stCondLst>
+                        <p:cond delay="indefinite"/>
+                      </p:stCondLst>
+                      <p:childTnLst>
+                        <p:par>
+                          <p:cTn id="44" fill="hold">
+                            <p:stCondLst>
+                              <p:cond delay="0"/>
+                            </p:stCondLst>
+                            <p:childTnLst>
+                              <p:par>
+                                <p:cTn id="45" presetID="10" presetClass="entr" presetSubtype="0" fill="hold" grpId="0" nodeType="clickEffect">
+                                  <p:stCondLst>
+                                    <p:cond delay="0"/>
+                                  </p:stCondLst>
+                                  <p:childTnLst>
+                                    <p:set>
+                                      <p:cBhvr>
+                                        <p:cTn id="46" dur="1" fill="hold">
+                                          <p:stCondLst>
+                                            <p:cond delay="0"/>
+                                          </p:stCondLst>
+                                        </p:cTn>
+                                        <p:tgtEl>
+                                          <p:spTgt spid="9"/>
+                                        </p:tgtEl>
+                                        <p:attrNameLst>
+                                          <p:attrName>style.visibility</p:attrName>
+                                        </p:attrNameLst>
+                                      </p:cBhvr>
+                                      <p:to>
+                                        <p:strVal val="visible"/>
+                                      </p:to>
+                                    </p:set>
+                                    <p:animEffect transition="in" filter="fade">
+                                      <p:cBhvr>
+                                        <p:cTn id="47" dur="500"/>
+                                        <p:tgtEl>
+                                          <p:spTgt spid="9"/>
+                                        </p:tgtEl>
+                                      </p:cBhvr>
+                                    </p:animEffect>
+                                  </p:childTnLst>
+                                </p:cTn>
+                              </p:par>
+                              <p:par>
+                                <p:cTn id="48" presetID="10" presetClass="entr" presetSubtype="0" fill="hold" grpId="0" nodeType="withEffect">
+                                  <p:stCondLst>
+                                    <p:cond delay="0"/>
+                                  </p:stCondLst>
+                                  <p:childTnLst>
+                                    <p:set>
+                                      <p:cBhvr>
+                                        <p:cTn id="49" dur="1" fill="hold">
+                                          <p:stCondLst>
+                                            <p:cond delay="0"/>
+                                          </p:stCondLst>
+                                        </p:cTn>
+                                        <p:tgtEl>
+                                          <p:spTgt spid="10"/>
+                                        </p:tgtEl>
+                                        <p:attrNameLst>
+                                          <p:attrName>style.visibility</p:attrName>
+                                        </p:attrNameLst>
+                                      </p:cBhvr>
+                                      <p:to>
+                                        <p:strVal val="visible"/>
+                                      </p:to>
+                                    </p:set>
+                                    <p:animEffect transition="in" filter="fade">
+                                      <p:cBhvr>
+                                        <p:cTn id="50" dur="500"/>
+                                        <p:tgtEl>
+                                          <p:spTgt spid="10"/>
+                                        </p:tgtEl>
+                                      </p:cBhvr>
+                                    </p:animEffect>
+                                  </p:childTnLst>
+                                </p:cTn>
+                              </p:par>
+                              <p:par>
+                                <p:cTn id="51" presetID="10" presetClass="entr" presetSubtype="0" fill="hold" grpId="0" nodeType="withEffect">
+                                  <p:stCondLst>
+                                    <p:cond delay="0"/>
+                                  </p:stCondLst>
+                                  <p:childTnLst>
+                                    <p:set>
+                                      <p:cBhvr>
+                                        <p:cTn id="52" dur="1" fill="hold">
+                                          <p:stCondLst>
+                                            <p:cond delay="0"/>
+                                          </p:stCondLst>
+                                        </p:cTn>
+                                        <p:tgtEl>
+                                          <p:spTgt spid="11"/>
+                                        </p:tgtEl>
+                                        <p:attrNameLst>
+                                          <p:attrName>style.visibility</p:attrName>
+                                        </p:attrNameLst>
+                                      </p:cBhvr>
+                                      <p:to>
+                                        <p:strVal val="visible"/>
+                                      </p:to>
+                                    </p:set>
+                                    <p:animEffect transition="in" filter="fade">
+                                      <p:cBhvr>
+                                        <p:cTn id="53" dur="500"/>
+                                        <p:tgtEl>
+                                          <p:spTgt spid="11"/>
+                                        </p:tgtEl>
+                                      </p:cBhvr>
+                                    </p:animEffect>
+                                  </p:childTnLst>
+                                </p:cTn>
+                              </p:par>
+                            </p:childTnLst>
+                          </p:cTn>
+                        </p:par>
+                      </p:childTnLst>
+                    </p:cTn>
+                  </p:par>
+                </p:childTnLst>
+              </p:cTn>
+              <p:prevCondLst>
+                <p:cond evt="onPrev" delay="0">
+                  <p:tgtEl>
+                    <p:sldTgt/>
+                  </p:tgtEl>
+                </p:cond>
+              </p:prevCondLst>
+              <p:nextCondLst>
+                <p:cond evt="onNext" delay="0">
+                  <p:tgtEl>
+                    <p:sldTgt/>
+                  </p:tgtEl>
+                </p:cond>
+              </p:nextCondLst>
+            </p:seq>
+          </p:childTnLst>
+        </p:cTn>
+      </p:par>
+    </p:tnLst>
+    <p:bldLst>
+      <p:bldP spid="7" grpId="0" animBg="1"/>
+      <p:bldP spid="8" grpId="0"/>
+      <p:bldP spid="9" grpId="0" animBg="1"/>
+      <p:bldP spid="10" grpId="0" animBg="1"/>
+      <p:bldP spid="11" grpId="0" animBg="1"/>
+      <p:bldP spid="12" grpId="0" animBg="1"/>
+      <p:bldP spid="17" grpId="0"/>
+      <p:bldP spid="14" grpId="0" animBg="1"/>
+      <p:bldP spid="3" grpId="0" animBg="1"/>
+      <p:bldP spid="13" grpId="0" animBg="1"/>
+      <p:bldP spid="20" grpId="0" animBg="1"/>
+      <p:bldP spid="21" grpId="0" animBg="1"/>
+      <p:bldP spid="15" grpId="0" animBg="1"/>
+    </p:bldLst>
+  </p:timing>
+</p:sld>
+</file>
+
+<file path=ppt/slides/slide7.xml><?xml version="1.0" encoding="utf-8"?>
+<p:sld xmlns:a="http://schemas.openxmlformats.org/drawingml/2006/main" xmlns:r="http://schemas.openxmlformats.org/officeDocument/2006/relationships" xmlns:p="http://schemas.openxmlformats.org/presentationml/2006/main">
+  <p:cSld>
+    <p:bg>
+      <p:bgPr>
+        <a:solidFill>
+          <a:schemeClr val="bg1"/>
+        </a:solidFill>
+        <a:effectLst/>
+      </p:bgPr>
+    </p:bg>
+    <p:spTree>
+      <p:nvGrpSpPr>
+        <p:cNvPr id="1" name="">
+          <a:extLst>
+            <a:ext uri="{FF2B5EF4-FFF2-40B4-BE49-F238E27FC236}">
+              <a16:creationId xmlns:a16="http://schemas.microsoft.com/office/drawing/2014/main" id="{4B51CB98-4580-8873-E0DA-866BC69147AC}"/>
+            </a:ext>
+          </a:extLst>
+        </p:cNvPr>
+        <p:cNvGrpSpPr/>
+        <p:nvPr/>
+      </p:nvGrpSpPr>
+      <p:grpSpPr>
+        <a:xfrm>
+          <a:off x="0" y="0"/>
+          <a:ext cx="0" cy="0"/>
+          <a:chOff x="0" y="0"/>
+          <a:chExt cx="0" cy="0"/>
+        </a:xfrm>
+      </p:grpSpPr>
+      <p:sp>
+        <p:nvSpPr>
+          <p:cNvPr id="2" name="Title 1">
+            <a:extLst>
+              <a:ext uri="{FF2B5EF4-FFF2-40B4-BE49-F238E27FC236}">
+                <a16:creationId xmlns:a16="http://schemas.microsoft.com/office/drawing/2014/main" id="{5F93E169-56FE-4A21-427D-DC0431FB1745}"/>
+              </a:ext>
+            </a:extLst>
+          </p:cNvPr>
+          <p:cNvSpPr>
+            <a:spLocks noGrp="1"/>
+          </p:cNvSpPr>
+          <p:nvPr>
+            <p:ph type="title"/>
+          </p:nvPr>
+        </p:nvSpPr>
+        <p:spPr>
+          <a:xfrm>
+            <a:off x="1952481" y="800783"/>
+            <a:ext cx="8278891" cy="1323867"/>
+          </a:xfrm>
+        </p:spPr>
+        <p:txBody>
+          <a:bodyPr anchor="t" anchorCtr="0">
+            <a:normAutofit/>
+          </a:bodyPr>
+          <a:lstStyle/>
+          <a:p>
+            <a:r>
+              <a:rPr lang="en-US" dirty="0"/>
+              <a:t>Up and running in no time</a:t>
+            </a:r>
+            <a:endParaRPr lang="en-NL" dirty="0"/>
+          </a:p>
+        </p:txBody>
+      </p:sp>
+      <p:graphicFrame>
+        <p:nvGraphicFramePr>
+          <p:cNvPr id="11" name="Content Placeholder 2">
+            <a:extLst>
+              <a:ext uri="{FF2B5EF4-FFF2-40B4-BE49-F238E27FC236}">
+                <a16:creationId xmlns:a16="http://schemas.microsoft.com/office/drawing/2014/main" id="{1D5E5915-97B8-217F-6F2E-42601C6BF616}"/>
+              </a:ext>
+            </a:extLst>
+          </p:cNvPr>
+          <p:cNvGraphicFramePr>
+            <a:graphicFrameLocks noGrp="1"/>
+          </p:cNvGraphicFramePr>
+          <p:nvPr>
+            <p:ph idx="1"/>
+            <p:extLst>
+              <p:ext uri="{D42A27DB-BD31-4B8C-83A1-F6EECF244321}">
+                <p14:modId xmlns:p14="http://schemas.microsoft.com/office/powerpoint/2010/main" val="3273523543"/>
+              </p:ext>
+              <p:ext uri="{E7BDC344-281C-4309-B0C6-D0EE65EED2A8}">
+                <p202:designPr xmlns:p202="http://schemas.microsoft.com/office/powerpoint/2020/02/main">
+                  <p202:designTagLst>
+                    <p202:designTag name="ARCH:1:CLS" val="InformationBlock"/>
+                    <p202:designTag name="ARCH:1:VSVAR" val="TitledTextBox"/>
+                  </p202:designTagLst>
+                </p202:designPr>
+              </p:ext>
+            </p:extLst>
+          </p:nvPr>
+        </p:nvGraphicFramePr>
+        <p:xfrm>
+          <a:off x="1952481" y="2495774"/>
+          <a:ext cx="8278892" cy="3273426"/>
+        </p:xfrm>
+        <a:graphic>
+          <a:graphicData uri="http://schemas.openxmlformats.org/drawingml/2006/diagram">
+            <dgm:relIds xmlns:dgm="http://schemas.openxmlformats.org/drawingml/2006/diagram" xmlns:r="http://schemas.openxmlformats.org/officeDocument/2006/relationships" r:dm="rId2" r:lo="rId3" r:qs="rId4" r:cs="rId5"/>
+          </a:graphicData>
+        </a:graphic>
+      </p:graphicFrame>
+    </p:spTree>
+    <p:extLst>
+      <p:ext uri="{BB962C8B-B14F-4D97-AF65-F5344CB8AC3E}">
+        <p14:creationId xmlns:p14="http://schemas.microsoft.com/office/powerpoint/2010/main" val="2532632543"/>
+      </p:ext>
+    </p:extLst>
+  </p:cSld>
+  <p:clrMapOvr>
+    <a:masterClrMapping/>
+  </p:clrMapOvr>
+  <p:timing>
+    <p:tnLst>
+      <p:par>
+        <p:cTn id="1" dur="indefinite" restart="never" nodeType="tmRoot">
+          <p:childTnLst>
+            <p:seq concurrent="1" nextAc="seek">
+              <p:cTn id="2" dur="indefinite" nodeType="mainSeq">
+                <p:childTnLst>
+                  <p:par>
+                    <p:cTn id="3" fill="hold">
+                      <p:stCondLst>
+                        <p:cond delay="indefinite"/>
+                      </p:stCondLst>
+                      <p:childTnLst>
+                        <p:par>
+                          <p:cTn id="4" fill="hold">
+                            <p:stCondLst>
+                              <p:cond delay="0"/>
+                            </p:stCondLst>
+                            <p:childTnLst>
+                              <p:par>
+                                <p:cTn id="5" presetID="10" presetClass="entr" presetSubtype="0" fill="hold" grpId="0" nodeType="clickEffect">
+                                  <p:stCondLst>
+                                    <p:cond delay="0"/>
+                                  </p:stCondLst>
+                                  <p:childTnLst>
+                                    <p:set>
+                                      <p:cBhvr>
+                                        <p:cTn id="6" dur="1" fill="hold">
+                                          <p:stCondLst>
+                                            <p:cond delay="0"/>
+                                          </p:stCondLst>
+                                        </p:cTn>
+                                        <p:tgtEl>
+                                          <p:spTgt spid="11">
+                                            <p:graphicEl>
+                                              <a:dgm id="{018F7438-E01D-44D7-ADD6-157BC62500E3}"/>
+                                            </p:graphicEl>
+                                          </p:spTgt>
+                                        </p:tgtEl>
+                                        <p:attrNameLst>
+                                          <p:attrName>style.visibility</p:attrName>
+                                        </p:attrNameLst>
+                                      </p:cBhvr>
+                                      <p:to>
+                                        <p:strVal val="visible"/>
+                                      </p:to>
+                                    </p:set>
+                                    <p:animEffect transition="in" filter="fade">
+                                      <p:cBhvr>
+                                        <p:cTn id="7" dur="500"/>
+                                        <p:tgtEl>
+                                          <p:spTgt spid="11">
+                                            <p:graphicEl>
+                                              <a:dgm id="{018F7438-E01D-44D7-ADD6-157BC62500E3}"/>
+                                            </p:graphicEl>
+                                          </p:spTgt>
+                                        </p:tgtEl>
+                                      </p:cBhvr>
+                                    </p:animEffect>
+                                  </p:childTnLst>
+                                </p:cTn>
+                              </p:par>
+                              <p:par>
+                                <p:cTn id="8" presetID="10" presetClass="entr" presetSubtype="0" fill="hold" grpId="0" nodeType="withEffect">
+                                  <p:stCondLst>
+                                    <p:cond delay="0"/>
+                                  </p:stCondLst>
+                                  <p:childTnLst>
+                                    <p:set>
+                                      <p:cBhvr>
+                                        <p:cTn id="9" dur="1" fill="hold">
+                                          <p:stCondLst>
+                                            <p:cond delay="0"/>
+                                          </p:stCondLst>
+                                        </p:cTn>
+                                        <p:tgtEl>
+                                          <p:spTgt spid="11">
+                                            <p:graphicEl>
+                                              <a:dgm id="{5C90C3CA-0AA3-4EBE-B50C-5D1938624D21}"/>
+                                            </p:graphicEl>
+                                          </p:spTgt>
+                                        </p:tgtEl>
+                                        <p:attrNameLst>
+                                          <p:attrName>style.visibility</p:attrName>
+                                        </p:attrNameLst>
+                                      </p:cBhvr>
+                                      <p:to>
+                                        <p:strVal val="visible"/>
+                                      </p:to>
+                                    </p:set>
+                                    <p:animEffect transition="in" filter="fade">
+                                      <p:cBhvr>
+                                        <p:cTn id="10" dur="500"/>
+                                        <p:tgtEl>
+                                          <p:spTgt spid="11">
+                                            <p:graphicEl>
+                                              <a:dgm id="{5C90C3CA-0AA3-4EBE-B50C-5D1938624D21}"/>
+                                            </p:graphicEl>
+                                          </p:spTgt>
+                                        </p:tgtEl>
+                                      </p:cBhvr>
+                                    </p:animEffect>
+                                  </p:childTnLst>
+                                </p:cTn>
+                              </p:par>
+                            </p:childTnLst>
+                          </p:cTn>
+                        </p:par>
+                      </p:childTnLst>
+                    </p:cTn>
+                  </p:par>
+                  <p:par>
+                    <p:cTn id="11" fill="hold">
+                      <p:stCondLst>
+                        <p:cond delay="indefinite"/>
+                      </p:stCondLst>
+                      <p:childTnLst>
+                        <p:par>
+                          <p:cTn id="12" fill="hold">
+                            <p:stCondLst>
+                              <p:cond delay="0"/>
+                            </p:stCondLst>
+                            <p:childTnLst>
+                              <p:par>
+                                <p:cTn id="13" presetID="10" presetClass="entr" presetSubtype="0" fill="hold" grpId="0" nodeType="clickEffect">
+                                  <p:stCondLst>
+                                    <p:cond delay="0"/>
+                                  </p:stCondLst>
+                                  <p:childTnLst>
+                                    <p:set>
+                                      <p:cBhvr>
+                                        <p:cTn id="14" dur="1" fill="hold">
+                                          <p:stCondLst>
+                                            <p:cond delay="0"/>
+                                          </p:stCondLst>
+                                        </p:cTn>
+                                        <p:tgtEl>
+                                          <p:spTgt spid="11">
+                                            <p:graphicEl>
+                                              <a:dgm id="{58CF0B87-5490-46B7-A456-64A277CB332C}"/>
+                                            </p:graphicEl>
+                                          </p:spTgt>
+                                        </p:tgtEl>
+                                        <p:attrNameLst>
+                                          <p:attrName>style.visibility</p:attrName>
+                                        </p:attrNameLst>
+                                      </p:cBhvr>
+                                      <p:to>
+                                        <p:strVal val="visible"/>
+                                      </p:to>
+                                    </p:set>
+                                    <p:animEffect transition="in" filter="fade">
+                                      <p:cBhvr>
+                                        <p:cTn id="15" dur="500"/>
+                                        <p:tgtEl>
+                                          <p:spTgt spid="11">
+                                            <p:graphicEl>
+                                              <a:dgm id="{58CF0B87-5490-46B7-A456-64A277CB332C}"/>
+                                            </p:graphicEl>
+                                          </p:spTgt>
+                                        </p:tgtEl>
+                                      </p:cBhvr>
+                                    </p:animEffect>
+                                  </p:childTnLst>
+                                </p:cTn>
+                              </p:par>
+                              <p:par>
+                                <p:cTn id="16" presetID="10" presetClass="entr" presetSubtype="0" fill="hold" grpId="0" nodeType="withEffect">
+                                  <p:stCondLst>
+                                    <p:cond delay="0"/>
+                                  </p:stCondLst>
+                                  <p:childTnLst>
+                                    <p:set>
+                                      <p:cBhvr>
+                                        <p:cTn id="17" dur="1" fill="hold">
+                                          <p:stCondLst>
+                                            <p:cond delay="0"/>
+                                          </p:stCondLst>
+                                        </p:cTn>
+                                        <p:tgtEl>
+                                          <p:spTgt spid="11">
+                                            <p:graphicEl>
+                                              <a:dgm id="{8BB355F9-6CC2-4480-9B7E-D892D65FD34C}"/>
+                                            </p:graphicEl>
+                                          </p:spTgt>
+                                        </p:tgtEl>
+                                        <p:attrNameLst>
+                                          <p:attrName>style.visibility</p:attrName>
+                                        </p:attrNameLst>
+                                      </p:cBhvr>
+                                      <p:to>
+                                        <p:strVal val="visible"/>
+                                      </p:to>
+                                    </p:set>
+                                    <p:animEffect transition="in" filter="fade">
+                                      <p:cBhvr>
+                                        <p:cTn id="18" dur="500"/>
+                                        <p:tgtEl>
+                                          <p:spTgt spid="11">
+                                            <p:graphicEl>
+                                              <a:dgm id="{8BB355F9-6CC2-4480-9B7E-D892D65FD34C}"/>
+                                            </p:graphicEl>
+                                          </p:spTgt>
+                                        </p:tgtEl>
+                                      </p:cBhvr>
+                                    </p:animEffect>
+                                  </p:childTnLst>
+                                </p:cTn>
+                              </p:par>
+                            </p:childTnLst>
+                          </p:cTn>
+                        </p:par>
+                      </p:childTnLst>
+                    </p:cTn>
+                  </p:par>
+                  <p:par>
+                    <p:cTn id="19" fill="hold">
+                      <p:stCondLst>
+                        <p:cond delay="indefinite"/>
+                      </p:stCondLst>
+                      <p:childTnLst>
+                        <p:par>
+                          <p:cTn id="20" fill="hold">
+                            <p:stCondLst>
+                              <p:cond delay="0"/>
+                            </p:stCondLst>
+                            <p:childTnLst>
+                              <p:par>
+                                <p:cTn id="21" presetID="10" presetClass="entr" presetSubtype="0" fill="hold" grpId="0" nodeType="clickEffect">
+                                  <p:stCondLst>
+                                    <p:cond delay="0"/>
+                                  </p:stCondLst>
+                                  <p:childTnLst>
+                                    <p:set>
+                                      <p:cBhvr>
+                                        <p:cTn id="22" dur="1" fill="hold">
+                                          <p:stCondLst>
+                                            <p:cond delay="0"/>
+                                          </p:stCondLst>
+                                        </p:cTn>
+                                        <p:tgtEl>
+                                          <p:spTgt spid="11">
+                                            <p:graphicEl>
+                                              <a:dgm id="{E38D88DE-6630-449F-B815-64F25EB69547}"/>
+                                            </p:graphicEl>
+                                          </p:spTgt>
+                                        </p:tgtEl>
+                                        <p:attrNameLst>
+                                          <p:attrName>style.visibility</p:attrName>
+                                        </p:attrNameLst>
+                                      </p:cBhvr>
+                                      <p:to>
+                                        <p:strVal val="visible"/>
+                                      </p:to>
+                                    </p:set>
+                                    <p:animEffect transition="in" filter="fade">
+                                      <p:cBhvr>
+                                        <p:cTn id="23" dur="500"/>
+                                        <p:tgtEl>
+                                          <p:spTgt spid="11">
+                                            <p:graphicEl>
+                                              <a:dgm id="{E38D88DE-6630-449F-B815-64F25EB69547}"/>
+                                            </p:graphicEl>
+                                          </p:spTgt>
+                                        </p:tgtEl>
+                                      </p:cBhvr>
+                                    </p:animEffect>
+                                  </p:childTnLst>
+                                </p:cTn>
+                              </p:par>
+                              <p:par>
+                                <p:cTn id="24" presetID="10" presetClass="entr" presetSubtype="0" fill="hold" grpId="0" nodeType="withEffect">
+                                  <p:stCondLst>
+                                    <p:cond delay="0"/>
+                                  </p:stCondLst>
+                                  <p:childTnLst>
+                                    <p:set>
+                                      <p:cBhvr>
+                                        <p:cTn id="25" dur="1" fill="hold">
+                                          <p:stCondLst>
+                                            <p:cond delay="0"/>
+                                          </p:stCondLst>
+                                        </p:cTn>
+                                        <p:tgtEl>
+                                          <p:spTgt spid="11">
+                                            <p:graphicEl>
+                                              <a:dgm id="{6BD7537A-36A9-42F0-9C36-0D4BA2D0752A}"/>
+                                            </p:graphicEl>
+                                          </p:spTgt>
+                                        </p:tgtEl>
+                                        <p:attrNameLst>
+                                          <p:attrName>style.visibility</p:attrName>
+                                        </p:attrNameLst>
+                                      </p:cBhvr>
+                                      <p:to>
+                                        <p:strVal val="visible"/>
+                                      </p:to>
+                                    </p:set>
+                                    <p:animEffect transition="in" filter="fade">
+                                      <p:cBhvr>
+                                        <p:cTn id="26" dur="500"/>
+                                        <p:tgtEl>
+                                          <p:spTgt spid="11">
+                                            <p:graphicEl>
+                                              <a:dgm id="{6BD7537A-36A9-42F0-9C36-0D4BA2D0752A}"/>
+                                            </p:graphicEl>
+                                          </p:spTgt>
+                                        </p:tgtEl>
+                                      </p:cBhvr>
+                                    </p:animEffect>
+                                  </p:childTnLst>
+                                </p:cTn>
+                              </p:par>
+                            </p:childTnLst>
+                          </p:cTn>
+                        </p:par>
+                      </p:childTnLst>
+                    </p:cTn>
+                  </p:par>
+                  <p:par>
+                    <p:cTn id="27" fill="hold">
+                      <p:stCondLst>
+                        <p:cond delay="indefinite"/>
+                      </p:stCondLst>
+                      <p:childTnLst>
+                        <p:par>
+                          <p:cTn id="28" fill="hold">
+                            <p:stCondLst>
+                              <p:cond delay="0"/>
+                            </p:stCondLst>
+                            <p:childTnLst>
+                              <p:par>
+                                <p:cTn id="29" presetID="10" presetClass="entr" presetSubtype="0" fill="hold" grpId="0" nodeType="clickEffect">
+                                  <p:stCondLst>
+                                    <p:cond delay="0"/>
+                                  </p:stCondLst>
+                                  <p:childTnLst>
+                                    <p:set>
+                                      <p:cBhvr>
+                                        <p:cTn id="30" dur="1" fill="hold">
+                                          <p:stCondLst>
+                                            <p:cond delay="0"/>
+                                          </p:stCondLst>
+                                        </p:cTn>
+                                        <p:tgtEl>
+                                          <p:spTgt spid="11">
+                                            <p:graphicEl>
+                                              <a:dgm id="{76448584-D501-4333-884C-F960C3FAA9BE}"/>
+                                            </p:graphicEl>
+                                          </p:spTgt>
+                                        </p:tgtEl>
+                                        <p:attrNameLst>
+                                          <p:attrName>style.visibility</p:attrName>
+                                        </p:attrNameLst>
+                                      </p:cBhvr>
+                                      <p:to>
+                                        <p:strVal val="visible"/>
+                                      </p:to>
+                                    </p:set>
+                                    <p:animEffect transition="in" filter="fade">
+                                      <p:cBhvr>
+                                        <p:cTn id="31" dur="500"/>
+                                        <p:tgtEl>
+                                          <p:spTgt spid="11">
+                                            <p:graphicEl>
+                                              <a:dgm id="{76448584-D501-4333-884C-F960C3FAA9BE}"/>
+                                            </p:graphicEl>
+                                          </p:spTgt>
+                                        </p:tgtEl>
+                                      </p:cBhvr>
+                                    </p:animEffect>
+                                  </p:childTnLst>
+                                </p:cTn>
+                              </p:par>
+                              <p:par>
+                                <p:cTn id="32" presetID="10" presetClass="entr" presetSubtype="0" fill="hold" grpId="0" nodeType="withEffect">
+                                  <p:stCondLst>
+                                    <p:cond delay="0"/>
+                                  </p:stCondLst>
+                                  <p:childTnLst>
+                                    <p:set>
+                                      <p:cBhvr>
+                                        <p:cTn id="33" dur="1" fill="hold">
+                                          <p:stCondLst>
+                                            <p:cond delay="0"/>
+                                          </p:stCondLst>
+                                        </p:cTn>
+                                        <p:tgtEl>
+                                          <p:spTgt spid="11">
+                                            <p:graphicEl>
+                                              <a:dgm id="{9925560B-C3AD-44BD-A1A3-25292C97D5DC}"/>
+                                            </p:graphicEl>
+                                          </p:spTgt>
+                                        </p:tgtEl>
+                                        <p:attrNameLst>
+                                          <p:attrName>style.visibility</p:attrName>
+                                        </p:attrNameLst>
+                                      </p:cBhvr>
+                                      <p:to>
+                                        <p:strVal val="visible"/>
+                                      </p:to>
+                                    </p:set>
+                                    <p:animEffect transition="in" filter="fade">
+                                      <p:cBhvr>
+                                        <p:cTn id="34" dur="500"/>
+                                        <p:tgtEl>
+                                          <p:spTgt spid="11">
+                                            <p:graphicEl>
+                                              <a:dgm id="{9925560B-C3AD-44BD-A1A3-25292C97D5DC}"/>
+                                            </p:graphicEl>
+                                          </p:spTgt>
+                                        </p:tgtEl>
+                                      </p:cBhvr>
+                                    </p:animEffect>
+                                  </p:childTnLst>
+                                </p:cTn>
+                              </p:par>
+                            </p:childTnLst>
+                          </p:cTn>
+                        </p:par>
+                      </p:childTnLst>
+                    </p:cTn>
+                  </p:par>
+                </p:childTnLst>
+              </p:cTn>
+              <p:prevCondLst>
+                <p:cond evt="onPrev" delay="0">
+                  <p:tgtEl>
+                    <p:sldTgt/>
+                  </p:tgtEl>
+                </p:cond>
+              </p:prevCondLst>
+              <p:nextCondLst>
+                <p:cond evt="onNext" delay="0">
+                  <p:tgtEl>
+                    <p:sldTgt/>
+                  </p:tgtEl>
+                </p:cond>
+              </p:nextCondLst>
+            </p:seq>
+          </p:childTnLst>
+        </p:cTn>
+      </p:par>
+    </p:tnLst>
+    <p:bldLst>
+      <p:bldGraphic spid="11" grpId="0" uiExpand="1">
+        <p:bldSub>
+          <a:bldDgm bld="one"/>
+        </p:bldSub>
+      </p:bldGraphic>
+    </p:bldLst>
+  </p:timing>
+</p:sld>
+</file>
+
+<file path=ppt/slides/slide8.xml><?xml version="1.0" encoding="utf-8"?>
+<p:sld xmlns:a="http://schemas.openxmlformats.org/drawingml/2006/main" xmlns:r="http://schemas.openxmlformats.org/officeDocument/2006/relationships" xmlns:p="http://schemas.openxmlformats.org/presentationml/2006/main">
+  <p:cSld>
+    <p:spTree>
+      <p:nvGrpSpPr>
+        <p:cNvPr id="1" name=""/>
+        <p:cNvGrpSpPr/>
+        <p:nvPr/>
+      </p:nvGrpSpPr>
+      <p:grpSpPr>
+        <a:xfrm>
+          <a:off x="0" y="0"/>
+          <a:ext cx="0" cy="0"/>
+          <a:chOff x="0" y="0"/>
+          <a:chExt cx="0" cy="0"/>
+        </a:xfrm>
+      </p:grpSpPr>
+      <p:sp>
+        <p:nvSpPr>
+          <p:cNvPr id="2" name="Title 1">
+            <a:extLst>
+              <a:ext uri="{FF2B5EF4-FFF2-40B4-BE49-F238E27FC236}">
+                <a16:creationId xmlns:a16="http://schemas.microsoft.com/office/drawing/2014/main" id="{BB4E38FE-D592-6E73-C864-BC346F3D9D8B}"/>
+              </a:ext>
+            </a:extLst>
+          </p:cNvPr>
+          <p:cNvSpPr>
+            <a:spLocks noGrp="1"/>
+          </p:cNvSpPr>
+          <p:nvPr>
+            <p:ph type="title"/>
+          </p:nvPr>
+        </p:nvSpPr>
+        <p:spPr/>
+        <p:txBody>
+          <a:bodyPr/>
+          <a:lstStyle/>
+          <a:p>
+            <a:r>
+              <a:rPr lang="en-US" dirty="0"/>
+              <a:t>Create and execute M code in 3 minutes</a:t>
+            </a:r>
+            <a:endParaRPr lang="en-NL" dirty="0"/>
+          </a:p>
+        </p:txBody>
+      </p:sp>
+      <p:graphicFrame>
+        <p:nvGraphicFramePr>
+          <p:cNvPr id="4" name="Content Placeholder 3">
+            <a:extLst>
+              <a:ext uri="{FF2B5EF4-FFF2-40B4-BE49-F238E27FC236}">
+                <a16:creationId xmlns:a16="http://schemas.microsoft.com/office/drawing/2014/main" id="{0C0FBF0F-89D4-2852-1FC1-C4E591267636}"/>
+              </a:ext>
+            </a:extLst>
+          </p:cNvPr>
+          <p:cNvGraphicFramePr>
+            <a:graphicFrameLocks noGrp="1"/>
+          </p:cNvGraphicFramePr>
+          <p:nvPr>
+            <p:ph idx="1"/>
+            <p:extLst>
+              <p:ext uri="{D42A27DB-BD31-4B8C-83A1-F6EECF244321}">
+                <p14:modId xmlns:p14="http://schemas.microsoft.com/office/powerpoint/2010/main" val="2951595119"/>
+              </p:ext>
+            </p:extLst>
+          </p:nvPr>
+        </p:nvGraphicFramePr>
+        <p:xfrm>
+          <a:off x="1155700" y="2173357"/>
+          <a:ext cx="10015883" cy="4439478"/>
+        </p:xfrm>
+        <a:graphic>
+          <a:graphicData uri="http://schemas.openxmlformats.org/drawingml/2006/diagram">
+            <dgm:relIds xmlns:dgm="http://schemas.openxmlformats.org/drawingml/2006/diagram" xmlns:r="http://schemas.openxmlformats.org/officeDocument/2006/relationships" r:dm="rId2" r:lo="rId3" r:qs="rId4" r:cs="rId5"/>
+          </a:graphicData>
+        </a:graphic>
+      </p:graphicFrame>
+    </p:spTree>
+    <p:extLst>
+      <p:ext uri="{BB962C8B-B14F-4D97-AF65-F5344CB8AC3E}">
+        <p14:creationId xmlns:p14="http://schemas.microsoft.com/office/powerpoint/2010/main" val="1001963546"/>
+      </p:ext>
+    </p:extLst>
+  </p:cSld>
+  <p:clrMapOvr>
+    <a:masterClrMapping/>
+  </p:clrMapOvr>
+  <p:timing>
+    <p:tnLst>
+      <p:par>
+        <p:cTn id="1" dur="indefinite" restart="never" nodeType="tmRoot">
+          <p:childTnLst>
+            <p:seq concurrent="1" nextAc="seek">
+              <p:cTn id="2" dur="indefinite" nodeType="mainSeq">
+                <p:childTnLst>
+                  <p:par>
+                    <p:cTn id="3" fill="hold">
+                      <p:stCondLst>
+                        <p:cond delay="indefinite"/>
+                      </p:stCondLst>
+                      <p:childTnLst>
+                        <p:par>
+                          <p:cTn id="4" fill="hold">
+                            <p:stCondLst>
+                              <p:cond delay="0"/>
+                            </p:stCondLst>
+                            <p:childTnLst>
+                              <p:par>
+                                <p:cTn id="5" presetID="10" presetClass="entr" presetSubtype="0" fill="hold" grpId="0" nodeType="clickEffect">
+                                  <p:stCondLst>
+                                    <p:cond delay="0"/>
+                                  </p:stCondLst>
+                                  <p:childTnLst>
+                                    <p:set>
+                                      <p:cBhvr>
+                                        <p:cTn id="6" dur="1" fill="hold">
+                                          <p:stCondLst>
+                                            <p:cond delay="0"/>
+                                          </p:stCondLst>
+                                        </p:cTn>
+                                        <p:tgtEl>
+                                          <p:spTgt spid="4">
+                                            <p:graphicEl>
+                                              <a:dgm id="{24485D02-5A56-49DF-B637-A9A8AC67D4E6}"/>
+                                            </p:graphicEl>
+                                          </p:spTgt>
+                                        </p:tgtEl>
+                                        <p:attrNameLst>
+                                          <p:attrName>style.visibility</p:attrName>
+                                        </p:attrNameLst>
+                                      </p:cBhvr>
+                                      <p:to>
+                                        <p:strVal val="visible"/>
+                                      </p:to>
+                                    </p:set>
+                                    <p:animEffect transition="in" filter="fade">
+                                      <p:cBhvr>
+                                        <p:cTn id="7" dur="500"/>
+                                        <p:tgtEl>
+                                          <p:spTgt spid="4">
+                                            <p:graphicEl>
+                                              <a:dgm id="{24485D02-5A56-49DF-B637-A9A8AC67D4E6}"/>
+                                            </p:graphicEl>
+                                          </p:spTgt>
+                                        </p:tgtEl>
+                                      </p:cBhvr>
+                                    </p:animEffect>
+                                  </p:childTnLst>
+                                </p:cTn>
+                              </p:par>
+                            </p:childTnLst>
+                          </p:cTn>
+                        </p:par>
+                      </p:childTnLst>
+                    </p:cTn>
+                  </p:par>
+                  <p:par>
+                    <p:cTn id="8" fill="hold">
+                      <p:stCondLst>
+                        <p:cond delay="indefinite"/>
+                      </p:stCondLst>
+                      <p:childTnLst>
+                        <p:par>
+                          <p:cTn id="9" fill="hold">
+                            <p:stCondLst>
+                              <p:cond delay="0"/>
+                            </p:stCondLst>
+                            <p:childTnLst>
+                              <p:par>
+                                <p:cTn id="10" presetID="10" presetClass="entr" presetSubtype="0" fill="hold" grpId="0" nodeType="clickEffect">
+                                  <p:stCondLst>
+                                    <p:cond delay="0"/>
+                                  </p:stCondLst>
+                                  <p:childTnLst>
+                                    <p:set>
+                                      <p:cBhvr>
+                                        <p:cTn id="11" dur="1" fill="hold">
+                                          <p:stCondLst>
+                                            <p:cond delay="0"/>
+                                          </p:stCondLst>
+                                        </p:cTn>
+                                        <p:tgtEl>
+                                          <p:spTgt spid="4">
+                                            <p:graphicEl>
+                                              <a:dgm id="{973DC0CC-8304-4E03-87B5-BD1B67011B8C}"/>
+                                            </p:graphicEl>
+                                          </p:spTgt>
+                                        </p:tgtEl>
+                                        <p:attrNameLst>
+                                          <p:attrName>style.visibility</p:attrName>
+                                        </p:attrNameLst>
+                                      </p:cBhvr>
+                                      <p:to>
+                                        <p:strVal val="visible"/>
+                                      </p:to>
+                                    </p:set>
+                                    <p:animEffect transition="in" filter="fade">
+                                      <p:cBhvr>
+                                        <p:cTn id="12" dur="500"/>
+                                        <p:tgtEl>
+                                          <p:spTgt spid="4">
+                                            <p:graphicEl>
+                                              <a:dgm id="{973DC0CC-8304-4E03-87B5-BD1B67011B8C}"/>
+                                            </p:graphicEl>
+                                          </p:spTgt>
+                                        </p:tgtEl>
+                                      </p:cBhvr>
+                                    </p:animEffect>
+                                  </p:childTnLst>
+                                </p:cTn>
+                              </p:par>
+                            </p:childTnLst>
+                          </p:cTn>
+                        </p:par>
+                      </p:childTnLst>
+                    </p:cTn>
+                  </p:par>
+                  <p:par>
+                    <p:cTn id="13" fill="hold">
+                      <p:stCondLst>
+                        <p:cond delay="indefinite"/>
+                      </p:stCondLst>
+                      <p:childTnLst>
+                        <p:par>
+                          <p:cTn id="14" fill="hold">
+                            <p:stCondLst>
+                              <p:cond delay="0"/>
+                            </p:stCondLst>
+                            <p:childTnLst>
+                              <p:par>
+                                <p:cTn id="15" presetID="10" presetClass="entr" presetSubtype="0" fill="hold" grpId="0" nodeType="clickEffect">
+                                  <p:stCondLst>
+                                    <p:cond delay="0"/>
+                                  </p:stCondLst>
+                                  <p:childTnLst>
+                                    <p:set>
+                                      <p:cBhvr>
+                                        <p:cTn id="16" dur="1" fill="hold">
+                                          <p:stCondLst>
+                                            <p:cond delay="0"/>
+                                          </p:stCondLst>
+                                        </p:cTn>
+                                        <p:tgtEl>
+                                          <p:spTgt spid="4">
+                                            <p:graphicEl>
+                                              <a:dgm id="{88F0906B-9D1E-488A-B4C5-08CAAB191724}"/>
+                                            </p:graphicEl>
+                                          </p:spTgt>
+                                        </p:tgtEl>
+                                        <p:attrNameLst>
+                                          <p:attrName>style.visibility</p:attrName>
+                                        </p:attrNameLst>
+                                      </p:cBhvr>
+                                      <p:to>
+                                        <p:strVal val="visible"/>
+                                      </p:to>
+                                    </p:set>
+                                    <p:animEffect transition="in" filter="fade">
+                                      <p:cBhvr>
+                                        <p:cTn id="17" dur="500"/>
+                                        <p:tgtEl>
+                                          <p:spTgt spid="4">
+                                            <p:graphicEl>
+                                              <a:dgm id="{88F0906B-9D1E-488A-B4C5-08CAAB191724}"/>
+                                            </p:graphicEl>
+                                          </p:spTgt>
+                                        </p:tgtEl>
+                                      </p:cBhvr>
+                                    </p:animEffect>
+                                  </p:childTnLst>
+                                </p:cTn>
+                              </p:par>
+                            </p:childTnLst>
+                          </p:cTn>
+                        </p:par>
+                      </p:childTnLst>
+                    </p:cTn>
+                  </p:par>
+                  <p:par>
+                    <p:cTn id="18" fill="hold">
+                      <p:stCondLst>
+                        <p:cond delay="indefinite"/>
+                      </p:stCondLst>
+                      <p:childTnLst>
+                        <p:par>
+                          <p:cTn id="19" fill="hold">
+                            <p:stCondLst>
+                              <p:cond delay="0"/>
+                            </p:stCondLst>
+                            <p:childTnLst>
+                              <p:par>
+                                <p:cTn id="20" presetID="10" presetClass="entr" presetSubtype="0" fill="hold" grpId="0" nodeType="clickEffect">
+                                  <p:stCondLst>
+                                    <p:cond delay="0"/>
+                                  </p:stCondLst>
+                                  <p:childTnLst>
+                                    <p:set>
+                                      <p:cBhvr>
+                                        <p:cTn id="21" dur="1" fill="hold">
+                                          <p:stCondLst>
+                                            <p:cond delay="0"/>
+                                          </p:stCondLst>
+                                        </p:cTn>
+                                        <p:tgtEl>
+                                          <p:spTgt spid="4">
+                                            <p:graphicEl>
+                                              <a:dgm id="{CF98FD1A-AABC-4833-9CC8-F5ECB925415E}"/>
+                                            </p:graphicEl>
+                                          </p:spTgt>
+                                        </p:tgtEl>
+                                        <p:attrNameLst>
+                                          <p:attrName>style.visibility</p:attrName>
+                                        </p:attrNameLst>
+                                      </p:cBhvr>
+                                      <p:to>
+                                        <p:strVal val="visible"/>
+                                      </p:to>
+                                    </p:set>
+                                    <p:animEffect transition="in" filter="fade">
+                                      <p:cBhvr>
+                                        <p:cTn id="22" dur="500"/>
+                                        <p:tgtEl>
+                                          <p:spTgt spid="4">
+                                            <p:graphicEl>
+                                              <a:dgm id="{CF98FD1A-AABC-4833-9CC8-F5ECB925415E}"/>
+                                            </p:graphicEl>
+                                          </p:spTgt>
+                                        </p:tgtEl>
+                                      </p:cBhvr>
+                                    </p:animEffect>
+                                  </p:childTnLst>
+                                </p:cTn>
+                              </p:par>
+                            </p:childTnLst>
+                          </p:cTn>
+                        </p:par>
+                      </p:childTnLst>
+                    </p:cTn>
+                  </p:par>
+                  <p:par>
+                    <p:cTn id="23" fill="hold">
+                      <p:stCondLst>
+                        <p:cond delay="indefinite"/>
+                      </p:stCondLst>
+                      <p:childTnLst>
+                        <p:par>
+                          <p:cTn id="24" fill="hold">
+                            <p:stCondLst>
+                              <p:cond delay="0"/>
+                            </p:stCondLst>
+                            <p:childTnLst>
+                              <p:par>
+                                <p:cTn id="25" presetID="10" presetClass="entr" presetSubtype="0" fill="hold" grpId="0" nodeType="clickEffect">
+                                  <p:stCondLst>
+                                    <p:cond delay="0"/>
+                                  </p:stCondLst>
+                                  <p:childTnLst>
+                                    <p:set>
+                                      <p:cBhvr>
+                                        <p:cTn id="26" dur="1" fill="hold">
+                                          <p:stCondLst>
+                                            <p:cond delay="0"/>
+                                          </p:stCondLst>
+                                        </p:cTn>
+                                        <p:tgtEl>
+                                          <p:spTgt spid="4">
+                                            <p:graphicEl>
+                                              <a:dgm id="{F9AE15FA-8263-4E7F-B6DC-79DA0B2F7B75}"/>
+                                            </p:graphicEl>
+                                          </p:spTgt>
+                                        </p:tgtEl>
+                                        <p:attrNameLst>
+                                          <p:attrName>style.visibility</p:attrName>
+                                        </p:attrNameLst>
+                                      </p:cBhvr>
+                                      <p:to>
+                                        <p:strVal val="visible"/>
+                                      </p:to>
+                                    </p:set>
+                                    <p:animEffect transition="in" filter="fade">
+                                      <p:cBhvr>
+                                        <p:cTn id="27" dur="500"/>
+                                        <p:tgtEl>
+                                          <p:spTgt spid="4">
+                                            <p:graphicEl>
+                                              <a:dgm id="{F9AE15FA-8263-4E7F-B6DC-79DA0B2F7B75}"/>
+                                            </p:graphicEl>
+                                          </p:spTgt>
+                                        </p:tgtEl>
+                                      </p:cBhvr>
+                                    </p:animEffect>
+                                  </p:childTnLst>
+                                </p:cTn>
+                              </p:par>
+                            </p:childTnLst>
+                          </p:cTn>
+                        </p:par>
+                      </p:childTnLst>
+                    </p:cTn>
+                  </p:par>
+                  <p:par>
+                    <p:cTn id="28" fill="hold">
+                      <p:stCondLst>
+                        <p:cond delay="indefinite"/>
+                      </p:stCondLst>
+                      <p:childTnLst>
+                        <p:par>
+                          <p:cTn id="29" fill="hold">
+                            <p:stCondLst>
+                              <p:cond delay="0"/>
+                            </p:stCondLst>
+                            <p:childTnLst>
+                              <p:par>
+                                <p:cTn id="30" presetID="10" presetClass="entr" presetSubtype="0" fill="hold" grpId="0" nodeType="clickEffect">
+                                  <p:stCondLst>
+                                    <p:cond delay="0"/>
+                                  </p:stCondLst>
+                                  <p:childTnLst>
+                                    <p:set>
+                                      <p:cBhvr>
+                                        <p:cTn id="31" dur="1" fill="hold">
+                                          <p:stCondLst>
+                                            <p:cond delay="0"/>
+                                          </p:stCondLst>
+                                        </p:cTn>
+                                        <p:tgtEl>
+                                          <p:spTgt spid="4">
+                                            <p:graphicEl>
+                                              <a:dgm id="{A1C7FE50-A7A9-4DCF-9D2D-0D9BE2138934}"/>
+                                            </p:graphicEl>
+                                          </p:spTgt>
+                                        </p:tgtEl>
+                                        <p:attrNameLst>
+                                          <p:attrName>style.visibility</p:attrName>
+                                        </p:attrNameLst>
+                                      </p:cBhvr>
+                                      <p:to>
+                                        <p:strVal val="visible"/>
+                                      </p:to>
+                                    </p:set>
+                                    <p:animEffect transition="in" filter="fade">
+                                      <p:cBhvr>
+                                        <p:cTn id="32" dur="500"/>
+                                        <p:tgtEl>
+                                          <p:spTgt spid="4">
+                                            <p:graphicEl>
+                                              <a:dgm id="{A1C7FE50-A7A9-4DCF-9D2D-0D9BE2138934}"/>
+                                            </p:graphicEl>
+                                          </p:spTgt>
+                                        </p:tgtEl>
+                                      </p:cBhvr>
+                                    </p:animEffect>
+                                  </p:childTnLst>
+                                </p:cTn>
+                              </p:par>
+                            </p:childTnLst>
+                          </p:cTn>
+                        </p:par>
+                      </p:childTnLst>
+                    </p:cTn>
+                  </p:par>
+                </p:childTnLst>
+              </p:cTn>
+              <p:prevCondLst>
+                <p:cond evt="onPrev" delay="0">
+                  <p:tgtEl>
+                    <p:sldTgt/>
+                  </p:tgtEl>
+                </p:cond>
+              </p:prevCondLst>
+              <p:nextCondLst>
+                <p:cond evt="onNext" delay="0">
+                  <p:tgtEl>
+                    <p:sldTgt/>
+                  </p:tgtEl>
+                </p:cond>
+              </p:nextCondLst>
+            </p:seq>
+          </p:childTnLst>
+        </p:cTn>
+      </p:par>
+    </p:tnLst>
+    <p:bldLst>
+      <p:bldGraphic spid="4" grpId="0">
+        <p:bldSub>
+          <a:bldDgm bld="one"/>
+        </p:bldSub>
+      </p:bldGraphic>
+    </p:bldLst>
+  </p:timing>
 </p:sld>
 </file>
 
@@ -25635,10 +30660,23 @@
             <p:ph idx="1"/>
           </p:nvPr>
         </p:nvSpPr>
-        <p:spPr/>
+        <p:spPr>
+          <a:xfrm>
+            <a:off x="1154955" y="2603500"/>
+            <a:ext cx="5378368" cy="3416300"/>
+          </a:xfrm>
+        </p:spPr>
         <p:txBody>
-          <a:bodyPr/>
+          <a:bodyPr>
+            <a:normAutofit lnSpcReduction="10000"/>
+          </a:bodyPr>
           <a:lstStyle/>
+          <a:p>
+            <a:r>
+              <a:rPr lang="en-US" dirty="0"/>
+              <a:t>Create a hierarchical tree structure to group your methods and properties</a:t>
+            </a:r>
+          </a:p>
           <a:p>
             <a:r>
               <a:rPr lang="en-US" dirty="0"/>
@@ -25654,24 +30692,51 @@
           <a:p>
             <a:r>
               <a:rPr lang="en-US" dirty="0"/>
-              <a:t>Create a tree structure to group your methods</a:t>
-            </a:r>
-          </a:p>
-          <a:p>
-            <a:r>
-              <a:rPr lang="en-US" dirty="0"/>
               <a:t>Optionally, add M shared variables names to keep process-context in place</a:t>
             </a:r>
           </a:p>
           <a:p>
             <a:r>
               <a:rPr lang="en-US" dirty="0"/>
-              <a:t>Optionally, add read-only value (in several data-types) that will appear as “properties” in the tree structure</a:t>
+              <a:t>Optionally, add read-only values (available in several data-types) that will appear as “properties” in the tree structure</a:t>
             </a:r>
             <a:endParaRPr lang="en-NL" dirty="0"/>
           </a:p>
         </p:txBody>
       </p:sp>
+      <p:pic>
+        <p:nvPicPr>
+          <p:cNvPr id="13" name="Picture 12">
+            <a:extLst>
+              <a:ext uri="{FF2B5EF4-FFF2-40B4-BE49-F238E27FC236}">
+                <a16:creationId xmlns:a16="http://schemas.microsoft.com/office/drawing/2014/main" id="{402560FA-D63D-BFE0-834D-AE07414AE3DD}"/>
+              </a:ext>
+            </a:extLst>
+          </p:cNvPr>
+          <p:cNvPicPr>
+            <a:picLocks noChangeAspect="1"/>
+          </p:cNvPicPr>
+          <p:nvPr/>
+        </p:nvPicPr>
+        <p:blipFill>
+          <a:blip r:embed="rId2"/>
+          <a:stretch>
+            <a:fillRect/>
+          </a:stretch>
+        </p:blipFill>
+        <p:spPr>
+          <a:xfrm>
+            <a:off x="6918641" y="2580795"/>
+            <a:ext cx="4572638" cy="3439005"/>
+          </a:xfrm>
+          <a:prstGeom prst="rect">
+            <a:avLst/>
+          </a:prstGeom>
+          <a:effectLst>
+            <a:softEdge rad="76200"/>
+          </a:effectLst>
+        </p:spPr>
+      </p:pic>
     </p:spTree>
     <p:extLst>
       <p:ext uri="{BB962C8B-B14F-4D97-AF65-F5344CB8AC3E}">
@@ -25682,6 +30747,397 @@
   <p:clrMapOvr>
     <a:masterClrMapping/>
   </p:clrMapOvr>
+  <p:timing>
+    <p:tnLst>
+      <p:par>
+        <p:cTn id="1" dur="indefinite" restart="never" nodeType="tmRoot">
+          <p:childTnLst>
+            <p:seq concurrent="1" nextAc="seek">
+              <p:cTn id="2" dur="indefinite" nodeType="mainSeq">
+                <p:childTnLst>
+                  <p:par>
+                    <p:cTn id="3" fill="hold">
+                      <p:stCondLst>
+                        <p:cond delay="indefinite"/>
+                      </p:stCondLst>
+                      <p:childTnLst>
+                        <p:par>
+                          <p:cTn id="4" fill="hold">
+                            <p:stCondLst>
+                              <p:cond delay="0"/>
+                            </p:stCondLst>
+                            <p:childTnLst>
+                              <p:par>
+                                <p:cTn id="5" presetID="10" presetClass="entr" presetSubtype="0" fill="hold" grpId="0" nodeType="clickEffect">
+                                  <p:stCondLst>
+                                    <p:cond delay="0"/>
+                                  </p:stCondLst>
+                                  <p:childTnLst>
+                                    <p:set>
+                                      <p:cBhvr>
+                                        <p:cTn id="6" dur="1" fill="hold">
+                                          <p:stCondLst>
+                                            <p:cond delay="0"/>
+                                          </p:stCondLst>
+                                        </p:cTn>
+                                        <p:tgtEl>
+                                          <p:spTgt spid="3">
+                                            <p:txEl>
+                                              <p:pRg st="0" end="0"/>
+                                            </p:txEl>
+                                          </p:spTgt>
+                                        </p:tgtEl>
+                                        <p:attrNameLst>
+                                          <p:attrName>style.visibility</p:attrName>
+                                        </p:attrNameLst>
+                                      </p:cBhvr>
+                                      <p:to>
+                                        <p:strVal val="visible"/>
+                                      </p:to>
+                                    </p:set>
+                                    <p:animEffect transition="in" filter="fade">
+                                      <p:cBhvr>
+                                        <p:cTn id="7" dur="500"/>
+                                        <p:tgtEl>
+                                          <p:spTgt spid="3">
+                                            <p:txEl>
+                                              <p:pRg st="0" end="0"/>
+                                            </p:txEl>
+                                          </p:spTgt>
+                                        </p:tgtEl>
+                                      </p:cBhvr>
+                                    </p:animEffect>
+                                  </p:childTnLst>
+                                </p:cTn>
+                              </p:par>
+                            </p:childTnLst>
+                          </p:cTn>
+                        </p:par>
+                      </p:childTnLst>
+                    </p:cTn>
+                  </p:par>
+                  <p:par>
+                    <p:cTn id="8" fill="hold">
+                      <p:stCondLst>
+                        <p:cond delay="indefinite"/>
+                      </p:stCondLst>
+                      <p:childTnLst>
+                        <p:par>
+                          <p:cTn id="9" fill="hold">
+                            <p:stCondLst>
+                              <p:cond delay="0"/>
+                            </p:stCondLst>
+                            <p:childTnLst>
+                              <p:par>
+                                <p:cTn id="10" presetID="10" presetClass="entr" presetSubtype="0" fill="hold" grpId="0" nodeType="clickEffect">
+                                  <p:stCondLst>
+                                    <p:cond delay="0"/>
+                                  </p:stCondLst>
+                                  <p:childTnLst>
+                                    <p:set>
+                                      <p:cBhvr>
+                                        <p:cTn id="11" dur="1" fill="hold">
+                                          <p:stCondLst>
+                                            <p:cond delay="0"/>
+                                          </p:stCondLst>
+                                        </p:cTn>
+                                        <p:tgtEl>
+                                          <p:spTgt spid="3">
+                                            <p:txEl>
+                                              <p:pRg st="1" end="1"/>
+                                            </p:txEl>
+                                          </p:spTgt>
+                                        </p:tgtEl>
+                                        <p:attrNameLst>
+                                          <p:attrName>style.visibility</p:attrName>
+                                        </p:attrNameLst>
+                                      </p:cBhvr>
+                                      <p:to>
+                                        <p:strVal val="visible"/>
+                                      </p:to>
+                                    </p:set>
+                                    <p:animEffect transition="in" filter="fade">
+                                      <p:cBhvr>
+                                        <p:cTn id="12" dur="500"/>
+                                        <p:tgtEl>
+                                          <p:spTgt spid="3">
+                                            <p:txEl>
+                                              <p:pRg st="1" end="1"/>
+                                            </p:txEl>
+                                          </p:spTgt>
+                                        </p:tgtEl>
+                                      </p:cBhvr>
+                                    </p:animEffect>
+                                  </p:childTnLst>
+                                </p:cTn>
+                              </p:par>
+                            </p:childTnLst>
+                          </p:cTn>
+                        </p:par>
+                      </p:childTnLst>
+                    </p:cTn>
+                  </p:par>
+                  <p:par>
+                    <p:cTn id="13" fill="hold">
+                      <p:stCondLst>
+                        <p:cond delay="indefinite"/>
+                      </p:stCondLst>
+                      <p:childTnLst>
+                        <p:par>
+                          <p:cTn id="14" fill="hold">
+                            <p:stCondLst>
+                              <p:cond delay="0"/>
+                            </p:stCondLst>
+                            <p:childTnLst>
+                              <p:par>
+                                <p:cTn id="15" presetID="10" presetClass="entr" presetSubtype="0" fill="hold" grpId="0" nodeType="clickEffect">
+                                  <p:stCondLst>
+                                    <p:cond delay="0"/>
+                                  </p:stCondLst>
+                                  <p:childTnLst>
+                                    <p:set>
+                                      <p:cBhvr>
+                                        <p:cTn id="16" dur="1" fill="hold">
+                                          <p:stCondLst>
+                                            <p:cond delay="0"/>
+                                          </p:stCondLst>
+                                        </p:cTn>
+                                        <p:tgtEl>
+                                          <p:spTgt spid="3">
+                                            <p:txEl>
+                                              <p:pRg st="2" end="2"/>
+                                            </p:txEl>
+                                          </p:spTgt>
+                                        </p:tgtEl>
+                                        <p:attrNameLst>
+                                          <p:attrName>style.visibility</p:attrName>
+                                        </p:attrNameLst>
+                                      </p:cBhvr>
+                                      <p:to>
+                                        <p:strVal val="visible"/>
+                                      </p:to>
+                                    </p:set>
+                                    <p:animEffect transition="in" filter="fade">
+                                      <p:cBhvr>
+                                        <p:cTn id="17" dur="500"/>
+                                        <p:tgtEl>
+                                          <p:spTgt spid="3">
+                                            <p:txEl>
+                                              <p:pRg st="2" end="2"/>
+                                            </p:txEl>
+                                          </p:spTgt>
+                                        </p:tgtEl>
+                                      </p:cBhvr>
+                                    </p:animEffect>
+                                  </p:childTnLst>
+                                </p:cTn>
+                              </p:par>
+                            </p:childTnLst>
+                          </p:cTn>
+                        </p:par>
+                      </p:childTnLst>
+                    </p:cTn>
+                  </p:par>
+                  <p:par>
+                    <p:cTn id="18" fill="hold">
+                      <p:stCondLst>
+                        <p:cond delay="indefinite"/>
+                      </p:stCondLst>
+                      <p:childTnLst>
+                        <p:par>
+                          <p:cTn id="19" fill="hold">
+                            <p:stCondLst>
+                              <p:cond delay="0"/>
+                            </p:stCondLst>
+                            <p:childTnLst>
+                              <p:par>
+                                <p:cTn id="20" presetID="10" presetClass="entr" presetSubtype="0" fill="hold" grpId="0" nodeType="clickEffect">
+                                  <p:stCondLst>
+                                    <p:cond delay="0"/>
+                                  </p:stCondLst>
+                                  <p:childTnLst>
+                                    <p:set>
+                                      <p:cBhvr>
+                                        <p:cTn id="21" dur="1" fill="hold">
+                                          <p:stCondLst>
+                                            <p:cond delay="0"/>
+                                          </p:stCondLst>
+                                        </p:cTn>
+                                        <p:tgtEl>
+                                          <p:spTgt spid="3">
+                                            <p:txEl>
+                                              <p:pRg st="3" end="3"/>
+                                            </p:txEl>
+                                          </p:spTgt>
+                                        </p:tgtEl>
+                                        <p:attrNameLst>
+                                          <p:attrName>style.visibility</p:attrName>
+                                        </p:attrNameLst>
+                                      </p:cBhvr>
+                                      <p:to>
+                                        <p:strVal val="visible"/>
+                                      </p:to>
+                                    </p:set>
+                                    <p:animEffect transition="in" filter="fade">
+                                      <p:cBhvr>
+                                        <p:cTn id="22" dur="500"/>
+                                        <p:tgtEl>
+                                          <p:spTgt spid="3">
+                                            <p:txEl>
+                                              <p:pRg st="3" end="3"/>
+                                            </p:txEl>
+                                          </p:spTgt>
+                                        </p:tgtEl>
+                                      </p:cBhvr>
+                                    </p:animEffect>
+                                  </p:childTnLst>
+                                </p:cTn>
+                              </p:par>
+                            </p:childTnLst>
+                          </p:cTn>
+                        </p:par>
+                      </p:childTnLst>
+                    </p:cTn>
+                  </p:par>
+                  <p:par>
+                    <p:cTn id="23" fill="hold">
+                      <p:stCondLst>
+                        <p:cond delay="indefinite"/>
+                      </p:stCondLst>
+                      <p:childTnLst>
+                        <p:par>
+                          <p:cTn id="24" fill="hold">
+                            <p:stCondLst>
+                              <p:cond delay="0"/>
+                            </p:stCondLst>
+                            <p:childTnLst>
+                              <p:par>
+                                <p:cTn id="25" presetID="10" presetClass="entr" presetSubtype="0" fill="hold" grpId="0" nodeType="clickEffect">
+                                  <p:stCondLst>
+                                    <p:cond delay="0"/>
+                                  </p:stCondLst>
+                                  <p:childTnLst>
+                                    <p:set>
+                                      <p:cBhvr>
+                                        <p:cTn id="26" dur="1" fill="hold">
+                                          <p:stCondLst>
+                                            <p:cond delay="0"/>
+                                          </p:stCondLst>
+                                        </p:cTn>
+                                        <p:tgtEl>
+                                          <p:spTgt spid="3">
+                                            <p:txEl>
+                                              <p:pRg st="4" end="4"/>
+                                            </p:txEl>
+                                          </p:spTgt>
+                                        </p:tgtEl>
+                                        <p:attrNameLst>
+                                          <p:attrName>style.visibility</p:attrName>
+                                        </p:attrNameLst>
+                                      </p:cBhvr>
+                                      <p:to>
+                                        <p:strVal val="visible"/>
+                                      </p:to>
+                                    </p:set>
+                                    <p:animEffect transition="in" filter="fade">
+                                      <p:cBhvr>
+                                        <p:cTn id="27" dur="500"/>
+                                        <p:tgtEl>
+                                          <p:spTgt spid="3">
+                                            <p:txEl>
+                                              <p:pRg st="4" end="4"/>
+                                            </p:txEl>
+                                          </p:spTgt>
+                                        </p:tgtEl>
+                                      </p:cBhvr>
+                                    </p:animEffect>
+                                  </p:childTnLst>
+                                </p:cTn>
+                              </p:par>
+                            </p:childTnLst>
+                          </p:cTn>
+                        </p:par>
+                      </p:childTnLst>
+                    </p:cTn>
+                  </p:par>
+                  <p:par>
+                    <p:cTn id="28" fill="hold">
+                      <p:stCondLst>
+                        <p:cond delay="indefinite"/>
+                      </p:stCondLst>
+                      <p:childTnLst>
+                        <p:par>
+                          <p:cTn id="29" fill="hold">
+                            <p:stCondLst>
+                              <p:cond delay="0"/>
+                            </p:stCondLst>
+                            <p:childTnLst>
+                              <p:par>
+                                <p:cTn id="30" presetID="10" presetClass="entr" presetSubtype="0" fill="hold" nodeType="clickEffect">
+                                  <p:stCondLst>
+                                    <p:cond delay="0"/>
+                                  </p:stCondLst>
+                                  <p:childTnLst>
+                                    <p:set>
+                                      <p:cBhvr>
+                                        <p:cTn id="31" dur="1" fill="hold">
+                                          <p:stCondLst>
+                                            <p:cond delay="0"/>
+                                          </p:stCondLst>
+                                        </p:cTn>
+                                        <p:tgtEl>
+                                          <p:spTgt spid="13"/>
+                                        </p:tgtEl>
+                                        <p:attrNameLst>
+                                          <p:attrName>style.visibility</p:attrName>
+                                        </p:attrNameLst>
+                                      </p:cBhvr>
+                                      <p:to>
+                                        <p:strVal val="visible"/>
+                                      </p:to>
+                                    </p:set>
+                                    <p:animEffect transition="in" filter="fade">
+                                      <p:cBhvr>
+                                        <p:cTn id="32" dur="500"/>
+                                        <p:tgtEl>
+                                          <p:spTgt spid="13"/>
+                                        </p:tgtEl>
+                                      </p:cBhvr>
+                                    </p:animEffect>
+                                  </p:childTnLst>
+                                </p:cTn>
+                              </p:par>
+                            </p:childTnLst>
+                          </p:cTn>
+                        </p:par>
+                      </p:childTnLst>
+                    </p:cTn>
+                  </p:par>
+                </p:childTnLst>
+              </p:cTn>
+              <p:prevCondLst>
+                <p:cond evt="onPrev" delay="0">
+                  <p:tgtEl>
+                    <p:sldTgt/>
+                  </p:tgtEl>
+                </p:cond>
+              </p:prevCondLst>
+              <p:nextCondLst>
+                <p:cond evt="onNext" delay="0">
+                  <p:tgtEl>
+                    <p:sldTgt/>
+                  </p:tgtEl>
+                </p:cond>
+              </p:nextCondLst>
+            </p:seq>
+          </p:childTnLst>
+        </p:cTn>
+      </p:par>
+    </p:tnLst>
+    <p:bldLst>
+      <p:bldP spid="3" grpId="0" build="p"/>
+    </p:bldLst>
+  </p:timing>
 </p:sld>
 </file>
 

--- a/docs/slides/def1.pptx
+++ b/docs/slides/def1.pptx
@@ -10473,7 +10473,7 @@
           <a:p>
             <a:fld id="{3E30469F-474B-44E0-9013-119402DD7996}" type="datetimeFigureOut">
               <a:rPr lang="en-NL" smtClean="0"/>
-              <a:t>04/03/2026</a:t>
+              <a:t>06/03/2026</a:t>
             </a:fld>
             <a:endParaRPr lang="en-NL"/>
           </a:p>
@@ -11568,7 +11568,7 @@
           <a:p>
             <a:fld id="{3E30469F-474B-44E0-9013-119402DD7996}" type="datetimeFigureOut">
               <a:rPr lang="en-NL" smtClean="0"/>
-              <a:t>04/03/2026</a:t>
+              <a:t>06/03/2026</a:t>
             </a:fld>
             <a:endParaRPr lang="en-NL"/>
           </a:p>
@@ -12548,7 +12548,7 @@
           <a:p>
             <a:fld id="{3E30469F-474B-44E0-9013-119402DD7996}" type="datetimeFigureOut">
               <a:rPr lang="en-NL" smtClean="0"/>
-              <a:t>04/03/2026</a:t>
+              <a:t>06/03/2026</a:t>
             </a:fld>
             <a:endParaRPr lang="en-NL"/>
           </a:p>
@@ -13682,7 +13682,7 @@
           <a:p>
             <a:fld id="{3E30469F-474B-44E0-9013-119402DD7996}" type="datetimeFigureOut">
               <a:rPr lang="en-NL" smtClean="0"/>
-              <a:t>04/03/2026</a:t>
+              <a:t>06/03/2026</a:t>
             </a:fld>
             <a:endParaRPr lang="en-NL"/>
           </a:p>
@@ -14715,7 +14715,7 @@
           <a:p>
             <a:fld id="{3E30469F-474B-44E0-9013-119402DD7996}" type="datetimeFigureOut">
               <a:rPr lang="en-NL" smtClean="0"/>
-              <a:t>04/03/2026</a:t>
+              <a:t>06/03/2026</a:t>
             </a:fld>
             <a:endParaRPr lang="en-NL"/>
           </a:p>
@@ -15375,7 +15375,7 @@
           <a:p>
             <a:fld id="{3E30469F-474B-44E0-9013-119402DD7996}" type="datetimeFigureOut">
               <a:rPr lang="en-NL" smtClean="0"/>
-              <a:t>04/03/2026</a:t>
+              <a:t>06/03/2026</a:t>
             </a:fld>
             <a:endParaRPr lang="en-NL"/>
           </a:p>
@@ -16236,7 +16236,7 @@
           <a:p>
             <a:fld id="{3E30469F-474B-44E0-9013-119402DD7996}" type="datetimeFigureOut">
               <a:rPr lang="en-NL" smtClean="0"/>
-              <a:t>04/03/2026</a:t>
+              <a:t>06/03/2026</a:t>
             </a:fld>
             <a:endParaRPr lang="en-NL"/>
           </a:p>
@@ -16426,7 +16426,7 @@
           <a:p>
             <a:fld id="{3E30469F-474B-44E0-9013-119402DD7996}" type="datetimeFigureOut">
               <a:rPr lang="en-NL" smtClean="0"/>
-              <a:t>04/03/2026</a:t>
+              <a:t>06/03/2026</a:t>
             </a:fld>
             <a:endParaRPr lang="en-NL"/>
           </a:p>
@@ -17398,7 +17398,7 @@
           <a:p>
             <a:fld id="{3E30469F-474B-44E0-9013-119402DD7996}" type="datetimeFigureOut">
               <a:rPr lang="en-NL" smtClean="0"/>
-              <a:t>04/03/2026</a:t>
+              <a:t>06/03/2026</a:t>
             </a:fld>
             <a:endParaRPr lang="en-NL"/>
           </a:p>
@@ -17609,7 +17609,7 @@
           <a:p>
             <a:fld id="{3E30469F-474B-44E0-9013-119402DD7996}" type="datetimeFigureOut">
               <a:rPr lang="en-NL" smtClean="0"/>
-              <a:t>04/03/2026</a:t>
+              <a:t>06/03/2026</a:t>
             </a:fld>
             <a:endParaRPr lang="en-NL"/>
           </a:p>
@@ -18643,7 +18643,7 @@
           <a:p>
             <a:fld id="{3E30469F-474B-44E0-9013-119402DD7996}" type="datetimeFigureOut">
               <a:rPr lang="en-NL" smtClean="0"/>
-              <a:t>04/03/2026</a:t>
+              <a:t>06/03/2026</a:t>
             </a:fld>
             <a:endParaRPr lang="en-NL"/>
           </a:p>
@@ -18915,7 +18915,7 @@
           <a:p>
             <a:fld id="{3E30469F-474B-44E0-9013-119402DD7996}" type="datetimeFigureOut">
               <a:rPr lang="en-NL" smtClean="0"/>
-              <a:t>04/03/2026</a:t>
+              <a:t>06/03/2026</a:t>
             </a:fld>
             <a:endParaRPr lang="en-NL"/>
           </a:p>
@@ -19325,7 +19325,7 @@
           <a:p>
             <a:fld id="{3E30469F-474B-44E0-9013-119402DD7996}" type="datetimeFigureOut">
               <a:rPr lang="en-NL" smtClean="0"/>
-              <a:t>04/03/2026</a:t>
+              <a:t>06/03/2026</a:t>
             </a:fld>
             <a:endParaRPr lang="en-NL"/>
           </a:p>
@@ -19452,7 +19452,7 @@
           <a:p>
             <a:fld id="{3E30469F-474B-44E0-9013-119402DD7996}" type="datetimeFigureOut">
               <a:rPr lang="en-NL" smtClean="0"/>
-              <a:t>04/03/2026</a:t>
+              <a:t>06/03/2026</a:t>
             </a:fld>
             <a:endParaRPr lang="en-NL"/>
           </a:p>
@@ -19547,7 +19547,7 @@
           <a:p>
             <a:fld id="{3E30469F-474B-44E0-9013-119402DD7996}" type="datetimeFigureOut">
               <a:rPr lang="en-NL" smtClean="0"/>
-              <a:t>04/03/2026</a:t>
+              <a:t>06/03/2026</a:t>
             </a:fld>
             <a:endParaRPr lang="en-NL"/>
           </a:p>
@@ -20628,7 +20628,7 @@
           <a:p>
             <a:fld id="{3E30469F-474B-44E0-9013-119402DD7996}" type="datetimeFigureOut">
               <a:rPr lang="en-NL" smtClean="0"/>
-              <a:t>04/03/2026</a:t>
+              <a:t>06/03/2026</a:t>
             </a:fld>
             <a:endParaRPr lang="en-NL"/>
           </a:p>
@@ -21736,7 +21736,7 @@
           <a:p>
             <a:fld id="{3E30469F-474B-44E0-9013-119402DD7996}" type="datetimeFigureOut">
               <a:rPr lang="en-NL" smtClean="0"/>
-              <a:t>04/03/2026</a:t>
+              <a:t>06/03/2026</a:t>
             </a:fld>
             <a:endParaRPr lang="en-NL"/>
           </a:p>
@@ -22796,7 +22796,7 @@
           <a:p>
             <a:fld id="{3E30469F-474B-44E0-9013-119402DD7996}" type="datetimeFigureOut">
               <a:rPr lang="en-NL" smtClean="0"/>
-              <a:t>04/03/2026</a:t>
+              <a:t>06/03/2026</a:t>
             </a:fld>
             <a:endParaRPr lang="en-NL"/>
           </a:p>
